--- a/field_oriented_control.pptx
+++ b/field_oriented_control.pptx
@@ -118,20 +118,12 @@
 </p:presentation>
 </file>
 
-<file path=ppt/revisionInfo.xml><?xml version="1.0" encoding="utf-8"?>
-<p1510:revInfo xmlns:a="http://schemas.openxmlformats.org/drawingml/2006/main" xmlns:r="http://schemas.openxmlformats.org/officeDocument/2006/relationships" xmlns:p1510="http://schemas.microsoft.com/office/powerpoint/2015/10/main">
-  <p1510:revLst>
-    <p1510:client id="{E23C0E3B-1BCF-43A5-9BFC-28A61010C6A7}" v="517" dt="2026-09-11T19:42:19.470"/>
-  </p1510:revLst>
-</p1510:revInfo>
-</file>
-
 <file path=ppt/changesInfos/changesInfo1.xml><?xml version="1.0" encoding="utf-8"?>
 <pc:chgInfo xmlns:a="http://schemas.openxmlformats.org/drawingml/2006/main" xmlns:r="http://schemas.openxmlformats.org/officeDocument/2006/relationships" xmlns:ac="http://schemas.microsoft.com/office/drawing/2013/main/command" xmlns:pc="http://schemas.microsoft.com/office/powerpoint/2013/main/command">
   <pc:docChgLst>
     <pc:chgData name="Jonah St. Hilaire" userId="9d0a7af2-d0bd-4748-b50b-5cc37e0fdaa3" providerId="ADAL" clId="{58AAB240-BB3C-43BA-87E9-80C5D70C8BCC}"/>
     <pc:docChg chg="undo redo custSel addSld delSld modSld sldOrd modMainMaster delSection modSection">
-      <pc:chgData name="Jonah St. Hilaire" userId="9d0a7af2-d0bd-4748-b50b-5cc37e0fdaa3" providerId="ADAL" clId="{58AAB240-BB3C-43BA-87E9-80C5D70C8BCC}" dt="2026-09-11T19:45:11.002" v="4479" actId="404"/>
+      <pc:chgData name="Jonah St. Hilaire" userId="9d0a7af2-d0bd-4748-b50b-5cc37e0fdaa3" providerId="ADAL" clId="{58AAB240-BB3C-43BA-87E9-80C5D70C8BCC}" dt="2026-09-14T20:46:04.549" v="4527" actId="1076"/>
       <pc:docMkLst>
         <pc:docMk/>
       </pc:docMkLst>
@@ -605,14 +597,6 @@
             <ac:spMk id="270" creationId="{AE8C5729-64C5-C219-0671-C26A27F96322}"/>
           </ac:spMkLst>
         </pc:spChg>
-        <pc:graphicFrameChg chg="del">
-          <ac:chgData name="Jonah St. Hilaire" userId="9d0a7af2-d0bd-4748-b50b-5cc37e0fdaa3" providerId="ADAL" clId="{58AAB240-BB3C-43BA-87E9-80C5D70C8BCC}" dt="2026-09-11T16:13:40.666" v="1711" actId="478"/>
-          <ac:graphicFrameMkLst>
-            <pc:docMk/>
-            <pc:sldMk cId="2146513051" sldId="256"/>
-            <ac:graphicFrameMk id="283" creationId="{7A3028CF-12C4-813E-248F-E6C662F4D679}"/>
-          </ac:graphicFrameMkLst>
-        </pc:graphicFrameChg>
         <pc:picChg chg="mod">
           <ac:chgData name="Jonah St. Hilaire" userId="9d0a7af2-d0bd-4748-b50b-5cc37e0fdaa3" providerId="ADAL" clId="{58AAB240-BB3C-43BA-87E9-80C5D70C8BCC}" dt="2026-09-11T19:45:00.193" v="4473" actId="1036"/>
           <ac:picMkLst>
@@ -691,46 +675,6 @@
           <pc:docMk/>
           <pc:sldMk cId="4013437199" sldId="259"/>
         </pc:sldMkLst>
-        <pc:spChg chg="del">
-          <ac:chgData name="Jonah St. Hilaire" userId="9d0a7af2-d0bd-4748-b50b-5cc37e0fdaa3" providerId="ADAL" clId="{58AAB240-BB3C-43BA-87E9-80C5D70C8BCC}" dt="2026-09-11T15:26:33.288" v="7" actId="478"/>
-          <ac:spMkLst>
-            <pc:docMk/>
-            <pc:sldMk cId="4013437199" sldId="259"/>
-            <ac:spMk id="8" creationId="{392171F9-D25B-061E-EE80-A36D9EFC419F}"/>
-          </ac:spMkLst>
-        </pc:spChg>
-        <pc:spChg chg="del">
-          <ac:chgData name="Jonah St. Hilaire" userId="9d0a7af2-d0bd-4748-b50b-5cc37e0fdaa3" providerId="ADAL" clId="{58AAB240-BB3C-43BA-87E9-80C5D70C8BCC}" dt="2026-09-11T15:26:33.288" v="7" actId="478"/>
-          <ac:spMkLst>
-            <pc:docMk/>
-            <pc:sldMk cId="4013437199" sldId="259"/>
-            <ac:spMk id="20" creationId="{FE53A8B8-7FE0-E93B-46F8-A84C6183CE30}"/>
-          </ac:spMkLst>
-        </pc:spChg>
-        <pc:spChg chg="add del mod">
-          <ac:chgData name="Jonah St. Hilaire" userId="9d0a7af2-d0bd-4748-b50b-5cc37e0fdaa3" providerId="ADAL" clId="{58AAB240-BB3C-43BA-87E9-80C5D70C8BCC}" dt="2026-09-11T15:35:40.506" v="240" actId="478"/>
-          <ac:spMkLst>
-            <pc:docMk/>
-            <pc:sldMk cId="4013437199" sldId="259"/>
-            <ac:spMk id="25" creationId="{FCC0EDED-50B9-1D28-5681-DFE683DF53D7}"/>
-          </ac:spMkLst>
-        </pc:spChg>
-        <pc:spChg chg="add del mod">
-          <ac:chgData name="Jonah St. Hilaire" userId="9d0a7af2-d0bd-4748-b50b-5cc37e0fdaa3" providerId="ADAL" clId="{58AAB240-BB3C-43BA-87E9-80C5D70C8BCC}" dt="2026-09-11T15:35:43.852" v="242" actId="478"/>
-          <ac:spMkLst>
-            <pc:docMk/>
-            <pc:sldMk cId="4013437199" sldId="259"/>
-            <ac:spMk id="27" creationId="{DD0080C0-E138-5366-EDD7-721C186985C8}"/>
-          </ac:spMkLst>
-        </pc:spChg>
-        <pc:spChg chg="add del mod">
-          <ac:chgData name="Jonah St. Hilaire" userId="9d0a7af2-d0bd-4748-b50b-5cc37e0fdaa3" providerId="ADAL" clId="{58AAB240-BB3C-43BA-87E9-80C5D70C8BCC}" dt="2026-09-11T15:41:06.693" v="445" actId="478"/>
-          <ac:spMkLst>
-            <pc:docMk/>
-            <pc:sldMk cId="4013437199" sldId="259"/>
-            <ac:spMk id="35" creationId="{136F3556-1D16-4256-901E-AAB98C96BB9F}"/>
-          </ac:spMkLst>
-        </pc:spChg>
         <pc:spChg chg="add mod">
           <ac:chgData name="Jonah St. Hilaire" userId="9d0a7af2-d0bd-4748-b50b-5cc37e0fdaa3" providerId="ADAL" clId="{58AAB240-BB3C-43BA-87E9-80C5D70C8BCC}" dt="2026-09-11T16:25:59.527" v="2119" actId="1076"/>
           <ac:spMkLst>
@@ -747,52 +691,12 @@
             <ac:spMk id="43" creationId="{AAF86192-1376-3122-D320-15E60E4ECE7C}"/>
           </ac:spMkLst>
         </pc:spChg>
-        <pc:spChg chg="del">
-          <ac:chgData name="Jonah St. Hilaire" userId="9d0a7af2-d0bd-4748-b50b-5cc37e0fdaa3" providerId="ADAL" clId="{58AAB240-BB3C-43BA-87E9-80C5D70C8BCC}" dt="2026-09-11T15:26:33.288" v="7" actId="478"/>
-          <ac:spMkLst>
-            <pc:docMk/>
-            <pc:sldMk cId="4013437199" sldId="259"/>
-            <ac:spMk id="45" creationId="{5BEE1875-2DF1-330D-4C5B-9DF1A104903F}"/>
-          </ac:spMkLst>
-        </pc:spChg>
         <pc:spChg chg="add mod">
           <ac:chgData name="Jonah St. Hilaire" userId="9d0a7af2-d0bd-4748-b50b-5cc37e0fdaa3" providerId="ADAL" clId="{58AAB240-BB3C-43BA-87E9-80C5D70C8BCC}" dt="2026-09-11T16:25:59.527" v="2119" actId="1076"/>
           <ac:spMkLst>
             <pc:docMk/>
             <pc:sldMk cId="4013437199" sldId="259"/>
             <ac:spMk id="46" creationId="{E454A58B-0963-FEBB-9B6E-1B0FE40E3E24}"/>
-          </ac:spMkLst>
-        </pc:spChg>
-        <pc:spChg chg="add del mod">
-          <ac:chgData name="Jonah St. Hilaire" userId="9d0a7af2-d0bd-4748-b50b-5cc37e0fdaa3" providerId="ADAL" clId="{58AAB240-BB3C-43BA-87E9-80C5D70C8BCC}" dt="2026-09-11T15:35:39.869" v="239" actId="478"/>
-          <ac:spMkLst>
-            <pc:docMk/>
-            <pc:sldMk cId="4013437199" sldId="259"/>
-            <ac:spMk id="47" creationId="{87C3893B-0ECE-F6D4-DDED-2C3439F83482}"/>
-          </ac:spMkLst>
-        </pc:spChg>
-        <pc:spChg chg="add del mod">
-          <ac:chgData name="Jonah St. Hilaire" userId="9d0a7af2-d0bd-4748-b50b-5cc37e0fdaa3" providerId="ADAL" clId="{58AAB240-BB3C-43BA-87E9-80C5D70C8BCC}" dt="2026-09-11T15:35:43.196" v="241" actId="478"/>
-          <ac:spMkLst>
-            <pc:docMk/>
-            <pc:sldMk cId="4013437199" sldId="259"/>
-            <ac:spMk id="48" creationId="{F035922F-09FA-F928-717D-F8DE3382FC9D}"/>
-          </ac:spMkLst>
-        </pc:spChg>
-        <pc:spChg chg="add del mod">
-          <ac:chgData name="Jonah St. Hilaire" userId="9d0a7af2-d0bd-4748-b50b-5cc37e0fdaa3" providerId="ADAL" clId="{58AAB240-BB3C-43BA-87E9-80C5D70C8BCC}" dt="2026-09-11T15:35:45.732" v="243" actId="478"/>
-          <ac:spMkLst>
-            <pc:docMk/>
-            <pc:sldMk cId="4013437199" sldId="259"/>
-            <ac:spMk id="49" creationId="{35E82DED-F626-5B04-15AF-CADEAFEE5307}"/>
-          </ac:spMkLst>
-        </pc:spChg>
-        <pc:spChg chg="add del mod">
-          <ac:chgData name="Jonah St. Hilaire" userId="9d0a7af2-d0bd-4748-b50b-5cc37e0fdaa3" providerId="ADAL" clId="{58AAB240-BB3C-43BA-87E9-80C5D70C8BCC}" dt="2026-09-11T15:36:39.917" v="308" actId="478"/>
-          <ac:spMkLst>
-            <pc:docMk/>
-            <pc:sldMk cId="4013437199" sldId="259"/>
-            <ac:spMk id="50" creationId="{136279EE-D24B-3A92-FE8C-536F5E35257B}"/>
           </ac:spMkLst>
         </pc:spChg>
         <pc:spChg chg="add mod">
@@ -817,22 +721,6 @@
             <pc:docMk/>
             <pc:sldMk cId="4013437199" sldId="259"/>
             <ac:spMk id="93" creationId="{C25A4875-337C-9D55-E1E8-D8CA226D85BF}"/>
-          </ac:spMkLst>
-        </pc:spChg>
-        <pc:spChg chg="del">
-          <ac:chgData name="Jonah St. Hilaire" userId="9d0a7af2-d0bd-4748-b50b-5cc37e0fdaa3" providerId="ADAL" clId="{58AAB240-BB3C-43BA-87E9-80C5D70C8BCC}" dt="2026-09-11T15:26:33.288" v="7" actId="478"/>
-          <ac:spMkLst>
-            <pc:docMk/>
-            <pc:sldMk cId="4013437199" sldId="259"/>
-            <ac:spMk id="95" creationId="{7B9C3C15-6823-1916-15A1-0435B48F3D9C}"/>
-          </ac:spMkLst>
-        </pc:spChg>
-        <pc:spChg chg="del">
-          <ac:chgData name="Jonah St. Hilaire" userId="9d0a7af2-d0bd-4748-b50b-5cc37e0fdaa3" providerId="ADAL" clId="{58AAB240-BB3C-43BA-87E9-80C5D70C8BCC}" dt="2026-09-11T15:26:33.288" v="7" actId="478"/>
-          <ac:spMkLst>
-            <pc:docMk/>
-            <pc:sldMk cId="4013437199" sldId="259"/>
-            <ac:spMk id="96" creationId="{A2D44BDB-FC8F-730E-42C5-0D10E872F149}"/>
           </ac:spMkLst>
         </pc:spChg>
         <pc:spChg chg="add mod">
@@ -875,14 +763,6 @@
             <ac:spMk id="124" creationId="{92B84DD4-A345-CA00-F3C3-203BC843F5CF}"/>
           </ac:spMkLst>
         </pc:spChg>
-        <pc:spChg chg="del">
-          <ac:chgData name="Jonah St. Hilaire" userId="9d0a7af2-d0bd-4748-b50b-5cc37e0fdaa3" providerId="ADAL" clId="{58AAB240-BB3C-43BA-87E9-80C5D70C8BCC}" dt="2026-09-11T15:26:33.288" v="7" actId="478"/>
-          <ac:spMkLst>
-            <pc:docMk/>
-            <pc:sldMk cId="4013437199" sldId="259"/>
-            <ac:spMk id="130" creationId="{493EAE20-757F-4CB0-9954-2878F5B18E18}"/>
-          </ac:spMkLst>
-        </pc:spChg>
         <pc:spChg chg="add mod">
           <ac:chgData name="Jonah St. Hilaire" userId="9d0a7af2-d0bd-4748-b50b-5cc37e0fdaa3" providerId="ADAL" clId="{58AAB240-BB3C-43BA-87E9-80C5D70C8BCC}" dt="2026-09-11T16:54:47.818" v="2847" actId="1076"/>
           <ac:spMkLst>
@@ -921,14 +801,6 @@
             <pc:docMk/>
             <pc:sldMk cId="4013437199" sldId="259"/>
             <ac:spMk id="148" creationId="{0568A850-6A05-E206-3D62-A92F74A2A87D}"/>
-          </ac:spMkLst>
-        </pc:spChg>
-        <pc:spChg chg="add del mod">
-          <ac:chgData name="Jonah St. Hilaire" userId="9d0a7af2-d0bd-4748-b50b-5cc37e0fdaa3" providerId="ADAL" clId="{58AAB240-BB3C-43BA-87E9-80C5D70C8BCC}" dt="2026-09-11T15:56:00.995" v="840" actId="478"/>
-          <ac:spMkLst>
-            <pc:docMk/>
-            <pc:sldMk cId="4013437199" sldId="259"/>
-            <ac:spMk id="149" creationId="{428501A5-4E70-7028-3803-390229A50887}"/>
           </ac:spMkLst>
         </pc:spChg>
         <pc:spChg chg="add mod">
@@ -971,62 +843,6 @@
             <ac:spMk id="160" creationId="{11F31673-E70A-63CE-EDAA-4278710AAACB}"/>
           </ac:spMkLst>
         </pc:spChg>
-        <pc:spChg chg="del">
-          <ac:chgData name="Jonah St. Hilaire" userId="9d0a7af2-d0bd-4748-b50b-5cc37e0fdaa3" providerId="ADAL" clId="{58AAB240-BB3C-43BA-87E9-80C5D70C8BCC}" dt="2026-09-11T15:26:33.288" v="7" actId="478"/>
-          <ac:spMkLst>
-            <pc:docMk/>
-            <pc:sldMk cId="4013437199" sldId="259"/>
-            <ac:spMk id="169" creationId="{63855628-A8AC-6BDA-9A22-758F6255DB90}"/>
-          </ac:spMkLst>
-        </pc:spChg>
-        <pc:spChg chg="add del mod">
-          <ac:chgData name="Jonah St. Hilaire" userId="9d0a7af2-d0bd-4748-b50b-5cc37e0fdaa3" providerId="ADAL" clId="{58AAB240-BB3C-43BA-87E9-80C5D70C8BCC}" dt="2026-09-11T16:13:06.778" v="1710" actId="478"/>
-          <ac:spMkLst>
-            <pc:docMk/>
-            <pc:sldMk cId="4013437199" sldId="259"/>
-            <ac:spMk id="170" creationId="{9E08039F-3BDC-F735-5FAA-39B87C95AC39}"/>
-          </ac:spMkLst>
-        </pc:spChg>
-        <pc:spChg chg="add del mod">
-          <ac:chgData name="Jonah St. Hilaire" userId="9d0a7af2-d0bd-4748-b50b-5cc37e0fdaa3" providerId="ADAL" clId="{58AAB240-BB3C-43BA-87E9-80C5D70C8BCC}" dt="2026-09-11T16:13:06.778" v="1710" actId="478"/>
-          <ac:spMkLst>
-            <pc:docMk/>
-            <pc:sldMk cId="4013437199" sldId="259"/>
-            <ac:spMk id="172" creationId="{F6083B35-A9C2-F646-6422-9C3EA44DD037}"/>
-          </ac:spMkLst>
-        </pc:spChg>
-        <pc:spChg chg="del mod">
-          <ac:chgData name="Jonah St. Hilaire" userId="9d0a7af2-d0bd-4748-b50b-5cc37e0fdaa3" providerId="ADAL" clId="{58AAB240-BB3C-43BA-87E9-80C5D70C8BCC}" dt="2026-09-11T16:13:06.778" v="1710" actId="478"/>
-          <ac:spMkLst>
-            <pc:docMk/>
-            <pc:sldMk cId="4013437199" sldId="259"/>
-            <ac:spMk id="173" creationId="{8CA2CC4D-0CE4-51DD-5B48-24ECC28E028C}"/>
-          </ac:spMkLst>
-        </pc:spChg>
-        <pc:spChg chg="del">
-          <ac:chgData name="Jonah St. Hilaire" userId="9d0a7af2-d0bd-4748-b50b-5cc37e0fdaa3" providerId="ADAL" clId="{58AAB240-BB3C-43BA-87E9-80C5D70C8BCC}" dt="2026-09-11T15:26:33.288" v="7" actId="478"/>
-          <ac:spMkLst>
-            <pc:docMk/>
-            <pc:sldMk cId="4013437199" sldId="259"/>
-            <ac:spMk id="182" creationId="{0215A7D5-0D80-24AF-6EA1-DE4B7C117E39}"/>
-          </ac:spMkLst>
-        </pc:spChg>
-        <pc:spChg chg="add del">
-          <ac:chgData name="Jonah St. Hilaire" userId="9d0a7af2-d0bd-4748-b50b-5cc37e0fdaa3" providerId="ADAL" clId="{58AAB240-BB3C-43BA-87E9-80C5D70C8BCC}" dt="2026-09-11T15:52:57.116" v="755" actId="22"/>
-          <ac:spMkLst>
-            <pc:docMk/>
-            <pc:sldMk cId="4013437199" sldId="259"/>
-            <ac:spMk id="190" creationId="{51B4F720-1128-F6F7-CCAC-213C0CE596C6}"/>
-          </ac:spMkLst>
-        </pc:spChg>
-        <pc:spChg chg="add del">
-          <ac:chgData name="Jonah St. Hilaire" userId="9d0a7af2-d0bd-4748-b50b-5cc37e0fdaa3" providerId="ADAL" clId="{58AAB240-BB3C-43BA-87E9-80C5D70C8BCC}" dt="2026-09-11T15:52:57.116" v="755" actId="22"/>
-          <ac:spMkLst>
-            <pc:docMk/>
-            <pc:sldMk cId="4013437199" sldId="259"/>
-            <ac:spMk id="192" creationId="{8B485861-FA90-6DA9-8B53-7842A4E18235}"/>
-          </ac:spMkLst>
-        </pc:spChg>
         <pc:spChg chg="add mod">
           <ac:chgData name="Jonah St. Hilaire" userId="9d0a7af2-d0bd-4748-b50b-5cc37e0fdaa3" providerId="ADAL" clId="{58AAB240-BB3C-43BA-87E9-80C5D70C8BCC}" dt="2026-09-11T16:54:47.818" v="2847" actId="1076"/>
           <ac:spMkLst>
@@ -1041,22 +857,6 @@
             <pc:docMk/>
             <pc:sldMk cId="4013437199" sldId="259"/>
             <ac:spMk id="204" creationId="{D3095F58-6864-3648-EB89-B33BF91E4483}"/>
-          </ac:spMkLst>
-        </pc:spChg>
-        <pc:spChg chg="del">
-          <ac:chgData name="Jonah St. Hilaire" userId="9d0a7af2-d0bd-4748-b50b-5cc37e0fdaa3" providerId="ADAL" clId="{58AAB240-BB3C-43BA-87E9-80C5D70C8BCC}" dt="2026-09-11T15:26:33.288" v="7" actId="478"/>
-          <ac:spMkLst>
-            <pc:docMk/>
-            <pc:sldMk cId="4013437199" sldId="259"/>
-            <ac:spMk id="214" creationId="{EABA360E-69A6-105A-2BD8-7D4AE25438C6}"/>
-          </ac:spMkLst>
-        </pc:spChg>
-        <pc:spChg chg="del">
-          <ac:chgData name="Jonah St. Hilaire" userId="9d0a7af2-d0bd-4748-b50b-5cc37e0fdaa3" providerId="ADAL" clId="{58AAB240-BB3C-43BA-87E9-80C5D70C8BCC}" dt="2026-09-11T15:26:33.288" v="7" actId="478"/>
-          <ac:spMkLst>
-            <pc:docMk/>
-            <pc:sldMk cId="4013437199" sldId="259"/>
-            <ac:spMk id="233" creationId="{11247B14-9B26-3B1E-C8B4-D9EBE201ACF5}"/>
           </ac:spMkLst>
         </pc:spChg>
         <pc:spChg chg="add mod">
@@ -1107,14 +907,6 @@
             <ac:spMk id="256" creationId="{0B6E3657-C2A5-8D41-F53A-8C8DE72CAA22}"/>
           </ac:spMkLst>
         </pc:spChg>
-        <pc:spChg chg="del mod">
-          <ac:chgData name="Jonah St. Hilaire" userId="9d0a7af2-d0bd-4748-b50b-5cc37e0fdaa3" providerId="ADAL" clId="{58AAB240-BB3C-43BA-87E9-80C5D70C8BCC}" dt="2026-09-11T15:55:04.620" v="830" actId="478"/>
-          <ac:spMkLst>
-            <pc:docMk/>
-            <pc:sldMk cId="4013437199" sldId="259"/>
-            <ac:spMk id="257" creationId="{1E5C9169-6319-ECAB-39A2-63425A594BE2}"/>
-          </ac:spMkLst>
-        </pc:spChg>
         <pc:spChg chg="add mod">
           <ac:chgData name="Jonah St. Hilaire" userId="9d0a7af2-d0bd-4748-b50b-5cc37e0fdaa3" providerId="ADAL" clId="{58AAB240-BB3C-43BA-87E9-80C5D70C8BCC}" dt="2026-09-11T16:54:47.818" v="2847" actId="1076"/>
           <ac:spMkLst>
@@ -1163,14 +955,6 @@
             <ac:spMk id="270" creationId="{620CC4E5-7903-4851-402D-C5DDDE967B68}"/>
           </ac:spMkLst>
         </pc:spChg>
-        <pc:spChg chg="add del mod">
-          <ac:chgData name="Jonah St. Hilaire" userId="9d0a7af2-d0bd-4748-b50b-5cc37e0fdaa3" providerId="ADAL" clId="{58AAB240-BB3C-43BA-87E9-80C5D70C8BCC}" dt="2026-09-11T16:24:53.807" v="2050"/>
-          <ac:spMkLst>
-            <pc:docMk/>
-            <pc:sldMk cId="4013437199" sldId="259"/>
-            <ac:spMk id="274" creationId="{E7B24F06-2696-9E80-4D8B-544E7109656D}"/>
-          </ac:spMkLst>
-        </pc:spChg>
         <pc:spChg chg="add mod">
           <ac:chgData name="Jonah St. Hilaire" userId="9d0a7af2-d0bd-4748-b50b-5cc37e0fdaa3" providerId="ADAL" clId="{58AAB240-BB3C-43BA-87E9-80C5D70C8BCC}" dt="2026-09-11T16:35:05.924" v="2258" actId="1038"/>
           <ac:spMkLst>
@@ -1193,14 +977,6 @@
             <pc:docMk/>
             <pc:sldMk cId="4013437199" sldId="259"/>
             <ac:spMk id="278" creationId="{958DF313-46EB-F353-33A9-673A1D0C7711}"/>
-          </ac:spMkLst>
-        </pc:spChg>
-        <pc:spChg chg="add del mod">
-          <ac:chgData name="Jonah St. Hilaire" userId="9d0a7af2-d0bd-4748-b50b-5cc37e0fdaa3" providerId="ADAL" clId="{58AAB240-BB3C-43BA-87E9-80C5D70C8BCC}" dt="2026-09-11T16:32:41.613" v="2208" actId="478"/>
-          <ac:spMkLst>
-            <pc:docMk/>
-            <pc:sldMk cId="4013437199" sldId="259"/>
-            <ac:spMk id="280" creationId="{562681C6-1B7A-6AF6-ECBC-BB35C1E29E48}"/>
           </ac:spMkLst>
         </pc:spChg>
         <pc:spChg chg="add mod">
@@ -1235,36 +1011,12 @@
             <ac:spMk id="319" creationId="{CD607615-31EA-5DFE-7B71-ED5B4D847E5A}"/>
           </ac:spMkLst>
         </pc:spChg>
-        <pc:spChg chg="add del mod">
-          <ac:chgData name="Jonah St. Hilaire" userId="9d0a7af2-d0bd-4748-b50b-5cc37e0fdaa3" providerId="ADAL" clId="{58AAB240-BB3C-43BA-87E9-80C5D70C8BCC}" dt="2026-09-11T16:44:20.286" v="2577" actId="478"/>
-          <ac:spMkLst>
-            <pc:docMk/>
-            <pc:sldMk cId="4013437199" sldId="259"/>
-            <ac:spMk id="326" creationId="{126142D3-7109-3872-B75F-39458CEB00C0}"/>
-          </ac:spMkLst>
-        </pc:spChg>
         <pc:spChg chg="add mod">
           <ac:chgData name="Jonah St. Hilaire" userId="9d0a7af2-d0bd-4748-b50b-5cc37e0fdaa3" providerId="ADAL" clId="{58AAB240-BB3C-43BA-87E9-80C5D70C8BCC}" dt="2026-09-11T16:54:47.818" v="2847" actId="1076"/>
           <ac:spMkLst>
             <pc:docMk/>
             <pc:sldMk cId="4013437199" sldId="259"/>
             <ac:spMk id="328" creationId="{DC250596-BBB9-7116-8CE0-9F446265F068}"/>
-          </ac:spMkLst>
-        </pc:spChg>
-        <pc:spChg chg="add del mod">
-          <ac:chgData name="Jonah St. Hilaire" userId="9d0a7af2-d0bd-4748-b50b-5cc37e0fdaa3" providerId="ADAL" clId="{58AAB240-BB3C-43BA-87E9-80C5D70C8BCC}" dt="2026-09-11T16:43:36.547" v="2534" actId="478"/>
-          <ac:spMkLst>
-            <pc:docMk/>
-            <pc:sldMk cId="4013437199" sldId="259"/>
-            <ac:spMk id="338" creationId="{1DB371E5-7F6B-9825-95B8-229D2BBC48DC}"/>
-          </ac:spMkLst>
-        </pc:spChg>
-        <pc:spChg chg="add del mod">
-          <ac:chgData name="Jonah St. Hilaire" userId="9d0a7af2-d0bd-4748-b50b-5cc37e0fdaa3" providerId="ADAL" clId="{58AAB240-BB3C-43BA-87E9-80C5D70C8BCC}" dt="2026-09-11T16:43:35.349" v="2533" actId="478"/>
-          <ac:spMkLst>
-            <pc:docMk/>
-            <pc:sldMk cId="4013437199" sldId="259"/>
-            <ac:spMk id="340" creationId="{63FA2A45-3A8E-C2C8-372B-EB27A48AAED7}"/>
           </ac:spMkLst>
         </pc:spChg>
         <pc:spChg chg="add mod">
@@ -1289,14 +1041,6 @@
             <pc:docMk/>
             <pc:sldMk cId="4013437199" sldId="259"/>
             <ac:spMk id="346" creationId="{01FDB514-40DF-64A5-E36B-9269D24F9187}"/>
-          </ac:spMkLst>
-        </pc:spChg>
-        <pc:spChg chg="add del">
-          <ac:chgData name="Jonah St. Hilaire" userId="9d0a7af2-d0bd-4748-b50b-5cc37e0fdaa3" providerId="ADAL" clId="{58AAB240-BB3C-43BA-87E9-80C5D70C8BCC}" dt="2026-09-11T16:45:24.814" v="2596" actId="478"/>
-          <ac:spMkLst>
-            <pc:docMk/>
-            <pc:sldMk cId="4013437199" sldId="259"/>
-            <ac:spMk id="348" creationId="{F1196012-1707-7A16-069F-F2148D0476B7}"/>
           </ac:spMkLst>
         </pc:spChg>
         <pc:spChg chg="add mod">
@@ -1337,14 +1081,6 @@
             <pc:docMk/>
             <pc:sldMk cId="4013437199" sldId="259"/>
             <ac:spMk id="367" creationId="{B42E11D8-BE5D-D029-0DA0-F687D8DC2D66}"/>
-          </ac:spMkLst>
-        </pc:spChg>
-        <pc:spChg chg="add del mod">
-          <ac:chgData name="Jonah St. Hilaire" userId="9d0a7af2-d0bd-4748-b50b-5cc37e0fdaa3" providerId="ADAL" clId="{58AAB240-BB3C-43BA-87E9-80C5D70C8BCC}" dt="2026-09-11T16:54:06.205" v="2846" actId="478"/>
-          <ac:spMkLst>
-            <pc:docMk/>
-            <pc:sldMk cId="4013437199" sldId="259"/>
-            <ac:spMk id="373" creationId="{694AB6C3-CD01-6005-CFBA-023931A75857}"/>
           </ac:spMkLst>
         </pc:spChg>
         <pc:grpChg chg="add mod">
@@ -1403,126 +1139,6 @@
             <ac:cxnSpMk id="146" creationId="{474D9FFA-C55A-6405-0287-B95D5326256C}"/>
           </ac:cxnSpMkLst>
         </pc:cxnChg>
-        <pc:cxnChg chg="add del mod">
-          <ac:chgData name="Jonah St. Hilaire" userId="9d0a7af2-d0bd-4748-b50b-5cc37e0fdaa3" providerId="ADAL" clId="{58AAB240-BB3C-43BA-87E9-80C5D70C8BCC}" dt="2026-09-11T16:00:32.509" v="1268" actId="478"/>
-          <ac:cxnSpMkLst>
-            <pc:docMk/>
-            <pc:sldMk cId="4013437199" sldId="259"/>
-            <ac:cxnSpMk id="150" creationId="{B91E14AC-3074-B09E-21BA-D64429BA1A37}"/>
-          </ac:cxnSpMkLst>
-        </pc:cxnChg>
-        <pc:cxnChg chg="add del mod">
-          <ac:chgData name="Jonah St. Hilaire" userId="9d0a7af2-d0bd-4748-b50b-5cc37e0fdaa3" providerId="ADAL" clId="{58AAB240-BB3C-43BA-87E9-80C5D70C8BCC}" dt="2026-09-11T16:00:33.311" v="1269" actId="478"/>
-          <ac:cxnSpMkLst>
-            <pc:docMk/>
-            <pc:sldMk cId="4013437199" sldId="259"/>
-            <ac:cxnSpMk id="151" creationId="{1ABA433B-CD47-421A-43F9-4DD1CDD5C6D7}"/>
-          </ac:cxnSpMkLst>
-        </pc:cxnChg>
-        <pc:cxnChg chg="del">
-          <ac:chgData name="Jonah St. Hilaire" userId="9d0a7af2-d0bd-4748-b50b-5cc37e0fdaa3" providerId="ADAL" clId="{58AAB240-BB3C-43BA-87E9-80C5D70C8BCC}" dt="2026-09-11T15:53:28.236" v="800" actId="478"/>
-          <ac:cxnSpMkLst>
-            <pc:docMk/>
-            <pc:sldMk cId="4013437199" sldId="259"/>
-            <ac:cxnSpMk id="152" creationId="{BD69F56C-663D-6823-C7A0-DCF656D417AF}"/>
-          </ac:cxnSpMkLst>
-        </pc:cxnChg>
-        <pc:cxnChg chg="del">
-          <ac:chgData name="Jonah St. Hilaire" userId="9d0a7af2-d0bd-4748-b50b-5cc37e0fdaa3" providerId="ADAL" clId="{58AAB240-BB3C-43BA-87E9-80C5D70C8BCC}" dt="2026-09-11T15:53:29.045" v="801" actId="478"/>
-          <ac:cxnSpMkLst>
-            <pc:docMk/>
-            <pc:sldMk cId="4013437199" sldId="259"/>
-            <ac:cxnSpMk id="153" creationId="{C2329312-0E6D-D10D-668D-7E74EBF8A2F8}"/>
-          </ac:cxnSpMkLst>
-        </pc:cxnChg>
-        <pc:cxnChg chg="del mod">
-          <ac:chgData name="Jonah St. Hilaire" userId="9d0a7af2-d0bd-4748-b50b-5cc37e0fdaa3" providerId="ADAL" clId="{58AAB240-BB3C-43BA-87E9-80C5D70C8BCC}" dt="2026-09-11T15:56:39.393" v="847" actId="478"/>
-          <ac:cxnSpMkLst>
-            <pc:docMk/>
-            <pc:sldMk cId="4013437199" sldId="259"/>
-            <ac:cxnSpMk id="157" creationId="{84616E7B-F423-EF5F-02A6-F2D25F9A0078}"/>
-          </ac:cxnSpMkLst>
-        </pc:cxnChg>
-        <pc:cxnChg chg="del mod">
-          <ac:chgData name="Jonah St. Hilaire" userId="9d0a7af2-d0bd-4748-b50b-5cc37e0fdaa3" providerId="ADAL" clId="{58AAB240-BB3C-43BA-87E9-80C5D70C8BCC}" dt="2026-09-11T15:56:39.882" v="848" actId="478"/>
-          <ac:cxnSpMkLst>
-            <pc:docMk/>
-            <pc:sldMk cId="4013437199" sldId="259"/>
-            <ac:cxnSpMk id="158" creationId="{4EE3F3D3-B9AD-0404-4607-464D05CB93FC}"/>
-          </ac:cxnSpMkLst>
-        </pc:cxnChg>
-        <pc:cxnChg chg="del mod">
-          <ac:chgData name="Jonah St. Hilaire" userId="9d0a7af2-d0bd-4748-b50b-5cc37e0fdaa3" providerId="ADAL" clId="{58AAB240-BB3C-43BA-87E9-80C5D70C8BCC}" dt="2026-09-11T16:13:06.778" v="1710" actId="478"/>
-          <ac:cxnSpMkLst>
-            <pc:docMk/>
-            <pc:sldMk cId="4013437199" sldId="259"/>
-            <ac:cxnSpMk id="161" creationId="{2295C79E-D14D-6FBA-58D0-218FF00BECE1}"/>
-          </ac:cxnSpMkLst>
-        </pc:cxnChg>
-        <pc:cxnChg chg="del mod">
-          <ac:chgData name="Jonah St. Hilaire" userId="9d0a7af2-d0bd-4748-b50b-5cc37e0fdaa3" providerId="ADAL" clId="{58AAB240-BB3C-43BA-87E9-80C5D70C8BCC}" dt="2026-09-11T16:13:06.778" v="1710" actId="478"/>
-          <ac:cxnSpMkLst>
-            <pc:docMk/>
-            <pc:sldMk cId="4013437199" sldId="259"/>
-            <ac:cxnSpMk id="163" creationId="{8ABE4823-4A71-C4EF-8CAC-CBB017D96CCD}"/>
-          </ac:cxnSpMkLst>
-        </pc:cxnChg>
-        <pc:cxnChg chg="del mod">
-          <ac:chgData name="Jonah St. Hilaire" userId="9d0a7af2-d0bd-4748-b50b-5cc37e0fdaa3" providerId="ADAL" clId="{58AAB240-BB3C-43BA-87E9-80C5D70C8BCC}" dt="2026-09-11T16:13:06.778" v="1710" actId="478"/>
-          <ac:cxnSpMkLst>
-            <pc:docMk/>
-            <pc:sldMk cId="4013437199" sldId="259"/>
-            <ac:cxnSpMk id="165" creationId="{AF515EF8-DB81-0F0C-4139-E8D21F6E3AE3}"/>
-          </ac:cxnSpMkLst>
-        </pc:cxnChg>
-        <pc:cxnChg chg="add mod">
-          <ac:chgData name="Jonah St. Hilaire" userId="9d0a7af2-d0bd-4748-b50b-5cc37e0fdaa3" providerId="ADAL" clId="{58AAB240-BB3C-43BA-87E9-80C5D70C8BCC}" dt="2026-09-11T15:51:38.302" v="620" actId="1076"/>
-          <ac:cxnSpMkLst>
-            <pc:docMk/>
-            <pc:sldMk cId="4013437199" sldId="259"/>
-            <ac:cxnSpMk id="177" creationId="{56A518C6-C006-3A83-22A1-6DC171B2EE92}"/>
-          </ac:cxnSpMkLst>
-        </pc:cxnChg>
-        <pc:cxnChg chg="add mod">
-          <ac:chgData name="Jonah St. Hilaire" userId="9d0a7af2-d0bd-4748-b50b-5cc37e0fdaa3" providerId="ADAL" clId="{58AAB240-BB3C-43BA-87E9-80C5D70C8BCC}" dt="2026-09-11T15:51:38.302" v="620" actId="1076"/>
-          <ac:cxnSpMkLst>
-            <pc:docMk/>
-            <pc:sldMk cId="4013437199" sldId="259"/>
-            <ac:cxnSpMk id="184" creationId="{5E1DEC69-DC0F-B1C8-399E-0D2B0D860910}"/>
-          </ac:cxnSpMkLst>
-        </pc:cxnChg>
-        <pc:cxnChg chg="add del mod">
-          <ac:chgData name="Jonah St. Hilaire" userId="9d0a7af2-d0bd-4748-b50b-5cc37e0fdaa3" providerId="ADAL" clId="{58AAB240-BB3C-43BA-87E9-80C5D70C8BCC}" dt="2026-09-11T15:59:12.447" v="1046" actId="478"/>
-          <ac:cxnSpMkLst>
-            <pc:docMk/>
-            <pc:sldMk cId="4013437199" sldId="259"/>
-            <ac:cxnSpMk id="185" creationId="{E74400F4-F9CF-B5C9-66C3-B4A88CA1DBAD}"/>
-          </ac:cxnSpMkLst>
-        </pc:cxnChg>
-        <pc:cxnChg chg="add del mod">
-          <ac:chgData name="Jonah St. Hilaire" userId="9d0a7af2-d0bd-4748-b50b-5cc37e0fdaa3" providerId="ADAL" clId="{58AAB240-BB3C-43BA-87E9-80C5D70C8BCC}" dt="2026-09-11T15:59:13.271" v="1047" actId="478"/>
-          <ac:cxnSpMkLst>
-            <pc:docMk/>
-            <pc:sldMk cId="4013437199" sldId="259"/>
-            <ac:cxnSpMk id="188" creationId="{16FF09B7-9910-1092-B638-E7643E06FFD0}"/>
-          </ac:cxnSpMkLst>
-        </pc:cxnChg>
-        <pc:cxnChg chg="add del mod">
-          <ac:chgData name="Jonah St. Hilaire" userId="9d0a7af2-d0bd-4748-b50b-5cc37e0fdaa3" providerId="ADAL" clId="{58AAB240-BB3C-43BA-87E9-80C5D70C8BCC}" dt="2026-09-11T15:56:52.131" v="858" actId="478"/>
-          <ac:cxnSpMkLst>
-            <pc:docMk/>
-            <pc:sldMk cId="4013437199" sldId="259"/>
-            <ac:cxnSpMk id="205" creationId="{C76C9FEE-37BC-6C5B-875B-72249B7BD2BB}"/>
-          </ac:cxnSpMkLst>
-        </pc:cxnChg>
-        <pc:cxnChg chg="add del mod">
-          <ac:chgData name="Jonah St. Hilaire" userId="9d0a7af2-d0bd-4748-b50b-5cc37e0fdaa3" providerId="ADAL" clId="{58AAB240-BB3C-43BA-87E9-80C5D70C8BCC}" dt="2026-09-11T15:56:53.018" v="859" actId="478"/>
-          <ac:cxnSpMkLst>
-            <pc:docMk/>
-            <pc:sldMk cId="4013437199" sldId="259"/>
-            <ac:cxnSpMk id="206" creationId="{2A3DB914-7E53-85C2-61A7-93819C62C04D}"/>
-          </ac:cxnSpMkLst>
-        </pc:cxnChg>
         <pc:cxnChg chg="add mod">
           <ac:chgData name="Jonah St. Hilaire" userId="9d0a7af2-d0bd-4748-b50b-5cc37e0fdaa3" providerId="ADAL" clId="{58AAB240-BB3C-43BA-87E9-80C5D70C8BCC}" dt="2026-09-11T16:17:13.081" v="1803" actId="1038"/>
           <ac:cxnSpMkLst>
@@ -1545,22 +1161,6 @@
             <pc:docMk/>
             <pc:sldMk cId="4013437199" sldId="259"/>
             <ac:cxnSpMk id="209" creationId="{9A3B2EDD-3BAF-7983-183D-94C199D10434}"/>
-          </ac:cxnSpMkLst>
-        </pc:cxnChg>
-        <pc:cxnChg chg="add del mod">
-          <ac:chgData name="Jonah St. Hilaire" userId="9d0a7af2-d0bd-4748-b50b-5cc37e0fdaa3" providerId="ADAL" clId="{58AAB240-BB3C-43BA-87E9-80C5D70C8BCC}" dt="2026-09-11T16:16:48.112" v="1799" actId="478"/>
-          <ac:cxnSpMkLst>
-            <pc:docMk/>
-            <pc:sldMk cId="4013437199" sldId="259"/>
-            <ac:cxnSpMk id="210" creationId="{B3254D5E-8863-D539-A06B-452916E6973E}"/>
-          </ac:cxnSpMkLst>
-        </pc:cxnChg>
-        <pc:cxnChg chg="add del mod">
-          <ac:chgData name="Jonah St. Hilaire" userId="9d0a7af2-d0bd-4748-b50b-5cc37e0fdaa3" providerId="ADAL" clId="{58AAB240-BB3C-43BA-87E9-80C5D70C8BCC}" dt="2026-09-11T16:18:21.815" v="1817" actId="478"/>
-          <ac:cxnSpMkLst>
-            <pc:docMk/>
-            <pc:sldMk cId="4013437199" sldId="259"/>
-            <ac:cxnSpMk id="211" creationId="{309394C8-8504-CC8A-87C3-B79EB0238769}"/>
           </ac:cxnSpMkLst>
         </pc:cxnChg>
         <pc:cxnChg chg="add mod">
@@ -1619,30 +1219,6 @@
             <ac:cxnSpMk id="244" creationId="{EF140DAF-309B-4188-38F6-AC4BF71E7100}"/>
           </ac:cxnSpMkLst>
         </pc:cxnChg>
-        <pc:cxnChg chg="add del mod">
-          <ac:chgData name="Jonah St. Hilaire" userId="9d0a7af2-d0bd-4748-b50b-5cc37e0fdaa3" providerId="ADAL" clId="{58AAB240-BB3C-43BA-87E9-80C5D70C8BCC}" dt="2026-09-11T16:16:57.218" v="1801" actId="478"/>
-          <ac:cxnSpMkLst>
-            <pc:docMk/>
-            <pc:sldMk cId="4013437199" sldId="259"/>
-            <ac:cxnSpMk id="246" creationId="{70DE634A-6A25-5239-4186-9F90CE27E1AE}"/>
-          </ac:cxnSpMkLst>
-        </pc:cxnChg>
-        <pc:cxnChg chg="add del mod">
-          <ac:chgData name="Jonah St. Hilaire" userId="9d0a7af2-d0bd-4748-b50b-5cc37e0fdaa3" providerId="ADAL" clId="{58AAB240-BB3C-43BA-87E9-80C5D70C8BCC}" dt="2026-09-11T16:18:16.188" v="1814" actId="478"/>
-          <ac:cxnSpMkLst>
-            <pc:docMk/>
-            <pc:sldMk cId="4013437199" sldId="259"/>
-            <ac:cxnSpMk id="247" creationId="{9485834C-C5EF-CDB4-7B6D-5A0B52086054}"/>
-          </ac:cxnSpMkLst>
-        </pc:cxnChg>
-        <pc:cxnChg chg="add del mod">
-          <ac:chgData name="Jonah St. Hilaire" userId="9d0a7af2-d0bd-4748-b50b-5cc37e0fdaa3" providerId="ADAL" clId="{58AAB240-BB3C-43BA-87E9-80C5D70C8BCC}" dt="2026-09-11T16:16:51.788" v="1800" actId="478"/>
-          <ac:cxnSpMkLst>
-            <pc:docMk/>
-            <pc:sldMk cId="4013437199" sldId="259"/>
-            <ac:cxnSpMk id="252" creationId="{23C1C999-3C25-67C2-CABD-138D22105512}"/>
-          </ac:cxnSpMkLst>
-        </pc:cxnChg>
         <pc:cxnChg chg="add mod">
           <ac:chgData name="Jonah St. Hilaire" userId="9d0a7af2-d0bd-4748-b50b-5cc37e0fdaa3" providerId="ADAL" clId="{58AAB240-BB3C-43BA-87E9-80C5D70C8BCC}" dt="2026-09-11T16:35:05.924" v="2258" actId="1038"/>
           <ac:cxnSpMkLst>
@@ -1665,14 +1241,6 @@
             <pc:docMk/>
             <pc:sldMk cId="4013437199" sldId="259"/>
             <ac:cxnSpMk id="265" creationId="{DC3F66B7-D934-02CF-908A-0A5398A41A3D}"/>
-          </ac:cxnSpMkLst>
-        </pc:cxnChg>
-        <pc:cxnChg chg="add del mod">
-          <ac:chgData name="Jonah St. Hilaire" userId="9d0a7af2-d0bd-4748-b50b-5cc37e0fdaa3" providerId="ADAL" clId="{58AAB240-BB3C-43BA-87E9-80C5D70C8BCC}" dt="2026-09-11T16:25:08.730" v="2051" actId="478"/>
-          <ac:cxnSpMkLst>
-            <pc:docMk/>
-            <pc:sldMk cId="4013437199" sldId="259"/>
-            <ac:cxnSpMk id="266" creationId="{C26EABEE-740F-2745-EC71-91430E4B0160}"/>
           </ac:cxnSpMkLst>
         </pc:cxnChg>
         <pc:cxnChg chg="mod">
@@ -1723,52 +1291,12 @@
             <ac:cxnSpMk id="282" creationId="{D6C267BD-1B91-E90F-FC38-83C7B9A30959}"/>
           </ac:cxnSpMkLst>
         </pc:cxnChg>
-        <pc:cxnChg chg="add del mod">
-          <ac:chgData name="Jonah St. Hilaire" userId="9d0a7af2-d0bd-4748-b50b-5cc37e0fdaa3" providerId="ADAL" clId="{58AAB240-BB3C-43BA-87E9-80C5D70C8BCC}" dt="2026-09-11T16:37:00.370" v="2289" actId="478"/>
-          <ac:cxnSpMkLst>
-            <pc:docMk/>
-            <pc:sldMk cId="4013437199" sldId="259"/>
-            <ac:cxnSpMk id="309" creationId="{45893BAA-B4E3-92F7-8EC0-90D564D44F43}"/>
-          </ac:cxnSpMkLst>
-        </pc:cxnChg>
-        <pc:cxnChg chg="add del mod">
-          <ac:chgData name="Jonah St. Hilaire" userId="9d0a7af2-d0bd-4748-b50b-5cc37e0fdaa3" providerId="ADAL" clId="{58AAB240-BB3C-43BA-87E9-80C5D70C8BCC}" dt="2026-09-11T16:43:58.945" v="2576" actId="478"/>
-          <ac:cxnSpMkLst>
-            <pc:docMk/>
-            <pc:sldMk cId="4013437199" sldId="259"/>
-            <ac:cxnSpMk id="310" creationId="{F95411D3-C6A3-296A-F2E6-FC4AA66A82ED}"/>
-          </ac:cxnSpMkLst>
-        </pc:cxnChg>
-        <pc:cxnChg chg="add del mod">
-          <ac:chgData name="Jonah St. Hilaire" userId="9d0a7af2-d0bd-4748-b50b-5cc37e0fdaa3" providerId="ADAL" clId="{58AAB240-BB3C-43BA-87E9-80C5D70C8BCC}" dt="2026-09-11T16:43:58.166" v="2575" actId="478"/>
-          <ac:cxnSpMkLst>
-            <pc:docMk/>
-            <pc:sldMk cId="4013437199" sldId="259"/>
-            <ac:cxnSpMk id="311" creationId="{A4CFBC9B-153D-7A6B-E873-F68ACE3559E2}"/>
-          </ac:cxnSpMkLst>
-        </pc:cxnChg>
-        <pc:cxnChg chg="add del mod">
-          <ac:chgData name="Jonah St. Hilaire" userId="9d0a7af2-d0bd-4748-b50b-5cc37e0fdaa3" providerId="ADAL" clId="{58AAB240-BB3C-43BA-87E9-80C5D70C8BCC}" dt="2026-09-11T16:37:05.487" v="2291" actId="11529"/>
-          <ac:cxnSpMkLst>
-            <pc:docMk/>
-            <pc:sldMk cId="4013437199" sldId="259"/>
-            <ac:cxnSpMk id="322" creationId="{806AF84C-E767-81B4-A971-A778DD3F05A4}"/>
-          </ac:cxnSpMkLst>
-        </pc:cxnChg>
         <pc:cxnChg chg="add mod">
           <ac:chgData name="Jonah St. Hilaire" userId="9d0a7af2-d0bd-4748-b50b-5cc37e0fdaa3" providerId="ADAL" clId="{58AAB240-BB3C-43BA-87E9-80C5D70C8BCC}" dt="2026-09-11T17:01:53.291" v="2945" actId="692"/>
           <ac:cxnSpMkLst>
             <pc:docMk/>
             <pc:sldMk cId="4013437199" sldId="259"/>
             <ac:cxnSpMk id="324" creationId="{8076F3DF-1B08-A123-1EB2-9C82504C8428}"/>
-          </ac:cxnSpMkLst>
-        </pc:cxnChg>
-        <pc:cxnChg chg="add del">
-          <ac:chgData name="Jonah St. Hilaire" userId="9d0a7af2-d0bd-4748-b50b-5cc37e0fdaa3" providerId="ADAL" clId="{58AAB240-BB3C-43BA-87E9-80C5D70C8BCC}" dt="2026-09-11T16:39:49.087" v="2313" actId="11529"/>
-          <ac:cxnSpMkLst>
-            <pc:docMk/>
-            <pc:sldMk cId="4013437199" sldId="259"/>
-            <ac:cxnSpMk id="332" creationId="{B8BC5C72-A830-0AF5-7E49-6E6AABB704D3}"/>
           </ac:cxnSpMkLst>
         </pc:cxnChg>
         <pc:cxnChg chg="add mod">
@@ -1785,46 +1313,6 @@
             <pc:docMk/>
             <pc:sldMk cId="4013437199" sldId="259"/>
             <ac:cxnSpMk id="334" creationId="{D9E7C3BC-B92E-AA9B-FCC6-FE1315A3A36E}"/>
-          </ac:cxnSpMkLst>
-        </pc:cxnChg>
-        <pc:cxnChg chg="add del mod">
-          <ac:chgData name="Jonah St. Hilaire" userId="9d0a7af2-d0bd-4748-b50b-5cc37e0fdaa3" providerId="ADAL" clId="{58AAB240-BB3C-43BA-87E9-80C5D70C8BCC}" dt="2026-09-11T16:41:18.911" v="2426" actId="478"/>
-          <ac:cxnSpMkLst>
-            <pc:docMk/>
-            <pc:sldMk cId="4013437199" sldId="259"/>
-            <ac:cxnSpMk id="336" creationId="{104C2656-37C3-B58D-FAC0-751DCEED2815}"/>
-          </ac:cxnSpMkLst>
-        </pc:cxnChg>
-        <pc:cxnChg chg="add del mod">
-          <ac:chgData name="Jonah St. Hilaire" userId="9d0a7af2-d0bd-4748-b50b-5cc37e0fdaa3" providerId="ADAL" clId="{58AAB240-BB3C-43BA-87E9-80C5D70C8BCC}" dt="2026-09-11T16:47:27.739" v="2641" actId="478"/>
-          <ac:cxnSpMkLst>
-            <pc:docMk/>
-            <pc:sldMk cId="4013437199" sldId="259"/>
-            <ac:cxnSpMk id="352" creationId="{DE9C1F0F-CA5A-6283-A94F-A8D4AA7DAD69}"/>
-          </ac:cxnSpMkLst>
-        </pc:cxnChg>
-        <pc:cxnChg chg="add del mod">
-          <ac:chgData name="Jonah St. Hilaire" userId="9d0a7af2-d0bd-4748-b50b-5cc37e0fdaa3" providerId="ADAL" clId="{58AAB240-BB3C-43BA-87E9-80C5D70C8BCC}" dt="2026-09-11T16:46:17.186" v="2620" actId="478"/>
-          <ac:cxnSpMkLst>
-            <pc:docMk/>
-            <pc:sldMk cId="4013437199" sldId="259"/>
-            <ac:cxnSpMk id="353" creationId="{83BE505F-77CC-86AC-1394-70B0AF02EA6E}"/>
-          </ac:cxnSpMkLst>
-        </pc:cxnChg>
-        <pc:cxnChg chg="add del mod">
-          <ac:chgData name="Jonah St. Hilaire" userId="9d0a7af2-d0bd-4748-b50b-5cc37e0fdaa3" providerId="ADAL" clId="{58AAB240-BB3C-43BA-87E9-80C5D70C8BCC}" dt="2026-09-11T16:46:27.650" v="2633" actId="478"/>
-          <ac:cxnSpMkLst>
-            <pc:docMk/>
-            <pc:sldMk cId="4013437199" sldId="259"/>
-            <ac:cxnSpMk id="354" creationId="{CF59E612-5B89-F484-514C-0D0E334E8BF3}"/>
-          </ac:cxnSpMkLst>
-        </pc:cxnChg>
-        <pc:cxnChg chg="add del mod">
-          <ac:chgData name="Jonah St. Hilaire" userId="9d0a7af2-d0bd-4748-b50b-5cc37e0fdaa3" providerId="ADAL" clId="{58AAB240-BB3C-43BA-87E9-80C5D70C8BCC}" dt="2026-09-11T16:46:17.186" v="2620" actId="478"/>
-          <ac:cxnSpMkLst>
-            <pc:docMk/>
-            <pc:sldMk cId="4013437199" sldId="259"/>
-            <ac:cxnSpMk id="355" creationId="{534A7EDB-E15E-7CCC-4783-F69046059CCE}"/>
           </ac:cxnSpMkLst>
         </pc:cxnChg>
         <pc:cxnChg chg="add mod">
@@ -1859,210 +1347,35 @@
             <ac:cxnSpMk id="363" creationId="{C6F45FA7-0DA6-6109-DDF8-B86FD9658613}"/>
           </ac:cxnSpMkLst>
         </pc:cxnChg>
-        <pc:cxnChg chg="add del">
-          <ac:chgData name="Jonah St. Hilaire" userId="9d0a7af2-d0bd-4748-b50b-5cc37e0fdaa3" providerId="ADAL" clId="{58AAB240-BB3C-43BA-87E9-80C5D70C8BCC}" dt="2026-09-11T16:51:37.284" v="2828" actId="11529"/>
-          <ac:cxnSpMkLst>
-            <pc:docMk/>
-            <pc:sldMk cId="4013437199" sldId="259"/>
-            <ac:cxnSpMk id="369" creationId="{D8F152DA-7FB3-BED5-C52E-413308B30483}"/>
-          </ac:cxnSpMkLst>
-        </pc:cxnChg>
-      </pc:sldChg>
-      <pc:sldChg chg="add del ord">
-        <pc:chgData name="Jonah St. Hilaire" userId="9d0a7af2-d0bd-4748-b50b-5cc37e0fdaa3" providerId="ADAL" clId="{58AAB240-BB3C-43BA-87E9-80C5D70C8BCC}" dt="2026-09-11T16:14:08.860" v="1716" actId="47"/>
-        <pc:sldMkLst>
-          <pc:docMk/>
-          <pc:sldMk cId="1054510852" sldId="260"/>
-        </pc:sldMkLst>
       </pc:sldChg>
       <pc:sldChg chg="addSp delSp modSp new mod ord">
-        <pc:chgData name="Jonah St. Hilaire" userId="9d0a7af2-d0bd-4748-b50b-5cc37e0fdaa3" providerId="ADAL" clId="{58AAB240-BB3C-43BA-87E9-80C5D70C8BCC}" dt="2026-09-11T19:34:29.126" v="4252" actId="1076"/>
+        <pc:chgData name="Jonah St. Hilaire" userId="9d0a7af2-d0bd-4748-b50b-5cc37e0fdaa3" providerId="ADAL" clId="{58AAB240-BB3C-43BA-87E9-80C5D70C8BCC}" dt="2026-09-14T20:46:04.549" v="4527" actId="1076"/>
         <pc:sldMkLst>
           <pc:docMk/>
           <pc:sldMk cId="3939624714" sldId="260"/>
         </pc:sldMkLst>
-        <pc:spChg chg="del">
-          <ac:chgData name="Jonah St. Hilaire" userId="9d0a7af2-d0bd-4748-b50b-5cc37e0fdaa3" providerId="ADAL" clId="{58AAB240-BB3C-43BA-87E9-80C5D70C8BCC}" dt="2026-09-11T16:19:14.504" v="1828" actId="478"/>
+        <pc:spChg chg="add mod">
+          <ac:chgData name="Jonah St. Hilaire" userId="9d0a7af2-d0bd-4748-b50b-5cc37e0fdaa3" providerId="ADAL" clId="{58AAB240-BB3C-43BA-87E9-80C5D70C8BCC}" dt="2026-09-14T20:45:23.476" v="4511" actId="1076"/>
           <ac:spMkLst>
             <pc:docMk/>
             <pc:sldMk cId="3939624714" sldId="260"/>
-            <ac:spMk id="2" creationId="{34C54DA0-FE71-4D52-C8D2-5040C9B64E95}"/>
+            <ac:spMk id="3" creationId="{C3BBE6A5-3C97-F5B0-6863-9B56ADA7844D}"/>
           </ac:spMkLst>
         </pc:spChg>
-        <pc:spChg chg="del">
-          <ac:chgData name="Jonah St. Hilaire" userId="9d0a7af2-d0bd-4748-b50b-5cc37e0fdaa3" providerId="ADAL" clId="{58AAB240-BB3C-43BA-87E9-80C5D70C8BCC}" dt="2026-09-11T16:19:13.532" v="1827" actId="478"/>
+        <pc:spChg chg="add mod">
+          <ac:chgData name="Jonah St. Hilaire" userId="9d0a7af2-d0bd-4748-b50b-5cc37e0fdaa3" providerId="ADAL" clId="{58AAB240-BB3C-43BA-87E9-80C5D70C8BCC}" dt="2026-09-14T20:45:27.605" v="4512" actId="1076"/>
           <ac:spMkLst>
             <pc:docMk/>
             <pc:sldMk cId="3939624714" sldId="260"/>
-            <ac:spMk id="3" creationId="{39ABE3F5-84EF-E80A-266B-A85AA7419603}"/>
+            <ac:spMk id="5" creationId="{D47D480B-E811-86A6-5D2C-A562B8EB082B}"/>
           </ac:spMkLst>
         </pc:spChg>
-        <pc:spChg chg="del">
-          <ac:chgData name="Jonah St. Hilaire" userId="9d0a7af2-d0bd-4748-b50b-5cc37e0fdaa3" providerId="ADAL" clId="{58AAB240-BB3C-43BA-87E9-80C5D70C8BCC}" dt="2026-09-11T18:55:19.985" v="3014" actId="478"/>
+        <pc:spChg chg="add mod">
+          <ac:chgData name="Jonah St. Hilaire" userId="9d0a7af2-d0bd-4748-b50b-5cc37e0fdaa3" providerId="ADAL" clId="{58AAB240-BB3C-43BA-87E9-80C5D70C8BCC}" dt="2026-09-14T20:46:04.549" v="4527" actId="1076"/>
           <ac:spMkLst>
             <pc:docMk/>
             <pc:sldMk cId="3939624714" sldId="260"/>
-            <ac:spMk id="5" creationId="{DDB88A80-0594-F5B2-0316-F39578D9BDF4}"/>
-          </ac:spMkLst>
-        </pc:spChg>
-        <pc:spChg chg="del">
-          <ac:chgData name="Jonah St. Hilaire" userId="9d0a7af2-d0bd-4748-b50b-5cc37e0fdaa3" providerId="ADAL" clId="{58AAB240-BB3C-43BA-87E9-80C5D70C8BCC}" dt="2026-09-11T18:55:18.005" v="3013" actId="478"/>
-          <ac:spMkLst>
-            <pc:docMk/>
-            <pc:sldMk cId="3939624714" sldId="260"/>
-            <ac:spMk id="6" creationId="{D37AD480-6E9B-8128-6656-CB7A2A25ED68}"/>
-          </ac:spMkLst>
-        </pc:spChg>
-        <pc:spChg chg="del mod">
-          <ac:chgData name="Jonah St. Hilaire" userId="9d0a7af2-d0bd-4748-b50b-5cc37e0fdaa3" providerId="ADAL" clId="{58AAB240-BB3C-43BA-87E9-80C5D70C8BCC}" dt="2026-09-11T16:58:35.263" v="2900" actId="478"/>
-          <ac:spMkLst>
-            <pc:docMk/>
-            <pc:sldMk cId="3939624714" sldId="260"/>
-            <ac:spMk id="8" creationId="{2AD41296-DF63-4A29-CF7D-AF27415C1F7B}"/>
-          </ac:spMkLst>
-        </pc:spChg>
-        <pc:spChg chg="del">
-          <ac:chgData name="Jonah St. Hilaire" userId="9d0a7af2-d0bd-4748-b50b-5cc37e0fdaa3" providerId="ADAL" clId="{58AAB240-BB3C-43BA-87E9-80C5D70C8BCC}" dt="2026-09-11T18:55:18.005" v="3013" actId="478"/>
-          <ac:spMkLst>
-            <pc:docMk/>
-            <pc:sldMk cId="3939624714" sldId="260"/>
-            <ac:spMk id="10" creationId="{B4D0CEE8-4C00-FE97-CAA0-BCF98EF34AA0}"/>
-          </ac:spMkLst>
-        </pc:spChg>
-        <pc:spChg chg="del">
-          <ac:chgData name="Jonah St. Hilaire" userId="9d0a7af2-d0bd-4748-b50b-5cc37e0fdaa3" providerId="ADAL" clId="{58AAB240-BB3C-43BA-87E9-80C5D70C8BCC}" dt="2026-09-11T18:55:18.005" v="3013" actId="478"/>
-          <ac:spMkLst>
-            <pc:docMk/>
-            <pc:sldMk cId="3939624714" sldId="260"/>
-            <ac:spMk id="11" creationId="{29F2196E-A221-EF0D-E051-8758F85D3DED}"/>
-          </ac:spMkLst>
-        </pc:spChg>
-        <pc:spChg chg="add del mod">
-          <ac:chgData name="Jonah St. Hilaire" userId="9d0a7af2-d0bd-4748-b50b-5cc37e0fdaa3" providerId="ADAL" clId="{58AAB240-BB3C-43BA-87E9-80C5D70C8BCC}" dt="2026-09-11T18:55:18.005" v="3013" actId="478"/>
-          <ac:spMkLst>
-            <pc:docMk/>
-            <pc:sldMk cId="3939624714" sldId="260"/>
-            <ac:spMk id="16" creationId="{1C4C3593-485C-2B4F-3054-30E6EB02BA0E}"/>
-          </ac:spMkLst>
-        </pc:spChg>
-        <pc:spChg chg="del mod">
-          <ac:chgData name="Jonah St. Hilaire" userId="9d0a7af2-d0bd-4748-b50b-5cc37e0fdaa3" providerId="ADAL" clId="{58AAB240-BB3C-43BA-87E9-80C5D70C8BCC}" dt="2026-09-11T17:00:27.892" v="2929" actId="478"/>
-          <ac:spMkLst>
-            <pc:docMk/>
-            <pc:sldMk cId="3939624714" sldId="260"/>
-            <ac:spMk id="17" creationId="{F4CD3F85-5CBC-2B73-1A55-4EF84E841526}"/>
-          </ac:spMkLst>
-        </pc:spChg>
-        <pc:spChg chg="del">
-          <ac:chgData name="Jonah St. Hilaire" userId="9d0a7af2-d0bd-4748-b50b-5cc37e0fdaa3" providerId="ADAL" clId="{58AAB240-BB3C-43BA-87E9-80C5D70C8BCC}" dt="2026-09-11T18:55:19.985" v="3014" actId="478"/>
-          <ac:spMkLst>
-            <pc:docMk/>
-            <pc:sldMk cId="3939624714" sldId="260"/>
-            <ac:spMk id="20" creationId="{B293FEBD-065F-BC80-5A7F-C827205AC322}"/>
-          </ac:spMkLst>
-        </pc:spChg>
-        <pc:spChg chg="del">
-          <ac:chgData name="Jonah St. Hilaire" userId="9d0a7af2-d0bd-4748-b50b-5cc37e0fdaa3" providerId="ADAL" clId="{58AAB240-BB3C-43BA-87E9-80C5D70C8BCC}" dt="2026-09-11T18:55:18.005" v="3013" actId="478"/>
-          <ac:spMkLst>
-            <pc:docMk/>
-            <pc:sldMk cId="3939624714" sldId="260"/>
-            <ac:spMk id="22" creationId="{700F9A5C-80F2-CB19-CA78-44EDD220BEB2}"/>
-          </ac:spMkLst>
-        </pc:spChg>
-        <pc:spChg chg="del">
-          <ac:chgData name="Jonah St. Hilaire" userId="9d0a7af2-d0bd-4748-b50b-5cc37e0fdaa3" providerId="ADAL" clId="{58AAB240-BB3C-43BA-87E9-80C5D70C8BCC}" dt="2026-09-11T18:55:18.005" v="3013" actId="478"/>
-          <ac:spMkLst>
-            <pc:docMk/>
-            <pc:sldMk cId="3939624714" sldId="260"/>
-            <ac:spMk id="23" creationId="{76818E08-1645-E271-35D1-37C30010461D}"/>
-          </ac:spMkLst>
-        </pc:spChg>
-        <pc:spChg chg="add del mod">
-          <ac:chgData name="Jonah St. Hilaire" userId="9d0a7af2-d0bd-4748-b50b-5cc37e0fdaa3" providerId="ADAL" clId="{58AAB240-BB3C-43BA-87E9-80C5D70C8BCC}" dt="2026-09-11T18:55:19.985" v="3014" actId="478"/>
-          <ac:spMkLst>
-            <pc:docMk/>
-            <pc:sldMk cId="3939624714" sldId="260"/>
-            <ac:spMk id="24" creationId="{38CE9E33-7E76-C3BC-6677-2FCFC04FA3EB}"/>
-          </ac:spMkLst>
-        </pc:spChg>
-        <pc:spChg chg="add mod">
-          <ac:chgData name="Jonah St. Hilaire" userId="9d0a7af2-d0bd-4748-b50b-5cc37e0fdaa3" providerId="ADAL" clId="{58AAB240-BB3C-43BA-87E9-80C5D70C8BCC}" dt="2026-09-11T16:55:02.572" v="2850"/>
-          <ac:spMkLst>
-            <pc:docMk/>
-            <pc:sldMk cId="3939624714" sldId="260"/>
-            <ac:spMk id="25" creationId="{8C767B78-8BF0-C48B-A498-4F1698632D03}"/>
-          </ac:spMkLst>
-        </pc:spChg>
-        <pc:spChg chg="del">
-          <ac:chgData name="Jonah St. Hilaire" userId="9d0a7af2-d0bd-4748-b50b-5cc37e0fdaa3" providerId="ADAL" clId="{58AAB240-BB3C-43BA-87E9-80C5D70C8BCC}" dt="2026-09-11T18:55:18.005" v="3013" actId="478"/>
-          <ac:spMkLst>
-            <pc:docMk/>
-            <pc:sldMk cId="3939624714" sldId="260"/>
-            <ac:spMk id="27" creationId="{BF478604-7846-614A-C46C-D66A3D04F4DB}"/>
-          </ac:spMkLst>
-        </pc:spChg>
-        <pc:spChg chg="add del mod">
-          <ac:chgData name="Jonah St. Hilaire" userId="9d0a7af2-d0bd-4748-b50b-5cc37e0fdaa3" providerId="ADAL" clId="{58AAB240-BB3C-43BA-87E9-80C5D70C8BCC}" dt="2026-09-11T18:55:18.005" v="3013" actId="478"/>
-          <ac:spMkLst>
-            <pc:docMk/>
-            <pc:sldMk cId="3939624714" sldId="260"/>
-            <ac:spMk id="28" creationId="{23338634-5E6E-FDAB-EA20-F51541874D12}"/>
-          </ac:spMkLst>
-        </pc:spChg>
-        <pc:spChg chg="del mod">
-          <ac:chgData name="Jonah St. Hilaire" userId="9d0a7af2-d0bd-4748-b50b-5cc37e0fdaa3" providerId="ADAL" clId="{58AAB240-BB3C-43BA-87E9-80C5D70C8BCC}" dt="2026-09-11T17:04:52.200" v="2974" actId="478"/>
-          <ac:spMkLst>
-            <pc:docMk/>
-            <pc:sldMk cId="3939624714" sldId="260"/>
-            <ac:spMk id="29" creationId="{A14E3A30-E4AF-604E-1C1D-A42DD5CB8EE5}"/>
-          </ac:spMkLst>
-        </pc:spChg>
-        <pc:spChg chg="del mod">
-          <ac:chgData name="Jonah St. Hilaire" userId="9d0a7af2-d0bd-4748-b50b-5cc37e0fdaa3" providerId="ADAL" clId="{58AAB240-BB3C-43BA-87E9-80C5D70C8BCC}" dt="2026-09-11T19:14:34.968" v="3777" actId="478"/>
-          <ac:spMkLst>
-            <pc:docMk/>
-            <pc:sldMk cId="3939624714" sldId="260"/>
-            <ac:spMk id="30" creationId="{8235941C-FE75-5F7F-3390-AAC68ECB282E}"/>
-          </ac:spMkLst>
-        </pc:spChg>
-        <pc:spChg chg="add del mod">
-          <ac:chgData name="Jonah St. Hilaire" userId="9d0a7af2-d0bd-4748-b50b-5cc37e0fdaa3" providerId="ADAL" clId="{58AAB240-BB3C-43BA-87E9-80C5D70C8BCC}" dt="2026-09-11T18:55:19.985" v="3014" actId="478"/>
-          <ac:spMkLst>
-            <pc:docMk/>
-            <pc:sldMk cId="3939624714" sldId="260"/>
-            <ac:spMk id="32" creationId="{0DAB1F94-003D-2C52-1DD8-7A4A1C6838FD}"/>
-          </ac:spMkLst>
-        </pc:spChg>
-        <pc:spChg chg="add del mod">
-          <ac:chgData name="Jonah St. Hilaire" userId="9d0a7af2-d0bd-4748-b50b-5cc37e0fdaa3" providerId="ADAL" clId="{58AAB240-BB3C-43BA-87E9-80C5D70C8BCC}" dt="2026-09-11T18:55:18.005" v="3013" actId="478"/>
-          <ac:spMkLst>
-            <pc:docMk/>
-            <pc:sldMk cId="3939624714" sldId="260"/>
-            <ac:spMk id="33" creationId="{FFFD0DFF-A996-A5E3-4E21-49F6B467ADC8}"/>
-          </ac:spMkLst>
-        </pc:spChg>
-        <pc:spChg chg="del mod">
-          <ac:chgData name="Jonah St. Hilaire" userId="9d0a7af2-d0bd-4748-b50b-5cc37e0fdaa3" providerId="ADAL" clId="{58AAB240-BB3C-43BA-87E9-80C5D70C8BCC}" dt="2026-09-11T19:13:06.740" v="3758" actId="478"/>
-          <ac:spMkLst>
-            <pc:docMk/>
-            <pc:sldMk cId="3939624714" sldId="260"/>
-            <ac:spMk id="34" creationId="{077F3136-C93C-8509-7DCA-783C13EAD0B3}"/>
-          </ac:spMkLst>
-        </pc:spChg>
-        <pc:spChg chg="del mod">
-          <ac:chgData name="Jonah St. Hilaire" userId="9d0a7af2-d0bd-4748-b50b-5cc37e0fdaa3" providerId="ADAL" clId="{58AAB240-BB3C-43BA-87E9-80C5D70C8BCC}" dt="2026-09-11T19:13:06.740" v="3758" actId="478"/>
-          <ac:spMkLst>
-            <pc:docMk/>
-            <pc:sldMk cId="3939624714" sldId="260"/>
-            <ac:spMk id="35" creationId="{35721866-28F6-41E2-886A-05706AA0BF87}"/>
-          </ac:spMkLst>
-        </pc:spChg>
-        <pc:spChg chg="del">
-          <ac:chgData name="Jonah St. Hilaire" userId="9d0a7af2-d0bd-4748-b50b-5cc37e0fdaa3" providerId="ADAL" clId="{58AAB240-BB3C-43BA-87E9-80C5D70C8BCC}" dt="2026-09-11T17:06:04.488" v="3000" actId="478"/>
-          <ac:spMkLst>
-            <pc:docMk/>
-            <pc:sldMk cId="3939624714" sldId="260"/>
-            <ac:spMk id="36" creationId="{FDA80097-3DB6-8947-5281-F6B06280A6FB}"/>
+            <ac:spMk id="7" creationId="{50782D2E-93E4-C2B2-9252-B8B897A66EA3}"/>
           </ac:spMkLst>
         </pc:spChg>
         <pc:spChg chg="mod">
@@ -2079,22 +1392,6 @@
             <pc:docMk/>
             <pc:sldMk cId="3939624714" sldId="260"/>
             <ac:spMk id="38" creationId="{9B3E3F47-0FD2-6065-0067-D6DD1154581B}"/>
-          </ac:spMkLst>
-        </pc:spChg>
-        <pc:spChg chg="del">
-          <ac:chgData name="Jonah St. Hilaire" userId="9d0a7af2-d0bd-4748-b50b-5cc37e0fdaa3" providerId="ADAL" clId="{58AAB240-BB3C-43BA-87E9-80C5D70C8BCC}" dt="2026-09-11T17:04:53.291" v="2975" actId="478"/>
-          <ac:spMkLst>
-            <pc:docMk/>
-            <pc:sldMk cId="3939624714" sldId="260"/>
-            <ac:spMk id="39" creationId="{6050A09E-8AAA-3198-EFF9-F4558F9B08C1}"/>
-          </ac:spMkLst>
-        </pc:spChg>
-        <pc:spChg chg="add mod">
-          <ac:chgData name="Jonah St. Hilaire" userId="9d0a7af2-d0bd-4748-b50b-5cc37e0fdaa3" providerId="ADAL" clId="{58AAB240-BB3C-43BA-87E9-80C5D70C8BCC}" dt="2026-09-11T17:02:56.987" v="2952" actId="1076"/>
-          <ac:spMkLst>
-            <pc:docMk/>
-            <pc:sldMk cId="3939624714" sldId="260"/>
-            <ac:spMk id="40" creationId="{E474CE08-E672-AD32-31FF-AED59C785FAE}"/>
           </ac:spMkLst>
         </pc:spChg>
         <pc:spChg chg="mod">
@@ -2161,14 +1458,6 @@
             <ac:spMk id="64" creationId="{9FC05BC8-2172-47A6-5D2D-7377AE1E6A9A}"/>
           </ac:spMkLst>
         </pc:spChg>
-        <pc:spChg chg="del mod">
-          <ac:chgData name="Jonah St. Hilaire" userId="9d0a7af2-d0bd-4748-b50b-5cc37e0fdaa3" providerId="ADAL" clId="{58AAB240-BB3C-43BA-87E9-80C5D70C8BCC}" dt="2026-09-11T19:07:30.962" v="3543" actId="478"/>
-          <ac:spMkLst>
-            <pc:docMk/>
-            <pc:sldMk cId="3939624714" sldId="260"/>
-            <ac:spMk id="68" creationId="{ED19B33E-F222-403F-4728-4A77A8DD42FE}"/>
-          </ac:spMkLst>
-        </pc:spChg>
         <pc:spChg chg="mod">
           <ac:chgData name="Jonah St. Hilaire" userId="9d0a7af2-d0bd-4748-b50b-5cc37e0fdaa3" providerId="ADAL" clId="{58AAB240-BB3C-43BA-87E9-80C5D70C8BCC}" dt="2026-09-11T19:19:54.871" v="3893" actId="1036"/>
           <ac:spMkLst>
@@ -2191,14 +1480,6 @@
             <pc:docMk/>
             <pc:sldMk cId="3939624714" sldId="260"/>
             <ac:spMk id="71" creationId="{14E5489B-AFC9-D6C9-A525-293DEADAEE79}"/>
-          </ac:spMkLst>
-        </pc:spChg>
-        <pc:spChg chg="add del mod ord">
-          <ac:chgData name="Jonah St. Hilaire" userId="9d0a7af2-d0bd-4748-b50b-5cc37e0fdaa3" providerId="ADAL" clId="{58AAB240-BB3C-43BA-87E9-80C5D70C8BCC}" dt="2026-09-11T19:16:49.074" v="3806" actId="478"/>
-          <ac:spMkLst>
-            <pc:docMk/>
-            <pc:sldMk cId="3939624714" sldId="260"/>
-            <ac:spMk id="73" creationId="{90214A0A-7AC3-C0F0-0F15-F0DAF48A63EB}"/>
           </ac:spMkLst>
         </pc:spChg>
         <pc:spChg chg="mod">
@@ -2225,30 +1506,6 @@
             <ac:spMk id="78" creationId="{BDB6BE53-AF40-DC13-B811-C800FE999F05}"/>
           </ac:spMkLst>
         </pc:spChg>
-        <pc:spChg chg="add del mod">
-          <ac:chgData name="Jonah St. Hilaire" userId="9d0a7af2-d0bd-4748-b50b-5cc37e0fdaa3" providerId="ADAL" clId="{58AAB240-BB3C-43BA-87E9-80C5D70C8BCC}" dt="2026-09-11T19:21:30.920" v="3924" actId="478"/>
-          <ac:spMkLst>
-            <pc:docMk/>
-            <pc:sldMk cId="3939624714" sldId="260"/>
-            <ac:spMk id="79" creationId="{0BF5ED55-AAEE-D9D3-8EBF-29989A352FA8}"/>
-          </ac:spMkLst>
-        </pc:spChg>
-        <pc:spChg chg="del mod">
-          <ac:chgData name="Jonah St. Hilaire" userId="9d0a7af2-d0bd-4748-b50b-5cc37e0fdaa3" providerId="ADAL" clId="{58AAB240-BB3C-43BA-87E9-80C5D70C8BCC}" dt="2026-09-11T18:55:23.797" v="3016" actId="478"/>
-          <ac:spMkLst>
-            <pc:docMk/>
-            <pc:sldMk cId="3939624714" sldId="260"/>
-            <ac:spMk id="82" creationId="{00053F7B-FDA9-5747-36C7-4F8FA271BA64}"/>
-          </ac:spMkLst>
-        </pc:spChg>
-        <pc:spChg chg="del mod">
-          <ac:chgData name="Jonah St. Hilaire" userId="9d0a7af2-d0bd-4748-b50b-5cc37e0fdaa3" providerId="ADAL" clId="{58AAB240-BB3C-43BA-87E9-80C5D70C8BCC}" dt="2026-09-11T18:55:19.985" v="3014" actId="478"/>
-          <ac:spMkLst>
-            <pc:docMk/>
-            <pc:sldMk cId="3939624714" sldId="260"/>
-            <ac:spMk id="83" creationId="{5E8A39D4-A9EF-4B55-251B-E15FDCF16DA8}"/>
-          </ac:spMkLst>
-        </pc:spChg>
         <pc:spChg chg="mod">
           <ac:chgData name="Jonah St. Hilaire" userId="9d0a7af2-d0bd-4748-b50b-5cc37e0fdaa3" providerId="ADAL" clId="{58AAB240-BB3C-43BA-87E9-80C5D70C8BCC}" dt="2026-09-11T19:30:37.203" v="4206" actId="1035"/>
           <ac:spMkLst>
@@ -2263,30 +1520,6 @@
             <pc:docMk/>
             <pc:sldMk cId="3939624714" sldId="260"/>
             <ac:spMk id="87" creationId="{4C4B0550-9F66-3AE6-96A7-FC81C44C7784}"/>
-          </ac:spMkLst>
-        </pc:spChg>
-        <pc:spChg chg="add del mod">
-          <ac:chgData name="Jonah St. Hilaire" userId="9d0a7af2-d0bd-4748-b50b-5cc37e0fdaa3" providerId="ADAL" clId="{58AAB240-BB3C-43BA-87E9-80C5D70C8BCC}" dt="2026-09-11T18:55:18.005" v="3013" actId="478"/>
-          <ac:spMkLst>
-            <pc:docMk/>
-            <pc:sldMk cId="3939624714" sldId="260"/>
-            <ac:spMk id="89" creationId="{F6D4710D-5C08-48AC-F8D5-D56D369B9881}"/>
-          </ac:spMkLst>
-        </pc:spChg>
-        <pc:spChg chg="add del mod">
-          <ac:chgData name="Jonah St. Hilaire" userId="9d0a7af2-d0bd-4748-b50b-5cc37e0fdaa3" providerId="ADAL" clId="{58AAB240-BB3C-43BA-87E9-80C5D70C8BCC}" dt="2026-09-11T17:02:33.040" v="2949" actId="478"/>
-          <ac:spMkLst>
-            <pc:docMk/>
-            <pc:sldMk cId="3939624714" sldId="260"/>
-            <ac:spMk id="91" creationId="{65BE774C-85A2-7ECD-9CB9-DFB275134CEE}"/>
-          </ac:spMkLst>
-        </pc:spChg>
-        <pc:spChg chg="add del mod">
-          <ac:chgData name="Jonah St. Hilaire" userId="9d0a7af2-d0bd-4748-b50b-5cc37e0fdaa3" providerId="ADAL" clId="{58AAB240-BB3C-43BA-87E9-80C5D70C8BCC}" dt="2026-09-11T18:55:19.985" v="3014" actId="478"/>
-          <ac:spMkLst>
-            <pc:docMk/>
-            <pc:sldMk cId="3939624714" sldId="260"/>
-            <ac:spMk id="94" creationId="{1682FA4B-0DD6-5A94-0021-1C370E550167}"/>
           </ac:spMkLst>
         </pc:spChg>
         <pc:spChg chg="add mod ord">
@@ -2335,14 +1568,6 @@
             <pc:docMk/>
             <pc:sldMk cId="3939624714" sldId="260"/>
             <ac:spMk id="105" creationId="{CCC12389-8864-F569-77A6-612A551E7258}"/>
-          </ac:spMkLst>
-        </pc:spChg>
-        <pc:spChg chg="add del mod">
-          <ac:chgData name="Jonah St. Hilaire" userId="9d0a7af2-d0bd-4748-b50b-5cc37e0fdaa3" providerId="ADAL" clId="{58AAB240-BB3C-43BA-87E9-80C5D70C8BCC}" dt="2026-09-11T19:05:29.487" v="3521" actId="478"/>
-          <ac:spMkLst>
-            <pc:docMk/>
-            <pc:sldMk cId="3939624714" sldId="260"/>
-            <ac:spMk id="109" creationId="{277B9E71-C773-345F-1866-74464DEAD737}"/>
           </ac:spMkLst>
         </pc:spChg>
         <pc:spChg chg="add mod">
@@ -2417,60 +1642,12 @@
             <ac:spMk id="150" creationId="{17961D1E-37EF-54E7-4FB2-232A69AA401C}"/>
           </ac:spMkLst>
         </pc:spChg>
-        <pc:spChg chg="add del mod">
-          <ac:chgData name="Jonah St. Hilaire" userId="9d0a7af2-d0bd-4748-b50b-5cc37e0fdaa3" providerId="ADAL" clId="{58AAB240-BB3C-43BA-87E9-80C5D70C8BCC}" dt="2026-09-11T19:18:07.586" v="3832" actId="478"/>
-          <ac:spMkLst>
-            <pc:docMk/>
-            <pc:sldMk cId="3939624714" sldId="260"/>
-            <ac:spMk id="151" creationId="{44516E87-085D-C7E6-52B1-113E96CAFF4C}"/>
-          </ac:spMkLst>
-        </pc:spChg>
-        <pc:spChg chg="add del mod">
-          <ac:chgData name="Jonah St. Hilaire" userId="9d0a7af2-d0bd-4748-b50b-5cc37e0fdaa3" providerId="ADAL" clId="{58AAB240-BB3C-43BA-87E9-80C5D70C8BCC}" dt="2026-09-11T19:18:08.195" v="3833" actId="478"/>
-          <ac:spMkLst>
-            <pc:docMk/>
-            <pc:sldMk cId="3939624714" sldId="260"/>
-            <ac:spMk id="152" creationId="{563AC86A-E417-E1BC-87F1-7FAC7A92F66A}"/>
-          </ac:spMkLst>
-        </pc:spChg>
-        <pc:spChg chg="add del mod">
-          <ac:chgData name="Jonah St. Hilaire" userId="9d0a7af2-d0bd-4748-b50b-5cc37e0fdaa3" providerId="ADAL" clId="{58AAB240-BB3C-43BA-87E9-80C5D70C8BCC}" dt="2026-09-11T19:18:08.671" v="3834" actId="478"/>
-          <ac:spMkLst>
-            <pc:docMk/>
-            <pc:sldMk cId="3939624714" sldId="260"/>
-            <ac:spMk id="156" creationId="{51DB353B-D786-18DB-F144-FB99D6027E1F}"/>
-          </ac:spMkLst>
-        </pc:spChg>
-        <pc:spChg chg="add del mod">
-          <ac:chgData name="Jonah St. Hilaire" userId="9d0a7af2-d0bd-4748-b50b-5cc37e0fdaa3" providerId="ADAL" clId="{58AAB240-BB3C-43BA-87E9-80C5D70C8BCC}" dt="2026-09-11T19:18:50.398" v="3871" actId="478"/>
-          <ac:spMkLst>
-            <pc:docMk/>
-            <pc:sldMk cId="3939624714" sldId="260"/>
-            <ac:spMk id="157" creationId="{49A4706F-4E2A-4512-D574-69D3944986AE}"/>
-          </ac:spMkLst>
-        </pc:spChg>
-        <pc:spChg chg="add del">
-          <ac:chgData name="Jonah St. Hilaire" userId="9d0a7af2-d0bd-4748-b50b-5cc37e0fdaa3" providerId="ADAL" clId="{58AAB240-BB3C-43BA-87E9-80C5D70C8BCC}" dt="2026-09-11T19:21:08.726" v="3916" actId="22"/>
-          <ac:spMkLst>
-            <pc:docMk/>
-            <pc:sldMk cId="3939624714" sldId="260"/>
-            <ac:spMk id="159" creationId="{5EA985EF-E934-40E4-B5F4-528AA9D6A7D9}"/>
-          </ac:spMkLst>
-        </pc:spChg>
         <pc:spChg chg="add mod ord">
           <ac:chgData name="Jonah St. Hilaire" userId="9d0a7af2-d0bd-4748-b50b-5cc37e0fdaa3" providerId="ADAL" clId="{58AAB240-BB3C-43BA-87E9-80C5D70C8BCC}" dt="2026-09-11T19:30:01.483" v="4181" actId="166"/>
           <ac:spMkLst>
             <pc:docMk/>
             <pc:sldMk cId="3939624714" sldId="260"/>
             <ac:spMk id="161" creationId="{E80EA663-04E1-A6F5-830B-C5D4E757B494}"/>
-          </ac:spMkLst>
-        </pc:spChg>
-        <pc:spChg chg="add del mod">
-          <ac:chgData name="Jonah St. Hilaire" userId="9d0a7af2-d0bd-4748-b50b-5cc37e0fdaa3" providerId="ADAL" clId="{58AAB240-BB3C-43BA-87E9-80C5D70C8BCC}" dt="2026-09-11T19:22:53.200" v="4051"/>
-          <ac:spMkLst>
-            <pc:docMk/>
-            <pc:sldMk cId="3939624714" sldId="260"/>
-            <ac:spMk id="162" creationId="{5500D764-534B-2A3A-BFF4-4DC0412D3F3B}"/>
           </ac:spMkLst>
         </pc:spChg>
         <pc:spChg chg="add mod">
@@ -2497,14 +1674,6 @@
             <ac:spMk id="168" creationId="{9F7236E9-0115-DE49-32E6-D9925423328A}"/>
           </ac:spMkLst>
         </pc:spChg>
-        <pc:spChg chg="add del mod">
-          <ac:chgData name="Jonah St. Hilaire" userId="9d0a7af2-d0bd-4748-b50b-5cc37e0fdaa3" providerId="ADAL" clId="{58AAB240-BB3C-43BA-87E9-80C5D70C8BCC}" dt="2026-09-11T19:26:04.366" v="4140" actId="478"/>
-          <ac:spMkLst>
-            <pc:docMk/>
-            <pc:sldMk cId="3939624714" sldId="260"/>
-            <ac:spMk id="170" creationId="{CC86CA11-C459-30EE-B5CA-AF572C6281E8}"/>
-          </ac:spMkLst>
-        </pc:spChg>
         <pc:spChg chg="add mod">
           <ac:chgData name="Jonah St. Hilaire" userId="9d0a7af2-d0bd-4748-b50b-5cc37e0fdaa3" providerId="ADAL" clId="{58AAB240-BB3C-43BA-87E9-80C5D70C8BCC}" dt="2026-09-11T19:31:35.905" v="4222" actId="692"/>
           <ac:spMkLst>
@@ -2529,22 +1698,6 @@
             <ac:spMk id="176" creationId="{8D3B1A68-0757-97AB-86FE-295CA388AF45}"/>
           </ac:spMkLst>
         </pc:spChg>
-        <pc:spChg chg="add del mod">
-          <ac:chgData name="Jonah St. Hilaire" userId="9d0a7af2-d0bd-4748-b50b-5cc37e0fdaa3" providerId="ADAL" clId="{58AAB240-BB3C-43BA-87E9-80C5D70C8BCC}" dt="2026-09-11T19:30:10.887" v="4185" actId="478"/>
-          <ac:spMkLst>
-            <pc:docMk/>
-            <pc:sldMk cId="3939624714" sldId="260"/>
-            <ac:spMk id="186" creationId="{25236FD2-5B75-FD1B-18AB-EE9EA772618A}"/>
-          </ac:spMkLst>
-        </pc:spChg>
-        <pc:spChg chg="add del mod">
-          <ac:chgData name="Jonah St. Hilaire" userId="9d0a7af2-d0bd-4748-b50b-5cc37e0fdaa3" providerId="ADAL" clId="{58AAB240-BB3C-43BA-87E9-80C5D70C8BCC}" dt="2026-09-11T19:30:09.923" v="4184" actId="478"/>
-          <ac:spMkLst>
-            <pc:docMk/>
-            <pc:sldMk cId="3939624714" sldId="260"/>
-            <ac:spMk id="187" creationId="{6E16CA6D-433B-5EFD-4B92-033FEAA8F87E}"/>
-          </ac:spMkLst>
-        </pc:spChg>
         <pc:spChg chg="add mod">
           <ac:chgData name="Jonah St. Hilaire" userId="9d0a7af2-d0bd-4748-b50b-5cc37e0fdaa3" providerId="ADAL" clId="{58AAB240-BB3C-43BA-87E9-80C5D70C8BCC}" dt="2026-09-11T19:34:09.560" v="4243"/>
           <ac:spMkLst>
@@ -2561,14 +1714,6 @@
             <ac:spMk id="207" creationId="{898B7E5A-375A-5176-C9F1-F05B521D91F3}"/>
           </ac:spMkLst>
         </pc:spChg>
-        <pc:grpChg chg="del">
-          <ac:chgData name="Jonah St. Hilaire" userId="9d0a7af2-d0bd-4748-b50b-5cc37e0fdaa3" providerId="ADAL" clId="{58AAB240-BB3C-43BA-87E9-80C5D70C8BCC}" dt="2026-09-11T17:06:05.538" v="3001" actId="478"/>
-          <ac:grpSpMkLst>
-            <pc:docMk/>
-            <pc:sldMk cId="3939624714" sldId="260"/>
-            <ac:grpSpMk id="55" creationId="{F2A3C9A9-5CDE-8A64-4633-E4D5DD6D7A67}"/>
-          </ac:grpSpMkLst>
-        </pc:grpChg>
         <pc:grpChg chg="add mod">
           <ac:chgData name="Jonah St. Hilaire" userId="9d0a7af2-d0bd-4748-b50b-5cc37e0fdaa3" providerId="ADAL" clId="{58AAB240-BB3C-43BA-87E9-80C5D70C8BCC}" dt="2026-09-11T18:55:40.122" v="3020" actId="1076"/>
           <ac:grpSpMkLst>
@@ -2585,30 +1730,6 @@
             <ac:picMk id="103" creationId="{B554567E-38EA-F25D-5AD3-FD5BD2ADF56C}"/>
           </ac:picMkLst>
         </pc:picChg>
-        <pc:cxnChg chg="mod">
-          <ac:chgData name="Jonah St. Hilaire" userId="9d0a7af2-d0bd-4748-b50b-5cc37e0fdaa3" providerId="ADAL" clId="{58AAB240-BB3C-43BA-87E9-80C5D70C8BCC}" dt="2026-09-11T16:58:35.263" v="2900" actId="478"/>
-          <ac:cxnSpMkLst>
-            <pc:docMk/>
-            <pc:sldMk cId="3939624714" sldId="260"/>
-            <ac:cxnSpMk id="12" creationId="{92E5DA71-66F7-C3C4-1D2C-CBC77CCA0640}"/>
-          </ac:cxnSpMkLst>
-        </pc:cxnChg>
-        <pc:cxnChg chg="mod">
-          <ac:chgData name="Jonah St. Hilaire" userId="9d0a7af2-d0bd-4748-b50b-5cc37e0fdaa3" providerId="ADAL" clId="{58AAB240-BB3C-43BA-87E9-80C5D70C8BCC}" dt="2026-09-11T17:00:27.892" v="2929" actId="478"/>
-          <ac:cxnSpMkLst>
-            <pc:docMk/>
-            <pc:sldMk cId="3939624714" sldId="260"/>
-            <ac:cxnSpMk id="18" creationId="{92413D45-C028-B952-CAA0-9786FBD93CC2}"/>
-          </ac:cxnSpMkLst>
-        </pc:cxnChg>
-        <pc:cxnChg chg="del mod">
-          <ac:chgData name="Jonah St. Hilaire" userId="9d0a7af2-d0bd-4748-b50b-5cc37e0fdaa3" providerId="ADAL" clId="{58AAB240-BB3C-43BA-87E9-80C5D70C8BCC}" dt="2026-09-11T19:13:37.894" v="3763" actId="478"/>
-          <ac:cxnSpMkLst>
-            <pc:docMk/>
-            <pc:sldMk cId="3939624714" sldId="260"/>
-            <ac:cxnSpMk id="31" creationId="{93371252-96D6-58DC-D8E2-38450EE4802F}"/>
-          </ac:cxnSpMkLst>
-        </pc:cxnChg>
         <pc:cxnChg chg="mod">
           <ac:chgData name="Jonah St. Hilaire" userId="9d0a7af2-d0bd-4748-b50b-5cc37e0fdaa3" providerId="ADAL" clId="{58AAB240-BB3C-43BA-87E9-80C5D70C8BCC}" dt="2026-09-11T18:58:16.086" v="3072" actId="1035"/>
           <ac:cxnSpMkLst>
@@ -2631,38 +1752,6 @@
             <pc:docMk/>
             <pc:sldMk cId="3939624714" sldId="260"/>
             <ac:cxnSpMk id="43" creationId="{B6EFC526-1190-3AB7-243B-3DE425F580E0}"/>
-          </ac:cxnSpMkLst>
-        </pc:cxnChg>
-        <pc:cxnChg chg="del">
-          <ac:chgData name="Jonah St. Hilaire" userId="9d0a7af2-d0bd-4748-b50b-5cc37e0fdaa3" providerId="ADAL" clId="{58AAB240-BB3C-43BA-87E9-80C5D70C8BCC}" dt="2026-09-11T19:13:06.740" v="3758" actId="478"/>
-          <ac:cxnSpMkLst>
-            <pc:docMk/>
-            <pc:sldMk cId="3939624714" sldId="260"/>
-            <ac:cxnSpMk id="44" creationId="{102A04E2-DF87-32EE-AA02-9929A0F739E1}"/>
-          </ac:cxnSpMkLst>
-        </pc:cxnChg>
-        <pc:cxnChg chg="del">
-          <ac:chgData name="Jonah St. Hilaire" userId="9d0a7af2-d0bd-4748-b50b-5cc37e0fdaa3" providerId="ADAL" clId="{58AAB240-BB3C-43BA-87E9-80C5D70C8BCC}" dt="2026-09-11T19:13:06.740" v="3758" actId="478"/>
-          <ac:cxnSpMkLst>
-            <pc:docMk/>
-            <pc:sldMk cId="3939624714" sldId="260"/>
-            <ac:cxnSpMk id="45" creationId="{4578A3C8-2997-E627-95A6-D027F2F72C5E}"/>
-          </ac:cxnSpMkLst>
-        </pc:cxnChg>
-        <pc:cxnChg chg="del">
-          <ac:chgData name="Jonah St. Hilaire" userId="9d0a7af2-d0bd-4748-b50b-5cc37e0fdaa3" providerId="ADAL" clId="{58AAB240-BB3C-43BA-87E9-80C5D70C8BCC}" dt="2026-09-11T18:55:19.985" v="3014" actId="478"/>
-          <ac:cxnSpMkLst>
-            <pc:docMk/>
-            <pc:sldMk cId="3939624714" sldId="260"/>
-            <ac:cxnSpMk id="46" creationId="{D7460377-5439-6F89-25D1-5A0B2C933EF3}"/>
-          </ac:cxnSpMkLst>
-        </pc:cxnChg>
-        <pc:cxnChg chg="del">
-          <ac:chgData name="Jonah St. Hilaire" userId="9d0a7af2-d0bd-4748-b50b-5cc37e0fdaa3" providerId="ADAL" clId="{58AAB240-BB3C-43BA-87E9-80C5D70C8BCC}" dt="2026-09-11T18:55:19.985" v="3014" actId="478"/>
-          <ac:cxnSpMkLst>
-            <pc:docMk/>
-            <pc:sldMk cId="3939624714" sldId="260"/>
-            <ac:cxnSpMk id="47" creationId="{35C122E2-2E01-DB01-8F51-FA69AE178BAE}"/>
           </ac:cxnSpMkLst>
         </pc:cxnChg>
         <pc:cxnChg chg="mod">
@@ -2713,22 +1802,6 @@
             <ac:cxnSpMk id="65" creationId="{F1C84F3D-D834-73FB-BC01-FBDE05687AFA}"/>
           </ac:cxnSpMkLst>
         </pc:cxnChg>
-        <pc:cxnChg chg="del mod">
-          <ac:chgData name="Jonah St. Hilaire" userId="9d0a7af2-d0bd-4748-b50b-5cc37e0fdaa3" providerId="ADAL" clId="{58AAB240-BB3C-43BA-87E9-80C5D70C8BCC}" dt="2026-09-11T19:07:33.640" v="3545" actId="478"/>
-          <ac:cxnSpMkLst>
-            <pc:docMk/>
-            <pc:sldMk cId="3939624714" sldId="260"/>
-            <ac:cxnSpMk id="66" creationId="{64E38E1C-E601-7E2C-EE6D-94780D61AAD0}"/>
-          </ac:cxnSpMkLst>
-        </pc:cxnChg>
-        <pc:cxnChg chg="del mod">
-          <ac:chgData name="Jonah St. Hilaire" userId="9d0a7af2-d0bd-4748-b50b-5cc37e0fdaa3" providerId="ADAL" clId="{58AAB240-BB3C-43BA-87E9-80C5D70C8BCC}" dt="2026-09-11T19:07:32.311" v="3544" actId="478"/>
-          <ac:cxnSpMkLst>
-            <pc:docMk/>
-            <pc:sldMk cId="3939624714" sldId="260"/>
-            <ac:cxnSpMk id="67" creationId="{AE91153F-1241-C721-9AB9-B4917F9212A2}"/>
-          </ac:cxnSpMkLst>
-        </pc:cxnChg>
         <pc:cxnChg chg="mod">
           <ac:chgData name="Jonah St. Hilaire" userId="9d0a7af2-d0bd-4748-b50b-5cc37e0fdaa3" providerId="ADAL" clId="{58AAB240-BB3C-43BA-87E9-80C5D70C8BCC}" dt="2026-09-11T19:04:38.591" v="3505" actId="692"/>
           <ac:cxnSpMkLst>
@@ -2751,38 +1824,6 @@
             <pc:docMk/>
             <pc:sldMk cId="3939624714" sldId="260"/>
             <ac:cxnSpMk id="75" creationId="{9BF9A0F2-F199-7A80-7DB8-D596C81B21A4}"/>
-          </ac:cxnSpMkLst>
-        </pc:cxnChg>
-        <pc:cxnChg chg="del mod">
-          <ac:chgData name="Jonah St. Hilaire" userId="9d0a7af2-d0bd-4748-b50b-5cc37e0fdaa3" providerId="ADAL" clId="{58AAB240-BB3C-43BA-87E9-80C5D70C8BCC}" dt="2026-09-11T18:55:22.179" v="3015" actId="478"/>
-          <ac:cxnSpMkLst>
-            <pc:docMk/>
-            <pc:sldMk cId="3939624714" sldId="260"/>
-            <ac:cxnSpMk id="80" creationId="{C0DF03B0-FB7E-B571-E9B9-C47B69A89E65}"/>
-          </ac:cxnSpMkLst>
-        </pc:cxnChg>
-        <pc:cxnChg chg="del mod">
-          <ac:chgData name="Jonah St. Hilaire" userId="9d0a7af2-d0bd-4748-b50b-5cc37e0fdaa3" providerId="ADAL" clId="{58AAB240-BB3C-43BA-87E9-80C5D70C8BCC}" dt="2026-09-11T18:55:22.179" v="3015" actId="478"/>
-          <ac:cxnSpMkLst>
-            <pc:docMk/>
-            <pc:sldMk cId="3939624714" sldId="260"/>
-            <ac:cxnSpMk id="81" creationId="{6C1F63E6-C3CE-C985-A046-D6DBF4D2229F}"/>
-          </ac:cxnSpMkLst>
-        </pc:cxnChg>
-        <pc:cxnChg chg="del mod">
-          <ac:chgData name="Jonah St. Hilaire" userId="9d0a7af2-d0bd-4748-b50b-5cc37e0fdaa3" providerId="ADAL" clId="{58AAB240-BB3C-43BA-87E9-80C5D70C8BCC}" dt="2026-09-11T18:54:36.997" v="3007" actId="478"/>
-          <ac:cxnSpMkLst>
-            <pc:docMk/>
-            <pc:sldMk cId="3939624714" sldId="260"/>
-            <ac:cxnSpMk id="84" creationId="{2C42A1D0-F0E2-E0EF-C6CD-7765CADE3E0B}"/>
-          </ac:cxnSpMkLst>
-        </pc:cxnChg>
-        <pc:cxnChg chg="del mod">
-          <ac:chgData name="Jonah St. Hilaire" userId="9d0a7af2-d0bd-4748-b50b-5cc37e0fdaa3" providerId="ADAL" clId="{58AAB240-BB3C-43BA-87E9-80C5D70C8BCC}" dt="2026-09-11T18:54:37.598" v="3008" actId="478"/>
-          <ac:cxnSpMkLst>
-            <pc:docMk/>
-            <pc:sldMk cId="3939624714" sldId="260"/>
-            <ac:cxnSpMk id="85" creationId="{9D9D23A1-5BE7-BAB0-948E-286C533D0828}"/>
           </ac:cxnSpMkLst>
         </pc:cxnChg>
         <pc:cxnChg chg="add mod">
@@ -2841,14 +1882,6 @@
             <ac:cxnSpMk id="136" creationId="{6EA55729-B720-0CB7-A503-3FFEF2D56B3F}"/>
           </ac:cxnSpMkLst>
         </pc:cxnChg>
-        <pc:cxnChg chg="add del mod">
-          <ac:chgData name="Jonah St. Hilaire" userId="9d0a7af2-d0bd-4748-b50b-5cc37e0fdaa3" providerId="ADAL" clId="{58AAB240-BB3C-43BA-87E9-80C5D70C8BCC}" dt="2026-09-11T19:14:35.679" v="3778" actId="478"/>
-          <ac:cxnSpMkLst>
-            <pc:docMk/>
-            <pc:sldMk cId="3939624714" sldId="260"/>
-            <ac:cxnSpMk id="139" creationId="{7BD35F1D-DE27-043A-C61E-EAA1D64765E9}"/>
-          </ac:cxnSpMkLst>
-        </pc:cxnChg>
         <pc:cxnChg chg="add mod">
           <ac:chgData name="Jonah St. Hilaire" userId="9d0a7af2-d0bd-4748-b50b-5cc37e0fdaa3" providerId="ADAL" clId="{58AAB240-BB3C-43BA-87E9-80C5D70C8BCC}" dt="2026-09-11T19:15:01.199" v="3784" actId="1076"/>
           <ac:cxnSpMkLst>
@@ -2865,30 +1898,6 @@
             <ac:cxnSpMk id="146" creationId="{5ECB1BDD-9D41-C99D-1BDC-E7491586497D}"/>
           </ac:cxnSpMkLst>
         </pc:cxnChg>
-        <pc:cxnChg chg="add del mod">
-          <ac:chgData name="Jonah St. Hilaire" userId="9d0a7af2-d0bd-4748-b50b-5cc37e0fdaa3" providerId="ADAL" clId="{58AAB240-BB3C-43BA-87E9-80C5D70C8BCC}" dt="2026-09-11T19:18:49.822" v="3870" actId="478"/>
-          <ac:cxnSpMkLst>
-            <pc:docMk/>
-            <pc:sldMk cId="3939624714" sldId="260"/>
-            <ac:cxnSpMk id="153" creationId="{80742E90-08F6-6AEB-7595-8B36980BBC3E}"/>
-          </ac:cxnSpMkLst>
-        </pc:cxnChg>
-        <pc:cxnChg chg="add del mod">
-          <ac:chgData name="Jonah St. Hilaire" userId="9d0a7af2-d0bd-4748-b50b-5cc37e0fdaa3" providerId="ADAL" clId="{58AAB240-BB3C-43BA-87E9-80C5D70C8BCC}" dt="2026-09-11T19:18:51.658" v="3872" actId="478"/>
-          <ac:cxnSpMkLst>
-            <pc:docMk/>
-            <pc:sldMk cId="3939624714" sldId="260"/>
-            <ac:cxnSpMk id="154" creationId="{358A776D-5D6F-F85C-F2C3-FAF8F8B7F519}"/>
-          </ac:cxnSpMkLst>
-        </pc:cxnChg>
-        <pc:cxnChg chg="add del mod">
-          <ac:chgData name="Jonah St. Hilaire" userId="9d0a7af2-d0bd-4748-b50b-5cc37e0fdaa3" providerId="ADAL" clId="{58AAB240-BB3C-43BA-87E9-80C5D70C8BCC}" dt="2026-09-11T19:18:22.252" v="3835" actId="478"/>
-          <ac:cxnSpMkLst>
-            <pc:docMk/>
-            <pc:sldMk cId="3939624714" sldId="260"/>
-            <ac:cxnSpMk id="155" creationId="{8A710922-FCEB-BC2C-F4A1-9D4752A0E74F}"/>
-          </ac:cxnSpMkLst>
-        </pc:cxnChg>
         <pc:cxnChg chg="add mod">
           <ac:chgData name="Jonah St. Hilaire" userId="9d0a7af2-d0bd-4748-b50b-5cc37e0fdaa3" providerId="ADAL" clId="{58AAB240-BB3C-43BA-87E9-80C5D70C8BCC}" dt="2026-09-11T19:27:52.003" v="4157" actId="692"/>
           <ac:cxnSpMkLst>
@@ -2903,30 +1912,6 @@
             <pc:docMk/>
             <pc:sldMk cId="3939624714" sldId="260"/>
             <ac:cxnSpMk id="181" creationId="{55B85A1B-CE18-A933-EE99-B698A5B6E008}"/>
-          </ac:cxnSpMkLst>
-        </pc:cxnChg>
-        <pc:cxnChg chg="add del">
-          <ac:chgData name="Jonah St. Hilaire" userId="9d0a7af2-d0bd-4748-b50b-5cc37e0fdaa3" providerId="ADAL" clId="{58AAB240-BB3C-43BA-87E9-80C5D70C8BCC}" dt="2026-09-11T19:28:43.694" v="4164" actId="11529"/>
-          <ac:cxnSpMkLst>
-            <pc:docMk/>
-            <pc:sldMk cId="3939624714" sldId="260"/>
-            <ac:cxnSpMk id="183" creationId="{BA7C6220-B8E3-501D-18C4-E0A0E5741126}"/>
-          </ac:cxnSpMkLst>
-        </pc:cxnChg>
-        <pc:cxnChg chg="add del mod">
-          <ac:chgData name="Jonah St. Hilaire" userId="9d0a7af2-d0bd-4748-b50b-5cc37e0fdaa3" providerId="ADAL" clId="{58AAB240-BB3C-43BA-87E9-80C5D70C8BCC}" dt="2026-09-11T19:29:33.679" v="4174" actId="478"/>
-          <ac:cxnSpMkLst>
-            <pc:docMk/>
-            <pc:sldMk cId="3939624714" sldId="260"/>
-            <ac:cxnSpMk id="184" creationId="{1B012ECD-3852-A17C-AAA7-F90D52E62037}"/>
-          </ac:cxnSpMkLst>
-        </pc:cxnChg>
-        <pc:cxnChg chg="add del mod">
-          <ac:chgData name="Jonah St. Hilaire" userId="9d0a7af2-d0bd-4748-b50b-5cc37e0fdaa3" providerId="ADAL" clId="{58AAB240-BB3C-43BA-87E9-80C5D70C8BCC}" dt="2026-09-11T19:29:57.023" v="4179" actId="478"/>
-          <ac:cxnSpMkLst>
-            <pc:docMk/>
-            <pc:sldMk cId="3939624714" sldId="260"/>
-            <ac:cxnSpMk id="185" creationId="{96C49A77-D282-7D0A-558F-EAA5B43F3643}"/>
           </ac:cxnSpMkLst>
         </pc:cxnChg>
         <pc:cxnChg chg="add mod">
@@ -2953,22 +1938,6 @@
             <ac:cxnSpMk id="195" creationId="{A2E2BC6F-DA8A-9C13-E9EF-D2718D240808}"/>
           </ac:cxnSpMkLst>
         </pc:cxnChg>
-        <pc:cxnChg chg="add del">
-          <ac:chgData name="Jonah St. Hilaire" userId="9d0a7af2-d0bd-4748-b50b-5cc37e0fdaa3" providerId="ADAL" clId="{58AAB240-BB3C-43BA-87E9-80C5D70C8BCC}" dt="2026-09-11T19:32:18.356" v="4228" actId="11529"/>
-          <ac:cxnSpMkLst>
-            <pc:docMk/>
-            <pc:sldMk cId="3939624714" sldId="260"/>
-            <ac:cxnSpMk id="198" creationId="{21A5F2EB-4EAD-6F4B-D234-503771088013}"/>
-          </ac:cxnSpMkLst>
-        </pc:cxnChg>
-        <pc:cxnChg chg="add del">
-          <ac:chgData name="Jonah St. Hilaire" userId="9d0a7af2-d0bd-4748-b50b-5cc37e0fdaa3" providerId="ADAL" clId="{58AAB240-BB3C-43BA-87E9-80C5D70C8BCC}" dt="2026-09-11T19:33:45.028" v="4234" actId="478"/>
-          <ac:cxnSpMkLst>
-            <pc:docMk/>
-            <pc:sldMk cId="3939624714" sldId="260"/>
-            <ac:cxnSpMk id="200" creationId="{BFD229AB-745A-EE5C-E583-78EFA52A3CCB}"/>
-          </ac:cxnSpMkLst>
-        </pc:cxnChg>
         <pc:cxnChg chg="add del mod">
           <ac:chgData name="Jonah St. Hilaire" userId="9d0a7af2-d0bd-4748-b50b-5cc37e0fdaa3" providerId="ADAL" clId="{58AAB240-BB3C-43BA-87E9-80C5D70C8BCC}" dt="2026-09-11T19:33:42.370" v="4233" actId="478"/>
           <ac:cxnSpMkLst>
@@ -2978,280 +1947,6 @@
           </ac:cxnSpMkLst>
         </pc:cxnChg>
       </pc:sldChg>
-      <pc:sldMasterChg chg="modSp modSldLayout">
-        <pc:chgData name="Jonah St. Hilaire" userId="9d0a7af2-d0bd-4748-b50b-5cc37e0fdaa3" providerId="ADAL" clId="{58AAB240-BB3C-43BA-87E9-80C5D70C8BCC}" dt="2026-09-11T16:19:46.133" v="1832"/>
-        <pc:sldMasterMkLst>
-          <pc:docMk/>
-          <pc:sldMasterMk cId="2028697689" sldId="2147483720"/>
-        </pc:sldMasterMkLst>
-        <pc:spChg chg="mod">
-          <ac:chgData name="Jonah St. Hilaire" userId="9d0a7af2-d0bd-4748-b50b-5cc37e0fdaa3" providerId="ADAL" clId="{58AAB240-BB3C-43BA-87E9-80C5D70C8BCC}" dt="2026-09-11T16:19:46.133" v="1832"/>
-          <ac:spMkLst>
-            <pc:docMk/>
-            <pc:sldMasterMk cId="2028697689" sldId="2147483720"/>
-            <ac:spMk id="2" creationId="{00000000-0000-0000-0000-000000000000}"/>
-          </ac:spMkLst>
-        </pc:spChg>
-        <pc:spChg chg="mod">
-          <ac:chgData name="Jonah St. Hilaire" userId="9d0a7af2-d0bd-4748-b50b-5cc37e0fdaa3" providerId="ADAL" clId="{58AAB240-BB3C-43BA-87E9-80C5D70C8BCC}" dt="2026-09-11T16:19:46.133" v="1832"/>
-          <ac:spMkLst>
-            <pc:docMk/>
-            <pc:sldMasterMk cId="2028697689" sldId="2147483720"/>
-            <ac:spMk id="3" creationId="{00000000-0000-0000-0000-000000000000}"/>
-          </ac:spMkLst>
-        </pc:spChg>
-        <pc:spChg chg="mod">
-          <ac:chgData name="Jonah St. Hilaire" userId="9d0a7af2-d0bd-4748-b50b-5cc37e0fdaa3" providerId="ADAL" clId="{58AAB240-BB3C-43BA-87E9-80C5D70C8BCC}" dt="2026-09-11T16:19:46.133" v="1832"/>
-          <ac:spMkLst>
-            <pc:docMk/>
-            <pc:sldMasterMk cId="2028697689" sldId="2147483720"/>
-            <ac:spMk id="4" creationId="{00000000-0000-0000-0000-000000000000}"/>
-          </ac:spMkLst>
-        </pc:spChg>
-        <pc:spChg chg="mod">
-          <ac:chgData name="Jonah St. Hilaire" userId="9d0a7af2-d0bd-4748-b50b-5cc37e0fdaa3" providerId="ADAL" clId="{58AAB240-BB3C-43BA-87E9-80C5D70C8BCC}" dt="2026-09-11T16:19:46.133" v="1832"/>
-          <ac:spMkLst>
-            <pc:docMk/>
-            <pc:sldMasterMk cId="2028697689" sldId="2147483720"/>
-            <ac:spMk id="5" creationId="{00000000-0000-0000-0000-000000000000}"/>
-          </ac:spMkLst>
-        </pc:spChg>
-        <pc:spChg chg="mod">
-          <ac:chgData name="Jonah St. Hilaire" userId="9d0a7af2-d0bd-4748-b50b-5cc37e0fdaa3" providerId="ADAL" clId="{58AAB240-BB3C-43BA-87E9-80C5D70C8BCC}" dt="2026-09-11T16:19:46.133" v="1832"/>
-          <ac:spMkLst>
-            <pc:docMk/>
-            <pc:sldMasterMk cId="2028697689" sldId="2147483720"/>
-            <ac:spMk id="6" creationId="{00000000-0000-0000-0000-000000000000}"/>
-          </ac:spMkLst>
-        </pc:spChg>
-        <pc:sldLayoutChg chg="modSp">
-          <pc:chgData name="Jonah St. Hilaire" userId="9d0a7af2-d0bd-4748-b50b-5cc37e0fdaa3" providerId="ADAL" clId="{58AAB240-BB3C-43BA-87E9-80C5D70C8BCC}" dt="2026-09-11T16:19:46.133" v="1832"/>
-          <pc:sldLayoutMkLst>
-            <pc:docMk/>
-            <pc:sldMasterMk cId="2028697689" sldId="2147483720"/>
-            <pc:sldLayoutMk cId="2995815970" sldId="2147483721"/>
-          </pc:sldLayoutMkLst>
-          <pc:spChg chg="mod">
-            <ac:chgData name="Jonah St. Hilaire" userId="9d0a7af2-d0bd-4748-b50b-5cc37e0fdaa3" providerId="ADAL" clId="{58AAB240-BB3C-43BA-87E9-80C5D70C8BCC}" dt="2026-09-11T16:19:46.133" v="1832"/>
-            <ac:spMkLst>
-              <pc:docMk/>
-              <pc:sldMasterMk cId="2028697689" sldId="2147483720"/>
-              <pc:sldLayoutMk cId="2995815970" sldId="2147483721"/>
-              <ac:spMk id="2" creationId="{00000000-0000-0000-0000-000000000000}"/>
-            </ac:spMkLst>
-          </pc:spChg>
-          <pc:spChg chg="mod">
-            <ac:chgData name="Jonah St. Hilaire" userId="9d0a7af2-d0bd-4748-b50b-5cc37e0fdaa3" providerId="ADAL" clId="{58AAB240-BB3C-43BA-87E9-80C5D70C8BCC}" dt="2026-09-11T16:19:46.133" v="1832"/>
-            <ac:spMkLst>
-              <pc:docMk/>
-              <pc:sldMasterMk cId="2028697689" sldId="2147483720"/>
-              <pc:sldLayoutMk cId="2995815970" sldId="2147483721"/>
-              <ac:spMk id="3" creationId="{00000000-0000-0000-0000-000000000000}"/>
-            </ac:spMkLst>
-          </pc:spChg>
-        </pc:sldLayoutChg>
-        <pc:sldLayoutChg chg="modSp">
-          <pc:chgData name="Jonah St. Hilaire" userId="9d0a7af2-d0bd-4748-b50b-5cc37e0fdaa3" providerId="ADAL" clId="{58AAB240-BB3C-43BA-87E9-80C5D70C8BCC}" dt="2026-09-11T16:19:46.133" v="1832"/>
-          <pc:sldLayoutMkLst>
-            <pc:docMk/>
-            <pc:sldMasterMk cId="2028697689" sldId="2147483720"/>
-            <pc:sldLayoutMk cId="1142108930" sldId="2147483723"/>
-          </pc:sldLayoutMkLst>
-          <pc:spChg chg="mod">
-            <ac:chgData name="Jonah St. Hilaire" userId="9d0a7af2-d0bd-4748-b50b-5cc37e0fdaa3" providerId="ADAL" clId="{58AAB240-BB3C-43BA-87E9-80C5D70C8BCC}" dt="2026-09-11T16:19:46.133" v="1832"/>
-            <ac:spMkLst>
-              <pc:docMk/>
-              <pc:sldMasterMk cId="2028697689" sldId="2147483720"/>
-              <pc:sldLayoutMk cId="1142108930" sldId="2147483723"/>
-              <ac:spMk id="2" creationId="{00000000-0000-0000-0000-000000000000}"/>
-            </ac:spMkLst>
-          </pc:spChg>
-          <pc:spChg chg="mod">
-            <ac:chgData name="Jonah St. Hilaire" userId="9d0a7af2-d0bd-4748-b50b-5cc37e0fdaa3" providerId="ADAL" clId="{58AAB240-BB3C-43BA-87E9-80C5D70C8BCC}" dt="2026-09-11T16:19:46.133" v="1832"/>
-            <ac:spMkLst>
-              <pc:docMk/>
-              <pc:sldMasterMk cId="2028697689" sldId="2147483720"/>
-              <pc:sldLayoutMk cId="1142108930" sldId="2147483723"/>
-              <ac:spMk id="3" creationId="{00000000-0000-0000-0000-000000000000}"/>
-            </ac:spMkLst>
-          </pc:spChg>
-        </pc:sldLayoutChg>
-        <pc:sldLayoutChg chg="modSp">
-          <pc:chgData name="Jonah St. Hilaire" userId="9d0a7af2-d0bd-4748-b50b-5cc37e0fdaa3" providerId="ADAL" clId="{58AAB240-BB3C-43BA-87E9-80C5D70C8BCC}" dt="2026-09-11T16:19:46.133" v="1832"/>
-          <pc:sldLayoutMkLst>
-            <pc:docMk/>
-            <pc:sldMasterMk cId="2028697689" sldId="2147483720"/>
-            <pc:sldLayoutMk cId="506739843" sldId="2147483724"/>
-          </pc:sldLayoutMkLst>
-          <pc:spChg chg="mod">
-            <ac:chgData name="Jonah St. Hilaire" userId="9d0a7af2-d0bd-4748-b50b-5cc37e0fdaa3" providerId="ADAL" clId="{58AAB240-BB3C-43BA-87E9-80C5D70C8BCC}" dt="2026-09-11T16:19:46.133" v="1832"/>
-            <ac:spMkLst>
-              <pc:docMk/>
-              <pc:sldMasterMk cId="2028697689" sldId="2147483720"/>
-              <pc:sldLayoutMk cId="506739843" sldId="2147483724"/>
-              <ac:spMk id="3" creationId="{00000000-0000-0000-0000-000000000000}"/>
-            </ac:spMkLst>
-          </pc:spChg>
-          <pc:spChg chg="mod">
-            <ac:chgData name="Jonah St. Hilaire" userId="9d0a7af2-d0bd-4748-b50b-5cc37e0fdaa3" providerId="ADAL" clId="{58AAB240-BB3C-43BA-87E9-80C5D70C8BCC}" dt="2026-09-11T16:19:46.133" v="1832"/>
-            <ac:spMkLst>
-              <pc:docMk/>
-              <pc:sldMasterMk cId="2028697689" sldId="2147483720"/>
-              <pc:sldLayoutMk cId="506739843" sldId="2147483724"/>
-              <ac:spMk id="4" creationId="{00000000-0000-0000-0000-000000000000}"/>
-            </ac:spMkLst>
-          </pc:spChg>
-        </pc:sldLayoutChg>
-        <pc:sldLayoutChg chg="modSp">
-          <pc:chgData name="Jonah St. Hilaire" userId="9d0a7af2-d0bd-4748-b50b-5cc37e0fdaa3" providerId="ADAL" clId="{58AAB240-BB3C-43BA-87E9-80C5D70C8BCC}" dt="2026-09-11T16:19:46.133" v="1832"/>
-          <pc:sldLayoutMkLst>
-            <pc:docMk/>
-            <pc:sldMasterMk cId="2028697689" sldId="2147483720"/>
-            <pc:sldLayoutMk cId="3092460689" sldId="2147483725"/>
-          </pc:sldLayoutMkLst>
-          <pc:spChg chg="mod">
-            <ac:chgData name="Jonah St. Hilaire" userId="9d0a7af2-d0bd-4748-b50b-5cc37e0fdaa3" providerId="ADAL" clId="{58AAB240-BB3C-43BA-87E9-80C5D70C8BCC}" dt="2026-09-11T16:19:46.133" v="1832"/>
-            <ac:spMkLst>
-              <pc:docMk/>
-              <pc:sldMasterMk cId="2028697689" sldId="2147483720"/>
-              <pc:sldLayoutMk cId="3092460689" sldId="2147483725"/>
-              <ac:spMk id="2" creationId="{00000000-0000-0000-0000-000000000000}"/>
-            </ac:spMkLst>
-          </pc:spChg>
-          <pc:spChg chg="mod">
-            <ac:chgData name="Jonah St. Hilaire" userId="9d0a7af2-d0bd-4748-b50b-5cc37e0fdaa3" providerId="ADAL" clId="{58AAB240-BB3C-43BA-87E9-80C5D70C8BCC}" dt="2026-09-11T16:19:46.133" v="1832"/>
-            <ac:spMkLst>
-              <pc:docMk/>
-              <pc:sldMasterMk cId="2028697689" sldId="2147483720"/>
-              <pc:sldLayoutMk cId="3092460689" sldId="2147483725"/>
-              <ac:spMk id="3" creationId="{00000000-0000-0000-0000-000000000000}"/>
-            </ac:spMkLst>
-          </pc:spChg>
-          <pc:spChg chg="mod">
-            <ac:chgData name="Jonah St. Hilaire" userId="9d0a7af2-d0bd-4748-b50b-5cc37e0fdaa3" providerId="ADAL" clId="{58AAB240-BB3C-43BA-87E9-80C5D70C8BCC}" dt="2026-09-11T16:19:46.133" v="1832"/>
-            <ac:spMkLst>
-              <pc:docMk/>
-              <pc:sldMasterMk cId="2028697689" sldId="2147483720"/>
-              <pc:sldLayoutMk cId="3092460689" sldId="2147483725"/>
-              <ac:spMk id="4" creationId="{00000000-0000-0000-0000-000000000000}"/>
-            </ac:spMkLst>
-          </pc:spChg>
-          <pc:spChg chg="mod">
-            <ac:chgData name="Jonah St. Hilaire" userId="9d0a7af2-d0bd-4748-b50b-5cc37e0fdaa3" providerId="ADAL" clId="{58AAB240-BB3C-43BA-87E9-80C5D70C8BCC}" dt="2026-09-11T16:19:46.133" v="1832"/>
-            <ac:spMkLst>
-              <pc:docMk/>
-              <pc:sldMasterMk cId="2028697689" sldId="2147483720"/>
-              <pc:sldLayoutMk cId="3092460689" sldId="2147483725"/>
-              <ac:spMk id="5" creationId="{00000000-0000-0000-0000-000000000000}"/>
-            </ac:spMkLst>
-          </pc:spChg>
-          <pc:spChg chg="mod">
-            <ac:chgData name="Jonah St. Hilaire" userId="9d0a7af2-d0bd-4748-b50b-5cc37e0fdaa3" providerId="ADAL" clId="{58AAB240-BB3C-43BA-87E9-80C5D70C8BCC}" dt="2026-09-11T16:19:46.133" v="1832"/>
-            <ac:spMkLst>
-              <pc:docMk/>
-              <pc:sldMasterMk cId="2028697689" sldId="2147483720"/>
-              <pc:sldLayoutMk cId="3092460689" sldId="2147483725"/>
-              <ac:spMk id="6" creationId="{00000000-0000-0000-0000-000000000000}"/>
-            </ac:spMkLst>
-          </pc:spChg>
-        </pc:sldLayoutChg>
-        <pc:sldLayoutChg chg="modSp">
-          <pc:chgData name="Jonah St. Hilaire" userId="9d0a7af2-d0bd-4748-b50b-5cc37e0fdaa3" providerId="ADAL" clId="{58AAB240-BB3C-43BA-87E9-80C5D70C8BCC}" dt="2026-09-11T16:19:46.133" v="1832"/>
-          <pc:sldLayoutMkLst>
-            <pc:docMk/>
-            <pc:sldMasterMk cId="2028697689" sldId="2147483720"/>
-            <pc:sldLayoutMk cId="778343880" sldId="2147483728"/>
-          </pc:sldLayoutMkLst>
-          <pc:spChg chg="mod">
-            <ac:chgData name="Jonah St. Hilaire" userId="9d0a7af2-d0bd-4748-b50b-5cc37e0fdaa3" providerId="ADAL" clId="{58AAB240-BB3C-43BA-87E9-80C5D70C8BCC}" dt="2026-09-11T16:19:46.133" v="1832"/>
-            <ac:spMkLst>
-              <pc:docMk/>
-              <pc:sldMasterMk cId="2028697689" sldId="2147483720"/>
-              <pc:sldLayoutMk cId="778343880" sldId="2147483728"/>
-              <ac:spMk id="2" creationId="{00000000-0000-0000-0000-000000000000}"/>
-            </ac:spMkLst>
-          </pc:spChg>
-          <pc:spChg chg="mod">
-            <ac:chgData name="Jonah St. Hilaire" userId="9d0a7af2-d0bd-4748-b50b-5cc37e0fdaa3" providerId="ADAL" clId="{58AAB240-BB3C-43BA-87E9-80C5D70C8BCC}" dt="2026-09-11T16:19:46.133" v="1832"/>
-            <ac:spMkLst>
-              <pc:docMk/>
-              <pc:sldMasterMk cId="2028697689" sldId="2147483720"/>
-              <pc:sldLayoutMk cId="778343880" sldId="2147483728"/>
-              <ac:spMk id="3" creationId="{00000000-0000-0000-0000-000000000000}"/>
-            </ac:spMkLst>
-          </pc:spChg>
-          <pc:spChg chg="mod">
-            <ac:chgData name="Jonah St. Hilaire" userId="9d0a7af2-d0bd-4748-b50b-5cc37e0fdaa3" providerId="ADAL" clId="{58AAB240-BB3C-43BA-87E9-80C5D70C8BCC}" dt="2026-09-11T16:19:46.133" v="1832"/>
-            <ac:spMkLst>
-              <pc:docMk/>
-              <pc:sldMasterMk cId="2028697689" sldId="2147483720"/>
-              <pc:sldLayoutMk cId="778343880" sldId="2147483728"/>
-              <ac:spMk id="4" creationId="{00000000-0000-0000-0000-000000000000}"/>
-            </ac:spMkLst>
-          </pc:spChg>
-        </pc:sldLayoutChg>
-        <pc:sldLayoutChg chg="modSp">
-          <pc:chgData name="Jonah St. Hilaire" userId="9d0a7af2-d0bd-4748-b50b-5cc37e0fdaa3" providerId="ADAL" clId="{58AAB240-BB3C-43BA-87E9-80C5D70C8BCC}" dt="2026-09-11T16:19:46.133" v="1832"/>
-          <pc:sldLayoutMkLst>
-            <pc:docMk/>
-            <pc:sldMasterMk cId="2028697689" sldId="2147483720"/>
-            <pc:sldLayoutMk cId="3384986829" sldId="2147483729"/>
-          </pc:sldLayoutMkLst>
-          <pc:spChg chg="mod">
-            <ac:chgData name="Jonah St. Hilaire" userId="9d0a7af2-d0bd-4748-b50b-5cc37e0fdaa3" providerId="ADAL" clId="{58AAB240-BB3C-43BA-87E9-80C5D70C8BCC}" dt="2026-09-11T16:19:46.133" v="1832"/>
-            <ac:spMkLst>
-              <pc:docMk/>
-              <pc:sldMasterMk cId="2028697689" sldId="2147483720"/>
-              <pc:sldLayoutMk cId="3384986829" sldId="2147483729"/>
-              <ac:spMk id="2" creationId="{00000000-0000-0000-0000-000000000000}"/>
-            </ac:spMkLst>
-          </pc:spChg>
-          <pc:spChg chg="mod">
-            <ac:chgData name="Jonah St. Hilaire" userId="9d0a7af2-d0bd-4748-b50b-5cc37e0fdaa3" providerId="ADAL" clId="{58AAB240-BB3C-43BA-87E9-80C5D70C8BCC}" dt="2026-09-11T16:19:46.133" v="1832"/>
-            <ac:spMkLst>
-              <pc:docMk/>
-              <pc:sldMasterMk cId="2028697689" sldId="2147483720"/>
-              <pc:sldLayoutMk cId="3384986829" sldId="2147483729"/>
-              <ac:spMk id="3" creationId="{00000000-0000-0000-0000-000000000000}"/>
-            </ac:spMkLst>
-          </pc:spChg>
-          <pc:spChg chg="mod">
-            <ac:chgData name="Jonah St. Hilaire" userId="9d0a7af2-d0bd-4748-b50b-5cc37e0fdaa3" providerId="ADAL" clId="{58AAB240-BB3C-43BA-87E9-80C5D70C8BCC}" dt="2026-09-11T16:19:46.133" v="1832"/>
-            <ac:spMkLst>
-              <pc:docMk/>
-              <pc:sldMasterMk cId="2028697689" sldId="2147483720"/>
-              <pc:sldLayoutMk cId="3384986829" sldId="2147483729"/>
-              <ac:spMk id="4" creationId="{00000000-0000-0000-0000-000000000000}"/>
-            </ac:spMkLst>
-          </pc:spChg>
-        </pc:sldLayoutChg>
-        <pc:sldLayoutChg chg="modSp">
-          <pc:chgData name="Jonah St. Hilaire" userId="9d0a7af2-d0bd-4748-b50b-5cc37e0fdaa3" providerId="ADAL" clId="{58AAB240-BB3C-43BA-87E9-80C5D70C8BCC}" dt="2026-09-11T16:19:46.133" v="1832"/>
-          <pc:sldLayoutMkLst>
-            <pc:docMk/>
-            <pc:sldMasterMk cId="2028697689" sldId="2147483720"/>
-            <pc:sldLayoutMk cId="386971641" sldId="2147483731"/>
-          </pc:sldLayoutMkLst>
-          <pc:spChg chg="mod">
-            <ac:chgData name="Jonah St. Hilaire" userId="9d0a7af2-d0bd-4748-b50b-5cc37e0fdaa3" providerId="ADAL" clId="{58AAB240-BB3C-43BA-87E9-80C5D70C8BCC}" dt="2026-09-11T16:19:46.133" v="1832"/>
-            <ac:spMkLst>
-              <pc:docMk/>
-              <pc:sldMasterMk cId="2028697689" sldId="2147483720"/>
-              <pc:sldLayoutMk cId="386971641" sldId="2147483731"/>
-              <ac:spMk id="2" creationId="{00000000-0000-0000-0000-000000000000}"/>
-            </ac:spMkLst>
-          </pc:spChg>
-          <pc:spChg chg="mod">
-            <ac:chgData name="Jonah St. Hilaire" userId="9d0a7af2-d0bd-4748-b50b-5cc37e0fdaa3" providerId="ADAL" clId="{58AAB240-BB3C-43BA-87E9-80C5D70C8BCC}" dt="2026-09-11T16:19:46.133" v="1832"/>
-            <ac:spMkLst>
-              <pc:docMk/>
-              <pc:sldMasterMk cId="2028697689" sldId="2147483720"/>
-              <pc:sldLayoutMk cId="386971641" sldId="2147483731"/>
-              <ac:spMk id="3" creationId="{00000000-0000-0000-0000-000000000000}"/>
-            </ac:spMkLst>
-          </pc:spChg>
-        </pc:sldLayoutChg>
-      </pc:sldMasterChg>
     </pc:docChg>
   </pc:docChgLst>
 </pc:chgInfo>
@@ -3339,7 +2034,7 @@
           <a:p>
             <a:fld id="{681B76C8-650E-46E7-9239-6D2B71F9A944}" type="datetimeFigureOut">
               <a:rPr lang="en-CA" smtClean="0"/>
-              <a:t>2026-09-11</a:t>
+              <a:t>2026-09-14</a:t>
             </a:fld>
             <a:endParaRPr lang="en-CA"/>
           </a:p>
@@ -3822,7 +2517,7 @@
           <a:p>
             <a:fld id="{14C7401E-E5C6-4ADA-88C9-F7478DD83A36}" type="datetimeFigureOut">
               <a:rPr lang="en-CA" smtClean="0"/>
-              <a:t>2026-09-11</a:t>
+              <a:t>2026-09-14</a:t>
             </a:fld>
             <a:endParaRPr lang="en-CA"/>
           </a:p>
@@ -3992,7 +2687,7 @@
           <a:p>
             <a:fld id="{14C7401E-E5C6-4ADA-88C9-F7478DD83A36}" type="datetimeFigureOut">
               <a:rPr lang="en-CA" smtClean="0"/>
-              <a:t>2026-09-11</a:t>
+              <a:t>2026-09-14</a:t>
             </a:fld>
             <a:endParaRPr lang="en-CA"/>
           </a:p>
@@ -4172,7 +2867,7 @@
           <a:p>
             <a:fld id="{14C7401E-E5C6-4ADA-88C9-F7478DD83A36}" type="datetimeFigureOut">
               <a:rPr lang="en-CA" smtClean="0"/>
-              <a:t>2026-09-11</a:t>
+              <a:t>2026-09-14</a:t>
             </a:fld>
             <a:endParaRPr lang="en-CA"/>
           </a:p>
@@ -4342,7 +3037,7 @@
           <a:p>
             <a:fld id="{14C7401E-E5C6-4ADA-88C9-F7478DD83A36}" type="datetimeFigureOut">
               <a:rPr lang="en-CA" smtClean="0"/>
-              <a:t>2026-09-11</a:t>
+              <a:t>2026-09-14</a:t>
             </a:fld>
             <a:endParaRPr lang="en-CA"/>
           </a:p>
@@ -4588,7 +3283,7 @@
           <a:p>
             <a:fld id="{14C7401E-E5C6-4ADA-88C9-F7478DD83A36}" type="datetimeFigureOut">
               <a:rPr lang="en-CA" smtClean="0"/>
-              <a:t>2026-09-11</a:t>
+              <a:t>2026-09-14</a:t>
             </a:fld>
             <a:endParaRPr lang="en-CA"/>
           </a:p>
@@ -4820,7 +3515,7 @@
           <a:p>
             <a:fld id="{14C7401E-E5C6-4ADA-88C9-F7478DD83A36}" type="datetimeFigureOut">
               <a:rPr lang="en-CA" smtClean="0"/>
-              <a:t>2026-09-11</a:t>
+              <a:t>2026-09-14</a:t>
             </a:fld>
             <a:endParaRPr lang="en-CA"/>
           </a:p>
@@ -5187,7 +3882,7 @@
           <a:p>
             <a:fld id="{14C7401E-E5C6-4ADA-88C9-F7478DD83A36}" type="datetimeFigureOut">
               <a:rPr lang="en-CA" smtClean="0"/>
-              <a:t>2026-09-11</a:t>
+              <a:t>2026-09-14</a:t>
             </a:fld>
             <a:endParaRPr lang="en-CA"/>
           </a:p>
@@ -5305,7 +4000,7 @@
           <a:p>
             <a:fld id="{14C7401E-E5C6-4ADA-88C9-F7478DD83A36}" type="datetimeFigureOut">
               <a:rPr lang="en-CA" smtClean="0"/>
-              <a:t>2026-09-11</a:t>
+              <a:t>2026-09-14</a:t>
             </a:fld>
             <a:endParaRPr lang="en-CA"/>
           </a:p>
@@ -5400,7 +4095,7 @@
           <a:p>
             <a:fld id="{14C7401E-E5C6-4ADA-88C9-F7478DD83A36}" type="datetimeFigureOut">
               <a:rPr lang="en-CA" smtClean="0"/>
-              <a:t>2026-09-11</a:t>
+              <a:t>2026-09-14</a:t>
             </a:fld>
             <a:endParaRPr lang="en-CA"/>
           </a:p>
@@ -5677,7 +4372,7 @@
           <a:p>
             <a:fld id="{14C7401E-E5C6-4ADA-88C9-F7478DD83A36}" type="datetimeFigureOut">
               <a:rPr lang="en-CA" smtClean="0"/>
-              <a:t>2026-09-11</a:t>
+              <a:t>2026-09-14</a:t>
             </a:fld>
             <a:endParaRPr lang="en-CA"/>
           </a:p>
@@ -5934,7 +4629,7 @@
           <a:p>
             <a:fld id="{14C7401E-E5C6-4ADA-88C9-F7478DD83A36}" type="datetimeFigureOut">
               <a:rPr lang="en-CA" smtClean="0"/>
-              <a:t>2026-09-11</a:t>
+              <a:t>2026-09-14</a:t>
             </a:fld>
             <a:endParaRPr lang="en-CA"/>
           </a:p>
@@ -6147,7 +4842,7 @@
           <a:p>
             <a:fld id="{14C7401E-E5C6-4ADA-88C9-F7478DD83A36}" type="datetimeFigureOut">
               <a:rPr lang="en-CA" smtClean="0"/>
-              <a:t>2026-09-11</a:t>
+              <a:t>2026-09-14</a:t>
             </a:fld>
             <a:endParaRPr lang="en-CA"/>
           </a:p>
@@ -6660,8 +5355,8 @@
           </a:p>
         </p:txBody>
       </p:sp>
-      <mc:AlternateContent xmlns:mc="http://schemas.openxmlformats.org/markup-compatibility/2006">
-        <mc:Choice xmlns:a14="http://schemas.microsoft.com/office/drawing/2010/main" Requires="a14">
+      <mc:AlternateContent xmlns:mc="http://schemas.openxmlformats.org/markup-compatibility/2006" xmlns:a14="http://schemas.microsoft.com/office/drawing/2010/main">
+        <mc:Choice Requires="a14">
           <p:sp>
             <p:nvSpPr>
               <p:cNvPr id="8" name="Rectangle: Rounded Corners 7">
@@ -7084,7 +5779,7 @@
             </p:txBody>
           </p:sp>
         </mc:Choice>
-        <mc:Fallback>
+        <mc:Fallback xmlns="">
           <p:sp>
             <p:nvSpPr>
               <p:cNvPr id="8" name="Rectangle: Rounded Corners 7">
@@ -8787,8 +7482,8 @@
           </p:txBody>
         </p:sp>
       </p:grpSp>
-      <mc:AlternateContent xmlns:mc="http://schemas.openxmlformats.org/markup-compatibility/2006">
-        <mc:Choice xmlns:a14="http://schemas.microsoft.com/office/drawing/2010/main" Requires="a14">
+      <mc:AlternateContent xmlns:mc="http://schemas.openxmlformats.org/markup-compatibility/2006" xmlns:a14="http://schemas.microsoft.com/office/drawing/2010/main">
+        <mc:Choice Requires="a14">
           <p:sp>
             <p:nvSpPr>
               <p:cNvPr id="37" name="Rectangle: Rounded Corners 36">
@@ -9206,7 +7901,7 @@
             </p:txBody>
           </p:sp>
         </mc:Choice>
-        <mc:Fallback>
+        <mc:Fallback xmlns="">
           <p:sp>
             <p:nvSpPr>
               <p:cNvPr id="37" name="Rectangle: Rounded Corners 36">
@@ -9806,8 +8501,8 @@
           </a:fontRef>
         </p:style>
       </p:cxnSp>
-      <mc:AlternateContent xmlns:mc="http://schemas.openxmlformats.org/markup-compatibility/2006">
-        <mc:Choice xmlns:a14="http://schemas.microsoft.com/office/drawing/2010/main" Requires="a14">
+      <mc:AlternateContent xmlns:mc="http://schemas.openxmlformats.org/markup-compatibility/2006" xmlns:a14="http://schemas.microsoft.com/office/drawing/2010/main">
+        <mc:Choice Requires="a14">
           <p:sp>
             <p:nvSpPr>
               <p:cNvPr id="88" name="TextBox 87">
@@ -9873,7 +8568,7 @@
             </p:txBody>
           </p:sp>
         </mc:Choice>
-        <mc:Fallback>
+        <mc:Fallback xmlns="">
           <p:sp>
             <p:nvSpPr>
               <p:cNvPr id="88" name="TextBox 87">
@@ -9918,8 +8613,8 @@
           </p:sp>
         </mc:Fallback>
       </mc:AlternateContent>
-      <mc:AlternateContent xmlns:mc="http://schemas.openxmlformats.org/markup-compatibility/2006">
-        <mc:Choice xmlns:a14="http://schemas.microsoft.com/office/drawing/2010/main" Requires="a14">
+      <mc:AlternateContent xmlns:mc="http://schemas.openxmlformats.org/markup-compatibility/2006" xmlns:a14="http://schemas.microsoft.com/office/drawing/2010/main">
+        <mc:Choice Requires="a14">
           <p:sp>
             <p:nvSpPr>
               <p:cNvPr id="89" name="TextBox 88">
@@ -9988,7 +8683,7 @@
             </p:txBody>
           </p:sp>
         </mc:Choice>
-        <mc:Fallback>
+        <mc:Fallback xmlns="">
           <p:sp>
             <p:nvSpPr>
               <p:cNvPr id="89" name="TextBox 88">
@@ -10079,8 +8774,8 @@
           </a:fontRef>
         </p:style>
       </p:cxnSp>
-      <mc:AlternateContent xmlns:mc="http://schemas.openxmlformats.org/markup-compatibility/2006">
-        <mc:Choice xmlns:a14="http://schemas.microsoft.com/office/drawing/2010/main" Requires="a14">
+      <mc:AlternateContent xmlns:mc="http://schemas.openxmlformats.org/markup-compatibility/2006" xmlns:a14="http://schemas.microsoft.com/office/drawing/2010/main">
+        <mc:Choice Requires="a14">
           <p:sp>
             <p:nvSpPr>
               <p:cNvPr id="92" name="TextBox 91">
@@ -10154,7 +8849,7 @@
             </p:txBody>
           </p:sp>
         </mc:Choice>
-        <mc:Fallback>
+        <mc:Fallback xmlns="">
           <p:sp>
             <p:nvSpPr>
               <p:cNvPr id="92" name="TextBox 91">
@@ -10199,8 +8894,8 @@
           </p:sp>
         </mc:Fallback>
       </mc:AlternateContent>
-      <mc:AlternateContent xmlns:mc="http://schemas.openxmlformats.org/markup-compatibility/2006">
-        <mc:Choice xmlns:a14="http://schemas.microsoft.com/office/drawing/2010/main" Requires="a14">
+      <mc:AlternateContent xmlns:mc="http://schemas.openxmlformats.org/markup-compatibility/2006" xmlns:a14="http://schemas.microsoft.com/office/drawing/2010/main">
+        <mc:Choice Requires="a14">
           <p:sp>
             <p:nvSpPr>
               <p:cNvPr id="93" name="TextBox 92">
@@ -10277,7 +8972,7 @@
             </p:txBody>
           </p:sp>
         </mc:Choice>
-        <mc:Fallback>
+        <mc:Fallback xmlns="">
           <p:sp>
             <p:nvSpPr>
               <p:cNvPr id="93" name="TextBox 92">
@@ -10439,8 +9134,8 @@
           </a:p>
         </p:txBody>
       </p:sp>
-      <mc:AlternateContent xmlns:mc="http://schemas.openxmlformats.org/markup-compatibility/2006">
-        <mc:Choice xmlns:a14="http://schemas.microsoft.com/office/drawing/2010/main" Requires="a14">
+      <mc:AlternateContent xmlns:mc="http://schemas.openxmlformats.org/markup-compatibility/2006" xmlns:a14="http://schemas.microsoft.com/office/drawing/2010/main">
+        <mc:Choice Requires="a14">
           <p:sp>
             <p:nvSpPr>
               <p:cNvPr id="98" name="TextBox 97">
@@ -10518,7 +9213,7 @@
             </p:txBody>
           </p:sp>
         </mc:Choice>
-        <mc:Fallback>
+        <mc:Fallback xmlns="">
           <p:sp>
             <p:nvSpPr>
               <p:cNvPr id="98" name="TextBox 97">
@@ -10563,8 +9258,8 @@
           </p:sp>
         </mc:Fallback>
       </mc:AlternateContent>
-      <mc:AlternateContent xmlns:mc="http://schemas.openxmlformats.org/markup-compatibility/2006">
-        <mc:Choice xmlns:a14="http://schemas.microsoft.com/office/drawing/2010/main" Requires="a14">
+      <mc:AlternateContent xmlns:mc="http://schemas.openxmlformats.org/markup-compatibility/2006" xmlns:a14="http://schemas.microsoft.com/office/drawing/2010/main">
+        <mc:Choice Requires="a14">
           <p:sp>
             <p:nvSpPr>
               <p:cNvPr id="99" name="TextBox 98">
@@ -10642,7 +9337,7 @@
             </p:txBody>
           </p:sp>
         </mc:Choice>
-        <mc:Fallback>
+        <mc:Fallback xmlns="">
           <p:sp>
             <p:nvSpPr>
               <p:cNvPr id="99" name="TextBox 98">
@@ -10687,8 +9382,8 @@
           </p:sp>
         </mc:Fallback>
       </mc:AlternateContent>
-      <mc:AlternateContent xmlns:mc="http://schemas.openxmlformats.org/markup-compatibility/2006">
-        <mc:Choice xmlns:a14="http://schemas.microsoft.com/office/drawing/2010/main" Requires="a14">
+      <mc:AlternateContent xmlns:mc="http://schemas.openxmlformats.org/markup-compatibility/2006" xmlns:a14="http://schemas.microsoft.com/office/drawing/2010/main">
+        <mc:Choice Requires="a14">
           <p:sp>
             <p:nvSpPr>
               <p:cNvPr id="101" name="Rectangle: Rounded Corners 100">
@@ -11208,7 +9903,7 @@
             </p:txBody>
           </p:sp>
         </mc:Choice>
-        <mc:Fallback>
+        <mc:Fallback xmlns="">
           <p:sp>
             <p:nvSpPr>
               <p:cNvPr id="101" name="Rectangle: Rounded Corners 100">
@@ -11262,8 +9957,8 @@
           </p:sp>
         </mc:Fallback>
       </mc:AlternateContent>
-      <mc:AlternateContent xmlns:mc="http://schemas.openxmlformats.org/markup-compatibility/2006">
-        <mc:Choice xmlns:a14="http://schemas.microsoft.com/office/drawing/2010/main" Requires="a14">
+      <mc:AlternateContent xmlns:mc="http://schemas.openxmlformats.org/markup-compatibility/2006" xmlns:a14="http://schemas.microsoft.com/office/drawing/2010/main">
+        <mc:Choice Requires="a14">
           <p:sp>
             <p:nvSpPr>
               <p:cNvPr id="106" name="Rectangle: Rounded Corners 105">
@@ -11388,7 +10083,7 @@
             </p:txBody>
           </p:sp>
         </mc:Choice>
-        <mc:Fallback>
+        <mc:Fallback xmlns="">
           <p:sp>
             <p:nvSpPr>
               <p:cNvPr id="106" name="Rectangle: Rounded Corners 105">
@@ -11485,8 +10180,8 @@
           </a:fontRef>
         </p:style>
       </p:cxnSp>
-      <mc:AlternateContent xmlns:mc="http://schemas.openxmlformats.org/markup-compatibility/2006">
-        <mc:Choice xmlns:a14="http://schemas.microsoft.com/office/drawing/2010/main" Requires="a14">
+      <mc:AlternateContent xmlns:mc="http://schemas.openxmlformats.org/markup-compatibility/2006" xmlns:a14="http://schemas.microsoft.com/office/drawing/2010/main">
+        <mc:Choice Requires="a14">
           <p:sp>
             <p:nvSpPr>
               <p:cNvPr id="109" name="TextBox 108">
@@ -11560,7 +10255,7 @@
             </p:txBody>
           </p:sp>
         </mc:Choice>
-        <mc:Fallback>
+        <mc:Fallback xmlns="">
           <p:sp>
             <p:nvSpPr>
               <p:cNvPr id="109" name="TextBox 108">
@@ -11605,8 +10300,8 @@
           </p:sp>
         </mc:Fallback>
       </mc:AlternateContent>
-      <mc:AlternateContent xmlns:mc="http://schemas.openxmlformats.org/markup-compatibility/2006">
-        <mc:Choice xmlns:a14="http://schemas.microsoft.com/office/drawing/2010/main" Requires="a14">
+      <mc:AlternateContent xmlns:mc="http://schemas.openxmlformats.org/markup-compatibility/2006" xmlns:a14="http://schemas.microsoft.com/office/drawing/2010/main">
+        <mc:Choice Requires="a14">
           <p:sp>
             <p:nvSpPr>
               <p:cNvPr id="110" name="TextBox 109">
@@ -11680,7 +10375,7 @@
             </p:txBody>
           </p:sp>
         </mc:Choice>
-        <mc:Fallback>
+        <mc:Fallback xmlns="">
           <p:sp>
             <p:nvSpPr>
               <p:cNvPr id="110" name="TextBox 109">
@@ -11725,8 +10420,8 @@
           </p:sp>
         </mc:Fallback>
       </mc:AlternateContent>
-      <mc:AlternateContent xmlns:mc="http://schemas.openxmlformats.org/markup-compatibility/2006">
-        <mc:Choice xmlns:a14="http://schemas.microsoft.com/office/drawing/2010/main" Requires="a14">
+      <mc:AlternateContent xmlns:mc="http://schemas.openxmlformats.org/markup-compatibility/2006" xmlns:a14="http://schemas.microsoft.com/office/drawing/2010/main">
+        <mc:Choice Requires="a14">
           <p:sp>
             <p:nvSpPr>
               <p:cNvPr id="114" name="Rectangle: Rounded Corners 113">
@@ -12215,7 +10910,7 @@
             </p:txBody>
           </p:sp>
         </mc:Choice>
-        <mc:Fallback>
+        <mc:Fallback xmlns="">
           <p:sp>
             <p:nvSpPr>
               <p:cNvPr id="114" name="Rectangle: Rounded Corners 113">
@@ -12445,8 +11140,8 @@
           </a:fontRef>
         </p:style>
       </p:cxnSp>
-      <mc:AlternateContent xmlns:mc="http://schemas.openxmlformats.org/markup-compatibility/2006">
-        <mc:Choice xmlns:a14="http://schemas.microsoft.com/office/drawing/2010/main" Requires="a14">
+      <mc:AlternateContent xmlns:mc="http://schemas.openxmlformats.org/markup-compatibility/2006" xmlns:a14="http://schemas.microsoft.com/office/drawing/2010/main">
+        <mc:Choice Requires="a14">
           <p:sp>
             <p:nvSpPr>
               <p:cNvPr id="6" name="TextBox 5">
@@ -12500,7 +11195,7 @@
                             <m:rPr>
                               <m:nor/>
                             </m:rPr>
-                            <a:rPr lang="en-US" sz="700" dirty="0">
+                            <a:rPr lang="en-US" sz="700" i="0" dirty="0">
                               <a:latin typeface="Times New Roman" panose="02020603050405020304" pitchFamily="18" charset="0"/>
                               <a:ea typeface="Cambria Math" panose="02040503050406030204" pitchFamily="18" charset="0"/>
                               <a:cs typeface="Times New Roman" panose="02020603050405020304" pitchFamily="18" charset="0"/>
@@ -12528,7 +11223,7 @@
             </p:txBody>
           </p:sp>
         </mc:Choice>
-        <mc:Fallback>
+        <mc:Fallback xmlns="">
           <p:sp>
             <p:nvSpPr>
               <p:cNvPr id="6" name="TextBox 5">
@@ -12573,8 +11268,8 @@
           </p:sp>
         </mc:Fallback>
       </mc:AlternateContent>
-      <mc:AlternateContent xmlns:mc="http://schemas.openxmlformats.org/markup-compatibility/2006">
-        <mc:Choice xmlns:a14="http://schemas.microsoft.com/office/drawing/2010/main" Requires="a14">
+      <mc:AlternateContent xmlns:mc="http://schemas.openxmlformats.org/markup-compatibility/2006" xmlns:a14="http://schemas.microsoft.com/office/drawing/2010/main">
+        <mc:Choice Requires="a14">
           <p:sp>
             <p:nvSpPr>
               <p:cNvPr id="16" name="TextBox 15">
@@ -12652,7 +11347,7 @@
             </p:txBody>
           </p:sp>
         </mc:Choice>
-        <mc:Fallback>
+        <mc:Fallback xmlns="">
           <p:sp>
             <p:nvSpPr>
               <p:cNvPr id="16" name="TextBox 15">
@@ -12974,8 +11669,8 @@
           </a:fontRef>
         </p:style>
       </p:cxnSp>
-      <mc:AlternateContent xmlns:mc="http://schemas.openxmlformats.org/markup-compatibility/2006">
-        <mc:Choice xmlns:a14="http://schemas.microsoft.com/office/drawing/2010/main" Requires="a14">
+      <mc:AlternateContent xmlns:mc="http://schemas.openxmlformats.org/markup-compatibility/2006" xmlns:a14="http://schemas.microsoft.com/office/drawing/2010/main">
+        <mc:Choice Requires="a14">
           <p:sp>
             <p:nvSpPr>
               <p:cNvPr id="42" name="TextBox 41">
@@ -13029,7 +11724,7 @@
                             <m:rPr>
                               <m:nor/>
                             </m:rPr>
-                            <a:rPr lang="en-CA" sz="700">
+                            <a:rPr lang="en-CA" sz="700" i="0">
                               <a:latin typeface="Cambria Math" panose="02040503050406030204" pitchFamily="18" charset="0"/>
                             </a:rPr>
                             <m:t>a</m:t>
@@ -13055,7 +11750,7 @@
             </p:txBody>
           </p:sp>
         </mc:Choice>
-        <mc:Fallback>
+        <mc:Fallback xmlns="">
           <p:sp>
             <p:nvSpPr>
               <p:cNvPr id="42" name="TextBox 41">
@@ -13100,8 +11795,8 @@
           </p:sp>
         </mc:Fallback>
       </mc:AlternateContent>
-      <mc:AlternateContent xmlns:mc="http://schemas.openxmlformats.org/markup-compatibility/2006">
-        <mc:Choice xmlns:a14="http://schemas.microsoft.com/office/drawing/2010/main" Requires="a14">
+      <mc:AlternateContent xmlns:mc="http://schemas.openxmlformats.org/markup-compatibility/2006" xmlns:a14="http://schemas.microsoft.com/office/drawing/2010/main">
+        <mc:Choice Requires="a14">
           <p:sp>
             <p:nvSpPr>
               <p:cNvPr id="44" name="TextBox 43">
@@ -13181,7 +11876,7 @@
             </p:txBody>
           </p:sp>
         </mc:Choice>
-        <mc:Fallback>
+        <mc:Fallback xmlns="">
           <p:sp>
             <p:nvSpPr>
               <p:cNvPr id="44" name="TextBox 43">
@@ -13226,8 +11921,8 @@
           </p:sp>
         </mc:Fallback>
       </mc:AlternateContent>
-      <mc:AlternateContent xmlns:mc="http://schemas.openxmlformats.org/markup-compatibility/2006">
-        <mc:Choice xmlns:a14="http://schemas.microsoft.com/office/drawing/2010/main" Requires="a14">
+      <mc:AlternateContent xmlns:mc="http://schemas.openxmlformats.org/markup-compatibility/2006" xmlns:a14="http://schemas.microsoft.com/office/drawing/2010/main">
+        <mc:Choice Requires="a14">
           <p:sp>
             <p:nvSpPr>
               <p:cNvPr id="45" name="TextBox 44">
@@ -13307,7 +12002,7 @@
             </p:txBody>
           </p:sp>
         </mc:Choice>
-        <mc:Fallback>
+        <mc:Fallback xmlns="">
           <p:sp>
             <p:nvSpPr>
               <p:cNvPr id="45" name="TextBox 44">
@@ -13676,8 +12371,8 @@
           </a:fontRef>
         </p:style>
       </p:cxnSp>
-      <mc:AlternateContent xmlns:mc="http://schemas.openxmlformats.org/markup-compatibility/2006">
-        <mc:Choice xmlns:a14="http://schemas.microsoft.com/office/drawing/2010/main" Requires="a14">
+      <mc:AlternateContent xmlns:mc="http://schemas.openxmlformats.org/markup-compatibility/2006" xmlns:a14="http://schemas.microsoft.com/office/drawing/2010/main">
+        <mc:Choice Requires="a14">
           <p:sp>
             <p:nvSpPr>
               <p:cNvPr id="57" name="TextBox 56">
@@ -13753,7 +12448,7 @@
             </p:txBody>
           </p:sp>
         </mc:Choice>
-        <mc:Fallback>
+        <mc:Fallback xmlns="">
           <p:sp>
             <p:nvSpPr>
               <p:cNvPr id="57" name="TextBox 56">
@@ -13798,8 +12493,8 @@
           </p:sp>
         </mc:Fallback>
       </mc:AlternateContent>
-      <mc:AlternateContent xmlns:mc="http://schemas.openxmlformats.org/markup-compatibility/2006">
-        <mc:Choice xmlns:a14="http://schemas.microsoft.com/office/drawing/2010/main" Requires="a14">
+      <mc:AlternateContent xmlns:mc="http://schemas.openxmlformats.org/markup-compatibility/2006" xmlns:a14="http://schemas.microsoft.com/office/drawing/2010/main">
+        <mc:Choice Requires="a14">
           <p:sp>
             <p:nvSpPr>
               <p:cNvPr id="58" name="TextBox 57">
@@ -13875,7 +12570,7 @@
             </p:txBody>
           </p:sp>
         </mc:Choice>
-        <mc:Fallback>
+        <mc:Fallback xmlns="">
           <p:sp>
             <p:nvSpPr>
               <p:cNvPr id="58" name="TextBox 57">
@@ -13920,8 +12615,8 @@
           </p:sp>
         </mc:Fallback>
       </mc:AlternateContent>
-      <mc:AlternateContent xmlns:mc="http://schemas.openxmlformats.org/markup-compatibility/2006">
-        <mc:Choice xmlns:a14="http://schemas.microsoft.com/office/drawing/2010/main" Requires="a14">
+      <mc:AlternateContent xmlns:mc="http://schemas.openxmlformats.org/markup-compatibility/2006" xmlns:a14="http://schemas.microsoft.com/office/drawing/2010/main">
+        <mc:Choice Requires="a14">
           <p:sp>
             <p:nvSpPr>
               <p:cNvPr id="60" name="TextBox 59">
@@ -13997,7 +12692,7 @@
             </p:txBody>
           </p:sp>
         </mc:Choice>
-        <mc:Fallback>
+        <mc:Fallback xmlns="">
           <p:sp>
             <p:nvSpPr>
               <p:cNvPr id="60" name="TextBox 59">
@@ -14348,8 +13043,8 @@
           </a:p>
         </p:txBody>
       </p:sp>
-      <mc:AlternateContent xmlns:mc="http://schemas.openxmlformats.org/markup-compatibility/2006">
-        <mc:Choice xmlns:a14="http://schemas.microsoft.com/office/drawing/2010/main" Requires="a14">
+      <mc:AlternateContent xmlns:mc="http://schemas.openxmlformats.org/markup-compatibility/2006" xmlns:a14="http://schemas.microsoft.com/office/drawing/2010/main">
+        <mc:Choice Requires="a14">
           <p:sp>
             <p:nvSpPr>
               <p:cNvPr id="86" name="Rectangle: Rounded Corners 85">
@@ -14474,7 +13169,7 @@
             </p:txBody>
           </p:sp>
         </mc:Choice>
-        <mc:Fallback>
+        <mc:Fallback xmlns="">
           <p:sp>
             <p:nvSpPr>
               <p:cNvPr id="86" name="Rectangle: Rounded Corners 85">
@@ -14526,8 +13221,8 @@
           </p:sp>
         </mc:Fallback>
       </mc:AlternateContent>
-      <mc:AlternateContent xmlns:mc="http://schemas.openxmlformats.org/markup-compatibility/2006">
-        <mc:Choice xmlns:a14="http://schemas.microsoft.com/office/drawing/2010/main" Requires="a14">
+      <mc:AlternateContent xmlns:mc="http://schemas.openxmlformats.org/markup-compatibility/2006" xmlns:a14="http://schemas.microsoft.com/office/drawing/2010/main">
+        <mc:Choice Requires="a14">
           <p:sp>
             <p:nvSpPr>
               <p:cNvPr id="95" name="Rectangle: Rounded Corners 94">
@@ -14780,7 +13475,7 @@
             </p:txBody>
           </p:sp>
         </mc:Choice>
-        <mc:Fallback>
+        <mc:Fallback xmlns="">
           <p:sp>
             <p:nvSpPr>
               <p:cNvPr id="95" name="Rectangle: Rounded Corners 94">
@@ -14877,8 +13572,8 @@
           </a:fontRef>
         </p:style>
       </p:cxnSp>
-      <mc:AlternateContent xmlns:mc="http://schemas.openxmlformats.org/markup-compatibility/2006">
-        <mc:Choice xmlns:a14="http://schemas.microsoft.com/office/drawing/2010/main" Requires="a14">
+      <mc:AlternateContent xmlns:mc="http://schemas.openxmlformats.org/markup-compatibility/2006" xmlns:a14="http://schemas.microsoft.com/office/drawing/2010/main">
+        <mc:Choice Requires="a14">
           <p:sp>
             <p:nvSpPr>
               <p:cNvPr id="107" name="TextBox 106">
@@ -14947,7 +13642,7 @@
             </p:txBody>
           </p:sp>
         </mc:Choice>
-        <mc:Fallback>
+        <mc:Fallback xmlns="">
           <p:sp>
             <p:nvSpPr>
               <p:cNvPr id="107" name="TextBox 106">
@@ -14992,8 +13687,8 @@
           </p:sp>
         </mc:Fallback>
       </mc:AlternateContent>
-      <mc:AlternateContent xmlns:mc="http://schemas.openxmlformats.org/markup-compatibility/2006">
-        <mc:Choice xmlns:a14="http://schemas.microsoft.com/office/drawing/2010/main" Requires="a14">
+      <mc:AlternateContent xmlns:mc="http://schemas.openxmlformats.org/markup-compatibility/2006" xmlns:a14="http://schemas.microsoft.com/office/drawing/2010/main">
+        <mc:Choice Requires="a14">
           <p:sp>
             <p:nvSpPr>
               <p:cNvPr id="111" name="TextBox 110">
@@ -15062,7 +13757,7 @@
             </p:txBody>
           </p:sp>
         </mc:Choice>
-        <mc:Fallback>
+        <mc:Fallback xmlns="">
           <p:sp>
             <p:nvSpPr>
               <p:cNvPr id="111" name="TextBox 110">
@@ -15107,8 +13802,8 @@
           </p:sp>
         </mc:Fallback>
       </mc:AlternateContent>
-      <mc:AlternateContent xmlns:mc="http://schemas.openxmlformats.org/markup-compatibility/2006">
-        <mc:Choice xmlns:a14="http://schemas.microsoft.com/office/drawing/2010/main" Requires="a14">
+      <mc:AlternateContent xmlns:mc="http://schemas.openxmlformats.org/markup-compatibility/2006" xmlns:a14="http://schemas.microsoft.com/office/drawing/2010/main">
+        <mc:Choice Requires="a14">
           <p:sp>
             <p:nvSpPr>
               <p:cNvPr id="112" name="TextBox 111">
@@ -15177,7 +13872,7 @@
             </p:txBody>
           </p:sp>
         </mc:Choice>
-        <mc:Fallback>
+        <mc:Fallback xmlns="">
           <p:sp>
             <p:nvSpPr>
               <p:cNvPr id="112" name="TextBox 111">
@@ -15459,8 +14154,8 @@
           </a:fontRef>
         </p:style>
       </p:cxnSp>
-      <mc:AlternateContent xmlns:mc="http://schemas.openxmlformats.org/markup-compatibility/2006">
-        <mc:Choice xmlns:a14="http://schemas.microsoft.com/office/drawing/2010/main" Requires="a14">
+      <mc:AlternateContent xmlns:mc="http://schemas.openxmlformats.org/markup-compatibility/2006" xmlns:a14="http://schemas.microsoft.com/office/drawing/2010/main">
+        <mc:Choice Requires="a14">
           <p:sp>
             <p:nvSpPr>
               <p:cNvPr id="130" name="TextBox 129">
@@ -15529,7 +14224,7 @@
             </p:txBody>
           </p:sp>
         </mc:Choice>
-        <mc:Fallback>
+        <mc:Fallback xmlns="">
           <p:sp>
             <p:nvSpPr>
               <p:cNvPr id="130" name="TextBox 129">
@@ -15574,8 +14269,8 @@
           </p:sp>
         </mc:Fallback>
       </mc:AlternateContent>
-      <mc:AlternateContent xmlns:mc="http://schemas.openxmlformats.org/markup-compatibility/2006">
-        <mc:Choice xmlns:a14="http://schemas.microsoft.com/office/drawing/2010/main" Requires="a14">
+      <mc:AlternateContent xmlns:mc="http://schemas.openxmlformats.org/markup-compatibility/2006" xmlns:a14="http://schemas.microsoft.com/office/drawing/2010/main">
+        <mc:Choice Requires="a14">
           <p:sp>
             <p:nvSpPr>
               <p:cNvPr id="131" name="TextBox 130">
@@ -15647,7 +14342,7 @@
             </p:txBody>
           </p:sp>
         </mc:Choice>
-        <mc:Fallback>
+        <mc:Fallback xmlns="">
           <p:sp>
             <p:nvSpPr>
               <p:cNvPr id="131" name="TextBox 130">
@@ -15692,8 +14387,8 @@
           </p:sp>
         </mc:Fallback>
       </mc:AlternateContent>
-      <mc:AlternateContent xmlns:mc="http://schemas.openxmlformats.org/markup-compatibility/2006">
-        <mc:Choice xmlns:a14="http://schemas.microsoft.com/office/drawing/2010/main" Requires="a14">
+      <mc:AlternateContent xmlns:mc="http://schemas.openxmlformats.org/markup-compatibility/2006" xmlns:a14="http://schemas.microsoft.com/office/drawing/2010/main">
+        <mc:Choice Requires="a14">
           <p:sp>
             <p:nvSpPr>
               <p:cNvPr id="132" name="TextBox 131">
@@ -15765,7 +14460,7 @@
             </p:txBody>
           </p:sp>
         </mc:Choice>
-        <mc:Fallback>
+        <mc:Fallback xmlns="">
           <p:sp>
             <p:nvSpPr>
               <p:cNvPr id="132" name="TextBox 131">
@@ -16101,8 +14796,8 @@
           </a:fontRef>
         </p:style>
       </p:cxnSp>
-      <mc:AlternateContent xmlns:mc="http://schemas.openxmlformats.org/markup-compatibility/2006">
-        <mc:Choice xmlns:a14="http://schemas.microsoft.com/office/drawing/2010/main" Requires="a14">
+      <mc:AlternateContent xmlns:mc="http://schemas.openxmlformats.org/markup-compatibility/2006" xmlns:a14="http://schemas.microsoft.com/office/drawing/2010/main">
+        <mc:Choice Requires="a14">
           <p:sp>
             <p:nvSpPr>
               <p:cNvPr id="167" name="TextBox 166">
@@ -16171,7 +14866,7 @@
             </p:txBody>
           </p:sp>
         </mc:Choice>
-        <mc:Fallback>
+        <mc:Fallback xmlns="">
           <p:sp>
             <p:nvSpPr>
               <p:cNvPr id="167" name="TextBox 166">
@@ -16216,8 +14911,8 @@
           </p:sp>
         </mc:Fallback>
       </mc:AlternateContent>
-      <mc:AlternateContent xmlns:mc="http://schemas.openxmlformats.org/markup-compatibility/2006">
-        <mc:Choice xmlns:a14="http://schemas.microsoft.com/office/drawing/2010/main" Requires="a14">
+      <mc:AlternateContent xmlns:mc="http://schemas.openxmlformats.org/markup-compatibility/2006" xmlns:a14="http://schemas.microsoft.com/office/drawing/2010/main">
+        <mc:Choice Requires="a14">
           <p:sp>
             <p:nvSpPr>
               <p:cNvPr id="168" name="TextBox 167">
@@ -16289,7 +14984,7 @@
             </p:txBody>
           </p:sp>
         </mc:Choice>
-        <mc:Fallback>
+        <mc:Fallback xmlns="">
           <p:sp>
             <p:nvSpPr>
               <p:cNvPr id="168" name="TextBox 167">
@@ -16334,8 +15029,8 @@
           </p:sp>
         </mc:Fallback>
       </mc:AlternateContent>
-      <mc:AlternateContent xmlns:mc="http://schemas.openxmlformats.org/markup-compatibility/2006">
-        <mc:Choice xmlns:a14="http://schemas.microsoft.com/office/drawing/2010/main" Requires="a14">
+      <mc:AlternateContent xmlns:mc="http://schemas.openxmlformats.org/markup-compatibility/2006" xmlns:a14="http://schemas.microsoft.com/office/drawing/2010/main">
+        <mc:Choice Requires="a14">
           <p:sp>
             <p:nvSpPr>
               <p:cNvPr id="169" name="TextBox 168">
@@ -16407,7 +15102,7 @@
             </p:txBody>
           </p:sp>
         </mc:Choice>
-        <mc:Fallback>
+        <mc:Fallback xmlns="">
           <p:sp>
             <p:nvSpPr>
               <p:cNvPr id="169" name="TextBox 168">
@@ -16452,8 +15147,8 @@
           </p:sp>
         </mc:Fallback>
       </mc:AlternateContent>
-      <mc:AlternateContent xmlns:mc="http://schemas.openxmlformats.org/markup-compatibility/2006">
-        <mc:Choice xmlns:a14="http://schemas.microsoft.com/office/drawing/2010/main" Requires="a14">
+      <mc:AlternateContent xmlns:mc="http://schemas.openxmlformats.org/markup-compatibility/2006" xmlns:a14="http://schemas.microsoft.com/office/drawing/2010/main">
+        <mc:Choice Requires="a14">
           <p:sp>
             <p:nvSpPr>
               <p:cNvPr id="171" name="Rectangle: Rounded Corners 170">
@@ -16596,7 +15291,7 @@
             </p:txBody>
           </p:sp>
         </mc:Choice>
-        <mc:Fallback>
+        <mc:Fallback xmlns="">
           <p:sp>
             <p:nvSpPr>
               <p:cNvPr id="171" name="Rectangle: Rounded Corners 170">
@@ -16782,8 +15477,8 @@
           </a:fontRef>
         </p:style>
       </p:cxnSp>
-      <mc:AlternateContent xmlns:mc="http://schemas.openxmlformats.org/markup-compatibility/2006">
-        <mc:Choice xmlns:a14="http://schemas.microsoft.com/office/drawing/2010/main" Requires="a14">
+      <mc:AlternateContent xmlns:mc="http://schemas.openxmlformats.org/markup-compatibility/2006" xmlns:a14="http://schemas.microsoft.com/office/drawing/2010/main">
+        <mc:Choice Requires="a14">
           <p:sp>
             <p:nvSpPr>
               <p:cNvPr id="181" name="TextBox 180">
@@ -16852,7 +15547,7 @@
             </p:txBody>
           </p:sp>
         </mc:Choice>
-        <mc:Fallback>
+        <mc:Fallback xmlns="">
           <p:sp>
             <p:nvSpPr>
               <p:cNvPr id="181" name="TextBox 180">
@@ -16897,8 +15592,8 @@
           </p:sp>
         </mc:Fallback>
       </mc:AlternateContent>
-      <mc:AlternateContent xmlns:mc="http://schemas.openxmlformats.org/markup-compatibility/2006">
-        <mc:Choice xmlns:a14="http://schemas.microsoft.com/office/drawing/2010/main" Requires="a14">
+      <mc:AlternateContent xmlns:mc="http://schemas.openxmlformats.org/markup-compatibility/2006" xmlns:a14="http://schemas.microsoft.com/office/drawing/2010/main">
+        <mc:Choice Requires="a14">
           <p:sp>
             <p:nvSpPr>
               <p:cNvPr id="182" name="TextBox 181">
@@ -16970,7 +15665,7 @@
             </p:txBody>
           </p:sp>
         </mc:Choice>
-        <mc:Fallback>
+        <mc:Fallback xmlns="">
           <p:sp>
             <p:nvSpPr>
               <p:cNvPr id="182" name="TextBox 181">
@@ -17015,8 +15710,8 @@
           </p:sp>
         </mc:Fallback>
       </mc:AlternateContent>
-      <mc:AlternateContent xmlns:mc="http://schemas.openxmlformats.org/markup-compatibility/2006">
-        <mc:Choice xmlns:a14="http://schemas.microsoft.com/office/drawing/2010/main" Requires="a14">
+      <mc:AlternateContent xmlns:mc="http://schemas.openxmlformats.org/markup-compatibility/2006" xmlns:a14="http://schemas.microsoft.com/office/drawing/2010/main">
+        <mc:Choice Requires="a14">
           <p:sp>
             <p:nvSpPr>
               <p:cNvPr id="183" name="TextBox 182">
@@ -17088,7 +15783,7 @@
             </p:txBody>
           </p:sp>
         </mc:Choice>
-        <mc:Fallback>
+        <mc:Fallback xmlns="">
           <p:sp>
             <p:nvSpPr>
               <p:cNvPr id="183" name="TextBox 182">
@@ -17133,8 +15828,8 @@
           </p:sp>
         </mc:Fallback>
       </mc:AlternateContent>
-      <mc:AlternateContent xmlns:mc="http://schemas.openxmlformats.org/markup-compatibility/2006">
-        <mc:Choice xmlns:a14="http://schemas.microsoft.com/office/drawing/2010/main" Requires="a14">
+      <mc:AlternateContent xmlns:mc="http://schemas.openxmlformats.org/markup-compatibility/2006" xmlns:a14="http://schemas.microsoft.com/office/drawing/2010/main">
+        <mc:Choice Requires="a14">
           <p:sp>
             <p:nvSpPr>
               <p:cNvPr id="186" name="Rectangle: Rounded Corners 185">
@@ -17633,7 +16328,7 @@
             </p:txBody>
           </p:sp>
         </mc:Choice>
-        <mc:Fallback>
+        <mc:Fallback xmlns="">
           <p:sp>
             <p:nvSpPr>
               <p:cNvPr id="186" name="Rectangle: Rounded Corners 185">
@@ -17687,8 +16382,8 @@
           </p:sp>
         </mc:Fallback>
       </mc:AlternateContent>
-      <mc:AlternateContent xmlns:mc="http://schemas.openxmlformats.org/markup-compatibility/2006">
-        <mc:Choice xmlns:a14="http://schemas.microsoft.com/office/drawing/2010/main" Requires="a14">
+      <mc:AlternateContent xmlns:mc="http://schemas.openxmlformats.org/markup-compatibility/2006" xmlns:a14="http://schemas.microsoft.com/office/drawing/2010/main">
+        <mc:Choice Requires="a14">
           <p:sp>
             <p:nvSpPr>
               <p:cNvPr id="187" name="Rectangle: Rounded Corners 186">
@@ -18218,7 +16913,7 @@
             </p:txBody>
           </p:sp>
         </mc:Choice>
-        <mc:Fallback>
+        <mc:Fallback xmlns="">
           <p:sp>
             <p:nvSpPr>
               <p:cNvPr id="187" name="Rectangle: Rounded Corners 186">
@@ -18404,8 +17099,8 @@
           </a:fontRef>
         </p:style>
       </p:cxnSp>
-      <mc:AlternateContent xmlns:mc="http://schemas.openxmlformats.org/markup-compatibility/2006">
-        <mc:Choice xmlns:a14="http://schemas.microsoft.com/office/drawing/2010/main" Requires="a14">
+      <mc:AlternateContent xmlns:mc="http://schemas.openxmlformats.org/markup-compatibility/2006" xmlns:a14="http://schemas.microsoft.com/office/drawing/2010/main">
+        <mc:Choice Requires="a14">
           <p:sp>
             <p:nvSpPr>
               <p:cNvPr id="197" name="TextBox 196">
@@ -18474,7 +17169,7 @@
             </p:txBody>
           </p:sp>
         </mc:Choice>
-        <mc:Fallback>
+        <mc:Fallback xmlns="">
           <p:sp>
             <p:nvSpPr>
               <p:cNvPr id="197" name="TextBox 196">
@@ -18519,8 +17214,8 @@
           </p:sp>
         </mc:Fallback>
       </mc:AlternateContent>
-      <mc:AlternateContent xmlns:mc="http://schemas.openxmlformats.org/markup-compatibility/2006">
-        <mc:Choice xmlns:a14="http://schemas.microsoft.com/office/drawing/2010/main" Requires="a14">
+      <mc:AlternateContent xmlns:mc="http://schemas.openxmlformats.org/markup-compatibility/2006" xmlns:a14="http://schemas.microsoft.com/office/drawing/2010/main">
+        <mc:Choice Requires="a14">
           <p:sp>
             <p:nvSpPr>
               <p:cNvPr id="198" name="TextBox 197">
@@ -18592,7 +17287,7 @@
             </p:txBody>
           </p:sp>
         </mc:Choice>
-        <mc:Fallback>
+        <mc:Fallback xmlns="">
           <p:sp>
             <p:nvSpPr>
               <p:cNvPr id="198" name="TextBox 197">
@@ -18637,8 +17332,8 @@
           </p:sp>
         </mc:Fallback>
       </mc:AlternateContent>
-      <mc:AlternateContent xmlns:mc="http://schemas.openxmlformats.org/markup-compatibility/2006">
-        <mc:Choice xmlns:a14="http://schemas.microsoft.com/office/drawing/2010/main" Requires="a14">
+      <mc:AlternateContent xmlns:mc="http://schemas.openxmlformats.org/markup-compatibility/2006" xmlns:a14="http://schemas.microsoft.com/office/drawing/2010/main">
+        <mc:Choice Requires="a14">
           <p:sp>
             <p:nvSpPr>
               <p:cNvPr id="199" name="TextBox 198">
@@ -18710,7 +17405,7 @@
             </p:txBody>
           </p:sp>
         </mc:Choice>
-        <mc:Fallback>
+        <mc:Fallback xmlns="">
           <p:sp>
             <p:nvSpPr>
               <p:cNvPr id="199" name="TextBox 198">
@@ -18843,8 +17538,8 @@
           </a:fontRef>
         </p:style>
       </p:cxnSp>
-      <mc:AlternateContent xmlns:mc="http://schemas.openxmlformats.org/markup-compatibility/2006">
-        <mc:Choice xmlns:a14="http://schemas.microsoft.com/office/drawing/2010/main" Requires="a14">
+      <mc:AlternateContent xmlns:mc="http://schemas.openxmlformats.org/markup-compatibility/2006" xmlns:a14="http://schemas.microsoft.com/office/drawing/2010/main">
+        <mc:Choice Requires="a14">
           <p:sp>
             <p:nvSpPr>
               <p:cNvPr id="214" name="TextBox 213">
@@ -18901,7 +17596,7 @@
                             <m:rPr>
                               <m:nor/>
                             </m:rPr>
-                            <a:rPr lang="en-US" sz="700" dirty="0">
+                            <a:rPr lang="en-US" sz="700" i="0" dirty="0">
                               <a:latin typeface="Times New Roman" panose="02020603050405020304" pitchFamily="18" charset="0"/>
                               <a:ea typeface="Cambria Math" panose="02040503050406030204" pitchFamily="18" charset="0"/>
                               <a:cs typeface="Times New Roman" panose="02020603050405020304" pitchFamily="18" charset="0"/>
@@ -18921,7 +17616,7 @@
             </p:txBody>
           </p:sp>
         </mc:Choice>
-        <mc:Fallback>
+        <mc:Fallback xmlns="">
           <p:sp>
             <p:nvSpPr>
               <p:cNvPr id="214" name="TextBox 213">
@@ -18966,8 +17661,8 @@
           </p:sp>
         </mc:Fallback>
       </mc:AlternateContent>
-      <mc:AlternateContent xmlns:mc="http://schemas.openxmlformats.org/markup-compatibility/2006">
-        <mc:Choice xmlns:a14="http://schemas.microsoft.com/office/drawing/2010/main" Requires="a14">
+      <mc:AlternateContent xmlns:mc="http://schemas.openxmlformats.org/markup-compatibility/2006" xmlns:a14="http://schemas.microsoft.com/office/drawing/2010/main">
+        <mc:Choice Requires="a14">
           <p:sp>
             <p:nvSpPr>
               <p:cNvPr id="215" name="TextBox 214">
@@ -19040,7 +17735,7 @@
             </p:txBody>
           </p:sp>
         </mc:Choice>
-        <mc:Fallback>
+        <mc:Fallback xmlns="">
           <p:sp>
             <p:nvSpPr>
               <p:cNvPr id="215" name="TextBox 214">
@@ -19085,8 +17780,8 @@
           </p:sp>
         </mc:Fallback>
       </mc:AlternateContent>
-      <mc:AlternateContent xmlns:mc="http://schemas.openxmlformats.org/markup-compatibility/2006">
-        <mc:Choice xmlns:a14="http://schemas.microsoft.com/office/drawing/2010/main" Requires="a14">
+      <mc:AlternateContent xmlns:mc="http://schemas.openxmlformats.org/markup-compatibility/2006" xmlns:a14="http://schemas.microsoft.com/office/drawing/2010/main">
+        <mc:Choice Requires="a14">
           <p:sp>
             <p:nvSpPr>
               <p:cNvPr id="217" name="Rectangle: Rounded Corners 216">
@@ -19211,7 +17906,7 @@
             </p:txBody>
           </p:sp>
         </mc:Choice>
-        <mc:Fallback>
+        <mc:Fallback xmlns="">
           <p:sp>
             <p:nvSpPr>
               <p:cNvPr id="217" name="Rectangle: Rounded Corners 216">
@@ -19398,8 +18093,8 @@
           </a:fontRef>
         </p:style>
       </p:cxnSp>
-      <mc:AlternateContent xmlns:mc="http://schemas.openxmlformats.org/markup-compatibility/2006">
-        <mc:Choice xmlns:a14="http://schemas.microsoft.com/office/drawing/2010/main" Requires="a14">
+      <mc:AlternateContent xmlns:mc="http://schemas.openxmlformats.org/markup-compatibility/2006" xmlns:a14="http://schemas.microsoft.com/office/drawing/2010/main">
+        <mc:Choice Requires="a14">
           <p:sp>
             <p:nvSpPr>
               <p:cNvPr id="232" name="TextBox 231">
@@ -19456,7 +18151,7 @@
                             <m:rPr>
                               <m:nor/>
                             </m:rPr>
-                            <a:rPr lang="en-CA" sz="700">
+                            <a:rPr lang="en-CA" sz="700" i="0">
                               <a:latin typeface="Cambria Math" panose="02040503050406030204" pitchFamily="18" charset="0"/>
                             </a:rPr>
                             <m:t>d</m:t>
@@ -19474,7 +18169,7 @@
             </p:txBody>
           </p:sp>
         </mc:Choice>
-        <mc:Fallback>
+        <mc:Fallback xmlns="">
           <p:sp>
             <p:nvSpPr>
               <p:cNvPr id="232" name="TextBox 231">
@@ -19519,8 +18214,8 @@
           </p:sp>
         </mc:Fallback>
       </mc:AlternateContent>
-      <mc:AlternateContent xmlns:mc="http://schemas.openxmlformats.org/markup-compatibility/2006">
-        <mc:Choice xmlns:a14="http://schemas.microsoft.com/office/drawing/2010/main" Requires="a14">
+      <mc:AlternateContent xmlns:mc="http://schemas.openxmlformats.org/markup-compatibility/2006" xmlns:a14="http://schemas.microsoft.com/office/drawing/2010/main">
+        <mc:Choice Requires="a14">
           <p:sp>
             <p:nvSpPr>
               <p:cNvPr id="233" name="TextBox 232">
@@ -19595,7 +18290,7 @@
             </p:txBody>
           </p:sp>
         </mc:Choice>
-        <mc:Fallback>
+        <mc:Fallback xmlns="">
           <p:sp>
             <p:nvSpPr>
               <p:cNvPr id="233" name="TextBox 232">
@@ -19712,8 +18407,8 @@
           </a:p>
         </p:txBody>
       </p:sp>
-      <mc:AlternateContent xmlns:mc="http://schemas.openxmlformats.org/markup-compatibility/2006">
-        <mc:Choice xmlns:a14="http://schemas.microsoft.com/office/drawing/2010/main" Requires="a14">
+      <mc:AlternateContent xmlns:mc="http://schemas.openxmlformats.org/markup-compatibility/2006" xmlns:a14="http://schemas.microsoft.com/office/drawing/2010/main">
+        <mc:Choice Requires="a14">
           <p:sp>
             <p:nvSpPr>
               <p:cNvPr id="245" name="Rectangle: Rounded Corners 244">
@@ -19955,7 +18650,7 @@
             </p:txBody>
           </p:sp>
         </mc:Choice>
-        <mc:Fallback>
+        <mc:Fallback xmlns="">
           <p:sp>
             <p:nvSpPr>
               <p:cNvPr id="245" name="Rectangle: Rounded Corners 244">
@@ -20097,8 +18792,8 @@
           </a:fontRef>
         </p:style>
       </p:cxnSp>
-      <mc:AlternateContent xmlns:mc="http://schemas.openxmlformats.org/markup-compatibility/2006">
-        <mc:Choice xmlns:a14="http://schemas.microsoft.com/office/drawing/2010/main" Requires="a14">
+      <mc:AlternateContent xmlns:mc="http://schemas.openxmlformats.org/markup-compatibility/2006" xmlns:a14="http://schemas.microsoft.com/office/drawing/2010/main">
+        <mc:Choice Requires="a14">
           <p:sp>
             <p:nvSpPr>
               <p:cNvPr id="256" name="Rectangle: Rounded Corners 255">
@@ -20619,7 +19314,7 @@
             </p:txBody>
           </p:sp>
         </mc:Choice>
-        <mc:Fallback>
+        <mc:Fallback xmlns="">
           <p:sp>
             <p:nvSpPr>
               <p:cNvPr id="256" name="Rectangle: Rounded Corners 255">
@@ -20674,8 +19369,8 @@
           </p:sp>
         </mc:Fallback>
       </mc:AlternateContent>
-      <mc:AlternateContent xmlns:mc="http://schemas.openxmlformats.org/markup-compatibility/2006">
-        <mc:Choice xmlns:a14="http://schemas.microsoft.com/office/drawing/2010/main" Requires="a14">
+      <mc:AlternateContent xmlns:mc="http://schemas.openxmlformats.org/markup-compatibility/2006" xmlns:a14="http://schemas.microsoft.com/office/drawing/2010/main">
+        <mc:Choice Requires="a14">
           <p:sp>
             <p:nvSpPr>
               <p:cNvPr id="257" name="Rectangle: Rounded Corners 256">
@@ -20800,7 +19495,7 @@
             </p:txBody>
           </p:sp>
         </mc:Choice>
-        <mc:Fallback>
+        <mc:Fallback xmlns="">
           <p:sp>
             <p:nvSpPr>
               <p:cNvPr id="257" name="Rectangle: Rounded Corners 256">
@@ -21069,8 +19764,8 @@
           </a:fontRef>
         </p:style>
       </p:cxnSp>
-      <mc:AlternateContent xmlns:mc="http://schemas.openxmlformats.org/markup-compatibility/2006">
-        <mc:Choice xmlns:a14="http://schemas.microsoft.com/office/drawing/2010/main" Requires="a14">
+      <mc:AlternateContent xmlns:mc="http://schemas.openxmlformats.org/markup-compatibility/2006" xmlns:a14="http://schemas.microsoft.com/office/drawing/2010/main">
+        <mc:Choice Requires="a14">
           <p:sp>
             <p:nvSpPr>
               <p:cNvPr id="268" name="TextBox 267">
@@ -21144,7 +19839,7 @@
             </p:txBody>
           </p:sp>
         </mc:Choice>
-        <mc:Fallback>
+        <mc:Fallback xmlns="">
           <p:sp>
             <p:nvSpPr>
               <p:cNvPr id="268" name="TextBox 267">
@@ -21234,8 +19929,8 @@
           </a:fontRef>
         </p:style>
       </p:cxnSp>
-      <mc:AlternateContent xmlns:mc="http://schemas.openxmlformats.org/markup-compatibility/2006">
-        <mc:Choice xmlns:a14="http://schemas.microsoft.com/office/drawing/2010/main" Requires="a14">
+      <mc:AlternateContent xmlns:mc="http://schemas.openxmlformats.org/markup-compatibility/2006" xmlns:a14="http://schemas.microsoft.com/office/drawing/2010/main">
+        <mc:Choice Requires="a14">
           <p:sp>
             <p:nvSpPr>
               <p:cNvPr id="270" name="TextBox 269">
@@ -21301,7 +19996,7 @@
             </p:txBody>
           </p:sp>
         </mc:Choice>
-        <mc:Fallback>
+        <mc:Fallback xmlns="">
           <p:sp>
             <p:nvSpPr>
               <p:cNvPr id="270" name="TextBox 269">
@@ -21427,8 +20122,8 @@
           </a:fontRef>
         </p:style>
       </p:cxnSp>
-      <mc:AlternateContent xmlns:mc="http://schemas.openxmlformats.org/markup-compatibility/2006">
-        <mc:Choice xmlns:a14="http://schemas.microsoft.com/office/drawing/2010/main" Requires="a14">
+      <mc:AlternateContent xmlns:mc="http://schemas.openxmlformats.org/markup-compatibility/2006" xmlns:a14="http://schemas.microsoft.com/office/drawing/2010/main">
+        <mc:Choice Requires="a14">
           <p:sp>
             <p:nvSpPr>
               <p:cNvPr id="92" name="TextBox 91">
@@ -21502,7 +20197,7 @@
             </p:txBody>
           </p:sp>
         </mc:Choice>
-        <mc:Fallback>
+        <mc:Fallback xmlns="">
           <p:sp>
             <p:nvSpPr>
               <p:cNvPr id="92" name="TextBox 91">
@@ -21547,8 +20242,8 @@
           </p:sp>
         </mc:Fallback>
       </mc:AlternateContent>
-      <mc:AlternateContent xmlns:mc="http://schemas.openxmlformats.org/markup-compatibility/2006">
-        <mc:Choice xmlns:a14="http://schemas.microsoft.com/office/drawing/2010/main" Requires="a14">
+      <mc:AlternateContent xmlns:mc="http://schemas.openxmlformats.org/markup-compatibility/2006" xmlns:a14="http://schemas.microsoft.com/office/drawing/2010/main">
+        <mc:Choice Requires="a14">
           <p:sp>
             <p:nvSpPr>
               <p:cNvPr id="93" name="TextBox 92">
@@ -21625,7 +20320,7 @@
             </p:txBody>
           </p:sp>
         </mc:Choice>
-        <mc:Fallback>
+        <mc:Fallback xmlns="">
           <p:sp>
             <p:nvSpPr>
               <p:cNvPr id="93" name="TextBox 92">
@@ -21716,8 +20411,8 @@
           </a:fontRef>
         </p:style>
       </p:cxnSp>
-      <mc:AlternateContent xmlns:mc="http://schemas.openxmlformats.org/markup-compatibility/2006">
-        <mc:Choice xmlns:a14="http://schemas.microsoft.com/office/drawing/2010/main" Requires="a14">
+      <mc:AlternateContent xmlns:mc="http://schemas.openxmlformats.org/markup-compatibility/2006" xmlns:a14="http://schemas.microsoft.com/office/drawing/2010/main">
+        <mc:Choice Requires="a14">
           <p:sp>
             <p:nvSpPr>
               <p:cNvPr id="256" name="Rectangle: Rounded Corners 255">
@@ -22238,7 +20933,7 @@
             </p:txBody>
           </p:sp>
         </mc:Choice>
-        <mc:Fallback>
+        <mc:Fallback xmlns="">
           <p:sp>
             <p:nvSpPr>
               <p:cNvPr id="256" name="Rectangle: Rounded Corners 255">
@@ -22509,8 +21204,8 @@
           </a:fontRef>
         </p:style>
       </p:cxnSp>
-      <mc:AlternateContent xmlns:mc="http://schemas.openxmlformats.org/markup-compatibility/2006">
-        <mc:Choice xmlns:a14="http://schemas.microsoft.com/office/drawing/2010/main" Requires="a14">
+      <mc:AlternateContent xmlns:mc="http://schemas.openxmlformats.org/markup-compatibility/2006" xmlns:a14="http://schemas.microsoft.com/office/drawing/2010/main">
+        <mc:Choice Requires="a14">
           <p:sp>
             <p:nvSpPr>
               <p:cNvPr id="268" name="TextBox 267">
@@ -22584,7 +21279,7 @@
             </p:txBody>
           </p:sp>
         </mc:Choice>
-        <mc:Fallback>
+        <mc:Fallback xmlns="">
           <p:sp>
             <p:nvSpPr>
               <p:cNvPr id="268" name="TextBox 267">
@@ -22674,8 +21369,8 @@
           </a:fontRef>
         </p:style>
       </p:cxnSp>
-      <mc:AlternateContent xmlns:mc="http://schemas.openxmlformats.org/markup-compatibility/2006">
-        <mc:Choice xmlns:a14="http://schemas.microsoft.com/office/drawing/2010/main" Requires="a14">
+      <mc:AlternateContent xmlns:mc="http://schemas.openxmlformats.org/markup-compatibility/2006" xmlns:a14="http://schemas.microsoft.com/office/drawing/2010/main">
+        <mc:Choice Requires="a14">
           <p:sp>
             <p:nvSpPr>
               <p:cNvPr id="270" name="TextBox 269">
@@ -22741,7 +21436,7 @@
             </p:txBody>
           </p:sp>
         </mc:Choice>
-        <mc:Fallback>
+        <mc:Fallback xmlns="">
           <p:sp>
             <p:nvSpPr>
               <p:cNvPr id="270" name="TextBox 269">
@@ -22786,8 +21481,8 @@
           </p:sp>
         </mc:Fallback>
       </mc:AlternateContent>
-      <mc:AlternateContent xmlns:mc="http://schemas.openxmlformats.org/markup-compatibility/2006">
-        <mc:Choice xmlns:a14="http://schemas.microsoft.com/office/drawing/2010/main" Requires="a14">
+      <mc:AlternateContent xmlns:mc="http://schemas.openxmlformats.org/markup-compatibility/2006" xmlns:a14="http://schemas.microsoft.com/office/drawing/2010/main">
+        <mc:Choice Requires="a14">
           <p:sp>
             <p:nvSpPr>
               <p:cNvPr id="39" name="Rectangle: Rounded Corners 38">
@@ -23215,7 +21910,7 @@
             </p:txBody>
           </p:sp>
         </mc:Choice>
-        <mc:Fallback>
+        <mc:Fallback xmlns="">
           <p:sp>
             <p:nvSpPr>
               <p:cNvPr id="39" name="Rectangle: Rounded Corners 38">
@@ -23357,8 +22052,8 @@
           </a:fontRef>
         </p:style>
       </p:cxnSp>
-      <mc:AlternateContent xmlns:mc="http://schemas.openxmlformats.org/markup-compatibility/2006">
-        <mc:Choice xmlns:a14="http://schemas.microsoft.com/office/drawing/2010/main" Requires="a14">
+      <mc:AlternateContent xmlns:mc="http://schemas.openxmlformats.org/markup-compatibility/2006" xmlns:a14="http://schemas.microsoft.com/office/drawing/2010/main">
+        <mc:Choice Requires="a14">
           <p:sp>
             <p:nvSpPr>
               <p:cNvPr id="43" name="TextBox 42">
@@ -23424,7 +22119,7 @@
             </p:txBody>
           </p:sp>
         </mc:Choice>
-        <mc:Fallback>
+        <mc:Fallback xmlns="">
           <p:sp>
             <p:nvSpPr>
               <p:cNvPr id="43" name="TextBox 42">
@@ -23469,8 +22164,8 @@
           </p:sp>
         </mc:Fallback>
       </mc:AlternateContent>
-      <mc:AlternateContent xmlns:mc="http://schemas.openxmlformats.org/markup-compatibility/2006">
-        <mc:Choice xmlns:a14="http://schemas.microsoft.com/office/drawing/2010/main" Requires="a14">
+      <mc:AlternateContent xmlns:mc="http://schemas.openxmlformats.org/markup-compatibility/2006" xmlns:a14="http://schemas.microsoft.com/office/drawing/2010/main">
+        <mc:Choice Requires="a14">
           <p:sp>
             <p:nvSpPr>
               <p:cNvPr id="46" name="TextBox 45">
@@ -23539,7 +22234,7 @@
             </p:txBody>
           </p:sp>
         </mc:Choice>
-        <mc:Fallback>
+        <mc:Fallback xmlns="">
           <p:sp>
             <p:nvSpPr>
               <p:cNvPr id="46" name="TextBox 45">
@@ -23836,8 +22531,8 @@
           </a:p>
         </p:txBody>
       </p:sp>
-      <mc:AlternateContent xmlns:mc="http://schemas.openxmlformats.org/markup-compatibility/2006">
-        <mc:Choice xmlns:a14="http://schemas.microsoft.com/office/drawing/2010/main" Requires="a14">
+      <mc:AlternateContent xmlns:mc="http://schemas.openxmlformats.org/markup-compatibility/2006" xmlns:a14="http://schemas.microsoft.com/office/drawing/2010/main">
+        <mc:Choice Requires="a14">
           <p:sp>
             <p:nvSpPr>
               <p:cNvPr id="143" name="Rectangle: Rounded Corners 142">
@@ -24268,7 +22963,7 @@
             </p:txBody>
           </p:sp>
         </mc:Choice>
-        <mc:Fallback>
+        <mc:Fallback xmlns="">
           <p:sp>
             <p:nvSpPr>
               <p:cNvPr id="143" name="Rectangle: Rounded Corners 142">
@@ -24321,8 +23016,8 @@
           </p:sp>
         </mc:Fallback>
       </mc:AlternateContent>
-      <mc:AlternateContent xmlns:mc="http://schemas.openxmlformats.org/markup-compatibility/2006">
-        <mc:Choice xmlns:a14="http://schemas.microsoft.com/office/drawing/2010/main" Requires="a14">
+      <mc:AlternateContent xmlns:mc="http://schemas.openxmlformats.org/markup-compatibility/2006" xmlns:a14="http://schemas.microsoft.com/office/drawing/2010/main">
+        <mc:Choice Requires="a14">
           <p:sp>
             <p:nvSpPr>
               <p:cNvPr id="144" name="Rectangle: Rounded Corners 143">
@@ -24832,7 +23527,7 @@
             </p:txBody>
           </p:sp>
         </mc:Choice>
-        <mc:Fallback>
+        <mc:Fallback xmlns="">
           <p:sp>
             <p:nvSpPr>
               <p:cNvPr id="144" name="Rectangle: Rounded Corners 143">
@@ -24886,8 +23581,8 @@
           </p:sp>
         </mc:Fallback>
       </mc:AlternateContent>
-      <mc:AlternateContent xmlns:mc="http://schemas.openxmlformats.org/markup-compatibility/2006">
-        <mc:Choice xmlns:a14="http://schemas.microsoft.com/office/drawing/2010/main" Requires="a14">
+      <mc:AlternateContent xmlns:mc="http://schemas.openxmlformats.org/markup-compatibility/2006" xmlns:a14="http://schemas.microsoft.com/office/drawing/2010/main">
+        <mc:Choice Requires="a14">
           <p:sp>
             <p:nvSpPr>
               <p:cNvPr id="145" name="Rectangle: Rounded Corners 144">
@@ -25012,7 +23707,7 @@
             </p:txBody>
           </p:sp>
         </mc:Choice>
-        <mc:Fallback>
+        <mc:Fallback xmlns="">
           <p:sp>
             <p:nvSpPr>
               <p:cNvPr id="145" name="Rectangle: Rounded Corners 144">
@@ -25110,8 +23805,8 @@
           </a:fontRef>
         </p:style>
       </p:cxnSp>
-      <mc:AlternateContent xmlns:mc="http://schemas.openxmlformats.org/markup-compatibility/2006">
-        <mc:Choice xmlns:a14="http://schemas.microsoft.com/office/drawing/2010/main" Requires="a14">
+      <mc:AlternateContent xmlns:mc="http://schemas.openxmlformats.org/markup-compatibility/2006" xmlns:a14="http://schemas.microsoft.com/office/drawing/2010/main">
+        <mc:Choice Requires="a14">
           <p:sp>
             <p:nvSpPr>
               <p:cNvPr id="147" name="TextBox 146">
@@ -25185,7 +23880,7 @@
             </p:txBody>
           </p:sp>
         </mc:Choice>
-        <mc:Fallback>
+        <mc:Fallback xmlns="">
           <p:sp>
             <p:nvSpPr>
               <p:cNvPr id="147" name="TextBox 146">
@@ -25230,8 +23925,8 @@
           </p:sp>
         </mc:Fallback>
       </mc:AlternateContent>
-      <mc:AlternateContent xmlns:mc="http://schemas.openxmlformats.org/markup-compatibility/2006">
-        <mc:Choice xmlns:a14="http://schemas.microsoft.com/office/drawing/2010/main" Requires="a14">
+      <mc:AlternateContent xmlns:mc="http://schemas.openxmlformats.org/markup-compatibility/2006" xmlns:a14="http://schemas.microsoft.com/office/drawing/2010/main">
+        <mc:Choice Requires="a14">
           <p:sp>
             <p:nvSpPr>
               <p:cNvPr id="148" name="TextBox 147">
@@ -25305,7 +24000,7 @@
             </p:txBody>
           </p:sp>
         </mc:Choice>
-        <mc:Fallback>
+        <mc:Fallback xmlns="">
           <p:sp>
             <p:nvSpPr>
               <p:cNvPr id="148" name="TextBox 147">
@@ -25350,8 +24045,8 @@
           </p:sp>
         </mc:Fallback>
       </mc:AlternateContent>
-      <mc:AlternateContent xmlns:mc="http://schemas.openxmlformats.org/markup-compatibility/2006">
-        <mc:Choice xmlns:a14="http://schemas.microsoft.com/office/drawing/2010/main" Requires="a14">
+      <mc:AlternateContent xmlns:mc="http://schemas.openxmlformats.org/markup-compatibility/2006" xmlns:a14="http://schemas.microsoft.com/office/drawing/2010/main">
+        <mc:Choice Requires="a14">
           <p:sp>
             <p:nvSpPr>
               <p:cNvPr id="154" name="TextBox 153">
@@ -25405,7 +24100,7 @@
                             <m:rPr>
                               <m:nor/>
                             </m:rPr>
-                            <a:rPr lang="en-US" sz="900" dirty="0">
+                            <a:rPr lang="en-US" sz="900" i="0" dirty="0">
                               <a:latin typeface="Times New Roman" panose="02020603050405020304" pitchFamily="18" charset="0"/>
                               <a:ea typeface="Cambria Math" panose="02040503050406030204" pitchFamily="18" charset="0"/>
                               <a:cs typeface="Times New Roman" panose="02020603050405020304" pitchFamily="18" charset="0"/>
@@ -25433,7 +24128,7 @@
             </p:txBody>
           </p:sp>
         </mc:Choice>
-        <mc:Fallback>
+        <mc:Fallback xmlns="">
           <p:sp>
             <p:nvSpPr>
               <p:cNvPr id="154" name="TextBox 153">
@@ -25478,8 +24173,8 @@
           </p:sp>
         </mc:Fallback>
       </mc:AlternateContent>
-      <mc:AlternateContent xmlns:mc="http://schemas.openxmlformats.org/markup-compatibility/2006">
-        <mc:Choice xmlns:a14="http://schemas.microsoft.com/office/drawing/2010/main" Requires="a14">
+      <mc:AlternateContent xmlns:mc="http://schemas.openxmlformats.org/markup-compatibility/2006" xmlns:a14="http://schemas.microsoft.com/office/drawing/2010/main">
+        <mc:Choice Requires="a14">
           <p:sp>
             <p:nvSpPr>
               <p:cNvPr id="155" name="TextBox 154">
@@ -25557,7 +24252,7 @@
             </p:txBody>
           </p:sp>
         </mc:Choice>
-        <mc:Fallback>
+        <mc:Fallback xmlns="">
           <p:sp>
             <p:nvSpPr>
               <p:cNvPr id="155" name="TextBox 154">
@@ -25745,8 +24440,8 @@
           </a:p>
         </p:txBody>
       </p:sp>
-      <mc:AlternateContent xmlns:mc="http://schemas.openxmlformats.org/markup-compatibility/2006">
-        <mc:Choice xmlns:a14="http://schemas.microsoft.com/office/drawing/2010/main" Requires="a14">
+      <mc:AlternateContent xmlns:mc="http://schemas.openxmlformats.org/markup-compatibility/2006" xmlns:a14="http://schemas.microsoft.com/office/drawing/2010/main">
+        <mc:Choice Requires="a14">
           <p:sp>
             <p:nvSpPr>
               <p:cNvPr id="159" name="TextBox 158">
@@ -25826,7 +24521,7 @@
             </p:txBody>
           </p:sp>
         </mc:Choice>
-        <mc:Fallback>
+        <mc:Fallback xmlns="">
           <p:sp>
             <p:nvSpPr>
               <p:cNvPr id="159" name="TextBox 158">
@@ -25871,8 +24566,8 @@
           </p:sp>
         </mc:Fallback>
       </mc:AlternateContent>
-      <mc:AlternateContent xmlns:mc="http://schemas.openxmlformats.org/markup-compatibility/2006">
-        <mc:Choice xmlns:a14="http://schemas.microsoft.com/office/drawing/2010/main" Requires="a14">
+      <mc:AlternateContent xmlns:mc="http://schemas.openxmlformats.org/markup-compatibility/2006" xmlns:a14="http://schemas.microsoft.com/office/drawing/2010/main">
+        <mc:Choice Requires="a14">
           <p:sp>
             <p:nvSpPr>
               <p:cNvPr id="160" name="TextBox 159">
@@ -25952,7 +24647,7 @@
             </p:txBody>
           </p:sp>
         </mc:Choice>
-        <mc:Fallback>
+        <mc:Fallback xmlns="">
           <p:sp>
             <p:nvSpPr>
               <p:cNvPr id="160" name="TextBox 159">
@@ -25997,8 +24692,8 @@
           </p:sp>
         </mc:Fallback>
       </mc:AlternateContent>
-      <mc:AlternateContent xmlns:mc="http://schemas.openxmlformats.org/markup-compatibility/2006">
-        <mc:Choice xmlns:a14="http://schemas.microsoft.com/office/drawing/2010/main" Requires="a14">
+      <mc:AlternateContent xmlns:mc="http://schemas.openxmlformats.org/markup-compatibility/2006" xmlns:a14="http://schemas.microsoft.com/office/drawing/2010/main">
+        <mc:Choice Requires="a14">
           <p:sp>
             <p:nvSpPr>
               <p:cNvPr id="202" name="Rectangle: Rounded Corners 201">
@@ -26487,7 +25182,7 @@
             </p:txBody>
           </p:sp>
         </mc:Choice>
-        <mc:Fallback>
+        <mc:Fallback xmlns="">
           <p:sp>
             <p:nvSpPr>
               <p:cNvPr id="202" name="Rectangle: Rounded Corners 201">
@@ -26541,8 +25236,8 @@
           </p:sp>
         </mc:Fallback>
       </mc:AlternateContent>
-      <mc:AlternateContent xmlns:mc="http://schemas.openxmlformats.org/markup-compatibility/2006">
-        <mc:Choice xmlns:a14="http://schemas.microsoft.com/office/drawing/2010/main" Requires="a14">
+      <mc:AlternateContent xmlns:mc="http://schemas.openxmlformats.org/markup-compatibility/2006" xmlns:a14="http://schemas.microsoft.com/office/drawing/2010/main">
+        <mc:Choice Requires="a14">
           <p:sp>
             <p:nvSpPr>
               <p:cNvPr id="204" name="Rectangle: Rounded Corners 203">
@@ -26667,7 +25362,7 @@
             </p:txBody>
           </p:sp>
         </mc:Choice>
-        <mc:Fallback>
+        <mc:Fallback xmlns="">
           <p:sp>
             <p:nvSpPr>
               <p:cNvPr id="204" name="Rectangle: Rounded Corners 203">
@@ -27027,8 +25722,8 @@
           </a:fontRef>
         </p:style>
       </p:cxnSp>
-      <mc:AlternateContent xmlns:mc="http://schemas.openxmlformats.org/markup-compatibility/2006">
-        <mc:Choice xmlns:a14="http://schemas.microsoft.com/office/drawing/2010/main" Requires="a14">
+      <mc:AlternateContent xmlns:mc="http://schemas.openxmlformats.org/markup-compatibility/2006" xmlns:a14="http://schemas.microsoft.com/office/drawing/2010/main">
+        <mc:Choice Requires="a14">
           <p:sp>
             <p:nvSpPr>
               <p:cNvPr id="237" name="TextBox 236">
@@ -27108,7 +25803,7 @@
             </p:txBody>
           </p:sp>
         </mc:Choice>
-        <mc:Fallback>
+        <mc:Fallback xmlns="">
           <p:sp>
             <p:nvSpPr>
               <p:cNvPr id="237" name="TextBox 236">
@@ -27153,8 +25848,8 @@
           </p:sp>
         </mc:Fallback>
       </mc:AlternateContent>
-      <mc:AlternateContent xmlns:mc="http://schemas.openxmlformats.org/markup-compatibility/2006">
-        <mc:Choice xmlns:a14="http://schemas.microsoft.com/office/drawing/2010/main" Requires="a14">
+      <mc:AlternateContent xmlns:mc="http://schemas.openxmlformats.org/markup-compatibility/2006" xmlns:a14="http://schemas.microsoft.com/office/drawing/2010/main">
+        <mc:Choice Requires="a14">
           <p:sp>
             <p:nvSpPr>
               <p:cNvPr id="238" name="TextBox 237">
@@ -27223,7 +25918,7 @@
             </p:txBody>
           </p:sp>
         </mc:Choice>
-        <mc:Fallback>
+        <mc:Fallback xmlns="">
           <p:sp>
             <p:nvSpPr>
               <p:cNvPr id="238" name="TextBox 237">
@@ -27268,8 +25963,8 @@
           </p:sp>
         </mc:Fallback>
       </mc:AlternateContent>
-      <mc:AlternateContent xmlns:mc="http://schemas.openxmlformats.org/markup-compatibility/2006">
-        <mc:Choice xmlns:a14="http://schemas.microsoft.com/office/drawing/2010/main" Requires="a14">
+      <mc:AlternateContent xmlns:mc="http://schemas.openxmlformats.org/markup-compatibility/2006" xmlns:a14="http://schemas.microsoft.com/office/drawing/2010/main">
+        <mc:Choice Requires="a14">
           <p:sp>
             <p:nvSpPr>
               <p:cNvPr id="239" name="TextBox 238">
@@ -27338,7 +26033,7 @@
             </p:txBody>
           </p:sp>
         </mc:Choice>
-        <mc:Fallback>
+        <mc:Fallback xmlns="">
           <p:sp>
             <p:nvSpPr>
               <p:cNvPr id="239" name="TextBox 238">
@@ -27515,8 +26210,8 @@
           </a:fontRef>
         </p:style>
       </p:cxnSp>
-      <mc:AlternateContent xmlns:mc="http://schemas.openxmlformats.org/markup-compatibility/2006">
-        <mc:Choice xmlns:a14="http://schemas.microsoft.com/office/drawing/2010/main" Requires="a14">
+      <mc:AlternateContent xmlns:mc="http://schemas.openxmlformats.org/markup-compatibility/2006" xmlns:a14="http://schemas.microsoft.com/office/drawing/2010/main">
+        <mc:Choice Requires="a14">
           <p:sp>
             <p:nvSpPr>
               <p:cNvPr id="248" name="TextBox 247">
@@ -27585,7 +26280,7 @@
             </p:txBody>
           </p:sp>
         </mc:Choice>
-        <mc:Fallback>
+        <mc:Fallback xmlns="">
           <p:sp>
             <p:nvSpPr>
               <p:cNvPr id="248" name="TextBox 247">
@@ -28136,8 +26831,8 @@
           </a:p>
         </p:txBody>
       </p:sp>
-      <mc:AlternateContent xmlns:mc="http://schemas.openxmlformats.org/markup-compatibility/2006">
-        <mc:Choice xmlns:a14="http://schemas.microsoft.com/office/drawing/2010/main" Requires="a14">
+      <mc:AlternateContent xmlns:mc="http://schemas.openxmlformats.org/markup-compatibility/2006" xmlns:a14="http://schemas.microsoft.com/office/drawing/2010/main">
+        <mc:Choice Requires="a14">
           <p:sp>
             <p:nvSpPr>
               <p:cNvPr id="277" name="Rectangle: Rounded Corners 276">
@@ -28262,7 +26957,7 @@
             </p:txBody>
           </p:sp>
         </mc:Choice>
-        <mc:Fallback>
+        <mc:Fallback xmlns="">
           <p:sp>
             <p:nvSpPr>
               <p:cNvPr id="277" name="Rectangle: Rounded Corners 276">
@@ -28314,8 +27009,8 @@
           </p:sp>
         </mc:Fallback>
       </mc:AlternateContent>
-      <mc:AlternateContent xmlns:mc="http://schemas.openxmlformats.org/markup-compatibility/2006">
-        <mc:Choice xmlns:a14="http://schemas.microsoft.com/office/drawing/2010/main" Requires="a14">
+      <mc:AlternateContent xmlns:mc="http://schemas.openxmlformats.org/markup-compatibility/2006" xmlns:a14="http://schemas.microsoft.com/office/drawing/2010/main">
+        <mc:Choice Requires="a14">
           <p:sp>
             <p:nvSpPr>
               <p:cNvPr id="278" name="Rectangle: Rounded Corners 277">
@@ -28568,7 +27263,7 @@
             </p:txBody>
           </p:sp>
         </mc:Choice>
-        <mc:Fallback>
+        <mc:Fallback xmlns="">
           <p:sp>
             <p:nvSpPr>
               <p:cNvPr id="278" name="Rectangle: Rounded Corners 277">
@@ -28758,8 +27453,8 @@
           </a:fontRef>
         </p:style>
       </p:cxnSp>
-      <mc:AlternateContent xmlns:mc="http://schemas.openxmlformats.org/markup-compatibility/2006">
-        <mc:Choice xmlns:a14="http://schemas.microsoft.com/office/drawing/2010/main" Requires="a14">
+      <mc:AlternateContent xmlns:mc="http://schemas.openxmlformats.org/markup-compatibility/2006" xmlns:a14="http://schemas.microsoft.com/office/drawing/2010/main">
+        <mc:Choice Requires="a14">
           <p:sp>
             <p:nvSpPr>
               <p:cNvPr id="302" name="Rectangle: Rounded Corners 301">
@@ -29001,7 +27696,7 @@
             </p:txBody>
           </p:sp>
         </mc:Choice>
-        <mc:Fallback>
+        <mc:Fallback xmlns="">
           <p:sp>
             <p:nvSpPr>
               <p:cNvPr id="302" name="Rectangle: Rounded Corners 301">
@@ -29053,8 +27748,8 @@
           </p:sp>
         </mc:Fallback>
       </mc:AlternateContent>
-      <mc:AlternateContent xmlns:mc="http://schemas.openxmlformats.org/markup-compatibility/2006">
-        <mc:Choice xmlns:a14="http://schemas.microsoft.com/office/drawing/2010/main" Requires="a14">
+      <mc:AlternateContent xmlns:mc="http://schemas.openxmlformats.org/markup-compatibility/2006" xmlns:a14="http://schemas.microsoft.com/office/drawing/2010/main">
+        <mc:Choice Requires="a14">
           <p:sp>
             <p:nvSpPr>
               <p:cNvPr id="315" name="TextBox 314">
@@ -29123,7 +27818,7 @@
             </p:txBody>
           </p:sp>
         </mc:Choice>
-        <mc:Fallback>
+        <mc:Fallback xmlns="">
           <p:sp>
             <p:nvSpPr>
               <p:cNvPr id="315" name="TextBox 314">
@@ -29168,8 +27863,8 @@
           </p:sp>
         </mc:Fallback>
       </mc:AlternateContent>
-      <mc:AlternateContent xmlns:mc="http://schemas.openxmlformats.org/markup-compatibility/2006">
-        <mc:Choice xmlns:a14="http://schemas.microsoft.com/office/drawing/2010/main" Requires="a14">
+      <mc:AlternateContent xmlns:mc="http://schemas.openxmlformats.org/markup-compatibility/2006" xmlns:a14="http://schemas.microsoft.com/office/drawing/2010/main">
+        <mc:Choice Requires="a14">
           <p:sp>
             <p:nvSpPr>
               <p:cNvPr id="317" name="TextBox 316">
@@ -29238,7 +27933,7 @@
             </p:txBody>
           </p:sp>
         </mc:Choice>
-        <mc:Fallback>
+        <mc:Fallback xmlns="">
           <p:sp>
             <p:nvSpPr>
               <p:cNvPr id="317" name="TextBox 316">
@@ -29283,8 +27978,8 @@
           </p:sp>
         </mc:Fallback>
       </mc:AlternateContent>
-      <mc:AlternateContent xmlns:mc="http://schemas.openxmlformats.org/markup-compatibility/2006">
-        <mc:Choice xmlns:a14="http://schemas.microsoft.com/office/drawing/2010/main" Requires="a14">
+      <mc:AlternateContent xmlns:mc="http://schemas.openxmlformats.org/markup-compatibility/2006" xmlns:a14="http://schemas.microsoft.com/office/drawing/2010/main">
+        <mc:Choice Requires="a14">
           <p:sp>
             <p:nvSpPr>
               <p:cNvPr id="319" name="TextBox 318">
@@ -29353,7 +28048,7 @@
             </p:txBody>
           </p:sp>
         </mc:Choice>
-        <mc:Fallback>
+        <mc:Fallback xmlns="">
           <p:sp>
             <p:nvSpPr>
               <p:cNvPr id="319" name="TextBox 318">
@@ -29444,8 +28139,8 @@
           </a:fontRef>
         </p:style>
       </p:cxnSp>
-      <mc:AlternateContent xmlns:mc="http://schemas.openxmlformats.org/markup-compatibility/2006">
-        <mc:Choice xmlns:a14="http://schemas.microsoft.com/office/drawing/2010/main" Requires="a14">
+      <mc:AlternateContent xmlns:mc="http://schemas.openxmlformats.org/markup-compatibility/2006" xmlns:a14="http://schemas.microsoft.com/office/drawing/2010/main">
+        <mc:Choice Requires="a14">
           <p:sp>
             <p:nvSpPr>
               <p:cNvPr id="328" name="Rectangle: Rounded Corners 327">
@@ -29944,7 +28639,7 @@
             </p:txBody>
           </p:sp>
         </mc:Choice>
-        <mc:Fallback>
+        <mc:Fallback xmlns="">
           <p:sp>
             <p:nvSpPr>
               <p:cNvPr id="328" name="Rectangle: Rounded Corners 327">
@@ -30086,8 +28781,8 @@
           </a:fontRef>
         </p:style>
       </p:cxnSp>
-      <mc:AlternateContent xmlns:mc="http://schemas.openxmlformats.org/markup-compatibility/2006">
-        <mc:Choice xmlns:a14="http://schemas.microsoft.com/office/drawing/2010/main" Requires="a14">
+      <mc:AlternateContent xmlns:mc="http://schemas.openxmlformats.org/markup-compatibility/2006" xmlns:a14="http://schemas.microsoft.com/office/drawing/2010/main">
+        <mc:Choice Requires="a14">
           <p:sp>
             <p:nvSpPr>
               <p:cNvPr id="342" name="TextBox 341">
@@ -30156,7 +28851,7 @@
             </p:txBody>
           </p:sp>
         </mc:Choice>
-        <mc:Fallback>
+        <mc:Fallback xmlns="">
           <p:sp>
             <p:nvSpPr>
               <p:cNvPr id="342" name="TextBox 341">
@@ -30201,8 +28896,8 @@
           </p:sp>
         </mc:Fallback>
       </mc:AlternateContent>
-      <mc:AlternateContent xmlns:mc="http://schemas.openxmlformats.org/markup-compatibility/2006">
-        <mc:Choice xmlns:a14="http://schemas.microsoft.com/office/drawing/2010/main" Requires="a14">
+      <mc:AlternateContent xmlns:mc="http://schemas.openxmlformats.org/markup-compatibility/2006" xmlns:a14="http://schemas.microsoft.com/office/drawing/2010/main">
+        <mc:Choice Requires="a14">
           <p:sp>
             <p:nvSpPr>
               <p:cNvPr id="344" name="TextBox 343">
@@ -30271,7 +28966,7 @@
             </p:txBody>
           </p:sp>
         </mc:Choice>
-        <mc:Fallback>
+        <mc:Fallback xmlns="">
           <p:sp>
             <p:nvSpPr>
               <p:cNvPr id="344" name="TextBox 343">
@@ -30316,8 +29011,8 @@
           </p:sp>
         </mc:Fallback>
       </mc:AlternateContent>
-      <mc:AlternateContent xmlns:mc="http://schemas.openxmlformats.org/markup-compatibility/2006">
-        <mc:Choice xmlns:a14="http://schemas.microsoft.com/office/drawing/2010/main" Requires="a14">
+      <mc:AlternateContent xmlns:mc="http://schemas.openxmlformats.org/markup-compatibility/2006" xmlns:a14="http://schemas.microsoft.com/office/drawing/2010/main">
+        <mc:Choice Requires="a14">
           <p:sp>
             <p:nvSpPr>
               <p:cNvPr id="346" name="TextBox 345">
@@ -30386,7 +29081,7 @@
             </p:txBody>
           </p:sp>
         </mc:Choice>
-        <mc:Fallback>
+        <mc:Fallback xmlns="">
           <p:sp>
             <p:nvSpPr>
               <p:cNvPr id="346" name="TextBox 345">
@@ -30431,8 +29126,8 @@
           </p:sp>
         </mc:Fallback>
       </mc:AlternateContent>
-      <mc:AlternateContent xmlns:mc="http://schemas.openxmlformats.org/markup-compatibility/2006">
-        <mc:Choice xmlns:a14="http://schemas.microsoft.com/office/drawing/2010/main" Requires="a14">
+      <mc:AlternateContent xmlns:mc="http://schemas.openxmlformats.org/markup-compatibility/2006" xmlns:a14="http://schemas.microsoft.com/office/drawing/2010/main">
+        <mc:Choice Requires="a14">
           <p:sp>
             <p:nvSpPr>
               <p:cNvPr id="350" name="Rectangle: Rounded Corners 349">
@@ -30979,7 +29674,7 @@
             </p:txBody>
           </p:sp>
         </mc:Choice>
-        <mc:Fallback>
+        <mc:Fallback xmlns="">
           <p:sp>
             <p:nvSpPr>
               <p:cNvPr id="350" name="Rectangle: Rounded Corners 349">
@@ -31117,8 +29812,8 @@
           </a:fontRef>
         </p:style>
       </p:cxnSp>
-      <mc:AlternateContent xmlns:mc="http://schemas.openxmlformats.org/markup-compatibility/2006">
-        <mc:Choice xmlns:a14="http://schemas.microsoft.com/office/drawing/2010/main" Requires="a14">
+      <mc:AlternateContent xmlns:mc="http://schemas.openxmlformats.org/markup-compatibility/2006" xmlns:a14="http://schemas.microsoft.com/office/drawing/2010/main">
+        <mc:Choice Requires="a14">
           <p:sp>
             <p:nvSpPr>
               <p:cNvPr id="359" name="TextBox 358">
@@ -31187,7 +29882,7 @@
             </p:txBody>
           </p:sp>
         </mc:Choice>
-        <mc:Fallback>
+        <mc:Fallback xmlns="">
           <p:sp>
             <p:nvSpPr>
               <p:cNvPr id="359" name="TextBox 358">
@@ -31232,8 +29927,8 @@
           </p:sp>
         </mc:Fallback>
       </mc:AlternateContent>
-      <mc:AlternateContent xmlns:mc="http://schemas.openxmlformats.org/markup-compatibility/2006">
-        <mc:Choice xmlns:a14="http://schemas.microsoft.com/office/drawing/2010/main" Requires="a14">
+      <mc:AlternateContent xmlns:mc="http://schemas.openxmlformats.org/markup-compatibility/2006" xmlns:a14="http://schemas.microsoft.com/office/drawing/2010/main">
+        <mc:Choice Requires="a14">
           <p:sp>
             <p:nvSpPr>
               <p:cNvPr id="361" name="TextBox 360">
@@ -31302,7 +29997,7 @@
             </p:txBody>
           </p:sp>
         </mc:Choice>
-        <mc:Fallback>
+        <mc:Fallback xmlns="">
           <p:sp>
             <p:nvSpPr>
               <p:cNvPr id="361" name="TextBox 360">
@@ -31437,8 +30132,8 @@
           </a:fontRef>
         </p:style>
       </p:cxnSp>
-      <mc:AlternateContent xmlns:mc="http://schemas.openxmlformats.org/markup-compatibility/2006">
-        <mc:Choice xmlns:a14="http://schemas.microsoft.com/office/drawing/2010/main" Requires="a14">
+      <mc:AlternateContent xmlns:mc="http://schemas.openxmlformats.org/markup-compatibility/2006" xmlns:a14="http://schemas.microsoft.com/office/drawing/2010/main">
+        <mc:Choice Requires="a14">
           <p:sp>
             <p:nvSpPr>
               <p:cNvPr id="365" name="TextBox 364">
@@ -31507,7 +30202,7 @@
             </p:txBody>
           </p:sp>
         </mc:Choice>
-        <mc:Fallback>
+        <mc:Fallback xmlns="">
           <p:sp>
             <p:nvSpPr>
               <p:cNvPr id="365" name="TextBox 364">
@@ -31552,8 +30247,8 @@
           </p:sp>
         </mc:Fallback>
       </mc:AlternateContent>
-      <mc:AlternateContent xmlns:mc="http://schemas.openxmlformats.org/markup-compatibility/2006">
-        <mc:Choice xmlns:a14="http://schemas.microsoft.com/office/drawing/2010/main" Requires="a14">
+      <mc:AlternateContent xmlns:mc="http://schemas.openxmlformats.org/markup-compatibility/2006" xmlns:a14="http://schemas.microsoft.com/office/drawing/2010/main">
+        <mc:Choice Requires="a14">
           <p:sp>
             <p:nvSpPr>
               <p:cNvPr id="367" name="TextBox 366">
@@ -31622,7 +30317,7 @@
             </p:txBody>
           </p:sp>
         </mc:Choice>
-        <mc:Fallback>
+        <mc:Fallback xmlns="">
           <p:sp>
             <p:nvSpPr>
               <p:cNvPr id="367" name="TextBox 366">
@@ -31697,8 +30392,8 @@
           <a:chExt cx="0" cy="0"/>
         </a:xfrm>
       </p:grpSpPr>
-      <mc:AlternateContent xmlns:mc="http://schemas.openxmlformats.org/markup-compatibility/2006">
-        <mc:Choice xmlns:a14="http://schemas.microsoft.com/office/drawing/2010/main" Requires="a14">
+      <mc:AlternateContent xmlns:mc="http://schemas.openxmlformats.org/markup-compatibility/2006" xmlns:a14="http://schemas.microsoft.com/office/drawing/2010/main">
+        <mc:Choice Requires="a14">
           <p:sp>
             <p:nvSpPr>
               <p:cNvPr id="37" name="TextBox 36">
@@ -31778,7 +30473,7 @@
             </p:txBody>
           </p:sp>
         </mc:Choice>
-        <mc:Fallback>
+        <mc:Fallback xmlns="">
           <p:sp>
             <p:nvSpPr>
               <p:cNvPr id="37" name="TextBox 36">
@@ -31823,8 +30518,8 @@
           </p:sp>
         </mc:Fallback>
       </mc:AlternateContent>
-      <mc:AlternateContent xmlns:mc="http://schemas.openxmlformats.org/markup-compatibility/2006">
-        <mc:Choice xmlns:a14="http://schemas.microsoft.com/office/drawing/2010/main" Requires="a14">
+      <mc:AlternateContent xmlns:mc="http://schemas.openxmlformats.org/markup-compatibility/2006" xmlns:a14="http://schemas.microsoft.com/office/drawing/2010/main">
+        <mc:Choice Requires="a14">
           <p:sp>
             <p:nvSpPr>
               <p:cNvPr id="38" name="TextBox 37">
@@ -31904,7 +30599,7 @@
             </p:txBody>
           </p:sp>
         </mc:Choice>
-        <mc:Fallback>
+        <mc:Fallback xmlns="">
           <p:sp>
             <p:nvSpPr>
               <p:cNvPr id="38" name="TextBox 37">
@@ -32081,8 +30776,8 @@
           </a:fontRef>
         </p:style>
       </p:cxnSp>
-      <mc:AlternateContent xmlns:mc="http://schemas.openxmlformats.org/markup-compatibility/2006">
-        <mc:Choice xmlns:a14="http://schemas.microsoft.com/office/drawing/2010/main" Requires="a14">
+      <mc:AlternateContent xmlns:mc="http://schemas.openxmlformats.org/markup-compatibility/2006" xmlns:a14="http://schemas.microsoft.com/office/drawing/2010/main">
+        <mc:Choice Requires="a14">
           <p:sp>
             <p:nvSpPr>
               <p:cNvPr id="48" name="TextBox 47">
@@ -32162,7 +30857,7 @@
             </p:txBody>
           </p:sp>
         </mc:Choice>
-        <mc:Fallback>
+        <mc:Fallback xmlns="">
           <p:sp>
             <p:nvSpPr>
               <p:cNvPr id="48" name="TextBox 47">
@@ -32207,8 +30902,8 @@
           </p:sp>
         </mc:Fallback>
       </mc:AlternateContent>
-      <mc:AlternateContent xmlns:mc="http://schemas.openxmlformats.org/markup-compatibility/2006">
-        <mc:Choice xmlns:a14="http://schemas.microsoft.com/office/drawing/2010/main" Requires="a14">
+      <mc:AlternateContent xmlns:mc="http://schemas.openxmlformats.org/markup-compatibility/2006" xmlns:a14="http://schemas.microsoft.com/office/drawing/2010/main">
+        <mc:Choice Requires="a14">
           <p:sp>
             <p:nvSpPr>
               <p:cNvPr id="49" name="TextBox 48">
@@ -32277,7 +30972,7 @@
             </p:txBody>
           </p:sp>
         </mc:Choice>
-        <mc:Fallback>
+        <mc:Fallback xmlns="">
           <p:sp>
             <p:nvSpPr>
               <p:cNvPr id="49" name="TextBox 48">
@@ -32322,8 +31017,8 @@
           </p:sp>
         </mc:Fallback>
       </mc:AlternateContent>
-      <mc:AlternateContent xmlns:mc="http://schemas.openxmlformats.org/markup-compatibility/2006">
-        <mc:Choice xmlns:a14="http://schemas.microsoft.com/office/drawing/2010/main" Requires="a14">
+      <mc:AlternateContent xmlns:mc="http://schemas.openxmlformats.org/markup-compatibility/2006" xmlns:a14="http://schemas.microsoft.com/office/drawing/2010/main">
+        <mc:Choice Requires="a14">
           <p:sp>
             <p:nvSpPr>
               <p:cNvPr id="50" name="TextBox 49">
@@ -32392,7 +31087,7 @@
             </p:txBody>
           </p:sp>
         </mc:Choice>
-        <mc:Fallback>
+        <mc:Fallback xmlns="">
           <p:sp>
             <p:nvSpPr>
               <p:cNvPr id="50" name="TextBox 49">
@@ -32569,8 +31264,8 @@
           </a:fontRef>
         </p:style>
       </p:cxnSp>
-      <mc:AlternateContent xmlns:mc="http://schemas.openxmlformats.org/markup-compatibility/2006">
-        <mc:Choice xmlns:a14="http://schemas.microsoft.com/office/drawing/2010/main" Requires="a14">
+      <mc:AlternateContent xmlns:mc="http://schemas.openxmlformats.org/markup-compatibility/2006" xmlns:a14="http://schemas.microsoft.com/office/drawing/2010/main">
+        <mc:Choice Requires="a14">
           <p:sp>
             <p:nvSpPr>
               <p:cNvPr id="54" name="TextBox 53">
@@ -32639,7 +31334,7 @@
             </p:txBody>
           </p:sp>
         </mc:Choice>
-        <mc:Fallback>
+        <mc:Fallback xmlns="">
           <p:sp>
             <p:nvSpPr>
               <p:cNvPr id="54" name="TextBox 53">
@@ -32987,8 +31682,8 @@
           </a:p>
         </p:txBody>
       </p:sp>
-      <mc:AlternateContent xmlns:mc="http://schemas.openxmlformats.org/markup-compatibility/2006">
-        <mc:Choice xmlns:a14="http://schemas.microsoft.com/office/drawing/2010/main" Requires="a14">
+      <mc:AlternateContent xmlns:mc="http://schemas.openxmlformats.org/markup-compatibility/2006" xmlns:a14="http://schemas.microsoft.com/office/drawing/2010/main">
+        <mc:Choice Requires="a14">
           <p:sp>
             <p:nvSpPr>
               <p:cNvPr id="63" name="Rectangle: Rounded Corners 62">
@@ -33113,7 +31808,7 @@
             </p:txBody>
           </p:sp>
         </mc:Choice>
-        <mc:Fallback>
+        <mc:Fallback xmlns="">
           <p:sp>
             <p:nvSpPr>
               <p:cNvPr id="63" name="Rectangle: Rounded Corners 62">
@@ -33165,8 +31860,8 @@
           </p:sp>
         </mc:Fallback>
       </mc:AlternateContent>
-      <mc:AlternateContent xmlns:mc="http://schemas.openxmlformats.org/markup-compatibility/2006">
-        <mc:Choice xmlns:a14="http://schemas.microsoft.com/office/drawing/2010/main" Requires="a14">
+      <mc:AlternateContent xmlns:mc="http://schemas.openxmlformats.org/markup-compatibility/2006" xmlns:a14="http://schemas.microsoft.com/office/drawing/2010/main">
+        <mc:Choice Requires="a14">
           <p:sp>
             <p:nvSpPr>
               <p:cNvPr id="64" name="Rectangle: Rounded Corners 63">
@@ -33291,7 +31986,7 @@
             </p:txBody>
           </p:sp>
         </mc:Choice>
-        <mc:Fallback>
+        <mc:Fallback xmlns="">
           <p:sp>
             <p:nvSpPr>
               <p:cNvPr id="64" name="Rectangle: Rounded Corners 63">
@@ -33389,8 +32084,8 @@
           </a:fontRef>
         </p:style>
       </p:cxnSp>
-      <mc:AlternateContent xmlns:mc="http://schemas.openxmlformats.org/markup-compatibility/2006">
-        <mc:Choice xmlns:a14="http://schemas.microsoft.com/office/drawing/2010/main" Requires="a14">
+      <mc:AlternateContent xmlns:mc="http://schemas.openxmlformats.org/markup-compatibility/2006" xmlns:a14="http://schemas.microsoft.com/office/drawing/2010/main">
+        <mc:Choice Requires="a14">
           <p:sp>
             <p:nvSpPr>
               <p:cNvPr id="69" name="TextBox 68">
@@ -33459,7 +32154,7 @@
             </p:txBody>
           </p:sp>
         </mc:Choice>
-        <mc:Fallback>
+        <mc:Fallback xmlns="">
           <p:sp>
             <p:nvSpPr>
               <p:cNvPr id="69" name="TextBox 68">
@@ -33504,8 +32199,8 @@
           </p:sp>
         </mc:Fallback>
       </mc:AlternateContent>
-      <mc:AlternateContent xmlns:mc="http://schemas.openxmlformats.org/markup-compatibility/2006">
-        <mc:Choice xmlns:a14="http://schemas.microsoft.com/office/drawing/2010/main" Requires="a14">
+      <mc:AlternateContent xmlns:mc="http://schemas.openxmlformats.org/markup-compatibility/2006" xmlns:a14="http://schemas.microsoft.com/office/drawing/2010/main">
+        <mc:Choice Requires="a14">
           <p:sp>
             <p:nvSpPr>
               <p:cNvPr id="70" name="TextBox 69">
@@ -33574,7 +32269,7 @@
             </p:txBody>
           </p:sp>
         </mc:Choice>
-        <mc:Fallback>
+        <mc:Fallback xmlns="">
           <p:sp>
             <p:nvSpPr>
               <p:cNvPr id="70" name="TextBox 69">
@@ -33619,8 +32314,8 @@
           </p:sp>
         </mc:Fallback>
       </mc:AlternateContent>
-      <mc:AlternateContent xmlns:mc="http://schemas.openxmlformats.org/markup-compatibility/2006">
-        <mc:Choice xmlns:a14="http://schemas.microsoft.com/office/drawing/2010/main" Requires="a14">
+      <mc:AlternateContent xmlns:mc="http://schemas.openxmlformats.org/markup-compatibility/2006" xmlns:a14="http://schemas.microsoft.com/office/drawing/2010/main">
+        <mc:Choice Requires="a14">
           <p:sp>
             <p:nvSpPr>
               <p:cNvPr id="71" name="TextBox 70">
@@ -33689,7 +32384,7 @@
             </p:txBody>
           </p:sp>
         </mc:Choice>
-        <mc:Fallback>
+        <mc:Fallback xmlns="">
           <p:sp>
             <p:nvSpPr>
               <p:cNvPr id="71" name="TextBox 70">
@@ -33866,8 +32561,8 @@
           </a:fontRef>
         </p:style>
       </p:cxnSp>
-      <mc:AlternateContent xmlns:mc="http://schemas.openxmlformats.org/markup-compatibility/2006">
-        <mc:Choice xmlns:a14="http://schemas.microsoft.com/office/drawing/2010/main" Requires="a14">
+      <mc:AlternateContent xmlns:mc="http://schemas.openxmlformats.org/markup-compatibility/2006" xmlns:a14="http://schemas.microsoft.com/office/drawing/2010/main">
+        <mc:Choice Requires="a14">
           <p:sp>
             <p:nvSpPr>
               <p:cNvPr id="76" name="TextBox 75">
@@ -33936,7 +32631,7 @@
             </p:txBody>
           </p:sp>
         </mc:Choice>
-        <mc:Fallback>
+        <mc:Fallback xmlns="">
           <p:sp>
             <p:nvSpPr>
               <p:cNvPr id="76" name="TextBox 75">
@@ -33981,8 +32676,8 @@
           </p:sp>
         </mc:Fallback>
       </mc:AlternateContent>
-      <mc:AlternateContent xmlns:mc="http://schemas.openxmlformats.org/markup-compatibility/2006">
-        <mc:Choice xmlns:a14="http://schemas.microsoft.com/office/drawing/2010/main" Requires="a14">
+      <mc:AlternateContent xmlns:mc="http://schemas.openxmlformats.org/markup-compatibility/2006" xmlns:a14="http://schemas.microsoft.com/office/drawing/2010/main">
+        <mc:Choice Requires="a14">
           <p:sp>
             <p:nvSpPr>
               <p:cNvPr id="77" name="TextBox 76">
@@ -34051,7 +32746,7 @@
             </p:txBody>
           </p:sp>
         </mc:Choice>
-        <mc:Fallback>
+        <mc:Fallback xmlns="">
           <p:sp>
             <p:nvSpPr>
               <p:cNvPr id="77" name="TextBox 76">
@@ -34096,8 +32791,8 @@
           </p:sp>
         </mc:Fallback>
       </mc:AlternateContent>
-      <mc:AlternateContent xmlns:mc="http://schemas.openxmlformats.org/markup-compatibility/2006">
-        <mc:Choice xmlns:a14="http://schemas.microsoft.com/office/drawing/2010/main" Requires="a14">
+      <mc:AlternateContent xmlns:mc="http://schemas.openxmlformats.org/markup-compatibility/2006" xmlns:a14="http://schemas.microsoft.com/office/drawing/2010/main">
+        <mc:Choice Requires="a14">
           <p:sp>
             <p:nvSpPr>
               <p:cNvPr id="78" name="TextBox 77">
@@ -34166,7 +32861,7 @@
             </p:txBody>
           </p:sp>
         </mc:Choice>
-        <mc:Fallback>
+        <mc:Fallback xmlns="">
           <p:sp>
             <p:nvSpPr>
               <p:cNvPr id="78" name="TextBox 77">
@@ -34211,8 +32906,8 @@
           </p:sp>
         </mc:Fallback>
       </mc:AlternateContent>
-      <mc:AlternateContent xmlns:mc="http://schemas.openxmlformats.org/markup-compatibility/2006">
-        <mc:Choice xmlns:a14="http://schemas.microsoft.com/office/drawing/2010/main" Requires="a14">
+      <mc:AlternateContent xmlns:mc="http://schemas.openxmlformats.org/markup-compatibility/2006" xmlns:a14="http://schemas.microsoft.com/office/drawing/2010/main">
+        <mc:Choice Requires="a14">
           <p:sp>
             <p:nvSpPr>
               <p:cNvPr id="86" name="TextBox 85">
@@ -34281,7 +32976,7 @@
             </p:txBody>
           </p:sp>
         </mc:Choice>
-        <mc:Fallback>
+        <mc:Fallback xmlns="">
           <p:sp>
             <p:nvSpPr>
               <p:cNvPr id="86" name="TextBox 85">
@@ -34326,8 +33021,8 @@
           </p:sp>
         </mc:Fallback>
       </mc:AlternateContent>
-      <mc:AlternateContent xmlns:mc="http://schemas.openxmlformats.org/markup-compatibility/2006">
-        <mc:Choice xmlns:a14="http://schemas.microsoft.com/office/drawing/2010/main" Requires="a14">
+      <mc:AlternateContent xmlns:mc="http://schemas.openxmlformats.org/markup-compatibility/2006" xmlns:a14="http://schemas.microsoft.com/office/drawing/2010/main">
+        <mc:Choice Requires="a14">
           <p:sp>
             <p:nvSpPr>
               <p:cNvPr id="87" name="TextBox 86">
@@ -34396,7 +33091,7 @@
             </p:txBody>
           </p:sp>
         </mc:Choice>
-        <mc:Fallback>
+        <mc:Fallback xmlns="">
           <p:sp>
             <p:nvSpPr>
               <p:cNvPr id="87" name="TextBox 86">
@@ -34831,8 +33526,8 @@
           </p:spPr>
         </p:pic>
       </p:grpSp>
-      <mc:AlternateContent xmlns:mc="http://schemas.openxmlformats.org/markup-compatibility/2006">
-        <mc:Choice xmlns:a14="http://schemas.microsoft.com/office/drawing/2010/main" Requires="a14">
+      <mc:AlternateContent xmlns:mc="http://schemas.openxmlformats.org/markup-compatibility/2006" xmlns:a14="http://schemas.microsoft.com/office/drawing/2010/main">
+        <mc:Choice Requires="a14">
           <p:sp>
             <p:nvSpPr>
               <p:cNvPr id="104" name="TextBox 103">
@@ -34886,7 +33581,7 @@
                             <m:rPr>
                               <m:nor/>
                             </m:rPr>
-                            <a:rPr lang="en-US" sz="1400" dirty="0">
+                            <a:rPr lang="en-US" sz="1400" i="0" dirty="0">
                               <a:latin typeface="Times New Roman" panose="02020603050405020304" pitchFamily="18" charset="0"/>
                               <a:ea typeface="Cambria Math" panose="02040503050406030204" pitchFamily="18" charset="0"/>
                               <a:cs typeface="Times New Roman" panose="02020603050405020304" pitchFamily="18" charset="0"/>
@@ -34914,7 +33609,7 @@
             </p:txBody>
           </p:sp>
         </mc:Choice>
-        <mc:Fallback>
+        <mc:Fallback xmlns="">
           <p:sp>
             <p:nvSpPr>
               <p:cNvPr id="104" name="TextBox 103">
@@ -34959,8 +33654,8 @@
           </p:sp>
         </mc:Fallback>
       </mc:AlternateContent>
-      <mc:AlternateContent xmlns:mc="http://schemas.openxmlformats.org/markup-compatibility/2006">
-        <mc:Choice xmlns:a14="http://schemas.microsoft.com/office/drawing/2010/main" Requires="a14">
+      <mc:AlternateContent xmlns:mc="http://schemas.openxmlformats.org/markup-compatibility/2006" xmlns:a14="http://schemas.microsoft.com/office/drawing/2010/main">
+        <mc:Choice Requires="a14">
           <p:sp>
             <p:nvSpPr>
               <p:cNvPr id="105" name="TextBox 104">
@@ -35038,7 +33733,7 @@
             </p:txBody>
           </p:sp>
         </mc:Choice>
-        <mc:Fallback>
+        <mc:Fallback xmlns="">
           <p:sp>
             <p:nvSpPr>
               <p:cNvPr id="105" name="TextBox 104">
@@ -35394,8 +34089,8 @@
           </a:fontRef>
         </p:style>
       </p:cxnSp>
-      <mc:AlternateContent xmlns:mc="http://schemas.openxmlformats.org/markup-compatibility/2006">
-        <mc:Choice xmlns:a14="http://schemas.microsoft.com/office/drawing/2010/main" Requires="a14">
+      <mc:AlternateContent xmlns:mc="http://schemas.openxmlformats.org/markup-compatibility/2006" xmlns:a14="http://schemas.microsoft.com/office/drawing/2010/main">
+        <mc:Choice Requires="a14">
           <p:sp>
             <p:nvSpPr>
               <p:cNvPr id="112" name="TextBox 111">
@@ -35464,7 +34159,7 @@
             </p:txBody>
           </p:sp>
         </mc:Choice>
-        <mc:Fallback>
+        <mc:Fallback xmlns="">
           <p:sp>
             <p:nvSpPr>
               <p:cNvPr id="112" name="TextBox 111">
@@ -35509,8 +34204,8 @@
           </p:sp>
         </mc:Fallback>
       </mc:AlternateContent>
-      <mc:AlternateContent xmlns:mc="http://schemas.openxmlformats.org/markup-compatibility/2006">
-        <mc:Choice xmlns:a14="http://schemas.microsoft.com/office/drawing/2010/main" Requires="a14">
+      <mc:AlternateContent xmlns:mc="http://schemas.openxmlformats.org/markup-compatibility/2006" xmlns:a14="http://schemas.microsoft.com/office/drawing/2010/main">
+        <mc:Choice Requires="a14">
           <p:sp>
             <p:nvSpPr>
               <p:cNvPr id="113" name="TextBox 112">
@@ -35579,7 +34274,7 @@
             </p:txBody>
           </p:sp>
         </mc:Choice>
-        <mc:Fallback>
+        <mc:Fallback xmlns="">
           <p:sp>
             <p:nvSpPr>
               <p:cNvPr id="113" name="TextBox 112">
@@ -35821,8 +34516,8 @@
           </a:p>
         </p:txBody>
       </p:sp>
-      <mc:AlternateContent xmlns:mc="http://schemas.openxmlformats.org/markup-compatibility/2006">
-        <mc:Choice xmlns:a14="http://schemas.microsoft.com/office/drawing/2010/main" Requires="a14">
+      <mc:AlternateContent xmlns:mc="http://schemas.openxmlformats.org/markup-compatibility/2006" xmlns:a14="http://schemas.microsoft.com/office/drawing/2010/main">
+        <mc:Choice Requires="a14">
           <p:sp>
             <p:nvSpPr>
               <p:cNvPr id="133" name="TextBox 132">
@@ -35899,7 +34594,7 @@
             </p:txBody>
           </p:sp>
         </mc:Choice>
-        <mc:Fallback>
+        <mc:Fallback xmlns="">
           <p:sp>
             <p:nvSpPr>
               <p:cNvPr id="133" name="TextBox 132">
@@ -35944,8 +34639,8 @@
           </p:sp>
         </mc:Fallback>
       </mc:AlternateContent>
-      <mc:AlternateContent xmlns:mc="http://schemas.openxmlformats.org/markup-compatibility/2006">
-        <mc:Choice xmlns:a14="http://schemas.microsoft.com/office/drawing/2010/main" Requires="a14">
+      <mc:AlternateContent xmlns:mc="http://schemas.openxmlformats.org/markup-compatibility/2006" xmlns:a14="http://schemas.microsoft.com/office/drawing/2010/main">
+        <mc:Choice Requires="a14">
           <p:sp>
             <p:nvSpPr>
               <p:cNvPr id="134" name="TextBox 133">
@@ -36022,7 +34717,7 @@
             </p:txBody>
           </p:sp>
         </mc:Choice>
-        <mc:Fallback>
+        <mc:Fallback xmlns="">
           <p:sp>
             <p:nvSpPr>
               <p:cNvPr id="134" name="TextBox 133">
@@ -36155,8 +34850,8 @@
           </a:fontRef>
         </p:style>
       </p:cxnSp>
-      <mc:AlternateContent xmlns:mc="http://schemas.openxmlformats.org/markup-compatibility/2006">
-        <mc:Choice xmlns:a14="http://schemas.microsoft.com/office/drawing/2010/main" Requires="a14">
+      <mc:AlternateContent xmlns:mc="http://schemas.openxmlformats.org/markup-compatibility/2006" xmlns:a14="http://schemas.microsoft.com/office/drawing/2010/main">
+        <mc:Choice Requires="a14">
           <p:sp>
             <p:nvSpPr>
               <p:cNvPr id="141" name="Rectangle: Rounded Corners 140">
@@ -36281,7 +34976,7 @@
             </p:txBody>
           </p:sp>
         </mc:Choice>
-        <mc:Fallback>
+        <mc:Fallback xmlns="">
           <p:sp>
             <p:nvSpPr>
               <p:cNvPr id="141" name="Rectangle: Rounded Corners 140">
@@ -36378,8 +35073,8 @@
           </a:fontRef>
         </p:style>
       </p:cxnSp>
-      <mc:AlternateContent xmlns:mc="http://schemas.openxmlformats.org/markup-compatibility/2006">
-        <mc:Choice xmlns:a14="http://schemas.microsoft.com/office/drawing/2010/main" Requires="a14">
+      <mc:AlternateContent xmlns:mc="http://schemas.openxmlformats.org/markup-compatibility/2006" xmlns:a14="http://schemas.microsoft.com/office/drawing/2010/main">
+        <mc:Choice Requires="a14">
           <p:sp>
             <p:nvSpPr>
               <p:cNvPr id="145" name="Rectangle: Rounded Corners 144">
@@ -36504,7 +35199,7 @@
             </p:txBody>
           </p:sp>
         </mc:Choice>
-        <mc:Fallback>
+        <mc:Fallback xmlns="">
           <p:sp>
             <p:nvSpPr>
               <p:cNvPr id="145" name="Rectangle: Rounded Corners 144">
@@ -37416,8 +36111,8 @@
           </a:fontRef>
         </p:style>
       </p:cxnSp>
-      <mc:AlternateContent xmlns:mc="http://schemas.openxmlformats.org/markup-compatibility/2006">
-        <mc:Choice xmlns:a14="http://schemas.microsoft.com/office/drawing/2010/main" Requires="a14">
+      <mc:AlternateContent xmlns:mc="http://schemas.openxmlformats.org/markup-compatibility/2006" xmlns:a14="http://schemas.microsoft.com/office/drawing/2010/main">
+        <mc:Choice Requires="a14">
           <p:sp>
             <p:nvSpPr>
               <p:cNvPr id="205" name="TextBox 204">
@@ -37494,7 +36189,7 @@
             </p:txBody>
           </p:sp>
         </mc:Choice>
-        <mc:Fallback>
+        <mc:Fallback xmlns="">
           <p:sp>
             <p:nvSpPr>
               <p:cNvPr id="205" name="TextBox 204">
@@ -37539,8 +36234,8 @@
           </p:sp>
         </mc:Fallback>
       </mc:AlternateContent>
-      <mc:AlternateContent xmlns:mc="http://schemas.openxmlformats.org/markup-compatibility/2006">
-        <mc:Choice xmlns:a14="http://schemas.microsoft.com/office/drawing/2010/main" Requires="a14">
+      <mc:AlternateContent xmlns:mc="http://schemas.openxmlformats.org/markup-compatibility/2006" xmlns:a14="http://schemas.microsoft.com/office/drawing/2010/main">
+        <mc:Choice Requires="a14">
           <p:sp>
             <p:nvSpPr>
               <p:cNvPr id="207" name="TextBox 206">
@@ -37617,7 +36312,7 @@
             </p:txBody>
           </p:sp>
         </mc:Choice>
-        <mc:Fallback>
+        <mc:Fallback xmlns="">
           <p:sp>
             <p:nvSpPr>
               <p:cNvPr id="207" name="TextBox 206">
@@ -37662,6 +36357,232 @@
           </p:sp>
         </mc:Fallback>
       </mc:AlternateContent>
+      <p:sp>
+        <p:nvSpPr>
+          <p:cNvPr id="3" name="Rectangle: Rounded Corners 2">
+            <a:extLst>
+              <a:ext uri="{FF2B5EF4-FFF2-40B4-BE49-F238E27FC236}">
+                <a16:creationId xmlns:a16="http://schemas.microsoft.com/office/drawing/2014/main" id="{C3BBE6A5-3C97-F5B0-6863-9B56ADA7844D}"/>
+              </a:ext>
+            </a:extLst>
+          </p:cNvPr>
+          <p:cNvSpPr/>
+          <p:nvPr/>
+        </p:nvSpPr>
+        <p:spPr>
+          <a:xfrm>
+            <a:off x="3859178" y="4927808"/>
+            <a:ext cx="1409421" cy="424801"/>
+          </a:xfrm>
+          <a:prstGeom prst="roundRect">
+            <a:avLst/>
+          </a:prstGeom>
+          <a:solidFill>
+            <a:schemeClr val="tx2">
+              <a:lumMod val="25000"/>
+              <a:lumOff val="75000"/>
+            </a:schemeClr>
+          </a:solidFill>
+          <a:ln w="19050">
+            <a:solidFill>
+              <a:schemeClr val="tx2">
+                <a:lumMod val="75000"/>
+                <a:lumOff val="25000"/>
+              </a:schemeClr>
+            </a:solidFill>
+          </a:ln>
+        </p:spPr>
+        <p:style>
+          <a:lnRef idx="2">
+            <a:schemeClr val="accent1">
+              <a:shade val="15000"/>
+            </a:schemeClr>
+          </a:lnRef>
+          <a:fillRef idx="1">
+            <a:schemeClr val="accent1"/>
+          </a:fillRef>
+          <a:effectRef idx="0">
+            <a:schemeClr val="accent1"/>
+          </a:effectRef>
+          <a:fontRef idx="minor">
+            <a:schemeClr val="lt1"/>
+          </a:fontRef>
+        </p:style>
+        <p:txBody>
+          <a:bodyPr rtlCol="0" anchor="ctr"/>
+          <a:lstStyle/>
+          <a:p>
+            <a:pPr algn="ctr"/>
+            <a:r>
+              <a:rPr lang="en-US" sz="1400" b="1" dirty="0">
+                <a:solidFill>
+                  <a:schemeClr val="tx1"/>
+                </a:solidFill>
+                <a:latin typeface="Times New Roman" panose="02020603050405020304" pitchFamily="18" charset="0"/>
+                <a:cs typeface="Times New Roman" panose="02020603050405020304" pitchFamily="18" charset="0"/>
+              </a:rPr>
+              <a:t>Control System</a:t>
+            </a:r>
+            <a:endParaRPr lang="en-CA" sz="1400" b="1" dirty="0">
+              <a:solidFill>
+                <a:schemeClr val="tx1"/>
+              </a:solidFill>
+              <a:latin typeface="Times New Roman" panose="02020603050405020304" pitchFamily="18" charset="0"/>
+              <a:cs typeface="Times New Roman" panose="02020603050405020304" pitchFamily="18" charset="0"/>
+            </a:endParaRPr>
+          </a:p>
+        </p:txBody>
+      </p:sp>
+      <p:sp>
+        <p:nvSpPr>
+          <p:cNvPr id="5" name="Rectangle: Rounded Corners 4">
+            <a:extLst>
+              <a:ext uri="{FF2B5EF4-FFF2-40B4-BE49-F238E27FC236}">
+                <a16:creationId xmlns:a16="http://schemas.microsoft.com/office/drawing/2014/main" id="{D47D480B-E811-86A6-5D2C-A562B8EB082B}"/>
+              </a:ext>
+            </a:extLst>
+          </p:cNvPr>
+          <p:cNvSpPr/>
+          <p:nvPr/>
+        </p:nvSpPr>
+        <p:spPr>
+          <a:xfrm>
+            <a:off x="5793604" y="4927808"/>
+            <a:ext cx="1409421" cy="424801"/>
+          </a:xfrm>
+          <a:prstGeom prst="roundRect">
+            <a:avLst/>
+          </a:prstGeom>
+          <a:solidFill>
+            <a:schemeClr val="accent6">
+              <a:lumMod val="20000"/>
+              <a:lumOff val="80000"/>
+            </a:schemeClr>
+          </a:solidFill>
+          <a:ln w="19050">
+            <a:solidFill>
+              <a:schemeClr val="accent6">
+                <a:lumMod val="75000"/>
+              </a:schemeClr>
+            </a:solidFill>
+          </a:ln>
+        </p:spPr>
+        <p:style>
+          <a:lnRef idx="2">
+            <a:schemeClr val="accent1">
+              <a:shade val="15000"/>
+            </a:schemeClr>
+          </a:lnRef>
+          <a:fillRef idx="1">
+            <a:schemeClr val="accent1"/>
+          </a:fillRef>
+          <a:effectRef idx="0">
+            <a:schemeClr val="accent1"/>
+          </a:effectRef>
+          <a:fontRef idx="minor">
+            <a:schemeClr val="lt1"/>
+          </a:fontRef>
+        </p:style>
+        <p:txBody>
+          <a:bodyPr rtlCol="0" anchor="ctr"/>
+          <a:lstStyle/>
+          <a:p>
+            <a:pPr algn="ctr"/>
+            <a:r>
+              <a:rPr lang="en-US" sz="1400" b="1" dirty="0">
+                <a:solidFill>
+                  <a:schemeClr val="tx1"/>
+                </a:solidFill>
+                <a:latin typeface="Times New Roman" panose="02020603050405020304" pitchFamily="18" charset="0"/>
+                <a:cs typeface="Times New Roman" panose="02020603050405020304" pitchFamily="18" charset="0"/>
+              </a:rPr>
+              <a:t>Algorithm</a:t>
+            </a:r>
+            <a:endParaRPr lang="en-CA" sz="1400" b="1" dirty="0">
+              <a:solidFill>
+                <a:schemeClr val="tx1"/>
+              </a:solidFill>
+              <a:latin typeface="Times New Roman" panose="02020603050405020304" pitchFamily="18" charset="0"/>
+              <a:cs typeface="Times New Roman" panose="02020603050405020304" pitchFamily="18" charset="0"/>
+            </a:endParaRPr>
+          </a:p>
+        </p:txBody>
+      </p:sp>
+      <p:sp>
+        <p:nvSpPr>
+          <p:cNvPr id="7" name="Rectangle: Rounded Corners 6">
+            <a:extLst>
+              <a:ext uri="{FF2B5EF4-FFF2-40B4-BE49-F238E27FC236}">
+                <a16:creationId xmlns:a16="http://schemas.microsoft.com/office/drawing/2014/main" id="{50782D2E-93E4-C2B2-9252-B8B897A66EA3}"/>
+              </a:ext>
+            </a:extLst>
+          </p:cNvPr>
+          <p:cNvSpPr/>
+          <p:nvPr/>
+        </p:nvSpPr>
+        <p:spPr>
+          <a:xfrm>
+            <a:off x="7728030" y="4927807"/>
+            <a:ext cx="1409421" cy="424801"/>
+          </a:xfrm>
+          <a:prstGeom prst="roundRect">
+            <a:avLst/>
+          </a:prstGeom>
+          <a:solidFill>
+            <a:schemeClr val="accent2">
+              <a:lumMod val="20000"/>
+              <a:lumOff val="80000"/>
+            </a:schemeClr>
+          </a:solidFill>
+          <a:ln w="19050">
+            <a:solidFill>
+              <a:schemeClr val="accent2">
+                <a:lumMod val="75000"/>
+              </a:schemeClr>
+            </a:solidFill>
+          </a:ln>
+        </p:spPr>
+        <p:style>
+          <a:lnRef idx="2">
+            <a:schemeClr val="accent1">
+              <a:shade val="15000"/>
+            </a:schemeClr>
+          </a:lnRef>
+          <a:fillRef idx="1">
+            <a:schemeClr val="accent1"/>
+          </a:fillRef>
+          <a:effectRef idx="0">
+            <a:schemeClr val="accent1"/>
+          </a:effectRef>
+          <a:fontRef idx="minor">
+            <a:schemeClr val="lt1"/>
+          </a:fontRef>
+        </p:style>
+        <p:txBody>
+          <a:bodyPr rtlCol="0" anchor="ctr"/>
+          <a:lstStyle/>
+          <a:p>
+            <a:pPr algn="ctr"/>
+            <a:r>
+              <a:rPr lang="en-US" sz="1400" b="1" dirty="0">
+                <a:solidFill>
+                  <a:schemeClr val="tx1"/>
+                </a:solidFill>
+                <a:latin typeface="Times New Roman" panose="02020603050405020304" pitchFamily="18" charset="0"/>
+                <a:cs typeface="Times New Roman" panose="02020603050405020304" pitchFamily="18" charset="0"/>
+              </a:rPr>
+              <a:t>Hardware</a:t>
+            </a:r>
+            <a:endParaRPr lang="en-CA" sz="1400" b="1" dirty="0">
+              <a:solidFill>
+                <a:schemeClr val="tx1"/>
+              </a:solidFill>
+              <a:latin typeface="Times New Roman" panose="02020603050405020304" pitchFamily="18" charset="0"/>
+              <a:cs typeface="Times New Roman" panose="02020603050405020304" pitchFamily="18" charset="0"/>
+            </a:endParaRPr>
+          </a:p>
+        </p:txBody>
+      </p:sp>
     </p:spTree>
     <p:extLst>
       <p:ext uri="{BB962C8B-B14F-4D97-AF65-F5344CB8AC3E}">
@@ -37731,8 +36652,8 @@
           </a:p>
         </p:txBody>
       </p:sp>
-      <mc:AlternateContent xmlns:mc="http://schemas.openxmlformats.org/markup-compatibility/2006">
-        <mc:Choice xmlns:a14="http://schemas.microsoft.com/office/drawing/2010/main" Requires="a14">
+      <mc:AlternateContent xmlns:mc="http://schemas.openxmlformats.org/markup-compatibility/2006" xmlns:a14="http://schemas.microsoft.com/office/drawing/2010/main">
+        <mc:Choice Requires="a14">
           <p:sp>
             <p:nvSpPr>
               <p:cNvPr id="4" name="Content Placeholder 3">
@@ -38363,7 +37284,7 @@
             </p:txBody>
           </p:sp>
         </mc:Choice>
-        <mc:Fallback>
+        <mc:Fallback xmlns="">
           <p:sp>
             <p:nvSpPr>
               <p:cNvPr id="4" name="Content Placeholder 3">

--- a/field_oriented_control.pptx
+++ b/field_oriented_control.pptx
@@ -5,13 +5,14 @@
     <p:sldMasterId id="2147483732" r:id="rId1"/>
   </p:sldMasterIdLst>
   <p:notesMasterIdLst>
-    <p:notesMasterId r:id="rId6"/>
+    <p:notesMasterId r:id="rId7"/>
   </p:notesMasterIdLst>
   <p:sldIdLst>
     <p:sldId id="256" r:id="rId2"/>
     <p:sldId id="259" r:id="rId3"/>
     <p:sldId id="260" r:id="rId4"/>
-    <p:sldId id="258" r:id="rId5"/>
+    <p:sldId id="261" r:id="rId5"/>
+    <p:sldId id="258" r:id="rId6"/>
   </p:sldIdLst>
   <p:sldSz cx="21599525" cy="7164388"/>
   <p:notesSz cx="6858000" cy="9144000"/>
@@ -118,12 +119,20 @@
 </p:presentation>
 </file>
 
+<file path=ppt/revisionInfo.xml><?xml version="1.0" encoding="utf-8"?>
+<p1510:revInfo xmlns:a="http://schemas.openxmlformats.org/drawingml/2006/main" xmlns:r="http://schemas.openxmlformats.org/officeDocument/2006/relationships" xmlns:p1510="http://schemas.microsoft.com/office/powerpoint/2015/10/main">
+  <p1510:revLst>
+    <p1510:client id="{E23C0E3B-1BCF-43A5-9BFC-28A61010C6A7}" v="2" dt="2026-09-24T21:52:26.213"/>
+  </p1510:revLst>
+</p1510:revInfo>
+</file>
+
 <file path=ppt/changesInfos/changesInfo1.xml><?xml version="1.0" encoding="utf-8"?>
 <pc:chgInfo xmlns:a="http://schemas.openxmlformats.org/drawingml/2006/main" xmlns:r="http://schemas.openxmlformats.org/officeDocument/2006/relationships" xmlns:ac="http://schemas.microsoft.com/office/drawing/2013/main/command" xmlns:pc="http://schemas.microsoft.com/office/powerpoint/2013/main/command">
   <pc:docChgLst>
     <pc:chgData name="Jonah St. Hilaire" userId="9d0a7af2-d0bd-4748-b50b-5cc37e0fdaa3" providerId="ADAL" clId="{58AAB240-BB3C-43BA-87E9-80C5D70C8BCC}"/>
     <pc:docChg chg="undo redo custSel addSld delSld modSld sldOrd modMainMaster delSection modSection">
-      <pc:chgData name="Jonah St. Hilaire" userId="9d0a7af2-d0bd-4748-b50b-5cc37e0fdaa3" providerId="ADAL" clId="{58AAB240-BB3C-43BA-87E9-80C5D70C8BCC}" dt="2026-09-14T20:46:04.549" v="4527" actId="1076"/>
+      <pc:chgData name="Jonah St. Hilaire" userId="9d0a7af2-d0bd-4748-b50b-5cc37e0fdaa3" providerId="ADAL" clId="{58AAB240-BB3C-43BA-87E9-80C5D70C8BCC}" dt="2026-09-24T21:55:53.216" v="4847" actId="14100"/>
       <pc:docMkLst>
         <pc:docMk/>
       </pc:docMkLst>
@@ -1947,6 +1956,301 @@
           </ac:cxnSpMkLst>
         </pc:cxnChg>
       </pc:sldChg>
+      <pc:sldChg chg="addSp delSp modSp add mod">
+        <pc:chgData name="Jonah St. Hilaire" userId="9d0a7af2-d0bd-4748-b50b-5cc37e0fdaa3" providerId="ADAL" clId="{58AAB240-BB3C-43BA-87E9-80C5D70C8BCC}" dt="2026-09-24T21:55:53.216" v="4847" actId="14100"/>
+        <pc:sldMkLst>
+          <pc:docMk/>
+          <pc:sldMk cId="2711191929" sldId="261"/>
+        </pc:sldMkLst>
+        <pc:spChg chg="add del">
+          <ac:chgData name="Jonah St. Hilaire" userId="9d0a7af2-d0bd-4748-b50b-5cc37e0fdaa3" providerId="ADAL" clId="{58AAB240-BB3C-43BA-87E9-80C5D70C8BCC}" dt="2026-09-24T21:51:26.737" v="4712" actId="22"/>
+          <ac:spMkLst>
+            <pc:docMk/>
+            <pc:sldMk cId="2711191929" sldId="261"/>
+            <ac:spMk id="4" creationId="{F177BEFF-EC66-B56C-890E-B42041C9C45A}"/>
+          </ac:spMkLst>
+        </pc:spChg>
+        <pc:spChg chg="mod">
+          <ac:chgData name="Jonah St. Hilaire" userId="9d0a7af2-d0bd-4748-b50b-5cc37e0fdaa3" providerId="ADAL" clId="{58AAB240-BB3C-43BA-87E9-80C5D70C8BCC}" dt="2026-09-24T21:50:53.745" v="4665" actId="1038"/>
+          <ac:spMkLst>
+            <pc:docMk/>
+            <pc:sldMk cId="2711191929" sldId="261"/>
+            <ac:spMk id="5" creationId="{7883BDD5-F10F-1FD8-17BA-89E602246AF9}"/>
+          </ac:spMkLst>
+        </pc:spChg>
+        <pc:spChg chg="mod">
+          <ac:chgData name="Jonah St. Hilaire" userId="9d0a7af2-d0bd-4748-b50b-5cc37e0fdaa3" providerId="ADAL" clId="{58AAB240-BB3C-43BA-87E9-80C5D70C8BCC}" dt="2026-09-24T21:50:53.745" v="4665" actId="1038"/>
+          <ac:spMkLst>
+            <pc:docMk/>
+            <pc:sldMk cId="2711191929" sldId="261"/>
+            <ac:spMk id="7" creationId="{CCBCE907-3D3B-AFC4-D341-6303C2308864}"/>
+          </ac:spMkLst>
+        </pc:spChg>
+        <pc:spChg chg="add del">
+          <ac:chgData name="Jonah St. Hilaire" userId="9d0a7af2-d0bd-4748-b50b-5cc37e0fdaa3" providerId="ADAL" clId="{58AAB240-BB3C-43BA-87E9-80C5D70C8BCC}" dt="2026-09-24T21:51:26.737" v="4712" actId="22"/>
+          <ac:spMkLst>
+            <pc:docMk/>
+            <pc:sldMk cId="2711191929" sldId="261"/>
+            <ac:spMk id="8" creationId="{88F083EB-582A-78A1-E239-053DB6EBD51A}"/>
+          </ac:spMkLst>
+        </pc:spChg>
+        <pc:spChg chg="add del">
+          <ac:chgData name="Jonah St. Hilaire" userId="9d0a7af2-d0bd-4748-b50b-5cc37e0fdaa3" providerId="ADAL" clId="{58AAB240-BB3C-43BA-87E9-80C5D70C8BCC}" dt="2026-09-24T21:51:26.737" v="4712" actId="22"/>
+          <ac:spMkLst>
+            <pc:docMk/>
+            <pc:sldMk cId="2711191929" sldId="261"/>
+            <ac:spMk id="10" creationId="{3F2A29B4-4238-1EC1-C81F-D07C12701F4D}"/>
+          </ac:spMkLst>
+        </pc:spChg>
+        <pc:spChg chg="add del">
+          <ac:chgData name="Jonah St. Hilaire" userId="9d0a7af2-d0bd-4748-b50b-5cc37e0fdaa3" providerId="ADAL" clId="{58AAB240-BB3C-43BA-87E9-80C5D70C8BCC}" dt="2026-09-24T21:51:40.223" v="4716" actId="22"/>
+          <ac:spMkLst>
+            <pc:docMk/>
+            <pc:sldMk cId="2711191929" sldId="261"/>
+            <ac:spMk id="13" creationId="{FD217A9A-7810-7E77-E8A6-77A9AD842F45}"/>
+          </ac:spMkLst>
+        </pc:spChg>
+        <pc:spChg chg="add del">
+          <ac:chgData name="Jonah St. Hilaire" userId="9d0a7af2-d0bd-4748-b50b-5cc37e0fdaa3" providerId="ADAL" clId="{58AAB240-BB3C-43BA-87E9-80C5D70C8BCC}" dt="2026-09-24T21:51:40.223" v="4716" actId="22"/>
+          <ac:spMkLst>
+            <pc:docMk/>
+            <pc:sldMk cId="2711191929" sldId="261"/>
+            <ac:spMk id="15" creationId="{48DFE09B-B88F-F821-0C5A-729E1CF73970}"/>
+          </ac:spMkLst>
+        </pc:spChg>
+        <pc:spChg chg="add del">
+          <ac:chgData name="Jonah St. Hilaire" userId="9d0a7af2-d0bd-4748-b50b-5cc37e0fdaa3" providerId="ADAL" clId="{58AAB240-BB3C-43BA-87E9-80C5D70C8BCC}" dt="2026-09-24T21:51:40.223" v="4716" actId="22"/>
+          <ac:spMkLst>
+            <pc:docMk/>
+            <pc:sldMk cId="2711191929" sldId="261"/>
+            <ac:spMk id="17" creationId="{0CC2CB41-3438-3364-0412-15BA2CC041F0}"/>
+          </ac:spMkLst>
+        </pc:spChg>
+        <pc:spChg chg="add mod">
+          <ac:chgData name="Jonah St. Hilaire" userId="9d0a7af2-d0bd-4748-b50b-5cc37e0fdaa3" providerId="ADAL" clId="{58AAB240-BB3C-43BA-87E9-80C5D70C8BCC}" dt="2026-09-24T21:51:57.824" v="4718" actId="1076"/>
+          <ac:spMkLst>
+            <pc:docMk/>
+            <pc:sldMk cId="2711191929" sldId="261"/>
+            <ac:spMk id="19" creationId="{3AEB6BFE-289E-4AA6-0295-C6178324D3EA}"/>
+          </ac:spMkLst>
+        </pc:spChg>
+        <pc:spChg chg="add mod">
+          <ac:chgData name="Jonah St. Hilaire" userId="9d0a7af2-d0bd-4748-b50b-5cc37e0fdaa3" providerId="ADAL" clId="{58AAB240-BB3C-43BA-87E9-80C5D70C8BCC}" dt="2026-09-24T21:51:57.824" v="4718" actId="1076"/>
+          <ac:spMkLst>
+            <pc:docMk/>
+            <pc:sldMk cId="2711191929" sldId="261"/>
+            <ac:spMk id="21" creationId="{1EA8BF07-3938-0EB6-72BF-ACE2AF4BC5C9}"/>
+          </ac:spMkLst>
+        </pc:spChg>
+        <pc:spChg chg="add mod">
+          <ac:chgData name="Jonah St. Hilaire" userId="9d0a7af2-d0bd-4748-b50b-5cc37e0fdaa3" providerId="ADAL" clId="{58AAB240-BB3C-43BA-87E9-80C5D70C8BCC}" dt="2026-09-24T21:51:57.824" v="4718" actId="1076"/>
+          <ac:spMkLst>
+            <pc:docMk/>
+            <pc:sldMk cId="2711191929" sldId="261"/>
+            <ac:spMk id="23" creationId="{21F8FD11-0CDB-17D9-1A15-1502B35769EE}"/>
+          </ac:spMkLst>
+        </pc:spChg>
+        <pc:spChg chg="add mod">
+          <ac:chgData name="Jonah St. Hilaire" userId="9d0a7af2-d0bd-4748-b50b-5cc37e0fdaa3" providerId="ADAL" clId="{58AAB240-BB3C-43BA-87E9-80C5D70C8BCC}" dt="2026-09-24T21:54:25.665" v="4765" actId="1076"/>
+          <ac:spMkLst>
+            <pc:docMk/>
+            <pc:sldMk cId="2711191929" sldId="261"/>
+            <ac:spMk id="25" creationId="{E371127E-0331-F5F7-1D24-AAFCEF03AFC3}"/>
+          </ac:spMkLst>
+        </pc:spChg>
+        <pc:spChg chg="add mod">
+          <ac:chgData name="Jonah St. Hilaire" userId="9d0a7af2-d0bd-4748-b50b-5cc37e0fdaa3" providerId="ADAL" clId="{58AAB240-BB3C-43BA-87E9-80C5D70C8BCC}" dt="2026-09-24T21:53:56.095" v="4763" actId="1037"/>
+          <ac:spMkLst>
+            <pc:docMk/>
+            <pc:sldMk cId="2711191929" sldId="261"/>
+            <ac:spMk id="26" creationId="{AE55CCCC-A19B-FAC8-8644-6796649C0417}"/>
+          </ac:spMkLst>
+        </pc:spChg>
+        <pc:spChg chg="add mod">
+          <ac:chgData name="Jonah St. Hilaire" userId="9d0a7af2-d0bd-4748-b50b-5cc37e0fdaa3" providerId="ADAL" clId="{58AAB240-BB3C-43BA-87E9-80C5D70C8BCC}" dt="2026-09-24T21:53:56.095" v="4763" actId="1037"/>
+          <ac:spMkLst>
+            <pc:docMk/>
+            <pc:sldMk cId="2711191929" sldId="261"/>
+            <ac:spMk id="27" creationId="{B6BB7C16-19AE-FFED-DE27-8527649A6F33}"/>
+          </ac:spMkLst>
+        </pc:spChg>
+        <pc:spChg chg="mod">
+          <ac:chgData name="Jonah St. Hilaire" userId="9d0a7af2-d0bd-4748-b50b-5cc37e0fdaa3" providerId="ADAL" clId="{58AAB240-BB3C-43BA-87E9-80C5D70C8BCC}" dt="2026-09-24T21:50:53.745" v="4665" actId="1038"/>
+          <ac:spMkLst>
+            <pc:docMk/>
+            <pc:sldMk cId="2711191929" sldId="261"/>
+            <ac:spMk id="50" creationId="{5E05576F-2605-C1C6-FFB5-A1F9908987BA}"/>
+          </ac:spMkLst>
+        </pc:spChg>
+        <pc:spChg chg="mod">
+          <ac:chgData name="Jonah St. Hilaire" userId="9d0a7af2-d0bd-4748-b50b-5cc37e0fdaa3" providerId="ADAL" clId="{58AAB240-BB3C-43BA-87E9-80C5D70C8BCC}" dt="2026-09-24T21:50:53.745" v="4665" actId="1038"/>
+          <ac:spMkLst>
+            <pc:docMk/>
+            <pc:sldMk cId="2711191929" sldId="261"/>
+            <ac:spMk id="76" creationId="{151C5F4C-AD0E-1870-D0E6-02489A933D83}"/>
+          </ac:spMkLst>
+        </pc:spChg>
+        <pc:spChg chg="mod">
+          <ac:chgData name="Jonah St. Hilaire" userId="9d0a7af2-d0bd-4748-b50b-5cc37e0fdaa3" providerId="ADAL" clId="{58AAB240-BB3C-43BA-87E9-80C5D70C8BCC}" dt="2026-09-24T21:50:53.745" v="4665" actId="1038"/>
+          <ac:spMkLst>
+            <pc:docMk/>
+            <pc:sldMk cId="2711191929" sldId="261"/>
+            <ac:spMk id="86" creationId="{9BC99C41-618F-54D7-DF4B-3C1066DB5E16}"/>
+          </ac:spMkLst>
+        </pc:spChg>
+        <pc:spChg chg="mod">
+          <ac:chgData name="Jonah St. Hilaire" userId="9d0a7af2-d0bd-4748-b50b-5cc37e0fdaa3" providerId="ADAL" clId="{58AAB240-BB3C-43BA-87E9-80C5D70C8BCC}" dt="2026-09-24T21:50:53.745" v="4665" actId="1038"/>
+          <ac:spMkLst>
+            <pc:docMk/>
+            <pc:sldMk cId="2711191929" sldId="261"/>
+            <ac:spMk id="100" creationId="{68FE51B0-DE23-9DDC-46A1-0AD43174BFD6}"/>
+          </ac:spMkLst>
+        </pc:spChg>
+        <pc:spChg chg="mod">
+          <ac:chgData name="Jonah St. Hilaire" userId="9d0a7af2-d0bd-4748-b50b-5cc37e0fdaa3" providerId="ADAL" clId="{58AAB240-BB3C-43BA-87E9-80C5D70C8BCC}" dt="2026-09-24T21:50:53.745" v="4665" actId="1038"/>
+          <ac:spMkLst>
+            <pc:docMk/>
+            <pc:sldMk cId="2711191929" sldId="261"/>
+            <ac:spMk id="113" creationId="{3F332451-58AF-EDC2-C255-B2D34882CA77}"/>
+          </ac:spMkLst>
+        </pc:spChg>
+        <pc:spChg chg="mod">
+          <ac:chgData name="Jonah St. Hilaire" userId="9d0a7af2-d0bd-4748-b50b-5cc37e0fdaa3" providerId="ADAL" clId="{58AAB240-BB3C-43BA-87E9-80C5D70C8BCC}" dt="2026-09-24T21:55:28.752" v="4845" actId="1038"/>
+          <ac:spMkLst>
+            <pc:docMk/>
+            <pc:sldMk cId="2711191929" sldId="261"/>
+            <ac:spMk id="130" creationId="{AE6252B7-0B47-D446-EC58-3998F967477A}"/>
+          </ac:spMkLst>
+        </pc:spChg>
+        <pc:spChg chg="mod">
+          <ac:chgData name="Jonah St. Hilaire" userId="9d0a7af2-d0bd-4748-b50b-5cc37e0fdaa3" providerId="ADAL" clId="{58AAB240-BB3C-43BA-87E9-80C5D70C8BCC}" dt="2026-09-24T21:55:28.752" v="4845" actId="1038"/>
+          <ac:spMkLst>
+            <pc:docMk/>
+            <pc:sldMk cId="2711191929" sldId="261"/>
+            <ac:spMk id="132" creationId="{26E1D680-016A-243E-3386-136555BA0F8F}"/>
+          </ac:spMkLst>
+        </pc:spChg>
+        <pc:spChg chg="mod">
+          <ac:chgData name="Jonah St. Hilaire" userId="9d0a7af2-d0bd-4748-b50b-5cc37e0fdaa3" providerId="ADAL" clId="{58AAB240-BB3C-43BA-87E9-80C5D70C8BCC}" dt="2026-09-24T21:50:53.745" v="4665" actId="1038"/>
+          <ac:spMkLst>
+            <pc:docMk/>
+            <pc:sldMk cId="2711191929" sldId="261"/>
+            <ac:spMk id="150" creationId="{1E99AAFA-1915-2EFA-A985-9BE09C11EE9B}"/>
+          </ac:spMkLst>
+        </pc:spChg>
+        <pc:spChg chg="mod">
+          <ac:chgData name="Jonah St. Hilaire" userId="9d0a7af2-d0bd-4748-b50b-5cc37e0fdaa3" providerId="ADAL" clId="{58AAB240-BB3C-43BA-87E9-80C5D70C8BCC}" dt="2026-09-24T21:55:28.752" v="4845" actId="1038"/>
+          <ac:spMkLst>
+            <pc:docMk/>
+            <pc:sldMk cId="2711191929" sldId="261"/>
+            <ac:spMk id="164" creationId="{530CB936-B083-5858-DFF1-E95C3182DDA3}"/>
+          </ac:spMkLst>
+        </pc:spChg>
+        <pc:spChg chg="mod">
+          <ac:chgData name="Jonah St. Hilaire" userId="9d0a7af2-d0bd-4748-b50b-5cc37e0fdaa3" providerId="ADAL" clId="{58AAB240-BB3C-43BA-87E9-80C5D70C8BCC}" dt="2026-09-24T21:55:28.752" v="4845" actId="1038"/>
+          <ac:spMkLst>
+            <pc:docMk/>
+            <pc:sldMk cId="2711191929" sldId="261"/>
+            <ac:spMk id="166" creationId="{3C8FCF78-1280-5A20-FD97-70DE029FA688}"/>
+          </ac:spMkLst>
+        </pc:spChg>
+        <pc:spChg chg="mod">
+          <ac:chgData name="Jonah St. Hilaire" userId="9d0a7af2-d0bd-4748-b50b-5cc37e0fdaa3" providerId="ADAL" clId="{58AAB240-BB3C-43BA-87E9-80C5D70C8BCC}" dt="2026-09-24T21:55:28.752" v="4845" actId="1038"/>
+          <ac:spMkLst>
+            <pc:docMk/>
+            <pc:sldMk cId="2711191929" sldId="261"/>
+            <ac:spMk id="168" creationId="{526C9AED-8267-6141-DFDA-E0C6BBC5CA5E}"/>
+          </ac:spMkLst>
+        </pc:spChg>
+        <pc:spChg chg="mod">
+          <ac:chgData name="Jonah St. Hilaire" userId="9d0a7af2-d0bd-4748-b50b-5cc37e0fdaa3" providerId="ADAL" clId="{58AAB240-BB3C-43BA-87E9-80C5D70C8BCC}" dt="2026-09-24T21:55:28.752" v="4845" actId="1038"/>
+          <ac:spMkLst>
+            <pc:docMk/>
+            <pc:sldMk cId="2711191929" sldId="261"/>
+            <ac:spMk id="172" creationId="{EF9772A2-FF89-CF5F-BA4E-D5FD4669080A}"/>
+          </ac:spMkLst>
+        </pc:spChg>
+        <pc:spChg chg="mod">
+          <ac:chgData name="Jonah St. Hilaire" userId="9d0a7af2-d0bd-4748-b50b-5cc37e0fdaa3" providerId="ADAL" clId="{58AAB240-BB3C-43BA-87E9-80C5D70C8BCC}" dt="2026-09-24T21:55:28.752" v="4845" actId="1038"/>
+          <ac:spMkLst>
+            <pc:docMk/>
+            <pc:sldMk cId="2711191929" sldId="261"/>
+            <ac:spMk id="174" creationId="{C94686C0-5624-B1DC-B049-156BF4520E33}"/>
+          </ac:spMkLst>
+        </pc:spChg>
+        <pc:spChg chg="mod">
+          <ac:chgData name="Jonah St. Hilaire" userId="9d0a7af2-d0bd-4748-b50b-5cc37e0fdaa3" providerId="ADAL" clId="{58AAB240-BB3C-43BA-87E9-80C5D70C8BCC}" dt="2026-09-24T21:55:28.752" v="4845" actId="1038"/>
+          <ac:spMkLst>
+            <pc:docMk/>
+            <pc:sldMk cId="2711191929" sldId="261"/>
+            <ac:spMk id="176" creationId="{D9556443-4557-85B5-5C43-309D540AEEAF}"/>
+          </ac:spMkLst>
+        </pc:spChg>
+        <pc:spChg chg="mod">
+          <ac:chgData name="Jonah St. Hilaire" userId="9d0a7af2-d0bd-4748-b50b-5cc37e0fdaa3" providerId="ADAL" clId="{58AAB240-BB3C-43BA-87E9-80C5D70C8BCC}" dt="2026-09-24T21:55:28.752" v="4845" actId="1038"/>
+          <ac:spMkLst>
+            <pc:docMk/>
+            <pc:sldMk cId="2711191929" sldId="261"/>
+            <ac:spMk id="205" creationId="{13433988-653C-8DB3-2C68-D1FA5C468346}"/>
+          </ac:spMkLst>
+        </pc:spChg>
+        <pc:spChg chg="mod">
+          <ac:chgData name="Jonah St. Hilaire" userId="9d0a7af2-d0bd-4748-b50b-5cc37e0fdaa3" providerId="ADAL" clId="{58AAB240-BB3C-43BA-87E9-80C5D70C8BCC}" dt="2026-09-24T21:55:28.752" v="4845" actId="1038"/>
+          <ac:spMkLst>
+            <pc:docMk/>
+            <pc:sldMk cId="2711191929" sldId="261"/>
+            <ac:spMk id="207" creationId="{1AF226F3-0B10-7E99-7F7F-BA0048598D8B}"/>
+          </ac:spMkLst>
+        </pc:spChg>
+        <pc:cxnChg chg="add mod">
+          <ac:chgData name="Jonah St. Hilaire" userId="9d0a7af2-d0bd-4748-b50b-5cc37e0fdaa3" providerId="ADAL" clId="{58AAB240-BB3C-43BA-87E9-80C5D70C8BCC}" dt="2026-09-24T21:52:17.933" v="4748" actId="1038"/>
+          <ac:cxnSpMkLst>
+            <pc:docMk/>
+            <pc:sldMk cId="2711191929" sldId="261"/>
+            <ac:cxnSpMk id="24" creationId="{7DBDDEB8-75FC-7099-3925-4ED4CDE33C18}"/>
+          </ac:cxnSpMkLst>
+        </pc:cxnChg>
+        <pc:cxnChg chg="add mod">
+          <ac:chgData name="Jonah St. Hilaire" userId="9d0a7af2-d0bd-4748-b50b-5cc37e0fdaa3" providerId="ADAL" clId="{58AAB240-BB3C-43BA-87E9-80C5D70C8BCC}" dt="2026-09-24T21:54:41.989" v="4806" actId="1038"/>
+          <ac:cxnSpMkLst>
+            <pc:docMk/>
+            <pc:sldMk cId="2711191929" sldId="261"/>
+            <ac:cxnSpMk id="28" creationId="{0F135ECA-3931-5432-A0AD-04555DB8869C}"/>
+          </ac:cxnSpMkLst>
+        </pc:cxnChg>
+        <pc:cxnChg chg="mod">
+          <ac:chgData name="Jonah St. Hilaire" userId="9d0a7af2-d0bd-4748-b50b-5cc37e0fdaa3" providerId="ADAL" clId="{58AAB240-BB3C-43BA-87E9-80C5D70C8BCC}" dt="2026-09-24T21:51:33.498" v="4714" actId="1076"/>
+          <ac:cxnSpMkLst>
+            <pc:docMk/>
+            <pc:sldMk cId="2711191929" sldId="261"/>
+            <ac:cxnSpMk id="181" creationId="{B8E39D0D-BF4D-D834-8CD7-3BDEC111E741}"/>
+          </ac:cxnSpMkLst>
+        </pc:cxnChg>
+        <pc:cxnChg chg="mod">
+          <ac:chgData name="Jonah St. Hilaire" userId="9d0a7af2-d0bd-4748-b50b-5cc37e0fdaa3" providerId="ADAL" clId="{58AAB240-BB3C-43BA-87E9-80C5D70C8BCC}" dt="2026-09-24T21:55:48.160" v="4846" actId="14100"/>
+          <ac:cxnSpMkLst>
+            <pc:docMk/>
+            <pc:sldMk cId="2711191929" sldId="261"/>
+            <ac:cxnSpMk id="189" creationId="{25D892B0-65AA-DFA6-541D-21EAF220573E}"/>
+          </ac:cxnSpMkLst>
+        </pc:cxnChg>
+        <pc:cxnChg chg="mod">
+          <ac:chgData name="Jonah St. Hilaire" userId="9d0a7af2-d0bd-4748-b50b-5cc37e0fdaa3" providerId="ADAL" clId="{58AAB240-BB3C-43BA-87E9-80C5D70C8BCC}" dt="2026-09-24T21:55:53.216" v="4847" actId="14100"/>
+          <ac:cxnSpMkLst>
+            <pc:docMk/>
+            <pc:sldMk cId="2711191929" sldId="261"/>
+            <ac:cxnSpMk id="192" creationId="{92E31983-E28F-A960-816D-B52640928B1D}"/>
+          </ac:cxnSpMkLst>
+        </pc:cxnChg>
+        <pc:cxnChg chg="mod">
+          <ac:chgData name="Jonah St. Hilaire" userId="9d0a7af2-d0bd-4748-b50b-5cc37e0fdaa3" providerId="ADAL" clId="{58AAB240-BB3C-43BA-87E9-80C5D70C8BCC}" dt="2026-09-24T21:51:33.498" v="4714" actId="1076"/>
+          <ac:cxnSpMkLst>
+            <pc:docMk/>
+            <pc:sldMk cId="2711191929" sldId="261"/>
+            <ac:cxnSpMk id="202" creationId="{6B53A215-F02F-7F0D-8731-0643808CA9B7}"/>
+          </ac:cxnSpMkLst>
+        </pc:cxnChg>
+      </pc:sldChg>
     </pc:docChg>
   </pc:docChgLst>
 </pc:chgInfo>
@@ -2034,7 +2338,7 @@
           <a:p>
             <a:fld id="{681B76C8-650E-46E7-9239-6D2B71F9A944}" type="datetimeFigureOut">
               <a:rPr lang="en-CA" smtClean="0"/>
-              <a:t>2026-09-14</a:t>
+              <a:t>2026-09-24</a:t>
             </a:fld>
             <a:endParaRPr lang="en-CA"/>
           </a:p>
@@ -2517,7 +2821,7 @@
           <a:p>
             <a:fld id="{14C7401E-E5C6-4ADA-88C9-F7478DD83A36}" type="datetimeFigureOut">
               <a:rPr lang="en-CA" smtClean="0"/>
-              <a:t>2026-09-14</a:t>
+              <a:t>2026-09-24</a:t>
             </a:fld>
             <a:endParaRPr lang="en-CA"/>
           </a:p>
@@ -2687,7 +2991,7 @@
           <a:p>
             <a:fld id="{14C7401E-E5C6-4ADA-88C9-F7478DD83A36}" type="datetimeFigureOut">
               <a:rPr lang="en-CA" smtClean="0"/>
-              <a:t>2026-09-14</a:t>
+              <a:t>2026-09-24</a:t>
             </a:fld>
             <a:endParaRPr lang="en-CA"/>
           </a:p>
@@ -2867,7 +3171,7 @@
           <a:p>
             <a:fld id="{14C7401E-E5C6-4ADA-88C9-F7478DD83A36}" type="datetimeFigureOut">
               <a:rPr lang="en-CA" smtClean="0"/>
-              <a:t>2026-09-14</a:t>
+              <a:t>2026-09-24</a:t>
             </a:fld>
             <a:endParaRPr lang="en-CA"/>
           </a:p>
@@ -3037,7 +3341,7 @@
           <a:p>
             <a:fld id="{14C7401E-E5C6-4ADA-88C9-F7478DD83A36}" type="datetimeFigureOut">
               <a:rPr lang="en-CA" smtClean="0"/>
-              <a:t>2026-09-14</a:t>
+              <a:t>2026-09-24</a:t>
             </a:fld>
             <a:endParaRPr lang="en-CA"/>
           </a:p>
@@ -3283,7 +3587,7 @@
           <a:p>
             <a:fld id="{14C7401E-E5C6-4ADA-88C9-F7478DD83A36}" type="datetimeFigureOut">
               <a:rPr lang="en-CA" smtClean="0"/>
-              <a:t>2026-09-14</a:t>
+              <a:t>2026-09-24</a:t>
             </a:fld>
             <a:endParaRPr lang="en-CA"/>
           </a:p>
@@ -3515,7 +3819,7 @@
           <a:p>
             <a:fld id="{14C7401E-E5C6-4ADA-88C9-F7478DD83A36}" type="datetimeFigureOut">
               <a:rPr lang="en-CA" smtClean="0"/>
-              <a:t>2026-09-14</a:t>
+              <a:t>2026-09-24</a:t>
             </a:fld>
             <a:endParaRPr lang="en-CA"/>
           </a:p>
@@ -3882,7 +4186,7 @@
           <a:p>
             <a:fld id="{14C7401E-E5C6-4ADA-88C9-F7478DD83A36}" type="datetimeFigureOut">
               <a:rPr lang="en-CA" smtClean="0"/>
-              <a:t>2026-09-14</a:t>
+              <a:t>2026-09-24</a:t>
             </a:fld>
             <a:endParaRPr lang="en-CA"/>
           </a:p>
@@ -4000,7 +4304,7 @@
           <a:p>
             <a:fld id="{14C7401E-E5C6-4ADA-88C9-F7478DD83A36}" type="datetimeFigureOut">
               <a:rPr lang="en-CA" smtClean="0"/>
-              <a:t>2026-09-14</a:t>
+              <a:t>2026-09-24</a:t>
             </a:fld>
             <a:endParaRPr lang="en-CA"/>
           </a:p>
@@ -4095,7 +4399,7 @@
           <a:p>
             <a:fld id="{14C7401E-E5C6-4ADA-88C9-F7478DD83A36}" type="datetimeFigureOut">
               <a:rPr lang="en-CA" smtClean="0"/>
-              <a:t>2026-09-14</a:t>
+              <a:t>2026-09-24</a:t>
             </a:fld>
             <a:endParaRPr lang="en-CA"/>
           </a:p>
@@ -4372,7 +4676,7 @@
           <a:p>
             <a:fld id="{14C7401E-E5C6-4ADA-88C9-F7478DD83A36}" type="datetimeFigureOut">
               <a:rPr lang="en-CA" smtClean="0"/>
-              <a:t>2026-09-14</a:t>
+              <a:t>2026-09-24</a:t>
             </a:fld>
             <a:endParaRPr lang="en-CA"/>
           </a:p>
@@ -4629,7 +4933,7 @@
           <a:p>
             <a:fld id="{14C7401E-E5C6-4ADA-88C9-F7478DD83A36}" type="datetimeFigureOut">
               <a:rPr lang="en-CA" smtClean="0"/>
-              <a:t>2026-09-14</a:t>
+              <a:t>2026-09-24</a:t>
             </a:fld>
             <a:endParaRPr lang="en-CA"/>
           </a:p>
@@ -4842,7 +5146,7 @@
           <a:p>
             <a:fld id="{14C7401E-E5C6-4ADA-88C9-F7478DD83A36}" type="datetimeFigureOut">
               <a:rPr lang="en-CA" smtClean="0"/>
-              <a:t>2026-09-14</a:t>
+              <a:t>2026-09-24</a:t>
             </a:fld>
             <a:endParaRPr lang="en-CA"/>
           </a:p>
@@ -36599,6 +36903,6577 @@
 <file path=ppt/slides/slide4.xml><?xml version="1.0" encoding="utf-8"?>
 <p:sld xmlns:a="http://schemas.openxmlformats.org/drawingml/2006/main" xmlns:r="http://schemas.openxmlformats.org/officeDocument/2006/relationships" xmlns:p="http://schemas.openxmlformats.org/presentationml/2006/main">
   <p:cSld>
+    <p:spTree>
+      <p:nvGrpSpPr>
+        <p:cNvPr id="1" name="">
+          <a:extLst>
+            <a:ext uri="{FF2B5EF4-FFF2-40B4-BE49-F238E27FC236}">
+              <a16:creationId xmlns:a16="http://schemas.microsoft.com/office/drawing/2014/main" id="{E9578300-C747-C678-8610-FAD7390101D3}"/>
+            </a:ext>
+          </a:extLst>
+        </p:cNvPr>
+        <p:cNvGrpSpPr/>
+        <p:nvPr/>
+      </p:nvGrpSpPr>
+      <p:grpSpPr>
+        <a:xfrm>
+          <a:off x="0" y="0"/>
+          <a:ext cx="0" cy="0"/>
+          <a:chOff x="0" y="0"/>
+          <a:chExt cx="0" cy="0"/>
+        </a:xfrm>
+      </p:grpSpPr>
+      <mc:AlternateContent xmlns:mc="http://schemas.openxmlformats.org/markup-compatibility/2006">
+        <mc:Choice xmlns:a14="http://schemas.microsoft.com/office/drawing/2010/main" Requires="a14">
+          <p:sp>
+            <p:nvSpPr>
+              <p:cNvPr id="37" name="TextBox 36">
+                <a:extLst>
+                  <a:ext uri="{FF2B5EF4-FFF2-40B4-BE49-F238E27FC236}">
+                    <a16:creationId xmlns:a16="http://schemas.microsoft.com/office/drawing/2014/main" id="{63938DCC-1CD9-B2A3-291C-DFA95F6E0547}"/>
+                  </a:ext>
+                </a:extLst>
+              </p:cNvPr>
+              <p:cNvSpPr txBox="1"/>
+              <p:nvPr/>
+            </p:nvSpPr>
+            <p:spPr>
+              <a:xfrm>
+                <a:off x="13004710" y="1871576"/>
+                <a:ext cx="304800" cy="307777"/>
+              </a:xfrm>
+              <a:prstGeom prst="rect">
+                <a:avLst/>
+              </a:prstGeom>
+              <a:noFill/>
+            </p:spPr>
+            <p:txBody>
+              <a:bodyPr wrap="square" rtlCol="0">
+                <a:spAutoFit/>
+              </a:bodyPr>
+              <a:lstStyle/>
+              <a:p>
+                <a:pPr/>
+                <a14:m>
+                  <m:oMathPara xmlns:m="http://schemas.openxmlformats.org/officeDocument/2006/math">
+                    <m:oMath>
+                      <m:sSubSup>
+                        <m:sSubSupPr>
+                          <m:ctrlPr>
+                            <a:rPr lang="en-US" sz="1400" i="1">
+                              <a:latin typeface="Cambria Math" panose="02040503050406030204" pitchFamily="18" charset="0"/>
+                            </a:rPr>
+                          </m:ctrlPr>
+                        </m:sSubSupPr>
+                        <m:e>
+                          <m:r>
+                            <a:rPr lang="en-US" sz="1400" i="1">
+                              <a:latin typeface="Cambria Math" panose="02040503050406030204" pitchFamily="18" charset="0"/>
+                            </a:rPr>
+                            <m:t>𝑣</m:t>
+                          </m:r>
+                        </m:e>
+                        <m:sub>
+                          <m:r>
+                            <m:rPr>
+                              <m:sty m:val="p"/>
+                            </m:rPr>
+                            <a:rPr lang="en-CA" sz="1400" i="1">
+                              <a:latin typeface="Cambria Math" panose="02040503050406030204" pitchFamily="18" charset="0"/>
+                            </a:rPr>
+                            <m:t>c</m:t>
+                          </m:r>
+                        </m:sub>
+                        <m:sup>
+                          <m:r>
+                            <a:rPr lang="en-US" sz="1400" i="1">
+                              <a:latin typeface="Cambria Math" panose="02040503050406030204" pitchFamily="18" charset="0"/>
+                            </a:rPr>
+                            <m:t>∗</m:t>
+                          </m:r>
+                        </m:sup>
+                      </m:sSubSup>
+                    </m:oMath>
+                  </m:oMathPara>
+                </a14:m>
+                <a:endParaRPr lang="en-US" sz="1400" dirty="0">
+                  <a:latin typeface="Times New Roman" panose="02020603050405020304" pitchFamily="18" charset="0"/>
+                  <a:cs typeface="Times New Roman" panose="02020603050405020304" pitchFamily="18" charset="0"/>
+                </a:endParaRPr>
+              </a:p>
+            </p:txBody>
+          </p:sp>
+        </mc:Choice>
+        <mc:Fallback>
+          <p:sp>
+            <p:nvSpPr>
+              <p:cNvPr id="37" name="TextBox 36">
+                <a:extLst>
+                  <a:ext uri="{FF2B5EF4-FFF2-40B4-BE49-F238E27FC236}">
+                    <a16:creationId xmlns:a16="http://schemas.microsoft.com/office/drawing/2014/main" id="{63938DCC-1CD9-B2A3-291C-DFA95F6E0547}"/>
+                  </a:ext>
+                </a:extLst>
+              </p:cNvPr>
+              <p:cNvSpPr txBox="1">
+                <a:spLocks noRot="1" noChangeAspect="1" noMove="1" noResize="1" noEditPoints="1" noAdjustHandles="1" noChangeArrowheads="1" noChangeShapeType="1" noTextEdit="1"/>
+              </p:cNvSpPr>
+              <p:nvPr/>
+            </p:nvSpPr>
+            <p:spPr>
+              <a:xfrm>
+                <a:off x="13004710" y="1871576"/>
+                <a:ext cx="304800" cy="307777"/>
+              </a:xfrm>
+              <a:prstGeom prst="rect">
+                <a:avLst/>
+              </a:prstGeom>
+              <a:blipFill>
+                <a:blip r:embed="rId2"/>
+                <a:stretch>
+                  <a:fillRect/>
+                </a:stretch>
+              </a:blipFill>
+            </p:spPr>
+            <p:txBody>
+              <a:bodyPr/>
+              <a:lstStyle/>
+              <a:p>
+                <a:r>
+                  <a:rPr lang="en-CA">
+                    <a:noFill/>
+                  </a:rPr>
+                  <a:t> </a:t>
+                </a:r>
+              </a:p>
+            </p:txBody>
+          </p:sp>
+        </mc:Fallback>
+      </mc:AlternateContent>
+      <mc:AlternateContent xmlns:mc="http://schemas.openxmlformats.org/markup-compatibility/2006">
+        <mc:Choice xmlns:a14="http://schemas.microsoft.com/office/drawing/2010/main" Requires="a14">
+          <p:sp>
+            <p:nvSpPr>
+              <p:cNvPr id="38" name="TextBox 37">
+                <a:extLst>
+                  <a:ext uri="{FF2B5EF4-FFF2-40B4-BE49-F238E27FC236}">
+                    <a16:creationId xmlns:a16="http://schemas.microsoft.com/office/drawing/2014/main" id="{E147A842-F2EB-F73E-86B7-CA186B19F6C4}"/>
+                  </a:ext>
+                </a:extLst>
+              </p:cNvPr>
+              <p:cNvSpPr txBox="1"/>
+              <p:nvPr/>
+            </p:nvSpPr>
+            <p:spPr>
+              <a:xfrm>
+                <a:off x="13004710" y="1487495"/>
+                <a:ext cx="304800" cy="309124"/>
+              </a:xfrm>
+              <a:prstGeom prst="rect">
+                <a:avLst/>
+              </a:prstGeom>
+              <a:noFill/>
+            </p:spPr>
+            <p:txBody>
+              <a:bodyPr wrap="square" rtlCol="0">
+                <a:spAutoFit/>
+              </a:bodyPr>
+              <a:lstStyle/>
+              <a:p>
+                <a:pPr/>
+                <a14:m>
+                  <m:oMathPara xmlns:m="http://schemas.openxmlformats.org/officeDocument/2006/math">
+                    <m:oMath>
+                      <m:sSubSup>
+                        <m:sSubSupPr>
+                          <m:ctrlPr>
+                            <a:rPr lang="en-US" sz="1400" i="1">
+                              <a:latin typeface="Cambria Math" panose="02040503050406030204" pitchFamily="18" charset="0"/>
+                            </a:rPr>
+                          </m:ctrlPr>
+                        </m:sSubSupPr>
+                        <m:e>
+                          <m:r>
+                            <a:rPr lang="en-US" sz="1400" i="1">
+                              <a:latin typeface="Cambria Math" panose="02040503050406030204" pitchFamily="18" charset="0"/>
+                            </a:rPr>
+                            <m:t>𝑣</m:t>
+                          </m:r>
+                        </m:e>
+                        <m:sub>
+                          <m:r>
+                            <m:rPr>
+                              <m:sty m:val="p"/>
+                            </m:rPr>
+                            <a:rPr lang="en-CA" sz="1400" i="1">
+                              <a:latin typeface="Cambria Math" panose="02040503050406030204" pitchFamily="18" charset="0"/>
+                            </a:rPr>
+                            <m:t>b</m:t>
+                          </m:r>
+                        </m:sub>
+                        <m:sup>
+                          <m:r>
+                            <a:rPr lang="en-US" sz="1400" i="1">
+                              <a:latin typeface="Cambria Math" panose="02040503050406030204" pitchFamily="18" charset="0"/>
+                            </a:rPr>
+                            <m:t>∗</m:t>
+                          </m:r>
+                        </m:sup>
+                      </m:sSubSup>
+                    </m:oMath>
+                  </m:oMathPara>
+                </a14:m>
+                <a:endParaRPr lang="en-US" sz="1400" dirty="0">
+                  <a:latin typeface="Times New Roman" panose="02020603050405020304" pitchFamily="18" charset="0"/>
+                  <a:cs typeface="Times New Roman" panose="02020603050405020304" pitchFamily="18" charset="0"/>
+                </a:endParaRPr>
+              </a:p>
+            </p:txBody>
+          </p:sp>
+        </mc:Choice>
+        <mc:Fallback>
+          <p:sp>
+            <p:nvSpPr>
+              <p:cNvPr id="38" name="TextBox 37">
+                <a:extLst>
+                  <a:ext uri="{FF2B5EF4-FFF2-40B4-BE49-F238E27FC236}">
+                    <a16:creationId xmlns:a16="http://schemas.microsoft.com/office/drawing/2014/main" id="{E147A842-F2EB-F73E-86B7-CA186B19F6C4}"/>
+                  </a:ext>
+                </a:extLst>
+              </p:cNvPr>
+              <p:cNvSpPr txBox="1">
+                <a:spLocks noRot="1" noChangeAspect="1" noMove="1" noResize="1" noEditPoints="1" noAdjustHandles="1" noChangeArrowheads="1" noChangeShapeType="1" noTextEdit="1"/>
+              </p:cNvSpPr>
+              <p:nvPr/>
+            </p:nvSpPr>
+            <p:spPr>
+              <a:xfrm>
+                <a:off x="13004710" y="1487495"/>
+                <a:ext cx="304800" cy="309124"/>
+              </a:xfrm>
+              <a:prstGeom prst="rect">
+                <a:avLst/>
+              </a:prstGeom>
+              <a:blipFill>
+                <a:blip r:embed="rId3"/>
+                <a:stretch>
+                  <a:fillRect r="-4000" b="-1961"/>
+                </a:stretch>
+              </a:blipFill>
+            </p:spPr>
+            <p:txBody>
+              <a:bodyPr/>
+              <a:lstStyle/>
+              <a:p>
+                <a:r>
+                  <a:rPr lang="en-CA">
+                    <a:noFill/>
+                  </a:rPr>
+                  <a:t> </a:t>
+                </a:r>
+              </a:p>
+            </p:txBody>
+          </p:sp>
+        </mc:Fallback>
+      </mc:AlternateContent>
+      <p:cxnSp>
+        <p:nvCxnSpPr>
+          <p:cNvPr id="41" name="Straight Arrow Connector 40">
+            <a:extLst>
+              <a:ext uri="{FF2B5EF4-FFF2-40B4-BE49-F238E27FC236}">
+                <a16:creationId xmlns:a16="http://schemas.microsoft.com/office/drawing/2014/main" id="{3CAFDA11-E8CA-67C5-22EC-7CD2098855D5}"/>
+              </a:ext>
+            </a:extLst>
+          </p:cNvPr>
+          <p:cNvCxnSpPr>
+            <a:cxnSpLocks/>
+          </p:cNvCxnSpPr>
+          <p:nvPr/>
+        </p:nvCxnSpPr>
+        <p:spPr>
+          <a:xfrm>
+            <a:off x="12909992" y="1413165"/>
+            <a:ext cx="648000" cy="0"/>
+          </a:xfrm>
+          <a:prstGeom prst="straightConnector1">
+            <a:avLst/>
+          </a:prstGeom>
+          <a:ln>
+            <a:solidFill>
+              <a:schemeClr val="tx1"/>
+            </a:solidFill>
+            <a:tailEnd type="triangle" w="med" len="lg"/>
+          </a:ln>
+        </p:spPr>
+        <p:style>
+          <a:lnRef idx="2">
+            <a:schemeClr val="accent1"/>
+          </a:lnRef>
+          <a:fillRef idx="0">
+            <a:schemeClr val="accent1"/>
+          </a:fillRef>
+          <a:effectRef idx="1">
+            <a:schemeClr val="accent1"/>
+          </a:effectRef>
+          <a:fontRef idx="minor">
+            <a:schemeClr val="tx1"/>
+          </a:fontRef>
+        </p:style>
+      </p:cxnSp>
+      <p:cxnSp>
+        <p:nvCxnSpPr>
+          <p:cNvPr id="42" name="Straight Arrow Connector 41">
+            <a:extLst>
+              <a:ext uri="{FF2B5EF4-FFF2-40B4-BE49-F238E27FC236}">
+                <a16:creationId xmlns:a16="http://schemas.microsoft.com/office/drawing/2014/main" id="{FEC7C2E0-A641-25E1-7ABF-9CD50B6174FC}"/>
+              </a:ext>
+            </a:extLst>
+          </p:cNvPr>
+          <p:cNvCxnSpPr>
+            <a:cxnSpLocks/>
+          </p:cNvCxnSpPr>
+          <p:nvPr/>
+        </p:nvCxnSpPr>
+        <p:spPr>
+          <a:xfrm>
+            <a:off x="12909992" y="2173862"/>
+            <a:ext cx="648000" cy="0"/>
+          </a:xfrm>
+          <a:prstGeom prst="straightConnector1">
+            <a:avLst/>
+          </a:prstGeom>
+          <a:ln>
+            <a:solidFill>
+              <a:schemeClr val="tx1"/>
+            </a:solidFill>
+            <a:tailEnd type="triangle" w="med" len="lg"/>
+          </a:ln>
+        </p:spPr>
+        <p:style>
+          <a:lnRef idx="2">
+            <a:schemeClr val="accent1"/>
+          </a:lnRef>
+          <a:fillRef idx="0">
+            <a:schemeClr val="accent1"/>
+          </a:fillRef>
+          <a:effectRef idx="1">
+            <a:schemeClr val="accent1"/>
+          </a:effectRef>
+          <a:fontRef idx="minor">
+            <a:schemeClr val="tx1"/>
+          </a:fontRef>
+        </p:style>
+      </p:cxnSp>
+      <p:cxnSp>
+        <p:nvCxnSpPr>
+          <p:cNvPr id="43" name="Straight Arrow Connector 42">
+            <a:extLst>
+              <a:ext uri="{FF2B5EF4-FFF2-40B4-BE49-F238E27FC236}">
+                <a16:creationId xmlns:a16="http://schemas.microsoft.com/office/drawing/2014/main" id="{0A69DB0F-5DDC-85AA-27BE-96495D545D69}"/>
+              </a:ext>
+            </a:extLst>
+          </p:cNvPr>
+          <p:cNvCxnSpPr>
+            <a:cxnSpLocks/>
+          </p:cNvCxnSpPr>
+          <p:nvPr/>
+        </p:nvCxnSpPr>
+        <p:spPr>
+          <a:xfrm>
+            <a:off x="12909992" y="1787163"/>
+            <a:ext cx="648000" cy="0"/>
+          </a:xfrm>
+          <a:prstGeom prst="straightConnector1">
+            <a:avLst/>
+          </a:prstGeom>
+          <a:ln>
+            <a:solidFill>
+              <a:schemeClr val="tx1"/>
+            </a:solidFill>
+            <a:tailEnd type="triangle" w="med" len="lg"/>
+          </a:ln>
+        </p:spPr>
+        <p:style>
+          <a:lnRef idx="2">
+            <a:schemeClr val="accent1"/>
+          </a:lnRef>
+          <a:fillRef idx="0">
+            <a:schemeClr val="accent1"/>
+          </a:fillRef>
+          <a:effectRef idx="1">
+            <a:schemeClr val="accent1"/>
+          </a:effectRef>
+          <a:fontRef idx="minor">
+            <a:schemeClr val="tx1"/>
+          </a:fontRef>
+        </p:style>
+      </p:cxnSp>
+      <mc:AlternateContent xmlns:mc="http://schemas.openxmlformats.org/markup-compatibility/2006">
+        <mc:Choice xmlns:a14="http://schemas.microsoft.com/office/drawing/2010/main" Requires="a14">
+          <p:sp>
+            <p:nvSpPr>
+              <p:cNvPr id="48" name="TextBox 47">
+                <a:extLst>
+                  <a:ext uri="{FF2B5EF4-FFF2-40B4-BE49-F238E27FC236}">
+                    <a16:creationId xmlns:a16="http://schemas.microsoft.com/office/drawing/2014/main" id="{0AB112CA-CC5F-51E4-DB56-4AF28A40E725}"/>
+                  </a:ext>
+                </a:extLst>
+              </p:cNvPr>
+              <p:cNvSpPr txBox="1"/>
+              <p:nvPr/>
+            </p:nvSpPr>
+            <p:spPr>
+              <a:xfrm>
+                <a:off x="13004710" y="1115277"/>
+                <a:ext cx="304800" cy="307777"/>
+              </a:xfrm>
+              <a:prstGeom prst="rect">
+                <a:avLst/>
+              </a:prstGeom>
+              <a:noFill/>
+            </p:spPr>
+            <p:txBody>
+              <a:bodyPr wrap="square" rtlCol="0">
+                <a:spAutoFit/>
+              </a:bodyPr>
+              <a:lstStyle/>
+              <a:p>
+                <a:pPr/>
+                <a14:m>
+                  <m:oMathPara xmlns:m="http://schemas.openxmlformats.org/officeDocument/2006/math">
+                    <m:oMath>
+                      <m:sSubSup>
+                        <m:sSubSupPr>
+                          <m:ctrlPr>
+                            <a:rPr lang="en-US" sz="1400" i="1">
+                              <a:latin typeface="Cambria Math" panose="02040503050406030204" pitchFamily="18" charset="0"/>
+                            </a:rPr>
+                          </m:ctrlPr>
+                        </m:sSubSupPr>
+                        <m:e>
+                          <m:r>
+                            <a:rPr lang="en-US" sz="1400" i="1">
+                              <a:latin typeface="Cambria Math" panose="02040503050406030204" pitchFamily="18" charset="0"/>
+                            </a:rPr>
+                            <m:t>𝑣</m:t>
+                          </m:r>
+                        </m:e>
+                        <m:sub>
+                          <m:r>
+                            <m:rPr>
+                              <m:sty m:val="p"/>
+                            </m:rPr>
+                            <a:rPr lang="en-US" sz="1400" i="1">
+                              <a:latin typeface="Cambria Math" panose="02040503050406030204" pitchFamily="18" charset="0"/>
+                            </a:rPr>
+                            <m:t>a</m:t>
+                          </m:r>
+                        </m:sub>
+                        <m:sup>
+                          <m:r>
+                            <a:rPr lang="en-US" sz="1400" i="1">
+                              <a:latin typeface="Cambria Math" panose="02040503050406030204" pitchFamily="18" charset="0"/>
+                            </a:rPr>
+                            <m:t>∗</m:t>
+                          </m:r>
+                        </m:sup>
+                      </m:sSubSup>
+                    </m:oMath>
+                  </m:oMathPara>
+                </a14:m>
+                <a:endParaRPr lang="en-US" sz="1400" dirty="0">
+                  <a:latin typeface="Times New Roman" panose="02020603050405020304" pitchFamily="18" charset="0"/>
+                  <a:cs typeface="Times New Roman" panose="02020603050405020304" pitchFamily="18" charset="0"/>
+                </a:endParaRPr>
+              </a:p>
+            </p:txBody>
+          </p:sp>
+        </mc:Choice>
+        <mc:Fallback>
+          <p:sp>
+            <p:nvSpPr>
+              <p:cNvPr id="48" name="TextBox 47">
+                <a:extLst>
+                  <a:ext uri="{FF2B5EF4-FFF2-40B4-BE49-F238E27FC236}">
+                    <a16:creationId xmlns:a16="http://schemas.microsoft.com/office/drawing/2014/main" id="{0AB112CA-CC5F-51E4-DB56-4AF28A40E725}"/>
+                  </a:ext>
+                </a:extLst>
+              </p:cNvPr>
+              <p:cNvSpPr txBox="1">
+                <a:spLocks noRot="1" noChangeAspect="1" noMove="1" noResize="1" noEditPoints="1" noAdjustHandles="1" noChangeArrowheads="1" noChangeShapeType="1" noTextEdit="1"/>
+              </p:cNvSpPr>
+              <p:nvPr/>
+            </p:nvSpPr>
+            <p:spPr>
+              <a:xfrm>
+                <a:off x="13004710" y="1115277"/>
+                <a:ext cx="304800" cy="307777"/>
+              </a:xfrm>
+              <a:prstGeom prst="rect">
+                <a:avLst/>
+              </a:prstGeom>
+              <a:blipFill>
+                <a:blip r:embed="rId4"/>
+                <a:stretch>
+                  <a:fillRect/>
+                </a:stretch>
+              </a:blipFill>
+            </p:spPr>
+            <p:txBody>
+              <a:bodyPr/>
+              <a:lstStyle/>
+              <a:p>
+                <a:r>
+                  <a:rPr lang="en-CA">
+                    <a:noFill/>
+                  </a:rPr>
+                  <a:t> </a:t>
+                </a:r>
+              </a:p>
+            </p:txBody>
+          </p:sp>
+        </mc:Fallback>
+      </mc:AlternateContent>
+      <mc:AlternateContent xmlns:mc="http://schemas.openxmlformats.org/markup-compatibility/2006">
+        <mc:Choice xmlns:a14="http://schemas.microsoft.com/office/drawing/2010/main" Requires="a14">
+          <p:sp>
+            <p:nvSpPr>
+              <p:cNvPr id="49" name="TextBox 48">
+                <a:extLst>
+                  <a:ext uri="{FF2B5EF4-FFF2-40B4-BE49-F238E27FC236}">
+                    <a16:creationId xmlns:a16="http://schemas.microsoft.com/office/drawing/2014/main" id="{C9D70CB8-C2E7-388F-923E-BFCDF677172F}"/>
+                  </a:ext>
+                </a:extLst>
+              </p:cNvPr>
+              <p:cNvSpPr txBox="1"/>
+              <p:nvPr/>
+            </p:nvSpPr>
+            <p:spPr>
+              <a:xfrm>
+                <a:off x="14890631" y="1876275"/>
+                <a:ext cx="304800" cy="307777"/>
+              </a:xfrm>
+              <a:prstGeom prst="rect">
+                <a:avLst/>
+              </a:prstGeom>
+              <a:noFill/>
+            </p:spPr>
+            <p:txBody>
+              <a:bodyPr wrap="square" rtlCol="0">
+                <a:spAutoFit/>
+              </a:bodyPr>
+              <a:lstStyle/>
+              <a:p>
+                <a:pPr/>
+                <a14:m>
+                  <m:oMathPara xmlns:m="http://schemas.openxmlformats.org/officeDocument/2006/math">
+                    <m:oMath>
+                      <m:sSub>
+                        <m:sSubPr>
+                          <m:ctrlPr>
+                            <a:rPr lang="en-US" sz="1400" i="1">
+                              <a:latin typeface="Cambria Math" panose="02040503050406030204" pitchFamily="18" charset="0"/>
+                            </a:rPr>
+                          </m:ctrlPr>
+                        </m:sSubPr>
+                        <m:e>
+                          <m:r>
+                            <a:rPr lang="en-US" sz="1400" i="1">
+                              <a:latin typeface="Cambria Math" panose="02040503050406030204" pitchFamily="18" charset="0"/>
+                            </a:rPr>
+                            <m:t>𝐷</m:t>
+                          </m:r>
+                        </m:e>
+                        <m:sub>
+                          <m:r>
+                            <a:rPr lang="en-US" sz="1400" i="1">
+                              <a:latin typeface="Cambria Math" panose="02040503050406030204" pitchFamily="18" charset="0"/>
+                            </a:rPr>
+                            <m:t>𝑐</m:t>
+                          </m:r>
+                        </m:sub>
+                      </m:sSub>
+                    </m:oMath>
+                  </m:oMathPara>
+                </a14:m>
+                <a:endParaRPr lang="en-US" sz="1400" dirty="0">
+                  <a:latin typeface="Times New Roman" panose="02020603050405020304" pitchFamily="18" charset="0"/>
+                  <a:cs typeface="Times New Roman" panose="02020603050405020304" pitchFamily="18" charset="0"/>
+                </a:endParaRPr>
+              </a:p>
+            </p:txBody>
+          </p:sp>
+        </mc:Choice>
+        <mc:Fallback>
+          <p:sp>
+            <p:nvSpPr>
+              <p:cNvPr id="49" name="TextBox 48">
+                <a:extLst>
+                  <a:ext uri="{FF2B5EF4-FFF2-40B4-BE49-F238E27FC236}">
+                    <a16:creationId xmlns:a16="http://schemas.microsoft.com/office/drawing/2014/main" id="{C9D70CB8-C2E7-388F-923E-BFCDF677172F}"/>
+                  </a:ext>
+                </a:extLst>
+              </p:cNvPr>
+              <p:cNvSpPr txBox="1">
+                <a:spLocks noRot="1" noChangeAspect="1" noMove="1" noResize="1" noEditPoints="1" noAdjustHandles="1" noChangeArrowheads="1" noChangeShapeType="1" noTextEdit="1"/>
+              </p:cNvSpPr>
+              <p:nvPr/>
+            </p:nvSpPr>
+            <p:spPr>
+              <a:xfrm>
+                <a:off x="14890631" y="1876275"/>
+                <a:ext cx="304800" cy="307777"/>
+              </a:xfrm>
+              <a:prstGeom prst="rect">
+                <a:avLst/>
+              </a:prstGeom>
+              <a:blipFill>
+                <a:blip r:embed="rId5"/>
+                <a:stretch>
+                  <a:fillRect/>
+                </a:stretch>
+              </a:blipFill>
+            </p:spPr>
+            <p:txBody>
+              <a:bodyPr/>
+              <a:lstStyle/>
+              <a:p>
+                <a:r>
+                  <a:rPr lang="en-CA">
+                    <a:noFill/>
+                  </a:rPr>
+                  <a:t> </a:t>
+                </a:r>
+              </a:p>
+            </p:txBody>
+          </p:sp>
+        </mc:Fallback>
+      </mc:AlternateContent>
+      <mc:AlternateContent xmlns:mc="http://schemas.openxmlformats.org/markup-compatibility/2006">
+        <mc:Choice xmlns:a14="http://schemas.microsoft.com/office/drawing/2010/main" Requires="a14">
+          <p:sp>
+            <p:nvSpPr>
+              <p:cNvPr id="50" name="TextBox 49">
+                <a:extLst>
+                  <a:ext uri="{FF2B5EF4-FFF2-40B4-BE49-F238E27FC236}">
+                    <a16:creationId xmlns:a16="http://schemas.microsoft.com/office/drawing/2014/main" id="{5E05576F-2605-C1C6-FFB5-A1F9908987BA}"/>
+                  </a:ext>
+                </a:extLst>
+              </p:cNvPr>
+              <p:cNvSpPr txBox="1"/>
+              <p:nvPr/>
+            </p:nvSpPr>
+            <p:spPr>
+              <a:xfrm>
+                <a:off x="14890631" y="1487430"/>
+                <a:ext cx="304800" cy="307777"/>
+              </a:xfrm>
+              <a:prstGeom prst="rect">
+                <a:avLst/>
+              </a:prstGeom>
+              <a:noFill/>
+            </p:spPr>
+            <p:txBody>
+              <a:bodyPr wrap="square" rtlCol="0">
+                <a:spAutoFit/>
+              </a:bodyPr>
+              <a:lstStyle/>
+              <a:p>
+                <a:pPr/>
+                <a14:m>
+                  <m:oMathPara xmlns:m="http://schemas.openxmlformats.org/officeDocument/2006/math">
+                    <m:oMath>
+                      <m:sSub>
+                        <m:sSubPr>
+                          <m:ctrlPr>
+                            <a:rPr lang="en-US" sz="1400" i="1">
+                              <a:latin typeface="Cambria Math" panose="02040503050406030204" pitchFamily="18" charset="0"/>
+                            </a:rPr>
+                          </m:ctrlPr>
+                        </m:sSubPr>
+                        <m:e>
+                          <m:r>
+                            <a:rPr lang="en-US" sz="1400" i="1">
+                              <a:latin typeface="Cambria Math" panose="02040503050406030204" pitchFamily="18" charset="0"/>
+                            </a:rPr>
+                            <m:t>𝐷</m:t>
+                          </m:r>
+                        </m:e>
+                        <m:sub>
+                          <m:r>
+                            <a:rPr lang="en-US" sz="1400" i="1">
+                              <a:latin typeface="Cambria Math" panose="02040503050406030204" pitchFamily="18" charset="0"/>
+                            </a:rPr>
+                            <m:t>𝑏</m:t>
+                          </m:r>
+                        </m:sub>
+                      </m:sSub>
+                    </m:oMath>
+                  </m:oMathPara>
+                </a14:m>
+                <a:endParaRPr lang="en-US" sz="1400" dirty="0">
+                  <a:latin typeface="Times New Roman" panose="02020603050405020304" pitchFamily="18" charset="0"/>
+                  <a:cs typeface="Times New Roman" panose="02020603050405020304" pitchFamily="18" charset="0"/>
+                </a:endParaRPr>
+              </a:p>
+            </p:txBody>
+          </p:sp>
+        </mc:Choice>
+        <mc:Fallback>
+          <p:sp>
+            <p:nvSpPr>
+              <p:cNvPr id="50" name="TextBox 49">
+                <a:extLst>
+                  <a:ext uri="{FF2B5EF4-FFF2-40B4-BE49-F238E27FC236}">
+                    <a16:creationId xmlns:a16="http://schemas.microsoft.com/office/drawing/2014/main" id="{5E05576F-2605-C1C6-FFB5-A1F9908987BA}"/>
+                  </a:ext>
+                </a:extLst>
+              </p:cNvPr>
+              <p:cNvSpPr txBox="1">
+                <a:spLocks noRot="1" noChangeAspect="1" noMove="1" noResize="1" noEditPoints="1" noAdjustHandles="1" noChangeArrowheads="1" noChangeShapeType="1" noTextEdit="1"/>
+              </p:cNvSpPr>
+              <p:nvPr/>
+            </p:nvSpPr>
+            <p:spPr>
+              <a:xfrm>
+                <a:off x="14890631" y="1487430"/>
+                <a:ext cx="304800" cy="307777"/>
+              </a:xfrm>
+              <a:prstGeom prst="rect">
+                <a:avLst/>
+              </a:prstGeom>
+              <a:blipFill>
+                <a:blip r:embed="rId6"/>
+                <a:stretch>
+                  <a:fillRect r="-6000"/>
+                </a:stretch>
+              </a:blipFill>
+            </p:spPr>
+            <p:txBody>
+              <a:bodyPr/>
+              <a:lstStyle/>
+              <a:p>
+                <a:r>
+                  <a:rPr lang="en-CA">
+                    <a:noFill/>
+                  </a:rPr>
+                  <a:t> </a:t>
+                </a:r>
+              </a:p>
+            </p:txBody>
+          </p:sp>
+        </mc:Fallback>
+      </mc:AlternateContent>
+      <p:cxnSp>
+        <p:nvCxnSpPr>
+          <p:cNvPr id="51" name="Straight Arrow Connector 50">
+            <a:extLst>
+              <a:ext uri="{FF2B5EF4-FFF2-40B4-BE49-F238E27FC236}">
+                <a16:creationId xmlns:a16="http://schemas.microsoft.com/office/drawing/2014/main" id="{659E24BD-7846-C88A-A0E7-D5FEC8E725FF}"/>
+              </a:ext>
+            </a:extLst>
+          </p:cNvPr>
+          <p:cNvCxnSpPr>
+            <a:cxnSpLocks/>
+          </p:cNvCxnSpPr>
+          <p:nvPr/>
+        </p:nvCxnSpPr>
+        <p:spPr>
+          <a:xfrm>
+            <a:off x="14795913" y="1413102"/>
+            <a:ext cx="648000" cy="0"/>
+          </a:xfrm>
+          <a:prstGeom prst="straightConnector1">
+            <a:avLst/>
+          </a:prstGeom>
+          <a:ln>
+            <a:solidFill>
+              <a:schemeClr val="tx1"/>
+            </a:solidFill>
+            <a:tailEnd type="triangle" w="med" len="lg"/>
+          </a:ln>
+        </p:spPr>
+        <p:style>
+          <a:lnRef idx="2">
+            <a:schemeClr val="accent1"/>
+          </a:lnRef>
+          <a:fillRef idx="0">
+            <a:schemeClr val="accent1"/>
+          </a:fillRef>
+          <a:effectRef idx="1">
+            <a:schemeClr val="accent1"/>
+          </a:effectRef>
+          <a:fontRef idx="minor">
+            <a:schemeClr val="tx1"/>
+          </a:fontRef>
+        </p:style>
+      </p:cxnSp>
+      <p:cxnSp>
+        <p:nvCxnSpPr>
+          <p:cNvPr id="52" name="Straight Arrow Connector 51">
+            <a:extLst>
+              <a:ext uri="{FF2B5EF4-FFF2-40B4-BE49-F238E27FC236}">
+                <a16:creationId xmlns:a16="http://schemas.microsoft.com/office/drawing/2014/main" id="{26FCBDAF-DA45-CE42-2201-2868F75607F9}"/>
+              </a:ext>
+            </a:extLst>
+          </p:cNvPr>
+          <p:cNvCxnSpPr>
+            <a:cxnSpLocks/>
+          </p:cNvCxnSpPr>
+          <p:nvPr/>
+        </p:nvCxnSpPr>
+        <p:spPr>
+          <a:xfrm>
+            <a:off x="14795913" y="2173799"/>
+            <a:ext cx="648000" cy="0"/>
+          </a:xfrm>
+          <a:prstGeom prst="straightConnector1">
+            <a:avLst/>
+          </a:prstGeom>
+          <a:ln>
+            <a:solidFill>
+              <a:schemeClr val="tx1"/>
+            </a:solidFill>
+            <a:tailEnd type="triangle" w="med" len="lg"/>
+          </a:ln>
+        </p:spPr>
+        <p:style>
+          <a:lnRef idx="2">
+            <a:schemeClr val="accent1"/>
+          </a:lnRef>
+          <a:fillRef idx="0">
+            <a:schemeClr val="accent1"/>
+          </a:fillRef>
+          <a:effectRef idx="1">
+            <a:schemeClr val="accent1"/>
+          </a:effectRef>
+          <a:fontRef idx="minor">
+            <a:schemeClr val="tx1"/>
+          </a:fontRef>
+        </p:style>
+      </p:cxnSp>
+      <p:cxnSp>
+        <p:nvCxnSpPr>
+          <p:cNvPr id="53" name="Straight Arrow Connector 52">
+            <a:extLst>
+              <a:ext uri="{FF2B5EF4-FFF2-40B4-BE49-F238E27FC236}">
+                <a16:creationId xmlns:a16="http://schemas.microsoft.com/office/drawing/2014/main" id="{CB873600-8071-2873-285C-25A0F53F1BB2}"/>
+              </a:ext>
+            </a:extLst>
+          </p:cNvPr>
+          <p:cNvCxnSpPr>
+            <a:cxnSpLocks/>
+          </p:cNvCxnSpPr>
+          <p:nvPr/>
+        </p:nvCxnSpPr>
+        <p:spPr>
+          <a:xfrm>
+            <a:off x="14795913" y="1787100"/>
+            <a:ext cx="648000" cy="0"/>
+          </a:xfrm>
+          <a:prstGeom prst="straightConnector1">
+            <a:avLst/>
+          </a:prstGeom>
+          <a:ln>
+            <a:solidFill>
+              <a:schemeClr val="tx1"/>
+            </a:solidFill>
+            <a:tailEnd type="triangle" w="med" len="lg"/>
+          </a:ln>
+        </p:spPr>
+        <p:style>
+          <a:lnRef idx="2">
+            <a:schemeClr val="accent1"/>
+          </a:lnRef>
+          <a:fillRef idx="0">
+            <a:schemeClr val="accent1"/>
+          </a:fillRef>
+          <a:effectRef idx="1">
+            <a:schemeClr val="accent1"/>
+          </a:effectRef>
+          <a:fontRef idx="minor">
+            <a:schemeClr val="tx1"/>
+          </a:fontRef>
+        </p:style>
+      </p:cxnSp>
+      <mc:AlternateContent xmlns:mc="http://schemas.openxmlformats.org/markup-compatibility/2006">
+        <mc:Choice xmlns:a14="http://schemas.microsoft.com/office/drawing/2010/main" Requires="a14">
+          <p:sp>
+            <p:nvSpPr>
+              <p:cNvPr id="54" name="TextBox 53">
+                <a:extLst>
+                  <a:ext uri="{FF2B5EF4-FFF2-40B4-BE49-F238E27FC236}">
+                    <a16:creationId xmlns:a16="http://schemas.microsoft.com/office/drawing/2014/main" id="{AFAB7468-1A60-8EC1-4D8D-1CB4D6B38E35}"/>
+                  </a:ext>
+                </a:extLst>
+              </p:cNvPr>
+              <p:cNvSpPr txBox="1"/>
+              <p:nvPr/>
+            </p:nvSpPr>
+            <p:spPr>
+              <a:xfrm>
+                <a:off x="14890631" y="1115213"/>
+                <a:ext cx="304800" cy="307777"/>
+              </a:xfrm>
+              <a:prstGeom prst="rect">
+                <a:avLst/>
+              </a:prstGeom>
+              <a:noFill/>
+            </p:spPr>
+            <p:txBody>
+              <a:bodyPr wrap="square" rtlCol="0">
+                <a:spAutoFit/>
+              </a:bodyPr>
+              <a:lstStyle/>
+              <a:p>
+                <a:pPr/>
+                <a14:m>
+                  <m:oMathPara xmlns:m="http://schemas.openxmlformats.org/officeDocument/2006/math">
+                    <m:oMath>
+                      <m:sSub>
+                        <m:sSubPr>
+                          <m:ctrlPr>
+                            <a:rPr lang="en-US" sz="1400" i="1">
+                              <a:latin typeface="Cambria Math" panose="02040503050406030204" pitchFamily="18" charset="0"/>
+                            </a:rPr>
+                          </m:ctrlPr>
+                        </m:sSubPr>
+                        <m:e>
+                          <m:r>
+                            <a:rPr lang="en-US" sz="1400" i="1">
+                              <a:latin typeface="Cambria Math" panose="02040503050406030204" pitchFamily="18" charset="0"/>
+                            </a:rPr>
+                            <m:t>𝐷</m:t>
+                          </m:r>
+                        </m:e>
+                        <m:sub>
+                          <m:r>
+                            <a:rPr lang="en-US" sz="1400" i="1">
+                              <a:latin typeface="Cambria Math" panose="02040503050406030204" pitchFamily="18" charset="0"/>
+                            </a:rPr>
+                            <m:t>𝑎</m:t>
+                          </m:r>
+                        </m:sub>
+                      </m:sSub>
+                    </m:oMath>
+                  </m:oMathPara>
+                </a14:m>
+                <a:endParaRPr lang="en-US" sz="1400" dirty="0">
+                  <a:latin typeface="Times New Roman" panose="02020603050405020304" pitchFamily="18" charset="0"/>
+                  <a:cs typeface="Times New Roman" panose="02020603050405020304" pitchFamily="18" charset="0"/>
+                </a:endParaRPr>
+              </a:p>
+            </p:txBody>
+          </p:sp>
+        </mc:Choice>
+        <mc:Fallback>
+          <p:sp>
+            <p:nvSpPr>
+              <p:cNvPr id="54" name="TextBox 53">
+                <a:extLst>
+                  <a:ext uri="{FF2B5EF4-FFF2-40B4-BE49-F238E27FC236}">
+                    <a16:creationId xmlns:a16="http://schemas.microsoft.com/office/drawing/2014/main" id="{AFAB7468-1A60-8EC1-4D8D-1CB4D6B38E35}"/>
+                  </a:ext>
+                </a:extLst>
+              </p:cNvPr>
+              <p:cNvSpPr txBox="1">
+                <a:spLocks noRot="1" noChangeAspect="1" noMove="1" noResize="1" noEditPoints="1" noAdjustHandles="1" noChangeArrowheads="1" noChangeShapeType="1" noTextEdit="1"/>
+              </p:cNvSpPr>
+              <p:nvPr/>
+            </p:nvSpPr>
+            <p:spPr>
+              <a:xfrm>
+                <a:off x="14890631" y="1115213"/>
+                <a:ext cx="304800" cy="307777"/>
+              </a:xfrm>
+              <a:prstGeom prst="rect">
+                <a:avLst/>
+              </a:prstGeom>
+              <a:blipFill>
+                <a:blip r:embed="rId7"/>
+                <a:stretch>
+                  <a:fillRect r="-2000"/>
+                </a:stretch>
+              </a:blipFill>
+            </p:spPr>
+            <p:txBody>
+              <a:bodyPr/>
+              <a:lstStyle/>
+              <a:p>
+                <a:r>
+                  <a:rPr lang="en-CA">
+                    <a:noFill/>
+                  </a:rPr>
+                  <a:t> </a:t>
+                </a:r>
+              </a:p>
+            </p:txBody>
+          </p:sp>
+        </mc:Fallback>
+      </mc:AlternateContent>
+      <p:sp>
+        <p:nvSpPr>
+          <p:cNvPr id="58" name="Oval 57">
+            <a:extLst>
+              <a:ext uri="{FF2B5EF4-FFF2-40B4-BE49-F238E27FC236}">
+                <a16:creationId xmlns:a16="http://schemas.microsoft.com/office/drawing/2014/main" id="{219819B4-7C24-6EE8-2D7A-BC1A29551138}"/>
+              </a:ext>
+            </a:extLst>
+          </p:cNvPr>
+          <p:cNvSpPr>
+            <a:spLocks noChangeAspect="1"/>
+          </p:cNvSpPr>
+          <p:nvPr/>
+        </p:nvSpPr>
+        <p:spPr>
+          <a:xfrm>
+            <a:off x="18201484" y="1221583"/>
+            <a:ext cx="1134000" cy="1134000"/>
+          </a:xfrm>
+          <a:prstGeom prst="ellipse">
+            <a:avLst/>
+          </a:prstGeom>
+          <a:solidFill>
+            <a:schemeClr val="accent2">
+              <a:lumMod val="20000"/>
+              <a:lumOff val="80000"/>
+            </a:schemeClr>
+          </a:solidFill>
+          <a:ln>
+            <a:solidFill>
+              <a:schemeClr val="accent2">
+                <a:lumMod val="75000"/>
+              </a:schemeClr>
+            </a:solidFill>
+          </a:ln>
+        </p:spPr>
+        <p:style>
+          <a:lnRef idx="2">
+            <a:schemeClr val="accent1">
+              <a:shade val="15000"/>
+            </a:schemeClr>
+          </a:lnRef>
+          <a:fillRef idx="1">
+            <a:schemeClr val="accent1"/>
+          </a:fillRef>
+          <a:effectRef idx="0">
+            <a:schemeClr val="accent1"/>
+          </a:effectRef>
+          <a:fontRef idx="minor">
+            <a:schemeClr val="lt1"/>
+          </a:fontRef>
+        </p:style>
+        <p:txBody>
+          <a:bodyPr rtlCol="0" anchor="ctr"/>
+          <a:lstStyle/>
+          <a:p>
+            <a:pPr algn="ctr"/>
+            <a:r>
+              <a:rPr lang="en-CA" sz="1400" b="1" dirty="0">
+                <a:solidFill>
+                  <a:schemeClr val="tx1"/>
+                </a:solidFill>
+                <a:latin typeface="Times New Roman" panose="02020603050405020304" pitchFamily="18" charset="0"/>
+                <a:cs typeface="Times New Roman" panose="02020603050405020304" pitchFamily="18" charset="0"/>
+              </a:rPr>
+              <a:t>PMSM</a:t>
+            </a:r>
+            <a:endParaRPr lang="en-CA" sz="300" b="1" dirty="0">
+              <a:solidFill>
+                <a:schemeClr val="tx1"/>
+              </a:solidFill>
+              <a:latin typeface="Times New Roman" panose="02020603050405020304" pitchFamily="18" charset="0"/>
+              <a:cs typeface="Times New Roman" panose="02020603050405020304" pitchFamily="18" charset="0"/>
+            </a:endParaRPr>
+          </a:p>
+        </p:txBody>
+      </p:sp>
+      <p:cxnSp>
+        <p:nvCxnSpPr>
+          <p:cNvPr id="59" name="Straight Arrow Connector 58">
+            <a:extLst>
+              <a:ext uri="{FF2B5EF4-FFF2-40B4-BE49-F238E27FC236}">
+                <a16:creationId xmlns:a16="http://schemas.microsoft.com/office/drawing/2014/main" id="{BFAB7EC0-3B61-32A9-65CE-298BCC54B730}"/>
+              </a:ext>
+            </a:extLst>
+          </p:cNvPr>
+          <p:cNvCxnSpPr>
+            <a:cxnSpLocks/>
+            <a:endCxn id="58" idx="2"/>
+          </p:cNvCxnSpPr>
+          <p:nvPr/>
+        </p:nvCxnSpPr>
+        <p:spPr>
+          <a:xfrm>
+            <a:off x="16674939" y="1787102"/>
+            <a:ext cx="1526545" cy="1481"/>
+          </a:xfrm>
+          <a:prstGeom prst="straightConnector1">
+            <a:avLst/>
+          </a:prstGeom>
+          <a:ln>
+            <a:solidFill>
+              <a:schemeClr val="tx1"/>
+            </a:solidFill>
+            <a:headEnd w="lg" len="lg"/>
+            <a:tailEnd type="triangle" w="med" len="lg"/>
+          </a:ln>
+        </p:spPr>
+        <p:style>
+          <a:lnRef idx="2">
+            <a:schemeClr val="accent1"/>
+          </a:lnRef>
+          <a:fillRef idx="0">
+            <a:schemeClr val="accent1"/>
+          </a:fillRef>
+          <a:effectRef idx="1">
+            <a:schemeClr val="accent1"/>
+          </a:effectRef>
+          <a:fontRef idx="minor">
+            <a:schemeClr val="tx1"/>
+          </a:fontRef>
+        </p:style>
+      </p:cxnSp>
+      <p:cxnSp>
+        <p:nvCxnSpPr>
+          <p:cNvPr id="60" name="Straight Arrow Connector 59">
+            <a:extLst>
+              <a:ext uri="{FF2B5EF4-FFF2-40B4-BE49-F238E27FC236}">
+                <a16:creationId xmlns:a16="http://schemas.microsoft.com/office/drawing/2014/main" id="{241D1784-EA73-F980-7B40-B1FFA8A1552E}"/>
+              </a:ext>
+            </a:extLst>
+          </p:cNvPr>
+          <p:cNvCxnSpPr>
+            <a:cxnSpLocks/>
+          </p:cNvCxnSpPr>
+          <p:nvPr/>
+        </p:nvCxnSpPr>
+        <p:spPr>
+          <a:xfrm>
+            <a:off x="16679889" y="1409603"/>
+            <a:ext cx="1654517" cy="5434"/>
+          </a:xfrm>
+          <a:prstGeom prst="straightConnector1">
+            <a:avLst/>
+          </a:prstGeom>
+          <a:ln>
+            <a:solidFill>
+              <a:schemeClr val="tx1"/>
+            </a:solidFill>
+            <a:tailEnd type="triangle" w="med" len="lg"/>
+          </a:ln>
+        </p:spPr>
+        <p:style>
+          <a:lnRef idx="2">
+            <a:schemeClr val="accent1"/>
+          </a:lnRef>
+          <a:fillRef idx="0">
+            <a:schemeClr val="accent1"/>
+          </a:fillRef>
+          <a:effectRef idx="1">
+            <a:schemeClr val="accent1"/>
+          </a:effectRef>
+          <a:fontRef idx="minor">
+            <a:schemeClr val="tx1"/>
+          </a:fontRef>
+        </p:style>
+      </p:cxnSp>
+      <p:cxnSp>
+        <p:nvCxnSpPr>
+          <p:cNvPr id="61" name="Straight Arrow Connector 60">
+            <a:extLst>
+              <a:ext uri="{FF2B5EF4-FFF2-40B4-BE49-F238E27FC236}">
+                <a16:creationId xmlns:a16="http://schemas.microsoft.com/office/drawing/2014/main" id="{9A8F2C20-A184-FAB2-5968-9B2DF9A35F34}"/>
+              </a:ext>
+            </a:extLst>
+          </p:cNvPr>
+          <p:cNvCxnSpPr>
+            <a:cxnSpLocks/>
+          </p:cNvCxnSpPr>
+          <p:nvPr/>
+        </p:nvCxnSpPr>
+        <p:spPr>
+          <a:xfrm>
+            <a:off x="16679879" y="2157315"/>
+            <a:ext cx="1660877" cy="7022"/>
+          </a:xfrm>
+          <a:prstGeom prst="straightConnector1">
+            <a:avLst/>
+          </a:prstGeom>
+          <a:ln>
+            <a:solidFill>
+              <a:schemeClr val="tx1"/>
+            </a:solidFill>
+            <a:tailEnd type="triangle" w="med" len="lg"/>
+          </a:ln>
+        </p:spPr>
+        <p:style>
+          <a:lnRef idx="2">
+            <a:schemeClr val="accent1"/>
+          </a:lnRef>
+          <a:fillRef idx="0">
+            <a:schemeClr val="accent1"/>
+          </a:fillRef>
+          <a:effectRef idx="1">
+            <a:schemeClr val="accent1"/>
+          </a:effectRef>
+          <a:fontRef idx="minor">
+            <a:schemeClr val="tx1"/>
+          </a:fontRef>
+        </p:style>
+      </p:cxnSp>
+      <p:sp>
+        <p:nvSpPr>
+          <p:cNvPr id="62" name="Rectangle: Rounded Corners 61">
+            <a:extLst>
+              <a:ext uri="{FF2B5EF4-FFF2-40B4-BE49-F238E27FC236}">
+                <a16:creationId xmlns:a16="http://schemas.microsoft.com/office/drawing/2014/main" id="{BFA05500-5050-DD31-6978-AA9E24C65A3D}"/>
+              </a:ext>
+            </a:extLst>
+          </p:cNvPr>
+          <p:cNvSpPr/>
+          <p:nvPr/>
+        </p:nvSpPr>
+        <p:spPr>
+          <a:xfrm>
+            <a:off x="17904579" y="2375045"/>
+            <a:ext cx="1720161" cy="548617"/>
+          </a:xfrm>
+          <a:prstGeom prst="roundRect">
+            <a:avLst/>
+          </a:prstGeom>
+          <a:solidFill>
+            <a:schemeClr val="accent2">
+              <a:lumMod val="20000"/>
+              <a:lumOff val="80000"/>
+            </a:schemeClr>
+          </a:solidFill>
+          <a:ln w="19050">
+            <a:solidFill>
+              <a:schemeClr val="accent2">
+                <a:lumMod val="75000"/>
+              </a:schemeClr>
+            </a:solidFill>
+          </a:ln>
+        </p:spPr>
+        <p:style>
+          <a:lnRef idx="2">
+            <a:schemeClr val="accent1">
+              <a:shade val="15000"/>
+            </a:schemeClr>
+          </a:lnRef>
+          <a:fillRef idx="1">
+            <a:schemeClr val="accent1"/>
+          </a:fillRef>
+          <a:effectRef idx="0">
+            <a:schemeClr val="accent1"/>
+          </a:effectRef>
+          <a:fontRef idx="minor">
+            <a:schemeClr val="lt1"/>
+          </a:fontRef>
+        </p:style>
+        <p:txBody>
+          <a:bodyPr rtlCol="0" anchor="ctr" anchorCtr="1"/>
+          <a:lstStyle/>
+          <a:p>
+            <a:pPr algn="ctr"/>
+            <a:r>
+              <a:rPr lang="en-CA" sz="1400" b="1" dirty="0">
+                <a:solidFill>
+                  <a:schemeClr val="tx1"/>
+                </a:solidFill>
+                <a:latin typeface="Times New Roman" panose="02020603050405020304" pitchFamily="18" charset="0"/>
+                <a:ea typeface="Cambria Math" panose="02040503050406030204" pitchFamily="18" charset="0"/>
+              </a:rPr>
+              <a:t>Position Sensor</a:t>
+            </a:r>
+          </a:p>
+          <a:p>
+            <a:pPr algn="ctr"/>
+            <a:r>
+              <a:rPr lang="en-CA" sz="1400" dirty="0">
+                <a:solidFill>
+                  <a:schemeClr val="tx1"/>
+                </a:solidFill>
+                <a:latin typeface="Times New Roman" panose="02020603050405020304" pitchFamily="18" charset="0"/>
+                <a:ea typeface="Cambria Math" panose="02040503050406030204" pitchFamily="18" charset="0"/>
+              </a:rPr>
+              <a:t>(Encoder/Resolver)</a:t>
+            </a:r>
+          </a:p>
+          <a:p>
+            <a:pPr algn="ctr"/>
+            <a:endParaRPr lang="en-US" sz="400" dirty="0">
+              <a:solidFill>
+                <a:schemeClr val="tx1"/>
+              </a:solidFill>
+              <a:latin typeface="Times New Roman" panose="02020603050405020304" pitchFamily="18" charset="0"/>
+              <a:ea typeface="Cambria Math" panose="02040503050406030204" pitchFamily="18" charset="0"/>
+              <a:cs typeface="Times New Roman" panose="02020603050405020304" pitchFamily="18" charset="0"/>
+            </a:endParaRPr>
+          </a:p>
+        </p:txBody>
+      </p:sp>
+      <mc:AlternateContent xmlns:mc="http://schemas.openxmlformats.org/markup-compatibility/2006">
+        <mc:Choice xmlns:a14="http://schemas.microsoft.com/office/drawing/2010/main" Requires="a14">
+          <p:sp>
+            <p:nvSpPr>
+              <p:cNvPr id="63" name="Rectangle: Rounded Corners 62">
+                <a:extLst>
+                  <a:ext uri="{FF2B5EF4-FFF2-40B4-BE49-F238E27FC236}">
+                    <a16:creationId xmlns:a16="http://schemas.microsoft.com/office/drawing/2014/main" id="{DB3C77E3-5077-991D-8104-3475D2169461}"/>
+                  </a:ext>
+                </a:extLst>
+              </p:cNvPr>
+              <p:cNvSpPr/>
+              <p:nvPr/>
+            </p:nvSpPr>
+            <p:spPr>
+              <a:xfrm>
+                <a:off x="17904577" y="3342372"/>
+                <a:ext cx="1720161" cy="548618"/>
+              </a:xfrm>
+              <a:prstGeom prst="roundRect">
+                <a:avLst/>
+              </a:prstGeom>
+              <a:solidFill>
+                <a:schemeClr val="accent2">
+                  <a:lumMod val="20000"/>
+                  <a:lumOff val="80000"/>
+                </a:schemeClr>
+              </a:solidFill>
+              <a:ln w="19050">
+                <a:solidFill>
+                  <a:schemeClr val="accent2">
+                    <a:lumMod val="75000"/>
+                  </a:schemeClr>
+                </a:solidFill>
+              </a:ln>
+            </p:spPr>
+            <p:style>
+              <a:lnRef idx="2">
+                <a:schemeClr val="accent1">
+                  <a:shade val="15000"/>
+                </a:schemeClr>
+              </a:lnRef>
+              <a:fillRef idx="1">
+                <a:schemeClr val="accent1"/>
+              </a:fillRef>
+              <a:effectRef idx="0">
+                <a:schemeClr val="accent1"/>
+              </a:effectRef>
+              <a:fontRef idx="minor">
+                <a:schemeClr val="lt1"/>
+              </a:fontRef>
+            </p:style>
+            <p:txBody>
+              <a:bodyPr rtlCol="0" anchor="ctr"/>
+              <a:lstStyle/>
+              <a:p>
+                <a:pPr algn="ctr"/>
+                <a14:m>
+                  <m:oMathPara xmlns:m="http://schemas.openxmlformats.org/officeDocument/2006/math">
+                    <m:oMath>
+                      <m:sSub>
+                        <m:sSubPr>
+                          <m:ctrlPr>
+                            <a:rPr lang="en-CA" sz="1400" b="1" i="1">
+                              <a:solidFill>
+                                <a:schemeClr val="tx1"/>
+                              </a:solidFill>
+                              <a:latin typeface="Cambria Math" panose="02040503050406030204" pitchFamily="18" charset="0"/>
+                              <a:ea typeface="Cambria Math" panose="02040503050406030204" pitchFamily="18" charset="0"/>
+                            </a:rPr>
+                          </m:ctrlPr>
+                        </m:sSubPr>
+                        <m:e>
+                          <m:r>
+                            <a:rPr lang="en-CA" sz="1400" b="1" i="1">
+                              <a:solidFill>
+                                <a:schemeClr val="tx1"/>
+                              </a:solidFill>
+                              <a:latin typeface="Cambria Math" panose="02040503050406030204" pitchFamily="18" charset="0"/>
+                              <a:ea typeface="Cambria Math" panose="02040503050406030204" pitchFamily="18" charset="0"/>
+                            </a:rPr>
+                            <m:t>𝜽</m:t>
+                          </m:r>
+                        </m:e>
+                        <m:sub>
+                          <m:r>
+                            <a:rPr lang="en-CA" sz="1400" b="1" i="1">
+                              <a:solidFill>
+                                <a:schemeClr val="tx1"/>
+                              </a:solidFill>
+                              <a:latin typeface="Cambria Math" panose="02040503050406030204" pitchFamily="18" charset="0"/>
+                              <a:ea typeface="Cambria Math" panose="02040503050406030204" pitchFamily="18" charset="0"/>
+                            </a:rPr>
+                            <m:t>𝒎</m:t>
+                          </m:r>
+                        </m:sub>
+                      </m:sSub>
+                    </m:oMath>
+                  </m:oMathPara>
+                </a14:m>
+                <a:endParaRPr lang="en-US" sz="1400" b="1" i="1" dirty="0">
+                  <a:solidFill>
+                    <a:schemeClr val="tx1"/>
+                  </a:solidFill>
+                  <a:latin typeface="Times New Roman" panose="02020603050405020304" pitchFamily="18" charset="0"/>
+                  <a:ea typeface="Cambria Math" panose="02040503050406030204" pitchFamily="18" charset="0"/>
+                  <a:cs typeface="Times New Roman" panose="02020603050405020304" pitchFamily="18" charset="0"/>
+                </a:endParaRPr>
+              </a:p>
+              <a:p>
+                <a:pPr algn="ctr"/>
+                <a:r>
+                  <a:rPr lang="en-US" sz="1400" dirty="0">
+                    <a:solidFill>
+                      <a:schemeClr val="tx1"/>
+                    </a:solidFill>
+                    <a:latin typeface="Times New Roman" panose="02020603050405020304" pitchFamily="18" charset="0"/>
+                    <a:ea typeface="Cambria Math" panose="02040503050406030204" pitchFamily="18" charset="0"/>
+                    <a:cs typeface="Times New Roman" panose="02020603050405020304" pitchFamily="18" charset="0"/>
+                  </a:rPr>
+                  <a:t>(Mechanical Angle)</a:t>
+                </a:r>
+              </a:p>
+            </p:txBody>
+          </p:sp>
+        </mc:Choice>
+        <mc:Fallback>
+          <p:sp>
+            <p:nvSpPr>
+              <p:cNvPr id="63" name="Rectangle: Rounded Corners 62">
+                <a:extLst>
+                  <a:ext uri="{FF2B5EF4-FFF2-40B4-BE49-F238E27FC236}">
+                    <a16:creationId xmlns:a16="http://schemas.microsoft.com/office/drawing/2014/main" id="{DB3C77E3-5077-991D-8104-3475D2169461}"/>
+                  </a:ext>
+                </a:extLst>
+              </p:cNvPr>
+              <p:cNvSpPr>
+                <a:spLocks noRot="1" noChangeAspect="1" noMove="1" noResize="1" noEditPoints="1" noAdjustHandles="1" noChangeArrowheads="1" noChangeShapeType="1" noTextEdit="1"/>
+              </p:cNvSpPr>
+              <p:nvPr/>
+            </p:nvSpPr>
+            <p:spPr>
+              <a:xfrm>
+                <a:off x="17904577" y="3342372"/>
+                <a:ext cx="1720161" cy="548618"/>
+              </a:xfrm>
+              <a:prstGeom prst="roundRect">
+                <a:avLst/>
+              </a:prstGeom>
+              <a:blipFill>
+                <a:blip r:embed="rId8"/>
+                <a:stretch>
+                  <a:fillRect b="-6452"/>
+                </a:stretch>
+              </a:blipFill>
+              <a:ln w="19050">
+                <a:solidFill>
+                  <a:schemeClr val="accent2">
+                    <a:lumMod val="75000"/>
+                  </a:schemeClr>
+                </a:solidFill>
+              </a:ln>
+            </p:spPr>
+            <p:txBody>
+              <a:bodyPr/>
+              <a:lstStyle/>
+              <a:p>
+                <a:r>
+                  <a:rPr lang="en-CA">
+                    <a:noFill/>
+                  </a:rPr>
+                  <a:t> </a:t>
+                </a:r>
+              </a:p>
+            </p:txBody>
+          </p:sp>
+        </mc:Fallback>
+      </mc:AlternateContent>
+      <mc:AlternateContent xmlns:mc="http://schemas.openxmlformats.org/markup-compatibility/2006">
+        <mc:Choice xmlns:a14="http://schemas.microsoft.com/office/drawing/2010/main" Requires="a14">
+          <p:sp>
+            <p:nvSpPr>
+              <p:cNvPr id="64" name="Rectangle: Rounded Corners 63">
+                <a:extLst>
+                  <a:ext uri="{FF2B5EF4-FFF2-40B4-BE49-F238E27FC236}">
+                    <a16:creationId xmlns:a16="http://schemas.microsoft.com/office/drawing/2014/main" id="{37C54D2F-EEFF-FA08-41E3-5B7FFCF29AD4}"/>
+                  </a:ext>
+                </a:extLst>
+              </p:cNvPr>
+              <p:cNvSpPr/>
+              <p:nvPr/>
+            </p:nvSpPr>
+            <p:spPr>
+              <a:xfrm>
+                <a:off x="17904578" y="4309700"/>
+                <a:ext cx="1720161" cy="548618"/>
+              </a:xfrm>
+              <a:prstGeom prst="roundRect">
+                <a:avLst/>
+              </a:prstGeom>
+              <a:solidFill>
+                <a:schemeClr val="accent6">
+                  <a:lumMod val="20000"/>
+                  <a:lumOff val="80000"/>
+                </a:schemeClr>
+              </a:solidFill>
+              <a:ln w="19050">
+                <a:solidFill>
+                  <a:schemeClr val="accent6">
+                    <a:lumMod val="75000"/>
+                  </a:schemeClr>
+                </a:solidFill>
+              </a:ln>
+            </p:spPr>
+            <p:style>
+              <a:lnRef idx="2">
+                <a:schemeClr val="accent1">
+                  <a:shade val="15000"/>
+                </a:schemeClr>
+              </a:lnRef>
+              <a:fillRef idx="1">
+                <a:schemeClr val="accent1"/>
+              </a:fillRef>
+              <a:effectRef idx="0">
+                <a:schemeClr val="accent1"/>
+              </a:effectRef>
+              <a:fontRef idx="minor">
+                <a:schemeClr val="lt1"/>
+              </a:fontRef>
+            </p:style>
+            <p:txBody>
+              <a:bodyPr rtlCol="0" anchor="ctr"/>
+              <a:lstStyle/>
+              <a:p>
+                <a:pPr algn="ctr"/>
+                <a14:m>
+                  <m:oMathPara xmlns:m="http://schemas.openxmlformats.org/officeDocument/2006/math">
+                    <m:oMath>
+                      <m:sSub>
+                        <m:sSubPr>
+                          <m:ctrlPr>
+                            <a:rPr lang="en-CA" sz="1400" b="1" i="1">
+                              <a:solidFill>
+                                <a:schemeClr val="tx1"/>
+                              </a:solidFill>
+                              <a:latin typeface="Cambria Math" panose="02040503050406030204" pitchFamily="18" charset="0"/>
+                              <a:ea typeface="Cambria Math" panose="02040503050406030204" pitchFamily="18" charset="0"/>
+                            </a:rPr>
+                          </m:ctrlPr>
+                        </m:sSubPr>
+                        <m:e>
+                          <m:r>
+                            <a:rPr lang="en-CA" sz="1400" b="1" i="1">
+                              <a:solidFill>
+                                <a:schemeClr val="tx1"/>
+                              </a:solidFill>
+                              <a:latin typeface="Cambria Math" panose="02040503050406030204" pitchFamily="18" charset="0"/>
+                              <a:ea typeface="Cambria Math" panose="02040503050406030204" pitchFamily="18" charset="0"/>
+                            </a:rPr>
+                            <m:t>𝜽</m:t>
+                          </m:r>
+                        </m:e>
+                        <m:sub>
+                          <m:r>
+                            <a:rPr lang="en-CA" sz="1400" b="1" i="1">
+                              <a:solidFill>
+                                <a:schemeClr val="tx1"/>
+                              </a:solidFill>
+                              <a:latin typeface="Cambria Math" panose="02040503050406030204" pitchFamily="18" charset="0"/>
+                              <a:ea typeface="Cambria Math" panose="02040503050406030204" pitchFamily="18" charset="0"/>
+                            </a:rPr>
+                            <m:t>𝒆</m:t>
+                          </m:r>
+                        </m:sub>
+                      </m:sSub>
+                    </m:oMath>
+                  </m:oMathPara>
+                </a14:m>
+                <a:endParaRPr lang="en-US" sz="1400" b="1" i="1" dirty="0">
+                  <a:solidFill>
+                    <a:schemeClr val="tx1"/>
+                  </a:solidFill>
+                  <a:latin typeface="Times New Roman" panose="02020603050405020304" pitchFamily="18" charset="0"/>
+                  <a:ea typeface="Cambria Math" panose="02040503050406030204" pitchFamily="18" charset="0"/>
+                  <a:cs typeface="Times New Roman" panose="02020603050405020304" pitchFamily="18" charset="0"/>
+                </a:endParaRPr>
+              </a:p>
+              <a:p>
+                <a:pPr algn="ctr"/>
+                <a:r>
+                  <a:rPr lang="en-US" sz="1400" dirty="0">
+                    <a:solidFill>
+                      <a:schemeClr val="tx1"/>
+                    </a:solidFill>
+                    <a:latin typeface="Times New Roman" panose="02020603050405020304" pitchFamily="18" charset="0"/>
+                    <a:ea typeface="Cambria Math" panose="02040503050406030204" pitchFamily="18" charset="0"/>
+                    <a:cs typeface="Times New Roman" panose="02020603050405020304" pitchFamily="18" charset="0"/>
+                  </a:rPr>
+                  <a:t>(Electrical Angle)</a:t>
+                </a:r>
+              </a:p>
+            </p:txBody>
+          </p:sp>
+        </mc:Choice>
+        <mc:Fallback>
+          <p:sp>
+            <p:nvSpPr>
+              <p:cNvPr id="64" name="Rectangle: Rounded Corners 63">
+                <a:extLst>
+                  <a:ext uri="{FF2B5EF4-FFF2-40B4-BE49-F238E27FC236}">
+                    <a16:creationId xmlns:a16="http://schemas.microsoft.com/office/drawing/2014/main" id="{37C54D2F-EEFF-FA08-41E3-5B7FFCF29AD4}"/>
+                  </a:ext>
+                </a:extLst>
+              </p:cNvPr>
+              <p:cNvSpPr>
+                <a:spLocks noRot="1" noChangeAspect="1" noMove="1" noResize="1" noEditPoints="1" noAdjustHandles="1" noChangeArrowheads="1" noChangeShapeType="1" noTextEdit="1"/>
+              </p:cNvSpPr>
+              <p:nvPr/>
+            </p:nvSpPr>
+            <p:spPr>
+              <a:xfrm>
+                <a:off x="17904578" y="4309700"/>
+                <a:ext cx="1720161" cy="548618"/>
+              </a:xfrm>
+              <a:prstGeom prst="roundRect">
+                <a:avLst/>
+              </a:prstGeom>
+              <a:blipFill>
+                <a:blip r:embed="rId9"/>
+                <a:stretch>
+                  <a:fillRect b="-6452"/>
+                </a:stretch>
+              </a:blipFill>
+              <a:ln w="19050">
+                <a:solidFill>
+                  <a:schemeClr val="accent6">
+                    <a:lumMod val="75000"/>
+                  </a:schemeClr>
+                </a:solidFill>
+              </a:ln>
+            </p:spPr>
+            <p:txBody>
+              <a:bodyPr/>
+              <a:lstStyle/>
+              <a:p>
+                <a:r>
+                  <a:rPr lang="en-CA">
+                    <a:noFill/>
+                  </a:rPr>
+                  <a:t> </a:t>
+                </a:r>
+              </a:p>
+            </p:txBody>
+          </p:sp>
+        </mc:Fallback>
+      </mc:AlternateContent>
+      <p:cxnSp>
+        <p:nvCxnSpPr>
+          <p:cNvPr id="65" name="Straight Arrow Connector 64">
+            <a:extLst>
+              <a:ext uri="{FF2B5EF4-FFF2-40B4-BE49-F238E27FC236}">
+                <a16:creationId xmlns:a16="http://schemas.microsoft.com/office/drawing/2014/main" id="{8BB0FFF7-1F9B-C284-377B-2F85BD4FD40A}"/>
+              </a:ext>
+            </a:extLst>
+          </p:cNvPr>
+          <p:cNvCxnSpPr>
+            <a:cxnSpLocks/>
+            <a:stCxn id="62" idx="2"/>
+            <a:endCxn id="63" idx="0"/>
+          </p:cNvCxnSpPr>
+          <p:nvPr/>
+        </p:nvCxnSpPr>
+        <p:spPr>
+          <a:xfrm flipH="1">
+            <a:off x="18764658" y="2923662"/>
+            <a:ext cx="2" cy="418710"/>
+          </a:xfrm>
+          <a:prstGeom prst="straightConnector1">
+            <a:avLst/>
+          </a:prstGeom>
+          <a:ln>
+            <a:solidFill>
+              <a:schemeClr val="tx1"/>
+            </a:solidFill>
+            <a:tailEnd type="triangle" w="med" len="lg"/>
+          </a:ln>
+        </p:spPr>
+        <p:style>
+          <a:lnRef idx="2">
+            <a:schemeClr val="accent1"/>
+          </a:lnRef>
+          <a:fillRef idx="0">
+            <a:schemeClr val="accent1"/>
+          </a:fillRef>
+          <a:effectRef idx="1">
+            <a:schemeClr val="accent1"/>
+          </a:effectRef>
+          <a:fontRef idx="minor">
+            <a:schemeClr val="tx1"/>
+          </a:fontRef>
+        </p:style>
+      </p:cxnSp>
+      <mc:AlternateContent xmlns:mc="http://schemas.openxmlformats.org/markup-compatibility/2006">
+        <mc:Choice xmlns:a14="http://schemas.microsoft.com/office/drawing/2010/main" Requires="a14">
+          <p:sp>
+            <p:nvSpPr>
+              <p:cNvPr id="69" name="TextBox 68">
+                <a:extLst>
+                  <a:ext uri="{FF2B5EF4-FFF2-40B4-BE49-F238E27FC236}">
+                    <a16:creationId xmlns:a16="http://schemas.microsoft.com/office/drawing/2014/main" id="{5C06AAA8-36C5-3288-C0F2-EAF048E40804}"/>
+                  </a:ext>
+                </a:extLst>
+              </p:cNvPr>
+              <p:cNvSpPr txBox="1"/>
+              <p:nvPr/>
+            </p:nvSpPr>
+            <p:spPr>
+              <a:xfrm>
+                <a:off x="17206756" y="1860075"/>
+                <a:ext cx="304800" cy="307777"/>
+              </a:xfrm>
+              <a:prstGeom prst="rect">
+                <a:avLst/>
+              </a:prstGeom>
+              <a:noFill/>
+            </p:spPr>
+            <p:txBody>
+              <a:bodyPr wrap="square" rtlCol="0">
+                <a:spAutoFit/>
+              </a:bodyPr>
+              <a:lstStyle/>
+              <a:p>
+                <a:pPr/>
+                <a14:m>
+                  <m:oMathPara xmlns:m="http://schemas.openxmlformats.org/officeDocument/2006/math">
+                    <m:oMath>
+                      <m:sSub>
+                        <m:sSubPr>
+                          <m:ctrlPr>
+                            <a:rPr lang="en-US" sz="1400" b="0" i="1" smtClean="0">
+                              <a:latin typeface="Cambria Math" panose="02040503050406030204" pitchFamily="18" charset="0"/>
+                            </a:rPr>
+                          </m:ctrlPr>
+                        </m:sSubPr>
+                        <m:e>
+                          <m:r>
+                            <a:rPr lang="en-US" sz="1400" b="0" i="1" smtClean="0">
+                              <a:latin typeface="Cambria Math" panose="02040503050406030204" pitchFamily="18" charset="0"/>
+                            </a:rPr>
+                            <m:t>𝑣</m:t>
+                          </m:r>
+                        </m:e>
+                        <m:sub>
+                          <m:r>
+                            <a:rPr lang="en-US" sz="1400" b="0" i="1" smtClean="0">
+                              <a:latin typeface="Cambria Math" panose="02040503050406030204" pitchFamily="18" charset="0"/>
+                            </a:rPr>
+                            <m:t>𝑐</m:t>
+                          </m:r>
+                        </m:sub>
+                      </m:sSub>
+                    </m:oMath>
+                  </m:oMathPara>
+                </a14:m>
+                <a:endParaRPr lang="en-US" sz="1400" dirty="0">
+                  <a:latin typeface="Times New Roman" panose="02020603050405020304" pitchFamily="18" charset="0"/>
+                  <a:cs typeface="Times New Roman" panose="02020603050405020304" pitchFamily="18" charset="0"/>
+                </a:endParaRPr>
+              </a:p>
+            </p:txBody>
+          </p:sp>
+        </mc:Choice>
+        <mc:Fallback>
+          <p:sp>
+            <p:nvSpPr>
+              <p:cNvPr id="69" name="TextBox 68">
+                <a:extLst>
+                  <a:ext uri="{FF2B5EF4-FFF2-40B4-BE49-F238E27FC236}">
+                    <a16:creationId xmlns:a16="http://schemas.microsoft.com/office/drawing/2014/main" id="{5C06AAA8-36C5-3288-C0F2-EAF048E40804}"/>
+                  </a:ext>
+                </a:extLst>
+              </p:cNvPr>
+              <p:cNvSpPr txBox="1">
+                <a:spLocks noRot="1" noChangeAspect="1" noMove="1" noResize="1" noEditPoints="1" noAdjustHandles="1" noChangeArrowheads="1" noChangeShapeType="1" noTextEdit="1"/>
+              </p:cNvSpPr>
+              <p:nvPr/>
+            </p:nvSpPr>
+            <p:spPr>
+              <a:xfrm>
+                <a:off x="17206756" y="1860075"/>
+                <a:ext cx="304800" cy="307777"/>
+              </a:xfrm>
+              <a:prstGeom prst="rect">
+                <a:avLst/>
+              </a:prstGeom>
+              <a:blipFill>
+                <a:blip r:embed="rId10"/>
+                <a:stretch>
+                  <a:fillRect/>
+                </a:stretch>
+              </a:blipFill>
+            </p:spPr>
+            <p:txBody>
+              <a:bodyPr/>
+              <a:lstStyle/>
+              <a:p>
+                <a:r>
+                  <a:rPr lang="en-CA">
+                    <a:noFill/>
+                  </a:rPr>
+                  <a:t> </a:t>
+                </a:r>
+              </a:p>
+            </p:txBody>
+          </p:sp>
+        </mc:Fallback>
+      </mc:AlternateContent>
+      <mc:AlternateContent xmlns:mc="http://schemas.openxmlformats.org/markup-compatibility/2006">
+        <mc:Choice xmlns:a14="http://schemas.microsoft.com/office/drawing/2010/main" Requires="a14">
+          <p:sp>
+            <p:nvSpPr>
+              <p:cNvPr id="70" name="TextBox 69">
+                <a:extLst>
+                  <a:ext uri="{FF2B5EF4-FFF2-40B4-BE49-F238E27FC236}">
+                    <a16:creationId xmlns:a16="http://schemas.microsoft.com/office/drawing/2014/main" id="{956BE1A3-7D00-9BEC-10E2-1830501614F1}"/>
+                  </a:ext>
+                </a:extLst>
+              </p:cNvPr>
+              <p:cNvSpPr txBox="1"/>
+              <p:nvPr/>
+            </p:nvSpPr>
+            <p:spPr>
+              <a:xfrm>
+                <a:off x="17206756" y="1488694"/>
+                <a:ext cx="304800" cy="307777"/>
+              </a:xfrm>
+              <a:prstGeom prst="rect">
+                <a:avLst/>
+              </a:prstGeom>
+              <a:noFill/>
+            </p:spPr>
+            <p:txBody>
+              <a:bodyPr wrap="square" rtlCol="0">
+                <a:spAutoFit/>
+              </a:bodyPr>
+              <a:lstStyle/>
+              <a:p>
+                <a:pPr/>
+                <a14:m>
+                  <m:oMathPara xmlns:m="http://schemas.openxmlformats.org/officeDocument/2006/math">
+                    <m:oMath>
+                      <m:sSub>
+                        <m:sSubPr>
+                          <m:ctrlPr>
+                            <a:rPr lang="en-US" sz="1400" b="0" i="1" smtClean="0">
+                              <a:latin typeface="Cambria Math" panose="02040503050406030204" pitchFamily="18" charset="0"/>
+                            </a:rPr>
+                          </m:ctrlPr>
+                        </m:sSubPr>
+                        <m:e>
+                          <m:r>
+                            <a:rPr lang="en-US" sz="1400" b="0" i="1" smtClean="0">
+                              <a:latin typeface="Cambria Math" panose="02040503050406030204" pitchFamily="18" charset="0"/>
+                            </a:rPr>
+                            <m:t>𝑣</m:t>
+                          </m:r>
+                        </m:e>
+                        <m:sub>
+                          <m:r>
+                            <a:rPr lang="en-US" sz="1400" b="0" i="1" smtClean="0">
+                              <a:latin typeface="Cambria Math" panose="02040503050406030204" pitchFamily="18" charset="0"/>
+                            </a:rPr>
+                            <m:t>𝑏</m:t>
+                          </m:r>
+                        </m:sub>
+                      </m:sSub>
+                    </m:oMath>
+                  </m:oMathPara>
+                </a14:m>
+                <a:endParaRPr lang="en-US" sz="1400" dirty="0">
+                  <a:latin typeface="Times New Roman" panose="02020603050405020304" pitchFamily="18" charset="0"/>
+                  <a:cs typeface="Times New Roman" panose="02020603050405020304" pitchFamily="18" charset="0"/>
+                </a:endParaRPr>
+              </a:p>
+            </p:txBody>
+          </p:sp>
+        </mc:Choice>
+        <mc:Fallback>
+          <p:sp>
+            <p:nvSpPr>
+              <p:cNvPr id="70" name="TextBox 69">
+                <a:extLst>
+                  <a:ext uri="{FF2B5EF4-FFF2-40B4-BE49-F238E27FC236}">
+                    <a16:creationId xmlns:a16="http://schemas.microsoft.com/office/drawing/2014/main" id="{956BE1A3-7D00-9BEC-10E2-1830501614F1}"/>
+                  </a:ext>
+                </a:extLst>
+              </p:cNvPr>
+              <p:cNvSpPr txBox="1">
+                <a:spLocks noRot="1" noChangeAspect="1" noMove="1" noResize="1" noEditPoints="1" noAdjustHandles="1" noChangeArrowheads="1" noChangeShapeType="1" noTextEdit="1"/>
+              </p:cNvSpPr>
+              <p:nvPr/>
+            </p:nvSpPr>
+            <p:spPr>
+              <a:xfrm>
+                <a:off x="17206756" y="1488694"/>
+                <a:ext cx="304800" cy="307777"/>
+              </a:xfrm>
+              <a:prstGeom prst="rect">
+                <a:avLst/>
+              </a:prstGeom>
+              <a:blipFill>
+                <a:blip r:embed="rId11"/>
+                <a:stretch>
+                  <a:fillRect r="-2000"/>
+                </a:stretch>
+              </a:blipFill>
+            </p:spPr>
+            <p:txBody>
+              <a:bodyPr/>
+              <a:lstStyle/>
+              <a:p>
+                <a:r>
+                  <a:rPr lang="en-CA">
+                    <a:noFill/>
+                  </a:rPr>
+                  <a:t> </a:t>
+                </a:r>
+              </a:p>
+            </p:txBody>
+          </p:sp>
+        </mc:Fallback>
+      </mc:AlternateContent>
+      <mc:AlternateContent xmlns:mc="http://schemas.openxmlformats.org/markup-compatibility/2006">
+        <mc:Choice xmlns:a14="http://schemas.microsoft.com/office/drawing/2010/main" Requires="a14">
+          <p:sp>
+            <p:nvSpPr>
+              <p:cNvPr id="71" name="TextBox 70">
+                <a:extLst>
+                  <a:ext uri="{FF2B5EF4-FFF2-40B4-BE49-F238E27FC236}">
+                    <a16:creationId xmlns:a16="http://schemas.microsoft.com/office/drawing/2014/main" id="{45BDD988-3BB7-615E-A009-961F1F462BE9}"/>
+                  </a:ext>
+                </a:extLst>
+              </p:cNvPr>
+              <p:cNvSpPr txBox="1"/>
+              <p:nvPr/>
+            </p:nvSpPr>
+            <p:spPr>
+              <a:xfrm>
+                <a:off x="17206756" y="1116476"/>
+                <a:ext cx="304800" cy="307777"/>
+              </a:xfrm>
+              <a:prstGeom prst="rect">
+                <a:avLst/>
+              </a:prstGeom>
+              <a:noFill/>
+            </p:spPr>
+            <p:txBody>
+              <a:bodyPr wrap="square" rtlCol="0">
+                <a:spAutoFit/>
+              </a:bodyPr>
+              <a:lstStyle/>
+              <a:p>
+                <a:pPr/>
+                <a14:m>
+                  <m:oMathPara xmlns:m="http://schemas.openxmlformats.org/officeDocument/2006/math">
+                    <m:oMath>
+                      <m:sSub>
+                        <m:sSubPr>
+                          <m:ctrlPr>
+                            <a:rPr lang="en-US" sz="1400" b="0" i="1" smtClean="0">
+                              <a:latin typeface="Cambria Math" panose="02040503050406030204" pitchFamily="18" charset="0"/>
+                            </a:rPr>
+                          </m:ctrlPr>
+                        </m:sSubPr>
+                        <m:e>
+                          <m:r>
+                            <a:rPr lang="en-US" sz="1400" b="0" i="1" smtClean="0">
+                              <a:latin typeface="Cambria Math" panose="02040503050406030204" pitchFamily="18" charset="0"/>
+                            </a:rPr>
+                            <m:t>𝑣</m:t>
+                          </m:r>
+                        </m:e>
+                        <m:sub>
+                          <m:r>
+                            <a:rPr lang="en-US" sz="1400" b="0" i="1" smtClean="0">
+                              <a:latin typeface="Cambria Math" panose="02040503050406030204" pitchFamily="18" charset="0"/>
+                            </a:rPr>
+                            <m:t>𝑎</m:t>
+                          </m:r>
+                        </m:sub>
+                      </m:sSub>
+                    </m:oMath>
+                  </m:oMathPara>
+                </a14:m>
+                <a:endParaRPr lang="en-US" sz="1400" dirty="0">
+                  <a:latin typeface="Times New Roman" panose="02020603050405020304" pitchFamily="18" charset="0"/>
+                  <a:cs typeface="Times New Roman" panose="02020603050405020304" pitchFamily="18" charset="0"/>
+                </a:endParaRPr>
+              </a:p>
+            </p:txBody>
+          </p:sp>
+        </mc:Choice>
+        <mc:Fallback>
+          <p:sp>
+            <p:nvSpPr>
+              <p:cNvPr id="71" name="TextBox 70">
+                <a:extLst>
+                  <a:ext uri="{FF2B5EF4-FFF2-40B4-BE49-F238E27FC236}">
+                    <a16:creationId xmlns:a16="http://schemas.microsoft.com/office/drawing/2014/main" id="{45BDD988-3BB7-615E-A009-961F1F462BE9}"/>
+                  </a:ext>
+                </a:extLst>
+              </p:cNvPr>
+              <p:cNvSpPr txBox="1">
+                <a:spLocks noRot="1" noChangeAspect="1" noMove="1" noResize="1" noEditPoints="1" noAdjustHandles="1" noChangeArrowheads="1" noChangeShapeType="1" noTextEdit="1"/>
+              </p:cNvSpPr>
+              <p:nvPr/>
+            </p:nvSpPr>
+            <p:spPr>
+              <a:xfrm>
+                <a:off x="17206756" y="1116476"/>
+                <a:ext cx="304800" cy="307777"/>
+              </a:xfrm>
+              <a:prstGeom prst="rect">
+                <a:avLst/>
+              </a:prstGeom>
+              <a:blipFill>
+                <a:blip r:embed="rId12"/>
+                <a:stretch>
+                  <a:fillRect/>
+                </a:stretch>
+              </a:blipFill>
+            </p:spPr>
+            <p:txBody>
+              <a:bodyPr/>
+              <a:lstStyle/>
+              <a:p>
+                <a:r>
+                  <a:rPr lang="en-CA">
+                    <a:noFill/>
+                  </a:rPr>
+                  <a:t> </a:t>
+                </a:r>
+              </a:p>
+            </p:txBody>
+          </p:sp>
+        </mc:Fallback>
+      </mc:AlternateContent>
+      <p:cxnSp>
+        <p:nvCxnSpPr>
+          <p:cNvPr id="72" name="Straight Arrow Connector 71">
+            <a:extLst>
+              <a:ext uri="{FF2B5EF4-FFF2-40B4-BE49-F238E27FC236}">
+                <a16:creationId xmlns:a16="http://schemas.microsoft.com/office/drawing/2014/main" id="{F0EAE6B2-2A37-C6F5-F581-E0DECBDB9E80}"/>
+              </a:ext>
+            </a:extLst>
+          </p:cNvPr>
+          <p:cNvCxnSpPr>
+            <a:cxnSpLocks/>
+          </p:cNvCxnSpPr>
+          <p:nvPr/>
+        </p:nvCxnSpPr>
+        <p:spPr>
+          <a:xfrm>
+            <a:off x="16059332" y="2407891"/>
+            <a:ext cx="0" cy="1169077"/>
+          </a:xfrm>
+          <a:prstGeom prst="straightConnector1">
+            <a:avLst/>
+          </a:prstGeom>
+          <a:ln>
+            <a:solidFill>
+              <a:schemeClr val="tx1"/>
+            </a:solidFill>
+            <a:tailEnd type="triangle" w="med" len="lg"/>
+          </a:ln>
+        </p:spPr>
+        <p:style>
+          <a:lnRef idx="2">
+            <a:schemeClr val="accent1"/>
+          </a:lnRef>
+          <a:fillRef idx="0">
+            <a:schemeClr val="accent1"/>
+          </a:fillRef>
+          <a:effectRef idx="1">
+            <a:schemeClr val="accent1"/>
+          </a:effectRef>
+          <a:fontRef idx="minor">
+            <a:schemeClr val="tx1"/>
+          </a:fontRef>
+        </p:style>
+      </p:cxnSp>
+      <p:cxnSp>
+        <p:nvCxnSpPr>
+          <p:cNvPr id="74" name="Straight Arrow Connector 73">
+            <a:extLst>
+              <a:ext uri="{FF2B5EF4-FFF2-40B4-BE49-F238E27FC236}">
+                <a16:creationId xmlns:a16="http://schemas.microsoft.com/office/drawing/2014/main" id="{8D1CF4A4-0DBA-F1E7-F024-D5EA8C756B85}"/>
+              </a:ext>
+            </a:extLst>
+          </p:cNvPr>
+          <p:cNvCxnSpPr>
+            <a:cxnSpLocks/>
+          </p:cNvCxnSpPr>
+          <p:nvPr/>
+        </p:nvCxnSpPr>
+        <p:spPr>
+          <a:xfrm>
+            <a:off x="15687857" y="2411066"/>
+            <a:ext cx="0" cy="1169077"/>
+          </a:xfrm>
+          <a:prstGeom prst="straightConnector1">
+            <a:avLst/>
+          </a:prstGeom>
+          <a:ln>
+            <a:solidFill>
+              <a:schemeClr val="tx1"/>
+            </a:solidFill>
+            <a:tailEnd type="triangle" w="med" len="lg"/>
+          </a:ln>
+        </p:spPr>
+        <p:style>
+          <a:lnRef idx="2">
+            <a:schemeClr val="accent1"/>
+          </a:lnRef>
+          <a:fillRef idx="0">
+            <a:schemeClr val="accent1"/>
+          </a:fillRef>
+          <a:effectRef idx="1">
+            <a:schemeClr val="accent1"/>
+          </a:effectRef>
+          <a:fontRef idx="minor">
+            <a:schemeClr val="tx1"/>
+          </a:fontRef>
+        </p:style>
+      </p:cxnSp>
+      <p:cxnSp>
+        <p:nvCxnSpPr>
+          <p:cNvPr id="75" name="Straight Arrow Connector 74">
+            <a:extLst>
+              <a:ext uri="{FF2B5EF4-FFF2-40B4-BE49-F238E27FC236}">
+                <a16:creationId xmlns:a16="http://schemas.microsoft.com/office/drawing/2014/main" id="{9DCFD8D0-1CAB-D182-3069-10B5B877345D}"/>
+              </a:ext>
+            </a:extLst>
+          </p:cNvPr>
+          <p:cNvCxnSpPr>
+            <a:cxnSpLocks/>
+          </p:cNvCxnSpPr>
+          <p:nvPr/>
+        </p:nvCxnSpPr>
+        <p:spPr>
+          <a:xfrm>
+            <a:off x="16433982" y="2406189"/>
+            <a:ext cx="0" cy="1169077"/>
+          </a:xfrm>
+          <a:prstGeom prst="straightConnector1">
+            <a:avLst/>
+          </a:prstGeom>
+          <a:ln>
+            <a:solidFill>
+              <a:schemeClr val="tx1"/>
+            </a:solidFill>
+            <a:tailEnd type="triangle" w="med" len="lg"/>
+          </a:ln>
+        </p:spPr>
+        <p:style>
+          <a:lnRef idx="2">
+            <a:schemeClr val="accent1"/>
+          </a:lnRef>
+          <a:fillRef idx="0">
+            <a:schemeClr val="accent1"/>
+          </a:fillRef>
+          <a:effectRef idx="1">
+            <a:schemeClr val="accent1"/>
+          </a:effectRef>
+          <a:fontRef idx="minor">
+            <a:schemeClr val="tx1"/>
+          </a:fontRef>
+        </p:style>
+      </p:cxnSp>
+      <mc:AlternateContent xmlns:mc="http://schemas.openxmlformats.org/markup-compatibility/2006">
+        <mc:Choice xmlns:a14="http://schemas.microsoft.com/office/drawing/2010/main" Requires="a14">
+          <p:sp>
+            <p:nvSpPr>
+              <p:cNvPr id="76" name="TextBox 75">
+                <a:extLst>
+                  <a:ext uri="{FF2B5EF4-FFF2-40B4-BE49-F238E27FC236}">
+                    <a16:creationId xmlns:a16="http://schemas.microsoft.com/office/drawing/2014/main" id="{151C5F4C-AD0E-1870-D0E6-02489A933D83}"/>
+                  </a:ext>
+                </a:extLst>
+              </p:cNvPr>
+              <p:cNvSpPr txBox="1"/>
+              <p:nvPr/>
+            </p:nvSpPr>
+            <p:spPr>
+              <a:xfrm>
+                <a:off x="15443739" y="2819959"/>
+                <a:ext cx="304800" cy="307777"/>
+              </a:xfrm>
+              <a:prstGeom prst="rect">
+                <a:avLst/>
+              </a:prstGeom>
+              <a:noFill/>
+            </p:spPr>
+            <p:txBody>
+              <a:bodyPr wrap="square" rtlCol="0">
+                <a:spAutoFit/>
+              </a:bodyPr>
+              <a:lstStyle/>
+              <a:p>
+                <a:pPr/>
+                <a14:m>
+                  <m:oMathPara xmlns:m="http://schemas.openxmlformats.org/officeDocument/2006/math">
+                    <m:oMath>
+                      <m:sSub>
+                        <m:sSubPr>
+                          <m:ctrlPr>
+                            <a:rPr lang="en-US" sz="1400" b="0" i="1" smtClean="0">
+                              <a:latin typeface="Cambria Math" panose="02040503050406030204" pitchFamily="18" charset="0"/>
+                            </a:rPr>
+                          </m:ctrlPr>
+                        </m:sSubPr>
+                        <m:e>
+                          <m:r>
+                            <a:rPr lang="en-US" sz="1400" b="0" i="1" smtClean="0">
+                              <a:latin typeface="Cambria Math" panose="02040503050406030204" pitchFamily="18" charset="0"/>
+                            </a:rPr>
+                            <m:t>𝑖</m:t>
+                          </m:r>
+                        </m:e>
+                        <m:sub>
+                          <m:r>
+                            <a:rPr lang="en-US" sz="1400" b="0" i="1" smtClean="0">
+                              <a:latin typeface="Cambria Math" panose="02040503050406030204" pitchFamily="18" charset="0"/>
+                            </a:rPr>
+                            <m:t>𝑎</m:t>
+                          </m:r>
+                        </m:sub>
+                      </m:sSub>
+                    </m:oMath>
+                  </m:oMathPara>
+                </a14:m>
+                <a:endParaRPr lang="en-US" sz="1400" dirty="0">
+                  <a:latin typeface="Times New Roman" panose="02020603050405020304" pitchFamily="18" charset="0"/>
+                  <a:cs typeface="Times New Roman" panose="02020603050405020304" pitchFamily="18" charset="0"/>
+                </a:endParaRPr>
+              </a:p>
+            </p:txBody>
+          </p:sp>
+        </mc:Choice>
+        <mc:Fallback>
+          <p:sp>
+            <p:nvSpPr>
+              <p:cNvPr id="76" name="TextBox 75">
+                <a:extLst>
+                  <a:ext uri="{FF2B5EF4-FFF2-40B4-BE49-F238E27FC236}">
+                    <a16:creationId xmlns:a16="http://schemas.microsoft.com/office/drawing/2014/main" id="{151C5F4C-AD0E-1870-D0E6-02489A933D83}"/>
+                  </a:ext>
+                </a:extLst>
+              </p:cNvPr>
+              <p:cNvSpPr txBox="1">
+                <a:spLocks noRot="1" noChangeAspect="1" noMove="1" noResize="1" noEditPoints="1" noAdjustHandles="1" noChangeArrowheads="1" noChangeShapeType="1" noTextEdit="1"/>
+              </p:cNvSpPr>
+              <p:nvPr/>
+            </p:nvSpPr>
+            <p:spPr>
+              <a:xfrm>
+                <a:off x="15443739" y="2819959"/>
+                <a:ext cx="304800" cy="307777"/>
+              </a:xfrm>
+              <a:prstGeom prst="rect">
+                <a:avLst/>
+              </a:prstGeom>
+              <a:blipFill>
+                <a:blip r:embed="rId13"/>
+                <a:stretch>
+                  <a:fillRect/>
+                </a:stretch>
+              </a:blipFill>
+            </p:spPr>
+            <p:txBody>
+              <a:bodyPr/>
+              <a:lstStyle/>
+              <a:p>
+                <a:r>
+                  <a:rPr lang="en-CA">
+                    <a:noFill/>
+                  </a:rPr>
+                  <a:t> </a:t>
+                </a:r>
+              </a:p>
+            </p:txBody>
+          </p:sp>
+        </mc:Fallback>
+      </mc:AlternateContent>
+      <mc:AlternateContent xmlns:mc="http://schemas.openxmlformats.org/markup-compatibility/2006">
+        <mc:Choice xmlns:a14="http://schemas.microsoft.com/office/drawing/2010/main" Requires="a14">
+          <p:sp>
+            <p:nvSpPr>
+              <p:cNvPr id="77" name="TextBox 76">
+                <a:extLst>
+                  <a:ext uri="{FF2B5EF4-FFF2-40B4-BE49-F238E27FC236}">
+                    <a16:creationId xmlns:a16="http://schemas.microsoft.com/office/drawing/2014/main" id="{7FAD317B-4040-8404-B401-6004A30807D4}"/>
+                  </a:ext>
+                </a:extLst>
+              </p:cNvPr>
+              <p:cNvSpPr txBox="1"/>
+              <p:nvPr/>
+            </p:nvSpPr>
+            <p:spPr>
+              <a:xfrm>
+                <a:off x="15818388" y="2822016"/>
+                <a:ext cx="304800" cy="307777"/>
+              </a:xfrm>
+              <a:prstGeom prst="rect">
+                <a:avLst/>
+              </a:prstGeom>
+              <a:noFill/>
+            </p:spPr>
+            <p:txBody>
+              <a:bodyPr wrap="square" rtlCol="0">
+                <a:spAutoFit/>
+              </a:bodyPr>
+              <a:lstStyle/>
+              <a:p>
+                <a:pPr/>
+                <a14:m>
+                  <m:oMathPara xmlns:m="http://schemas.openxmlformats.org/officeDocument/2006/math">
+                    <m:oMath>
+                      <m:sSub>
+                        <m:sSubPr>
+                          <m:ctrlPr>
+                            <a:rPr lang="en-US" sz="1400" b="0" i="1" smtClean="0">
+                              <a:latin typeface="Cambria Math" panose="02040503050406030204" pitchFamily="18" charset="0"/>
+                            </a:rPr>
+                          </m:ctrlPr>
+                        </m:sSubPr>
+                        <m:e>
+                          <m:r>
+                            <a:rPr lang="en-US" sz="1400" b="0" i="1" smtClean="0">
+                              <a:latin typeface="Cambria Math" panose="02040503050406030204" pitchFamily="18" charset="0"/>
+                            </a:rPr>
+                            <m:t>𝑖</m:t>
+                          </m:r>
+                        </m:e>
+                        <m:sub>
+                          <m:r>
+                            <a:rPr lang="en-US" sz="1400" b="0" i="1" smtClean="0">
+                              <a:latin typeface="Cambria Math" panose="02040503050406030204" pitchFamily="18" charset="0"/>
+                            </a:rPr>
+                            <m:t>𝑏</m:t>
+                          </m:r>
+                        </m:sub>
+                      </m:sSub>
+                    </m:oMath>
+                  </m:oMathPara>
+                </a14:m>
+                <a:endParaRPr lang="en-US" sz="1400" dirty="0">
+                  <a:latin typeface="Times New Roman" panose="02020603050405020304" pitchFamily="18" charset="0"/>
+                  <a:cs typeface="Times New Roman" panose="02020603050405020304" pitchFamily="18" charset="0"/>
+                </a:endParaRPr>
+              </a:p>
+            </p:txBody>
+          </p:sp>
+        </mc:Choice>
+        <mc:Fallback>
+          <p:sp>
+            <p:nvSpPr>
+              <p:cNvPr id="77" name="TextBox 76">
+                <a:extLst>
+                  <a:ext uri="{FF2B5EF4-FFF2-40B4-BE49-F238E27FC236}">
+                    <a16:creationId xmlns:a16="http://schemas.microsoft.com/office/drawing/2014/main" id="{7FAD317B-4040-8404-B401-6004A30807D4}"/>
+                  </a:ext>
+                </a:extLst>
+              </p:cNvPr>
+              <p:cNvSpPr txBox="1">
+                <a:spLocks noRot="1" noChangeAspect="1" noMove="1" noResize="1" noEditPoints="1" noAdjustHandles="1" noChangeArrowheads="1" noChangeShapeType="1" noTextEdit="1"/>
+              </p:cNvSpPr>
+              <p:nvPr/>
+            </p:nvSpPr>
+            <p:spPr>
+              <a:xfrm>
+                <a:off x="15818388" y="2822016"/>
+                <a:ext cx="304800" cy="307777"/>
+              </a:xfrm>
+              <a:prstGeom prst="rect">
+                <a:avLst/>
+              </a:prstGeom>
+              <a:blipFill>
+                <a:blip r:embed="rId14"/>
+                <a:stretch>
+                  <a:fillRect/>
+                </a:stretch>
+              </a:blipFill>
+            </p:spPr>
+            <p:txBody>
+              <a:bodyPr/>
+              <a:lstStyle/>
+              <a:p>
+                <a:r>
+                  <a:rPr lang="en-CA">
+                    <a:noFill/>
+                  </a:rPr>
+                  <a:t> </a:t>
+                </a:r>
+              </a:p>
+            </p:txBody>
+          </p:sp>
+        </mc:Fallback>
+      </mc:AlternateContent>
+      <mc:AlternateContent xmlns:mc="http://schemas.openxmlformats.org/markup-compatibility/2006">
+        <mc:Choice xmlns:a14="http://schemas.microsoft.com/office/drawing/2010/main" Requires="a14">
+          <p:sp>
+            <p:nvSpPr>
+              <p:cNvPr id="78" name="TextBox 77">
+                <a:extLst>
+                  <a:ext uri="{FF2B5EF4-FFF2-40B4-BE49-F238E27FC236}">
+                    <a16:creationId xmlns:a16="http://schemas.microsoft.com/office/drawing/2014/main" id="{9B7013C4-63BA-E6C8-20A4-8D8481FAF1DA}"/>
+                  </a:ext>
+                </a:extLst>
+              </p:cNvPr>
+              <p:cNvSpPr txBox="1"/>
+              <p:nvPr/>
+            </p:nvSpPr>
+            <p:spPr>
+              <a:xfrm>
+                <a:off x="16195857" y="2821838"/>
+                <a:ext cx="304800" cy="307777"/>
+              </a:xfrm>
+              <a:prstGeom prst="rect">
+                <a:avLst/>
+              </a:prstGeom>
+              <a:noFill/>
+            </p:spPr>
+            <p:txBody>
+              <a:bodyPr wrap="square" rtlCol="0">
+                <a:spAutoFit/>
+              </a:bodyPr>
+              <a:lstStyle/>
+              <a:p>
+                <a:pPr/>
+                <a14:m>
+                  <m:oMathPara xmlns:m="http://schemas.openxmlformats.org/officeDocument/2006/math">
+                    <m:oMath>
+                      <m:sSub>
+                        <m:sSubPr>
+                          <m:ctrlPr>
+                            <a:rPr lang="en-US" sz="1400" b="0" i="1" smtClean="0">
+                              <a:latin typeface="Cambria Math" panose="02040503050406030204" pitchFamily="18" charset="0"/>
+                            </a:rPr>
+                          </m:ctrlPr>
+                        </m:sSubPr>
+                        <m:e>
+                          <m:r>
+                            <a:rPr lang="en-US" sz="1400" b="0" i="1" smtClean="0">
+                              <a:latin typeface="Cambria Math" panose="02040503050406030204" pitchFamily="18" charset="0"/>
+                            </a:rPr>
+                            <m:t>𝑖</m:t>
+                          </m:r>
+                        </m:e>
+                        <m:sub>
+                          <m:r>
+                            <a:rPr lang="en-US" sz="1400" b="0" i="1" smtClean="0">
+                              <a:latin typeface="Cambria Math" panose="02040503050406030204" pitchFamily="18" charset="0"/>
+                            </a:rPr>
+                            <m:t>𝑐</m:t>
+                          </m:r>
+                        </m:sub>
+                      </m:sSub>
+                    </m:oMath>
+                  </m:oMathPara>
+                </a14:m>
+                <a:endParaRPr lang="en-US" sz="1400" dirty="0">
+                  <a:latin typeface="Times New Roman" panose="02020603050405020304" pitchFamily="18" charset="0"/>
+                  <a:cs typeface="Times New Roman" panose="02020603050405020304" pitchFamily="18" charset="0"/>
+                </a:endParaRPr>
+              </a:p>
+            </p:txBody>
+          </p:sp>
+        </mc:Choice>
+        <mc:Fallback>
+          <p:sp>
+            <p:nvSpPr>
+              <p:cNvPr id="78" name="TextBox 77">
+                <a:extLst>
+                  <a:ext uri="{FF2B5EF4-FFF2-40B4-BE49-F238E27FC236}">
+                    <a16:creationId xmlns:a16="http://schemas.microsoft.com/office/drawing/2014/main" id="{9B7013C4-63BA-E6C8-20A4-8D8481FAF1DA}"/>
+                  </a:ext>
+                </a:extLst>
+              </p:cNvPr>
+              <p:cNvSpPr txBox="1">
+                <a:spLocks noRot="1" noChangeAspect="1" noMove="1" noResize="1" noEditPoints="1" noAdjustHandles="1" noChangeArrowheads="1" noChangeShapeType="1" noTextEdit="1"/>
+              </p:cNvSpPr>
+              <p:nvPr/>
+            </p:nvSpPr>
+            <p:spPr>
+              <a:xfrm>
+                <a:off x="16195857" y="2821838"/>
+                <a:ext cx="304800" cy="307777"/>
+              </a:xfrm>
+              <a:prstGeom prst="rect">
+                <a:avLst/>
+              </a:prstGeom>
+              <a:blipFill>
+                <a:blip r:embed="rId15"/>
+                <a:stretch>
+                  <a:fillRect/>
+                </a:stretch>
+              </a:blipFill>
+            </p:spPr>
+            <p:txBody>
+              <a:bodyPr/>
+              <a:lstStyle/>
+              <a:p>
+                <a:r>
+                  <a:rPr lang="en-CA">
+                    <a:noFill/>
+                  </a:rPr>
+                  <a:t> </a:t>
+                </a:r>
+              </a:p>
+            </p:txBody>
+          </p:sp>
+        </mc:Fallback>
+      </mc:AlternateContent>
+      <mc:AlternateContent xmlns:mc="http://schemas.openxmlformats.org/markup-compatibility/2006">
+        <mc:Choice xmlns:a14="http://schemas.microsoft.com/office/drawing/2010/main" Requires="a14">
+          <p:sp>
+            <p:nvSpPr>
+              <p:cNvPr id="86" name="TextBox 85">
+                <a:extLst>
+                  <a:ext uri="{FF2B5EF4-FFF2-40B4-BE49-F238E27FC236}">
+                    <a16:creationId xmlns:a16="http://schemas.microsoft.com/office/drawing/2014/main" id="{9BC99C41-618F-54D7-DF4B-3C1066DB5E16}"/>
+                  </a:ext>
+                </a:extLst>
+              </p:cNvPr>
+              <p:cNvSpPr txBox="1"/>
+              <p:nvPr/>
+            </p:nvSpPr>
+            <p:spPr>
+              <a:xfrm>
+                <a:off x="9222732" y="3522583"/>
+                <a:ext cx="304800" cy="307777"/>
+              </a:xfrm>
+              <a:prstGeom prst="rect">
+                <a:avLst/>
+              </a:prstGeom>
+              <a:noFill/>
+            </p:spPr>
+            <p:txBody>
+              <a:bodyPr wrap="square" rtlCol="0">
+                <a:spAutoFit/>
+              </a:bodyPr>
+              <a:lstStyle/>
+              <a:p>
+                <a:pPr/>
+                <a14:m>
+                  <m:oMathPara xmlns:m="http://schemas.openxmlformats.org/officeDocument/2006/math">
+                    <m:oMath>
+                      <m:sSub>
+                        <m:sSubPr>
+                          <m:ctrlPr>
+                            <a:rPr lang="en-US" sz="1400" b="0" i="1" smtClean="0">
+                              <a:latin typeface="Cambria Math" panose="02040503050406030204" pitchFamily="18" charset="0"/>
+                            </a:rPr>
+                          </m:ctrlPr>
+                        </m:sSubPr>
+                        <m:e>
+                          <m:r>
+                            <a:rPr lang="en-US" sz="1400" b="0" i="1" smtClean="0">
+                              <a:latin typeface="Cambria Math" panose="02040503050406030204" pitchFamily="18" charset="0"/>
+                            </a:rPr>
+                            <m:t>𝑖</m:t>
+                          </m:r>
+                        </m:e>
+                        <m:sub>
+                          <m:r>
+                            <a:rPr lang="en-US" sz="1400" b="0" i="1" smtClean="0">
+                              <a:latin typeface="Cambria Math" panose="02040503050406030204" pitchFamily="18" charset="0"/>
+                            </a:rPr>
+                            <m:t>𝑑</m:t>
+                          </m:r>
+                        </m:sub>
+                      </m:sSub>
+                    </m:oMath>
+                  </m:oMathPara>
+                </a14:m>
+                <a:endParaRPr lang="en-US" sz="1400" dirty="0">
+                  <a:latin typeface="Times New Roman" panose="02020603050405020304" pitchFamily="18" charset="0"/>
+                  <a:cs typeface="Times New Roman" panose="02020603050405020304" pitchFamily="18" charset="0"/>
+                </a:endParaRPr>
+              </a:p>
+            </p:txBody>
+          </p:sp>
+        </mc:Choice>
+        <mc:Fallback>
+          <p:sp>
+            <p:nvSpPr>
+              <p:cNvPr id="86" name="TextBox 85">
+                <a:extLst>
+                  <a:ext uri="{FF2B5EF4-FFF2-40B4-BE49-F238E27FC236}">
+                    <a16:creationId xmlns:a16="http://schemas.microsoft.com/office/drawing/2014/main" id="{9BC99C41-618F-54D7-DF4B-3C1066DB5E16}"/>
+                  </a:ext>
+                </a:extLst>
+              </p:cNvPr>
+              <p:cNvSpPr txBox="1">
+                <a:spLocks noRot="1" noChangeAspect="1" noMove="1" noResize="1" noEditPoints="1" noAdjustHandles="1" noChangeArrowheads="1" noChangeShapeType="1" noTextEdit="1"/>
+              </p:cNvSpPr>
+              <p:nvPr/>
+            </p:nvSpPr>
+            <p:spPr>
+              <a:xfrm>
+                <a:off x="9222732" y="3522583"/>
+                <a:ext cx="304800" cy="307777"/>
+              </a:xfrm>
+              <a:prstGeom prst="rect">
+                <a:avLst/>
+              </a:prstGeom>
+              <a:blipFill>
+                <a:blip r:embed="rId16"/>
+                <a:stretch>
+                  <a:fillRect/>
+                </a:stretch>
+              </a:blipFill>
+            </p:spPr>
+            <p:txBody>
+              <a:bodyPr/>
+              <a:lstStyle/>
+              <a:p>
+                <a:r>
+                  <a:rPr lang="en-CA">
+                    <a:noFill/>
+                  </a:rPr>
+                  <a:t> </a:t>
+                </a:r>
+              </a:p>
+            </p:txBody>
+          </p:sp>
+        </mc:Fallback>
+      </mc:AlternateContent>
+      <mc:AlternateContent xmlns:mc="http://schemas.openxmlformats.org/markup-compatibility/2006">
+        <mc:Choice xmlns:a14="http://schemas.microsoft.com/office/drawing/2010/main" Requires="a14">
+          <p:sp>
+            <p:nvSpPr>
+              <p:cNvPr id="87" name="TextBox 86">
+                <a:extLst>
+                  <a:ext uri="{FF2B5EF4-FFF2-40B4-BE49-F238E27FC236}">
+                    <a16:creationId xmlns:a16="http://schemas.microsoft.com/office/drawing/2014/main" id="{AB2961FC-D3D3-131E-4713-527E871D4246}"/>
+                  </a:ext>
+                </a:extLst>
+              </p:cNvPr>
+              <p:cNvSpPr txBox="1"/>
+              <p:nvPr/>
+            </p:nvSpPr>
+            <p:spPr>
+              <a:xfrm>
+                <a:off x="9222732" y="4241350"/>
+                <a:ext cx="304800" cy="324384"/>
+              </a:xfrm>
+              <a:prstGeom prst="rect">
+                <a:avLst/>
+              </a:prstGeom>
+              <a:noFill/>
+            </p:spPr>
+            <p:txBody>
+              <a:bodyPr wrap="square" rtlCol="0">
+                <a:spAutoFit/>
+              </a:bodyPr>
+              <a:lstStyle/>
+              <a:p>
+                <a:pPr/>
+                <a14:m>
+                  <m:oMathPara xmlns:m="http://schemas.openxmlformats.org/officeDocument/2006/math">
+                    <m:oMath>
+                      <m:sSub>
+                        <m:sSubPr>
+                          <m:ctrlPr>
+                            <a:rPr lang="en-US" sz="1400" b="0" i="1" smtClean="0">
+                              <a:latin typeface="Cambria Math" panose="02040503050406030204" pitchFamily="18" charset="0"/>
+                            </a:rPr>
+                          </m:ctrlPr>
+                        </m:sSubPr>
+                        <m:e>
+                          <m:r>
+                            <a:rPr lang="en-US" sz="1400" b="0" i="1" smtClean="0">
+                              <a:latin typeface="Cambria Math" panose="02040503050406030204" pitchFamily="18" charset="0"/>
+                            </a:rPr>
+                            <m:t>𝑖</m:t>
+                          </m:r>
+                        </m:e>
+                        <m:sub>
+                          <m:r>
+                            <a:rPr lang="en-US" sz="1400" b="0" i="1" smtClean="0">
+                              <a:latin typeface="Cambria Math" panose="02040503050406030204" pitchFamily="18" charset="0"/>
+                            </a:rPr>
+                            <m:t>𝑞</m:t>
+                          </m:r>
+                        </m:sub>
+                      </m:sSub>
+                    </m:oMath>
+                  </m:oMathPara>
+                </a14:m>
+                <a:endParaRPr lang="en-US" sz="1400" dirty="0">
+                  <a:latin typeface="Times New Roman" panose="02020603050405020304" pitchFamily="18" charset="0"/>
+                  <a:cs typeface="Times New Roman" panose="02020603050405020304" pitchFamily="18" charset="0"/>
+                </a:endParaRPr>
+              </a:p>
+            </p:txBody>
+          </p:sp>
+        </mc:Choice>
+        <mc:Fallback>
+          <p:sp>
+            <p:nvSpPr>
+              <p:cNvPr id="87" name="TextBox 86">
+                <a:extLst>
+                  <a:ext uri="{FF2B5EF4-FFF2-40B4-BE49-F238E27FC236}">
+                    <a16:creationId xmlns:a16="http://schemas.microsoft.com/office/drawing/2014/main" id="{AB2961FC-D3D3-131E-4713-527E871D4246}"/>
+                  </a:ext>
+                </a:extLst>
+              </p:cNvPr>
+              <p:cNvSpPr txBox="1">
+                <a:spLocks noRot="1" noChangeAspect="1" noMove="1" noResize="1" noEditPoints="1" noAdjustHandles="1" noChangeArrowheads="1" noChangeShapeType="1" noTextEdit="1"/>
+              </p:cNvSpPr>
+              <p:nvPr/>
+            </p:nvSpPr>
+            <p:spPr>
+              <a:xfrm>
+                <a:off x="9222732" y="4241350"/>
+                <a:ext cx="304800" cy="324384"/>
+              </a:xfrm>
+              <a:prstGeom prst="rect">
+                <a:avLst/>
+              </a:prstGeom>
+              <a:blipFill>
+                <a:blip r:embed="rId17"/>
+                <a:stretch>
+                  <a:fillRect/>
+                </a:stretch>
+              </a:blipFill>
+            </p:spPr>
+            <p:txBody>
+              <a:bodyPr/>
+              <a:lstStyle/>
+              <a:p>
+                <a:r>
+                  <a:rPr lang="en-CA">
+                    <a:noFill/>
+                  </a:rPr>
+                  <a:t> </a:t>
+                </a:r>
+              </a:p>
+            </p:txBody>
+          </p:sp>
+        </mc:Fallback>
+      </mc:AlternateContent>
+      <p:sp>
+        <p:nvSpPr>
+          <p:cNvPr id="98" name="Rectangle: Rounded Corners 97">
+            <a:extLst>
+              <a:ext uri="{FF2B5EF4-FFF2-40B4-BE49-F238E27FC236}">
+                <a16:creationId xmlns:a16="http://schemas.microsoft.com/office/drawing/2014/main" id="{398AF9D9-EF46-0FF3-5ACA-BBE9B981DEA6}"/>
+              </a:ext>
+            </a:extLst>
+          </p:cNvPr>
+          <p:cNvSpPr>
+            <a:spLocks noChangeAspect="1"/>
+          </p:cNvSpPr>
+          <p:nvPr/>
+        </p:nvSpPr>
+        <p:spPr>
+          <a:xfrm>
+            <a:off x="11678949" y="1174989"/>
+            <a:ext cx="1231364" cy="1231364"/>
+          </a:xfrm>
+          <a:prstGeom prst="roundRect">
+            <a:avLst>
+              <a:gd name="adj" fmla="val 6196"/>
+            </a:avLst>
+          </a:prstGeom>
+          <a:solidFill>
+            <a:schemeClr val="accent6">
+              <a:lumMod val="20000"/>
+              <a:lumOff val="80000"/>
+            </a:schemeClr>
+          </a:solidFill>
+          <a:ln w="19050">
+            <a:solidFill>
+              <a:schemeClr val="accent6">
+                <a:lumMod val="75000"/>
+              </a:schemeClr>
+            </a:solidFill>
+          </a:ln>
+        </p:spPr>
+        <p:style>
+          <a:lnRef idx="2">
+            <a:schemeClr val="accent1">
+              <a:shade val="15000"/>
+            </a:schemeClr>
+          </a:lnRef>
+          <a:fillRef idx="1">
+            <a:schemeClr val="accent1"/>
+          </a:fillRef>
+          <a:effectRef idx="0">
+            <a:schemeClr val="accent1"/>
+          </a:effectRef>
+          <a:fontRef idx="minor">
+            <a:schemeClr val="lt1"/>
+          </a:fontRef>
+        </p:style>
+        <p:txBody>
+          <a:bodyPr rtlCol="0" anchor="ctr" anchorCtr="0"/>
+          <a:lstStyle/>
+          <a:p>
+            <a:pPr algn="ctr"/>
+            <a:r>
+              <a:rPr lang="en-US" sz="1400" b="1" dirty="0">
+                <a:solidFill>
+                  <a:schemeClr val="tx1"/>
+                </a:solidFill>
+                <a:latin typeface="Times New Roman" panose="02020603050405020304" pitchFamily="18" charset="0"/>
+                <a:cs typeface="Times New Roman" panose="02020603050405020304" pitchFamily="18" charset="0"/>
+              </a:rPr>
+              <a:t>Inverse Clarke</a:t>
+            </a:r>
+          </a:p>
+          <a:p>
+            <a:pPr algn="ctr"/>
+            <a:r>
+              <a:rPr lang="en-US" sz="1400" b="1" dirty="0">
+                <a:solidFill>
+                  <a:schemeClr val="tx1"/>
+                </a:solidFill>
+                <a:latin typeface="Times New Roman" panose="02020603050405020304" pitchFamily="18" charset="0"/>
+                <a:cs typeface="Times New Roman" panose="02020603050405020304" pitchFamily="18" charset="0"/>
+              </a:rPr>
+              <a:t>(α</a:t>
+            </a:r>
+            <a:r>
+              <a:rPr lang="el-GR" sz="1400" b="1" dirty="0">
+                <a:solidFill>
+                  <a:schemeClr val="tx1"/>
+                </a:solidFill>
+                <a:latin typeface="Times New Roman" panose="02020603050405020304" pitchFamily="18" charset="0"/>
+                <a:cs typeface="Times New Roman" panose="02020603050405020304" pitchFamily="18" charset="0"/>
+              </a:rPr>
+              <a:t>β →</a:t>
+            </a:r>
+            <a:r>
+              <a:rPr lang="en-CA" sz="1400" b="1" dirty="0">
+                <a:solidFill>
+                  <a:schemeClr val="tx1"/>
+                </a:solidFill>
+                <a:latin typeface="Times New Roman" panose="02020603050405020304" pitchFamily="18" charset="0"/>
+                <a:cs typeface="Times New Roman" panose="02020603050405020304" pitchFamily="18" charset="0"/>
+              </a:rPr>
+              <a:t> </a:t>
+            </a:r>
+            <a:r>
+              <a:rPr lang="en-US" sz="1400" b="1" dirty="0" err="1">
+                <a:solidFill>
+                  <a:schemeClr val="tx1"/>
+                </a:solidFill>
+                <a:latin typeface="Times New Roman" panose="02020603050405020304" pitchFamily="18" charset="0"/>
+                <a:cs typeface="Times New Roman" panose="02020603050405020304" pitchFamily="18" charset="0"/>
+              </a:rPr>
+              <a:t>abc</a:t>
+            </a:r>
+            <a:r>
+              <a:rPr lang="en-US" sz="1400" b="1" dirty="0">
+                <a:solidFill>
+                  <a:schemeClr val="tx1"/>
+                </a:solidFill>
+                <a:latin typeface="Times New Roman" panose="02020603050405020304" pitchFamily="18" charset="0"/>
+                <a:cs typeface="Times New Roman" panose="02020603050405020304" pitchFamily="18" charset="0"/>
+              </a:rPr>
+              <a:t>)</a:t>
+            </a:r>
+          </a:p>
+        </p:txBody>
+      </p:sp>
+      <p:sp>
+        <p:nvSpPr>
+          <p:cNvPr id="100" name="Rectangle: Rounded Corners 99">
+            <a:extLst>
+              <a:ext uri="{FF2B5EF4-FFF2-40B4-BE49-F238E27FC236}">
+                <a16:creationId xmlns:a16="http://schemas.microsoft.com/office/drawing/2014/main" id="{68FE51B0-DE23-9DDC-46A1-0AD43174BFD6}"/>
+              </a:ext>
+            </a:extLst>
+          </p:cNvPr>
+          <p:cNvSpPr>
+            <a:spLocks noChangeAspect="1"/>
+          </p:cNvSpPr>
+          <p:nvPr/>
+        </p:nvSpPr>
+        <p:spPr>
+          <a:xfrm>
+            <a:off x="13562942" y="1174989"/>
+            <a:ext cx="1231364" cy="1231364"/>
+          </a:xfrm>
+          <a:prstGeom prst="roundRect">
+            <a:avLst>
+              <a:gd name="adj" fmla="val 6196"/>
+            </a:avLst>
+          </a:prstGeom>
+          <a:solidFill>
+            <a:schemeClr val="accent6">
+              <a:lumMod val="20000"/>
+              <a:lumOff val="80000"/>
+            </a:schemeClr>
+          </a:solidFill>
+          <a:ln w="19050">
+            <a:solidFill>
+              <a:schemeClr val="accent6">
+                <a:lumMod val="75000"/>
+              </a:schemeClr>
+            </a:solidFill>
+          </a:ln>
+        </p:spPr>
+        <p:style>
+          <a:lnRef idx="2">
+            <a:schemeClr val="accent1">
+              <a:shade val="15000"/>
+            </a:schemeClr>
+          </a:lnRef>
+          <a:fillRef idx="1">
+            <a:schemeClr val="accent1"/>
+          </a:fillRef>
+          <a:effectRef idx="0">
+            <a:schemeClr val="accent1"/>
+          </a:effectRef>
+          <a:fontRef idx="minor">
+            <a:schemeClr val="lt1"/>
+          </a:fontRef>
+        </p:style>
+        <p:txBody>
+          <a:bodyPr rtlCol="0" anchor="ctr" anchorCtr="0"/>
+          <a:lstStyle/>
+          <a:p>
+            <a:pPr algn="ctr"/>
+            <a:r>
+              <a:rPr lang="en-US" sz="1400" b="1" dirty="0">
+                <a:solidFill>
+                  <a:schemeClr val="tx1"/>
+                </a:solidFill>
+                <a:latin typeface="Times New Roman" panose="02020603050405020304" pitchFamily="18" charset="0"/>
+                <a:cs typeface="Times New Roman" panose="02020603050405020304" pitchFamily="18" charset="0"/>
+              </a:rPr>
+              <a:t>SVPWM</a:t>
+            </a:r>
+          </a:p>
+        </p:txBody>
+      </p:sp>
+      <p:grpSp>
+        <p:nvGrpSpPr>
+          <p:cNvPr id="101" name="Group 100">
+            <a:extLst>
+              <a:ext uri="{FF2B5EF4-FFF2-40B4-BE49-F238E27FC236}">
+                <a16:creationId xmlns:a16="http://schemas.microsoft.com/office/drawing/2014/main" id="{BE9A6059-EE12-FB37-0089-285A11E84759}"/>
+              </a:ext>
+            </a:extLst>
+          </p:cNvPr>
+          <p:cNvGrpSpPr/>
+          <p:nvPr/>
+        </p:nvGrpSpPr>
+        <p:grpSpPr>
+          <a:xfrm>
+            <a:off x="15443739" y="1174989"/>
+            <a:ext cx="1231200" cy="1231200"/>
+            <a:chOff x="30365779" y="3139413"/>
+            <a:chExt cx="2146840" cy="2592670"/>
+          </a:xfrm>
+          <a:solidFill>
+            <a:schemeClr val="accent2">
+              <a:lumMod val="20000"/>
+              <a:lumOff val="80000"/>
+            </a:schemeClr>
+          </a:solidFill>
+        </p:grpSpPr>
+        <p:sp>
+          <p:nvSpPr>
+            <p:cNvPr id="102" name="Rectangle: Rounded Corners 101">
+              <a:extLst>
+                <a:ext uri="{FF2B5EF4-FFF2-40B4-BE49-F238E27FC236}">
+                  <a16:creationId xmlns:a16="http://schemas.microsoft.com/office/drawing/2014/main" id="{9592EF24-4962-D75F-8E55-F1FDF163CFAA}"/>
+                </a:ext>
+              </a:extLst>
+            </p:cNvPr>
+            <p:cNvSpPr/>
+            <p:nvPr/>
+          </p:nvSpPr>
+          <p:spPr>
+            <a:xfrm>
+              <a:off x="30365779" y="3139413"/>
+              <a:ext cx="2146840" cy="2592670"/>
+            </a:xfrm>
+            <a:prstGeom prst="roundRect">
+              <a:avLst>
+                <a:gd name="adj" fmla="val 6196"/>
+              </a:avLst>
+            </a:prstGeom>
+            <a:grpFill/>
+            <a:ln w="19050">
+              <a:solidFill>
+                <a:schemeClr val="accent2">
+                  <a:lumMod val="75000"/>
+                </a:schemeClr>
+              </a:solidFill>
+            </a:ln>
+          </p:spPr>
+          <p:style>
+            <a:lnRef idx="2">
+              <a:schemeClr val="accent1">
+                <a:shade val="15000"/>
+              </a:schemeClr>
+            </a:lnRef>
+            <a:fillRef idx="1">
+              <a:schemeClr val="accent1"/>
+            </a:fillRef>
+            <a:effectRef idx="0">
+              <a:schemeClr val="accent1"/>
+            </a:effectRef>
+            <a:fontRef idx="minor">
+              <a:schemeClr val="lt1"/>
+            </a:fontRef>
+          </p:style>
+          <p:txBody>
+            <a:bodyPr rtlCol="0" anchor="t" anchorCtr="0"/>
+            <a:lstStyle/>
+            <a:p>
+              <a:pPr algn="ctr"/>
+              <a:endParaRPr lang="en-US" sz="467" b="1" dirty="0">
+                <a:solidFill>
+                  <a:schemeClr val="tx1"/>
+                </a:solidFill>
+                <a:latin typeface="Times New Roman" panose="02020603050405020304" pitchFamily="18" charset="0"/>
+                <a:cs typeface="Times New Roman" panose="02020603050405020304" pitchFamily="18" charset="0"/>
+              </a:endParaRPr>
+            </a:p>
+            <a:p>
+              <a:pPr algn="ctr"/>
+              <a:endParaRPr lang="en-US" sz="467" b="1" dirty="0">
+                <a:solidFill>
+                  <a:schemeClr val="tx1"/>
+                </a:solidFill>
+                <a:latin typeface="Times New Roman" panose="02020603050405020304" pitchFamily="18" charset="0"/>
+                <a:cs typeface="Times New Roman" panose="02020603050405020304" pitchFamily="18" charset="0"/>
+              </a:endParaRPr>
+            </a:p>
+            <a:p>
+              <a:pPr algn="ctr"/>
+              <a:r>
+                <a:rPr lang="en-US" sz="1400" b="1" dirty="0">
+                  <a:solidFill>
+                    <a:schemeClr val="tx1"/>
+                  </a:solidFill>
+                  <a:latin typeface="Times New Roman" panose="02020603050405020304" pitchFamily="18" charset="0"/>
+                  <a:cs typeface="Times New Roman" panose="02020603050405020304" pitchFamily="18" charset="0"/>
+                </a:rPr>
+                <a:t>Inverter</a:t>
+              </a:r>
+            </a:p>
+            <a:p>
+              <a:pPr algn="ctr"/>
+              <a:endParaRPr lang="en-US" sz="467" b="1" dirty="0">
+                <a:solidFill>
+                  <a:schemeClr val="tx1"/>
+                </a:solidFill>
+                <a:latin typeface="Times New Roman" panose="02020603050405020304" pitchFamily="18" charset="0"/>
+                <a:cs typeface="Times New Roman" panose="02020603050405020304" pitchFamily="18" charset="0"/>
+              </a:endParaRPr>
+            </a:p>
+            <a:p>
+              <a:pPr algn="ctr"/>
+              <a:endParaRPr lang="en-US" sz="467" b="1" dirty="0">
+                <a:solidFill>
+                  <a:schemeClr val="tx1"/>
+                </a:solidFill>
+                <a:latin typeface="Times New Roman" panose="02020603050405020304" pitchFamily="18" charset="0"/>
+                <a:cs typeface="Times New Roman" panose="02020603050405020304" pitchFamily="18" charset="0"/>
+              </a:endParaRPr>
+            </a:p>
+            <a:p>
+              <a:pPr algn="ctr"/>
+              <a:endParaRPr lang="en-US" sz="467" b="1" dirty="0">
+                <a:solidFill>
+                  <a:schemeClr val="tx1"/>
+                </a:solidFill>
+                <a:latin typeface="Times New Roman" panose="02020603050405020304" pitchFamily="18" charset="0"/>
+                <a:cs typeface="Times New Roman" panose="02020603050405020304" pitchFamily="18" charset="0"/>
+              </a:endParaRPr>
+            </a:p>
+            <a:p>
+              <a:pPr algn="ctr"/>
+              <a:endParaRPr lang="en-CA" sz="467" b="1" dirty="0">
+                <a:solidFill>
+                  <a:schemeClr val="tx1"/>
+                </a:solidFill>
+                <a:latin typeface="Times New Roman" panose="02020603050405020304" pitchFamily="18" charset="0"/>
+                <a:cs typeface="Times New Roman" panose="02020603050405020304" pitchFamily="18" charset="0"/>
+              </a:endParaRPr>
+            </a:p>
+          </p:txBody>
+        </p:sp>
+        <p:pic>
+          <p:nvPicPr>
+            <p:cNvPr id="103" name="Picture 102">
+              <a:extLst>
+                <a:ext uri="{FF2B5EF4-FFF2-40B4-BE49-F238E27FC236}">
+                  <a16:creationId xmlns:a16="http://schemas.microsoft.com/office/drawing/2014/main" id="{3C8EA0AB-9FC3-D7A8-D0EF-C5A875E63BB7}"/>
+                </a:ext>
+              </a:extLst>
+            </p:cNvPr>
+            <p:cNvPicPr>
+              <a:picLocks noChangeAspect="1"/>
+            </p:cNvPicPr>
+            <p:nvPr/>
+          </p:nvPicPr>
+          <p:blipFill>
+            <a:blip r:embed="rId18">
+              <a:extLst>
+                <a:ext uri="{28A0092B-C50C-407E-A947-70E740481C1C}">
+                  <a14:useLocalDpi xmlns:a14="http://schemas.microsoft.com/office/drawing/2010/main" val="0"/>
+                </a:ext>
+              </a:extLst>
+            </a:blip>
+            <a:srcRect l="4198" r="4330"/>
+            <a:stretch>
+              <a:fillRect/>
+            </a:stretch>
+          </p:blipFill>
+          <p:spPr>
+            <a:xfrm>
+              <a:off x="30407609" y="4081707"/>
+              <a:ext cx="2063191" cy="1503694"/>
+            </a:xfrm>
+            <a:prstGeom prst="rect">
+              <a:avLst/>
+            </a:prstGeom>
+            <a:grpFill/>
+            <a:ln>
+              <a:noFill/>
+            </a:ln>
+          </p:spPr>
+        </p:pic>
+      </p:grpSp>
+      <mc:AlternateContent xmlns:mc="http://schemas.openxmlformats.org/markup-compatibility/2006">
+        <mc:Choice xmlns:a14="http://schemas.microsoft.com/office/drawing/2010/main" Requires="a14">
+          <p:sp>
+            <p:nvSpPr>
+              <p:cNvPr id="104" name="TextBox 103">
+                <a:extLst>
+                  <a:ext uri="{FF2B5EF4-FFF2-40B4-BE49-F238E27FC236}">
+                    <a16:creationId xmlns:a16="http://schemas.microsoft.com/office/drawing/2014/main" id="{B87F5032-22E4-15C0-6EC2-C71867FF332A}"/>
+                  </a:ext>
+                </a:extLst>
+              </p:cNvPr>
+              <p:cNvSpPr txBox="1"/>
+              <p:nvPr/>
+            </p:nvSpPr>
+            <p:spPr>
+              <a:xfrm>
+                <a:off x="11111857" y="1110784"/>
+                <a:ext cx="304800" cy="307777"/>
+              </a:xfrm>
+              <a:prstGeom prst="rect">
+                <a:avLst/>
+              </a:prstGeom>
+              <a:noFill/>
+            </p:spPr>
+            <p:txBody>
+              <a:bodyPr wrap="square" rtlCol="0">
+                <a:spAutoFit/>
+              </a:bodyPr>
+              <a:lstStyle/>
+              <a:p>
+                <a:pPr/>
+                <a14:m>
+                  <m:oMathPara xmlns:m="http://schemas.openxmlformats.org/officeDocument/2006/math">
+                    <m:oMath>
+                      <m:sSubSup>
+                        <m:sSubSupPr>
+                          <m:ctrlPr>
+                            <a:rPr lang="en-US" sz="1400" i="1">
+                              <a:latin typeface="Cambria Math" panose="02040503050406030204" pitchFamily="18" charset="0"/>
+                            </a:rPr>
+                          </m:ctrlPr>
+                        </m:sSubSupPr>
+                        <m:e>
+                          <m:r>
+                            <a:rPr lang="en-US" sz="1400" i="1">
+                              <a:latin typeface="Cambria Math" panose="02040503050406030204" pitchFamily="18" charset="0"/>
+                            </a:rPr>
+                            <m:t>𝑣</m:t>
+                          </m:r>
+                        </m:e>
+                        <m:sub>
+                          <m:r>
+                            <m:rPr>
+                              <m:nor/>
+                            </m:rPr>
+                            <a:rPr lang="en-US" sz="1400" i="0" dirty="0">
+                              <a:latin typeface="Times New Roman" panose="02020603050405020304" pitchFamily="18" charset="0"/>
+                              <a:ea typeface="Cambria Math" panose="02040503050406030204" pitchFamily="18" charset="0"/>
+                              <a:cs typeface="Times New Roman" panose="02020603050405020304" pitchFamily="18" charset="0"/>
+                            </a:rPr>
+                            <m:t>α</m:t>
+                          </m:r>
+                        </m:sub>
+                        <m:sup>
+                          <m:r>
+                            <a:rPr lang="en-US" sz="1400" i="1">
+                              <a:latin typeface="Cambria Math" panose="02040503050406030204" pitchFamily="18" charset="0"/>
+                            </a:rPr>
+                            <m:t>∗</m:t>
+                          </m:r>
+                        </m:sup>
+                      </m:sSubSup>
+                    </m:oMath>
+                  </m:oMathPara>
+                </a14:m>
+                <a:endParaRPr lang="en-US" sz="1400" dirty="0">
+                  <a:latin typeface="Times New Roman" panose="02020603050405020304" pitchFamily="18" charset="0"/>
+                  <a:cs typeface="Times New Roman" panose="02020603050405020304" pitchFamily="18" charset="0"/>
+                </a:endParaRPr>
+              </a:p>
+            </p:txBody>
+          </p:sp>
+        </mc:Choice>
+        <mc:Fallback>
+          <p:sp>
+            <p:nvSpPr>
+              <p:cNvPr id="104" name="TextBox 103">
+                <a:extLst>
+                  <a:ext uri="{FF2B5EF4-FFF2-40B4-BE49-F238E27FC236}">
+                    <a16:creationId xmlns:a16="http://schemas.microsoft.com/office/drawing/2014/main" id="{B87F5032-22E4-15C0-6EC2-C71867FF332A}"/>
+                  </a:ext>
+                </a:extLst>
+              </p:cNvPr>
+              <p:cNvSpPr txBox="1">
+                <a:spLocks noRot="1" noChangeAspect="1" noMove="1" noResize="1" noEditPoints="1" noAdjustHandles="1" noChangeArrowheads="1" noChangeShapeType="1" noTextEdit="1"/>
+              </p:cNvSpPr>
+              <p:nvPr/>
+            </p:nvSpPr>
+            <p:spPr>
+              <a:xfrm>
+                <a:off x="11111857" y="1110784"/>
+                <a:ext cx="304800" cy="307777"/>
+              </a:xfrm>
+              <a:prstGeom prst="rect">
+                <a:avLst/>
+              </a:prstGeom>
+              <a:blipFill>
+                <a:blip r:embed="rId19"/>
+                <a:stretch>
+                  <a:fillRect r="-6000"/>
+                </a:stretch>
+              </a:blipFill>
+            </p:spPr>
+            <p:txBody>
+              <a:bodyPr/>
+              <a:lstStyle/>
+              <a:p>
+                <a:r>
+                  <a:rPr lang="en-CA">
+                    <a:noFill/>
+                  </a:rPr>
+                  <a:t> </a:t>
+                </a:r>
+              </a:p>
+            </p:txBody>
+          </p:sp>
+        </mc:Fallback>
+      </mc:AlternateContent>
+      <mc:AlternateContent xmlns:mc="http://schemas.openxmlformats.org/markup-compatibility/2006">
+        <mc:Choice xmlns:a14="http://schemas.microsoft.com/office/drawing/2010/main" Requires="a14">
+          <p:sp>
+            <p:nvSpPr>
+              <p:cNvPr id="105" name="TextBox 104">
+                <a:extLst>
+                  <a:ext uri="{FF2B5EF4-FFF2-40B4-BE49-F238E27FC236}">
+                    <a16:creationId xmlns:a16="http://schemas.microsoft.com/office/drawing/2014/main" id="{70C636D9-70C1-3292-F3B9-80D2CA00002A}"/>
+                  </a:ext>
+                </a:extLst>
+              </p:cNvPr>
+              <p:cNvSpPr txBox="1"/>
+              <p:nvPr/>
+            </p:nvSpPr>
+            <p:spPr>
+              <a:xfrm>
+                <a:off x="11111857" y="1843491"/>
+                <a:ext cx="304800" cy="335733"/>
+              </a:xfrm>
+              <a:prstGeom prst="rect">
+                <a:avLst/>
+              </a:prstGeom>
+              <a:noFill/>
+            </p:spPr>
+            <p:txBody>
+              <a:bodyPr wrap="square" rtlCol="0">
+                <a:spAutoFit/>
+              </a:bodyPr>
+              <a:lstStyle/>
+              <a:p>
+                <a:pPr/>
+                <a14:m>
+                  <m:oMathPara xmlns:m="http://schemas.openxmlformats.org/officeDocument/2006/math">
+                    <m:oMath>
+                      <m:sSubSup>
+                        <m:sSubSupPr>
+                          <m:ctrlPr>
+                            <a:rPr lang="en-US" sz="1400" i="1">
+                              <a:latin typeface="Cambria Math" panose="02040503050406030204" pitchFamily="18" charset="0"/>
+                            </a:rPr>
+                          </m:ctrlPr>
+                        </m:sSubSupPr>
+                        <m:e>
+                          <m:r>
+                            <a:rPr lang="en-US" sz="1400" i="1">
+                              <a:latin typeface="Cambria Math" panose="02040503050406030204" pitchFamily="18" charset="0"/>
+                            </a:rPr>
+                            <m:t>𝑣</m:t>
+                          </m:r>
+                        </m:e>
+                        <m:sub>
+                          <m:r>
+                            <a:rPr lang="en-US" sz="1400" i="1">
+                              <a:latin typeface="Cambria Math" panose="02040503050406030204" pitchFamily="18" charset="0"/>
+                              <a:ea typeface="Cambria Math" panose="02040503050406030204" pitchFamily="18" charset="0"/>
+                            </a:rPr>
+                            <m:t>𝛽</m:t>
+                          </m:r>
+                        </m:sub>
+                        <m:sup>
+                          <m:r>
+                            <a:rPr lang="en-US" sz="1400" i="1">
+                              <a:latin typeface="Cambria Math" panose="02040503050406030204" pitchFamily="18" charset="0"/>
+                            </a:rPr>
+                            <m:t>∗</m:t>
+                          </m:r>
+                        </m:sup>
+                      </m:sSubSup>
+                    </m:oMath>
+                  </m:oMathPara>
+                </a14:m>
+                <a:endParaRPr lang="en-US" sz="1400" dirty="0">
+                  <a:latin typeface="Times New Roman" panose="02020603050405020304" pitchFamily="18" charset="0"/>
+                  <a:cs typeface="Times New Roman" panose="02020603050405020304" pitchFamily="18" charset="0"/>
+                </a:endParaRPr>
+              </a:p>
+            </p:txBody>
+          </p:sp>
+        </mc:Choice>
+        <mc:Fallback>
+          <p:sp>
+            <p:nvSpPr>
+              <p:cNvPr id="105" name="TextBox 104">
+                <a:extLst>
+                  <a:ext uri="{FF2B5EF4-FFF2-40B4-BE49-F238E27FC236}">
+                    <a16:creationId xmlns:a16="http://schemas.microsoft.com/office/drawing/2014/main" id="{70C636D9-70C1-3292-F3B9-80D2CA00002A}"/>
+                  </a:ext>
+                </a:extLst>
+              </p:cNvPr>
+              <p:cNvSpPr txBox="1">
+                <a:spLocks noRot="1" noChangeAspect="1" noMove="1" noResize="1" noEditPoints="1" noAdjustHandles="1" noChangeArrowheads="1" noChangeShapeType="1" noTextEdit="1"/>
+              </p:cNvSpPr>
+              <p:nvPr/>
+            </p:nvSpPr>
+            <p:spPr>
+              <a:xfrm>
+                <a:off x="11111857" y="1843491"/>
+                <a:ext cx="304800" cy="335733"/>
+              </a:xfrm>
+              <a:prstGeom prst="rect">
+                <a:avLst/>
+              </a:prstGeom>
+              <a:blipFill>
+                <a:blip r:embed="rId20"/>
+                <a:stretch>
+                  <a:fillRect r="-8000" b="-5455"/>
+                </a:stretch>
+              </a:blipFill>
+            </p:spPr>
+            <p:txBody>
+              <a:bodyPr/>
+              <a:lstStyle/>
+              <a:p>
+                <a:r>
+                  <a:rPr lang="en-CA">
+                    <a:noFill/>
+                  </a:rPr>
+                  <a:t> </a:t>
+                </a:r>
+              </a:p>
+            </p:txBody>
+          </p:sp>
+        </mc:Fallback>
+      </mc:AlternateContent>
+      <p:cxnSp>
+        <p:nvCxnSpPr>
+          <p:cNvPr id="106" name="Straight Arrow Connector 105">
+            <a:extLst>
+              <a:ext uri="{FF2B5EF4-FFF2-40B4-BE49-F238E27FC236}">
+                <a16:creationId xmlns:a16="http://schemas.microsoft.com/office/drawing/2014/main" id="{4821AD72-9801-8210-6E51-D88E64785009}"/>
+              </a:ext>
+            </a:extLst>
+          </p:cNvPr>
+          <p:cNvCxnSpPr>
+            <a:cxnSpLocks/>
+          </p:cNvCxnSpPr>
+          <p:nvPr/>
+        </p:nvCxnSpPr>
+        <p:spPr>
+          <a:xfrm>
+            <a:off x="11027501" y="1412493"/>
+            <a:ext cx="648000" cy="0"/>
+          </a:xfrm>
+          <a:prstGeom prst="straightConnector1">
+            <a:avLst/>
+          </a:prstGeom>
+          <a:ln>
+            <a:solidFill>
+              <a:schemeClr val="tx1"/>
+            </a:solidFill>
+            <a:tailEnd type="triangle" w="med" len="lg"/>
+          </a:ln>
+        </p:spPr>
+        <p:style>
+          <a:lnRef idx="2">
+            <a:schemeClr val="accent1"/>
+          </a:lnRef>
+          <a:fillRef idx="0">
+            <a:schemeClr val="accent1"/>
+          </a:fillRef>
+          <a:effectRef idx="1">
+            <a:schemeClr val="accent1"/>
+          </a:effectRef>
+          <a:fontRef idx="minor">
+            <a:schemeClr val="tx1"/>
+          </a:fontRef>
+        </p:style>
+      </p:cxnSp>
+      <p:cxnSp>
+        <p:nvCxnSpPr>
+          <p:cNvPr id="107" name="Straight Arrow Connector 106">
+            <a:extLst>
+              <a:ext uri="{FF2B5EF4-FFF2-40B4-BE49-F238E27FC236}">
+                <a16:creationId xmlns:a16="http://schemas.microsoft.com/office/drawing/2014/main" id="{362BDFF3-5C04-C6BC-B3FC-FB15C4817F8D}"/>
+              </a:ext>
+            </a:extLst>
+          </p:cNvPr>
+          <p:cNvCxnSpPr>
+            <a:cxnSpLocks/>
+          </p:cNvCxnSpPr>
+          <p:nvPr/>
+        </p:nvCxnSpPr>
+        <p:spPr>
+          <a:xfrm>
+            <a:off x="11027501" y="2173190"/>
+            <a:ext cx="648000" cy="0"/>
+          </a:xfrm>
+          <a:prstGeom prst="straightConnector1">
+            <a:avLst/>
+          </a:prstGeom>
+          <a:ln>
+            <a:solidFill>
+              <a:schemeClr val="tx1"/>
+            </a:solidFill>
+            <a:tailEnd type="triangle" w="med" len="lg"/>
+          </a:ln>
+        </p:spPr>
+        <p:style>
+          <a:lnRef idx="2">
+            <a:schemeClr val="accent1"/>
+          </a:lnRef>
+          <a:fillRef idx="0">
+            <a:schemeClr val="accent1"/>
+          </a:fillRef>
+          <a:effectRef idx="1">
+            <a:schemeClr val="accent1"/>
+          </a:effectRef>
+          <a:fontRef idx="minor">
+            <a:schemeClr val="tx1"/>
+          </a:fontRef>
+        </p:style>
+      </p:cxnSp>
+      <p:sp>
+        <p:nvSpPr>
+          <p:cNvPr id="96" name="Rectangle: Rounded Corners 95">
+            <a:extLst>
+              <a:ext uri="{FF2B5EF4-FFF2-40B4-BE49-F238E27FC236}">
+                <a16:creationId xmlns:a16="http://schemas.microsoft.com/office/drawing/2014/main" id="{87A0EF79-CB8D-23F0-926E-AE3FC851AAAB}"/>
+              </a:ext>
+            </a:extLst>
+          </p:cNvPr>
+          <p:cNvSpPr>
+            <a:spLocks noChangeAspect="1"/>
+          </p:cNvSpPr>
+          <p:nvPr/>
+        </p:nvSpPr>
+        <p:spPr>
+          <a:xfrm>
+            <a:off x="9791187" y="1174989"/>
+            <a:ext cx="1231364" cy="1231364"/>
+          </a:xfrm>
+          <a:prstGeom prst="roundRect">
+            <a:avLst>
+              <a:gd name="adj" fmla="val 6196"/>
+            </a:avLst>
+          </a:prstGeom>
+          <a:solidFill>
+            <a:schemeClr val="accent6">
+              <a:lumMod val="20000"/>
+              <a:lumOff val="80000"/>
+            </a:schemeClr>
+          </a:solidFill>
+          <a:ln w="19050">
+            <a:solidFill>
+              <a:schemeClr val="accent6">
+                <a:lumMod val="75000"/>
+              </a:schemeClr>
+            </a:solidFill>
+          </a:ln>
+        </p:spPr>
+        <p:style>
+          <a:lnRef idx="2">
+            <a:schemeClr val="accent1">
+              <a:shade val="15000"/>
+            </a:schemeClr>
+          </a:lnRef>
+          <a:fillRef idx="1">
+            <a:schemeClr val="accent1"/>
+          </a:fillRef>
+          <a:effectRef idx="0">
+            <a:schemeClr val="accent1"/>
+          </a:effectRef>
+          <a:fontRef idx="minor">
+            <a:schemeClr val="lt1"/>
+          </a:fontRef>
+        </p:style>
+        <p:txBody>
+          <a:bodyPr rtlCol="0" anchor="ctr" anchorCtr="0"/>
+          <a:lstStyle/>
+          <a:p>
+            <a:pPr algn="ctr"/>
+            <a:r>
+              <a:rPr lang="en-US" sz="1400" b="1" dirty="0">
+                <a:solidFill>
+                  <a:schemeClr val="tx1"/>
+                </a:solidFill>
+                <a:latin typeface="Times New Roman" panose="02020603050405020304" pitchFamily="18" charset="0"/>
+                <a:cs typeface="Times New Roman" panose="02020603050405020304" pitchFamily="18" charset="0"/>
+              </a:rPr>
+              <a:t>Inverse Park</a:t>
+            </a:r>
+          </a:p>
+          <a:p>
+            <a:pPr algn="ctr"/>
+            <a:r>
+              <a:rPr lang="en-US" sz="1400" b="1" dirty="0">
+                <a:solidFill>
+                  <a:schemeClr val="tx1"/>
+                </a:solidFill>
+                <a:latin typeface="Times New Roman" panose="02020603050405020304" pitchFamily="18" charset="0"/>
+                <a:cs typeface="Times New Roman" panose="02020603050405020304" pitchFamily="18" charset="0"/>
+              </a:rPr>
+              <a:t>(</a:t>
+            </a:r>
+            <a:r>
+              <a:rPr lang="en-US" sz="1400" b="1" dirty="0" err="1">
+                <a:solidFill>
+                  <a:schemeClr val="tx1"/>
+                </a:solidFill>
+                <a:latin typeface="Times New Roman" panose="02020603050405020304" pitchFamily="18" charset="0"/>
+                <a:cs typeface="Times New Roman" panose="02020603050405020304" pitchFamily="18" charset="0"/>
+              </a:rPr>
+              <a:t>dq</a:t>
+            </a:r>
+            <a:r>
+              <a:rPr lang="el-GR" sz="1400" b="1" dirty="0">
+                <a:solidFill>
+                  <a:schemeClr val="tx1"/>
+                </a:solidFill>
+                <a:latin typeface="Times New Roman" panose="02020603050405020304" pitchFamily="18" charset="0"/>
+                <a:cs typeface="Times New Roman" panose="02020603050405020304" pitchFamily="18" charset="0"/>
+              </a:rPr>
+              <a:t> → </a:t>
+            </a:r>
+            <a:r>
+              <a:rPr lang="en-US" sz="1400" b="1" dirty="0">
+                <a:solidFill>
+                  <a:schemeClr val="tx1"/>
+                </a:solidFill>
+                <a:latin typeface="Times New Roman" panose="02020603050405020304" pitchFamily="18" charset="0"/>
+                <a:cs typeface="Times New Roman" panose="02020603050405020304" pitchFamily="18" charset="0"/>
+              </a:rPr>
+              <a:t>α</a:t>
+            </a:r>
+            <a:r>
+              <a:rPr lang="el-GR" sz="1400" b="1" dirty="0">
+                <a:solidFill>
+                  <a:schemeClr val="tx1"/>
+                </a:solidFill>
+                <a:latin typeface="Times New Roman" panose="02020603050405020304" pitchFamily="18" charset="0"/>
+                <a:cs typeface="Times New Roman" panose="02020603050405020304" pitchFamily="18" charset="0"/>
+              </a:rPr>
+              <a:t>β</a:t>
+            </a:r>
+            <a:r>
+              <a:rPr lang="en-US" sz="1400" b="1" dirty="0">
+                <a:solidFill>
+                  <a:schemeClr val="tx1"/>
+                </a:solidFill>
+                <a:latin typeface="Times New Roman" panose="02020603050405020304" pitchFamily="18" charset="0"/>
+                <a:cs typeface="Times New Roman" panose="02020603050405020304" pitchFamily="18" charset="0"/>
+              </a:rPr>
+              <a:t>)</a:t>
+            </a:r>
+          </a:p>
+        </p:txBody>
+      </p:sp>
+      <p:cxnSp>
+        <p:nvCxnSpPr>
+          <p:cNvPr id="110" name="Straight Arrow Connector 109">
+            <a:extLst>
+              <a:ext uri="{FF2B5EF4-FFF2-40B4-BE49-F238E27FC236}">
+                <a16:creationId xmlns:a16="http://schemas.microsoft.com/office/drawing/2014/main" id="{F317AFB0-AA84-F84E-4129-74F164823E06}"/>
+              </a:ext>
+            </a:extLst>
+          </p:cNvPr>
+          <p:cNvCxnSpPr>
+            <a:cxnSpLocks/>
+          </p:cNvCxnSpPr>
+          <p:nvPr/>
+        </p:nvCxnSpPr>
+        <p:spPr>
+          <a:xfrm flipH="1">
+            <a:off x="13072336" y="3822740"/>
+            <a:ext cx="2361081" cy="0"/>
+          </a:xfrm>
+          <a:prstGeom prst="straightConnector1">
+            <a:avLst/>
+          </a:prstGeom>
+          <a:ln>
+            <a:solidFill>
+              <a:schemeClr val="tx1"/>
+            </a:solidFill>
+            <a:tailEnd type="triangle" w="med" len="lg"/>
+          </a:ln>
+        </p:spPr>
+        <p:style>
+          <a:lnRef idx="2">
+            <a:schemeClr val="accent1"/>
+          </a:lnRef>
+          <a:fillRef idx="0">
+            <a:schemeClr val="accent1"/>
+          </a:fillRef>
+          <a:effectRef idx="1">
+            <a:schemeClr val="accent1"/>
+          </a:effectRef>
+          <a:fontRef idx="minor">
+            <a:schemeClr val="tx1"/>
+          </a:fontRef>
+        </p:style>
+      </p:cxnSp>
+      <p:cxnSp>
+        <p:nvCxnSpPr>
+          <p:cNvPr id="111" name="Straight Arrow Connector 110">
+            <a:extLst>
+              <a:ext uri="{FF2B5EF4-FFF2-40B4-BE49-F238E27FC236}">
+                <a16:creationId xmlns:a16="http://schemas.microsoft.com/office/drawing/2014/main" id="{D85973C7-BEE6-2AED-289A-C10B4730B809}"/>
+              </a:ext>
+            </a:extLst>
+          </p:cNvPr>
+          <p:cNvCxnSpPr>
+            <a:cxnSpLocks/>
+          </p:cNvCxnSpPr>
+          <p:nvPr/>
+        </p:nvCxnSpPr>
+        <p:spPr>
+          <a:xfrm flipH="1">
+            <a:off x="13069955" y="4556187"/>
+            <a:ext cx="2363621" cy="0"/>
+          </a:xfrm>
+          <a:prstGeom prst="straightConnector1">
+            <a:avLst/>
+          </a:prstGeom>
+          <a:ln>
+            <a:solidFill>
+              <a:schemeClr val="tx1"/>
+            </a:solidFill>
+            <a:tailEnd type="triangle" w="med" len="lg"/>
+          </a:ln>
+        </p:spPr>
+        <p:style>
+          <a:lnRef idx="2">
+            <a:schemeClr val="accent1"/>
+          </a:lnRef>
+          <a:fillRef idx="0">
+            <a:schemeClr val="accent1"/>
+          </a:fillRef>
+          <a:effectRef idx="1">
+            <a:schemeClr val="accent1"/>
+          </a:effectRef>
+          <a:fontRef idx="minor">
+            <a:schemeClr val="tx1"/>
+          </a:fontRef>
+        </p:style>
+      </p:cxnSp>
+      <mc:AlternateContent xmlns:mc="http://schemas.openxmlformats.org/markup-compatibility/2006">
+        <mc:Choice xmlns:a14="http://schemas.microsoft.com/office/drawing/2010/main" Requires="a14">
+          <p:sp>
+            <p:nvSpPr>
+              <p:cNvPr id="112" name="TextBox 111">
+                <a:extLst>
+                  <a:ext uri="{FF2B5EF4-FFF2-40B4-BE49-F238E27FC236}">
+                    <a16:creationId xmlns:a16="http://schemas.microsoft.com/office/drawing/2014/main" id="{95EC5548-B486-AFE5-9E77-281E4328447E}"/>
+                  </a:ext>
+                </a:extLst>
+              </p:cNvPr>
+              <p:cNvSpPr txBox="1"/>
+              <p:nvPr/>
+            </p:nvSpPr>
+            <p:spPr>
+              <a:xfrm>
+                <a:off x="14113172" y="3523253"/>
+                <a:ext cx="304800" cy="307777"/>
+              </a:xfrm>
+              <a:prstGeom prst="rect">
+                <a:avLst/>
+              </a:prstGeom>
+              <a:noFill/>
+            </p:spPr>
+            <p:txBody>
+              <a:bodyPr wrap="square" rtlCol="0">
+                <a:spAutoFit/>
+              </a:bodyPr>
+              <a:lstStyle/>
+              <a:p>
+                <a:pPr/>
+                <a14:m>
+                  <m:oMathPara xmlns:m="http://schemas.openxmlformats.org/officeDocument/2006/math">
+                    <m:oMath>
+                      <m:sSub>
+                        <m:sSubPr>
+                          <m:ctrlPr>
+                            <a:rPr lang="en-US" sz="1400" i="1" smtClean="0">
+                              <a:latin typeface="Cambria Math" panose="02040503050406030204" pitchFamily="18" charset="0"/>
+                            </a:rPr>
+                          </m:ctrlPr>
+                        </m:sSubPr>
+                        <m:e>
+                          <m:r>
+                            <a:rPr lang="en-US" sz="1400" i="1" smtClean="0">
+                              <a:latin typeface="Cambria Math" panose="02040503050406030204" pitchFamily="18" charset="0"/>
+                            </a:rPr>
+                            <m:t>𝑖</m:t>
+                          </m:r>
+                        </m:e>
+                        <m:sub>
+                          <m:r>
+                            <a:rPr lang="en-US" sz="1400" i="1" smtClean="0">
+                              <a:latin typeface="Cambria Math" panose="02040503050406030204" pitchFamily="18" charset="0"/>
+                            </a:rPr>
+                            <m:t>𝛼</m:t>
+                          </m:r>
+                        </m:sub>
+                      </m:sSub>
+                    </m:oMath>
+                  </m:oMathPara>
+                </a14:m>
+                <a:endParaRPr lang="en-US" sz="1400" dirty="0">
+                  <a:latin typeface="Times New Roman" panose="02020603050405020304" pitchFamily="18" charset="0"/>
+                  <a:cs typeface="Times New Roman" panose="02020603050405020304" pitchFamily="18" charset="0"/>
+                </a:endParaRPr>
+              </a:p>
+            </p:txBody>
+          </p:sp>
+        </mc:Choice>
+        <mc:Fallback>
+          <p:sp>
+            <p:nvSpPr>
+              <p:cNvPr id="112" name="TextBox 111">
+                <a:extLst>
+                  <a:ext uri="{FF2B5EF4-FFF2-40B4-BE49-F238E27FC236}">
+                    <a16:creationId xmlns:a16="http://schemas.microsoft.com/office/drawing/2014/main" id="{95EC5548-B486-AFE5-9E77-281E4328447E}"/>
+                  </a:ext>
+                </a:extLst>
+              </p:cNvPr>
+              <p:cNvSpPr txBox="1">
+                <a:spLocks noRot="1" noChangeAspect="1" noMove="1" noResize="1" noEditPoints="1" noAdjustHandles="1" noChangeArrowheads="1" noChangeShapeType="1" noTextEdit="1"/>
+              </p:cNvSpPr>
+              <p:nvPr/>
+            </p:nvSpPr>
+            <p:spPr>
+              <a:xfrm>
+                <a:off x="14113172" y="3523253"/>
+                <a:ext cx="304800" cy="307777"/>
+              </a:xfrm>
+              <a:prstGeom prst="rect">
+                <a:avLst/>
+              </a:prstGeom>
+              <a:blipFill>
+                <a:blip r:embed="rId21"/>
+                <a:stretch>
+                  <a:fillRect/>
+                </a:stretch>
+              </a:blipFill>
+            </p:spPr>
+            <p:txBody>
+              <a:bodyPr/>
+              <a:lstStyle/>
+              <a:p>
+                <a:r>
+                  <a:rPr lang="en-CA">
+                    <a:noFill/>
+                  </a:rPr>
+                  <a:t> </a:t>
+                </a:r>
+              </a:p>
+            </p:txBody>
+          </p:sp>
+        </mc:Fallback>
+      </mc:AlternateContent>
+      <mc:AlternateContent xmlns:mc="http://schemas.openxmlformats.org/markup-compatibility/2006">
+        <mc:Choice xmlns:a14="http://schemas.microsoft.com/office/drawing/2010/main" Requires="a14">
+          <p:sp>
+            <p:nvSpPr>
+              <p:cNvPr id="113" name="TextBox 112">
+                <a:extLst>
+                  <a:ext uri="{FF2B5EF4-FFF2-40B4-BE49-F238E27FC236}">
+                    <a16:creationId xmlns:a16="http://schemas.microsoft.com/office/drawing/2014/main" id="{3F332451-58AF-EDC2-C255-B2D34882CA77}"/>
+                  </a:ext>
+                </a:extLst>
+              </p:cNvPr>
+              <p:cNvSpPr txBox="1"/>
+              <p:nvPr/>
+            </p:nvSpPr>
+            <p:spPr>
+              <a:xfrm>
+                <a:off x="14117934" y="4239137"/>
+                <a:ext cx="304800" cy="326949"/>
+              </a:xfrm>
+              <a:prstGeom prst="rect">
+                <a:avLst/>
+              </a:prstGeom>
+              <a:noFill/>
+            </p:spPr>
+            <p:txBody>
+              <a:bodyPr wrap="square" rtlCol="0">
+                <a:spAutoFit/>
+              </a:bodyPr>
+              <a:lstStyle/>
+              <a:p>
+                <a:pPr/>
+                <a14:m>
+                  <m:oMathPara xmlns:m="http://schemas.openxmlformats.org/officeDocument/2006/math">
+                    <m:oMath>
+                      <m:sSub>
+                        <m:sSubPr>
+                          <m:ctrlPr>
+                            <a:rPr lang="en-US" sz="1400" b="0" i="1" smtClean="0">
+                              <a:latin typeface="Cambria Math" panose="02040503050406030204" pitchFamily="18" charset="0"/>
+                            </a:rPr>
+                          </m:ctrlPr>
+                        </m:sSubPr>
+                        <m:e>
+                          <m:r>
+                            <a:rPr lang="en-US" sz="1400" b="0" i="1" smtClean="0">
+                              <a:latin typeface="Cambria Math" panose="02040503050406030204" pitchFamily="18" charset="0"/>
+                            </a:rPr>
+                            <m:t>𝑖</m:t>
+                          </m:r>
+                        </m:e>
+                        <m:sub>
+                          <m:r>
+                            <a:rPr lang="en-US" sz="1400" b="0" i="1" smtClean="0">
+                              <a:latin typeface="Cambria Math" panose="02040503050406030204" pitchFamily="18" charset="0"/>
+                            </a:rPr>
+                            <m:t>𝛽</m:t>
+                          </m:r>
+                        </m:sub>
+                      </m:sSub>
+                    </m:oMath>
+                  </m:oMathPara>
+                </a14:m>
+                <a:endParaRPr lang="en-US" sz="1400" dirty="0">
+                  <a:latin typeface="Times New Roman" panose="02020603050405020304" pitchFamily="18" charset="0"/>
+                  <a:cs typeface="Times New Roman" panose="02020603050405020304" pitchFamily="18" charset="0"/>
+                </a:endParaRPr>
+              </a:p>
+            </p:txBody>
+          </p:sp>
+        </mc:Choice>
+        <mc:Fallback>
+          <p:sp>
+            <p:nvSpPr>
+              <p:cNvPr id="113" name="TextBox 112">
+                <a:extLst>
+                  <a:ext uri="{FF2B5EF4-FFF2-40B4-BE49-F238E27FC236}">
+                    <a16:creationId xmlns:a16="http://schemas.microsoft.com/office/drawing/2014/main" id="{3F332451-58AF-EDC2-C255-B2D34882CA77}"/>
+                  </a:ext>
+                </a:extLst>
+              </p:cNvPr>
+              <p:cNvSpPr txBox="1">
+                <a:spLocks noRot="1" noChangeAspect="1" noMove="1" noResize="1" noEditPoints="1" noAdjustHandles="1" noChangeArrowheads="1" noChangeShapeType="1" noTextEdit="1"/>
+              </p:cNvSpPr>
+              <p:nvPr/>
+            </p:nvSpPr>
+            <p:spPr>
+              <a:xfrm>
+                <a:off x="14117934" y="4239137"/>
+                <a:ext cx="304800" cy="326949"/>
+              </a:xfrm>
+              <a:prstGeom prst="rect">
+                <a:avLst/>
+              </a:prstGeom>
+              <a:blipFill>
+                <a:blip r:embed="rId22"/>
+                <a:stretch>
+                  <a:fillRect b="-3704"/>
+                </a:stretch>
+              </a:blipFill>
+            </p:spPr>
+            <p:txBody>
+              <a:bodyPr/>
+              <a:lstStyle/>
+              <a:p>
+                <a:r>
+                  <a:rPr lang="en-CA">
+                    <a:noFill/>
+                  </a:rPr>
+                  <a:t> </a:t>
+                </a:r>
+              </a:p>
+            </p:txBody>
+          </p:sp>
+        </mc:Fallback>
+      </mc:AlternateContent>
+      <p:cxnSp>
+        <p:nvCxnSpPr>
+          <p:cNvPr id="123" name="Straight Arrow Connector 122">
+            <a:extLst>
+              <a:ext uri="{FF2B5EF4-FFF2-40B4-BE49-F238E27FC236}">
+                <a16:creationId xmlns:a16="http://schemas.microsoft.com/office/drawing/2014/main" id="{B5A47DD6-E0DC-B0F2-7C7B-E420A0E20D30}"/>
+              </a:ext>
+            </a:extLst>
+          </p:cNvPr>
+          <p:cNvCxnSpPr>
+            <a:stCxn id="63" idx="2"/>
+            <a:endCxn id="64" idx="0"/>
+          </p:cNvCxnSpPr>
+          <p:nvPr/>
+        </p:nvCxnSpPr>
+        <p:spPr>
+          <a:xfrm>
+            <a:off x="18764658" y="3890990"/>
+            <a:ext cx="1" cy="418710"/>
+          </a:xfrm>
+          <a:prstGeom prst="straightConnector1">
+            <a:avLst/>
+          </a:prstGeom>
+          <a:ln>
+            <a:solidFill>
+              <a:schemeClr val="tx1"/>
+            </a:solidFill>
+            <a:tailEnd type="triangle" w="med" len="lg"/>
+          </a:ln>
+        </p:spPr>
+        <p:style>
+          <a:lnRef idx="2">
+            <a:schemeClr val="accent1"/>
+          </a:lnRef>
+          <a:fillRef idx="0">
+            <a:schemeClr val="accent1"/>
+          </a:fillRef>
+          <a:effectRef idx="1">
+            <a:schemeClr val="accent1"/>
+          </a:effectRef>
+          <a:fontRef idx="minor">
+            <a:schemeClr val="tx1"/>
+          </a:fontRef>
+        </p:style>
+      </p:cxnSp>
+      <p:sp>
+        <p:nvSpPr>
+          <p:cNvPr id="130" name="Rectangle: Rounded Corners 129">
+            <a:extLst>
+              <a:ext uri="{FF2B5EF4-FFF2-40B4-BE49-F238E27FC236}">
+                <a16:creationId xmlns:a16="http://schemas.microsoft.com/office/drawing/2014/main" id="{AE6252B7-0B47-D446-EC58-3998F967477A}"/>
+              </a:ext>
+            </a:extLst>
+          </p:cNvPr>
+          <p:cNvSpPr/>
+          <p:nvPr/>
+        </p:nvSpPr>
+        <p:spPr>
+          <a:xfrm>
+            <a:off x="6800080" y="1200160"/>
+            <a:ext cx="1409421" cy="424801"/>
+          </a:xfrm>
+          <a:prstGeom prst="roundRect">
+            <a:avLst/>
+          </a:prstGeom>
+          <a:solidFill>
+            <a:schemeClr val="tx2">
+              <a:lumMod val="25000"/>
+              <a:lumOff val="75000"/>
+            </a:schemeClr>
+          </a:solidFill>
+          <a:ln w="19050">
+            <a:solidFill>
+              <a:schemeClr val="tx2">
+                <a:lumMod val="75000"/>
+                <a:lumOff val="25000"/>
+              </a:schemeClr>
+            </a:solidFill>
+          </a:ln>
+        </p:spPr>
+        <p:style>
+          <a:lnRef idx="2">
+            <a:schemeClr val="accent1">
+              <a:shade val="15000"/>
+            </a:schemeClr>
+          </a:lnRef>
+          <a:fillRef idx="1">
+            <a:schemeClr val="accent1"/>
+          </a:fillRef>
+          <a:effectRef idx="0">
+            <a:schemeClr val="accent1"/>
+          </a:effectRef>
+          <a:fontRef idx="minor">
+            <a:schemeClr val="lt1"/>
+          </a:fontRef>
+        </p:style>
+        <p:txBody>
+          <a:bodyPr rtlCol="0" anchor="ctr"/>
+          <a:lstStyle/>
+          <a:p>
+            <a:pPr algn="ctr"/>
+            <a:r>
+              <a:rPr lang="en-US" sz="1400" b="1" dirty="0">
+                <a:solidFill>
+                  <a:schemeClr val="tx1"/>
+                </a:solidFill>
+                <a:latin typeface="Times New Roman" panose="02020603050405020304" pitchFamily="18" charset="0"/>
+                <a:cs typeface="Times New Roman" panose="02020603050405020304" pitchFamily="18" charset="0"/>
+              </a:rPr>
+              <a:t>PI Controller</a:t>
+            </a:r>
+            <a:endParaRPr lang="en-CA" sz="1400" b="1" dirty="0">
+              <a:solidFill>
+                <a:schemeClr val="tx1"/>
+              </a:solidFill>
+              <a:latin typeface="Times New Roman" panose="02020603050405020304" pitchFamily="18" charset="0"/>
+              <a:cs typeface="Times New Roman" panose="02020603050405020304" pitchFamily="18" charset="0"/>
+            </a:endParaRPr>
+          </a:p>
+        </p:txBody>
+      </p:sp>
+      <p:sp>
+        <p:nvSpPr>
+          <p:cNvPr id="132" name="Rectangle: Rounded Corners 131">
+            <a:extLst>
+              <a:ext uri="{FF2B5EF4-FFF2-40B4-BE49-F238E27FC236}">
+                <a16:creationId xmlns:a16="http://schemas.microsoft.com/office/drawing/2014/main" id="{26E1D680-016A-243E-3386-136555BA0F8F}"/>
+              </a:ext>
+            </a:extLst>
+          </p:cNvPr>
+          <p:cNvSpPr/>
+          <p:nvPr/>
+        </p:nvSpPr>
+        <p:spPr>
+          <a:xfrm>
+            <a:off x="6800080" y="1930782"/>
+            <a:ext cx="1409421" cy="424801"/>
+          </a:xfrm>
+          <a:prstGeom prst="roundRect">
+            <a:avLst/>
+          </a:prstGeom>
+          <a:solidFill>
+            <a:schemeClr val="tx2">
+              <a:lumMod val="25000"/>
+              <a:lumOff val="75000"/>
+            </a:schemeClr>
+          </a:solidFill>
+          <a:ln w="19050">
+            <a:solidFill>
+              <a:schemeClr val="tx2">
+                <a:lumMod val="75000"/>
+                <a:lumOff val="25000"/>
+              </a:schemeClr>
+            </a:solidFill>
+          </a:ln>
+        </p:spPr>
+        <p:style>
+          <a:lnRef idx="2">
+            <a:schemeClr val="accent1">
+              <a:shade val="15000"/>
+            </a:schemeClr>
+          </a:lnRef>
+          <a:fillRef idx="1">
+            <a:schemeClr val="accent1"/>
+          </a:fillRef>
+          <a:effectRef idx="0">
+            <a:schemeClr val="accent1"/>
+          </a:effectRef>
+          <a:fontRef idx="minor">
+            <a:schemeClr val="lt1"/>
+          </a:fontRef>
+        </p:style>
+        <p:txBody>
+          <a:bodyPr rtlCol="0" anchor="ctr"/>
+          <a:lstStyle/>
+          <a:p>
+            <a:pPr algn="ctr"/>
+            <a:r>
+              <a:rPr lang="en-US" sz="1400" b="1" dirty="0">
+                <a:solidFill>
+                  <a:schemeClr val="tx1"/>
+                </a:solidFill>
+                <a:latin typeface="Times New Roman" panose="02020603050405020304" pitchFamily="18" charset="0"/>
+                <a:cs typeface="Times New Roman" panose="02020603050405020304" pitchFamily="18" charset="0"/>
+              </a:rPr>
+              <a:t>PI Controller</a:t>
+            </a:r>
+            <a:endParaRPr lang="en-CA" sz="1400" b="1" dirty="0">
+              <a:solidFill>
+                <a:schemeClr val="tx1"/>
+              </a:solidFill>
+              <a:latin typeface="Times New Roman" panose="02020603050405020304" pitchFamily="18" charset="0"/>
+              <a:cs typeface="Times New Roman" panose="02020603050405020304" pitchFamily="18" charset="0"/>
+            </a:endParaRPr>
+          </a:p>
+        </p:txBody>
+      </p:sp>
+      <mc:AlternateContent xmlns:mc="http://schemas.openxmlformats.org/markup-compatibility/2006">
+        <mc:Choice xmlns:a14="http://schemas.microsoft.com/office/drawing/2010/main" Requires="a14">
+          <p:sp>
+            <p:nvSpPr>
+              <p:cNvPr id="133" name="TextBox 132">
+                <a:extLst>
+                  <a:ext uri="{FF2B5EF4-FFF2-40B4-BE49-F238E27FC236}">
+                    <a16:creationId xmlns:a16="http://schemas.microsoft.com/office/drawing/2014/main" id="{50BAC518-4969-8D68-1E4F-9B6446879155}"/>
+                  </a:ext>
+                </a:extLst>
+              </p:cNvPr>
+              <p:cNvSpPr txBox="1"/>
+              <p:nvPr/>
+            </p:nvSpPr>
+            <p:spPr>
+              <a:xfrm>
+                <a:off x="9222732" y="1110784"/>
+                <a:ext cx="304800" cy="307777"/>
+              </a:xfrm>
+              <a:prstGeom prst="rect">
+                <a:avLst/>
+              </a:prstGeom>
+              <a:noFill/>
+            </p:spPr>
+            <p:txBody>
+              <a:bodyPr wrap="square" rtlCol="0">
+                <a:spAutoFit/>
+              </a:bodyPr>
+              <a:lstStyle/>
+              <a:p>
+                <a:pPr/>
+                <a14:m>
+                  <m:oMathPara xmlns:m="http://schemas.openxmlformats.org/officeDocument/2006/math">
+                    <m:oMath>
+                      <m:sSubSup>
+                        <m:sSubSupPr>
+                          <m:ctrlPr>
+                            <a:rPr lang="en-US" sz="1400" i="1" smtClean="0">
+                              <a:latin typeface="Cambria Math" panose="02040503050406030204" pitchFamily="18" charset="0"/>
+                            </a:rPr>
+                          </m:ctrlPr>
+                        </m:sSubSupPr>
+                        <m:e>
+                          <m:r>
+                            <a:rPr lang="en-US" sz="1400" i="1" smtClean="0">
+                              <a:latin typeface="Cambria Math" panose="02040503050406030204" pitchFamily="18" charset="0"/>
+                            </a:rPr>
+                            <m:t>𝑣</m:t>
+                          </m:r>
+                        </m:e>
+                        <m:sub>
+                          <m:r>
+                            <a:rPr lang="en-US" sz="1400" i="1" smtClean="0">
+                              <a:latin typeface="Cambria Math" panose="02040503050406030204" pitchFamily="18" charset="0"/>
+                            </a:rPr>
+                            <m:t>𝑑</m:t>
+                          </m:r>
+                        </m:sub>
+                        <m:sup>
+                          <m:r>
+                            <a:rPr lang="en-US" sz="1400" i="1" smtClean="0">
+                              <a:latin typeface="Cambria Math" panose="02040503050406030204" pitchFamily="18" charset="0"/>
+                            </a:rPr>
+                            <m:t>∗</m:t>
+                          </m:r>
+                        </m:sup>
+                      </m:sSubSup>
+                    </m:oMath>
+                  </m:oMathPara>
+                </a14:m>
+                <a:endParaRPr lang="en-US" sz="1400" dirty="0">
+                  <a:latin typeface="Times New Roman" panose="02020603050405020304" pitchFamily="18" charset="0"/>
+                  <a:cs typeface="Times New Roman" panose="02020603050405020304" pitchFamily="18" charset="0"/>
+                </a:endParaRPr>
+              </a:p>
+            </p:txBody>
+          </p:sp>
+        </mc:Choice>
+        <mc:Fallback>
+          <p:sp>
+            <p:nvSpPr>
+              <p:cNvPr id="133" name="TextBox 132">
+                <a:extLst>
+                  <a:ext uri="{FF2B5EF4-FFF2-40B4-BE49-F238E27FC236}">
+                    <a16:creationId xmlns:a16="http://schemas.microsoft.com/office/drawing/2014/main" id="{50BAC518-4969-8D68-1E4F-9B6446879155}"/>
+                  </a:ext>
+                </a:extLst>
+              </p:cNvPr>
+              <p:cNvSpPr txBox="1">
+                <a:spLocks noRot="1" noChangeAspect="1" noMove="1" noResize="1" noEditPoints="1" noAdjustHandles="1" noChangeArrowheads="1" noChangeShapeType="1" noTextEdit="1"/>
+              </p:cNvSpPr>
+              <p:nvPr/>
+            </p:nvSpPr>
+            <p:spPr>
+              <a:xfrm>
+                <a:off x="9222732" y="1110784"/>
+                <a:ext cx="304800" cy="307777"/>
+              </a:xfrm>
+              <a:prstGeom prst="rect">
+                <a:avLst/>
+              </a:prstGeom>
+              <a:blipFill>
+                <a:blip r:embed="rId23"/>
+                <a:stretch>
+                  <a:fillRect r="-2000"/>
+                </a:stretch>
+              </a:blipFill>
+            </p:spPr>
+            <p:txBody>
+              <a:bodyPr/>
+              <a:lstStyle/>
+              <a:p>
+                <a:r>
+                  <a:rPr lang="en-CA">
+                    <a:noFill/>
+                  </a:rPr>
+                  <a:t> </a:t>
+                </a:r>
+              </a:p>
+            </p:txBody>
+          </p:sp>
+        </mc:Fallback>
+      </mc:AlternateContent>
+      <mc:AlternateContent xmlns:mc="http://schemas.openxmlformats.org/markup-compatibility/2006">
+        <mc:Choice xmlns:a14="http://schemas.microsoft.com/office/drawing/2010/main" Requires="a14">
+          <p:sp>
+            <p:nvSpPr>
+              <p:cNvPr id="134" name="TextBox 133">
+                <a:extLst>
+                  <a:ext uri="{FF2B5EF4-FFF2-40B4-BE49-F238E27FC236}">
+                    <a16:creationId xmlns:a16="http://schemas.microsoft.com/office/drawing/2014/main" id="{C1203054-8853-4B5E-5D11-A8E5A28B9B3B}"/>
+                  </a:ext>
+                </a:extLst>
+              </p:cNvPr>
+              <p:cNvSpPr txBox="1"/>
+              <p:nvPr/>
+            </p:nvSpPr>
+            <p:spPr>
+              <a:xfrm>
+                <a:off x="9222732" y="1823649"/>
+                <a:ext cx="304800" cy="324384"/>
+              </a:xfrm>
+              <a:prstGeom prst="rect">
+                <a:avLst/>
+              </a:prstGeom>
+              <a:noFill/>
+            </p:spPr>
+            <p:txBody>
+              <a:bodyPr wrap="square" rtlCol="0">
+                <a:spAutoFit/>
+              </a:bodyPr>
+              <a:lstStyle/>
+              <a:p>
+                <a:pPr/>
+                <a14:m>
+                  <m:oMathPara xmlns:m="http://schemas.openxmlformats.org/officeDocument/2006/math">
+                    <m:oMath>
+                      <m:sSubSup>
+                        <m:sSubSupPr>
+                          <m:ctrlPr>
+                            <a:rPr lang="en-US" sz="1400" b="0" i="1" smtClean="0">
+                              <a:latin typeface="Cambria Math" panose="02040503050406030204" pitchFamily="18" charset="0"/>
+                            </a:rPr>
+                          </m:ctrlPr>
+                        </m:sSubSupPr>
+                        <m:e>
+                          <m:r>
+                            <a:rPr lang="en-US" sz="1400" b="0" i="1" smtClean="0">
+                              <a:latin typeface="Cambria Math" panose="02040503050406030204" pitchFamily="18" charset="0"/>
+                            </a:rPr>
+                            <m:t>𝑣</m:t>
+                          </m:r>
+                        </m:e>
+                        <m:sub>
+                          <m:r>
+                            <a:rPr lang="en-US" sz="1400" b="0" i="1" smtClean="0">
+                              <a:latin typeface="Cambria Math" panose="02040503050406030204" pitchFamily="18" charset="0"/>
+                            </a:rPr>
+                            <m:t>𝑞</m:t>
+                          </m:r>
+                        </m:sub>
+                        <m:sup>
+                          <m:r>
+                            <a:rPr lang="en-US" sz="1400" b="0" i="1" smtClean="0">
+                              <a:latin typeface="Cambria Math" panose="02040503050406030204" pitchFamily="18" charset="0"/>
+                            </a:rPr>
+                            <m:t>∗</m:t>
+                          </m:r>
+                        </m:sup>
+                      </m:sSubSup>
+                    </m:oMath>
+                  </m:oMathPara>
+                </a14:m>
+                <a:endParaRPr lang="en-US" sz="1400" dirty="0">
+                  <a:latin typeface="Times New Roman" panose="02020603050405020304" pitchFamily="18" charset="0"/>
+                  <a:cs typeface="Times New Roman" panose="02020603050405020304" pitchFamily="18" charset="0"/>
+                </a:endParaRPr>
+              </a:p>
+            </p:txBody>
+          </p:sp>
+        </mc:Choice>
+        <mc:Fallback>
+          <p:sp>
+            <p:nvSpPr>
+              <p:cNvPr id="134" name="TextBox 133">
+                <a:extLst>
+                  <a:ext uri="{FF2B5EF4-FFF2-40B4-BE49-F238E27FC236}">
+                    <a16:creationId xmlns:a16="http://schemas.microsoft.com/office/drawing/2014/main" id="{C1203054-8853-4B5E-5D11-A8E5A28B9B3B}"/>
+                  </a:ext>
+                </a:extLst>
+              </p:cNvPr>
+              <p:cNvSpPr txBox="1">
+                <a:spLocks noRot="1" noChangeAspect="1" noMove="1" noResize="1" noEditPoints="1" noAdjustHandles="1" noChangeArrowheads="1" noChangeShapeType="1" noTextEdit="1"/>
+              </p:cNvSpPr>
+              <p:nvPr/>
+            </p:nvSpPr>
+            <p:spPr>
+              <a:xfrm>
+                <a:off x="9222732" y="1823649"/>
+                <a:ext cx="304800" cy="324384"/>
+              </a:xfrm>
+              <a:prstGeom prst="rect">
+                <a:avLst/>
+              </a:prstGeom>
+              <a:blipFill>
+                <a:blip r:embed="rId24"/>
+                <a:stretch>
+                  <a:fillRect/>
+                </a:stretch>
+              </a:blipFill>
+            </p:spPr>
+            <p:txBody>
+              <a:bodyPr/>
+              <a:lstStyle/>
+              <a:p>
+                <a:r>
+                  <a:rPr lang="en-CA">
+                    <a:noFill/>
+                  </a:rPr>
+                  <a:t> </a:t>
+                </a:r>
+              </a:p>
+            </p:txBody>
+          </p:sp>
+        </mc:Fallback>
+      </mc:AlternateContent>
+      <p:cxnSp>
+        <p:nvCxnSpPr>
+          <p:cNvPr id="135" name="Straight Arrow Connector 134">
+            <a:extLst>
+              <a:ext uri="{FF2B5EF4-FFF2-40B4-BE49-F238E27FC236}">
+                <a16:creationId xmlns:a16="http://schemas.microsoft.com/office/drawing/2014/main" id="{92A883F1-56E0-FF51-8C48-2880A80E5F2A}"/>
+              </a:ext>
+            </a:extLst>
+          </p:cNvPr>
+          <p:cNvCxnSpPr>
+            <a:cxnSpLocks/>
+          </p:cNvCxnSpPr>
+          <p:nvPr/>
+        </p:nvCxnSpPr>
+        <p:spPr>
+          <a:xfrm>
+            <a:off x="9138376" y="1412493"/>
+            <a:ext cx="648000" cy="0"/>
+          </a:xfrm>
+          <a:prstGeom prst="straightConnector1">
+            <a:avLst/>
+          </a:prstGeom>
+          <a:ln>
+            <a:solidFill>
+              <a:schemeClr val="tx1"/>
+            </a:solidFill>
+            <a:tailEnd type="triangle" w="med" len="lg"/>
+          </a:ln>
+        </p:spPr>
+        <p:style>
+          <a:lnRef idx="2">
+            <a:schemeClr val="accent1"/>
+          </a:lnRef>
+          <a:fillRef idx="0">
+            <a:schemeClr val="accent1"/>
+          </a:fillRef>
+          <a:effectRef idx="1">
+            <a:schemeClr val="accent1"/>
+          </a:effectRef>
+          <a:fontRef idx="minor">
+            <a:schemeClr val="tx1"/>
+          </a:fontRef>
+        </p:style>
+      </p:cxnSp>
+      <p:cxnSp>
+        <p:nvCxnSpPr>
+          <p:cNvPr id="136" name="Straight Arrow Connector 135">
+            <a:extLst>
+              <a:ext uri="{FF2B5EF4-FFF2-40B4-BE49-F238E27FC236}">
+                <a16:creationId xmlns:a16="http://schemas.microsoft.com/office/drawing/2014/main" id="{E9E4BB1E-3C86-A766-64B4-5F89701696B1}"/>
+              </a:ext>
+            </a:extLst>
+          </p:cNvPr>
+          <p:cNvCxnSpPr>
+            <a:cxnSpLocks/>
+          </p:cNvCxnSpPr>
+          <p:nvPr/>
+        </p:nvCxnSpPr>
+        <p:spPr>
+          <a:xfrm>
+            <a:off x="9138376" y="2143823"/>
+            <a:ext cx="648000" cy="0"/>
+          </a:xfrm>
+          <a:prstGeom prst="straightConnector1">
+            <a:avLst/>
+          </a:prstGeom>
+          <a:ln>
+            <a:solidFill>
+              <a:schemeClr val="tx1"/>
+            </a:solidFill>
+            <a:tailEnd type="triangle" w="med" len="lg"/>
+          </a:ln>
+        </p:spPr>
+        <p:style>
+          <a:lnRef idx="2">
+            <a:schemeClr val="accent1"/>
+          </a:lnRef>
+          <a:fillRef idx="0">
+            <a:schemeClr val="accent1"/>
+          </a:fillRef>
+          <a:effectRef idx="1">
+            <a:schemeClr val="accent1"/>
+          </a:effectRef>
+          <a:fontRef idx="minor">
+            <a:schemeClr val="tx1"/>
+          </a:fontRef>
+        </p:style>
+      </p:cxnSp>
+      <mc:AlternateContent xmlns:mc="http://schemas.openxmlformats.org/markup-compatibility/2006">
+        <mc:Choice xmlns:a14="http://schemas.microsoft.com/office/drawing/2010/main" Requires="a14">
+          <p:sp>
+            <p:nvSpPr>
+              <p:cNvPr id="141" name="Rectangle: Rounded Corners 140">
+                <a:extLst>
+                  <a:ext uri="{FF2B5EF4-FFF2-40B4-BE49-F238E27FC236}">
+                    <a16:creationId xmlns:a16="http://schemas.microsoft.com/office/drawing/2014/main" id="{84F7464F-909B-9E92-3E87-F9D98C534B02}"/>
+                  </a:ext>
+                </a:extLst>
+              </p:cNvPr>
+              <p:cNvSpPr/>
+              <p:nvPr/>
+            </p:nvSpPr>
+            <p:spPr>
+              <a:xfrm>
+                <a:off x="9791187" y="2778326"/>
+                <a:ext cx="1231364" cy="424802"/>
+              </a:xfrm>
+              <a:prstGeom prst="roundRect">
+                <a:avLst/>
+              </a:prstGeom>
+              <a:solidFill>
+                <a:schemeClr val="accent6">
+                  <a:lumMod val="20000"/>
+                  <a:lumOff val="80000"/>
+                </a:schemeClr>
+              </a:solidFill>
+              <a:ln w="19050">
+                <a:solidFill>
+                  <a:schemeClr val="accent6">
+                    <a:lumMod val="75000"/>
+                  </a:schemeClr>
+                </a:solidFill>
+              </a:ln>
+            </p:spPr>
+            <p:style>
+              <a:lnRef idx="2">
+                <a:schemeClr val="accent1">
+                  <a:shade val="15000"/>
+                </a:schemeClr>
+              </a:lnRef>
+              <a:fillRef idx="1">
+                <a:schemeClr val="accent1"/>
+              </a:fillRef>
+              <a:effectRef idx="0">
+                <a:schemeClr val="accent1"/>
+              </a:effectRef>
+              <a:fontRef idx="minor">
+                <a:schemeClr val="lt1"/>
+              </a:fontRef>
+            </p:style>
+            <p:txBody>
+              <a:bodyPr rtlCol="0" anchor="ctr"/>
+              <a:lstStyle/>
+              <a:p>
+                <a:pPr algn="ctr"/>
+                <a14:m>
+                  <m:oMathPara xmlns:m="http://schemas.openxmlformats.org/officeDocument/2006/math">
+                    <m:oMath>
+                      <m:sSub>
+                        <m:sSubPr>
+                          <m:ctrlPr>
+                            <a:rPr lang="en-CA" sz="1100" b="1" i="1">
+                              <a:solidFill>
+                                <a:schemeClr val="tx1"/>
+                              </a:solidFill>
+                              <a:latin typeface="Cambria Math" panose="02040503050406030204" pitchFamily="18" charset="0"/>
+                              <a:ea typeface="Cambria Math" panose="02040503050406030204" pitchFamily="18" charset="0"/>
+                            </a:rPr>
+                          </m:ctrlPr>
+                        </m:sSubPr>
+                        <m:e>
+                          <m:r>
+                            <a:rPr lang="en-CA" sz="1100" b="1" i="1">
+                              <a:solidFill>
+                                <a:schemeClr val="tx1"/>
+                              </a:solidFill>
+                              <a:latin typeface="Cambria Math" panose="02040503050406030204" pitchFamily="18" charset="0"/>
+                              <a:ea typeface="Cambria Math" panose="02040503050406030204" pitchFamily="18" charset="0"/>
+                            </a:rPr>
+                            <m:t>𝜽</m:t>
+                          </m:r>
+                        </m:e>
+                        <m:sub>
+                          <m:r>
+                            <a:rPr lang="en-CA" sz="1100" b="1" i="1">
+                              <a:solidFill>
+                                <a:schemeClr val="tx1"/>
+                              </a:solidFill>
+                              <a:latin typeface="Cambria Math" panose="02040503050406030204" pitchFamily="18" charset="0"/>
+                              <a:ea typeface="Cambria Math" panose="02040503050406030204" pitchFamily="18" charset="0"/>
+                            </a:rPr>
+                            <m:t>𝒆</m:t>
+                          </m:r>
+                        </m:sub>
+                      </m:sSub>
+                    </m:oMath>
+                  </m:oMathPara>
+                </a14:m>
+                <a:endParaRPr lang="en-US" sz="1100" b="1" i="1" dirty="0">
+                  <a:solidFill>
+                    <a:schemeClr val="tx1"/>
+                  </a:solidFill>
+                  <a:latin typeface="Times New Roman" panose="02020603050405020304" pitchFamily="18" charset="0"/>
+                  <a:ea typeface="Cambria Math" panose="02040503050406030204" pitchFamily="18" charset="0"/>
+                  <a:cs typeface="Times New Roman" panose="02020603050405020304" pitchFamily="18" charset="0"/>
+                </a:endParaRPr>
+              </a:p>
+              <a:p>
+                <a:pPr algn="ctr"/>
+                <a:r>
+                  <a:rPr lang="en-US" sz="1100" dirty="0">
+                    <a:solidFill>
+                      <a:schemeClr val="tx1"/>
+                    </a:solidFill>
+                    <a:latin typeface="Times New Roman" panose="02020603050405020304" pitchFamily="18" charset="0"/>
+                    <a:ea typeface="Cambria Math" panose="02040503050406030204" pitchFamily="18" charset="0"/>
+                    <a:cs typeface="Times New Roman" panose="02020603050405020304" pitchFamily="18" charset="0"/>
+                  </a:rPr>
+                  <a:t>(Electrical Angle)</a:t>
+                </a:r>
+              </a:p>
+            </p:txBody>
+          </p:sp>
+        </mc:Choice>
+        <mc:Fallback>
+          <p:sp>
+            <p:nvSpPr>
+              <p:cNvPr id="141" name="Rectangle: Rounded Corners 140">
+                <a:extLst>
+                  <a:ext uri="{FF2B5EF4-FFF2-40B4-BE49-F238E27FC236}">
+                    <a16:creationId xmlns:a16="http://schemas.microsoft.com/office/drawing/2014/main" id="{84F7464F-909B-9E92-3E87-F9D98C534B02}"/>
+                  </a:ext>
+                </a:extLst>
+              </p:cNvPr>
+              <p:cNvSpPr>
+                <a:spLocks noRot="1" noChangeAspect="1" noMove="1" noResize="1" noEditPoints="1" noAdjustHandles="1" noChangeArrowheads="1" noChangeShapeType="1" noTextEdit="1"/>
+              </p:cNvSpPr>
+              <p:nvPr/>
+            </p:nvSpPr>
+            <p:spPr>
+              <a:xfrm>
+                <a:off x="9791187" y="2778326"/>
+                <a:ext cx="1231364" cy="424802"/>
+              </a:xfrm>
+              <a:prstGeom prst="roundRect">
+                <a:avLst/>
+              </a:prstGeom>
+              <a:blipFill>
+                <a:blip r:embed="rId25"/>
+                <a:stretch>
+                  <a:fillRect b="-9722"/>
+                </a:stretch>
+              </a:blipFill>
+              <a:ln w="19050">
+                <a:solidFill>
+                  <a:schemeClr val="accent6">
+                    <a:lumMod val="75000"/>
+                  </a:schemeClr>
+                </a:solidFill>
+              </a:ln>
+            </p:spPr>
+            <p:txBody>
+              <a:bodyPr/>
+              <a:lstStyle/>
+              <a:p>
+                <a:r>
+                  <a:rPr lang="en-CA">
+                    <a:noFill/>
+                  </a:rPr>
+                  <a:t> </a:t>
+                </a:r>
+              </a:p>
+            </p:txBody>
+          </p:sp>
+        </mc:Fallback>
+      </mc:AlternateContent>
+      <p:cxnSp>
+        <p:nvCxnSpPr>
+          <p:cNvPr id="143" name="Straight Arrow Connector 142">
+            <a:extLst>
+              <a:ext uri="{FF2B5EF4-FFF2-40B4-BE49-F238E27FC236}">
+                <a16:creationId xmlns:a16="http://schemas.microsoft.com/office/drawing/2014/main" id="{4876C695-8DF7-A639-AD69-462F5570ADB6}"/>
+              </a:ext>
+            </a:extLst>
+          </p:cNvPr>
+          <p:cNvCxnSpPr>
+            <a:stCxn id="141" idx="0"/>
+            <a:endCxn id="96" idx="2"/>
+          </p:cNvCxnSpPr>
+          <p:nvPr/>
+        </p:nvCxnSpPr>
+        <p:spPr>
+          <a:xfrm flipV="1">
+            <a:off x="10406869" y="2406353"/>
+            <a:ext cx="0" cy="371973"/>
+          </a:xfrm>
+          <a:prstGeom prst="straightConnector1">
+            <a:avLst/>
+          </a:prstGeom>
+          <a:ln>
+            <a:solidFill>
+              <a:schemeClr val="tx1"/>
+            </a:solidFill>
+            <a:tailEnd type="triangle" w="med" len="lg"/>
+          </a:ln>
+        </p:spPr>
+        <p:style>
+          <a:lnRef idx="2">
+            <a:schemeClr val="accent1"/>
+          </a:lnRef>
+          <a:fillRef idx="0">
+            <a:schemeClr val="accent1"/>
+          </a:fillRef>
+          <a:effectRef idx="1">
+            <a:schemeClr val="accent1"/>
+          </a:effectRef>
+          <a:fontRef idx="minor">
+            <a:schemeClr val="tx1"/>
+          </a:fontRef>
+        </p:style>
+      </p:cxnSp>
+      <mc:AlternateContent xmlns:mc="http://schemas.openxmlformats.org/markup-compatibility/2006">
+        <mc:Choice xmlns:a14="http://schemas.microsoft.com/office/drawing/2010/main" Requires="a14">
+          <p:sp>
+            <p:nvSpPr>
+              <p:cNvPr id="145" name="Rectangle: Rounded Corners 144">
+                <a:extLst>
+                  <a:ext uri="{FF2B5EF4-FFF2-40B4-BE49-F238E27FC236}">
+                    <a16:creationId xmlns:a16="http://schemas.microsoft.com/office/drawing/2014/main" id="{48299944-14A2-5DD1-BF41-C465B4BD9B14}"/>
+                  </a:ext>
+                </a:extLst>
+              </p:cNvPr>
+              <p:cNvSpPr/>
+              <p:nvPr/>
+            </p:nvSpPr>
+            <p:spPr>
+              <a:xfrm>
+                <a:off x="11838956" y="5174349"/>
+                <a:ext cx="1231364" cy="424802"/>
+              </a:xfrm>
+              <a:prstGeom prst="roundRect">
+                <a:avLst/>
+              </a:prstGeom>
+              <a:solidFill>
+                <a:schemeClr val="accent6">
+                  <a:lumMod val="20000"/>
+                  <a:lumOff val="80000"/>
+                </a:schemeClr>
+              </a:solidFill>
+              <a:ln w="19050">
+                <a:solidFill>
+                  <a:schemeClr val="accent6">
+                    <a:lumMod val="75000"/>
+                  </a:schemeClr>
+                </a:solidFill>
+              </a:ln>
+            </p:spPr>
+            <p:style>
+              <a:lnRef idx="2">
+                <a:schemeClr val="accent1">
+                  <a:shade val="15000"/>
+                </a:schemeClr>
+              </a:lnRef>
+              <a:fillRef idx="1">
+                <a:schemeClr val="accent1"/>
+              </a:fillRef>
+              <a:effectRef idx="0">
+                <a:schemeClr val="accent1"/>
+              </a:effectRef>
+              <a:fontRef idx="minor">
+                <a:schemeClr val="lt1"/>
+              </a:fontRef>
+            </p:style>
+            <p:txBody>
+              <a:bodyPr rtlCol="0" anchor="ctr"/>
+              <a:lstStyle/>
+              <a:p>
+                <a:pPr algn="ctr"/>
+                <a14:m>
+                  <m:oMathPara xmlns:m="http://schemas.openxmlformats.org/officeDocument/2006/math">
+                    <m:oMath>
+                      <m:sSub>
+                        <m:sSubPr>
+                          <m:ctrlPr>
+                            <a:rPr lang="en-CA" sz="1100" b="1" i="1">
+                              <a:solidFill>
+                                <a:schemeClr val="tx1"/>
+                              </a:solidFill>
+                              <a:latin typeface="Cambria Math" panose="02040503050406030204" pitchFamily="18" charset="0"/>
+                              <a:ea typeface="Cambria Math" panose="02040503050406030204" pitchFamily="18" charset="0"/>
+                            </a:rPr>
+                          </m:ctrlPr>
+                        </m:sSubPr>
+                        <m:e>
+                          <m:r>
+                            <a:rPr lang="en-CA" sz="1100" b="1" i="1">
+                              <a:solidFill>
+                                <a:schemeClr val="tx1"/>
+                              </a:solidFill>
+                              <a:latin typeface="Cambria Math" panose="02040503050406030204" pitchFamily="18" charset="0"/>
+                              <a:ea typeface="Cambria Math" panose="02040503050406030204" pitchFamily="18" charset="0"/>
+                            </a:rPr>
+                            <m:t>𝜽</m:t>
+                          </m:r>
+                        </m:e>
+                        <m:sub>
+                          <m:r>
+                            <a:rPr lang="en-CA" sz="1100" b="1" i="1">
+                              <a:solidFill>
+                                <a:schemeClr val="tx1"/>
+                              </a:solidFill>
+                              <a:latin typeface="Cambria Math" panose="02040503050406030204" pitchFamily="18" charset="0"/>
+                              <a:ea typeface="Cambria Math" panose="02040503050406030204" pitchFamily="18" charset="0"/>
+                            </a:rPr>
+                            <m:t>𝒆</m:t>
+                          </m:r>
+                        </m:sub>
+                      </m:sSub>
+                    </m:oMath>
+                  </m:oMathPara>
+                </a14:m>
+                <a:endParaRPr lang="en-US" sz="1100" b="1" i="1" dirty="0">
+                  <a:solidFill>
+                    <a:schemeClr val="tx1"/>
+                  </a:solidFill>
+                  <a:latin typeface="Times New Roman" panose="02020603050405020304" pitchFamily="18" charset="0"/>
+                  <a:ea typeface="Cambria Math" panose="02040503050406030204" pitchFamily="18" charset="0"/>
+                  <a:cs typeface="Times New Roman" panose="02020603050405020304" pitchFamily="18" charset="0"/>
+                </a:endParaRPr>
+              </a:p>
+              <a:p>
+                <a:pPr algn="ctr"/>
+                <a:r>
+                  <a:rPr lang="en-US" sz="1100" dirty="0">
+                    <a:solidFill>
+                      <a:schemeClr val="tx1"/>
+                    </a:solidFill>
+                    <a:latin typeface="Times New Roman" panose="02020603050405020304" pitchFamily="18" charset="0"/>
+                    <a:ea typeface="Cambria Math" panose="02040503050406030204" pitchFamily="18" charset="0"/>
+                    <a:cs typeface="Times New Roman" panose="02020603050405020304" pitchFamily="18" charset="0"/>
+                  </a:rPr>
+                  <a:t>(Electrical Angle)</a:t>
+                </a:r>
+              </a:p>
+            </p:txBody>
+          </p:sp>
+        </mc:Choice>
+        <mc:Fallback>
+          <p:sp>
+            <p:nvSpPr>
+              <p:cNvPr id="145" name="Rectangle: Rounded Corners 144">
+                <a:extLst>
+                  <a:ext uri="{FF2B5EF4-FFF2-40B4-BE49-F238E27FC236}">
+                    <a16:creationId xmlns:a16="http://schemas.microsoft.com/office/drawing/2014/main" id="{48299944-14A2-5DD1-BF41-C465B4BD9B14}"/>
+                  </a:ext>
+                </a:extLst>
+              </p:cNvPr>
+              <p:cNvSpPr>
+                <a:spLocks noRot="1" noChangeAspect="1" noMove="1" noResize="1" noEditPoints="1" noAdjustHandles="1" noChangeArrowheads="1" noChangeShapeType="1" noTextEdit="1"/>
+              </p:cNvSpPr>
+              <p:nvPr/>
+            </p:nvSpPr>
+            <p:spPr>
+              <a:xfrm>
+                <a:off x="11838956" y="5174349"/>
+                <a:ext cx="1231364" cy="424802"/>
+              </a:xfrm>
+              <a:prstGeom prst="roundRect">
+                <a:avLst/>
+              </a:prstGeom>
+              <a:blipFill>
+                <a:blip r:embed="rId25"/>
+                <a:stretch>
+                  <a:fillRect b="-9722"/>
+                </a:stretch>
+              </a:blipFill>
+              <a:ln w="19050">
+                <a:solidFill>
+                  <a:schemeClr val="accent6">
+                    <a:lumMod val="75000"/>
+                  </a:schemeClr>
+                </a:solidFill>
+              </a:ln>
+            </p:spPr>
+            <p:txBody>
+              <a:bodyPr/>
+              <a:lstStyle/>
+              <a:p>
+                <a:r>
+                  <a:rPr lang="en-CA">
+                    <a:noFill/>
+                  </a:rPr>
+                  <a:t> </a:t>
+                </a:r>
+              </a:p>
+            </p:txBody>
+          </p:sp>
+        </mc:Fallback>
+      </mc:AlternateContent>
+      <p:cxnSp>
+        <p:nvCxnSpPr>
+          <p:cNvPr id="146" name="Straight Arrow Connector 145">
+            <a:extLst>
+              <a:ext uri="{FF2B5EF4-FFF2-40B4-BE49-F238E27FC236}">
+                <a16:creationId xmlns:a16="http://schemas.microsoft.com/office/drawing/2014/main" id="{03ECC975-04BC-3C46-22F1-D0391C427407}"/>
+              </a:ext>
+            </a:extLst>
+          </p:cNvPr>
+          <p:cNvCxnSpPr>
+            <a:stCxn id="145" idx="0"/>
+          </p:cNvCxnSpPr>
+          <p:nvPr/>
+        </p:nvCxnSpPr>
+        <p:spPr>
+          <a:xfrm flipV="1">
+            <a:off x="12454638" y="4802376"/>
+            <a:ext cx="0" cy="371973"/>
+          </a:xfrm>
+          <a:prstGeom prst="straightConnector1">
+            <a:avLst/>
+          </a:prstGeom>
+          <a:ln>
+            <a:solidFill>
+              <a:schemeClr val="tx1"/>
+            </a:solidFill>
+            <a:tailEnd type="triangle" w="med" len="lg"/>
+          </a:ln>
+        </p:spPr>
+        <p:style>
+          <a:lnRef idx="2">
+            <a:schemeClr val="accent1"/>
+          </a:lnRef>
+          <a:fillRef idx="0">
+            <a:schemeClr val="accent1"/>
+          </a:fillRef>
+          <a:effectRef idx="1">
+            <a:schemeClr val="accent1"/>
+          </a:effectRef>
+          <a:fontRef idx="minor">
+            <a:schemeClr val="tx1"/>
+          </a:fontRef>
+        </p:style>
+      </p:cxnSp>
+      <p:sp>
+        <p:nvSpPr>
+          <p:cNvPr id="150" name="Rectangle: Rounded Corners 149">
+            <a:extLst>
+              <a:ext uri="{FF2B5EF4-FFF2-40B4-BE49-F238E27FC236}">
+                <a16:creationId xmlns:a16="http://schemas.microsoft.com/office/drawing/2014/main" id="{1E99AAFA-1915-2EFA-A985-9BE09C11EE9B}"/>
+              </a:ext>
+            </a:extLst>
+          </p:cNvPr>
+          <p:cNvSpPr>
+            <a:spLocks noChangeAspect="1"/>
+          </p:cNvSpPr>
+          <p:nvPr/>
+        </p:nvSpPr>
+        <p:spPr>
+          <a:xfrm>
+            <a:off x="15443739" y="3578553"/>
+            <a:ext cx="1231364" cy="1231364"/>
+          </a:xfrm>
+          <a:prstGeom prst="roundRect">
+            <a:avLst>
+              <a:gd name="adj" fmla="val 6196"/>
+            </a:avLst>
+          </a:prstGeom>
+          <a:solidFill>
+            <a:schemeClr val="accent6">
+              <a:lumMod val="20000"/>
+              <a:lumOff val="80000"/>
+            </a:schemeClr>
+          </a:solidFill>
+          <a:ln w="19050">
+            <a:solidFill>
+              <a:schemeClr val="accent6">
+                <a:lumMod val="75000"/>
+              </a:schemeClr>
+            </a:solidFill>
+          </a:ln>
+        </p:spPr>
+        <p:style>
+          <a:lnRef idx="2">
+            <a:schemeClr val="accent1">
+              <a:shade val="15000"/>
+            </a:schemeClr>
+          </a:lnRef>
+          <a:fillRef idx="1">
+            <a:schemeClr val="accent1"/>
+          </a:fillRef>
+          <a:effectRef idx="0">
+            <a:schemeClr val="accent1"/>
+          </a:effectRef>
+          <a:fontRef idx="minor">
+            <a:schemeClr val="lt1"/>
+          </a:fontRef>
+        </p:style>
+        <p:txBody>
+          <a:bodyPr rtlCol="0" anchor="ctr" anchorCtr="0"/>
+          <a:lstStyle/>
+          <a:p>
+            <a:pPr algn="ctr"/>
+            <a:r>
+              <a:rPr lang="en-US" sz="1400" b="1" dirty="0">
+                <a:solidFill>
+                  <a:schemeClr val="tx1"/>
+                </a:solidFill>
+                <a:latin typeface="Times New Roman" panose="02020603050405020304" pitchFamily="18" charset="0"/>
+                <a:cs typeface="Times New Roman" panose="02020603050405020304" pitchFamily="18" charset="0"/>
+              </a:rPr>
+              <a:t>Clarke</a:t>
+            </a:r>
+          </a:p>
+          <a:p>
+            <a:pPr algn="ctr"/>
+            <a:r>
+              <a:rPr lang="en-US" sz="1400" b="1" dirty="0">
+                <a:solidFill>
+                  <a:schemeClr val="tx1"/>
+                </a:solidFill>
+                <a:latin typeface="Times New Roman" panose="02020603050405020304" pitchFamily="18" charset="0"/>
+                <a:cs typeface="Times New Roman" panose="02020603050405020304" pitchFamily="18" charset="0"/>
+              </a:rPr>
+              <a:t>(</a:t>
+            </a:r>
+            <a:r>
+              <a:rPr lang="en-US" sz="1400" b="1" dirty="0" err="1">
+                <a:solidFill>
+                  <a:schemeClr val="tx1"/>
+                </a:solidFill>
+                <a:latin typeface="Times New Roman" panose="02020603050405020304" pitchFamily="18" charset="0"/>
+                <a:cs typeface="Times New Roman" panose="02020603050405020304" pitchFamily="18" charset="0"/>
+              </a:rPr>
+              <a:t>abc</a:t>
+            </a:r>
+            <a:r>
+              <a:rPr lang="en-US" sz="1400" b="1" dirty="0">
+                <a:solidFill>
+                  <a:schemeClr val="tx1"/>
+                </a:solidFill>
+                <a:latin typeface="Times New Roman" panose="02020603050405020304" pitchFamily="18" charset="0"/>
+                <a:cs typeface="Times New Roman" panose="02020603050405020304" pitchFamily="18" charset="0"/>
+              </a:rPr>
+              <a:t> </a:t>
+            </a:r>
+            <a:r>
+              <a:rPr lang="el-GR" sz="1400" b="1" dirty="0">
+                <a:solidFill>
+                  <a:schemeClr val="tx1"/>
+                </a:solidFill>
+                <a:latin typeface="Times New Roman" panose="02020603050405020304" pitchFamily="18" charset="0"/>
+                <a:cs typeface="Times New Roman" panose="02020603050405020304" pitchFamily="18" charset="0"/>
+              </a:rPr>
+              <a:t>→</a:t>
+            </a:r>
+            <a:r>
+              <a:rPr lang="en-US" sz="1400" b="1" dirty="0">
+                <a:solidFill>
+                  <a:schemeClr val="tx1"/>
+                </a:solidFill>
+                <a:latin typeface="Times New Roman" panose="02020603050405020304" pitchFamily="18" charset="0"/>
+                <a:cs typeface="Times New Roman" panose="02020603050405020304" pitchFamily="18" charset="0"/>
+              </a:rPr>
+              <a:t> α</a:t>
+            </a:r>
+            <a:r>
+              <a:rPr lang="el-GR" sz="1400" b="1" dirty="0">
+                <a:solidFill>
+                  <a:schemeClr val="tx1"/>
+                </a:solidFill>
+                <a:latin typeface="Times New Roman" panose="02020603050405020304" pitchFamily="18" charset="0"/>
+                <a:cs typeface="Times New Roman" panose="02020603050405020304" pitchFamily="18" charset="0"/>
+              </a:rPr>
+              <a:t>β</a:t>
+            </a:r>
+            <a:r>
+              <a:rPr lang="en-US" sz="1400" b="1" dirty="0">
+                <a:solidFill>
+                  <a:schemeClr val="tx1"/>
+                </a:solidFill>
+                <a:latin typeface="Times New Roman" panose="02020603050405020304" pitchFamily="18" charset="0"/>
+                <a:cs typeface="Times New Roman" panose="02020603050405020304" pitchFamily="18" charset="0"/>
+              </a:rPr>
+              <a:t>)</a:t>
+            </a:r>
+          </a:p>
+        </p:txBody>
+      </p:sp>
+      <p:sp>
+        <p:nvSpPr>
+          <p:cNvPr id="164" name="Oval 163">
+            <a:extLst>
+              <a:ext uri="{FF2B5EF4-FFF2-40B4-BE49-F238E27FC236}">
+                <a16:creationId xmlns:a16="http://schemas.microsoft.com/office/drawing/2014/main" id="{530CB936-B083-5858-DFF1-E95C3182DDA3}"/>
+              </a:ext>
+            </a:extLst>
+          </p:cNvPr>
+          <p:cNvSpPr>
+            <a:spLocks noChangeAspect="1"/>
+          </p:cNvSpPr>
+          <p:nvPr/>
+        </p:nvSpPr>
+        <p:spPr>
+          <a:xfrm>
+            <a:off x="6024422" y="1286211"/>
+            <a:ext cx="252450" cy="252000"/>
+          </a:xfrm>
+          <a:prstGeom prst="ellipse">
+            <a:avLst/>
+          </a:prstGeom>
+          <a:solidFill>
+            <a:schemeClr val="bg1"/>
+          </a:solidFill>
+          <a:ln w="19050">
+            <a:solidFill>
+              <a:schemeClr val="tx1"/>
+            </a:solidFill>
+          </a:ln>
+        </p:spPr>
+        <p:style>
+          <a:lnRef idx="2">
+            <a:schemeClr val="accent1">
+              <a:shade val="15000"/>
+            </a:schemeClr>
+          </a:lnRef>
+          <a:fillRef idx="1">
+            <a:schemeClr val="accent1"/>
+          </a:fillRef>
+          <a:effectRef idx="0">
+            <a:schemeClr val="accent1"/>
+          </a:effectRef>
+          <a:fontRef idx="minor">
+            <a:schemeClr val="lt1"/>
+          </a:fontRef>
+        </p:style>
+        <p:txBody>
+          <a:bodyPr rtlCol="0" anchor="ctr"/>
+          <a:lstStyle/>
+          <a:p>
+            <a:pPr algn="ctr"/>
+            <a:endParaRPr lang="en-CA" sz="212"/>
+          </a:p>
+        </p:txBody>
+      </p:sp>
+      <p:sp>
+        <p:nvSpPr>
+          <p:cNvPr id="166" name="TextBox 165">
+            <a:extLst>
+              <a:ext uri="{FF2B5EF4-FFF2-40B4-BE49-F238E27FC236}">
+                <a16:creationId xmlns:a16="http://schemas.microsoft.com/office/drawing/2014/main" id="{3C8FCF78-1280-5A20-FD97-70DE029FA688}"/>
+              </a:ext>
+            </a:extLst>
+          </p:cNvPr>
+          <p:cNvSpPr txBox="1"/>
+          <p:nvPr/>
+        </p:nvSpPr>
+        <p:spPr>
+          <a:xfrm>
+            <a:off x="5829030" y="1086142"/>
+            <a:ext cx="177024" cy="307777"/>
+          </a:xfrm>
+          <a:prstGeom prst="rect">
+            <a:avLst/>
+          </a:prstGeom>
+          <a:noFill/>
+        </p:spPr>
+        <p:txBody>
+          <a:bodyPr wrap="square" rtlCol="0">
+            <a:spAutoFit/>
+          </a:bodyPr>
+          <a:lstStyle/>
+          <a:p>
+            <a:r>
+              <a:rPr lang="en-US" sz="1400" dirty="0"/>
+              <a:t>+</a:t>
+            </a:r>
+            <a:endParaRPr lang="en-CA" sz="2800" dirty="0"/>
+          </a:p>
+        </p:txBody>
+      </p:sp>
+      <p:sp>
+        <p:nvSpPr>
+          <p:cNvPr id="168" name="TextBox 167">
+            <a:extLst>
+              <a:ext uri="{FF2B5EF4-FFF2-40B4-BE49-F238E27FC236}">
+                <a16:creationId xmlns:a16="http://schemas.microsoft.com/office/drawing/2014/main" id="{526C9AED-8267-6141-DFDA-E0C6BBC5CA5E}"/>
+              </a:ext>
+            </a:extLst>
+          </p:cNvPr>
+          <p:cNvSpPr txBox="1"/>
+          <p:nvPr/>
+        </p:nvSpPr>
+        <p:spPr>
+          <a:xfrm>
+            <a:off x="6203144" y="1351490"/>
+            <a:ext cx="202299" cy="338554"/>
+          </a:xfrm>
+          <a:prstGeom prst="rect">
+            <a:avLst/>
+          </a:prstGeom>
+          <a:noFill/>
+        </p:spPr>
+        <p:txBody>
+          <a:bodyPr wrap="square" rtlCol="0">
+            <a:spAutoFit/>
+          </a:bodyPr>
+          <a:lstStyle/>
+          <a:p>
+            <a:r>
+              <a:rPr lang="en-US" sz="1600" b="1" dirty="0"/>
+              <a:t>_</a:t>
+            </a:r>
+            <a:endParaRPr lang="en-CA" sz="2000" b="1" dirty="0"/>
+          </a:p>
+        </p:txBody>
+      </p:sp>
+      <p:sp>
+        <p:nvSpPr>
+          <p:cNvPr id="172" name="Oval 171">
+            <a:extLst>
+              <a:ext uri="{FF2B5EF4-FFF2-40B4-BE49-F238E27FC236}">
+                <a16:creationId xmlns:a16="http://schemas.microsoft.com/office/drawing/2014/main" id="{EF9772A2-FF89-CF5F-BA4E-D5FD4669080A}"/>
+              </a:ext>
+            </a:extLst>
+          </p:cNvPr>
+          <p:cNvSpPr>
+            <a:spLocks noChangeAspect="1"/>
+          </p:cNvSpPr>
+          <p:nvPr/>
+        </p:nvSpPr>
+        <p:spPr>
+          <a:xfrm>
+            <a:off x="5160404" y="2017182"/>
+            <a:ext cx="252450" cy="252000"/>
+          </a:xfrm>
+          <a:prstGeom prst="ellipse">
+            <a:avLst/>
+          </a:prstGeom>
+          <a:solidFill>
+            <a:schemeClr val="bg1"/>
+          </a:solidFill>
+          <a:ln w="19050">
+            <a:solidFill>
+              <a:schemeClr val="tx1"/>
+            </a:solidFill>
+          </a:ln>
+        </p:spPr>
+        <p:style>
+          <a:lnRef idx="2">
+            <a:schemeClr val="accent1">
+              <a:shade val="15000"/>
+            </a:schemeClr>
+          </a:lnRef>
+          <a:fillRef idx="1">
+            <a:schemeClr val="accent1"/>
+          </a:fillRef>
+          <a:effectRef idx="0">
+            <a:schemeClr val="accent1"/>
+          </a:effectRef>
+          <a:fontRef idx="minor">
+            <a:schemeClr val="lt1"/>
+          </a:fontRef>
+        </p:style>
+        <p:txBody>
+          <a:bodyPr rtlCol="0" anchor="ctr"/>
+          <a:lstStyle/>
+          <a:p>
+            <a:pPr algn="ctr"/>
+            <a:endParaRPr lang="en-CA" sz="212" dirty="0"/>
+          </a:p>
+        </p:txBody>
+      </p:sp>
+      <p:sp>
+        <p:nvSpPr>
+          <p:cNvPr id="174" name="TextBox 173">
+            <a:extLst>
+              <a:ext uri="{FF2B5EF4-FFF2-40B4-BE49-F238E27FC236}">
+                <a16:creationId xmlns:a16="http://schemas.microsoft.com/office/drawing/2014/main" id="{C94686C0-5624-B1DC-B049-156BF4520E33}"/>
+              </a:ext>
+            </a:extLst>
+          </p:cNvPr>
+          <p:cNvSpPr txBox="1"/>
+          <p:nvPr/>
+        </p:nvSpPr>
+        <p:spPr>
+          <a:xfrm>
+            <a:off x="4947343" y="1847121"/>
+            <a:ext cx="177024" cy="307777"/>
+          </a:xfrm>
+          <a:prstGeom prst="rect">
+            <a:avLst/>
+          </a:prstGeom>
+          <a:noFill/>
+        </p:spPr>
+        <p:txBody>
+          <a:bodyPr wrap="square" rtlCol="0">
+            <a:spAutoFit/>
+          </a:bodyPr>
+          <a:lstStyle/>
+          <a:p>
+            <a:r>
+              <a:rPr lang="en-US" sz="1400" dirty="0"/>
+              <a:t>+</a:t>
+            </a:r>
+            <a:endParaRPr lang="en-CA" sz="2800" dirty="0"/>
+          </a:p>
+        </p:txBody>
+      </p:sp>
+      <p:sp>
+        <p:nvSpPr>
+          <p:cNvPr id="176" name="TextBox 175">
+            <a:extLst>
+              <a:ext uri="{FF2B5EF4-FFF2-40B4-BE49-F238E27FC236}">
+                <a16:creationId xmlns:a16="http://schemas.microsoft.com/office/drawing/2014/main" id="{D9556443-4557-85B5-5C43-309D540AEEAF}"/>
+              </a:ext>
+            </a:extLst>
+          </p:cNvPr>
+          <p:cNvSpPr txBox="1"/>
+          <p:nvPr/>
+        </p:nvSpPr>
+        <p:spPr>
+          <a:xfrm>
+            <a:off x="5332755" y="2067635"/>
+            <a:ext cx="202299" cy="338554"/>
+          </a:xfrm>
+          <a:prstGeom prst="rect">
+            <a:avLst/>
+          </a:prstGeom>
+          <a:noFill/>
+        </p:spPr>
+        <p:txBody>
+          <a:bodyPr wrap="square" rtlCol="0">
+            <a:spAutoFit/>
+          </a:bodyPr>
+          <a:lstStyle/>
+          <a:p>
+            <a:r>
+              <a:rPr lang="en-US" sz="1600" b="1" dirty="0"/>
+              <a:t>_</a:t>
+            </a:r>
+            <a:endParaRPr lang="en-CA" sz="2000" b="1" dirty="0"/>
+          </a:p>
+        </p:txBody>
+      </p:sp>
+      <p:cxnSp>
+        <p:nvCxnSpPr>
+          <p:cNvPr id="178" name="Straight Arrow Connector 177">
+            <a:extLst>
+              <a:ext uri="{FF2B5EF4-FFF2-40B4-BE49-F238E27FC236}">
+                <a16:creationId xmlns:a16="http://schemas.microsoft.com/office/drawing/2014/main" id="{1CFE0B27-D0FC-00A0-EC85-D16007969495}"/>
+              </a:ext>
+            </a:extLst>
+          </p:cNvPr>
+          <p:cNvCxnSpPr>
+            <a:stCxn id="172" idx="6"/>
+            <a:endCxn id="132" idx="1"/>
+          </p:cNvCxnSpPr>
+          <p:nvPr/>
+        </p:nvCxnSpPr>
+        <p:spPr>
+          <a:xfrm>
+            <a:off x="5412854" y="2143182"/>
+            <a:ext cx="1387226" cy="1"/>
+          </a:xfrm>
+          <a:prstGeom prst="straightConnector1">
+            <a:avLst/>
+          </a:prstGeom>
+          <a:ln>
+            <a:solidFill>
+              <a:schemeClr val="tx1"/>
+            </a:solidFill>
+            <a:tailEnd type="triangle" w="med" len="lg"/>
+          </a:ln>
+        </p:spPr>
+        <p:style>
+          <a:lnRef idx="2">
+            <a:schemeClr val="accent1"/>
+          </a:lnRef>
+          <a:fillRef idx="0">
+            <a:schemeClr val="accent1"/>
+          </a:fillRef>
+          <a:effectRef idx="1">
+            <a:schemeClr val="accent1"/>
+          </a:effectRef>
+          <a:fontRef idx="minor">
+            <a:schemeClr val="tx1"/>
+          </a:fontRef>
+        </p:style>
+      </p:cxnSp>
+      <p:cxnSp>
+        <p:nvCxnSpPr>
+          <p:cNvPr id="181" name="Straight Arrow Connector 180">
+            <a:extLst>
+              <a:ext uri="{FF2B5EF4-FFF2-40B4-BE49-F238E27FC236}">
+                <a16:creationId xmlns:a16="http://schemas.microsoft.com/office/drawing/2014/main" id="{B8E39D0D-BF4D-D834-8CD7-3BDEC111E741}"/>
+              </a:ext>
+            </a:extLst>
+          </p:cNvPr>
+          <p:cNvCxnSpPr>
+            <a:stCxn id="164" idx="6"/>
+            <a:endCxn id="130" idx="1"/>
+          </p:cNvCxnSpPr>
+          <p:nvPr/>
+        </p:nvCxnSpPr>
+        <p:spPr>
+          <a:xfrm>
+            <a:off x="6276872" y="1412211"/>
+            <a:ext cx="523208" cy="350"/>
+          </a:xfrm>
+          <a:prstGeom prst="straightConnector1">
+            <a:avLst/>
+          </a:prstGeom>
+          <a:ln>
+            <a:solidFill>
+              <a:schemeClr val="tx1"/>
+            </a:solidFill>
+            <a:tailEnd type="triangle"/>
+          </a:ln>
+        </p:spPr>
+        <p:style>
+          <a:lnRef idx="2">
+            <a:schemeClr val="accent1"/>
+          </a:lnRef>
+          <a:fillRef idx="0">
+            <a:schemeClr val="accent1"/>
+          </a:fillRef>
+          <a:effectRef idx="1">
+            <a:schemeClr val="accent1"/>
+          </a:effectRef>
+          <a:fontRef idx="minor">
+            <a:schemeClr val="tx1"/>
+          </a:fontRef>
+        </p:style>
+      </p:cxnSp>
+      <p:cxnSp>
+        <p:nvCxnSpPr>
+          <p:cNvPr id="189" name="Connector: Elbow 188">
+            <a:extLst>
+              <a:ext uri="{FF2B5EF4-FFF2-40B4-BE49-F238E27FC236}">
+                <a16:creationId xmlns:a16="http://schemas.microsoft.com/office/drawing/2014/main" id="{25D892B0-65AA-DFA6-541D-21EAF220573E}"/>
+              </a:ext>
+            </a:extLst>
+          </p:cNvPr>
+          <p:cNvCxnSpPr>
+            <a:cxnSpLocks/>
+            <a:endCxn id="164" idx="4"/>
+          </p:cNvCxnSpPr>
+          <p:nvPr/>
+        </p:nvCxnSpPr>
+        <p:spPr>
+          <a:xfrm rot="10800000">
+            <a:off x="6150648" y="1538212"/>
+            <a:ext cx="5677987" cy="2284529"/>
+          </a:xfrm>
+          <a:prstGeom prst="bentConnector2">
+            <a:avLst/>
+          </a:prstGeom>
+          <a:ln>
+            <a:solidFill>
+              <a:schemeClr val="tx1"/>
+            </a:solidFill>
+            <a:tailEnd type="triangle" w="med" len="lg"/>
+          </a:ln>
+        </p:spPr>
+        <p:style>
+          <a:lnRef idx="2">
+            <a:schemeClr val="accent1"/>
+          </a:lnRef>
+          <a:fillRef idx="0">
+            <a:schemeClr val="accent1"/>
+          </a:fillRef>
+          <a:effectRef idx="1">
+            <a:schemeClr val="accent1"/>
+          </a:effectRef>
+          <a:fontRef idx="minor">
+            <a:schemeClr val="tx1"/>
+          </a:fontRef>
+        </p:style>
+      </p:cxnSp>
+      <p:cxnSp>
+        <p:nvCxnSpPr>
+          <p:cNvPr id="192" name="Connector: Elbow 191">
+            <a:extLst>
+              <a:ext uri="{FF2B5EF4-FFF2-40B4-BE49-F238E27FC236}">
+                <a16:creationId xmlns:a16="http://schemas.microsoft.com/office/drawing/2014/main" id="{92E31983-E28F-A960-816D-B52640928B1D}"/>
+              </a:ext>
+            </a:extLst>
+          </p:cNvPr>
+          <p:cNvCxnSpPr>
+            <a:cxnSpLocks/>
+            <a:endCxn id="172" idx="4"/>
+          </p:cNvCxnSpPr>
+          <p:nvPr/>
+        </p:nvCxnSpPr>
+        <p:spPr>
+          <a:xfrm rot="10800000">
+            <a:off x="5286630" y="2269183"/>
+            <a:ext cx="6540899" cy="2284531"/>
+          </a:xfrm>
+          <a:prstGeom prst="bentConnector2">
+            <a:avLst/>
+          </a:prstGeom>
+          <a:ln>
+            <a:solidFill>
+              <a:schemeClr val="tx1"/>
+            </a:solidFill>
+            <a:tailEnd type="triangle"/>
+          </a:ln>
+        </p:spPr>
+        <p:style>
+          <a:lnRef idx="2">
+            <a:schemeClr val="accent1"/>
+          </a:lnRef>
+          <a:fillRef idx="0">
+            <a:schemeClr val="accent1"/>
+          </a:fillRef>
+          <a:effectRef idx="1">
+            <a:schemeClr val="accent1"/>
+          </a:effectRef>
+          <a:fontRef idx="minor">
+            <a:schemeClr val="tx1"/>
+          </a:fontRef>
+        </p:style>
+      </p:cxnSp>
+      <p:sp>
+        <p:nvSpPr>
+          <p:cNvPr id="161" name="Rectangle: Rounded Corners 160">
+            <a:extLst>
+              <a:ext uri="{FF2B5EF4-FFF2-40B4-BE49-F238E27FC236}">
+                <a16:creationId xmlns:a16="http://schemas.microsoft.com/office/drawing/2014/main" id="{26E0CF4D-B25B-5071-8AD9-397CCB2BA0AF}"/>
+              </a:ext>
+            </a:extLst>
+          </p:cNvPr>
+          <p:cNvSpPr>
+            <a:spLocks noChangeAspect="1"/>
+          </p:cNvSpPr>
+          <p:nvPr/>
+        </p:nvSpPr>
+        <p:spPr>
+          <a:xfrm>
+            <a:off x="11838956" y="3578553"/>
+            <a:ext cx="1231364" cy="1231364"/>
+          </a:xfrm>
+          <a:prstGeom prst="roundRect">
+            <a:avLst>
+              <a:gd name="adj" fmla="val 6196"/>
+            </a:avLst>
+          </a:prstGeom>
+          <a:solidFill>
+            <a:schemeClr val="accent6">
+              <a:lumMod val="20000"/>
+              <a:lumOff val="80000"/>
+            </a:schemeClr>
+          </a:solidFill>
+          <a:ln w="19050">
+            <a:solidFill>
+              <a:schemeClr val="accent6">
+                <a:lumMod val="75000"/>
+              </a:schemeClr>
+            </a:solidFill>
+          </a:ln>
+        </p:spPr>
+        <p:style>
+          <a:lnRef idx="2">
+            <a:schemeClr val="accent1">
+              <a:shade val="15000"/>
+            </a:schemeClr>
+          </a:lnRef>
+          <a:fillRef idx="1">
+            <a:schemeClr val="accent1"/>
+          </a:fillRef>
+          <a:effectRef idx="0">
+            <a:schemeClr val="accent1"/>
+          </a:effectRef>
+          <a:fontRef idx="minor">
+            <a:schemeClr val="lt1"/>
+          </a:fontRef>
+        </p:style>
+        <p:txBody>
+          <a:bodyPr rtlCol="0" anchor="ctr" anchorCtr="0"/>
+          <a:lstStyle/>
+          <a:p>
+            <a:pPr algn="ctr"/>
+            <a:r>
+              <a:rPr lang="en-US" sz="1400" b="1" dirty="0">
+                <a:solidFill>
+                  <a:schemeClr val="tx1"/>
+                </a:solidFill>
+                <a:latin typeface="Times New Roman" panose="02020603050405020304" pitchFamily="18" charset="0"/>
+                <a:cs typeface="Times New Roman" panose="02020603050405020304" pitchFamily="18" charset="0"/>
+              </a:rPr>
+              <a:t>Park</a:t>
+            </a:r>
+          </a:p>
+          <a:p>
+            <a:pPr algn="ctr"/>
+            <a:r>
+              <a:rPr lang="en-US" sz="1400" b="1" dirty="0">
+                <a:solidFill>
+                  <a:schemeClr val="tx1"/>
+                </a:solidFill>
+                <a:latin typeface="Times New Roman" panose="02020603050405020304" pitchFamily="18" charset="0"/>
+                <a:cs typeface="Times New Roman" panose="02020603050405020304" pitchFamily="18" charset="0"/>
+              </a:rPr>
+              <a:t>(α</a:t>
+            </a:r>
+            <a:r>
+              <a:rPr lang="el-GR" sz="1400" b="1" dirty="0">
+                <a:solidFill>
+                  <a:schemeClr val="tx1"/>
+                </a:solidFill>
+                <a:latin typeface="Times New Roman" panose="02020603050405020304" pitchFamily="18" charset="0"/>
+                <a:cs typeface="Times New Roman" panose="02020603050405020304" pitchFamily="18" charset="0"/>
+              </a:rPr>
+              <a:t>β</a:t>
+            </a:r>
+            <a:r>
+              <a:rPr lang="en-US" sz="1400" b="1" dirty="0">
+                <a:solidFill>
+                  <a:schemeClr val="tx1"/>
+                </a:solidFill>
+                <a:latin typeface="Times New Roman" panose="02020603050405020304" pitchFamily="18" charset="0"/>
+                <a:cs typeface="Times New Roman" panose="02020603050405020304" pitchFamily="18" charset="0"/>
+              </a:rPr>
+              <a:t> </a:t>
+            </a:r>
+            <a:r>
+              <a:rPr lang="el-GR" sz="1400" b="1" dirty="0">
+                <a:solidFill>
+                  <a:schemeClr val="tx1"/>
+                </a:solidFill>
+                <a:latin typeface="Times New Roman" panose="02020603050405020304" pitchFamily="18" charset="0"/>
+                <a:cs typeface="Times New Roman" panose="02020603050405020304" pitchFamily="18" charset="0"/>
+              </a:rPr>
+              <a:t>→</a:t>
+            </a:r>
+            <a:r>
+              <a:rPr lang="en-CA" sz="1400" b="1" dirty="0">
+                <a:solidFill>
+                  <a:schemeClr val="tx1"/>
+                </a:solidFill>
+                <a:latin typeface="Times New Roman" panose="02020603050405020304" pitchFamily="18" charset="0"/>
+                <a:cs typeface="Times New Roman" panose="02020603050405020304" pitchFamily="18" charset="0"/>
+              </a:rPr>
+              <a:t> </a:t>
+            </a:r>
+            <a:r>
+              <a:rPr lang="en-CA" sz="1400" b="1" dirty="0" err="1">
+                <a:solidFill>
+                  <a:schemeClr val="tx1"/>
+                </a:solidFill>
+                <a:latin typeface="Times New Roman" panose="02020603050405020304" pitchFamily="18" charset="0"/>
+                <a:cs typeface="Times New Roman" panose="02020603050405020304" pitchFamily="18" charset="0"/>
+              </a:rPr>
+              <a:t>dq</a:t>
+            </a:r>
+            <a:r>
+              <a:rPr lang="en-US" sz="1400" b="1" dirty="0">
+                <a:solidFill>
+                  <a:schemeClr val="tx1"/>
+                </a:solidFill>
+                <a:latin typeface="Times New Roman" panose="02020603050405020304" pitchFamily="18" charset="0"/>
+                <a:cs typeface="Times New Roman" panose="02020603050405020304" pitchFamily="18" charset="0"/>
+              </a:rPr>
+              <a:t>)</a:t>
+            </a:r>
+          </a:p>
+        </p:txBody>
+      </p:sp>
+      <p:cxnSp>
+        <p:nvCxnSpPr>
+          <p:cNvPr id="195" name="Straight Arrow Connector 194">
+            <a:extLst>
+              <a:ext uri="{FF2B5EF4-FFF2-40B4-BE49-F238E27FC236}">
+                <a16:creationId xmlns:a16="http://schemas.microsoft.com/office/drawing/2014/main" id="{AB2307D5-2FD0-4EEB-3F19-7FAA0528DBEE}"/>
+              </a:ext>
+            </a:extLst>
+          </p:cNvPr>
+          <p:cNvCxnSpPr>
+            <a:cxnSpLocks/>
+            <a:endCxn id="172" idx="2"/>
+          </p:cNvCxnSpPr>
+          <p:nvPr/>
+        </p:nvCxnSpPr>
+        <p:spPr>
+          <a:xfrm>
+            <a:off x="4491768" y="2143182"/>
+            <a:ext cx="668636" cy="0"/>
+          </a:xfrm>
+          <a:prstGeom prst="straightConnector1">
+            <a:avLst/>
+          </a:prstGeom>
+          <a:ln>
+            <a:solidFill>
+              <a:schemeClr val="tx1"/>
+            </a:solidFill>
+            <a:tailEnd type="triangle"/>
+          </a:ln>
+        </p:spPr>
+        <p:style>
+          <a:lnRef idx="2">
+            <a:schemeClr val="accent1"/>
+          </a:lnRef>
+          <a:fillRef idx="0">
+            <a:schemeClr val="accent1"/>
+          </a:fillRef>
+          <a:effectRef idx="1">
+            <a:schemeClr val="accent1"/>
+          </a:effectRef>
+          <a:fontRef idx="minor">
+            <a:schemeClr val="tx1"/>
+          </a:fontRef>
+        </p:style>
+      </p:cxnSp>
+      <p:cxnSp>
+        <p:nvCxnSpPr>
+          <p:cNvPr id="202" name="Straight Arrow Connector 201">
+            <a:extLst>
+              <a:ext uri="{FF2B5EF4-FFF2-40B4-BE49-F238E27FC236}">
+                <a16:creationId xmlns:a16="http://schemas.microsoft.com/office/drawing/2014/main" id="{6B53A215-F02F-7F0D-8731-0643808CA9B7}"/>
+              </a:ext>
+            </a:extLst>
+          </p:cNvPr>
+          <p:cNvCxnSpPr>
+            <a:cxnSpLocks/>
+            <a:endCxn id="164" idx="2"/>
+          </p:cNvCxnSpPr>
+          <p:nvPr/>
+        </p:nvCxnSpPr>
+        <p:spPr>
+          <a:xfrm>
+            <a:off x="4481533" y="1409603"/>
+            <a:ext cx="1542889" cy="2608"/>
+          </a:xfrm>
+          <a:prstGeom prst="straightConnector1">
+            <a:avLst/>
+          </a:prstGeom>
+          <a:ln>
+            <a:solidFill>
+              <a:schemeClr val="tx1"/>
+            </a:solidFill>
+            <a:tailEnd type="triangle"/>
+          </a:ln>
+        </p:spPr>
+        <p:style>
+          <a:lnRef idx="2">
+            <a:schemeClr val="accent1"/>
+          </a:lnRef>
+          <a:fillRef idx="0">
+            <a:schemeClr val="accent1"/>
+          </a:fillRef>
+          <a:effectRef idx="1">
+            <a:schemeClr val="accent1"/>
+          </a:effectRef>
+          <a:fontRef idx="minor">
+            <a:schemeClr val="tx1"/>
+          </a:fontRef>
+        </p:style>
+      </p:cxnSp>
+      <mc:AlternateContent xmlns:mc="http://schemas.openxmlformats.org/markup-compatibility/2006">
+        <mc:Choice xmlns:a14="http://schemas.microsoft.com/office/drawing/2010/main" Requires="a14">
+          <p:sp>
+            <p:nvSpPr>
+              <p:cNvPr id="205" name="TextBox 204">
+                <a:extLst>
+                  <a:ext uri="{FF2B5EF4-FFF2-40B4-BE49-F238E27FC236}">
+                    <a16:creationId xmlns:a16="http://schemas.microsoft.com/office/drawing/2014/main" id="{13433988-653C-8DB3-2C68-D1FA5C468346}"/>
+                  </a:ext>
+                </a:extLst>
+              </p:cNvPr>
+              <p:cNvSpPr txBox="1"/>
+              <p:nvPr/>
+            </p:nvSpPr>
+            <p:spPr>
+              <a:xfrm>
+                <a:off x="4150085" y="1255714"/>
+                <a:ext cx="304800" cy="307777"/>
+              </a:xfrm>
+              <a:prstGeom prst="rect">
+                <a:avLst/>
+              </a:prstGeom>
+              <a:noFill/>
+            </p:spPr>
+            <p:txBody>
+              <a:bodyPr wrap="square" rtlCol="0">
+                <a:spAutoFit/>
+              </a:bodyPr>
+              <a:lstStyle/>
+              <a:p>
+                <a:pPr/>
+                <a14:m>
+                  <m:oMathPara xmlns:m="http://schemas.openxmlformats.org/officeDocument/2006/math">
+                    <m:oMath>
+                      <m:sSubSup>
+                        <m:sSubSupPr>
+                          <m:ctrlPr>
+                            <a:rPr lang="en-US" sz="1400" b="0" i="1" smtClean="0">
+                              <a:latin typeface="Cambria Math" panose="02040503050406030204" pitchFamily="18" charset="0"/>
+                            </a:rPr>
+                          </m:ctrlPr>
+                        </m:sSubSupPr>
+                        <m:e>
+                          <m:r>
+                            <a:rPr lang="en-US" sz="1400" b="0" i="1" smtClean="0">
+                              <a:latin typeface="Cambria Math" panose="02040503050406030204" pitchFamily="18" charset="0"/>
+                            </a:rPr>
+                            <m:t>𝑖</m:t>
+                          </m:r>
+                        </m:e>
+                        <m:sub>
+                          <m:r>
+                            <a:rPr lang="en-US" sz="1400" b="0" i="1" smtClean="0">
+                              <a:latin typeface="Cambria Math" panose="02040503050406030204" pitchFamily="18" charset="0"/>
+                            </a:rPr>
+                            <m:t>𝑑</m:t>
+                          </m:r>
+                        </m:sub>
+                        <m:sup>
+                          <m:r>
+                            <a:rPr lang="en-US" sz="1400" b="0" i="1" smtClean="0">
+                              <a:latin typeface="Cambria Math" panose="02040503050406030204" pitchFamily="18" charset="0"/>
+                            </a:rPr>
+                            <m:t>∗</m:t>
+                          </m:r>
+                        </m:sup>
+                      </m:sSubSup>
+                    </m:oMath>
+                  </m:oMathPara>
+                </a14:m>
+                <a:endParaRPr lang="en-US" sz="1400" dirty="0">
+                  <a:latin typeface="Times New Roman" panose="02020603050405020304" pitchFamily="18" charset="0"/>
+                  <a:cs typeface="Times New Roman" panose="02020603050405020304" pitchFamily="18" charset="0"/>
+                </a:endParaRPr>
+              </a:p>
+            </p:txBody>
+          </p:sp>
+        </mc:Choice>
+        <mc:Fallback>
+          <p:sp>
+            <p:nvSpPr>
+              <p:cNvPr id="205" name="TextBox 204">
+                <a:extLst>
+                  <a:ext uri="{FF2B5EF4-FFF2-40B4-BE49-F238E27FC236}">
+                    <a16:creationId xmlns:a16="http://schemas.microsoft.com/office/drawing/2014/main" id="{13433988-653C-8DB3-2C68-D1FA5C468346}"/>
+                  </a:ext>
+                </a:extLst>
+              </p:cNvPr>
+              <p:cNvSpPr txBox="1">
+                <a:spLocks noRot="1" noChangeAspect="1" noMove="1" noResize="1" noEditPoints="1" noAdjustHandles="1" noChangeArrowheads="1" noChangeShapeType="1" noTextEdit="1"/>
+              </p:cNvSpPr>
+              <p:nvPr/>
+            </p:nvSpPr>
+            <p:spPr>
+              <a:xfrm>
+                <a:off x="4150085" y="1255714"/>
+                <a:ext cx="304800" cy="307777"/>
+              </a:xfrm>
+              <a:prstGeom prst="rect">
+                <a:avLst/>
+              </a:prstGeom>
+              <a:blipFill>
+                <a:blip r:embed="rId26"/>
+                <a:stretch>
+                  <a:fillRect/>
+                </a:stretch>
+              </a:blipFill>
+            </p:spPr>
+            <p:txBody>
+              <a:bodyPr/>
+              <a:lstStyle/>
+              <a:p>
+                <a:r>
+                  <a:rPr lang="en-CA">
+                    <a:noFill/>
+                  </a:rPr>
+                  <a:t> </a:t>
+                </a:r>
+              </a:p>
+            </p:txBody>
+          </p:sp>
+        </mc:Fallback>
+      </mc:AlternateContent>
+      <mc:AlternateContent xmlns:mc="http://schemas.openxmlformats.org/markup-compatibility/2006">
+        <mc:Choice xmlns:a14="http://schemas.microsoft.com/office/drawing/2010/main" Requires="a14">
+          <p:sp>
+            <p:nvSpPr>
+              <p:cNvPr id="207" name="TextBox 206">
+                <a:extLst>
+                  <a:ext uri="{FF2B5EF4-FFF2-40B4-BE49-F238E27FC236}">
+                    <a16:creationId xmlns:a16="http://schemas.microsoft.com/office/drawing/2014/main" id="{1AF226F3-0B10-7E99-7F7F-BA0048598D8B}"/>
+                  </a:ext>
+                </a:extLst>
+              </p:cNvPr>
+              <p:cNvSpPr txBox="1"/>
+              <p:nvPr/>
+            </p:nvSpPr>
+            <p:spPr>
+              <a:xfrm>
+                <a:off x="4190064" y="1979498"/>
+                <a:ext cx="304800" cy="324384"/>
+              </a:xfrm>
+              <a:prstGeom prst="rect">
+                <a:avLst/>
+              </a:prstGeom>
+              <a:noFill/>
+            </p:spPr>
+            <p:txBody>
+              <a:bodyPr wrap="square" rtlCol="0">
+                <a:spAutoFit/>
+              </a:bodyPr>
+              <a:lstStyle/>
+              <a:p>
+                <a:pPr/>
+                <a14:m>
+                  <m:oMathPara xmlns:m="http://schemas.openxmlformats.org/officeDocument/2006/math">
+                    <m:oMath>
+                      <m:sSubSup>
+                        <m:sSubSupPr>
+                          <m:ctrlPr>
+                            <a:rPr lang="en-US" sz="1400" b="0" i="1" smtClean="0">
+                              <a:latin typeface="Cambria Math" panose="02040503050406030204" pitchFamily="18" charset="0"/>
+                            </a:rPr>
+                          </m:ctrlPr>
+                        </m:sSubSupPr>
+                        <m:e>
+                          <m:r>
+                            <a:rPr lang="en-US" sz="1400" b="0" i="1" smtClean="0">
+                              <a:latin typeface="Cambria Math" panose="02040503050406030204" pitchFamily="18" charset="0"/>
+                            </a:rPr>
+                            <m:t>𝑖</m:t>
+                          </m:r>
+                        </m:e>
+                        <m:sub>
+                          <m:r>
+                            <a:rPr lang="en-US" sz="1400" b="0" i="1" smtClean="0">
+                              <a:latin typeface="Cambria Math" panose="02040503050406030204" pitchFamily="18" charset="0"/>
+                            </a:rPr>
+                            <m:t>𝑞</m:t>
+                          </m:r>
+                        </m:sub>
+                        <m:sup>
+                          <m:r>
+                            <a:rPr lang="en-US" sz="1400" b="0" i="1" smtClean="0">
+                              <a:latin typeface="Cambria Math" panose="02040503050406030204" pitchFamily="18" charset="0"/>
+                            </a:rPr>
+                            <m:t>∗</m:t>
+                          </m:r>
+                        </m:sup>
+                      </m:sSubSup>
+                    </m:oMath>
+                  </m:oMathPara>
+                </a14:m>
+                <a:endParaRPr lang="en-US" sz="1400" dirty="0">
+                  <a:latin typeface="Times New Roman" panose="02020603050405020304" pitchFamily="18" charset="0"/>
+                  <a:cs typeface="Times New Roman" panose="02020603050405020304" pitchFamily="18" charset="0"/>
+                </a:endParaRPr>
+              </a:p>
+            </p:txBody>
+          </p:sp>
+        </mc:Choice>
+        <mc:Fallback>
+          <p:sp>
+            <p:nvSpPr>
+              <p:cNvPr id="207" name="TextBox 206">
+                <a:extLst>
+                  <a:ext uri="{FF2B5EF4-FFF2-40B4-BE49-F238E27FC236}">
+                    <a16:creationId xmlns:a16="http://schemas.microsoft.com/office/drawing/2014/main" id="{1AF226F3-0B10-7E99-7F7F-BA0048598D8B}"/>
+                  </a:ext>
+                </a:extLst>
+              </p:cNvPr>
+              <p:cNvSpPr txBox="1">
+                <a:spLocks noRot="1" noChangeAspect="1" noMove="1" noResize="1" noEditPoints="1" noAdjustHandles="1" noChangeArrowheads="1" noChangeShapeType="1" noTextEdit="1"/>
+              </p:cNvSpPr>
+              <p:nvPr/>
+            </p:nvSpPr>
+            <p:spPr>
+              <a:xfrm>
+                <a:off x="4190064" y="1979498"/>
+                <a:ext cx="304800" cy="324384"/>
+              </a:xfrm>
+              <a:prstGeom prst="rect">
+                <a:avLst/>
+              </a:prstGeom>
+              <a:blipFill>
+                <a:blip r:embed="rId27"/>
+                <a:stretch>
+                  <a:fillRect/>
+                </a:stretch>
+              </a:blipFill>
+            </p:spPr>
+            <p:txBody>
+              <a:bodyPr/>
+              <a:lstStyle/>
+              <a:p>
+                <a:r>
+                  <a:rPr lang="en-CA">
+                    <a:noFill/>
+                  </a:rPr>
+                  <a:t> </a:t>
+                </a:r>
+              </a:p>
+            </p:txBody>
+          </p:sp>
+        </mc:Fallback>
+      </mc:AlternateContent>
+      <p:sp>
+        <p:nvSpPr>
+          <p:cNvPr id="3" name="Rectangle: Rounded Corners 2">
+            <a:extLst>
+              <a:ext uri="{FF2B5EF4-FFF2-40B4-BE49-F238E27FC236}">
+                <a16:creationId xmlns:a16="http://schemas.microsoft.com/office/drawing/2014/main" id="{58A6D389-9859-96CD-36E5-AA227F95D1E9}"/>
+              </a:ext>
+            </a:extLst>
+          </p:cNvPr>
+          <p:cNvSpPr/>
+          <p:nvPr/>
+        </p:nvSpPr>
+        <p:spPr>
+          <a:xfrm>
+            <a:off x="5789578" y="4927808"/>
+            <a:ext cx="1409421" cy="424801"/>
+          </a:xfrm>
+          <a:prstGeom prst="roundRect">
+            <a:avLst/>
+          </a:prstGeom>
+          <a:solidFill>
+            <a:schemeClr val="tx2">
+              <a:lumMod val="25000"/>
+              <a:lumOff val="75000"/>
+            </a:schemeClr>
+          </a:solidFill>
+          <a:ln w="19050">
+            <a:solidFill>
+              <a:schemeClr val="tx2">
+                <a:lumMod val="75000"/>
+                <a:lumOff val="25000"/>
+              </a:schemeClr>
+            </a:solidFill>
+          </a:ln>
+        </p:spPr>
+        <p:style>
+          <a:lnRef idx="2">
+            <a:schemeClr val="accent1">
+              <a:shade val="15000"/>
+            </a:schemeClr>
+          </a:lnRef>
+          <a:fillRef idx="1">
+            <a:schemeClr val="accent1"/>
+          </a:fillRef>
+          <a:effectRef idx="0">
+            <a:schemeClr val="accent1"/>
+          </a:effectRef>
+          <a:fontRef idx="minor">
+            <a:schemeClr val="lt1"/>
+          </a:fontRef>
+        </p:style>
+        <p:txBody>
+          <a:bodyPr rtlCol="0" anchor="ctr"/>
+          <a:lstStyle/>
+          <a:p>
+            <a:pPr algn="ctr"/>
+            <a:r>
+              <a:rPr lang="en-US" sz="1400" b="1" dirty="0">
+                <a:solidFill>
+                  <a:schemeClr val="tx1"/>
+                </a:solidFill>
+                <a:latin typeface="Times New Roman" panose="02020603050405020304" pitchFamily="18" charset="0"/>
+                <a:cs typeface="Times New Roman" panose="02020603050405020304" pitchFamily="18" charset="0"/>
+              </a:rPr>
+              <a:t>Control System</a:t>
+            </a:r>
+            <a:endParaRPr lang="en-CA" sz="1400" b="1" dirty="0">
+              <a:solidFill>
+                <a:schemeClr val="tx1"/>
+              </a:solidFill>
+              <a:latin typeface="Times New Roman" panose="02020603050405020304" pitchFamily="18" charset="0"/>
+              <a:cs typeface="Times New Roman" panose="02020603050405020304" pitchFamily="18" charset="0"/>
+            </a:endParaRPr>
+          </a:p>
+        </p:txBody>
+      </p:sp>
+      <p:sp>
+        <p:nvSpPr>
+          <p:cNvPr id="5" name="Rectangle: Rounded Corners 4">
+            <a:extLst>
+              <a:ext uri="{FF2B5EF4-FFF2-40B4-BE49-F238E27FC236}">
+                <a16:creationId xmlns:a16="http://schemas.microsoft.com/office/drawing/2014/main" id="{7883BDD5-F10F-1FD8-17BA-89E602246AF9}"/>
+              </a:ext>
+            </a:extLst>
+          </p:cNvPr>
+          <p:cNvSpPr/>
+          <p:nvPr/>
+        </p:nvSpPr>
+        <p:spPr>
+          <a:xfrm>
+            <a:off x="7724004" y="4927808"/>
+            <a:ext cx="1409421" cy="424801"/>
+          </a:xfrm>
+          <a:prstGeom prst="roundRect">
+            <a:avLst/>
+          </a:prstGeom>
+          <a:solidFill>
+            <a:schemeClr val="accent6">
+              <a:lumMod val="20000"/>
+              <a:lumOff val="80000"/>
+            </a:schemeClr>
+          </a:solidFill>
+          <a:ln w="19050">
+            <a:solidFill>
+              <a:schemeClr val="accent6">
+                <a:lumMod val="75000"/>
+              </a:schemeClr>
+            </a:solidFill>
+          </a:ln>
+        </p:spPr>
+        <p:style>
+          <a:lnRef idx="2">
+            <a:schemeClr val="accent1">
+              <a:shade val="15000"/>
+            </a:schemeClr>
+          </a:lnRef>
+          <a:fillRef idx="1">
+            <a:schemeClr val="accent1"/>
+          </a:fillRef>
+          <a:effectRef idx="0">
+            <a:schemeClr val="accent1"/>
+          </a:effectRef>
+          <a:fontRef idx="minor">
+            <a:schemeClr val="lt1"/>
+          </a:fontRef>
+        </p:style>
+        <p:txBody>
+          <a:bodyPr rtlCol="0" anchor="ctr"/>
+          <a:lstStyle/>
+          <a:p>
+            <a:pPr algn="ctr"/>
+            <a:r>
+              <a:rPr lang="en-US" sz="1400" b="1" dirty="0">
+                <a:solidFill>
+                  <a:schemeClr val="tx1"/>
+                </a:solidFill>
+                <a:latin typeface="Times New Roman" panose="02020603050405020304" pitchFamily="18" charset="0"/>
+                <a:cs typeface="Times New Roman" panose="02020603050405020304" pitchFamily="18" charset="0"/>
+              </a:rPr>
+              <a:t>Algorithm</a:t>
+            </a:r>
+            <a:endParaRPr lang="en-CA" sz="1400" b="1" dirty="0">
+              <a:solidFill>
+                <a:schemeClr val="tx1"/>
+              </a:solidFill>
+              <a:latin typeface="Times New Roman" panose="02020603050405020304" pitchFamily="18" charset="0"/>
+              <a:cs typeface="Times New Roman" panose="02020603050405020304" pitchFamily="18" charset="0"/>
+            </a:endParaRPr>
+          </a:p>
+        </p:txBody>
+      </p:sp>
+      <p:sp>
+        <p:nvSpPr>
+          <p:cNvPr id="7" name="Rectangle: Rounded Corners 6">
+            <a:extLst>
+              <a:ext uri="{FF2B5EF4-FFF2-40B4-BE49-F238E27FC236}">
+                <a16:creationId xmlns:a16="http://schemas.microsoft.com/office/drawing/2014/main" id="{CCBCE907-3D3B-AFC4-D341-6303C2308864}"/>
+              </a:ext>
+            </a:extLst>
+          </p:cNvPr>
+          <p:cNvSpPr/>
+          <p:nvPr/>
+        </p:nvSpPr>
+        <p:spPr>
+          <a:xfrm>
+            <a:off x="9658430" y="4927807"/>
+            <a:ext cx="1409421" cy="424801"/>
+          </a:xfrm>
+          <a:prstGeom prst="roundRect">
+            <a:avLst/>
+          </a:prstGeom>
+          <a:solidFill>
+            <a:schemeClr val="accent2">
+              <a:lumMod val="20000"/>
+              <a:lumOff val="80000"/>
+            </a:schemeClr>
+          </a:solidFill>
+          <a:ln w="19050">
+            <a:solidFill>
+              <a:schemeClr val="accent2">
+                <a:lumMod val="75000"/>
+              </a:schemeClr>
+            </a:solidFill>
+          </a:ln>
+        </p:spPr>
+        <p:style>
+          <a:lnRef idx="2">
+            <a:schemeClr val="accent1">
+              <a:shade val="15000"/>
+            </a:schemeClr>
+          </a:lnRef>
+          <a:fillRef idx="1">
+            <a:schemeClr val="accent1"/>
+          </a:fillRef>
+          <a:effectRef idx="0">
+            <a:schemeClr val="accent1"/>
+          </a:effectRef>
+          <a:fontRef idx="minor">
+            <a:schemeClr val="lt1"/>
+          </a:fontRef>
+        </p:style>
+        <p:txBody>
+          <a:bodyPr rtlCol="0" anchor="ctr"/>
+          <a:lstStyle/>
+          <a:p>
+            <a:pPr algn="ctr"/>
+            <a:r>
+              <a:rPr lang="en-US" sz="1400" b="1" dirty="0">
+                <a:solidFill>
+                  <a:schemeClr val="tx1"/>
+                </a:solidFill>
+                <a:latin typeface="Times New Roman" panose="02020603050405020304" pitchFamily="18" charset="0"/>
+                <a:cs typeface="Times New Roman" panose="02020603050405020304" pitchFamily="18" charset="0"/>
+              </a:rPr>
+              <a:t>Hardware</a:t>
+            </a:r>
+            <a:endParaRPr lang="en-CA" sz="1400" b="1" dirty="0">
+              <a:solidFill>
+                <a:schemeClr val="tx1"/>
+              </a:solidFill>
+              <a:latin typeface="Times New Roman" panose="02020603050405020304" pitchFamily="18" charset="0"/>
+              <a:cs typeface="Times New Roman" panose="02020603050405020304" pitchFamily="18" charset="0"/>
+            </a:endParaRPr>
+          </a:p>
+        </p:txBody>
+      </p:sp>
+      <p:sp>
+        <p:nvSpPr>
+          <p:cNvPr id="19" name="Oval 18">
+            <a:extLst>
+              <a:ext uri="{FF2B5EF4-FFF2-40B4-BE49-F238E27FC236}">
+                <a16:creationId xmlns:a16="http://schemas.microsoft.com/office/drawing/2014/main" id="{3AEB6BFE-289E-4AA6-0295-C6178324D3EA}"/>
+              </a:ext>
+            </a:extLst>
+          </p:cNvPr>
+          <p:cNvSpPr>
+            <a:spLocks noChangeAspect="1"/>
+          </p:cNvSpPr>
+          <p:nvPr/>
+        </p:nvSpPr>
+        <p:spPr>
+          <a:xfrm>
+            <a:off x="8879532" y="1286211"/>
+            <a:ext cx="252450" cy="252000"/>
+          </a:xfrm>
+          <a:prstGeom prst="ellipse">
+            <a:avLst/>
+          </a:prstGeom>
+          <a:solidFill>
+            <a:schemeClr val="bg1"/>
+          </a:solidFill>
+          <a:ln w="19050">
+            <a:solidFill>
+              <a:schemeClr val="tx1"/>
+            </a:solidFill>
+          </a:ln>
+        </p:spPr>
+        <p:style>
+          <a:lnRef idx="2">
+            <a:schemeClr val="accent1">
+              <a:shade val="15000"/>
+            </a:schemeClr>
+          </a:lnRef>
+          <a:fillRef idx="1">
+            <a:schemeClr val="accent1"/>
+          </a:fillRef>
+          <a:effectRef idx="0">
+            <a:schemeClr val="accent1"/>
+          </a:effectRef>
+          <a:fontRef idx="minor">
+            <a:schemeClr val="lt1"/>
+          </a:fontRef>
+        </p:style>
+        <p:txBody>
+          <a:bodyPr rtlCol="0" anchor="ctr"/>
+          <a:lstStyle/>
+          <a:p>
+            <a:pPr algn="ctr"/>
+            <a:endParaRPr lang="en-CA" sz="212"/>
+          </a:p>
+        </p:txBody>
+      </p:sp>
+      <p:sp>
+        <p:nvSpPr>
+          <p:cNvPr id="21" name="TextBox 20">
+            <a:extLst>
+              <a:ext uri="{FF2B5EF4-FFF2-40B4-BE49-F238E27FC236}">
+                <a16:creationId xmlns:a16="http://schemas.microsoft.com/office/drawing/2014/main" id="{1EA8BF07-3938-0EB6-72BF-ACE2AF4BC5C9}"/>
+              </a:ext>
+            </a:extLst>
+          </p:cNvPr>
+          <p:cNvSpPr txBox="1"/>
+          <p:nvPr/>
+        </p:nvSpPr>
+        <p:spPr>
+          <a:xfrm>
+            <a:off x="8684140" y="1086142"/>
+            <a:ext cx="177024" cy="307777"/>
+          </a:xfrm>
+          <a:prstGeom prst="rect">
+            <a:avLst/>
+          </a:prstGeom>
+          <a:noFill/>
+        </p:spPr>
+        <p:txBody>
+          <a:bodyPr wrap="square" rtlCol="0">
+            <a:spAutoFit/>
+          </a:bodyPr>
+          <a:lstStyle/>
+          <a:p>
+            <a:r>
+              <a:rPr lang="en-US" sz="1400" dirty="0"/>
+              <a:t>+</a:t>
+            </a:r>
+            <a:endParaRPr lang="en-CA" sz="2800" dirty="0"/>
+          </a:p>
+        </p:txBody>
+      </p:sp>
+      <p:sp>
+        <p:nvSpPr>
+          <p:cNvPr id="23" name="TextBox 22">
+            <a:extLst>
+              <a:ext uri="{FF2B5EF4-FFF2-40B4-BE49-F238E27FC236}">
+                <a16:creationId xmlns:a16="http://schemas.microsoft.com/office/drawing/2014/main" id="{21F8FD11-0CDB-17D9-1A15-1502B35769EE}"/>
+              </a:ext>
+            </a:extLst>
+          </p:cNvPr>
+          <p:cNvSpPr txBox="1"/>
+          <p:nvPr/>
+        </p:nvSpPr>
+        <p:spPr>
+          <a:xfrm>
+            <a:off x="9058254" y="1351490"/>
+            <a:ext cx="202299" cy="338554"/>
+          </a:xfrm>
+          <a:prstGeom prst="rect">
+            <a:avLst/>
+          </a:prstGeom>
+          <a:noFill/>
+        </p:spPr>
+        <p:txBody>
+          <a:bodyPr wrap="square" rtlCol="0">
+            <a:spAutoFit/>
+          </a:bodyPr>
+          <a:lstStyle/>
+          <a:p>
+            <a:r>
+              <a:rPr lang="en-US" sz="1600" b="1" dirty="0"/>
+              <a:t>_</a:t>
+            </a:r>
+            <a:endParaRPr lang="en-CA" sz="2000" b="1" dirty="0"/>
+          </a:p>
+        </p:txBody>
+      </p:sp>
+      <p:cxnSp>
+        <p:nvCxnSpPr>
+          <p:cNvPr id="24" name="Straight Arrow Connector 23">
+            <a:extLst>
+              <a:ext uri="{FF2B5EF4-FFF2-40B4-BE49-F238E27FC236}">
+                <a16:creationId xmlns:a16="http://schemas.microsoft.com/office/drawing/2014/main" id="{7DBDDEB8-75FC-7099-3925-4ED4CDE33C18}"/>
+              </a:ext>
+            </a:extLst>
+          </p:cNvPr>
+          <p:cNvCxnSpPr>
+            <a:cxnSpLocks/>
+          </p:cNvCxnSpPr>
+          <p:nvPr/>
+        </p:nvCxnSpPr>
+        <p:spPr>
+          <a:xfrm>
+            <a:off x="8220780" y="1412211"/>
+            <a:ext cx="648000" cy="0"/>
+          </a:xfrm>
+          <a:prstGeom prst="straightConnector1">
+            <a:avLst/>
+          </a:prstGeom>
+          <a:ln>
+            <a:solidFill>
+              <a:schemeClr val="tx1"/>
+            </a:solidFill>
+            <a:tailEnd type="triangle" w="med" len="lg"/>
+          </a:ln>
+        </p:spPr>
+        <p:style>
+          <a:lnRef idx="2">
+            <a:schemeClr val="accent1"/>
+          </a:lnRef>
+          <a:fillRef idx="0">
+            <a:schemeClr val="accent1"/>
+          </a:fillRef>
+          <a:effectRef idx="1">
+            <a:schemeClr val="accent1"/>
+          </a:effectRef>
+          <a:fontRef idx="minor">
+            <a:schemeClr val="tx1"/>
+          </a:fontRef>
+        </p:style>
+      </p:cxnSp>
+      <p:sp>
+        <p:nvSpPr>
+          <p:cNvPr id="25" name="Oval 24">
+            <a:extLst>
+              <a:ext uri="{FF2B5EF4-FFF2-40B4-BE49-F238E27FC236}">
+                <a16:creationId xmlns:a16="http://schemas.microsoft.com/office/drawing/2014/main" id="{E371127E-0331-F5F7-1D24-AAFCEF03AFC3}"/>
+              </a:ext>
+            </a:extLst>
+          </p:cNvPr>
+          <p:cNvSpPr>
+            <a:spLocks noChangeAspect="1"/>
+          </p:cNvSpPr>
+          <p:nvPr/>
+        </p:nvSpPr>
+        <p:spPr>
+          <a:xfrm>
+            <a:off x="8874721" y="2015690"/>
+            <a:ext cx="252450" cy="252000"/>
+          </a:xfrm>
+          <a:prstGeom prst="ellipse">
+            <a:avLst/>
+          </a:prstGeom>
+          <a:solidFill>
+            <a:schemeClr val="bg1"/>
+          </a:solidFill>
+          <a:ln w="19050">
+            <a:solidFill>
+              <a:schemeClr val="tx1"/>
+            </a:solidFill>
+          </a:ln>
+        </p:spPr>
+        <p:style>
+          <a:lnRef idx="2">
+            <a:schemeClr val="accent1">
+              <a:shade val="15000"/>
+            </a:schemeClr>
+          </a:lnRef>
+          <a:fillRef idx="1">
+            <a:schemeClr val="accent1"/>
+          </a:fillRef>
+          <a:effectRef idx="0">
+            <a:schemeClr val="accent1"/>
+          </a:effectRef>
+          <a:fontRef idx="minor">
+            <a:schemeClr val="lt1"/>
+          </a:fontRef>
+        </p:style>
+        <p:txBody>
+          <a:bodyPr rtlCol="0" anchor="ctr"/>
+          <a:lstStyle/>
+          <a:p>
+            <a:pPr algn="ctr"/>
+            <a:endParaRPr lang="en-CA" sz="212"/>
+          </a:p>
+        </p:txBody>
+      </p:sp>
+      <p:sp>
+        <p:nvSpPr>
+          <p:cNvPr id="26" name="TextBox 25">
+            <a:extLst>
+              <a:ext uri="{FF2B5EF4-FFF2-40B4-BE49-F238E27FC236}">
+                <a16:creationId xmlns:a16="http://schemas.microsoft.com/office/drawing/2014/main" id="{AE55CCCC-A19B-FAC8-8644-6796649C0417}"/>
+              </a:ext>
+            </a:extLst>
+          </p:cNvPr>
+          <p:cNvSpPr txBox="1"/>
+          <p:nvPr/>
+        </p:nvSpPr>
+        <p:spPr>
+          <a:xfrm>
+            <a:off x="8682335" y="1820268"/>
+            <a:ext cx="177024" cy="307777"/>
+          </a:xfrm>
+          <a:prstGeom prst="rect">
+            <a:avLst/>
+          </a:prstGeom>
+          <a:noFill/>
+        </p:spPr>
+        <p:txBody>
+          <a:bodyPr wrap="square" rtlCol="0">
+            <a:spAutoFit/>
+          </a:bodyPr>
+          <a:lstStyle/>
+          <a:p>
+            <a:r>
+              <a:rPr lang="en-US" sz="1400" dirty="0"/>
+              <a:t>+</a:t>
+            </a:r>
+            <a:endParaRPr lang="en-CA" sz="2800" dirty="0"/>
+          </a:p>
+        </p:txBody>
+      </p:sp>
+      <p:sp>
+        <p:nvSpPr>
+          <p:cNvPr id="27" name="TextBox 26">
+            <a:extLst>
+              <a:ext uri="{FF2B5EF4-FFF2-40B4-BE49-F238E27FC236}">
+                <a16:creationId xmlns:a16="http://schemas.microsoft.com/office/drawing/2014/main" id="{B6BB7C16-19AE-FFED-DE27-8527649A6F33}"/>
+              </a:ext>
+            </a:extLst>
+          </p:cNvPr>
+          <p:cNvSpPr txBox="1"/>
+          <p:nvPr/>
+        </p:nvSpPr>
+        <p:spPr>
+          <a:xfrm>
+            <a:off x="9056449" y="2085616"/>
+            <a:ext cx="202299" cy="338554"/>
+          </a:xfrm>
+          <a:prstGeom prst="rect">
+            <a:avLst/>
+          </a:prstGeom>
+          <a:noFill/>
+        </p:spPr>
+        <p:txBody>
+          <a:bodyPr wrap="square" rtlCol="0">
+            <a:spAutoFit/>
+          </a:bodyPr>
+          <a:lstStyle/>
+          <a:p>
+            <a:r>
+              <a:rPr lang="en-US" sz="1600" b="1" dirty="0"/>
+              <a:t>_</a:t>
+            </a:r>
+            <a:endParaRPr lang="en-CA" sz="2000" b="1" dirty="0"/>
+          </a:p>
+        </p:txBody>
+      </p:sp>
+      <p:cxnSp>
+        <p:nvCxnSpPr>
+          <p:cNvPr id="28" name="Straight Arrow Connector 27">
+            <a:extLst>
+              <a:ext uri="{FF2B5EF4-FFF2-40B4-BE49-F238E27FC236}">
+                <a16:creationId xmlns:a16="http://schemas.microsoft.com/office/drawing/2014/main" id="{0F135ECA-3931-5432-A0AD-04555DB8869C}"/>
+              </a:ext>
+            </a:extLst>
+          </p:cNvPr>
+          <p:cNvCxnSpPr>
+            <a:cxnSpLocks/>
+          </p:cNvCxnSpPr>
+          <p:nvPr/>
+        </p:nvCxnSpPr>
+        <p:spPr>
+          <a:xfrm>
+            <a:off x="8218975" y="2146337"/>
+            <a:ext cx="648000" cy="0"/>
+          </a:xfrm>
+          <a:prstGeom prst="straightConnector1">
+            <a:avLst/>
+          </a:prstGeom>
+          <a:ln>
+            <a:solidFill>
+              <a:schemeClr val="tx1"/>
+            </a:solidFill>
+            <a:tailEnd type="triangle" w="med" len="lg"/>
+          </a:ln>
+        </p:spPr>
+        <p:style>
+          <a:lnRef idx="2">
+            <a:schemeClr val="accent1"/>
+          </a:lnRef>
+          <a:fillRef idx="0">
+            <a:schemeClr val="accent1"/>
+          </a:fillRef>
+          <a:effectRef idx="1">
+            <a:schemeClr val="accent1"/>
+          </a:effectRef>
+          <a:fontRef idx="minor">
+            <a:schemeClr val="tx1"/>
+          </a:fontRef>
+        </p:style>
+      </p:cxnSp>
+    </p:spTree>
+    <p:extLst>
+      <p:ext uri="{BB962C8B-B14F-4D97-AF65-F5344CB8AC3E}">
+        <p14:creationId xmlns:p14="http://schemas.microsoft.com/office/powerpoint/2010/main" val="2711191929"/>
+      </p:ext>
+    </p:extLst>
+  </p:cSld>
+  <p:clrMapOvr>
+    <a:masterClrMapping/>
+  </p:clrMapOvr>
+</p:sld>
+</file>
+
+<file path=ppt/slides/slide5.xml><?xml version="1.0" encoding="utf-8"?>
+<p:sld xmlns:a="http://schemas.openxmlformats.org/drawingml/2006/main" xmlns:r="http://schemas.openxmlformats.org/officeDocument/2006/relationships" xmlns:p="http://schemas.openxmlformats.org/presentationml/2006/main">
+  <p:cSld>
     <p:bg>
       <p:bgPr>
         <a:solidFill>

--- a/field_oriented_control.pptx
+++ b/field_oriented_control.pptx
@@ -122,7 +122,7 @@
 <file path=ppt/revisionInfo.xml><?xml version="1.0" encoding="utf-8"?>
 <p1510:revInfo xmlns:a="http://schemas.openxmlformats.org/drawingml/2006/main" xmlns:r="http://schemas.openxmlformats.org/officeDocument/2006/relationships" xmlns:p1510="http://schemas.microsoft.com/office/powerpoint/2015/10/main">
   <p1510:revLst>
-    <p1510:client id="{E23C0E3B-1BCF-43A5-9BFC-28A61010C6A7}" v="2" dt="2026-09-24T21:52:26.213"/>
+    <p1510:client id="{E23C0E3B-1BCF-43A5-9BFC-28A61010C6A7}" v="106" dt="2026-09-28T16:18:28.537"/>
   </p1510:revLst>
 </p1510:revInfo>
 </file>
@@ -132,7 +132,7 @@
   <pc:docChgLst>
     <pc:chgData name="Jonah St. Hilaire" userId="9d0a7af2-d0bd-4748-b50b-5cc37e0fdaa3" providerId="ADAL" clId="{58AAB240-BB3C-43BA-87E9-80C5D70C8BCC}"/>
     <pc:docChg chg="undo redo custSel addSld delSld modSld sldOrd modMainMaster delSection modSection">
-      <pc:chgData name="Jonah St. Hilaire" userId="9d0a7af2-d0bd-4748-b50b-5cc37e0fdaa3" providerId="ADAL" clId="{58AAB240-BB3C-43BA-87E9-80C5D70C8BCC}" dt="2026-09-24T21:55:53.216" v="4847" actId="14100"/>
+      <pc:chgData name="Jonah St. Hilaire" userId="9d0a7af2-d0bd-4748-b50b-5cc37e0fdaa3" providerId="ADAL" clId="{58AAB240-BB3C-43BA-87E9-80C5D70C8BCC}" dt="2026-09-28T17:01:56.531" v="5153" actId="1076"/>
       <pc:docMkLst>
         <pc:docMk/>
       </pc:docMkLst>
@@ -1957,17 +1957,17 @@
         </pc:cxnChg>
       </pc:sldChg>
       <pc:sldChg chg="addSp delSp modSp add mod">
-        <pc:chgData name="Jonah St. Hilaire" userId="9d0a7af2-d0bd-4748-b50b-5cc37e0fdaa3" providerId="ADAL" clId="{58AAB240-BB3C-43BA-87E9-80C5D70C8BCC}" dt="2026-09-24T21:55:53.216" v="4847" actId="14100"/>
+        <pc:chgData name="Jonah St. Hilaire" userId="9d0a7af2-d0bd-4748-b50b-5cc37e0fdaa3" providerId="ADAL" clId="{58AAB240-BB3C-43BA-87E9-80C5D70C8BCC}" dt="2026-09-28T17:01:56.531" v="5153" actId="1076"/>
         <pc:sldMkLst>
           <pc:docMk/>
           <pc:sldMk cId="2711191929" sldId="261"/>
         </pc:sldMkLst>
-        <pc:spChg chg="add del">
-          <ac:chgData name="Jonah St. Hilaire" userId="9d0a7af2-d0bd-4748-b50b-5cc37e0fdaa3" providerId="ADAL" clId="{58AAB240-BB3C-43BA-87E9-80C5D70C8BCC}" dt="2026-09-24T21:51:26.737" v="4712" actId="22"/>
+        <pc:spChg chg="add mod">
+          <ac:chgData name="Jonah St. Hilaire" userId="9d0a7af2-d0bd-4748-b50b-5cc37e0fdaa3" providerId="ADAL" clId="{58AAB240-BB3C-43BA-87E9-80C5D70C8BCC}" dt="2026-09-28T16:17:00.206" v="5054" actId="1036"/>
           <ac:spMkLst>
             <pc:docMk/>
             <pc:sldMk cId="2711191929" sldId="261"/>
-            <ac:spMk id="4" creationId="{F177BEFF-EC66-B56C-890E-B42041C9C45A}"/>
+            <ac:spMk id="4" creationId="{011C7877-FD0D-DC1B-FB6A-84B1834469F8}"/>
           </ac:spMkLst>
         </pc:spChg>
         <pc:spChg chg="mod">
@@ -1979,51 +1979,35 @@
           </ac:spMkLst>
         </pc:spChg>
         <pc:spChg chg="mod">
-          <ac:chgData name="Jonah St. Hilaire" userId="9d0a7af2-d0bd-4748-b50b-5cc37e0fdaa3" providerId="ADAL" clId="{58AAB240-BB3C-43BA-87E9-80C5D70C8BCC}" dt="2026-09-24T21:50:53.745" v="4665" actId="1038"/>
+          <ac:chgData name="Jonah St. Hilaire" userId="9d0a7af2-d0bd-4748-b50b-5cc37e0fdaa3" providerId="ADAL" clId="{58AAB240-BB3C-43BA-87E9-80C5D70C8BCC}" dt="2026-09-28T17:01:56.531" v="5153" actId="1076"/>
           <ac:spMkLst>
             <pc:docMk/>
             <pc:sldMk cId="2711191929" sldId="261"/>
             <ac:spMk id="7" creationId="{CCBCE907-3D3B-AFC4-D341-6303C2308864}"/>
           </ac:spMkLst>
         </pc:spChg>
-        <pc:spChg chg="add del">
-          <ac:chgData name="Jonah St. Hilaire" userId="9d0a7af2-d0bd-4748-b50b-5cc37e0fdaa3" providerId="ADAL" clId="{58AAB240-BB3C-43BA-87E9-80C5D70C8BCC}" dt="2026-09-24T21:51:26.737" v="4712" actId="22"/>
+        <pc:spChg chg="add mod">
+          <ac:chgData name="Jonah St. Hilaire" userId="9d0a7af2-d0bd-4748-b50b-5cc37e0fdaa3" providerId="ADAL" clId="{58AAB240-BB3C-43BA-87E9-80C5D70C8BCC}" dt="2026-09-28T16:13:35.009" v="4988" actId="1038"/>
           <ac:spMkLst>
             <pc:docMk/>
             <pc:sldMk cId="2711191929" sldId="261"/>
-            <ac:spMk id="8" creationId="{88F083EB-582A-78A1-E239-053DB6EBD51A}"/>
+            <ac:spMk id="11" creationId="{C96C720A-B7D9-6BE2-0690-5EB315D0E098}"/>
           </ac:spMkLst>
         </pc:spChg>
-        <pc:spChg chg="add del">
-          <ac:chgData name="Jonah St. Hilaire" userId="9d0a7af2-d0bd-4748-b50b-5cc37e0fdaa3" providerId="ADAL" clId="{58AAB240-BB3C-43BA-87E9-80C5D70C8BCC}" dt="2026-09-24T21:51:26.737" v="4712" actId="22"/>
+        <pc:spChg chg="add mod">
+          <ac:chgData name="Jonah St. Hilaire" userId="9d0a7af2-d0bd-4748-b50b-5cc37e0fdaa3" providerId="ADAL" clId="{58AAB240-BB3C-43BA-87E9-80C5D70C8BCC}" dt="2026-09-28T16:18:28.537" v="5110" actId="20577"/>
           <ac:spMkLst>
             <pc:docMk/>
             <pc:sldMk cId="2711191929" sldId="261"/>
-            <ac:spMk id="10" creationId="{3F2A29B4-4238-1EC1-C81F-D07C12701F4D}"/>
+            <ac:spMk id="13" creationId="{329F44B4-E1E1-4543-8F0B-E3D612AB4D37}"/>
           </ac:spMkLst>
         </pc:spChg>
-        <pc:spChg chg="add del">
-          <ac:chgData name="Jonah St. Hilaire" userId="9d0a7af2-d0bd-4748-b50b-5cc37e0fdaa3" providerId="ADAL" clId="{58AAB240-BB3C-43BA-87E9-80C5D70C8BCC}" dt="2026-09-24T21:51:40.223" v="4716" actId="22"/>
+        <pc:spChg chg="add mod">
+          <ac:chgData name="Jonah St. Hilaire" userId="9d0a7af2-d0bd-4748-b50b-5cc37e0fdaa3" providerId="ADAL" clId="{58AAB240-BB3C-43BA-87E9-80C5D70C8BCC}" dt="2026-09-28T16:19:21.095" v="5152" actId="1035"/>
           <ac:spMkLst>
             <pc:docMk/>
             <pc:sldMk cId="2711191929" sldId="261"/>
-            <ac:spMk id="13" creationId="{FD217A9A-7810-7E77-E8A6-77A9AD842F45}"/>
-          </ac:spMkLst>
-        </pc:spChg>
-        <pc:spChg chg="add del">
-          <ac:chgData name="Jonah St. Hilaire" userId="9d0a7af2-d0bd-4748-b50b-5cc37e0fdaa3" providerId="ADAL" clId="{58AAB240-BB3C-43BA-87E9-80C5D70C8BCC}" dt="2026-09-24T21:51:40.223" v="4716" actId="22"/>
-          <ac:spMkLst>
-            <pc:docMk/>
-            <pc:sldMk cId="2711191929" sldId="261"/>
-            <ac:spMk id="15" creationId="{48DFE09B-B88F-F821-0C5A-729E1CF73970}"/>
-          </ac:spMkLst>
-        </pc:spChg>
-        <pc:spChg chg="add del">
-          <ac:chgData name="Jonah St. Hilaire" userId="9d0a7af2-d0bd-4748-b50b-5cc37e0fdaa3" providerId="ADAL" clId="{58AAB240-BB3C-43BA-87E9-80C5D70C8BCC}" dt="2026-09-24T21:51:40.223" v="4716" actId="22"/>
-          <ac:spMkLst>
-            <pc:docMk/>
-            <pc:sldMk cId="2711191929" sldId="261"/>
-            <ac:spMk id="17" creationId="{0CC2CB41-3438-3364-0412-15BA2CC041F0}"/>
+            <ac:spMk id="17" creationId="{95A25A8A-FE8C-3B3B-7396-8C1250FF0E58}"/>
           </ac:spMkLst>
         </pc:spChg>
         <pc:spChg chg="add mod">
@@ -2042,8 +2026,8 @@
             <ac:spMk id="21" creationId="{1EA8BF07-3938-0EB6-72BF-ACE2AF4BC5C9}"/>
           </ac:spMkLst>
         </pc:spChg>
-        <pc:spChg chg="add mod">
-          <ac:chgData name="Jonah St. Hilaire" userId="9d0a7af2-d0bd-4748-b50b-5cc37e0fdaa3" providerId="ADAL" clId="{58AAB240-BB3C-43BA-87E9-80C5D70C8BCC}" dt="2026-09-24T21:51:57.824" v="4718" actId="1076"/>
+        <pc:spChg chg="add del mod">
+          <ac:chgData name="Jonah St. Hilaire" userId="9d0a7af2-d0bd-4748-b50b-5cc37e0fdaa3" providerId="ADAL" clId="{58AAB240-BB3C-43BA-87E9-80C5D70C8BCC}" dt="2026-09-28T16:13:12.357" v="4920" actId="478"/>
           <ac:spMkLst>
             <pc:docMk/>
             <pc:sldMk cId="2711191929" sldId="261"/>
@@ -2066,12 +2050,28 @@
             <ac:spMk id="26" creationId="{AE55CCCC-A19B-FAC8-8644-6796649C0417}"/>
           </ac:spMkLst>
         </pc:spChg>
-        <pc:spChg chg="add mod">
-          <ac:chgData name="Jonah St. Hilaire" userId="9d0a7af2-d0bd-4748-b50b-5cc37e0fdaa3" providerId="ADAL" clId="{58AAB240-BB3C-43BA-87E9-80C5D70C8BCC}" dt="2026-09-24T21:53:56.095" v="4763" actId="1037"/>
+        <pc:spChg chg="add del mod">
+          <ac:chgData name="Jonah St. Hilaire" userId="9d0a7af2-d0bd-4748-b50b-5cc37e0fdaa3" providerId="ADAL" clId="{58AAB240-BB3C-43BA-87E9-80C5D70C8BCC}" dt="2026-09-28T16:19:17.013" v="5147" actId="478"/>
           <ac:spMkLst>
             <pc:docMk/>
             <pc:sldMk cId="2711191929" sldId="261"/>
             <ac:spMk id="27" creationId="{B6BB7C16-19AE-FFED-DE27-8527649A6F33}"/>
+          </ac:spMkLst>
+        </pc:spChg>
+        <pc:spChg chg="mod">
+          <ac:chgData name="Jonah St. Hilaire" userId="9d0a7af2-d0bd-4748-b50b-5cc37e0fdaa3" providerId="ADAL" clId="{58AAB240-BB3C-43BA-87E9-80C5D70C8BCC}" dt="2026-09-28T17:01:56.531" v="5153" actId="1076"/>
+          <ac:spMkLst>
+            <pc:docMk/>
+            <pc:sldMk cId="2711191929" sldId="261"/>
+            <ac:spMk id="38" creationId="{E147A842-F2EB-F73E-86B7-CA186B19F6C4}"/>
+          </ac:spMkLst>
+        </pc:spChg>
+        <pc:spChg chg="mod">
+          <ac:chgData name="Jonah St. Hilaire" userId="9d0a7af2-d0bd-4748-b50b-5cc37e0fdaa3" providerId="ADAL" clId="{58AAB240-BB3C-43BA-87E9-80C5D70C8BCC}" dt="2026-09-28T17:01:56.531" v="5153" actId="1076"/>
+          <ac:spMkLst>
+            <pc:docMk/>
+            <pc:sldMk cId="2711191929" sldId="261"/>
+            <ac:spMk id="48" creationId="{0AB112CA-CC5F-51E4-DB56-4AF28A40E725}"/>
           </ac:spMkLst>
         </pc:spChg>
         <pc:spChg chg="mod">
@@ -2083,11 +2083,27 @@
           </ac:spMkLst>
         </pc:spChg>
         <pc:spChg chg="mod">
+          <ac:chgData name="Jonah St. Hilaire" userId="9d0a7af2-d0bd-4748-b50b-5cc37e0fdaa3" providerId="ADAL" clId="{58AAB240-BB3C-43BA-87E9-80C5D70C8BCC}" dt="2026-09-28T17:01:56.531" v="5153" actId="1076"/>
+          <ac:spMkLst>
+            <pc:docMk/>
+            <pc:sldMk cId="2711191929" sldId="261"/>
+            <ac:spMk id="64" creationId="{37C54D2F-EEFF-FA08-41E3-5B7FFCF29AD4}"/>
+          </ac:spMkLst>
+        </pc:spChg>
+        <pc:spChg chg="mod">
           <ac:chgData name="Jonah St. Hilaire" userId="9d0a7af2-d0bd-4748-b50b-5cc37e0fdaa3" providerId="ADAL" clId="{58AAB240-BB3C-43BA-87E9-80C5D70C8BCC}" dt="2026-09-24T21:50:53.745" v="4665" actId="1038"/>
           <ac:spMkLst>
             <pc:docMk/>
             <pc:sldMk cId="2711191929" sldId="261"/>
             <ac:spMk id="76" creationId="{151C5F4C-AD0E-1870-D0E6-02489A933D83}"/>
+          </ac:spMkLst>
+        </pc:spChg>
+        <pc:spChg chg="mod">
+          <ac:chgData name="Jonah St. Hilaire" userId="9d0a7af2-d0bd-4748-b50b-5cc37e0fdaa3" providerId="ADAL" clId="{58AAB240-BB3C-43BA-87E9-80C5D70C8BCC}" dt="2026-09-28T17:01:56.531" v="5153" actId="1076"/>
+          <ac:spMkLst>
+            <pc:docMk/>
+            <pc:sldMk cId="2711191929" sldId="261"/>
+            <ac:spMk id="77" creationId="{7FAD317B-4040-8404-B401-6004A30807D4}"/>
           </ac:spMkLst>
         </pc:spChg>
         <pc:spChg chg="mod">
@@ -2131,7 +2147,15 @@
           </ac:spMkLst>
         </pc:spChg>
         <pc:spChg chg="mod">
-          <ac:chgData name="Jonah St. Hilaire" userId="9d0a7af2-d0bd-4748-b50b-5cc37e0fdaa3" providerId="ADAL" clId="{58AAB240-BB3C-43BA-87E9-80C5D70C8BCC}" dt="2026-09-24T21:50:53.745" v="4665" actId="1038"/>
+          <ac:chgData name="Jonah St. Hilaire" userId="9d0a7af2-d0bd-4748-b50b-5cc37e0fdaa3" providerId="ADAL" clId="{58AAB240-BB3C-43BA-87E9-80C5D70C8BCC}" dt="2026-09-28T17:01:56.531" v="5153" actId="1076"/>
+          <ac:spMkLst>
+            <pc:docMk/>
+            <pc:sldMk cId="2711191929" sldId="261"/>
+            <ac:spMk id="133" creationId="{50BAC518-4969-8D68-1E4F-9B6446879155}"/>
+          </ac:spMkLst>
+        </pc:spChg>
+        <pc:spChg chg="mod">
+          <ac:chgData name="Jonah St. Hilaire" userId="9d0a7af2-d0bd-4748-b50b-5cc37e0fdaa3" providerId="ADAL" clId="{58AAB240-BB3C-43BA-87E9-80C5D70C8BCC}" dt="2026-09-28T17:01:56.531" v="5153" actId="1076"/>
           <ac:spMkLst>
             <pc:docMk/>
             <pc:sldMk cId="2711191929" sldId="261"/>
@@ -2139,7 +2163,7 @@
           </ac:spMkLst>
         </pc:spChg>
         <pc:spChg chg="mod">
-          <ac:chgData name="Jonah St. Hilaire" userId="9d0a7af2-d0bd-4748-b50b-5cc37e0fdaa3" providerId="ADAL" clId="{58AAB240-BB3C-43BA-87E9-80C5D70C8BCC}" dt="2026-09-24T21:55:28.752" v="4845" actId="1038"/>
+          <ac:chgData name="Jonah St. Hilaire" userId="9d0a7af2-d0bd-4748-b50b-5cc37e0fdaa3" providerId="ADAL" clId="{58AAB240-BB3C-43BA-87E9-80C5D70C8BCC}" dt="2026-09-28T17:01:56.531" v="5153" actId="1076"/>
           <ac:spMkLst>
             <pc:docMk/>
             <pc:sldMk cId="2711191929" sldId="261"/>
@@ -2179,7 +2203,7 @@
           </ac:spMkLst>
         </pc:spChg>
         <pc:spChg chg="mod">
-          <ac:chgData name="Jonah St. Hilaire" userId="9d0a7af2-d0bd-4748-b50b-5cc37e0fdaa3" providerId="ADAL" clId="{58AAB240-BB3C-43BA-87E9-80C5D70C8BCC}" dt="2026-09-24T21:55:28.752" v="4845" actId="1038"/>
+          <ac:chgData name="Jonah St. Hilaire" userId="9d0a7af2-d0bd-4748-b50b-5cc37e0fdaa3" providerId="ADAL" clId="{58AAB240-BB3C-43BA-87E9-80C5D70C8BCC}" dt="2026-09-28T17:01:56.531" v="5153" actId="1076"/>
           <ac:spMkLst>
             <pc:docMk/>
             <pc:sldMk cId="2711191929" sldId="261"/>
@@ -2195,13 +2219,29 @@
           </ac:spMkLst>
         </pc:spChg>
         <pc:spChg chg="mod">
-          <ac:chgData name="Jonah St. Hilaire" userId="9d0a7af2-d0bd-4748-b50b-5cc37e0fdaa3" providerId="ADAL" clId="{58AAB240-BB3C-43BA-87E9-80C5D70C8BCC}" dt="2026-09-24T21:55:28.752" v="4845" actId="1038"/>
+          <ac:chgData name="Jonah St. Hilaire" userId="9d0a7af2-d0bd-4748-b50b-5cc37e0fdaa3" providerId="ADAL" clId="{58AAB240-BB3C-43BA-87E9-80C5D70C8BCC}" dt="2026-09-28T17:01:56.531" v="5153" actId="1076"/>
           <ac:spMkLst>
             <pc:docMk/>
             <pc:sldMk cId="2711191929" sldId="261"/>
             <ac:spMk id="207" creationId="{1AF226F3-0B10-7E99-7F7F-BA0048598D8B}"/>
           </ac:spMkLst>
         </pc:spChg>
+        <pc:cxnChg chg="add mod">
+          <ac:chgData name="Jonah St. Hilaire" userId="9d0a7af2-d0bd-4748-b50b-5cc37e0fdaa3" providerId="ADAL" clId="{58AAB240-BB3C-43BA-87E9-80C5D70C8BCC}" dt="2026-09-28T16:17:00.206" v="5054" actId="1036"/>
+          <ac:cxnSpMkLst>
+            <pc:docMk/>
+            <pc:sldMk cId="2711191929" sldId="261"/>
+            <ac:cxnSpMk id="8" creationId="{B242F009-EC7A-415C-B407-E45ED6E2E27D}"/>
+          </ac:cxnSpMkLst>
+        </pc:cxnChg>
+        <pc:cxnChg chg="add mod">
+          <ac:chgData name="Jonah St. Hilaire" userId="9d0a7af2-d0bd-4748-b50b-5cc37e0fdaa3" providerId="ADAL" clId="{58AAB240-BB3C-43BA-87E9-80C5D70C8BCC}" dt="2026-09-28T16:17:09.685" v="5055" actId="692"/>
+          <ac:cxnSpMkLst>
+            <pc:docMk/>
+            <pc:sldMk cId="2711191929" sldId="261"/>
+            <ac:cxnSpMk id="15" creationId="{30E710BB-FB78-C6FE-1CE4-BD83B690F8DD}"/>
+          </ac:cxnSpMkLst>
+        </pc:cxnChg>
         <pc:cxnChg chg="add mod">
           <ac:chgData name="Jonah St. Hilaire" userId="9d0a7af2-d0bd-4748-b50b-5cc37e0fdaa3" providerId="ADAL" clId="{58AAB240-BB3C-43BA-87E9-80C5D70C8BCC}" dt="2026-09-24T21:52:17.933" v="4748" actId="1038"/>
           <ac:cxnSpMkLst>
@@ -2338,7 +2378,7 @@
           <a:p>
             <a:fld id="{681B76C8-650E-46E7-9239-6D2B71F9A944}" type="datetimeFigureOut">
               <a:rPr lang="en-CA" smtClean="0"/>
-              <a:t>2026-09-24</a:t>
+              <a:t>2026-09-28</a:t>
             </a:fld>
             <a:endParaRPr lang="en-CA"/>
           </a:p>
@@ -2821,7 +2861,7 @@
           <a:p>
             <a:fld id="{14C7401E-E5C6-4ADA-88C9-F7478DD83A36}" type="datetimeFigureOut">
               <a:rPr lang="en-CA" smtClean="0"/>
-              <a:t>2026-09-24</a:t>
+              <a:t>2026-09-28</a:t>
             </a:fld>
             <a:endParaRPr lang="en-CA"/>
           </a:p>
@@ -2991,7 +3031,7 @@
           <a:p>
             <a:fld id="{14C7401E-E5C6-4ADA-88C9-F7478DD83A36}" type="datetimeFigureOut">
               <a:rPr lang="en-CA" smtClean="0"/>
-              <a:t>2026-09-24</a:t>
+              <a:t>2026-09-28</a:t>
             </a:fld>
             <a:endParaRPr lang="en-CA"/>
           </a:p>
@@ -3171,7 +3211,7 @@
           <a:p>
             <a:fld id="{14C7401E-E5C6-4ADA-88C9-F7478DD83A36}" type="datetimeFigureOut">
               <a:rPr lang="en-CA" smtClean="0"/>
-              <a:t>2026-09-24</a:t>
+              <a:t>2026-09-28</a:t>
             </a:fld>
             <a:endParaRPr lang="en-CA"/>
           </a:p>
@@ -3341,7 +3381,7 @@
           <a:p>
             <a:fld id="{14C7401E-E5C6-4ADA-88C9-F7478DD83A36}" type="datetimeFigureOut">
               <a:rPr lang="en-CA" smtClean="0"/>
-              <a:t>2026-09-24</a:t>
+              <a:t>2026-09-28</a:t>
             </a:fld>
             <a:endParaRPr lang="en-CA"/>
           </a:p>
@@ -3587,7 +3627,7 @@
           <a:p>
             <a:fld id="{14C7401E-E5C6-4ADA-88C9-F7478DD83A36}" type="datetimeFigureOut">
               <a:rPr lang="en-CA" smtClean="0"/>
-              <a:t>2026-09-24</a:t>
+              <a:t>2026-09-28</a:t>
             </a:fld>
             <a:endParaRPr lang="en-CA"/>
           </a:p>
@@ -3819,7 +3859,7 @@
           <a:p>
             <a:fld id="{14C7401E-E5C6-4ADA-88C9-F7478DD83A36}" type="datetimeFigureOut">
               <a:rPr lang="en-CA" smtClean="0"/>
-              <a:t>2026-09-24</a:t>
+              <a:t>2026-09-28</a:t>
             </a:fld>
             <a:endParaRPr lang="en-CA"/>
           </a:p>
@@ -4186,7 +4226,7 @@
           <a:p>
             <a:fld id="{14C7401E-E5C6-4ADA-88C9-F7478DD83A36}" type="datetimeFigureOut">
               <a:rPr lang="en-CA" smtClean="0"/>
-              <a:t>2026-09-24</a:t>
+              <a:t>2026-09-28</a:t>
             </a:fld>
             <a:endParaRPr lang="en-CA"/>
           </a:p>
@@ -4304,7 +4344,7 @@
           <a:p>
             <a:fld id="{14C7401E-E5C6-4ADA-88C9-F7478DD83A36}" type="datetimeFigureOut">
               <a:rPr lang="en-CA" smtClean="0"/>
-              <a:t>2026-09-24</a:t>
+              <a:t>2026-09-28</a:t>
             </a:fld>
             <a:endParaRPr lang="en-CA"/>
           </a:p>
@@ -4399,7 +4439,7 @@
           <a:p>
             <a:fld id="{14C7401E-E5C6-4ADA-88C9-F7478DD83A36}" type="datetimeFigureOut">
               <a:rPr lang="en-CA" smtClean="0"/>
-              <a:t>2026-09-24</a:t>
+              <a:t>2026-09-28</a:t>
             </a:fld>
             <a:endParaRPr lang="en-CA"/>
           </a:p>
@@ -4676,7 +4716,7 @@
           <a:p>
             <a:fld id="{14C7401E-E5C6-4ADA-88C9-F7478DD83A36}" type="datetimeFigureOut">
               <a:rPr lang="en-CA" smtClean="0"/>
-              <a:t>2026-09-24</a:t>
+              <a:t>2026-09-28</a:t>
             </a:fld>
             <a:endParaRPr lang="en-CA"/>
           </a:p>
@@ -4933,7 +4973,7 @@
           <a:p>
             <a:fld id="{14C7401E-E5C6-4ADA-88C9-F7478DD83A36}" type="datetimeFigureOut">
               <a:rPr lang="en-CA" smtClean="0"/>
-              <a:t>2026-09-24</a:t>
+              <a:t>2026-09-28</a:t>
             </a:fld>
             <a:endParaRPr lang="en-CA"/>
           </a:p>
@@ -5146,7 +5186,7 @@
           <a:p>
             <a:fld id="{14C7401E-E5C6-4ADA-88C9-F7478DD83A36}" type="datetimeFigureOut">
               <a:rPr lang="en-CA" smtClean="0"/>
-              <a:t>2026-09-24</a:t>
+              <a:t>2026-09-28</a:t>
             </a:fld>
             <a:endParaRPr lang="en-CA"/>
           </a:p>
@@ -36939,7 +36979,7 @@
             </p:nvSpPr>
             <p:spPr>
               <a:xfrm>
-                <a:off x="13004710" y="1871576"/>
+                <a:off x="11798210" y="2265276"/>
                 <a:ext cx="304800" cy="307777"/>
               </a:xfrm>
               <a:prstGeom prst="rect">
@@ -37021,7 +37061,7 @@
             </p:nvSpPr>
             <p:spPr>
               <a:xfrm>
-                <a:off x="13004710" y="1871576"/>
+                <a:off x="11798210" y="2265276"/>
                 <a:ext cx="304800" cy="307777"/>
               </a:xfrm>
               <a:prstGeom prst="rect">
@@ -37065,7 +37105,7 @@
             </p:nvSpPr>
             <p:spPr>
               <a:xfrm>
-                <a:off x="13004710" y="1487495"/>
+                <a:off x="11798210" y="1881195"/>
                 <a:ext cx="304800" cy="309124"/>
               </a:xfrm>
               <a:prstGeom prst="rect">
@@ -37147,7 +37187,7 @@
             </p:nvSpPr>
             <p:spPr>
               <a:xfrm>
-                <a:off x="13004710" y="1487495"/>
+                <a:off x="11798210" y="1881195"/>
                 <a:ext cx="304800" cy="309124"/>
               </a:xfrm>
               <a:prstGeom prst="rect">
@@ -37156,7 +37196,7 @@
               <a:blipFill>
                 <a:blip r:embed="rId3"/>
                 <a:stretch>
-                  <a:fillRect r="-4000" b="-1961"/>
+                  <a:fillRect r="-4000" b="-2000"/>
                 </a:stretch>
               </a:blipFill>
             </p:spPr>
@@ -37191,7 +37231,7 @@
         </p:nvCxnSpPr>
         <p:spPr>
           <a:xfrm>
-            <a:off x="12909992" y="1413165"/>
+            <a:off x="11703492" y="1806865"/>
             <a:ext cx="648000" cy="0"/>
           </a:xfrm>
           <a:prstGeom prst="straightConnector1">
@@ -37235,7 +37275,7 @@
         </p:nvCxnSpPr>
         <p:spPr>
           <a:xfrm>
-            <a:off x="12909992" y="2173862"/>
+            <a:off x="11703492" y="2567562"/>
             <a:ext cx="648000" cy="0"/>
           </a:xfrm>
           <a:prstGeom prst="straightConnector1">
@@ -37279,7 +37319,7 @@
         </p:nvCxnSpPr>
         <p:spPr>
           <a:xfrm>
-            <a:off x="12909992" y="1787163"/>
+            <a:off x="11703492" y="2180863"/>
             <a:ext cx="648000" cy="0"/>
           </a:xfrm>
           <a:prstGeom prst="straightConnector1">
@@ -37323,7 +37363,7 @@
             </p:nvSpPr>
             <p:spPr>
               <a:xfrm>
-                <a:off x="13004710" y="1115277"/>
+                <a:off x="11798210" y="1508977"/>
                 <a:ext cx="304800" cy="307777"/>
               </a:xfrm>
               <a:prstGeom prst="rect">
@@ -37405,7 +37445,7 @@
             </p:nvSpPr>
             <p:spPr>
               <a:xfrm>
-                <a:off x="13004710" y="1115277"/>
+                <a:off x="11798210" y="1508977"/>
                 <a:ext cx="304800" cy="307777"/>
               </a:xfrm>
               <a:prstGeom prst="rect">
@@ -37449,7 +37489,7 @@
             </p:nvSpPr>
             <p:spPr>
               <a:xfrm>
-                <a:off x="14890631" y="1876275"/>
+                <a:off x="13684131" y="2269975"/>
                 <a:ext cx="304800" cy="307777"/>
               </a:xfrm>
               <a:prstGeom prst="rect">
@@ -37520,7 +37560,7 @@
             </p:nvSpPr>
             <p:spPr>
               <a:xfrm>
-                <a:off x="14890631" y="1876275"/>
+                <a:off x="13684131" y="2269975"/>
                 <a:ext cx="304800" cy="307777"/>
               </a:xfrm>
               <a:prstGeom prst="rect">
@@ -37564,7 +37604,7 @@
             </p:nvSpPr>
             <p:spPr>
               <a:xfrm>
-                <a:off x="14890631" y="1487430"/>
+                <a:off x="13684131" y="1881130"/>
                 <a:ext cx="304800" cy="307777"/>
               </a:xfrm>
               <a:prstGeom prst="rect">
@@ -37635,7 +37675,7 @@
             </p:nvSpPr>
             <p:spPr>
               <a:xfrm>
-                <a:off x="14890631" y="1487430"/>
+                <a:off x="13684131" y="1881130"/>
                 <a:ext cx="304800" cy="307777"/>
               </a:xfrm>
               <a:prstGeom prst="rect">
@@ -37679,7 +37719,7 @@
         </p:nvCxnSpPr>
         <p:spPr>
           <a:xfrm>
-            <a:off x="14795913" y="1413102"/>
+            <a:off x="13589413" y="1806802"/>
             <a:ext cx="648000" cy="0"/>
           </a:xfrm>
           <a:prstGeom prst="straightConnector1">
@@ -37723,7 +37763,7 @@
         </p:nvCxnSpPr>
         <p:spPr>
           <a:xfrm>
-            <a:off x="14795913" y="2173799"/>
+            <a:off x="13589413" y="2567499"/>
             <a:ext cx="648000" cy="0"/>
           </a:xfrm>
           <a:prstGeom prst="straightConnector1">
@@ -37767,7 +37807,7 @@
         </p:nvCxnSpPr>
         <p:spPr>
           <a:xfrm>
-            <a:off x="14795913" y="1787100"/>
+            <a:off x="13589413" y="2180800"/>
             <a:ext cx="648000" cy="0"/>
           </a:xfrm>
           <a:prstGeom prst="straightConnector1">
@@ -37811,7 +37851,7 @@
             </p:nvSpPr>
             <p:spPr>
               <a:xfrm>
-                <a:off x="14890631" y="1115213"/>
+                <a:off x="13684131" y="1508913"/>
                 <a:ext cx="304800" cy="307777"/>
               </a:xfrm>
               <a:prstGeom prst="rect">
@@ -37882,7 +37922,7 @@
             </p:nvSpPr>
             <p:spPr>
               <a:xfrm>
-                <a:off x="14890631" y="1115213"/>
+                <a:off x="13684131" y="1508913"/>
                 <a:ext cx="304800" cy="307777"/>
               </a:xfrm>
               <a:prstGeom prst="rect">
@@ -37926,7 +37966,7 @@
         </p:nvSpPr>
         <p:spPr>
           <a:xfrm>
-            <a:off x="18201484" y="1221583"/>
+            <a:off x="16994984" y="1615283"/>
             <a:ext cx="1134000" cy="1134000"/>
           </a:xfrm>
           <a:prstGeom prst="ellipse">
@@ -38004,7 +38044,7 @@
         </p:nvCxnSpPr>
         <p:spPr>
           <a:xfrm>
-            <a:off x="16674939" y="1787102"/>
+            <a:off x="15468439" y="2180802"/>
             <a:ext cx="1526545" cy="1481"/>
           </a:xfrm>
           <a:prstGeom prst="straightConnector1">
@@ -38049,7 +38089,7 @@
         </p:nvCxnSpPr>
         <p:spPr>
           <a:xfrm>
-            <a:off x="16679889" y="1409603"/>
+            <a:off x="15473389" y="1803303"/>
             <a:ext cx="1654517" cy="5434"/>
           </a:xfrm>
           <a:prstGeom prst="straightConnector1">
@@ -38093,7 +38133,7 @@
         </p:nvCxnSpPr>
         <p:spPr>
           <a:xfrm>
-            <a:off x="16679879" y="2157315"/>
+            <a:off x="15473379" y="2551015"/>
             <a:ext cx="1660877" cy="7022"/>
           </a:xfrm>
           <a:prstGeom prst="straightConnector1">
@@ -38135,7 +38175,7 @@
         </p:nvSpPr>
         <p:spPr>
           <a:xfrm>
-            <a:off x="17904579" y="2375045"/>
+            <a:off x="16698079" y="2768745"/>
             <a:ext cx="1720161" cy="548617"/>
           </a:xfrm>
           <a:prstGeom prst="roundRect">
@@ -38229,7 +38269,7 @@
             </p:nvSpPr>
             <p:spPr>
               <a:xfrm>
-                <a:off x="17904577" y="3342372"/>
+                <a:off x="16698077" y="3736072"/>
                 <a:ext cx="1720161" cy="548618"/>
               </a:xfrm>
               <a:prstGeom prst="roundRect">
@@ -38356,7 +38396,7 @@
             </p:nvSpPr>
             <p:spPr>
               <a:xfrm>
-                <a:off x="17904577" y="3342372"/>
+                <a:off x="16698077" y="3736072"/>
                 <a:ext cx="1720161" cy="548618"/>
               </a:xfrm>
               <a:prstGeom prst="roundRect">
@@ -38407,7 +38447,7 @@
             </p:nvSpPr>
             <p:spPr>
               <a:xfrm>
-                <a:off x="17904578" y="4309700"/>
+                <a:off x="16698078" y="4703400"/>
                 <a:ext cx="1720161" cy="548618"/>
               </a:xfrm>
               <a:prstGeom prst="roundRect">
@@ -38534,7 +38574,7 @@
             </p:nvSpPr>
             <p:spPr>
               <a:xfrm>
-                <a:off x="17904578" y="4309700"/>
+                <a:off x="16698078" y="4703400"/>
                 <a:ext cx="1720161" cy="548618"/>
               </a:xfrm>
               <a:prstGeom prst="roundRect">
@@ -38587,7 +38627,7 @@
         </p:nvCxnSpPr>
         <p:spPr>
           <a:xfrm flipH="1">
-            <a:off x="18764658" y="2923662"/>
+            <a:off x="17558158" y="3317362"/>
             <a:ext cx="2" cy="418710"/>
           </a:xfrm>
           <a:prstGeom prst="straightConnector1">
@@ -38631,7 +38671,7 @@
             </p:nvSpPr>
             <p:spPr>
               <a:xfrm>
-                <a:off x="17206756" y="1860075"/>
+                <a:off x="16000256" y="2253775"/>
                 <a:ext cx="304800" cy="307777"/>
               </a:xfrm>
               <a:prstGeom prst="rect">
@@ -38702,7 +38742,7 @@
             </p:nvSpPr>
             <p:spPr>
               <a:xfrm>
-                <a:off x="17206756" y="1860075"/>
+                <a:off x="16000256" y="2253775"/>
                 <a:ext cx="304800" cy="307777"/>
               </a:xfrm>
               <a:prstGeom prst="rect">
@@ -38746,7 +38786,7 @@
             </p:nvSpPr>
             <p:spPr>
               <a:xfrm>
-                <a:off x="17206756" y="1488694"/>
+                <a:off x="16000256" y="1882394"/>
                 <a:ext cx="304800" cy="307777"/>
               </a:xfrm>
               <a:prstGeom prst="rect">
@@ -38817,7 +38857,7 @@
             </p:nvSpPr>
             <p:spPr>
               <a:xfrm>
-                <a:off x="17206756" y="1488694"/>
+                <a:off x="16000256" y="1882394"/>
                 <a:ext cx="304800" cy="307777"/>
               </a:xfrm>
               <a:prstGeom prst="rect">
@@ -38861,7 +38901,7 @@
             </p:nvSpPr>
             <p:spPr>
               <a:xfrm>
-                <a:off x="17206756" y="1116476"/>
+                <a:off x="16000256" y="1510176"/>
                 <a:ext cx="304800" cy="307777"/>
               </a:xfrm>
               <a:prstGeom prst="rect">
@@ -38932,7 +38972,7 @@
             </p:nvSpPr>
             <p:spPr>
               <a:xfrm>
-                <a:off x="17206756" y="1116476"/>
+                <a:off x="16000256" y="1510176"/>
                 <a:ext cx="304800" cy="307777"/>
               </a:xfrm>
               <a:prstGeom prst="rect">
@@ -38976,7 +39016,7 @@
         </p:nvCxnSpPr>
         <p:spPr>
           <a:xfrm>
-            <a:off x="16059332" y="2407891"/>
+            <a:off x="14852832" y="2801591"/>
             <a:ext cx="0" cy="1169077"/>
           </a:xfrm>
           <a:prstGeom prst="straightConnector1">
@@ -39020,7 +39060,7 @@
         </p:nvCxnSpPr>
         <p:spPr>
           <a:xfrm>
-            <a:off x="15687857" y="2411066"/>
+            <a:off x="14481357" y="2804766"/>
             <a:ext cx="0" cy="1169077"/>
           </a:xfrm>
           <a:prstGeom prst="straightConnector1">
@@ -39064,7 +39104,7 @@
         </p:nvCxnSpPr>
         <p:spPr>
           <a:xfrm>
-            <a:off x="16433982" y="2406189"/>
+            <a:off x="15227482" y="2799889"/>
             <a:ext cx="0" cy="1169077"/>
           </a:xfrm>
           <a:prstGeom prst="straightConnector1">
@@ -39108,7 +39148,7 @@
             </p:nvSpPr>
             <p:spPr>
               <a:xfrm>
-                <a:off x="15443739" y="2819959"/>
+                <a:off x="14237239" y="3213659"/>
                 <a:ext cx="304800" cy="307777"/>
               </a:xfrm>
               <a:prstGeom prst="rect">
@@ -39179,7 +39219,7 @@
             </p:nvSpPr>
             <p:spPr>
               <a:xfrm>
-                <a:off x="15443739" y="2819959"/>
+                <a:off x="14237239" y="3213659"/>
                 <a:ext cx="304800" cy="307777"/>
               </a:xfrm>
               <a:prstGeom prst="rect">
@@ -39223,7 +39263,7 @@
             </p:nvSpPr>
             <p:spPr>
               <a:xfrm>
-                <a:off x="15818388" y="2822016"/>
+                <a:off x="14611888" y="3215716"/>
                 <a:ext cx="304800" cy="307777"/>
               </a:xfrm>
               <a:prstGeom prst="rect">
@@ -39294,7 +39334,7 @@
             </p:nvSpPr>
             <p:spPr>
               <a:xfrm>
-                <a:off x="15818388" y="2822016"/>
+                <a:off x="14611888" y="3215716"/>
                 <a:ext cx="304800" cy="307777"/>
               </a:xfrm>
               <a:prstGeom prst="rect">
@@ -39338,7 +39378,7 @@
             </p:nvSpPr>
             <p:spPr>
               <a:xfrm>
-                <a:off x="16195857" y="2821838"/>
+                <a:off x="14989357" y="3215538"/>
                 <a:ext cx="304800" cy="307777"/>
               </a:xfrm>
               <a:prstGeom prst="rect">
@@ -39409,7 +39449,7 @@
             </p:nvSpPr>
             <p:spPr>
               <a:xfrm>
-                <a:off x="16195857" y="2821838"/>
+                <a:off x="14989357" y="3215538"/>
                 <a:ext cx="304800" cy="307777"/>
               </a:xfrm>
               <a:prstGeom prst="rect">
@@ -39453,7 +39493,7 @@
             </p:nvSpPr>
             <p:spPr>
               <a:xfrm>
-                <a:off x="9222732" y="3522583"/>
+                <a:off x="8016232" y="3916283"/>
                 <a:ext cx="304800" cy="307777"/>
               </a:xfrm>
               <a:prstGeom prst="rect">
@@ -39524,7 +39564,7 @@
             </p:nvSpPr>
             <p:spPr>
               <a:xfrm>
-                <a:off x="9222732" y="3522583"/>
+                <a:off x="8016232" y="3916283"/>
                 <a:ext cx="304800" cy="307777"/>
               </a:xfrm>
               <a:prstGeom prst="rect">
@@ -39568,7 +39608,7 @@
             </p:nvSpPr>
             <p:spPr>
               <a:xfrm>
-                <a:off x="9222732" y="4241350"/>
+                <a:off x="8016232" y="4635050"/>
                 <a:ext cx="304800" cy="324384"/>
               </a:xfrm>
               <a:prstGeom prst="rect">
@@ -39639,7 +39679,7 @@
             </p:nvSpPr>
             <p:spPr>
               <a:xfrm>
-                <a:off x="9222732" y="4241350"/>
+                <a:off x="8016232" y="4635050"/>
                 <a:ext cx="304800" cy="324384"/>
               </a:xfrm>
               <a:prstGeom prst="rect">
@@ -39683,7 +39723,7 @@
         </p:nvSpPr>
         <p:spPr>
           <a:xfrm>
-            <a:off x="11678949" y="1174989"/>
+            <a:off x="10472449" y="1568689"/>
             <a:ext cx="1231364" cy="1231364"/>
           </a:xfrm>
           <a:prstGeom prst="roundRect">
@@ -39808,7 +39848,7 @@
         </p:nvSpPr>
         <p:spPr>
           <a:xfrm>
-            <a:off x="13562942" y="1174989"/>
+            <a:off x="12356442" y="1568689"/>
             <a:ext cx="1231364" cy="1231364"/>
           </a:xfrm>
           <a:prstGeom prst="roundRect">
@@ -39878,7 +39918,7 @@
         </p:nvGrpSpPr>
         <p:grpSpPr>
           <a:xfrm>
-            <a:off x="15443739" y="1174989"/>
+            <a:off x="14237239" y="1568689"/>
             <a:ext cx="1231200" cy="1231200"/>
             <a:chOff x="30365779" y="3139413"/>
             <a:chExt cx="2146840" cy="2592670"/>
@@ -40073,7 +40113,7 @@
             </p:nvSpPr>
             <p:spPr>
               <a:xfrm>
-                <a:off x="11111857" y="1110784"/>
+                <a:off x="9905357" y="1504484"/>
                 <a:ext cx="304800" cy="307777"/>
               </a:xfrm>
               <a:prstGeom prst="rect">
@@ -40157,7 +40197,7 @@
             </p:nvSpPr>
             <p:spPr>
               <a:xfrm>
-                <a:off x="11111857" y="1110784"/>
+                <a:off x="9905357" y="1504484"/>
                 <a:ext cx="304800" cy="307777"/>
               </a:xfrm>
               <a:prstGeom prst="rect">
@@ -40201,7 +40241,7 @@
             </p:nvSpPr>
             <p:spPr>
               <a:xfrm>
-                <a:off x="11111857" y="1843491"/>
+                <a:off x="9905357" y="2237191"/>
                 <a:ext cx="304800" cy="335733"/>
               </a:xfrm>
               <a:prstGeom prst="rect">
@@ -40281,7 +40321,7 @@
             </p:nvSpPr>
             <p:spPr>
               <a:xfrm>
-                <a:off x="11111857" y="1843491"/>
+                <a:off x="9905357" y="2237191"/>
                 <a:ext cx="304800" cy="335733"/>
               </a:xfrm>
               <a:prstGeom prst="rect">
@@ -40290,7 +40330,7 @@
               <a:blipFill>
                 <a:blip r:embed="rId20"/>
                 <a:stretch>
-                  <a:fillRect r="-8000" b="-5455"/>
+                  <a:fillRect r="-8000" b="-3636"/>
                 </a:stretch>
               </a:blipFill>
             </p:spPr>
@@ -40325,7 +40365,7 @@
         </p:nvCxnSpPr>
         <p:spPr>
           <a:xfrm>
-            <a:off x="11027501" y="1412493"/>
+            <a:off x="9821001" y="1806193"/>
             <a:ext cx="648000" cy="0"/>
           </a:xfrm>
           <a:prstGeom prst="straightConnector1">
@@ -40369,7 +40409,7 @@
         </p:nvCxnSpPr>
         <p:spPr>
           <a:xfrm>
-            <a:off x="11027501" y="2173190"/>
+            <a:off x="9821001" y="2566890"/>
             <a:ext cx="648000" cy="0"/>
           </a:xfrm>
           <a:prstGeom prst="straightConnector1">
@@ -40413,7 +40453,7 @@
         </p:nvSpPr>
         <p:spPr>
           <a:xfrm>
-            <a:off x="9791187" y="1174989"/>
+            <a:off x="8584687" y="1568689"/>
             <a:ext cx="1231364" cy="1231364"/>
           </a:xfrm>
           <a:prstGeom prst="roundRect">
@@ -40548,7 +40588,7 @@
         </p:nvCxnSpPr>
         <p:spPr>
           <a:xfrm flipH="1">
-            <a:off x="13072336" y="3822740"/>
+            <a:off x="11865836" y="4216440"/>
             <a:ext cx="2361081" cy="0"/>
           </a:xfrm>
           <a:prstGeom prst="straightConnector1">
@@ -40592,7 +40632,7 @@
         </p:nvCxnSpPr>
         <p:spPr>
           <a:xfrm flipH="1">
-            <a:off x="13069955" y="4556187"/>
+            <a:off x="11863455" y="4949887"/>
             <a:ext cx="2363621" cy="0"/>
           </a:xfrm>
           <a:prstGeom prst="straightConnector1">
@@ -40636,7 +40676,7 @@
             </p:nvSpPr>
             <p:spPr>
               <a:xfrm>
-                <a:off x="14113172" y="3523253"/>
+                <a:off x="12906672" y="3916953"/>
                 <a:ext cx="304800" cy="307777"/>
               </a:xfrm>
               <a:prstGeom prst="rect">
@@ -40707,7 +40747,7 @@
             </p:nvSpPr>
             <p:spPr>
               <a:xfrm>
-                <a:off x="14113172" y="3523253"/>
+                <a:off x="12906672" y="3916953"/>
                 <a:ext cx="304800" cy="307777"/>
               </a:xfrm>
               <a:prstGeom prst="rect">
@@ -40751,7 +40791,7 @@
             </p:nvSpPr>
             <p:spPr>
               <a:xfrm>
-                <a:off x="14117934" y="4239137"/>
+                <a:off x="12911434" y="4632837"/>
                 <a:ext cx="304800" cy="326949"/>
               </a:xfrm>
               <a:prstGeom prst="rect">
@@ -40822,7 +40862,7 @@
             </p:nvSpPr>
             <p:spPr>
               <a:xfrm>
-                <a:off x="14117934" y="4239137"/>
+                <a:off x="12911434" y="4632837"/>
                 <a:ext cx="304800" cy="326949"/>
               </a:xfrm>
               <a:prstGeom prst="rect">
@@ -40831,7 +40871,7 @@
               <a:blipFill>
                 <a:blip r:embed="rId22"/>
                 <a:stretch>
-                  <a:fillRect b="-3704"/>
+                  <a:fillRect b="-1852"/>
                 </a:stretch>
               </a:blipFill>
             </p:spPr>
@@ -40867,7 +40907,7 @@
         </p:nvCxnSpPr>
         <p:spPr>
           <a:xfrm>
-            <a:off x="18764658" y="3890990"/>
+            <a:off x="17558158" y="4284690"/>
             <a:ext cx="1" cy="418710"/>
           </a:xfrm>
           <a:prstGeom prst="straightConnector1">
@@ -40909,7 +40949,7 @@
         </p:nvSpPr>
         <p:spPr>
           <a:xfrm>
-            <a:off x="6800080" y="1200160"/>
+            <a:off x="5593580" y="1593860"/>
             <a:ext cx="1409421" cy="424801"/>
           </a:xfrm>
           <a:prstGeom prst="roundRect">
@@ -40985,7 +41025,7 @@
         </p:nvSpPr>
         <p:spPr>
           <a:xfrm>
-            <a:off x="6800080" y="1930782"/>
+            <a:off x="5593580" y="2324482"/>
             <a:ext cx="1409421" cy="424801"/>
           </a:xfrm>
           <a:prstGeom prst="roundRect">
@@ -41063,7 +41103,7 @@
             </p:nvSpPr>
             <p:spPr>
               <a:xfrm>
-                <a:off x="9222732" y="1110784"/>
+                <a:off x="8016232" y="1504484"/>
                 <a:ext cx="304800" cy="307777"/>
               </a:xfrm>
               <a:prstGeom prst="rect">
@@ -41142,7 +41182,7 @@
             </p:nvSpPr>
             <p:spPr>
               <a:xfrm>
-                <a:off x="9222732" y="1110784"/>
+                <a:off x="8016232" y="1504484"/>
                 <a:ext cx="304800" cy="307777"/>
               </a:xfrm>
               <a:prstGeom prst="rect">
@@ -41186,7 +41226,7 @@
             </p:nvSpPr>
             <p:spPr>
               <a:xfrm>
-                <a:off x="9222732" y="1823649"/>
+                <a:off x="8016232" y="2217349"/>
                 <a:ext cx="304800" cy="324384"/>
               </a:xfrm>
               <a:prstGeom prst="rect">
@@ -41265,7 +41305,7 @@
             </p:nvSpPr>
             <p:spPr>
               <a:xfrm>
-                <a:off x="9222732" y="1823649"/>
+                <a:off x="8016232" y="2217349"/>
                 <a:ext cx="304800" cy="324384"/>
               </a:xfrm>
               <a:prstGeom prst="rect">
@@ -41309,7 +41349,7 @@
         </p:nvCxnSpPr>
         <p:spPr>
           <a:xfrm>
-            <a:off x="9138376" y="1412493"/>
+            <a:off x="7931876" y="1806193"/>
             <a:ext cx="648000" cy="0"/>
           </a:xfrm>
           <a:prstGeom prst="straightConnector1">
@@ -41353,7 +41393,7 @@
         </p:nvCxnSpPr>
         <p:spPr>
           <a:xfrm>
-            <a:off x="9138376" y="2143823"/>
+            <a:off x="7931876" y="2537523"/>
             <a:ext cx="648000" cy="0"/>
           </a:xfrm>
           <a:prstGeom prst="straightConnector1">
@@ -41397,7 +41437,7 @@
             </p:nvSpPr>
             <p:spPr>
               <a:xfrm>
-                <a:off x="9791187" y="2778326"/>
+                <a:off x="8584687" y="3172026"/>
                 <a:ext cx="1231364" cy="424802"/>
               </a:xfrm>
               <a:prstGeom prst="roundRect">
@@ -41524,7 +41564,7 @@
             </p:nvSpPr>
             <p:spPr>
               <a:xfrm>
-                <a:off x="9791187" y="2778326"/>
+                <a:off x="8584687" y="3172026"/>
                 <a:ext cx="1231364" cy="424802"/>
               </a:xfrm>
               <a:prstGeom prst="roundRect">
@@ -41533,7 +41573,7 @@
               <a:blipFill>
                 <a:blip r:embed="rId25"/>
                 <a:stretch>
-                  <a:fillRect b="-9722"/>
+                  <a:fillRect b="-8219"/>
                 </a:stretch>
               </a:blipFill>
               <a:ln w="19050">
@@ -41576,7 +41616,7 @@
         </p:nvCxnSpPr>
         <p:spPr>
           <a:xfrm flipV="1">
-            <a:off x="10406869" y="2406353"/>
+            <a:off x="9200369" y="2800053"/>
             <a:ext cx="0" cy="371973"/>
           </a:xfrm>
           <a:prstGeom prst="straightConnector1">
@@ -41620,7 +41660,7 @@
             </p:nvSpPr>
             <p:spPr>
               <a:xfrm>
-                <a:off x="11838956" y="5174349"/>
+                <a:off x="10632456" y="5568049"/>
                 <a:ext cx="1231364" cy="424802"/>
               </a:xfrm>
               <a:prstGeom prst="roundRect">
@@ -41747,7 +41787,7 @@
             </p:nvSpPr>
             <p:spPr>
               <a:xfrm>
-                <a:off x="11838956" y="5174349"/>
+                <a:off x="10632456" y="5568049"/>
                 <a:ext cx="1231364" cy="424802"/>
               </a:xfrm>
               <a:prstGeom prst="roundRect">
@@ -41756,7 +41796,7 @@
               <a:blipFill>
                 <a:blip r:embed="rId25"/>
                 <a:stretch>
-                  <a:fillRect b="-9722"/>
+                  <a:fillRect b="-8219"/>
                 </a:stretch>
               </a:blipFill>
               <a:ln w="19050">
@@ -41798,7 +41838,7 @@
         </p:nvCxnSpPr>
         <p:spPr>
           <a:xfrm flipV="1">
-            <a:off x="12454638" y="4802376"/>
+            <a:off x="11248138" y="5196076"/>
             <a:ext cx="0" cy="371973"/>
           </a:xfrm>
           <a:prstGeom prst="straightConnector1">
@@ -41842,7 +41882,7 @@
         </p:nvSpPr>
         <p:spPr>
           <a:xfrm>
-            <a:off x="15443739" y="3578553"/>
+            <a:off x="14237239" y="3972253"/>
             <a:ext cx="1231364" cy="1231364"/>
           </a:xfrm>
           <a:prstGeom prst="roundRect">
@@ -41987,7 +42027,7 @@
         </p:nvSpPr>
         <p:spPr>
           <a:xfrm>
-            <a:off x="6024422" y="1286211"/>
+            <a:off x="4817922" y="1679911"/>
             <a:ext cx="252450" cy="252000"/>
           </a:xfrm>
           <a:prstGeom prst="ellipse">
@@ -42041,7 +42081,7 @@
         </p:nvSpPr>
         <p:spPr>
           <a:xfrm>
-            <a:off x="5829030" y="1086142"/>
+            <a:off x="4622530" y="1479842"/>
             <a:ext cx="177024" cy="307777"/>
           </a:xfrm>
           <a:prstGeom prst="rect">
@@ -42077,7 +42117,7 @@
         </p:nvSpPr>
         <p:spPr>
           <a:xfrm>
-            <a:off x="6203144" y="1351490"/>
+            <a:off x="4996644" y="1745190"/>
             <a:ext cx="202299" cy="338554"/>
           </a:xfrm>
           <a:prstGeom prst="rect">
@@ -42115,7 +42155,7 @@
         </p:nvSpPr>
         <p:spPr>
           <a:xfrm>
-            <a:off x="5160404" y="2017182"/>
+            <a:off x="3953904" y="2410882"/>
             <a:ext cx="252450" cy="252000"/>
           </a:xfrm>
           <a:prstGeom prst="ellipse">
@@ -42169,7 +42209,7 @@
         </p:nvSpPr>
         <p:spPr>
           <a:xfrm>
-            <a:off x="4947343" y="1847121"/>
+            <a:off x="3740843" y="2240821"/>
             <a:ext cx="177024" cy="307777"/>
           </a:xfrm>
           <a:prstGeom prst="rect">
@@ -42205,7 +42245,7 @@
         </p:nvSpPr>
         <p:spPr>
           <a:xfrm>
-            <a:off x="5332755" y="2067635"/>
+            <a:off x="4126255" y="2461335"/>
             <a:ext cx="202299" cy="338554"/>
           </a:xfrm>
           <a:prstGeom prst="rect">
@@ -42244,7 +42284,7 @@
         </p:nvCxnSpPr>
         <p:spPr>
           <a:xfrm>
-            <a:off x="5412854" y="2143182"/>
+            <a:off x="4206354" y="2536882"/>
             <a:ext cx="1387226" cy="1"/>
           </a:xfrm>
           <a:prstGeom prst="straightConnector1">
@@ -42289,7 +42329,7 @@
         </p:nvCxnSpPr>
         <p:spPr>
           <a:xfrm>
-            <a:off x="6276872" y="1412211"/>
+            <a:off x="5070372" y="1805911"/>
             <a:ext cx="523208" cy="350"/>
           </a:xfrm>
           <a:prstGeom prst="straightConnector1">
@@ -42334,7 +42374,7 @@
         </p:nvCxnSpPr>
         <p:spPr>
           <a:xfrm rot="10800000">
-            <a:off x="6150648" y="1538212"/>
+            <a:off x="4944148" y="1931912"/>
             <a:ext cx="5677987" cy="2284529"/>
           </a:xfrm>
           <a:prstGeom prst="bentConnector2">
@@ -42379,7 +42419,7 @@
         </p:nvCxnSpPr>
         <p:spPr>
           <a:xfrm rot="10800000">
-            <a:off x="5286630" y="2269183"/>
+            <a:off x="4080130" y="2662883"/>
             <a:ext cx="6540899" cy="2284531"/>
           </a:xfrm>
           <a:prstGeom prst="bentConnector2">
@@ -42423,7 +42463,7 @@
         </p:nvSpPr>
         <p:spPr>
           <a:xfrm>
-            <a:off x="11838956" y="3578553"/>
+            <a:off x="10632456" y="3972253"/>
             <a:ext cx="1231364" cy="1231364"/>
           </a:xfrm>
           <a:prstGeom prst="roundRect">
@@ -42569,7 +42609,7 @@
         </p:nvCxnSpPr>
         <p:spPr>
           <a:xfrm>
-            <a:off x="4491768" y="2143182"/>
+            <a:off x="3285268" y="2536882"/>
             <a:ext cx="668636" cy="0"/>
           </a:xfrm>
           <a:prstGeom prst="straightConnector1">
@@ -42614,7 +42654,7 @@
         </p:nvCxnSpPr>
         <p:spPr>
           <a:xfrm>
-            <a:off x="4481533" y="1409603"/>
+            <a:off x="3275033" y="1803303"/>
             <a:ext cx="1542889" cy="2608"/>
           </a:xfrm>
           <a:prstGeom prst="straightConnector1">
@@ -42658,7 +42698,7 @@
             </p:nvSpPr>
             <p:spPr>
               <a:xfrm>
-                <a:off x="4150085" y="1255714"/>
+                <a:off x="2943585" y="1649414"/>
                 <a:ext cx="304800" cy="307777"/>
               </a:xfrm>
               <a:prstGeom prst="rect">
@@ -42737,7 +42777,7 @@
             </p:nvSpPr>
             <p:spPr>
               <a:xfrm>
-                <a:off x="4150085" y="1255714"/>
+                <a:off x="2943585" y="1649414"/>
                 <a:ext cx="304800" cy="307777"/>
               </a:xfrm>
               <a:prstGeom prst="rect">
@@ -42781,7 +42821,7 @@
             </p:nvSpPr>
             <p:spPr>
               <a:xfrm>
-                <a:off x="4190064" y="1979498"/>
+                <a:off x="2983564" y="2373198"/>
                 <a:ext cx="304800" cy="324384"/>
               </a:xfrm>
               <a:prstGeom prst="rect">
@@ -42860,7 +42900,7 @@
             </p:nvSpPr>
             <p:spPr>
               <a:xfrm>
-                <a:off x="4190064" y="1979498"/>
+                <a:off x="2983564" y="2373198"/>
                 <a:ext cx="304800" cy="324384"/>
               </a:xfrm>
               <a:prstGeom prst="rect">
@@ -42902,7 +42942,7 @@
         </p:nvSpPr>
         <p:spPr>
           <a:xfrm>
-            <a:off x="5789578" y="4927808"/>
+            <a:off x="4583078" y="5321508"/>
             <a:ext cx="1409421" cy="424801"/>
           </a:xfrm>
           <a:prstGeom prst="roundRect">
@@ -42978,7 +43018,7 @@
         </p:nvSpPr>
         <p:spPr>
           <a:xfrm>
-            <a:off x="7724004" y="4927808"/>
+            <a:off x="6517504" y="5321508"/>
             <a:ext cx="1409421" cy="424801"/>
           </a:xfrm>
           <a:prstGeom prst="roundRect">
@@ -43053,7 +43093,7 @@
         </p:nvSpPr>
         <p:spPr>
           <a:xfrm>
-            <a:off x="9658430" y="4927807"/>
+            <a:off x="8451930" y="5321507"/>
             <a:ext cx="1409421" cy="424801"/>
           </a:xfrm>
           <a:prstGeom prst="roundRect">
@@ -43130,7 +43170,7 @@
         </p:nvSpPr>
         <p:spPr>
           <a:xfrm>
-            <a:off x="8879532" y="1286211"/>
+            <a:off x="7673032" y="1679911"/>
             <a:ext cx="252450" cy="252000"/>
           </a:xfrm>
           <a:prstGeom prst="ellipse">
@@ -43184,7 +43224,7 @@
         </p:nvSpPr>
         <p:spPr>
           <a:xfrm>
-            <a:off x="8684140" y="1086142"/>
+            <a:off x="7477640" y="1479842"/>
             <a:ext cx="177024" cy="307777"/>
           </a:xfrm>
           <a:prstGeom prst="rect">
@@ -43206,42 +43246,6 @@
           </a:p>
         </p:txBody>
       </p:sp>
-      <p:sp>
-        <p:nvSpPr>
-          <p:cNvPr id="23" name="TextBox 22">
-            <a:extLst>
-              <a:ext uri="{FF2B5EF4-FFF2-40B4-BE49-F238E27FC236}">
-                <a16:creationId xmlns:a16="http://schemas.microsoft.com/office/drawing/2014/main" id="{21F8FD11-0CDB-17D9-1A15-1502B35769EE}"/>
-              </a:ext>
-            </a:extLst>
-          </p:cNvPr>
-          <p:cNvSpPr txBox="1"/>
-          <p:nvPr/>
-        </p:nvSpPr>
-        <p:spPr>
-          <a:xfrm>
-            <a:off x="9058254" y="1351490"/>
-            <a:ext cx="202299" cy="338554"/>
-          </a:xfrm>
-          <a:prstGeom prst="rect">
-            <a:avLst/>
-          </a:prstGeom>
-          <a:noFill/>
-        </p:spPr>
-        <p:txBody>
-          <a:bodyPr wrap="square" rtlCol="0">
-            <a:spAutoFit/>
-          </a:bodyPr>
-          <a:lstStyle/>
-          <a:p>
-            <a:r>
-              <a:rPr lang="en-US" sz="1600" b="1" dirty="0"/>
-              <a:t>_</a:t>
-            </a:r>
-            <a:endParaRPr lang="en-CA" sz="2000" b="1" dirty="0"/>
-          </a:p>
-        </p:txBody>
-      </p:sp>
       <p:cxnSp>
         <p:nvCxnSpPr>
           <p:cNvPr id="24" name="Straight Arrow Connector 23">
@@ -43258,7 +43262,7 @@
         </p:nvCxnSpPr>
         <p:spPr>
           <a:xfrm>
-            <a:off x="8220780" y="1412211"/>
+            <a:off x="7014280" y="1805911"/>
             <a:ext cx="648000" cy="0"/>
           </a:xfrm>
           <a:prstGeom prst="straightConnector1">
@@ -43302,7 +43306,7 @@
         </p:nvSpPr>
         <p:spPr>
           <a:xfrm>
-            <a:off x="8874721" y="2015690"/>
+            <a:off x="7668221" y="2409390"/>
             <a:ext cx="252450" cy="252000"/>
           </a:xfrm>
           <a:prstGeom prst="ellipse">
@@ -43356,7 +43360,7 @@
         </p:nvSpPr>
         <p:spPr>
           <a:xfrm>
-            <a:off x="8682335" y="1820268"/>
+            <a:off x="7475835" y="2213968"/>
             <a:ext cx="177024" cy="307777"/>
           </a:xfrm>
           <a:prstGeom prst="rect">
@@ -43378,42 +43382,6 @@
           </a:p>
         </p:txBody>
       </p:sp>
-      <p:sp>
-        <p:nvSpPr>
-          <p:cNvPr id="27" name="TextBox 26">
-            <a:extLst>
-              <a:ext uri="{FF2B5EF4-FFF2-40B4-BE49-F238E27FC236}">
-                <a16:creationId xmlns:a16="http://schemas.microsoft.com/office/drawing/2014/main" id="{B6BB7C16-19AE-FFED-DE27-8527649A6F33}"/>
-              </a:ext>
-            </a:extLst>
-          </p:cNvPr>
-          <p:cNvSpPr txBox="1"/>
-          <p:nvPr/>
-        </p:nvSpPr>
-        <p:spPr>
-          <a:xfrm>
-            <a:off x="9056449" y="2085616"/>
-            <a:ext cx="202299" cy="338554"/>
-          </a:xfrm>
-          <a:prstGeom prst="rect">
-            <a:avLst/>
-          </a:prstGeom>
-          <a:noFill/>
-        </p:spPr>
-        <p:txBody>
-          <a:bodyPr wrap="square" rtlCol="0">
-            <a:spAutoFit/>
-          </a:bodyPr>
-          <a:lstStyle/>
-          <a:p>
-            <a:r>
-              <a:rPr lang="en-US" sz="1600" b="1" dirty="0"/>
-              <a:t>_</a:t>
-            </a:r>
-            <a:endParaRPr lang="en-CA" sz="2000" b="1" dirty="0"/>
-          </a:p>
-        </p:txBody>
-      </p:sp>
       <p:cxnSp>
         <p:nvCxnSpPr>
           <p:cNvPr id="28" name="Straight Arrow Connector 27">
@@ -43430,7 +43398,7 @@
         </p:nvCxnSpPr>
         <p:spPr>
           <a:xfrm>
-            <a:off x="8218975" y="2146337"/>
+            <a:off x="7012475" y="2540037"/>
             <a:ext cx="648000" cy="0"/>
           </a:xfrm>
           <a:prstGeom prst="straightConnector1">
@@ -43458,6 +43426,775 @@
           </a:fontRef>
         </p:style>
       </p:cxnSp>
+      <mc:AlternateContent xmlns:mc="http://schemas.openxmlformats.org/markup-compatibility/2006">
+        <mc:Choice xmlns:a14="http://schemas.microsoft.com/office/drawing/2010/main" Requires="a14">
+          <p:sp>
+            <p:nvSpPr>
+              <p:cNvPr id="4" name="Rectangle: Rounded Corners 3">
+                <a:extLst>
+                  <a:ext uri="{FF2B5EF4-FFF2-40B4-BE49-F238E27FC236}">
+                    <a16:creationId xmlns:a16="http://schemas.microsoft.com/office/drawing/2014/main" id="{011C7877-FD0D-DC1B-FB6A-84B1834469F8}"/>
+                  </a:ext>
+                </a:extLst>
+              </p:cNvPr>
+              <p:cNvSpPr/>
+              <p:nvPr/>
+            </p:nvSpPr>
+            <p:spPr>
+              <a:xfrm>
+                <a:off x="7183575" y="746907"/>
+                <a:ext cx="1231364" cy="424802"/>
+              </a:xfrm>
+              <a:prstGeom prst="roundRect">
+                <a:avLst/>
+              </a:prstGeom>
+              <a:solidFill>
+                <a:schemeClr val="tx2">
+                  <a:lumMod val="25000"/>
+                  <a:lumOff val="75000"/>
+                </a:schemeClr>
+              </a:solidFill>
+              <a:ln w="19050">
+                <a:solidFill>
+                  <a:schemeClr val="tx2">
+                    <a:lumMod val="75000"/>
+                    <a:lumOff val="25000"/>
+                  </a:schemeClr>
+                </a:solidFill>
+                <a:tailEnd w="med" len="lg"/>
+              </a:ln>
+            </p:spPr>
+            <p:style>
+              <a:lnRef idx="2">
+                <a:schemeClr val="accent1">
+                  <a:shade val="15000"/>
+                </a:schemeClr>
+              </a:lnRef>
+              <a:fillRef idx="1">
+                <a:schemeClr val="accent1"/>
+              </a:fillRef>
+              <a:effectRef idx="0">
+                <a:schemeClr val="accent1"/>
+              </a:effectRef>
+              <a:fontRef idx="minor">
+                <a:schemeClr val="lt1"/>
+              </a:fontRef>
+            </p:style>
+            <p:txBody>
+              <a:bodyPr rtlCol="0" anchor="ctr"/>
+              <a:lstStyle/>
+              <a:p>
+                <a:pPr algn="ctr"/>
+                <a:r>
+                  <a:rPr lang="en-US" sz="1100" b="1" dirty="0">
+                    <a:solidFill>
+                      <a:schemeClr val="tx1"/>
+                    </a:solidFill>
+                    <a:latin typeface="Times New Roman" panose="02020603050405020304" pitchFamily="18" charset="0"/>
+                    <a:ea typeface="Cambria Math" panose="02040503050406030204" pitchFamily="18" charset="0"/>
+                    <a:cs typeface="Times New Roman" panose="02020603050405020304" pitchFamily="18" charset="0"/>
+                  </a:rPr>
+                  <a:t>Feedforward</a:t>
+                </a:r>
+              </a:p>
+              <a:p>
+                <a:pPr algn="ctr"/>
+                <a14:m>
+                  <m:oMathPara xmlns:m="http://schemas.openxmlformats.org/officeDocument/2006/math">
+                    <m:oMath>
+                      <m:r>
+                        <a:rPr lang="en-US" sz="1100" b="1" i="1" smtClean="0">
+                          <a:solidFill>
+                            <a:schemeClr val="tx1"/>
+                          </a:solidFill>
+                          <a:latin typeface="Cambria Math" panose="02040503050406030204" pitchFamily="18" charset="0"/>
+                          <a:ea typeface="Cambria Math" panose="02040503050406030204" pitchFamily="18" charset="0"/>
+                        </a:rPr>
+                        <m:t>−</m:t>
+                      </m:r>
+                      <m:sSub>
+                        <m:sSubPr>
+                          <m:ctrlPr>
+                            <a:rPr lang="en-US" sz="1100" b="1" i="1" smtClean="0">
+                              <a:solidFill>
+                                <a:schemeClr val="tx1"/>
+                              </a:solidFill>
+                              <a:latin typeface="Cambria Math" panose="02040503050406030204" pitchFamily="18" charset="0"/>
+                              <a:ea typeface="Cambria Math" panose="02040503050406030204" pitchFamily="18" charset="0"/>
+                            </a:rPr>
+                          </m:ctrlPr>
+                        </m:sSubPr>
+                        <m:e>
+                          <m:r>
+                            <a:rPr lang="en-US" sz="1100" b="1" i="1" smtClean="0">
+                              <a:solidFill>
+                                <a:schemeClr val="tx1"/>
+                              </a:solidFill>
+                              <a:latin typeface="Cambria Math" panose="02040503050406030204" pitchFamily="18" charset="0"/>
+                              <a:ea typeface="Cambria Math" panose="02040503050406030204" pitchFamily="18" charset="0"/>
+                            </a:rPr>
+                            <m:t>𝜔</m:t>
+                          </m:r>
+                        </m:e>
+                        <m:sub>
+                          <m:r>
+                            <a:rPr lang="en-US" sz="1100" b="1" i="1" smtClean="0">
+                              <a:solidFill>
+                                <a:schemeClr val="tx1"/>
+                              </a:solidFill>
+                              <a:latin typeface="Cambria Math" panose="02040503050406030204" pitchFamily="18" charset="0"/>
+                              <a:ea typeface="Cambria Math" panose="02040503050406030204" pitchFamily="18" charset="0"/>
+                            </a:rPr>
+                            <m:t>𝑒</m:t>
+                          </m:r>
+                        </m:sub>
+                      </m:sSub>
+                      <m:sSub>
+                        <m:sSubPr>
+                          <m:ctrlPr>
+                            <a:rPr lang="en-US" sz="1100" b="1" i="1" smtClean="0">
+                              <a:solidFill>
+                                <a:schemeClr val="tx1"/>
+                              </a:solidFill>
+                              <a:latin typeface="Cambria Math" panose="02040503050406030204" pitchFamily="18" charset="0"/>
+                              <a:ea typeface="Cambria Math" panose="02040503050406030204" pitchFamily="18" charset="0"/>
+                            </a:rPr>
+                          </m:ctrlPr>
+                        </m:sSubPr>
+                        <m:e>
+                          <m:r>
+                            <a:rPr lang="en-US" sz="1100" b="1" i="1" smtClean="0">
+                              <a:solidFill>
+                                <a:schemeClr val="tx1"/>
+                              </a:solidFill>
+                              <a:latin typeface="Cambria Math" panose="02040503050406030204" pitchFamily="18" charset="0"/>
+                              <a:ea typeface="Cambria Math" panose="02040503050406030204" pitchFamily="18" charset="0"/>
+                            </a:rPr>
+                            <m:t>𝐿</m:t>
+                          </m:r>
+                        </m:e>
+                        <m:sub>
+                          <m:r>
+                            <a:rPr lang="en-US" sz="1100" b="1" i="1" smtClean="0">
+                              <a:solidFill>
+                                <a:schemeClr val="tx1"/>
+                              </a:solidFill>
+                              <a:latin typeface="Cambria Math" panose="02040503050406030204" pitchFamily="18" charset="0"/>
+                              <a:ea typeface="Cambria Math" panose="02040503050406030204" pitchFamily="18" charset="0"/>
+                            </a:rPr>
+                            <m:t>𝑞</m:t>
+                          </m:r>
+                        </m:sub>
+                      </m:sSub>
+                      <m:sSub>
+                        <m:sSubPr>
+                          <m:ctrlPr>
+                            <a:rPr lang="en-US" sz="1100" b="1" i="1" smtClean="0">
+                              <a:solidFill>
+                                <a:schemeClr val="tx1"/>
+                              </a:solidFill>
+                              <a:latin typeface="Cambria Math" panose="02040503050406030204" pitchFamily="18" charset="0"/>
+                              <a:ea typeface="Cambria Math" panose="02040503050406030204" pitchFamily="18" charset="0"/>
+                            </a:rPr>
+                          </m:ctrlPr>
+                        </m:sSubPr>
+                        <m:e>
+                          <m:r>
+                            <a:rPr lang="en-US" sz="1100" b="1" i="1" smtClean="0">
+                              <a:solidFill>
+                                <a:schemeClr val="tx1"/>
+                              </a:solidFill>
+                              <a:latin typeface="Cambria Math" panose="02040503050406030204" pitchFamily="18" charset="0"/>
+                              <a:ea typeface="Cambria Math" panose="02040503050406030204" pitchFamily="18" charset="0"/>
+                            </a:rPr>
+                            <m:t>𝑖</m:t>
+                          </m:r>
+                        </m:e>
+                        <m:sub>
+                          <m:r>
+                            <a:rPr lang="en-US" sz="1100" b="1" i="1" smtClean="0">
+                              <a:solidFill>
+                                <a:schemeClr val="tx1"/>
+                              </a:solidFill>
+                              <a:latin typeface="Cambria Math" panose="02040503050406030204" pitchFamily="18" charset="0"/>
+                              <a:ea typeface="Cambria Math" panose="02040503050406030204" pitchFamily="18" charset="0"/>
+                            </a:rPr>
+                            <m:t>𝑞</m:t>
+                          </m:r>
+                        </m:sub>
+                      </m:sSub>
+                    </m:oMath>
+                  </m:oMathPara>
+                </a14:m>
+                <a:endParaRPr lang="en-US" sz="1100" b="1" dirty="0">
+                  <a:solidFill>
+                    <a:schemeClr val="tx1"/>
+                  </a:solidFill>
+                  <a:latin typeface="Times New Roman" panose="02020603050405020304" pitchFamily="18" charset="0"/>
+                  <a:ea typeface="Cambria Math" panose="02040503050406030204" pitchFamily="18" charset="0"/>
+                  <a:cs typeface="Times New Roman" panose="02020603050405020304" pitchFamily="18" charset="0"/>
+                </a:endParaRPr>
+              </a:p>
+            </p:txBody>
+          </p:sp>
+        </mc:Choice>
+        <mc:Fallback>
+          <p:sp>
+            <p:nvSpPr>
+              <p:cNvPr id="4" name="Rectangle: Rounded Corners 3">
+                <a:extLst>
+                  <a:ext uri="{FF2B5EF4-FFF2-40B4-BE49-F238E27FC236}">
+                    <a16:creationId xmlns:a16="http://schemas.microsoft.com/office/drawing/2014/main" id="{011C7877-FD0D-DC1B-FB6A-84B1834469F8}"/>
+                  </a:ext>
+                </a:extLst>
+              </p:cNvPr>
+              <p:cNvSpPr>
+                <a:spLocks noRot="1" noChangeAspect="1" noMove="1" noResize="1" noEditPoints="1" noAdjustHandles="1" noChangeArrowheads="1" noChangeShapeType="1" noTextEdit="1"/>
+              </p:cNvSpPr>
+              <p:nvPr/>
+            </p:nvSpPr>
+            <p:spPr>
+              <a:xfrm>
+                <a:off x="7183575" y="746907"/>
+                <a:ext cx="1231364" cy="424802"/>
+              </a:xfrm>
+              <a:prstGeom prst="roundRect">
+                <a:avLst/>
+              </a:prstGeom>
+              <a:blipFill>
+                <a:blip r:embed="rId28"/>
+                <a:stretch>
+                  <a:fillRect t="-1389"/>
+                </a:stretch>
+              </a:blipFill>
+              <a:ln w="19050">
+                <a:solidFill>
+                  <a:schemeClr val="tx2">
+                    <a:lumMod val="75000"/>
+                    <a:lumOff val="25000"/>
+                  </a:schemeClr>
+                </a:solidFill>
+                <a:tailEnd w="med" len="lg"/>
+              </a:ln>
+            </p:spPr>
+            <p:txBody>
+              <a:bodyPr/>
+              <a:lstStyle/>
+              <a:p>
+                <a:r>
+                  <a:rPr lang="en-CA">
+                    <a:noFill/>
+                  </a:rPr>
+                  <a:t> </a:t>
+                </a:r>
+              </a:p>
+            </p:txBody>
+          </p:sp>
+        </mc:Fallback>
+      </mc:AlternateContent>
+      <p:cxnSp>
+        <p:nvCxnSpPr>
+          <p:cNvPr id="8" name="Straight Arrow Connector 7">
+            <a:extLst>
+              <a:ext uri="{FF2B5EF4-FFF2-40B4-BE49-F238E27FC236}">
+                <a16:creationId xmlns:a16="http://schemas.microsoft.com/office/drawing/2014/main" id="{B242F009-EC7A-415C-B407-E45ED6E2E27D}"/>
+              </a:ext>
+            </a:extLst>
+          </p:cNvPr>
+          <p:cNvCxnSpPr>
+            <a:cxnSpLocks/>
+            <a:stCxn id="4" idx="2"/>
+          </p:cNvCxnSpPr>
+          <p:nvPr/>
+        </p:nvCxnSpPr>
+        <p:spPr>
+          <a:xfrm>
+            <a:off x="7799257" y="1171709"/>
+            <a:ext cx="0" cy="504000"/>
+          </a:xfrm>
+          <a:prstGeom prst="straightConnector1">
+            <a:avLst/>
+          </a:prstGeom>
+          <a:ln>
+            <a:solidFill>
+              <a:schemeClr val="tx1"/>
+            </a:solidFill>
+            <a:tailEnd type="triangle" w="med" len="lg"/>
+          </a:ln>
+        </p:spPr>
+        <p:style>
+          <a:lnRef idx="2">
+            <a:schemeClr val="accent1"/>
+          </a:lnRef>
+          <a:fillRef idx="0">
+            <a:schemeClr val="accent1"/>
+          </a:fillRef>
+          <a:effectRef idx="1">
+            <a:schemeClr val="accent1"/>
+          </a:effectRef>
+          <a:fontRef idx="minor">
+            <a:schemeClr val="tx1"/>
+          </a:fontRef>
+        </p:style>
+      </p:cxnSp>
+      <p:sp>
+        <p:nvSpPr>
+          <p:cNvPr id="11" name="TextBox 10">
+            <a:extLst>
+              <a:ext uri="{FF2B5EF4-FFF2-40B4-BE49-F238E27FC236}">
+                <a16:creationId xmlns:a16="http://schemas.microsoft.com/office/drawing/2014/main" id="{C96C720A-B7D9-6BE2-0690-5EB315D0E098}"/>
+              </a:ext>
+            </a:extLst>
+          </p:cNvPr>
+          <p:cNvSpPr txBox="1"/>
+          <p:nvPr/>
+        </p:nvSpPr>
+        <p:spPr>
+          <a:xfrm>
+            <a:off x="7839597" y="1479838"/>
+            <a:ext cx="177024" cy="307777"/>
+          </a:xfrm>
+          <a:prstGeom prst="rect">
+            <a:avLst/>
+          </a:prstGeom>
+          <a:noFill/>
+        </p:spPr>
+        <p:txBody>
+          <a:bodyPr wrap="square" rtlCol="0">
+            <a:spAutoFit/>
+          </a:bodyPr>
+          <a:lstStyle/>
+          <a:p>
+            <a:r>
+              <a:rPr lang="en-US" sz="1400" dirty="0"/>
+              <a:t>+</a:t>
+            </a:r>
+            <a:endParaRPr lang="en-CA" sz="2800" dirty="0"/>
+          </a:p>
+        </p:txBody>
+      </p:sp>
+      <mc:AlternateContent xmlns:mc="http://schemas.openxmlformats.org/markup-compatibility/2006">
+        <mc:Choice xmlns:a14="http://schemas.microsoft.com/office/drawing/2010/main" Requires="a14">
+          <p:sp>
+            <p:nvSpPr>
+              <p:cNvPr id="13" name="Rectangle: Rounded Corners 12">
+                <a:extLst>
+                  <a:ext uri="{FF2B5EF4-FFF2-40B4-BE49-F238E27FC236}">
+                    <a16:creationId xmlns:a16="http://schemas.microsoft.com/office/drawing/2014/main" id="{329F44B4-E1E1-4543-8F0B-E3D612AB4D37}"/>
+                  </a:ext>
+                </a:extLst>
+              </p:cNvPr>
+              <p:cNvSpPr/>
+              <p:nvPr/>
+            </p:nvSpPr>
+            <p:spPr>
+              <a:xfrm>
+                <a:off x="7180765" y="3165967"/>
+                <a:ext cx="1231364" cy="424802"/>
+              </a:xfrm>
+              <a:prstGeom prst="roundRect">
+                <a:avLst/>
+              </a:prstGeom>
+              <a:solidFill>
+                <a:schemeClr val="tx2">
+                  <a:lumMod val="25000"/>
+                  <a:lumOff val="75000"/>
+                </a:schemeClr>
+              </a:solidFill>
+              <a:ln w="19050">
+                <a:solidFill>
+                  <a:schemeClr val="tx2">
+                    <a:lumMod val="75000"/>
+                    <a:lumOff val="25000"/>
+                  </a:schemeClr>
+                </a:solidFill>
+              </a:ln>
+            </p:spPr>
+            <p:style>
+              <a:lnRef idx="2">
+                <a:schemeClr val="accent1">
+                  <a:shade val="15000"/>
+                </a:schemeClr>
+              </a:lnRef>
+              <a:fillRef idx="1">
+                <a:schemeClr val="accent1"/>
+              </a:fillRef>
+              <a:effectRef idx="0">
+                <a:schemeClr val="accent1"/>
+              </a:effectRef>
+              <a:fontRef idx="minor">
+                <a:schemeClr val="lt1"/>
+              </a:fontRef>
+            </p:style>
+            <p:txBody>
+              <a:bodyPr rtlCol="0" anchor="ctr"/>
+              <a:lstStyle/>
+              <a:p>
+                <a:pPr algn="ctr"/>
+                <a:r>
+                  <a:rPr lang="en-US" sz="1100" b="1" dirty="0">
+                    <a:solidFill>
+                      <a:schemeClr val="tx1"/>
+                    </a:solidFill>
+                    <a:latin typeface="Times New Roman" panose="02020603050405020304" pitchFamily="18" charset="0"/>
+                    <a:ea typeface="Cambria Math" panose="02040503050406030204" pitchFamily="18" charset="0"/>
+                    <a:cs typeface="Times New Roman" panose="02020603050405020304" pitchFamily="18" charset="0"/>
+                  </a:rPr>
+                  <a:t>Feedforward</a:t>
+                </a:r>
+              </a:p>
+              <a:p>
+                <a:pPr algn="ctr"/>
+                <a14:m>
+                  <m:oMathPara xmlns:m="http://schemas.openxmlformats.org/officeDocument/2006/math">
+                    <m:oMath>
+                      <m:sSub>
+                        <m:sSubPr>
+                          <m:ctrlPr>
+                            <a:rPr lang="en-US" sz="1100" b="1" i="1" smtClean="0">
+                              <a:solidFill>
+                                <a:schemeClr val="tx1"/>
+                              </a:solidFill>
+                              <a:latin typeface="Cambria Math" panose="02040503050406030204" pitchFamily="18" charset="0"/>
+                              <a:ea typeface="Cambria Math" panose="02040503050406030204" pitchFamily="18" charset="0"/>
+                            </a:rPr>
+                          </m:ctrlPr>
+                        </m:sSubPr>
+                        <m:e>
+                          <m:r>
+                            <a:rPr lang="en-US" sz="1100" b="1" i="1" smtClean="0">
+                              <a:solidFill>
+                                <a:schemeClr val="tx1"/>
+                              </a:solidFill>
+                              <a:latin typeface="Cambria Math" panose="02040503050406030204" pitchFamily="18" charset="0"/>
+                              <a:ea typeface="Cambria Math" panose="02040503050406030204" pitchFamily="18" charset="0"/>
+                            </a:rPr>
+                            <m:t>𝜔</m:t>
+                          </m:r>
+                        </m:e>
+                        <m:sub>
+                          <m:r>
+                            <a:rPr lang="en-US" sz="1100" b="1" i="1" smtClean="0">
+                              <a:solidFill>
+                                <a:schemeClr val="tx1"/>
+                              </a:solidFill>
+                              <a:latin typeface="Cambria Math" panose="02040503050406030204" pitchFamily="18" charset="0"/>
+                              <a:ea typeface="Cambria Math" panose="02040503050406030204" pitchFamily="18" charset="0"/>
+                            </a:rPr>
+                            <m:t>𝑒</m:t>
+                          </m:r>
+                        </m:sub>
+                      </m:sSub>
+                      <m:sSub>
+                        <m:sSubPr>
+                          <m:ctrlPr>
+                            <a:rPr lang="en-US" sz="1100" b="1" i="1" smtClean="0">
+                              <a:solidFill>
+                                <a:schemeClr val="tx1"/>
+                              </a:solidFill>
+                              <a:latin typeface="Cambria Math" panose="02040503050406030204" pitchFamily="18" charset="0"/>
+                              <a:ea typeface="Cambria Math" panose="02040503050406030204" pitchFamily="18" charset="0"/>
+                            </a:rPr>
+                          </m:ctrlPr>
+                        </m:sSubPr>
+                        <m:e>
+                          <m:r>
+                            <a:rPr lang="en-US" sz="1100" b="1" i="1" smtClean="0">
+                              <a:solidFill>
+                                <a:schemeClr val="tx1"/>
+                              </a:solidFill>
+                              <a:latin typeface="Cambria Math" panose="02040503050406030204" pitchFamily="18" charset="0"/>
+                              <a:ea typeface="Cambria Math" panose="02040503050406030204" pitchFamily="18" charset="0"/>
+                            </a:rPr>
+                            <m:t>𝐿</m:t>
+                          </m:r>
+                        </m:e>
+                        <m:sub>
+                          <m:r>
+                            <a:rPr lang="en-US" sz="1100" b="1" i="1" smtClean="0">
+                              <a:solidFill>
+                                <a:schemeClr val="tx1"/>
+                              </a:solidFill>
+                              <a:latin typeface="Cambria Math" panose="02040503050406030204" pitchFamily="18" charset="0"/>
+                              <a:ea typeface="Cambria Math" panose="02040503050406030204" pitchFamily="18" charset="0"/>
+                            </a:rPr>
+                            <m:t>𝑑</m:t>
+                          </m:r>
+                        </m:sub>
+                      </m:sSub>
+                      <m:sSub>
+                        <m:sSubPr>
+                          <m:ctrlPr>
+                            <a:rPr lang="en-US" sz="1100" b="1" i="1" smtClean="0">
+                              <a:solidFill>
+                                <a:schemeClr val="tx1"/>
+                              </a:solidFill>
+                              <a:latin typeface="Cambria Math" panose="02040503050406030204" pitchFamily="18" charset="0"/>
+                              <a:ea typeface="Cambria Math" panose="02040503050406030204" pitchFamily="18" charset="0"/>
+                            </a:rPr>
+                          </m:ctrlPr>
+                        </m:sSubPr>
+                        <m:e>
+                          <m:r>
+                            <a:rPr lang="en-US" sz="1100" b="1" i="1" smtClean="0">
+                              <a:solidFill>
+                                <a:schemeClr val="tx1"/>
+                              </a:solidFill>
+                              <a:latin typeface="Cambria Math" panose="02040503050406030204" pitchFamily="18" charset="0"/>
+                              <a:ea typeface="Cambria Math" panose="02040503050406030204" pitchFamily="18" charset="0"/>
+                            </a:rPr>
+                            <m:t>𝑖</m:t>
+                          </m:r>
+                        </m:e>
+                        <m:sub>
+                          <m:r>
+                            <a:rPr lang="en-US" sz="1100" b="1" i="1" smtClean="0">
+                              <a:solidFill>
+                                <a:schemeClr val="tx1"/>
+                              </a:solidFill>
+                              <a:latin typeface="Cambria Math" panose="02040503050406030204" pitchFamily="18" charset="0"/>
+                              <a:ea typeface="Cambria Math" panose="02040503050406030204" pitchFamily="18" charset="0"/>
+                            </a:rPr>
+                            <m:t>𝑑</m:t>
+                          </m:r>
+                        </m:sub>
+                      </m:sSub>
+                      <m:r>
+                        <a:rPr lang="en-US" sz="1100" b="1" i="1" smtClean="0">
+                          <a:solidFill>
+                            <a:schemeClr val="tx1"/>
+                          </a:solidFill>
+                          <a:latin typeface="Cambria Math" panose="02040503050406030204" pitchFamily="18" charset="0"/>
+                          <a:ea typeface="Cambria Math" panose="02040503050406030204" pitchFamily="18" charset="0"/>
+                        </a:rPr>
+                        <m:t>+</m:t>
+                      </m:r>
+                      <m:sSub>
+                        <m:sSubPr>
+                          <m:ctrlPr>
+                            <a:rPr lang="en-US" sz="1100" b="1" i="1" smtClean="0">
+                              <a:solidFill>
+                                <a:schemeClr val="tx1"/>
+                              </a:solidFill>
+                              <a:latin typeface="Cambria Math" panose="02040503050406030204" pitchFamily="18" charset="0"/>
+                              <a:ea typeface="Cambria Math" panose="02040503050406030204" pitchFamily="18" charset="0"/>
+                            </a:rPr>
+                          </m:ctrlPr>
+                        </m:sSubPr>
+                        <m:e>
+                          <m:r>
+                            <a:rPr lang="en-US" sz="1100" b="1" i="1" smtClean="0">
+                              <a:solidFill>
+                                <a:schemeClr val="tx1"/>
+                              </a:solidFill>
+                              <a:latin typeface="Cambria Math" panose="02040503050406030204" pitchFamily="18" charset="0"/>
+                              <a:ea typeface="Cambria Math" panose="02040503050406030204" pitchFamily="18" charset="0"/>
+                            </a:rPr>
+                            <m:t>𝜔</m:t>
+                          </m:r>
+                        </m:e>
+                        <m:sub>
+                          <m:r>
+                            <a:rPr lang="en-US" sz="1100" b="1" i="1" smtClean="0">
+                              <a:solidFill>
+                                <a:schemeClr val="tx1"/>
+                              </a:solidFill>
+                              <a:latin typeface="Cambria Math" panose="02040503050406030204" pitchFamily="18" charset="0"/>
+                              <a:ea typeface="Cambria Math" panose="02040503050406030204" pitchFamily="18" charset="0"/>
+                            </a:rPr>
+                            <m:t>𝑒</m:t>
+                          </m:r>
+                        </m:sub>
+                      </m:sSub>
+                      <m:sSub>
+                        <m:sSubPr>
+                          <m:ctrlPr>
+                            <a:rPr lang="en-US" sz="1100" b="1" i="1" smtClean="0">
+                              <a:solidFill>
+                                <a:schemeClr val="tx1"/>
+                              </a:solidFill>
+                              <a:latin typeface="Cambria Math" panose="02040503050406030204" pitchFamily="18" charset="0"/>
+                              <a:ea typeface="Cambria Math" panose="02040503050406030204" pitchFamily="18" charset="0"/>
+                            </a:rPr>
+                          </m:ctrlPr>
+                        </m:sSubPr>
+                        <m:e>
+                          <m:r>
+                            <a:rPr lang="en-US" sz="1100" b="1" i="1" smtClean="0">
+                              <a:solidFill>
+                                <a:schemeClr val="tx1"/>
+                              </a:solidFill>
+                              <a:latin typeface="Cambria Math" panose="02040503050406030204" pitchFamily="18" charset="0"/>
+                              <a:ea typeface="Cambria Math" panose="02040503050406030204" pitchFamily="18" charset="0"/>
+                            </a:rPr>
+                            <m:t>𝜆</m:t>
+                          </m:r>
+                        </m:e>
+                        <m:sub>
+                          <m:r>
+                            <m:rPr>
+                              <m:sty m:val="p"/>
+                            </m:rPr>
+                            <a:rPr lang="en-US" sz="1100" b="1" i="1" smtClean="0">
+                              <a:solidFill>
+                                <a:schemeClr val="tx1"/>
+                              </a:solidFill>
+                              <a:latin typeface="Cambria Math" panose="02040503050406030204" pitchFamily="18" charset="0"/>
+                              <a:ea typeface="Cambria Math" panose="02040503050406030204" pitchFamily="18" charset="0"/>
+                            </a:rPr>
+                            <m:t>m</m:t>
+                          </m:r>
+                        </m:sub>
+                      </m:sSub>
+                    </m:oMath>
+                  </m:oMathPara>
+                </a14:m>
+                <a:endParaRPr lang="en-US" sz="1100" b="1" dirty="0">
+                  <a:solidFill>
+                    <a:schemeClr val="tx1"/>
+                  </a:solidFill>
+                  <a:latin typeface="Times New Roman" panose="02020603050405020304" pitchFamily="18" charset="0"/>
+                  <a:ea typeface="Cambria Math" panose="02040503050406030204" pitchFamily="18" charset="0"/>
+                  <a:cs typeface="Times New Roman" panose="02020603050405020304" pitchFamily="18" charset="0"/>
+                </a:endParaRPr>
+              </a:p>
+            </p:txBody>
+          </p:sp>
+        </mc:Choice>
+        <mc:Fallback>
+          <p:sp>
+            <p:nvSpPr>
+              <p:cNvPr id="13" name="Rectangle: Rounded Corners 12">
+                <a:extLst>
+                  <a:ext uri="{FF2B5EF4-FFF2-40B4-BE49-F238E27FC236}">
+                    <a16:creationId xmlns:a16="http://schemas.microsoft.com/office/drawing/2014/main" id="{329F44B4-E1E1-4543-8F0B-E3D612AB4D37}"/>
+                  </a:ext>
+                </a:extLst>
+              </p:cNvPr>
+              <p:cNvSpPr>
+                <a:spLocks noRot="1" noChangeAspect="1" noMove="1" noResize="1" noEditPoints="1" noAdjustHandles="1" noChangeArrowheads="1" noChangeShapeType="1" noTextEdit="1"/>
+              </p:cNvSpPr>
+              <p:nvPr/>
+            </p:nvSpPr>
+            <p:spPr>
+              <a:xfrm>
+                <a:off x="7180765" y="3165967"/>
+                <a:ext cx="1231364" cy="424802"/>
+              </a:xfrm>
+              <a:prstGeom prst="roundRect">
+                <a:avLst/>
+              </a:prstGeom>
+              <a:blipFill>
+                <a:blip r:embed="rId29"/>
+                <a:stretch>
+                  <a:fillRect/>
+                </a:stretch>
+              </a:blipFill>
+              <a:ln w="19050">
+                <a:solidFill>
+                  <a:schemeClr val="tx2">
+                    <a:lumMod val="75000"/>
+                    <a:lumOff val="25000"/>
+                  </a:schemeClr>
+                </a:solidFill>
+              </a:ln>
+            </p:spPr>
+            <p:txBody>
+              <a:bodyPr/>
+              <a:lstStyle/>
+              <a:p>
+                <a:r>
+                  <a:rPr lang="en-CA">
+                    <a:noFill/>
+                  </a:rPr>
+                  <a:t> </a:t>
+                </a:r>
+              </a:p>
+            </p:txBody>
+          </p:sp>
+        </mc:Fallback>
+      </mc:AlternateContent>
+      <p:cxnSp>
+        <p:nvCxnSpPr>
+          <p:cNvPr id="15" name="Straight Arrow Connector 14">
+            <a:extLst>
+              <a:ext uri="{FF2B5EF4-FFF2-40B4-BE49-F238E27FC236}">
+                <a16:creationId xmlns:a16="http://schemas.microsoft.com/office/drawing/2014/main" id="{30E710BB-FB78-C6FE-1CE4-BD83B690F8DD}"/>
+              </a:ext>
+            </a:extLst>
+          </p:cNvPr>
+          <p:cNvCxnSpPr>
+            <a:stCxn id="13" idx="0"/>
+            <a:endCxn id="25" idx="4"/>
+          </p:cNvCxnSpPr>
+          <p:nvPr/>
+        </p:nvCxnSpPr>
+        <p:spPr>
+          <a:xfrm flipH="1" flipV="1">
+            <a:off x="7794446" y="2661390"/>
+            <a:ext cx="2001" cy="504577"/>
+          </a:xfrm>
+          <a:prstGeom prst="straightConnector1">
+            <a:avLst/>
+          </a:prstGeom>
+          <a:ln>
+            <a:solidFill>
+              <a:schemeClr val="tx1"/>
+            </a:solidFill>
+            <a:tailEnd type="triangle" w="med" len="lg"/>
+          </a:ln>
+        </p:spPr>
+        <p:style>
+          <a:lnRef idx="2">
+            <a:schemeClr val="accent1"/>
+          </a:lnRef>
+          <a:fillRef idx="0">
+            <a:schemeClr val="accent1"/>
+          </a:fillRef>
+          <a:effectRef idx="1">
+            <a:schemeClr val="accent1"/>
+          </a:effectRef>
+          <a:fontRef idx="minor">
+            <a:schemeClr val="tx1"/>
+          </a:fontRef>
+        </p:style>
+      </p:cxnSp>
+      <p:sp>
+        <p:nvSpPr>
+          <p:cNvPr id="17" name="TextBox 16">
+            <a:extLst>
+              <a:ext uri="{FF2B5EF4-FFF2-40B4-BE49-F238E27FC236}">
+                <a16:creationId xmlns:a16="http://schemas.microsoft.com/office/drawing/2014/main" id="{95A25A8A-FE8C-3B3B-7396-8C1250FF0E58}"/>
+              </a:ext>
+            </a:extLst>
+          </p:cNvPr>
+          <p:cNvSpPr txBox="1"/>
+          <p:nvPr/>
+        </p:nvSpPr>
+        <p:spPr>
+          <a:xfrm>
+            <a:off x="7858608" y="2543141"/>
+            <a:ext cx="177024" cy="307777"/>
+          </a:xfrm>
+          <a:prstGeom prst="rect">
+            <a:avLst/>
+          </a:prstGeom>
+          <a:noFill/>
+        </p:spPr>
+        <p:txBody>
+          <a:bodyPr wrap="square" rtlCol="0">
+            <a:spAutoFit/>
+          </a:bodyPr>
+          <a:lstStyle/>
+          <a:p>
+            <a:r>
+              <a:rPr lang="en-US" sz="1400" dirty="0"/>
+              <a:t>+</a:t>
+            </a:r>
+            <a:endParaRPr lang="en-CA" sz="2800" dirty="0"/>
+          </a:p>
+        </p:txBody>
+      </p:sp>
     </p:spTree>
     <p:extLst>
       <p:ext uri="{BB962C8B-B14F-4D97-AF65-F5344CB8AC3E}">

--- a/field_oriented_control.pptx
+++ b/field_oriented_control.pptx
@@ -5,14 +5,15 @@
     <p:sldMasterId id="2147483732" r:id="rId1"/>
   </p:sldMasterIdLst>
   <p:notesMasterIdLst>
-    <p:notesMasterId r:id="rId7"/>
+    <p:notesMasterId r:id="rId8"/>
   </p:notesMasterIdLst>
   <p:sldIdLst>
     <p:sldId id="256" r:id="rId2"/>
     <p:sldId id="259" r:id="rId3"/>
     <p:sldId id="260" r:id="rId4"/>
     <p:sldId id="261" r:id="rId5"/>
-    <p:sldId id="258" r:id="rId6"/>
+    <p:sldId id="262" r:id="rId6"/>
+    <p:sldId id="258" r:id="rId7"/>
   </p:sldIdLst>
   <p:sldSz cx="21599525" cy="7164388"/>
   <p:notesSz cx="6858000" cy="9144000"/>
@@ -122,7 +123,7 @@
 <file path=ppt/revisionInfo.xml><?xml version="1.0" encoding="utf-8"?>
 <p1510:revInfo xmlns:a="http://schemas.openxmlformats.org/drawingml/2006/main" xmlns:r="http://schemas.openxmlformats.org/officeDocument/2006/relationships" xmlns:p1510="http://schemas.microsoft.com/office/powerpoint/2015/10/main">
   <p1510:revLst>
-    <p1510:client id="{E23C0E3B-1BCF-43A5-9BFC-28A61010C6A7}" v="106" dt="2026-09-28T16:18:28.537"/>
+    <p1510:client id="{E23C0E3B-1BCF-43A5-9BFC-28A61010C6A7}" v="13" dt="2026-10-08T21:43:59.166"/>
   </p1510:revLst>
 </p1510:revInfo>
 </file>
@@ -132,7 +133,7 @@
   <pc:docChgLst>
     <pc:chgData name="Jonah St. Hilaire" userId="9d0a7af2-d0bd-4748-b50b-5cc37e0fdaa3" providerId="ADAL" clId="{58AAB240-BB3C-43BA-87E9-80C5D70C8BCC}"/>
     <pc:docChg chg="undo redo custSel addSld delSld modSld sldOrd modMainMaster delSection modSection">
-      <pc:chgData name="Jonah St. Hilaire" userId="9d0a7af2-d0bd-4748-b50b-5cc37e0fdaa3" providerId="ADAL" clId="{58AAB240-BB3C-43BA-87E9-80C5D70C8BCC}" dt="2026-09-28T17:01:56.531" v="5153" actId="1076"/>
+      <pc:chgData name="Jonah St. Hilaire" userId="9d0a7af2-d0bd-4748-b50b-5cc37e0fdaa3" providerId="ADAL" clId="{58AAB240-BB3C-43BA-87E9-80C5D70C8BCC}" dt="2026-10-08T21:43:59.166" v="5276" actId="20577"/>
       <pc:docMkLst>
         <pc:docMk/>
       </pc:docMkLst>
@@ -1957,7 +1958,7 @@
         </pc:cxnChg>
       </pc:sldChg>
       <pc:sldChg chg="addSp delSp modSp add mod">
-        <pc:chgData name="Jonah St. Hilaire" userId="9d0a7af2-d0bd-4748-b50b-5cc37e0fdaa3" providerId="ADAL" clId="{58AAB240-BB3C-43BA-87E9-80C5D70C8BCC}" dt="2026-09-28T17:01:56.531" v="5153" actId="1076"/>
+        <pc:chgData name="Jonah St. Hilaire" userId="9d0a7af2-d0bd-4748-b50b-5cc37e0fdaa3" providerId="ADAL" clId="{58AAB240-BB3C-43BA-87E9-80C5D70C8BCC}" dt="2026-10-08T18:14:22.046" v="5194" actId="692"/>
         <pc:sldMkLst>
           <pc:docMk/>
           <pc:sldMk cId="2711191929" sldId="261"/>
@@ -2026,14 +2027,6 @@
             <ac:spMk id="21" creationId="{1EA8BF07-3938-0EB6-72BF-ACE2AF4BC5C9}"/>
           </ac:spMkLst>
         </pc:spChg>
-        <pc:spChg chg="add del mod">
-          <ac:chgData name="Jonah St. Hilaire" userId="9d0a7af2-d0bd-4748-b50b-5cc37e0fdaa3" providerId="ADAL" clId="{58AAB240-BB3C-43BA-87E9-80C5D70C8BCC}" dt="2026-09-28T16:13:12.357" v="4920" actId="478"/>
-          <ac:spMkLst>
-            <pc:docMk/>
-            <pc:sldMk cId="2711191929" sldId="261"/>
-            <ac:spMk id="23" creationId="{21F8FD11-0CDB-17D9-1A15-1502B35769EE}"/>
-          </ac:spMkLst>
-        </pc:spChg>
         <pc:spChg chg="add mod">
           <ac:chgData name="Jonah St. Hilaire" userId="9d0a7af2-d0bd-4748-b50b-5cc37e0fdaa3" providerId="ADAL" clId="{58AAB240-BB3C-43BA-87E9-80C5D70C8BCC}" dt="2026-09-24T21:54:25.665" v="4765" actId="1076"/>
           <ac:spMkLst>
@@ -2048,14 +2041,6 @@
             <pc:docMk/>
             <pc:sldMk cId="2711191929" sldId="261"/>
             <ac:spMk id="26" creationId="{AE55CCCC-A19B-FAC8-8644-6796649C0417}"/>
-          </ac:spMkLst>
-        </pc:spChg>
-        <pc:spChg chg="add del mod">
-          <ac:chgData name="Jonah St. Hilaire" userId="9d0a7af2-d0bd-4748-b50b-5cc37e0fdaa3" providerId="ADAL" clId="{58AAB240-BB3C-43BA-87E9-80C5D70C8BCC}" dt="2026-09-28T16:19:17.013" v="5147" actId="478"/>
-          <ac:spMkLst>
-            <pc:docMk/>
-            <pc:sldMk cId="2711191929" sldId="261"/>
-            <ac:spMk id="27" creationId="{B6BB7C16-19AE-FFED-DE27-8527649A6F33}"/>
           </ac:spMkLst>
         </pc:spChg>
         <pc:spChg chg="mod">
@@ -2131,7 +2116,7 @@
           </ac:spMkLst>
         </pc:spChg>
         <pc:spChg chg="mod">
-          <ac:chgData name="Jonah St. Hilaire" userId="9d0a7af2-d0bd-4748-b50b-5cc37e0fdaa3" providerId="ADAL" clId="{58AAB240-BB3C-43BA-87E9-80C5D70C8BCC}" dt="2026-09-24T21:55:28.752" v="4845" actId="1038"/>
+          <ac:chgData name="Jonah St. Hilaire" userId="9d0a7af2-d0bd-4748-b50b-5cc37e0fdaa3" providerId="ADAL" clId="{58AAB240-BB3C-43BA-87E9-80C5D70C8BCC}" dt="2026-10-08T18:12:27.387" v="5157" actId="20577"/>
           <ac:spMkLst>
             <pc:docMk/>
             <pc:sldMk cId="2711191929" sldId="261"/>
@@ -2259,7 +2244,7 @@
           </ac:cxnSpMkLst>
         </pc:cxnChg>
         <pc:cxnChg chg="mod">
-          <ac:chgData name="Jonah St. Hilaire" userId="9d0a7af2-d0bd-4748-b50b-5cc37e0fdaa3" providerId="ADAL" clId="{58AAB240-BB3C-43BA-87E9-80C5D70C8BCC}" dt="2026-09-24T21:51:33.498" v="4714" actId="1076"/>
+          <ac:chgData name="Jonah St. Hilaire" userId="9d0a7af2-d0bd-4748-b50b-5cc37e0fdaa3" providerId="ADAL" clId="{58AAB240-BB3C-43BA-87E9-80C5D70C8BCC}" dt="2026-10-08T18:14:22.046" v="5194" actId="692"/>
           <ac:cxnSpMkLst>
             <pc:docMk/>
             <pc:sldMk cId="2711191929" sldId="261"/>
@@ -2288,6 +2273,213 @@
             <pc:docMk/>
             <pc:sldMk cId="2711191929" sldId="261"/>
             <ac:cxnSpMk id="202" creationId="{6B53A215-F02F-7F0D-8731-0643808CA9B7}"/>
+          </ac:cxnSpMkLst>
+        </pc:cxnChg>
+      </pc:sldChg>
+      <pc:sldChg chg="addSp delSp modSp add mod">
+        <pc:chgData name="Jonah St. Hilaire" userId="9d0a7af2-d0bd-4748-b50b-5cc37e0fdaa3" providerId="ADAL" clId="{58AAB240-BB3C-43BA-87E9-80C5D70C8BCC}" dt="2026-10-08T21:43:59.166" v="5276" actId="20577"/>
+        <pc:sldMkLst>
+          <pc:docMk/>
+          <pc:sldMk cId="2295387406" sldId="262"/>
+        </pc:sldMkLst>
+        <pc:spChg chg="add mod">
+          <ac:chgData name="Jonah St. Hilaire" userId="9d0a7af2-d0bd-4748-b50b-5cc37e0fdaa3" providerId="ADAL" clId="{58AAB240-BB3C-43BA-87E9-80C5D70C8BCC}" dt="2026-10-08T21:43:45.863" v="5272" actId="404"/>
+          <ac:spMkLst>
+            <pc:docMk/>
+            <pc:sldMk cId="2295387406" sldId="262"/>
+            <ac:spMk id="2" creationId="{7EBCABED-745A-A13A-41F3-186ECD721924}"/>
+          </ac:spMkLst>
+        </pc:spChg>
+        <pc:spChg chg="add mod">
+          <ac:chgData name="Jonah St. Hilaire" userId="9d0a7af2-d0bd-4748-b50b-5cc37e0fdaa3" providerId="ADAL" clId="{58AAB240-BB3C-43BA-87E9-80C5D70C8BCC}" dt="2026-10-08T21:43:59.166" v="5276" actId="20577"/>
+          <ac:spMkLst>
+            <pc:docMk/>
+            <pc:sldMk cId="2295387406" sldId="262"/>
+            <ac:spMk id="4" creationId="{68333461-EBDE-E24A-EE76-0069E5470A01}"/>
+          </ac:spMkLst>
+        </pc:spChg>
+        <pc:spChg chg="del">
+          <ac:chgData name="Jonah St. Hilaire" userId="9d0a7af2-d0bd-4748-b50b-5cc37e0fdaa3" providerId="ADAL" clId="{58AAB240-BB3C-43BA-87E9-80C5D70C8BCC}" dt="2026-10-08T14:56:55.082" v="5155" actId="478"/>
+          <ac:spMkLst>
+            <pc:docMk/>
+            <pc:sldMk cId="2295387406" sldId="262"/>
+            <ac:spMk id="5" creationId="{1B0796C2-5FC5-465E-DB22-A0F0EF622D14}"/>
+          </ac:spMkLst>
+        </pc:spChg>
+        <pc:spChg chg="add mod">
+          <ac:chgData name="Jonah St. Hilaire" userId="9d0a7af2-d0bd-4748-b50b-5cc37e0fdaa3" providerId="ADAL" clId="{58AAB240-BB3C-43BA-87E9-80C5D70C8BCC}" dt="2026-10-08T18:18:34.843" v="5263" actId="1076"/>
+          <ac:spMkLst>
+            <pc:docMk/>
+            <pc:sldMk cId="2295387406" sldId="262"/>
+            <ac:spMk id="6" creationId="{42B5D145-1FE9-E9F2-AE1A-4543877425A8}"/>
+          </ac:spMkLst>
+        </pc:spChg>
+        <pc:spChg chg="add mod">
+          <ac:chgData name="Jonah St. Hilaire" userId="9d0a7af2-d0bd-4748-b50b-5cc37e0fdaa3" providerId="ADAL" clId="{58AAB240-BB3C-43BA-87E9-80C5D70C8BCC}" dt="2026-10-08T18:18:34.843" v="5263" actId="1076"/>
+          <ac:spMkLst>
+            <pc:docMk/>
+            <pc:sldMk cId="2295387406" sldId="262"/>
+            <ac:spMk id="10" creationId="{6072E3D3-ED0C-0736-B5AC-A6F8820B15FC}"/>
+          </ac:spMkLst>
+        </pc:spChg>
+        <pc:spChg chg="add del mod">
+          <ac:chgData name="Jonah St. Hilaire" userId="9d0a7af2-d0bd-4748-b50b-5cc37e0fdaa3" providerId="ADAL" clId="{58AAB240-BB3C-43BA-87E9-80C5D70C8BCC}" dt="2026-10-08T18:13:46.371" v="5192" actId="478"/>
+          <ac:spMkLst>
+            <pc:docMk/>
+            <pc:sldMk cId="2295387406" sldId="262"/>
+            <ac:spMk id="14" creationId="{ADC610AA-17ED-F482-7187-A3F4A7CD6823}"/>
+          </ac:spMkLst>
+        </pc:spChg>
+        <pc:spChg chg="add mod">
+          <ac:chgData name="Jonah St. Hilaire" userId="9d0a7af2-d0bd-4748-b50b-5cc37e0fdaa3" providerId="ADAL" clId="{58AAB240-BB3C-43BA-87E9-80C5D70C8BCC}" dt="2026-10-08T18:18:34.843" v="5263" actId="1076"/>
+          <ac:spMkLst>
+            <pc:docMk/>
+            <pc:sldMk cId="2295387406" sldId="262"/>
+            <ac:spMk id="22" creationId="{6D5F0E26-8FB6-F596-6944-2D98343D494B}"/>
+          </ac:spMkLst>
+        </pc:spChg>
+        <pc:spChg chg="add mod">
+          <ac:chgData name="Jonah St. Hilaire" userId="9d0a7af2-d0bd-4748-b50b-5cc37e0fdaa3" providerId="ADAL" clId="{58AAB240-BB3C-43BA-87E9-80C5D70C8BCC}" dt="2026-10-08T18:18:34.843" v="5263" actId="1076"/>
+          <ac:spMkLst>
+            <pc:docMk/>
+            <pc:sldMk cId="2295387406" sldId="262"/>
+            <ac:spMk id="27" creationId="{358CD540-749E-6CD5-5ED0-EA8142970219}"/>
+          </ac:spMkLst>
+        </pc:spChg>
+        <pc:spChg chg="add mod">
+          <ac:chgData name="Jonah St. Hilaire" userId="9d0a7af2-d0bd-4748-b50b-5cc37e0fdaa3" providerId="ADAL" clId="{58AAB240-BB3C-43BA-87E9-80C5D70C8BCC}" dt="2026-10-08T18:18:34.843" v="5263" actId="1076"/>
+          <ac:spMkLst>
+            <pc:docMk/>
+            <pc:sldMk cId="2295387406" sldId="262"/>
+            <ac:spMk id="30" creationId="{1E139E5D-03BA-9E23-91A3-CA93730B89C5}"/>
+          </ac:spMkLst>
+        </pc:spChg>
+        <pc:spChg chg="del">
+          <ac:chgData name="Jonah St. Hilaire" userId="9d0a7af2-d0bd-4748-b50b-5cc37e0fdaa3" providerId="ADAL" clId="{58AAB240-BB3C-43BA-87E9-80C5D70C8BCC}" dt="2026-10-08T14:56:55.082" v="5155" actId="478"/>
+          <ac:spMkLst>
+            <pc:docMk/>
+            <pc:sldMk cId="2295387406" sldId="262"/>
+            <ac:spMk id="37" creationId="{714D9825-D705-F9D6-7AD1-2B969BBF67E1}"/>
+          </ac:spMkLst>
+        </pc:spChg>
+        <pc:spChg chg="del">
+          <ac:chgData name="Jonah St. Hilaire" userId="9d0a7af2-d0bd-4748-b50b-5cc37e0fdaa3" providerId="ADAL" clId="{58AAB240-BB3C-43BA-87E9-80C5D70C8BCC}" dt="2026-10-08T14:56:55.082" v="5155" actId="478"/>
+          <ac:spMkLst>
+            <pc:docMk/>
+            <pc:sldMk cId="2295387406" sldId="262"/>
+            <ac:spMk id="48" creationId="{AA303278-8CC6-A313-9A0E-558BD2F481DC}"/>
+          </ac:spMkLst>
+        </pc:spChg>
+        <pc:spChg chg="del">
+          <ac:chgData name="Jonah St. Hilaire" userId="9d0a7af2-d0bd-4748-b50b-5cc37e0fdaa3" providerId="ADAL" clId="{58AAB240-BB3C-43BA-87E9-80C5D70C8BCC}" dt="2026-10-08T14:56:55.082" v="5155" actId="478"/>
+          <ac:spMkLst>
+            <pc:docMk/>
+            <pc:sldMk cId="2295387406" sldId="262"/>
+            <ac:spMk id="86" creationId="{1A912037-1330-CFDB-3788-541D143649C4}"/>
+          </ac:spMkLst>
+        </pc:spChg>
+        <pc:spChg chg="del">
+          <ac:chgData name="Jonah St. Hilaire" userId="9d0a7af2-d0bd-4748-b50b-5cc37e0fdaa3" providerId="ADAL" clId="{58AAB240-BB3C-43BA-87E9-80C5D70C8BCC}" dt="2026-10-08T14:56:55.082" v="5155" actId="478"/>
+          <ac:spMkLst>
+            <pc:docMk/>
+            <pc:sldMk cId="2295387406" sldId="262"/>
+            <ac:spMk id="87" creationId="{EB557991-B6BC-574B-E063-E2F734A67C57}"/>
+          </ac:spMkLst>
+        </pc:spChg>
+        <pc:spChg chg="del">
+          <ac:chgData name="Jonah St. Hilaire" userId="9d0a7af2-d0bd-4748-b50b-5cc37e0fdaa3" providerId="ADAL" clId="{58AAB240-BB3C-43BA-87E9-80C5D70C8BCC}" dt="2026-10-08T14:56:55.082" v="5155" actId="478"/>
+          <ac:spMkLst>
+            <pc:docMk/>
+            <pc:sldMk cId="2295387406" sldId="262"/>
+            <ac:spMk id="98" creationId="{BAF4663E-253B-AB3E-B403-1FDF8650F7B6}"/>
+          </ac:spMkLst>
+        </pc:spChg>
+        <pc:spChg chg="del">
+          <ac:chgData name="Jonah St. Hilaire" userId="9d0a7af2-d0bd-4748-b50b-5cc37e0fdaa3" providerId="ADAL" clId="{58AAB240-BB3C-43BA-87E9-80C5D70C8BCC}" dt="2026-10-08T14:56:55.082" v="5155" actId="478"/>
+          <ac:spMkLst>
+            <pc:docMk/>
+            <pc:sldMk cId="2295387406" sldId="262"/>
+            <ac:spMk id="104" creationId="{2DEFE44D-10BF-EBCB-5D1C-225A51A927D1}"/>
+          </ac:spMkLst>
+        </pc:spChg>
+        <pc:spChg chg="del">
+          <ac:chgData name="Jonah St. Hilaire" userId="9d0a7af2-d0bd-4748-b50b-5cc37e0fdaa3" providerId="ADAL" clId="{58AAB240-BB3C-43BA-87E9-80C5D70C8BCC}" dt="2026-10-08T14:56:55.082" v="5155" actId="478"/>
+          <ac:spMkLst>
+            <pc:docMk/>
+            <pc:sldMk cId="2295387406" sldId="262"/>
+            <ac:spMk id="133" creationId="{EEEEB79A-1B55-83F9-2BA5-C02DECB6EBDC}"/>
+          </ac:spMkLst>
+        </pc:spChg>
+        <pc:spChg chg="del">
+          <ac:chgData name="Jonah St. Hilaire" userId="9d0a7af2-d0bd-4748-b50b-5cc37e0fdaa3" providerId="ADAL" clId="{58AAB240-BB3C-43BA-87E9-80C5D70C8BCC}" dt="2026-10-08T14:56:55.082" v="5155" actId="478"/>
+          <ac:spMkLst>
+            <pc:docMk/>
+            <pc:sldMk cId="2295387406" sldId="262"/>
+            <ac:spMk id="141" creationId="{52810955-202B-1D61-4EA5-3583AAB94C9B}"/>
+          </ac:spMkLst>
+        </pc:spChg>
+        <pc:spChg chg="del">
+          <ac:chgData name="Jonah St. Hilaire" userId="9d0a7af2-d0bd-4748-b50b-5cc37e0fdaa3" providerId="ADAL" clId="{58AAB240-BB3C-43BA-87E9-80C5D70C8BCC}" dt="2026-10-08T14:56:55.082" v="5155" actId="478"/>
+          <ac:spMkLst>
+            <pc:docMk/>
+            <pc:sldMk cId="2295387406" sldId="262"/>
+            <ac:spMk id="172" creationId="{FC2713F2-1D5E-DE87-BEC5-8408B53A1C74}"/>
+          </ac:spMkLst>
+        </pc:spChg>
+        <pc:cxnChg chg="add mod">
+          <ac:chgData name="Jonah St. Hilaire" userId="9d0a7af2-d0bd-4748-b50b-5cc37e0fdaa3" providerId="ADAL" clId="{58AAB240-BB3C-43BA-87E9-80C5D70C8BCC}" dt="2026-10-08T18:18:34.843" v="5263" actId="1076"/>
+          <ac:cxnSpMkLst>
+            <pc:docMk/>
+            <pc:sldMk cId="2295387406" sldId="262"/>
+            <ac:cxnSpMk id="18" creationId="{558B3977-A2EC-22EA-8F42-38FB48B958C6}"/>
+          </ac:cxnSpMkLst>
+        </pc:cxnChg>
+        <pc:cxnChg chg="add del mod">
+          <ac:chgData name="Jonah St. Hilaire" userId="9d0a7af2-d0bd-4748-b50b-5cc37e0fdaa3" providerId="ADAL" clId="{58AAB240-BB3C-43BA-87E9-80C5D70C8BCC}" dt="2026-10-08T18:15:17.592" v="5200" actId="11529"/>
+          <ac:cxnSpMkLst>
+            <pc:docMk/>
+            <pc:sldMk cId="2295387406" sldId="262"/>
+            <ac:cxnSpMk id="32" creationId="{33F9AC7D-B267-1D53-BECA-F0B7A5B14E45}"/>
+          </ac:cxnSpMkLst>
+        </pc:cxnChg>
+        <pc:cxnChg chg="add mod">
+          <ac:chgData name="Jonah St. Hilaire" userId="9d0a7af2-d0bd-4748-b50b-5cc37e0fdaa3" providerId="ADAL" clId="{58AAB240-BB3C-43BA-87E9-80C5D70C8BCC}" dt="2026-10-08T18:18:34.843" v="5263" actId="1076"/>
+          <ac:cxnSpMkLst>
+            <pc:docMk/>
+            <pc:sldMk cId="2295387406" sldId="262"/>
+            <ac:cxnSpMk id="34" creationId="{8B8058BC-F12B-598D-7A06-E2F5B77BDAC9}"/>
+          </ac:cxnSpMkLst>
+        </pc:cxnChg>
+        <pc:cxnChg chg="add mod">
+          <ac:chgData name="Jonah St. Hilaire" userId="9d0a7af2-d0bd-4748-b50b-5cc37e0fdaa3" providerId="ADAL" clId="{58AAB240-BB3C-43BA-87E9-80C5D70C8BCC}" dt="2026-10-08T18:18:34.843" v="5263" actId="1076"/>
+          <ac:cxnSpMkLst>
+            <pc:docMk/>
+            <pc:sldMk cId="2295387406" sldId="262"/>
+            <ac:cxnSpMk id="36" creationId="{E741EC34-EF81-6EE6-451C-C19DF5B0EAE0}"/>
+          </ac:cxnSpMkLst>
+        </pc:cxnChg>
+        <pc:cxnChg chg="add mod">
+          <ac:chgData name="Jonah St. Hilaire" userId="9d0a7af2-d0bd-4748-b50b-5cc37e0fdaa3" providerId="ADAL" clId="{58AAB240-BB3C-43BA-87E9-80C5D70C8BCC}" dt="2026-10-08T18:18:34.843" v="5263" actId="1076"/>
+          <ac:cxnSpMkLst>
+            <pc:docMk/>
+            <pc:sldMk cId="2295387406" sldId="262"/>
+            <ac:cxnSpMk id="40" creationId="{27E29354-2576-F047-8CA0-9540D510A364}"/>
+          </ac:cxnSpMkLst>
+        </pc:cxnChg>
+        <pc:cxnChg chg="add mod">
+          <ac:chgData name="Jonah St. Hilaire" userId="9d0a7af2-d0bd-4748-b50b-5cc37e0fdaa3" providerId="ADAL" clId="{58AAB240-BB3C-43BA-87E9-80C5D70C8BCC}" dt="2026-10-08T18:18:34.843" v="5263" actId="1076"/>
+          <ac:cxnSpMkLst>
+            <pc:docMk/>
+            <pc:sldMk cId="2295387406" sldId="262"/>
+            <ac:cxnSpMk id="47" creationId="{97270A09-F56C-C80A-9E87-8BED291E256F}"/>
+          </ac:cxnSpMkLst>
+        </pc:cxnChg>
+        <pc:cxnChg chg="add del mod">
+          <ac:chgData name="Jonah St. Hilaire" userId="9d0a7af2-d0bd-4748-b50b-5cc37e0fdaa3" providerId="ADAL" clId="{58AAB240-BB3C-43BA-87E9-80C5D70C8BCC}" dt="2026-10-08T18:18:23.674" v="5261" actId="478"/>
+          <ac:cxnSpMkLst>
+            <pc:docMk/>
+            <pc:sldMk cId="2295387406" sldId="262"/>
+            <ac:cxnSpMk id="66" creationId="{18E2CD87-EBB9-5AD9-9902-E957028A1845}"/>
           </ac:cxnSpMkLst>
         </pc:cxnChg>
       </pc:sldChg>
@@ -2378,7 +2570,7 @@
           <a:p>
             <a:fld id="{681B76C8-650E-46E7-9239-6D2B71F9A944}" type="datetimeFigureOut">
               <a:rPr lang="en-CA" smtClean="0"/>
-              <a:t>2026-09-28</a:t>
+              <a:t>2026-10-08</a:t>
             </a:fld>
             <a:endParaRPr lang="en-CA"/>
           </a:p>
@@ -2861,7 +3053,7 @@
           <a:p>
             <a:fld id="{14C7401E-E5C6-4ADA-88C9-F7478DD83A36}" type="datetimeFigureOut">
               <a:rPr lang="en-CA" smtClean="0"/>
-              <a:t>2026-09-28</a:t>
+              <a:t>2026-10-08</a:t>
             </a:fld>
             <a:endParaRPr lang="en-CA"/>
           </a:p>
@@ -3031,7 +3223,7 @@
           <a:p>
             <a:fld id="{14C7401E-E5C6-4ADA-88C9-F7478DD83A36}" type="datetimeFigureOut">
               <a:rPr lang="en-CA" smtClean="0"/>
-              <a:t>2026-09-28</a:t>
+              <a:t>2026-10-08</a:t>
             </a:fld>
             <a:endParaRPr lang="en-CA"/>
           </a:p>
@@ -3211,7 +3403,7 @@
           <a:p>
             <a:fld id="{14C7401E-E5C6-4ADA-88C9-F7478DD83A36}" type="datetimeFigureOut">
               <a:rPr lang="en-CA" smtClean="0"/>
-              <a:t>2026-09-28</a:t>
+              <a:t>2026-10-08</a:t>
             </a:fld>
             <a:endParaRPr lang="en-CA"/>
           </a:p>
@@ -3381,7 +3573,7 @@
           <a:p>
             <a:fld id="{14C7401E-E5C6-4ADA-88C9-F7478DD83A36}" type="datetimeFigureOut">
               <a:rPr lang="en-CA" smtClean="0"/>
-              <a:t>2026-09-28</a:t>
+              <a:t>2026-10-08</a:t>
             </a:fld>
             <a:endParaRPr lang="en-CA"/>
           </a:p>
@@ -3627,7 +3819,7 @@
           <a:p>
             <a:fld id="{14C7401E-E5C6-4ADA-88C9-F7478DD83A36}" type="datetimeFigureOut">
               <a:rPr lang="en-CA" smtClean="0"/>
-              <a:t>2026-09-28</a:t>
+              <a:t>2026-10-08</a:t>
             </a:fld>
             <a:endParaRPr lang="en-CA"/>
           </a:p>
@@ -3859,7 +4051,7 @@
           <a:p>
             <a:fld id="{14C7401E-E5C6-4ADA-88C9-F7478DD83A36}" type="datetimeFigureOut">
               <a:rPr lang="en-CA" smtClean="0"/>
-              <a:t>2026-09-28</a:t>
+              <a:t>2026-10-08</a:t>
             </a:fld>
             <a:endParaRPr lang="en-CA"/>
           </a:p>
@@ -4226,7 +4418,7 @@
           <a:p>
             <a:fld id="{14C7401E-E5C6-4ADA-88C9-F7478DD83A36}" type="datetimeFigureOut">
               <a:rPr lang="en-CA" smtClean="0"/>
-              <a:t>2026-09-28</a:t>
+              <a:t>2026-10-08</a:t>
             </a:fld>
             <a:endParaRPr lang="en-CA"/>
           </a:p>
@@ -4344,7 +4536,7 @@
           <a:p>
             <a:fld id="{14C7401E-E5C6-4ADA-88C9-F7478DD83A36}" type="datetimeFigureOut">
               <a:rPr lang="en-CA" smtClean="0"/>
-              <a:t>2026-09-28</a:t>
+              <a:t>2026-10-08</a:t>
             </a:fld>
             <a:endParaRPr lang="en-CA"/>
           </a:p>
@@ -4439,7 +4631,7 @@
           <a:p>
             <a:fld id="{14C7401E-E5C6-4ADA-88C9-F7478DD83A36}" type="datetimeFigureOut">
               <a:rPr lang="en-CA" smtClean="0"/>
-              <a:t>2026-09-28</a:t>
+              <a:t>2026-10-08</a:t>
             </a:fld>
             <a:endParaRPr lang="en-CA"/>
           </a:p>
@@ -4716,7 +4908,7 @@
           <a:p>
             <a:fld id="{14C7401E-E5C6-4ADA-88C9-F7478DD83A36}" type="datetimeFigureOut">
               <a:rPr lang="en-CA" smtClean="0"/>
-              <a:t>2026-09-28</a:t>
+              <a:t>2026-10-08</a:t>
             </a:fld>
             <a:endParaRPr lang="en-CA"/>
           </a:p>
@@ -4973,7 +5165,7 @@
           <a:p>
             <a:fld id="{14C7401E-E5C6-4ADA-88C9-F7478DD83A36}" type="datetimeFigureOut">
               <a:rPr lang="en-CA" smtClean="0"/>
-              <a:t>2026-09-28</a:t>
+              <a:t>2026-10-08</a:t>
             </a:fld>
             <a:endParaRPr lang="en-CA"/>
           </a:p>
@@ -5186,7 +5378,7 @@
           <a:p>
             <a:fld id="{14C7401E-E5C6-4ADA-88C9-F7478DD83A36}" type="datetimeFigureOut">
               <a:rPr lang="en-CA" smtClean="0"/>
-              <a:t>2026-09-28</a:t>
+              <a:t>2026-10-08</a:t>
             </a:fld>
             <a:endParaRPr lang="en-CA"/>
           </a:p>
@@ -36963,8 +37155,8 @@
           <a:chExt cx="0" cy="0"/>
         </a:xfrm>
       </p:grpSpPr>
-      <mc:AlternateContent xmlns:mc="http://schemas.openxmlformats.org/markup-compatibility/2006">
-        <mc:Choice xmlns:a14="http://schemas.microsoft.com/office/drawing/2010/main" Requires="a14">
+      <mc:AlternateContent xmlns:mc="http://schemas.openxmlformats.org/markup-compatibility/2006" xmlns:a14="http://schemas.microsoft.com/office/drawing/2010/main">
+        <mc:Choice Requires="a14">
           <p:sp>
             <p:nvSpPr>
               <p:cNvPr id="37" name="TextBox 36">
@@ -37044,7 +37236,7 @@
             </p:txBody>
           </p:sp>
         </mc:Choice>
-        <mc:Fallback>
+        <mc:Fallback xmlns="">
           <p:sp>
             <p:nvSpPr>
               <p:cNvPr id="37" name="TextBox 36">
@@ -37089,8 +37281,8 @@
           </p:sp>
         </mc:Fallback>
       </mc:AlternateContent>
-      <mc:AlternateContent xmlns:mc="http://schemas.openxmlformats.org/markup-compatibility/2006">
-        <mc:Choice xmlns:a14="http://schemas.microsoft.com/office/drawing/2010/main" Requires="a14">
+      <mc:AlternateContent xmlns:mc="http://schemas.openxmlformats.org/markup-compatibility/2006" xmlns:a14="http://schemas.microsoft.com/office/drawing/2010/main">
+        <mc:Choice Requires="a14">
           <p:sp>
             <p:nvSpPr>
               <p:cNvPr id="38" name="TextBox 37">
@@ -37170,7 +37362,7 @@
             </p:txBody>
           </p:sp>
         </mc:Choice>
-        <mc:Fallback>
+        <mc:Fallback xmlns="">
           <p:sp>
             <p:nvSpPr>
               <p:cNvPr id="38" name="TextBox 37">
@@ -37347,8 +37539,8 @@
           </a:fontRef>
         </p:style>
       </p:cxnSp>
-      <mc:AlternateContent xmlns:mc="http://schemas.openxmlformats.org/markup-compatibility/2006">
-        <mc:Choice xmlns:a14="http://schemas.microsoft.com/office/drawing/2010/main" Requires="a14">
+      <mc:AlternateContent xmlns:mc="http://schemas.openxmlformats.org/markup-compatibility/2006" xmlns:a14="http://schemas.microsoft.com/office/drawing/2010/main">
+        <mc:Choice Requires="a14">
           <p:sp>
             <p:nvSpPr>
               <p:cNvPr id="48" name="TextBox 47">
@@ -37428,7 +37620,7 @@
             </p:txBody>
           </p:sp>
         </mc:Choice>
-        <mc:Fallback>
+        <mc:Fallback xmlns="">
           <p:sp>
             <p:nvSpPr>
               <p:cNvPr id="48" name="TextBox 47">
@@ -37473,8 +37665,8 @@
           </p:sp>
         </mc:Fallback>
       </mc:AlternateContent>
-      <mc:AlternateContent xmlns:mc="http://schemas.openxmlformats.org/markup-compatibility/2006">
-        <mc:Choice xmlns:a14="http://schemas.microsoft.com/office/drawing/2010/main" Requires="a14">
+      <mc:AlternateContent xmlns:mc="http://schemas.openxmlformats.org/markup-compatibility/2006" xmlns:a14="http://schemas.microsoft.com/office/drawing/2010/main">
+        <mc:Choice Requires="a14">
           <p:sp>
             <p:nvSpPr>
               <p:cNvPr id="49" name="TextBox 48">
@@ -37543,7 +37735,7 @@
             </p:txBody>
           </p:sp>
         </mc:Choice>
-        <mc:Fallback>
+        <mc:Fallback xmlns="">
           <p:sp>
             <p:nvSpPr>
               <p:cNvPr id="49" name="TextBox 48">
@@ -37588,8 +37780,8 @@
           </p:sp>
         </mc:Fallback>
       </mc:AlternateContent>
-      <mc:AlternateContent xmlns:mc="http://schemas.openxmlformats.org/markup-compatibility/2006">
-        <mc:Choice xmlns:a14="http://schemas.microsoft.com/office/drawing/2010/main" Requires="a14">
+      <mc:AlternateContent xmlns:mc="http://schemas.openxmlformats.org/markup-compatibility/2006" xmlns:a14="http://schemas.microsoft.com/office/drawing/2010/main">
+        <mc:Choice Requires="a14">
           <p:sp>
             <p:nvSpPr>
               <p:cNvPr id="50" name="TextBox 49">
@@ -37658,7 +37850,7 @@
             </p:txBody>
           </p:sp>
         </mc:Choice>
-        <mc:Fallback>
+        <mc:Fallback xmlns="">
           <p:sp>
             <p:nvSpPr>
               <p:cNvPr id="50" name="TextBox 49">
@@ -37835,8 +38027,8 @@
           </a:fontRef>
         </p:style>
       </p:cxnSp>
-      <mc:AlternateContent xmlns:mc="http://schemas.openxmlformats.org/markup-compatibility/2006">
-        <mc:Choice xmlns:a14="http://schemas.microsoft.com/office/drawing/2010/main" Requires="a14">
+      <mc:AlternateContent xmlns:mc="http://schemas.openxmlformats.org/markup-compatibility/2006" xmlns:a14="http://schemas.microsoft.com/office/drawing/2010/main">
+        <mc:Choice Requires="a14">
           <p:sp>
             <p:nvSpPr>
               <p:cNvPr id="54" name="TextBox 53">
@@ -37905,7 +38097,7 @@
             </p:txBody>
           </p:sp>
         </mc:Choice>
-        <mc:Fallback>
+        <mc:Fallback xmlns="">
           <p:sp>
             <p:nvSpPr>
               <p:cNvPr id="54" name="TextBox 53">
@@ -38253,8 +38445,8 @@
           </a:p>
         </p:txBody>
       </p:sp>
-      <mc:AlternateContent xmlns:mc="http://schemas.openxmlformats.org/markup-compatibility/2006">
-        <mc:Choice xmlns:a14="http://schemas.microsoft.com/office/drawing/2010/main" Requires="a14">
+      <mc:AlternateContent xmlns:mc="http://schemas.openxmlformats.org/markup-compatibility/2006" xmlns:a14="http://schemas.microsoft.com/office/drawing/2010/main">
+        <mc:Choice Requires="a14">
           <p:sp>
             <p:nvSpPr>
               <p:cNvPr id="63" name="Rectangle: Rounded Corners 62">
@@ -38379,7 +38571,7 @@
             </p:txBody>
           </p:sp>
         </mc:Choice>
-        <mc:Fallback>
+        <mc:Fallback xmlns="">
           <p:sp>
             <p:nvSpPr>
               <p:cNvPr id="63" name="Rectangle: Rounded Corners 62">
@@ -38431,8 +38623,8 @@
           </p:sp>
         </mc:Fallback>
       </mc:AlternateContent>
-      <mc:AlternateContent xmlns:mc="http://schemas.openxmlformats.org/markup-compatibility/2006">
-        <mc:Choice xmlns:a14="http://schemas.microsoft.com/office/drawing/2010/main" Requires="a14">
+      <mc:AlternateContent xmlns:mc="http://schemas.openxmlformats.org/markup-compatibility/2006" xmlns:a14="http://schemas.microsoft.com/office/drawing/2010/main">
+        <mc:Choice Requires="a14">
           <p:sp>
             <p:nvSpPr>
               <p:cNvPr id="64" name="Rectangle: Rounded Corners 63">
@@ -38557,7 +38749,7 @@
             </p:txBody>
           </p:sp>
         </mc:Choice>
-        <mc:Fallback>
+        <mc:Fallback xmlns="">
           <p:sp>
             <p:nvSpPr>
               <p:cNvPr id="64" name="Rectangle: Rounded Corners 63">
@@ -38655,8 +38847,8 @@
           </a:fontRef>
         </p:style>
       </p:cxnSp>
-      <mc:AlternateContent xmlns:mc="http://schemas.openxmlformats.org/markup-compatibility/2006">
-        <mc:Choice xmlns:a14="http://schemas.microsoft.com/office/drawing/2010/main" Requires="a14">
+      <mc:AlternateContent xmlns:mc="http://schemas.openxmlformats.org/markup-compatibility/2006" xmlns:a14="http://schemas.microsoft.com/office/drawing/2010/main">
+        <mc:Choice Requires="a14">
           <p:sp>
             <p:nvSpPr>
               <p:cNvPr id="69" name="TextBox 68">
@@ -38725,7 +38917,7 @@
             </p:txBody>
           </p:sp>
         </mc:Choice>
-        <mc:Fallback>
+        <mc:Fallback xmlns="">
           <p:sp>
             <p:nvSpPr>
               <p:cNvPr id="69" name="TextBox 68">
@@ -38770,8 +38962,8 @@
           </p:sp>
         </mc:Fallback>
       </mc:AlternateContent>
-      <mc:AlternateContent xmlns:mc="http://schemas.openxmlformats.org/markup-compatibility/2006">
-        <mc:Choice xmlns:a14="http://schemas.microsoft.com/office/drawing/2010/main" Requires="a14">
+      <mc:AlternateContent xmlns:mc="http://schemas.openxmlformats.org/markup-compatibility/2006" xmlns:a14="http://schemas.microsoft.com/office/drawing/2010/main">
+        <mc:Choice Requires="a14">
           <p:sp>
             <p:nvSpPr>
               <p:cNvPr id="70" name="TextBox 69">
@@ -38840,7 +39032,7 @@
             </p:txBody>
           </p:sp>
         </mc:Choice>
-        <mc:Fallback>
+        <mc:Fallback xmlns="">
           <p:sp>
             <p:nvSpPr>
               <p:cNvPr id="70" name="TextBox 69">
@@ -38885,8 +39077,8 @@
           </p:sp>
         </mc:Fallback>
       </mc:AlternateContent>
-      <mc:AlternateContent xmlns:mc="http://schemas.openxmlformats.org/markup-compatibility/2006">
-        <mc:Choice xmlns:a14="http://schemas.microsoft.com/office/drawing/2010/main" Requires="a14">
+      <mc:AlternateContent xmlns:mc="http://schemas.openxmlformats.org/markup-compatibility/2006" xmlns:a14="http://schemas.microsoft.com/office/drawing/2010/main">
+        <mc:Choice Requires="a14">
           <p:sp>
             <p:nvSpPr>
               <p:cNvPr id="71" name="TextBox 70">
@@ -38955,7 +39147,7 @@
             </p:txBody>
           </p:sp>
         </mc:Choice>
-        <mc:Fallback>
+        <mc:Fallback xmlns="">
           <p:sp>
             <p:nvSpPr>
               <p:cNvPr id="71" name="TextBox 70">
@@ -39132,8 +39324,8 @@
           </a:fontRef>
         </p:style>
       </p:cxnSp>
-      <mc:AlternateContent xmlns:mc="http://schemas.openxmlformats.org/markup-compatibility/2006">
-        <mc:Choice xmlns:a14="http://schemas.microsoft.com/office/drawing/2010/main" Requires="a14">
+      <mc:AlternateContent xmlns:mc="http://schemas.openxmlformats.org/markup-compatibility/2006" xmlns:a14="http://schemas.microsoft.com/office/drawing/2010/main">
+        <mc:Choice Requires="a14">
           <p:sp>
             <p:nvSpPr>
               <p:cNvPr id="76" name="TextBox 75">
@@ -39202,7 +39394,7 @@
             </p:txBody>
           </p:sp>
         </mc:Choice>
-        <mc:Fallback>
+        <mc:Fallback xmlns="">
           <p:sp>
             <p:nvSpPr>
               <p:cNvPr id="76" name="TextBox 75">
@@ -39247,8 +39439,8 @@
           </p:sp>
         </mc:Fallback>
       </mc:AlternateContent>
-      <mc:AlternateContent xmlns:mc="http://schemas.openxmlformats.org/markup-compatibility/2006">
-        <mc:Choice xmlns:a14="http://schemas.microsoft.com/office/drawing/2010/main" Requires="a14">
+      <mc:AlternateContent xmlns:mc="http://schemas.openxmlformats.org/markup-compatibility/2006" xmlns:a14="http://schemas.microsoft.com/office/drawing/2010/main">
+        <mc:Choice Requires="a14">
           <p:sp>
             <p:nvSpPr>
               <p:cNvPr id="77" name="TextBox 76">
@@ -39317,7 +39509,7 @@
             </p:txBody>
           </p:sp>
         </mc:Choice>
-        <mc:Fallback>
+        <mc:Fallback xmlns="">
           <p:sp>
             <p:nvSpPr>
               <p:cNvPr id="77" name="TextBox 76">
@@ -39362,8 +39554,8 @@
           </p:sp>
         </mc:Fallback>
       </mc:AlternateContent>
-      <mc:AlternateContent xmlns:mc="http://schemas.openxmlformats.org/markup-compatibility/2006">
-        <mc:Choice xmlns:a14="http://schemas.microsoft.com/office/drawing/2010/main" Requires="a14">
+      <mc:AlternateContent xmlns:mc="http://schemas.openxmlformats.org/markup-compatibility/2006" xmlns:a14="http://schemas.microsoft.com/office/drawing/2010/main">
+        <mc:Choice Requires="a14">
           <p:sp>
             <p:nvSpPr>
               <p:cNvPr id="78" name="TextBox 77">
@@ -39432,7 +39624,7 @@
             </p:txBody>
           </p:sp>
         </mc:Choice>
-        <mc:Fallback>
+        <mc:Fallback xmlns="">
           <p:sp>
             <p:nvSpPr>
               <p:cNvPr id="78" name="TextBox 77">
@@ -39477,8 +39669,8 @@
           </p:sp>
         </mc:Fallback>
       </mc:AlternateContent>
-      <mc:AlternateContent xmlns:mc="http://schemas.openxmlformats.org/markup-compatibility/2006">
-        <mc:Choice xmlns:a14="http://schemas.microsoft.com/office/drawing/2010/main" Requires="a14">
+      <mc:AlternateContent xmlns:mc="http://schemas.openxmlformats.org/markup-compatibility/2006" xmlns:a14="http://schemas.microsoft.com/office/drawing/2010/main">
+        <mc:Choice Requires="a14">
           <p:sp>
             <p:nvSpPr>
               <p:cNvPr id="86" name="TextBox 85">
@@ -39547,7 +39739,7 @@
             </p:txBody>
           </p:sp>
         </mc:Choice>
-        <mc:Fallback>
+        <mc:Fallback xmlns="">
           <p:sp>
             <p:nvSpPr>
               <p:cNvPr id="86" name="TextBox 85">
@@ -39592,8 +39784,8 @@
           </p:sp>
         </mc:Fallback>
       </mc:AlternateContent>
-      <mc:AlternateContent xmlns:mc="http://schemas.openxmlformats.org/markup-compatibility/2006">
-        <mc:Choice xmlns:a14="http://schemas.microsoft.com/office/drawing/2010/main" Requires="a14">
+      <mc:AlternateContent xmlns:mc="http://schemas.openxmlformats.org/markup-compatibility/2006" xmlns:a14="http://schemas.microsoft.com/office/drawing/2010/main">
+        <mc:Choice Requires="a14">
           <p:sp>
             <p:nvSpPr>
               <p:cNvPr id="87" name="TextBox 86">
@@ -39662,7 +39854,7 @@
             </p:txBody>
           </p:sp>
         </mc:Choice>
-        <mc:Fallback>
+        <mc:Fallback xmlns="">
           <p:sp>
             <p:nvSpPr>
               <p:cNvPr id="87" name="TextBox 86">
@@ -40097,8 +40289,8 @@
           </p:spPr>
         </p:pic>
       </p:grpSp>
-      <mc:AlternateContent xmlns:mc="http://schemas.openxmlformats.org/markup-compatibility/2006">
-        <mc:Choice xmlns:a14="http://schemas.microsoft.com/office/drawing/2010/main" Requires="a14">
+      <mc:AlternateContent xmlns:mc="http://schemas.openxmlformats.org/markup-compatibility/2006" xmlns:a14="http://schemas.microsoft.com/office/drawing/2010/main">
+        <mc:Choice Requires="a14">
           <p:sp>
             <p:nvSpPr>
               <p:cNvPr id="104" name="TextBox 103">
@@ -40180,7 +40372,7 @@
             </p:txBody>
           </p:sp>
         </mc:Choice>
-        <mc:Fallback>
+        <mc:Fallback xmlns="">
           <p:sp>
             <p:nvSpPr>
               <p:cNvPr id="104" name="TextBox 103">
@@ -40225,8 +40417,8 @@
           </p:sp>
         </mc:Fallback>
       </mc:AlternateContent>
-      <mc:AlternateContent xmlns:mc="http://schemas.openxmlformats.org/markup-compatibility/2006">
-        <mc:Choice xmlns:a14="http://schemas.microsoft.com/office/drawing/2010/main" Requires="a14">
+      <mc:AlternateContent xmlns:mc="http://schemas.openxmlformats.org/markup-compatibility/2006" xmlns:a14="http://schemas.microsoft.com/office/drawing/2010/main">
+        <mc:Choice Requires="a14">
           <p:sp>
             <p:nvSpPr>
               <p:cNvPr id="105" name="TextBox 104">
@@ -40304,7 +40496,7 @@
             </p:txBody>
           </p:sp>
         </mc:Choice>
-        <mc:Fallback>
+        <mc:Fallback xmlns="">
           <p:sp>
             <p:nvSpPr>
               <p:cNvPr id="105" name="TextBox 104">
@@ -40660,8 +40852,8 @@
           </a:fontRef>
         </p:style>
       </p:cxnSp>
-      <mc:AlternateContent xmlns:mc="http://schemas.openxmlformats.org/markup-compatibility/2006">
-        <mc:Choice xmlns:a14="http://schemas.microsoft.com/office/drawing/2010/main" Requires="a14">
+      <mc:AlternateContent xmlns:mc="http://schemas.openxmlformats.org/markup-compatibility/2006" xmlns:a14="http://schemas.microsoft.com/office/drawing/2010/main">
+        <mc:Choice Requires="a14">
           <p:sp>
             <p:nvSpPr>
               <p:cNvPr id="112" name="TextBox 111">
@@ -40730,7 +40922,7 @@
             </p:txBody>
           </p:sp>
         </mc:Choice>
-        <mc:Fallback>
+        <mc:Fallback xmlns="">
           <p:sp>
             <p:nvSpPr>
               <p:cNvPr id="112" name="TextBox 111">
@@ -40775,8 +40967,8 @@
           </p:sp>
         </mc:Fallback>
       </mc:AlternateContent>
-      <mc:AlternateContent xmlns:mc="http://schemas.openxmlformats.org/markup-compatibility/2006">
-        <mc:Choice xmlns:a14="http://schemas.microsoft.com/office/drawing/2010/main" Requires="a14">
+      <mc:AlternateContent xmlns:mc="http://schemas.openxmlformats.org/markup-compatibility/2006" xmlns:a14="http://schemas.microsoft.com/office/drawing/2010/main">
+        <mc:Choice Requires="a14">
           <p:sp>
             <p:nvSpPr>
               <p:cNvPr id="113" name="TextBox 112">
@@ -40845,7 +41037,7 @@
             </p:txBody>
           </p:sp>
         </mc:Choice>
-        <mc:Fallback>
+        <mc:Fallback xmlns="">
           <p:sp>
             <p:nvSpPr>
               <p:cNvPr id="113" name="TextBox 112">
@@ -41087,8 +41279,8 @@
           </a:p>
         </p:txBody>
       </p:sp>
-      <mc:AlternateContent xmlns:mc="http://schemas.openxmlformats.org/markup-compatibility/2006">
-        <mc:Choice xmlns:a14="http://schemas.microsoft.com/office/drawing/2010/main" Requires="a14">
+      <mc:AlternateContent xmlns:mc="http://schemas.openxmlformats.org/markup-compatibility/2006" xmlns:a14="http://schemas.microsoft.com/office/drawing/2010/main">
+        <mc:Choice Requires="a14">
           <p:sp>
             <p:nvSpPr>
               <p:cNvPr id="133" name="TextBox 132">
@@ -41165,7 +41357,7 @@
             </p:txBody>
           </p:sp>
         </mc:Choice>
-        <mc:Fallback>
+        <mc:Fallback xmlns="">
           <p:sp>
             <p:nvSpPr>
               <p:cNvPr id="133" name="TextBox 132">
@@ -41210,8 +41402,8 @@
           </p:sp>
         </mc:Fallback>
       </mc:AlternateContent>
-      <mc:AlternateContent xmlns:mc="http://schemas.openxmlformats.org/markup-compatibility/2006">
-        <mc:Choice xmlns:a14="http://schemas.microsoft.com/office/drawing/2010/main" Requires="a14">
+      <mc:AlternateContent xmlns:mc="http://schemas.openxmlformats.org/markup-compatibility/2006" xmlns:a14="http://schemas.microsoft.com/office/drawing/2010/main">
+        <mc:Choice Requires="a14">
           <p:sp>
             <p:nvSpPr>
               <p:cNvPr id="134" name="TextBox 133">
@@ -41288,7 +41480,7 @@
             </p:txBody>
           </p:sp>
         </mc:Choice>
-        <mc:Fallback>
+        <mc:Fallback xmlns="">
           <p:sp>
             <p:nvSpPr>
               <p:cNvPr id="134" name="TextBox 133">
@@ -41421,8 +41613,8 @@
           </a:fontRef>
         </p:style>
       </p:cxnSp>
-      <mc:AlternateContent xmlns:mc="http://schemas.openxmlformats.org/markup-compatibility/2006">
-        <mc:Choice xmlns:a14="http://schemas.microsoft.com/office/drawing/2010/main" Requires="a14">
+      <mc:AlternateContent xmlns:mc="http://schemas.openxmlformats.org/markup-compatibility/2006" xmlns:a14="http://schemas.microsoft.com/office/drawing/2010/main">
+        <mc:Choice Requires="a14">
           <p:sp>
             <p:nvSpPr>
               <p:cNvPr id="141" name="Rectangle: Rounded Corners 140">
@@ -41547,7 +41739,7 @@
             </p:txBody>
           </p:sp>
         </mc:Choice>
-        <mc:Fallback>
+        <mc:Fallback xmlns="">
           <p:sp>
             <p:nvSpPr>
               <p:cNvPr id="141" name="Rectangle: Rounded Corners 140">
@@ -41644,8 +41836,8 @@
           </a:fontRef>
         </p:style>
       </p:cxnSp>
-      <mc:AlternateContent xmlns:mc="http://schemas.openxmlformats.org/markup-compatibility/2006">
-        <mc:Choice xmlns:a14="http://schemas.microsoft.com/office/drawing/2010/main" Requires="a14">
+      <mc:AlternateContent xmlns:mc="http://schemas.openxmlformats.org/markup-compatibility/2006" xmlns:a14="http://schemas.microsoft.com/office/drawing/2010/main">
+        <mc:Choice Requires="a14">
           <p:sp>
             <p:nvSpPr>
               <p:cNvPr id="145" name="Rectangle: Rounded Corners 144">
@@ -41770,7 +41962,7 @@
             </p:txBody>
           </p:sp>
         </mc:Choice>
-        <mc:Fallback>
+        <mc:Fallback xmlns="">
           <p:sp>
             <p:nvSpPr>
               <p:cNvPr id="145" name="Rectangle: Rounded Corners 144">
@@ -42339,7 +42531,8 @@
             <a:solidFill>
               <a:schemeClr val="tx1"/>
             </a:solidFill>
-            <a:tailEnd type="triangle"/>
+            <a:headEnd w="med" len="lg"/>
+            <a:tailEnd type="triangle" w="med" len="lg"/>
           </a:ln>
         </p:spPr>
         <p:style>
@@ -42682,8 +42875,8 @@
           </a:fontRef>
         </p:style>
       </p:cxnSp>
-      <mc:AlternateContent xmlns:mc="http://schemas.openxmlformats.org/markup-compatibility/2006">
-        <mc:Choice xmlns:a14="http://schemas.microsoft.com/office/drawing/2010/main" Requires="a14">
+      <mc:AlternateContent xmlns:mc="http://schemas.openxmlformats.org/markup-compatibility/2006" xmlns:a14="http://schemas.microsoft.com/office/drawing/2010/main">
+        <mc:Choice Requires="a14">
           <p:sp>
             <p:nvSpPr>
               <p:cNvPr id="205" name="TextBox 204">
@@ -42760,7 +42953,7 @@
             </p:txBody>
           </p:sp>
         </mc:Choice>
-        <mc:Fallback>
+        <mc:Fallback xmlns="">
           <p:sp>
             <p:nvSpPr>
               <p:cNvPr id="205" name="TextBox 204">
@@ -42805,8 +42998,8 @@
           </p:sp>
         </mc:Fallback>
       </mc:AlternateContent>
-      <mc:AlternateContent xmlns:mc="http://schemas.openxmlformats.org/markup-compatibility/2006">
-        <mc:Choice xmlns:a14="http://schemas.microsoft.com/office/drawing/2010/main" Requires="a14">
+      <mc:AlternateContent xmlns:mc="http://schemas.openxmlformats.org/markup-compatibility/2006" xmlns:a14="http://schemas.microsoft.com/office/drawing/2010/main">
+        <mc:Choice Requires="a14">
           <p:sp>
             <p:nvSpPr>
               <p:cNvPr id="207" name="TextBox 206">
@@ -42883,7 +43076,7 @@
             </p:txBody>
           </p:sp>
         </mc:Choice>
-        <mc:Fallback>
+        <mc:Fallback xmlns="">
           <p:sp>
             <p:nvSpPr>
               <p:cNvPr id="207" name="TextBox 206">
@@ -43426,8 +43619,8 @@
           </a:fontRef>
         </p:style>
       </p:cxnSp>
-      <mc:AlternateContent xmlns:mc="http://schemas.openxmlformats.org/markup-compatibility/2006">
-        <mc:Choice xmlns:a14="http://schemas.microsoft.com/office/drawing/2010/main" Requires="a14">
+      <mc:AlternateContent xmlns:mc="http://schemas.openxmlformats.org/markup-compatibility/2006" xmlns:a14="http://schemas.microsoft.com/office/drawing/2010/main">
+        <mc:Choice Requires="a14">
           <p:sp>
             <p:nvSpPr>
               <p:cNvPr id="4" name="Rectangle: Rounded Corners 3">
@@ -43638,7 +43831,7 @@
             </p:txBody>
           </p:sp>
         </mc:Choice>
-        <mc:Fallback>
+        <mc:Fallback xmlns="">
           <p:sp>
             <p:nvSpPr>
               <p:cNvPr id="4" name="Rectangle: Rounded Corners 3">
@@ -43773,8 +43966,8 @@
           </a:p>
         </p:txBody>
       </p:sp>
-      <mc:AlternateContent xmlns:mc="http://schemas.openxmlformats.org/markup-compatibility/2006">
-        <mc:Choice xmlns:a14="http://schemas.microsoft.com/office/drawing/2010/main" Requires="a14">
+      <mc:AlternateContent xmlns:mc="http://schemas.openxmlformats.org/markup-compatibility/2006" xmlns:a14="http://schemas.microsoft.com/office/drawing/2010/main">
+        <mc:Choice Requires="a14">
           <p:sp>
             <p:nvSpPr>
               <p:cNvPr id="13" name="Rectangle: Rounded Corners 12">
@@ -44061,7 +44254,7 @@
             </p:txBody>
           </p:sp>
         </mc:Choice>
-        <mc:Fallback>
+        <mc:Fallback xmlns="">
           <p:sp>
             <p:nvSpPr>
               <p:cNvPr id="13" name="Rectangle: Rounded Corners 12">
@@ -44209,6 +44402,794 @@
 </file>
 
 <file path=ppt/slides/slide5.xml><?xml version="1.0" encoding="utf-8"?>
+<p:sld xmlns:a="http://schemas.openxmlformats.org/drawingml/2006/main" xmlns:r="http://schemas.openxmlformats.org/officeDocument/2006/relationships" xmlns:p="http://schemas.openxmlformats.org/presentationml/2006/main">
+  <p:cSld>
+    <p:spTree>
+      <p:nvGrpSpPr>
+        <p:cNvPr id="1" name="">
+          <a:extLst>
+            <a:ext uri="{FF2B5EF4-FFF2-40B4-BE49-F238E27FC236}">
+              <a16:creationId xmlns:a16="http://schemas.microsoft.com/office/drawing/2014/main" id="{AC381B4A-22CC-D638-12E4-611FB6019DEA}"/>
+            </a:ext>
+          </a:extLst>
+        </p:cNvPr>
+        <p:cNvGrpSpPr/>
+        <p:nvPr/>
+      </p:nvGrpSpPr>
+      <p:grpSpPr>
+        <a:xfrm>
+          <a:off x="0" y="0"/>
+          <a:ext cx="0" cy="0"/>
+          <a:chOff x="0" y="0"/>
+          <a:chExt cx="0" cy="0"/>
+        </a:xfrm>
+      </p:grpSpPr>
+      <p:sp>
+        <p:nvSpPr>
+          <p:cNvPr id="6" name="Rectangle: Rounded Corners 5">
+            <a:extLst>
+              <a:ext uri="{FF2B5EF4-FFF2-40B4-BE49-F238E27FC236}">
+                <a16:creationId xmlns:a16="http://schemas.microsoft.com/office/drawing/2014/main" id="{42B5D145-1FE9-E9F2-AE1A-4543877425A8}"/>
+              </a:ext>
+            </a:extLst>
+          </p:cNvPr>
+          <p:cNvSpPr/>
+          <p:nvPr/>
+        </p:nvSpPr>
+        <p:spPr>
+          <a:xfrm>
+            <a:off x="9216256" y="2822585"/>
+            <a:ext cx="1213620" cy="628640"/>
+          </a:xfrm>
+          <a:prstGeom prst="roundRect">
+            <a:avLst/>
+          </a:prstGeom>
+          <a:solidFill>
+            <a:schemeClr val="tx2">
+              <a:lumMod val="25000"/>
+              <a:lumOff val="75000"/>
+            </a:schemeClr>
+          </a:solidFill>
+          <a:ln w="19050">
+            <a:solidFill>
+              <a:schemeClr val="tx2">
+                <a:lumMod val="75000"/>
+                <a:lumOff val="25000"/>
+              </a:schemeClr>
+            </a:solidFill>
+          </a:ln>
+        </p:spPr>
+        <p:style>
+          <a:lnRef idx="2">
+            <a:schemeClr val="accent1">
+              <a:shade val="15000"/>
+            </a:schemeClr>
+          </a:lnRef>
+          <a:fillRef idx="1">
+            <a:schemeClr val="accent1"/>
+          </a:fillRef>
+          <a:effectRef idx="0">
+            <a:schemeClr val="accent1"/>
+          </a:effectRef>
+          <a:fontRef idx="minor">
+            <a:schemeClr val="lt1"/>
+          </a:fontRef>
+        </p:style>
+        <p:txBody>
+          <a:bodyPr rtlCol="0" anchor="ctr"/>
+          <a:lstStyle/>
+          <a:p>
+            <a:pPr algn="ctr"/>
+            <a:r>
+              <a:rPr lang="en-US" sz="1400" b="1" dirty="0">
+                <a:solidFill>
+                  <a:schemeClr val="tx1"/>
+                </a:solidFill>
+                <a:latin typeface="Times New Roman" panose="02020603050405020304" pitchFamily="18" charset="0"/>
+                <a:cs typeface="Times New Roman" panose="02020603050405020304" pitchFamily="18" charset="0"/>
+              </a:rPr>
+              <a:t>C(s)</a:t>
+            </a:r>
+          </a:p>
+          <a:p>
+            <a:pPr algn="ctr"/>
+            <a:r>
+              <a:rPr lang="en-US" sz="1400" b="1" dirty="0">
+                <a:solidFill>
+                  <a:schemeClr val="tx1"/>
+                </a:solidFill>
+                <a:latin typeface="Times New Roman" panose="02020603050405020304" pitchFamily="18" charset="0"/>
+                <a:cs typeface="Times New Roman" panose="02020603050405020304" pitchFamily="18" charset="0"/>
+              </a:rPr>
+              <a:t>Controller</a:t>
+            </a:r>
+          </a:p>
+        </p:txBody>
+      </p:sp>
+      <p:sp>
+        <p:nvSpPr>
+          <p:cNvPr id="10" name="Rectangle: Rounded Corners 9">
+            <a:extLst>
+              <a:ext uri="{FF2B5EF4-FFF2-40B4-BE49-F238E27FC236}">
+                <a16:creationId xmlns:a16="http://schemas.microsoft.com/office/drawing/2014/main" id="{6072E3D3-ED0C-0736-B5AC-A6F8820B15FC}"/>
+              </a:ext>
+            </a:extLst>
+          </p:cNvPr>
+          <p:cNvSpPr/>
+          <p:nvPr/>
+        </p:nvSpPr>
+        <p:spPr>
+          <a:xfrm>
+            <a:off x="11705456" y="2822585"/>
+            <a:ext cx="1213620" cy="628640"/>
+          </a:xfrm>
+          <a:prstGeom prst="roundRect">
+            <a:avLst/>
+          </a:prstGeom>
+          <a:solidFill>
+            <a:schemeClr val="accent6">
+              <a:lumMod val="20000"/>
+              <a:lumOff val="80000"/>
+            </a:schemeClr>
+          </a:solidFill>
+          <a:ln w="19050">
+            <a:solidFill>
+              <a:schemeClr val="accent6">
+                <a:lumMod val="75000"/>
+              </a:schemeClr>
+            </a:solidFill>
+          </a:ln>
+        </p:spPr>
+        <p:style>
+          <a:lnRef idx="2">
+            <a:schemeClr val="accent1">
+              <a:shade val="15000"/>
+            </a:schemeClr>
+          </a:lnRef>
+          <a:fillRef idx="1">
+            <a:schemeClr val="accent1"/>
+          </a:fillRef>
+          <a:effectRef idx="0">
+            <a:schemeClr val="accent1"/>
+          </a:effectRef>
+          <a:fontRef idx="minor">
+            <a:schemeClr val="lt1"/>
+          </a:fontRef>
+        </p:style>
+        <p:txBody>
+          <a:bodyPr rtlCol="0" anchor="ctr"/>
+          <a:lstStyle/>
+          <a:p>
+            <a:pPr algn="ctr"/>
+            <a:r>
+              <a:rPr lang="en-US" sz="1400" b="1" dirty="0">
+                <a:solidFill>
+                  <a:schemeClr val="tx1"/>
+                </a:solidFill>
+                <a:latin typeface="Times New Roman" panose="02020603050405020304" pitchFamily="18" charset="0"/>
+                <a:cs typeface="Times New Roman" panose="02020603050405020304" pitchFamily="18" charset="0"/>
+              </a:rPr>
+              <a:t>G(s)</a:t>
+            </a:r>
+          </a:p>
+          <a:p>
+            <a:pPr algn="ctr"/>
+            <a:r>
+              <a:rPr lang="en-US" sz="1400" b="1" dirty="0">
+                <a:solidFill>
+                  <a:schemeClr val="tx1"/>
+                </a:solidFill>
+                <a:latin typeface="Times New Roman" panose="02020603050405020304" pitchFamily="18" charset="0"/>
+                <a:cs typeface="Times New Roman" panose="02020603050405020304" pitchFamily="18" charset="0"/>
+              </a:rPr>
+              <a:t>Plant</a:t>
+            </a:r>
+          </a:p>
+        </p:txBody>
+      </p:sp>
+      <p:cxnSp>
+        <p:nvCxnSpPr>
+          <p:cNvPr id="18" name="Straight Arrow Connector 17">
+            <a:extLst>
+              <a:ext uri="{FF2B5EF4-FFF2-40B4-BE49-F238E27FC236}">
+                <a16:creationId xmlns:a16="http://schemas.microsoft.com/office/drawing/2014/main" id="{558B3977-A2EC-22EA-8F42-38FB48B958C6}"/>
+              </a:ext>
+            </a:extLst>
+          </p:cNvPr>
+          <p:cNvCxnSpPr>
+            <a:stCxn id="6" idx="3"/>
+            <a:endCxn id="10" idx="1"/>
+          </p:cNvCxnSpPr>
+          <p:nvPr/>
+        </p:nvCxnSpPr>
+        <p:spPr>
+          <a:xfrm>
+            <a:off x="10429876" y="3136905"/>
+            <a:ext cx="1275580" cy="0"/>
+          </a:xfrm>
+          <a:prstGeom prst="straightConnector1">
+            <a:avLst/>
+          </a:prstGeom>
+          <a:ln>
+            <a:solidFill>
+              <a:schemeClr val="tx1"/>
+            </a:solidFill>
+            <a:tailEnd type="triangle" w="med" len="lg"/>
+          </a:ln>
+        </p:spPr>
+        <p:style>
+          <a:lnRef idx="2">
+            <a:schemeClr val="accent1"/>
+          </a:lnRef>
+          <a:fillRef idx="0">
+            <a:schemeClr val="accent1"/>
+          </a:fillRef>
+          <a:effectRef idx="1">
+            <a:schemeClr val="accent1"/>
+          </a:effectRef>
+          <a:fontRef idx="minor">
+            <a:schemeClr val="tx1"/>
+          </a:fontRef>
+        </p:style>
+      </p:cxnSp>
+      <p:sp>
+        <p:nvSpPr>
+          <p:cNvPr id="22" name="Oval 21">
+            <a:extLst>
+              <a:ext uri="{FF2B5EF4-FFF2-40B4-BE49-F238E27FC236}">
+                <a16:creationId xmlns:a16="http://schemas.microsoft.com/office/drawing/2014/main" id="{6D5F0E26-8FB6-F596-6944-2D98343D494B}"/>
+              </a:ext>
+            </a:extLst>
+          </p:cNvPr>
+          <p:cNvSpPr>
+            <a:spLocks noChangeAspect="1"/>
+          </p:cNvSpPr>
+          <p:nvPr/>
+        </p:nvSpPr>
+        <p:spPr>
+          <a:xfrm>
+            <a:off x="7688226" y="3010905"/>
+            <a:ext cx="252450" cy="252000"/>
+          </a:xfrm>
+          <a:prstGeom prst="ellipse">
+            <a:avLst/>
+          </a:prstGeom>
+          <a:solidFill>
+            <a:schemeClr val="bg1"/>
+          </a:solidFill>
+          <a:ln w="19050">
+            <a:solidFill>
+              <a:schemeClr val="tx1"/>
+            </a:solidFill>
+          </a:ln>
+        </p:spPr>
+        <p:style>
+          <a:lnRef idx="2">
+            <a:schemeClr val="accent1">
+              <a:shade val="15000"/>
+            </a:schemeClr>
+          </a:lnRef>
+          <a:fillRef idx="1">
+            <a:schemeClr val="accent1"/>
+          </a:fillRef>
+          <a:effectRef idx="0">
+            <a:schemeClr val="accent1"/>
+          </a:effectRef>
+          <a:fontRef idx="minor">
+            <a:schemeClr val="lt1"/>
+          </a:fontRef>
+        </p:style>
+        <p:txBody>
+          <a:bodyPr rtlCol="0" anchor="ctr"/>
+          <a:lstStyle/>
+          <a:p>
+            <a:pPr algn="ctr"/>
+            <a:endParaRPr lang="en-CA" sz="212"/>
+          </a:p>
+        </p:txBody>
+      </p:sp>
+      <p:sp>
+        <p:nvSpPr>
+          <p:cNvPr id="27" name="TextBox 26">
+            <a:extLst>
+              <a:ext uri="{FF2B5EF4-FFF2-40B4-BE49-F238E27FC236}">
+                <a16:creationId xmlns:a16="http://schemas.microsoft.com/office/drawing/2014/main" id="{358CD540-749E-6CD5-5ED0-EA8142970219}"/>
+              </a:ext>
+            </a:extLst>
+          </p:cNvPr>
+          <p:cNvSpPr txBox="1"/>
+          <p:nvPr/>
+        </p:nvSpPr>
+        <p:spPr>
+          <a:xfrm>
+            <a:off x="7506702" y="2809885"/>
+            <a:ext cx="177024" cy="307777"/>
+          </a:xfrm>
+          <a:prstGeom prst="rect">
+            <a:avLst/>
+          </a:prstGeom>
+          <a:noFill/>
+        </p:spPr>
+        <p:txBody>
+          <a:bodyPr wrap="square" rtlCol="0">
+            <a:spAutoFit/>
+          </a:bodyPr>
+          <a:lstStyle/>
+          <a:p>
+            <a:r>
+              <a:rPr lang="en-US" sz="1400" dirty="0"/>
+              <a:t>+</a:t>
+            </a:r>
+            <a:endParaRPr lang="en-CA" sz="2800" dirty="0"/>
+          </a:p>
+        </p:txBody>
+      </p:sp>
+      <p:sp>
+        <p:nvSpPr>
+          <p:cNvPr id="30" name="TextBox 29">
+            <a:extLst>
+              <a:ext uri="{FF2B5EF4-FFF2-40B4-BE49-F238E27FC236}">
+                <a16:creationId xmlns:a16="http://schemas.microsoft.com/office/drawing/2014/main" id="{1E139E5D-03BA-9E23-91A3-CA93730B89C5}"/>
+              </a:ext>
+            </a:extLst>
+          </p:cNvPr>
+          <p:cNvSpPr txBox="1"/>
+          <p:nvPr/>
+        </p:nvSpPr>
+        <p:spPr>
+          <a:xfrm>
+            <a:off x="7880816" y="3056183"/>
+            <a:ext cx="202299" cy="338554"/>
+          </a:xfrm>
+          <a:prstGeom prst="rect">
+            <a:avLst/>
+          </a:prstGeom>
+          <a:noFill/>
+        </p:spPr>
+        <p:txBody>
+          <a:bodyPr wrap="square" rtlCol="0">
+            <a:spAutoFit/>
+          </a:bodyPr>
+          <a:lstStyle/>
+          <a:p>
+            <a:r>
+              <a:rPr lang="en-US" sz="1600" b="1" dirty="0"/>
+              <a:t>_</a:t>
+            </a:r>
+            <a:endParaRPr lang="en-CA" sz="2000" b="1" dirty="0"/>
+          </a:p>
+        </p:txBody>
+      </p:sp>
+      <p:cxnSp>
+        <p:nvCxnSpPr>
+          <p:cNvPr id="34" name="Straight Arrow Connector 33">
+            <a:extLst>
+              <a:ext uri="{FF2B5EF4-FFF2-40B4-BE49-F238E27FC236}">
+                <a16:creationId xmlns:a16="http://schemas.microsoft.com/office/drawing/2014/main" id="{8B8058BC-F12B-598D-7A06-E2F5B77BDAC9}"/>
+              </a:ext>
+            </a:extLst>
+          </p:cNvPr>
+          <p:cNvCxnSpPr>
+            <a:stCxn id="22" idx="6"/>
+            <a:endCxn id="6" idx="1"/>
+          </p:cNvCxnSpPr>
+          <p:nvPr/>
+        </p:nvCxnSpPr>
+        <p:spPr>
+          <a:xfrm>
+            <a:off x="7940676" y="3136905"/>
+            <a:ext cx="1275580" cy="0"/>
+          </a:xfrm>
+          <a:prstGeom prst="straightConnector1">
+            <a:avLst/>
+          </a:prstGeom>
+          <a:ln>
+            <a:solidFill>
+              <a:schemeClr val="tx1"/>
+            </a:solidFill>
+            <a:tailEnd type="triangle" w="med" len="lg"/>
+          </a:ln>
+        </p:spPr>
+        <p:style>
+          <a:lnRef idx="2">
+            <a:schemeClr val="accent1"/>
+          </a:lnRef>
+          <a:fillRef idx="0">
+            <a:schemeClr val="accent1"/>
+          </a:fillRef>
+          <a:effectRef idx="1">
+            <a:schemeClr val="accent1"/>
+          </a:effectRef>
+          <a:fontRef idx="minor">
+            <a:schemeClr val="tx1"/>
+          </a:fontRef>
+        </p:style>
+      </p:cxnSp>
+      <p:cxnSp>
+        <p:nvCxnSpPr>
+          <p:cNvPr id="36" name="Straight Arrow Connector 35">
+            <a:extLst>
+              <a:ext uri="{FF2B5EF4-FFF2-40B4-BE49-F238E27FC236}">
+                <a16:creationId xmlns:a16="http://schemas.microsoft.com/office/drawing/2014/main" id="{E741EC34-EF81-6EE6-451C-C19DF5B0EAE0}"/>
+              </a:ext>
+            </a:extLst>
+          </p:cNvPr>
+          <p:cNvCxnSpPr>
+            <a:stCxn id="22" idx="2"/>
+          </p:cNvCxnSpPr>
+          <p:nvPr/>
+        </p:nvCxnSpPr>
+        <p:spPr>
+          <a:xfrm flipH="1">
+            <a:off x="7053682" y="3136905"/>
+            <a:ext cx="634544" cy="0"/>
+          </a:xfrm>
+          <a:prstGeom prst="straightConnector1">
+            <a:avLst/>
+          </a:prstGeom>
+          <a:ln>
+            <a:solidFill>
+              <a:schemeClr val="tx1"/>
+            </a:solidFill>
+            <a:headEnd type="triangle" w="med" len="lg"/>
+            <a:tailEnd type="none" w="med" len="lg"/>
+          </a:ln>
+        </p:spPr>
+        <p:style>
+          <a:lnRef idx="2">
+            <a:schemeClr val="accent1"/>
+          </a:lnRef>
+          <a:fillRef idx="0">
+            <a:schemeClr val="accent1"/>
+          </a:fillRef>
+          <a:effectRef idx="1">
+            <a:schemeClr val="accent1"/>
+          </a:effectRef>
+          <a:fontRef idx="minor">
+            <a:schemeClr val="tx1"/>
+          </a:fontRef>
+        </p:style>
+      </p:cxnSp>
+      <p:cxnSp>
+        <p:nvCxnSpPr>
+          <p:cNvPr id="40" name="Connector: Elbow 39">
+            <a:extLst>
+              <a:ext uri="{FF2B5EF4-FFF2-40B4-BE49-F238E27FC236}">
+                <a16:creationId xmlns:a16="http://schemas.microsoft.com/office/drawing/2014/main" id="{27E29354-2576-F047-8CA0-9540D510A364}"/>
+              </a:ext>
+            </a:extLst>
+          </p:cNvPr>
+          <p:cNvCxnSpPr>
+            <a:stCxn id="10" idx="3"/>
+            <a:endCxn id="22" idx="4"/>
+          </p:cNvCxnSpPr>
+          <p:nvPr/>
+        </p:nvCxnSpPr>
+        <p:spPr>
+          <a:xfrm flipH="1">
+            <a:off x="7814451" y="3136905"/>
+            <a:ext cx="5104625" cy="126000"/>
+          </a:xfrm>
+          <a:prstGeom prst="bentConnector4">
+            <a:avLst>
+              <a:gd name="adj1" fmla="val -10636"/>
+              <a:gd name="adj2" fmla="val 559401"/>
+            </a:avLst>
+          </a:prstGeom>
+          <a:ln>
+            <a:solidFill>
+              <a:schemeClr val="tx1"/>
+            </a:solidFill>
+            <a:tailEnd type="triangle" w="med" len="lg"/>
+          </a:ln>
+        </p:spPr>
+        <p:style>
+          <a:lnRef idx="2">
+            <a:schemeClr val="accent1"/>
+          </a:lnRef>
+          <a:fillRef idx="0">
+            <a:schemeClr val="accent1"/>
+          </a:fillRef>
+          <a:effectRef idx="1">
+            <a:schemeClr val="accent1"/>
+          </a:effectRef>
+          <a:fontRef idx="minor">
+            <a:schemeClr val="tx1"/>
+          </a:fontRef>
+        </p:style>
+      </p:cxnSp>
+      <p:cxnSp>
+        <p:nvCxnSpPr>
+          <p:cNvPr id="47" name="Straight Arrow Connector 46">
+            <a:extLst>
+              <a:ext uri="{FF2B5EF4-FFF2-40B4-BE49-F238E27FC236}">
+                <a16:creationId xmlns:a16="http://schemas.microsoft.com/office/drawing/2014/main" id="{97270A09-F56C-C80A-9E87-8BED291E256F}"/>
+              </a:ext>
+            </a:extLst>
+          </p:cNvPr>
+          <p:cNvCxnSpPr>
+            <a:cxnSpLocks/>
+            <a:stCxn id="10" idx="3"/>
+          </p:cNvCxnSpPr>
+          <p:nvPr/>
+        </p:nvCxnSpPr>
+        <p:spPr>
+          <a:xfrm>
+            <a:off x="12919076" y="3136905"/>
+            <a:ext cx="1275580" cy="0"/>
+          </a:xfrm>
+          <a:prstGeom prst="straightConnector1">
+            <a:avLst/>
+          </a:prstGeom>
+          <a:ln>
+            <a:solidFill>
+              <a:schemeClr val="tx1"/>
+            </a:solidFill>
+            <a:tailEnd type="triangle" w="med" len="lg"/>
+          </a:ln>
+        </p:spPr>
+        <p:style>
+          <a:lnRef idx="2">
+            <a:schemeClr val="accent1"/>
+          </a:lnRef>
+          <a:fillRef idx="0">
+            <a:schemeClr val="accent1"/>
+          </a:fillRef>
+          <a:effectRef idx="1">
+            <a:schemeClr val="accent1"/>
+          </a:effectRef>
+          <a:fontRef idx="minor">
+            <a:schemeClr val="tx1"/>
+          </a:fontRef>
+        </p:style>
+      </p:cxnSp>
+      <mc:AlternateContent xmlns:mc="http://schemas.openxmlformats.org/markup-compatibility/2006">
+        <mc:Choice xmlns:a14="http://schemas.microsoft.com/office/drawing/2010/main" Requires="a14">
+          <p:sp>
+            <p:nvSpPr>
+              <p:cNvPr id="2" name="TextBox 1">
+                <a:extLst>
+                  <a:ext uri="{FF2B5EF4-FFF2-40B4-BE49-F238E27FC236}">
+                    <a16:creationId xmlns:a16="http://schemas.microsoft.com/office/drawing/2014/main" id="{7EBCABED-745A-A13A-41F3-186ECD721924}"/>
+                  </a:ext>
+                </a:extLst>
+              </p:cNvPr>
+              <p:cNvSpPr txBox="1"/>
+              <p:nvPr/>
+            </p:nvSpPr>
+            <p:spPr>
+              <a:xfrm>
+                <a:off x="14216766" y="2979162"/>
+                <a:ext cx="469680" cy="276999"/>
+              </a:xfrm>
+              <a:prstGeom prst="rect">
+                <a:avLst/>
+              </a:prstGeom>
+              <a:noFill/>
+            </p:spPr>
+            <p:txBody>
+              <a:bodyPr wrap="none" lIns="0" tIns="0" rIns="0" bIns="0" rtlCol="0">
+                <a:spAutoFit/>
+              </a:bodyPr>
+              <a:lstStyle/>
+              <a:p>
+                <a14:m>
+                  <m:oMathPara xmlns:m="http://schemas.openxmlformats.org/officeDocument/2006/math">
+                    <m:oMath>
+                      <m:r>
+                        <m:rPr>
+                          <m:sty m:val="p"/>
+                        </m:rPr>
+                        <a:rPr lang="en-US" b="0" i="1" smtClean="0">
+                          <a:latin typeface="Cambria Math" panose="02040503050406030204" pitchFamily="18" charset="0"/>
+                        </a:rPr>
+                        <m:t>Y</m:t>
+                      </m:r>
+                      <m:r>
+                        <a:rPr lang="en-US" b="0" i="1" smtClean="0">
+                          <a:latin typeface="Cambria Math" panose="02040503050406030204" pitchFamily="18" charset="0"/>
+                        </a:rPr>
+                        <m:t>(</m:t>
+                      </m:r>
+                      <m:r>
+                        <m:rPr>
+                          <m:sty m:val="p"/>
+                        </m:rPr>
+                        <a:rPr lang="en-US" b="0" i="1" smtClean="0">
+                          <a:latin typeface="Cambria Math" panose="02040503050406030204" pitchFamily="18" charset="0"/>
+                        </a:rPr>
+                        <m:t>s</m:t>
+                      </m:r>
+                      <m:r>
+                        <a:rPr lang="en-US" b="0" i="1" smtClean="0">
+                          <a:latin typeface="Cambria Math" panose="02040503050406030204" pitchFamily="18" charset="0"/>
+                        </a:rPr>
+                        <m:t>)</m:t>
+                      </m:r>
+                    </m:oMath>
+                  </m:oMathPara>
+                </a14:m>
+                <a:endParaRPr lang="en-CA" sz="2000" dirty="0"/>
+              </a:p>
+            </p:txBody>
+          </p:sp>
+        </mc:Choice>
+        <mc:Fallback>
+          <p:sp>
+            <p:nvSpPr>
+              <p:cNvPr id="2" name="TextBox 1">
+                <a:extLst>
+                  <a:ext uri="{FF2B5EF4-FFF2-40B4-BE49-F238E27FC236}">
+                    <a16:creationId xmlns:a16="http://schemas.microsoft.com/office/drawing/2014/main" id="{7EBCABED-745A-A13A-41F3-186ECD721924}"/>
+                  </a:ext>
+                </a:extLst>
+              </p:cNvPr>
+              <p:cNvSpPr txBox="1">
+                <a:spLocks noRot="1" noChangeAspect="1" noMove="1" noResize="1" noEditPoints="1" noAdjustHandles="1" noChangeArrowheads="1" noChangeShapeType="1" noTextEdit="1"/>
+              </p:cNvSpPr>
+              <p:nvPr/>
+            </p:nvSpPr>
+            <p:spPr>
+              <a:xfrm>
+                <a:off x="14216766" y="2979162"/>
+                <a:ext cx="469680" cy="276999"/>
+              </a:xfrm>
+              <a:prstGeom prst="rect">
+                <a:avLst/>
+              </a:prstGeom>
+              <a:blipFill>
+                <a:blip r:embed="rId2"/>
+                <a:stretch>
+                  <a:fillRect l="-11688" t="-4444" r="-19481" b="-35556"/>
+                </a:stretch>
+              </a:blipFill>
+            </p:spPr>
+            <p:txBody>
+              <a:bodyPr/>
+              <a:lstStyle/>
+              <a:p>
+                <a:r>
+                  <a:rPr lang="en-CA">
+                    <a:noFill/>
+                  </a:rPr>
+                  <a:t> </a:t>
+                </a:r>
+              </a:p>
+            </p:txBody>
+          </p:sp>
+        </mc:Fallback>
+      </mc:AlternateContent>
+      <mc:AlternateContent xmlns:mc="http://schemas.openxmlformats.org/markup-compatibility/2006">
+        <mc:Choice xmlns:a14="http://schemas.microsoft.com/office/drawing/2010/main" Requires="a14">
+          <p:sp>
+            <p:nvSpPr>
+              <p:cNvPr id="4" name="TextBox 3">
+                <a:extLst>
+                  <a:ext uri="{FF2B5EF4-FFF2-40B4-BE49-F238E27FC236}">
+                    <a16:creationId xmlns:a16="http://schemas.microsoft.com/office/drawing/2014/main" id="{68333461-EBDE-E24A-EE76-0069E5470A01}"/>
+                  </a:ext>
+                </a:extLst>
+              </p:cNvPr>
+              <p:cNvSpPr txBox="1"/>
+              <p:nvPr/>
+            </p:nvSpPr>
+            <p:spPr>
+              <a:xfrm>
+                <a:off x="6561892" y="2979162"/>
+                <a:ext cx="480901" cy="276999"/>
+              </a:xfrm>
+              <a:prstGeom prst="rect">
+                <a:avLst/>
+              </a:prstGeom>
+              <a:noFill/>
+            </p:spPr>
+            <p:txBody>
+              <a:bodyPr wrap="none" lIns="0" tIns="0" rIns="0" bIns="0" rtlCol="0">
+                <a:spAutoFit/>
+              </a:bodyPr>
+              <a:lstStyle/>
+              <a:p>
+                <a:pPr/>
+                <a14:m>
+                  <m:oMathPara xmlns:m="http://schemas.openxmlformats.org/officeDocument/2006/math">
+                    <m:oMath>
+                      <m:r>
+                        <m:rPr>
+                          <m:sty m:val="p"/>
+                        </m:rPr>
+                        <a:rPr lang="en-US" i="1">
+                          <a:latin typeface="Cambria Math" panose="02040503050406030204" pitchFamily="18" charset="0"/>
+                        </a:rPr>
+                        <m:t>R</m:t>
+                      </m:r>
+                      <m:r>
+                        <a:rPr lang="en-US" b="0" i="1" smtClean="0">
+                          <a:latin typeface="Cambria Math" panose="02040503050406030204" pitchFamily="18" charset="0"/>
+                        </a:rPr>
+                        <m:t>(</m:t>
+                      </m:r>
+                      <m:r>
+                        <m:rPr>
+                          <m:sty m:val="p"/>
+                        </m:rPr>
+                        <a:rPr lang="en-US" b="0" i="1" smtClean="0">
+                          <a:latin typeface="Cambria Math" panose="02040503050406030204" pitchFamily="18" charset="0"/>
+                        </a:rPr>
+                        <m:t>s</m:t>
+                      </m:r>
+                      <m:r>
+                        <a:rPr lang="en-US" b="0" i="1" smtClean="0">
+                          <a:latin typeface="Cambria Math" panose="02040503050406030204" pitchFamily="18" charset="0"/>
+                        </a:rPr>
+                        <m:t>)</m:t>
+                      </m:r>
+                    </m:oMath>
+                  </m:oMathPara>
+                </a14:m>
+                <a:endParaRPr lang="en-CA" sz="2000" dirty="0"/>
+              </a:p>
+            </p:txBody>
+          </p:sp>
+        </mc:Choice>
+        <mc:Fallback>
+          <p:sp>
+            <p:nvSpPr>
+              <p:cNvPr id="4" name="TextBox 3">
+                <a:extLst>
+                  <a:ext uri="{FF2B5EF4-FFF2-40B4-BE49-F238E27FC236}">
+                    <a16:creationId xmlns:a16="http://schemas.microsoft.com/office/drawing/2014/main" id="{68333461-EBDE-E24A-EE76-0069E5470A01}"/>
+                  </a:ext>
+                </a:extLst>
+              </p:cNvPr>
+              <p:cNvSpPr txBox="1">
+                <a:spLocks noRot="1" noChangeAspect="1" noMove="1" noResize="1" noEditPoints="1" noAdjustHandles="1" noChangeArrowheads="1" noChangeShapeType="1" noTextEdit="1"/>
+              </p:cNvSpPr>
+              <p:nvPr/>
+            </p:nvSpPr>
+            <p:spPr>
+              <a:xfrm>
+                <a:off x="6561892" y="2979162"/>
+                <a:ext cx="480901" cy="276999"/>
+              </a:xfrm>
+              <a:prstGeom prst="rect">
+                <a:avLst/>
+              </a:prstGeom>
+              <a:blipFill>
+                <a:blip r:embed="rId3"/>
+                <a:stretch>
+                  <a:fillRect l="-11392" t="-4444" r="-18987" b="-35556"/>
+                </a:stretch>
+              </a:blipFill>
+            </p:spPr>
+            <p:txBody>
+              <a:bodyPr/>
+              <a:lstStyle/>
+              <a:p>
+                <a:r>
+                  <a:rPr lang="en-CA">
+                    <a:noFill/>
+                  </a:rPr>
+                  <a:t> </a:t>
+                </a:r>
+              </a:p>
+            </p:txBody>
+          </p:sp>
+        </mc:Fallback>
+      </mc:AlternateContent>
+    </p:spTree>
+    <p:extLst>
+      <p:ext uri="{BB962C8B-B14F-4D97-AF65-F5344CB8AC3E}">
+        <p14:creationId xmlns:p14="http://schemas.microsoft.com/office/powerpoint/2010/main" val="2295387406"/>
+      </p:ext>
+    </p:extLst>
+  </p:cSld>
+  <p:clrMapOvr>
+    <a:masterClrMapping/>
+  </p:clrMapOvr>
+</p:sld>
+</file>
+
+<file path=ppt/slides/slide6.xml><?xml version="1.0" encoding="utf-8"?>
 <p:sld xmlns:a="http://schemas.openxmlformats.org/drawingml/2006/main" xmlns:r="http://schemas.openxmlformats.org/officeDocument/2006/relationships" xmlns:p="http://schemas.openxmlformats.org/presentationml/2006/main">
   <p:cSld>
     <p:bg>

--- a/field_oriented_control.pptx
+++ b/field_oriented_control.pptx
@@ -5,7 +5,7 @@
     <p:sldMasterId id="2147483732" r:id="rId1"/>
   </p:sldMasterIdLst>
   <p:notesMasterIdLst>
-    <p:notesMasterId r:id="rId8"/>
+    <p:notesMasterId r:id="rId7"/>
   </p:notesMasterIdLst>
   <p:sldIdLst>
     <p:sldId id="256" r:id="rId2"/>
@@ -13,7 +13,6 @@
     <p:sldId id="260" r:id="rId4"/>
     <p:sldId id="261" r:id="rId5"/>
     <p:sldId id="262" r:id="rId6"/>
-    <p:sldId id="258" r:id="rId7"/>
   </p:sldIdLst>
   <p:sldSz cx="21599525" cy="7164388"/>
   <p:notesSz cx="6858000" cy="9144000"/>
@@ -123,7 +122,7 @@
 <file path=ppt/revisionInfo.xml><?xml version="1.0" encoding="utf-8"?>
 <p1510:revInfo xmlns:a="http://schemas.openxmlformats.org/drawingml/2006/main" xmlns:r="http://schemas.openxmlformats.org/officeDocument/2006/relationships" xmlns:p1510="http://schemas.microsoft.com/office/powerpoint/2015/10/main">
   <p1510:revLst>
-    <p1510:client id="{E23C0E3B-1BCF-43A5-9BFC-28A61010C6A7}" v="13" dt="2026-10-08T21:43:59.166"/>
+    <p1510:client id="{E8A092E5-7A12-4007-A101-A3D51A562A89}" v="24" dt="2026-10-29T21:53:43.998"/>
   </p1510:revLst>
 </p1510:revInfo>
 </file>
@@ -133,1878 +132,88 @@
   <pc:docChgLst>
     <pc:chgData name="Jonah St. Hilaire" userId="9d0a7af2-d0bd-4748-b50b-5cc37e0fdaa3" providerId="ADAL" clId="{58AAB240-BB3C-43BA-87E9-80C5D70C8BCC}"/>
     <pc:docChg chg="undo redo custSel addSld delSld modSld sldOrd modMainMaster delSection modSection">
-      <pc:chgData name="Jonah St. Hilaire" userId="9d0a7af2-d0bd-4748-b50b-5cc37e0fdaa3" providerId="ADAL" clId="{58AAB240-BB3C-43BA-87E9-80C5D70C8BCC}" dt="2026-10-08T21:43:59.166" v="5276" actId="20577"/>
+      <pc:chgData name="Jonah St. Hilaire" userId="9d0a7af2-d0bd-4748-b50b-5cc37e0fdaa3" providerId="ADAL" clId="{58AAB240-BB3C-43BA-87E9-80C5D70C8BCC}" dt="2026-10-29T21:53:56.408" v="5528" actId="2696"/>
       <pc:docMkLst>
         <pc:docMk/>
       </pc:docMkLst>
-      <pc:sldChg chg="delSp modSp mod">
-        <pc:chgData name="Jonah St. Hilaire" userId="9d0a7af2-d0bd-4748-b50b-5cc37e0fdaa3" providerId="ADAL" clId="{58AAB240-BB3C-43BA-87E9-80C5D70C8BCC}" dt="2026-09-11T19:45:11.002" v="4479" actId="404"/>
-        <pc:sldMkLst>
-          <pc:docMk/>
-          <pc:sldMk cId="2146513051" sldId="256"/>
-        </pc:sldMkLst>
-        <pc:spChg chg="mod">
-          <ac:chgData name="Jonah St. Hilaire" userId="9d0a7af2-d0bd-4748-b50b-5cc37e0fdaa3" providerId="ADAL" clId="{58AAB240-BB3C-43BA-87E9-80C5D70C8BCC}" dt="2026-09-11T19:41:25.176" v="4370" actId="1036"/>
-          <ac:spMkLst>
-            <pc:docMk/>
-            <pc:sldMk cId="2146513051" sldId="256"/>
-            <ac:spMk id="6" creationId="{B83EDB41-36AA-14EA-AE93-71897304EEC6}"/>
-          </ac:spMkLst>
-        </pc:spChg>
-        <pc:spChg chg="mod">
-          <ac:chgData name="Jonah St. Hilaire" userId="9d0a7af2-d0bd-4748-b50b-5cc37e0fdaa3" providerId="ADAL" clId="{58AAB240-BB3C-43BA-87E9-80C5D70C8BCC}" dt="2026-09-11T19:43:41.259" v="4438" actId="1035"/>
-          <ac:spMkLst>
-            <pc:docMk/>
-            <pc:sldMk cId="2146513051" sldId="256"/>
-            <ac:spMk id="8" creationId="{6E38D3CA-4F2B-074C-CC8C-BB29FA3284E9}"/>
-          </ac:spMkLst>
-        </pc:spChg>
-        <pc:spChg chg="mod">
-          <ac:chgData name="Jonah St. Hilaire" userId="9d0a7af2-d0bd-4748-b50b-5cc37e0fdaa3" providerId="ADAL" clId="{58AAB240-BB3C-43BA-87E9-80C5D70C8BCC}" dt="2026-09-11T16:19:46.133" v="1832"/>
-          <ac:spMkLst>
-            <pc:docMk/>
-            <pc:sldMk cId="2146513051" sldId="256"/>
-            <ac:spMk id="11" creationId="{E75A34E2-2C5D-92F5-EB46-6D97F26963E5}"/>
-          </ac:spMkLst>
-        </pc:spChg>
-        <pc:spChg chg="mod">
-          <ac:chgData name="Jonah St. Hilaire" userId="9d0a7af2-d0bd-4748-b50b-5cc37e0fdaa3" providerId="ADAL" clId="{58AAB240-BB3C-43BA-87E9-80C5D70C8BCC}" dt="2026-09-11T19:41:25.176" v="4370" actId="1036"/>
-          <ac:spMkLst>
-            <pc:docMk/>
-            <pc:sldMk cId="2146513051" sldId="256"/>
-            <ac:spMk id="16" creationId="{9B572E79-4EE9-46D1-02D8-685722E7F280}"/>
-          </ac:spMkLst>
-        </pc:spChg>
-        <pc:spChg chg="mod">
-          <ac:chgData name="Jonah St. Hilaire" userId="9d0a7af2-d0bd-4748-b50b-5cc37e0fdaa3" providerId="ADAL" clId="{58AAB240-BB3C-43BA-87E9-80C5D70C8BCC}" dt="2026-09-11T19:44:49.436" v="4464" actId="403"/>
-          <ac:spMkLst>
-            <pc:docMk/>
-            <pc:sldMk cId="2146513051" sldId="256"/>
-            <ac:spMk id="30" creationId="{A72100E7-3E80-050D-C9FF-C2D32132132B}"/>
-          </ac:spMkLst>
-        </pc:spChg>
-        <pc:spChg chg="mod">
-          <ac:chgData name="Jonah St. Hilaire" userId="9d0a7af2-d0bd-4748-b50b-5cc37e0fdaa3" providerId="ADAL" clId="{58AAB240-BB3C-43BA-87E9-80C5D70C8BCC}" dt="2026-09-11T19:44:49.436" v="4464" actId="403"/>
-          <ac:spMkLst>
-            <pc:docMk/>
-            <pc:sldMk cId="2146513051" sldId="256"/>
-            <ac:spMk id="31" creationId="{D5059A89-8575-966A-D743-49D2A33FBE39}"/>
-          </ac:spMkLst>
-        </pc:spChg>
-        <pc:spChg chg="mod">
-          <ac:chgData name="Jonah St. Hilaire" userId="9d0a7af2-d0bd-4748-b50b-5cc37e0fdaa3" providerId="ADAL" clId="{58AAB240-BB3C-43BA-87E9-80C5D70C8BCC}" dt="2026-09-11T19:44:49.436" v="4464" actId="403"/>
-          <ac:spMkLst>
-            <pc:docMk/>
-            <pc:sldMk cId="2146513051" sldId="256"/>
-            <ac:spMk id="32" creationId="{1386C0DC-BE5D-E1A6-8CF5-6234E8BE8454}"/>
-          </ac:spMkLst>
-        </pc:spChg>
-        <pc:spChg chg="mod">
-          <ac:chgData name="Jonah St. Hilaire" userId="9d0a7af2-d0bd-4748-b50b-5cc37e0fdaa3" providerId="ADAL" clId="{58AAB240-BB3C-43BA-87E9-80C5D70C8BCC}" dt="2026-09-11T19:44:07.728" v="4444" actId="1076"/>
-          <ac:spMkLst>
-            <pc:docMk/>
-            <pc:sldMk cId="2146513051" sldId="256"/>
-            <ac:spMk id="33" creationId="{0AB35D2B-BAB3-643A-FB75-CB06F3316D76}"/>
-          </ac:spMkLst>
-        </pc:spChg>
-        <pc:spChg chg="mod">
-          <ac:chgData name="Jonah St. Hilaire" userId="9d0a7af2-d0bd-4748-b50b-5cc37e0fdaa3" providerId="ADAL" clId="{58AAB240-BB3C-43BA-87E9-80C5D70C8BCC}" dt="2026-09-11T19:44:00.363" v="4443" actId="403"/>
-          <ac:spMkLst>
-            <pc:docMk/>
-            <pc:sldMk cId="2146513051" sldId="256"/>
-            <ac:spMk id="34" creationId="{9DF4FAE0-F0D6-F5CE-BDBE-5B08162D619F}"/>
-          </ac:spMkLst>
-        </pc:spChg>
-        <pc:spChg chg="mod">
-          <ac:chgData name="Jonah St. Hilaire" userId="9d0a7af2-d0bd-4748-b50b-5cc37e0fdaa3" providerId="ADAL" clId="{58AAB240-BB3C-43BA-87E9-80C5D70C8BCC}" dt="2026-09-11T19:43:37.629" v="4437" actId="1036"/>
-          <ac:spMkLst>
-            <pc:docMk/>
-            <pc:sldMk cId="2146513051" sldId="256"/>
-            <ac:spMk id="37" creationId="{40FFD7F4-7962-FD3B-3777-3CEC889EBCED}"/>
-          </ac:spMkLst>
-        </pc:spChg>
-        <pc:spChg chg="mod">
-          <ac:chgData name="Jonah St. Hilaire" userId="9d0a7af2-d0bd-4748-b50b-5cc37e0fdaa3" providerId="ADAL" clId="{58AAB240-BB3C-43BA-87E9-80C5D70C8BCC}" dt="2026-09-11T19:41:13.241" v="4359" actId="1036"/>
-          <ac:spMkLst>
-            <pc:docMk/>
-            <pc:sldMk cId="2146513051" sldId="256"/>
-            <ac:spMk id="42" creationId="{BAF246EB-88C1-DA45-89CD-0D8EC954B750}"/>
-          </ac:spMkLst>
-        </pc:spChg>
-        <pc:spChg chg="mod">
-          <ac:chgData name="Jonah St. Hilaire" userId="9d0a7af2-d0bd-4748-b50b-5cc37e0fdaa3" providerId="ADAL" clId="{58AAB240-BB3C-43BA-87E9-80C5D70C8BCC}" dt="2026-09-11T19:41:13.241" v="4359" actId="1036"/>
-          <ac:spMkLst>
-            <pc:docMk/>
-            <pc:sldMk cId="2146513051" sldId="256"/>
-            <ac:spMk id="44" creationId="{89D8ECB8-4C37-9939-224C-2F916D7D4415}"/>
-          </ac:spMkLst>
-        </pc:spChg>
-        <pc:spChg chg="mod">
-          <ac:chgData name="Jonah St. Hilaire" userId="9d0a7af2-d0bd-4748-b50b-5cc37e0fdaa3" providerId="ADAL" clId="{58AAB240-BB3C-43BA-87E9-80C5D70C8BCC}" dt="2026-09-11T19:41:13.241" v="4359" actId="1036"/>
-          <ac:spMkLst>
-            <pc:docMk/>
-            <pc:sldMk cId="2146513051" sldId="256"/>
-            <ac:spMk id="45" creationId="{63951CB6-8BB1-BF54-DCB9-AA31533CB284}"/>
-          </ac:spMkLst>
-        </pc:spChg>
-        <pc:spChg chg="mod">
-          <ac:chgData name="Jonah St. Hilaire" userId="9d0a7af2-d0bd-4748-b50b-5cc37e0fdaa3" providerId="ADAL" clId="{58AAB240-BB3C-43BA-87E9-80C5D70C8BCC}" dt="2026-09-11T19:41:13.241" v="4359" actId="1036"/>
-          <ac:spMkLst>
-            <pc:docMk/>
-            <pc:sldMk cId="2146513051" sldId="256"/>
-            <ac:spMk id="57" creationId="{1240F4F8-6E42-2EBC-F80B-32DF0FDB52AC}"/>
-          </ac:spMkLst>
-        </pc:spChg>
-        <pc:spChg chg="mod">
-          <ac:chgData name="Jonah St. Hilaire" userId="9d0a7af2-d0bd-4748-b50b-5cc37e0fdaa3" providerId="ADAL" clId="{58AAB240-BB3C-43BA-87E9-80C5D70C8BCC}" dt="2026-09-11T19:41:13.241" v="4359" actId="1036"/>
-          <ac:spMkLst>
-            <pc:docMk/>
-            <pc:sldMk cId="2146513051" sldId="256"/>
-            <ac:spMk id="58" creationId="{496795BA-2CBB-90A3-814B-79719B9BBC37}"/>
-          </ac:spMkLst>
-        </pc:spChg>
-        <pc:spChg chg="mod">
-          <ac:chgData name="Jonah St. Hilaire" userId="9d0a7af2-d0bd-4748-b50b-5cc37e0fdaa3" providerId="ADAL" clId="{58AAB240-BB3C-43BA-87E9-80C5D70C8BCC}" dt="2026-09-11T19:41:13.241" v="4359" actId="1036"/>
-          <ac:spMkLst>
-            <pc:docMk/>
-            <pc:sldMk cId="2146513051" sldId="256"/>
-            <ac:spMk id="60" creationId="{C8E0730E-08D7-48F1-0203-8F99765B6B47}"/>
-          </ac:spMkLst>
-        </pc:spChg>
-        <pc:spChg chg="mod">
-          <ac:chgData name="Jonah St. Hilaire" userId="9d0a7af2-d0bd-4748-b50b-5cc37e0fdaa3" providerId="ADAL" clId="{58AAB240-BB3C-43BA-87E9-80C5D70C8BCC}" dt="2026-09-11T19:44:33.744" v="4457" actId="403"/>
-          <ac:spMkLst>
-            <pc:docMk/>
-            <pc:sldMk cId="2146513051" sldId="256"/>
-            <ac:spMk id="63" creationId="{8AEF28B0-0666-13F1-943C-75DC7EDA0DC8}"/>
-          </ac:spMkLst>
-        </pc:spChg>
-        <pc:spChg chg="mod">
-          <ac:chgData name="Jonah St. Hilaire" userId="9d0a7af2-d0bd-4748-b50b-5cc37e0fdaa3" providerId="ADAL" clId="{58AAB240-BB3C-43BA-87E9-80C5D70C8BCC}" dt="2026-09-11T19:45:11.002" v="4479" actId="404"/>
-          <ac:spMkLst>
-            <pc:docMk/>
-            <pc:sldMk cId="2146513051" sldId="256"/>
-            <ac:spMk id="64" creationId="{5AE4D647-12E4-63B8-8E23-4C628E3450ED}"/>
-          </ac:spMkLst>
-        </pc:spChg>
-        <pc:spChg chg="mod">
-          <ac:chgData name="Jonah St. Hilaire" userId="9d0a7af2-d0bd-4748-b50b-5cc37e0fdaa3" providerId="ADAL" clId="{58AAB240-BB3C-43BA-87E9-80C5D70C8BCC}" dt="2026-09-11T19:44:33.744" v="4457" actId="403"/>
-          <ac:spMkLst>
-            <pc:docMk/>
-            <pc:sldMk cId="2146513051" sldId="256"/>
-            <ac:spMk id="65" creationId="{0181757A-D4A9-1234-7B46-33105EC09528}"/>
-          </ac:spMkLst>
-        </pc:spChg>
-        <pc:spChg chg="mod">
-          <ac:chgData name="Jonah St. Hilaire" userId="9d0a7af2-d0bd-4748-b50b-5cc37e0fdaa3" providerId="ADAL" clId="{58AAB240-BB3C-43BA-87E9-80C5D70C8BCC}" dt="2026-09-11T19:44:16.802" v="4448" actId="403"/>
-          <ac:spMkLst>
-            <pc:docMk/>
-            <pc:sldMk cId="2146513051" sldId="256"/>
-            <ac:spMk id="77" creationId="{4F10A811-C916-C1B7-8F86-E8C58CA42954}"/>
-          </ac:spMkLst>
-        </pc:spChg>
-        <pc:spChg chg="mod">
-          <ac:chgData name="Jonah St. Hilaire" userId="9d0a7af2-d0bd-4748-b50b-5cc37e0fdaa3" providerId="ADAL" clId="{58AAB240-BB3C-43BA-87E9-80C5D70C8BCC}" dt="2026-09-11T19:44:21.335" v="4451" actId="403"/>
-          <ac:spMkLst>
-            <pc:docMk/>
-            <pc:sldMk cId="2146513051" sldId="256"/>
-            <ac:spMk id="78" creationId="{BFD102BA-6CE4-F21A-FDEB-6F498DFB0B40}"/>
-          </ac:spMkLst>
-        </pc:spChg>
-        <pc:spChg chg="mod">
-          <ac:chgData name="Jonah St. Hilaire" userId="9d0a7af2-d0bd-4748-b50b-5cc37e0fdaa3" providerId="ADAL" clId="{58AAB240-BB3C-43BA-87E9-80C5D70C8BCC}" dt="2026-09-11T19:41:38.108" v="4383" actId="1036"/>
-          <ac:spMkLst>
-            <pc:docMk/>
-            <pc:sldMk cId="2146513051" sldId="256"/>
-            <ac:spMk id="88" creationId="{6C4FB42C-ED7B-A13E-6818-91AF4EC4425E}"/>
-          </ac:spMkLst>
-        </pc:spChg>
-        <pc:spChg chg="mod">
-          <ac:chgData name="Jonah St. Hilaire" userId="9d0a7af2-d0bd-4748-b50b-5cc37e0fdaa3" providerId="ADAL" clId="{58AAB240-BB3C-43BA-87E9-80C5D70C8BCC}" dt="2026-09-11T19:41:38.108" v="4383" actId="1036"/>
-          <ac:spMkLst>
-            <pc:docMk/>
-            <pc:sldMk cId="2146513051" sldId="256"/>
-            <ac:spMk id="89" creationId="{AA558997-D675-E1D5-6F4F-AB03FA3A08CA}"/>
-          </ac:spMkLst>
-        </pc:spChg>
-        <pc:spChg chg="mod">
-          <ac:chgData name="Jonah St. Hilaire" userId="9d0a7af2-d0bd-4748-b50b-5cc37e0fdaa3" providerId="ADAL" clId="{58AAB240-BB3C-43BA-87E9-80C5D70C8BCC}" dt="2026-09-11T19:41:38.108" v="4383" actId="1036"/>
-          <ac:spMkLst>
-            <pc:docMk/>
-            <pc:sldMk cId="2146513051" sldId="256"/>
-            <ac:spMk id="92" creationId="{82ED4FA1-EBBA-1351-16FD-DB796BC45792}"/>
-          </ac:spMkLst>
-        </pc:spChg>
-        <pc:spChg chg="mod">
-          <ac:chgData name="Jonah St. Hilaire" userId="9d0a7af2-d0bd-4748-b50b-5cc37e0fdaa3" providerId="ADAL" clId="{58AAB240-BB3C-43BA-87E9-80C5D70C8BCC}" dt="2026-09-11T19:41:38.108" v="4383" actId="1036"/>
-          <ac:spMkLst>
-            <pc:docMk/>
-            <pc:sldMk cId="2146513051" sldId="256"/>
-            <ac:spMk id="93" creationId="{32B456B9-5CA5-79AD-5C57-40CD2DC13639}"/>
-          </ac:spMkLst>
-        </pc:spChg>
-        <pc:spChg chg="mod">
-          <ac:chgData name="Jonah St. Hilaire" userId="9d0a7af2-d0bd-4748-b50b-5cc37e0fdaa3" providerId="ADAL" clId="{58AAB240-BB3C-43BA-87E9-80C5D70C8BCC}" dt="2026-09-11T19:42:58.551" v="4425" actId="403"/>
-          <ac:spMkLst>
-            <pc:docMk/>
-            <pc:sldMk cId="2146513051" sldId="256"/>
-            <ac:spMk id="96" creationId="{BE276FAD-A782-E56D-7AC5-CCA5233A7EAC}"/>
-          </ac:spMkLst>
-        </pc:spChg>
-        <pc:spChg chg="mod">
-          <ac:chgData name="Jonah St. Hilaire" userId="9d0a7af2-d0bd-4748-b50b-5cc37e0fdaa3" providerId="ADAL" clId="{58AAB240-BB3C-43BA-87E9-80C5D70C8BCC}" dt="2026-09-11T19:42:58.551" v="4425" actId="403"/>
-          <ac:spMkLst>
-            <pc:docMk/>
-            <pc:sldMk cId="2146513051" sldId="256"/>
-            <ac:spMk id="97" creationId="{EBE19CC2-2D1C-9846-8F7F-ABD6FEE7D5BF}"/>
-          </ac:spMkLst>
-        </pc:spChg>
-        <pc:spChg chg="mod">
-          <ac:chgData name="Jonah St. Hilaire" userId="9d0a7af2-d0bd-4748-b50b-5cc37e0fdaa3" providerId="ADAL" clId="{58AAB240-BB3C-43BA-87E9-80C5D70C8BCC}" dt="2026-09-11T19:41:38.108" v="4383" actId="1036"/>
-          <ac:spMkLst>
-            <pc:docMk/>
-            <pc:sldMk cId="2146513051" sldId="256"/>
-            <ac:spMk id="98" creationId="{D337B50A-BDB0-ED78-78EE-47FEF43C996C}"/>
-          </ac:spMkLst>
-        </pc:spChg>
-        <pc:spChg chg="mod">
-          <ac:chgData name="Jonah St. Hilaire" userId="9d0a7af2-d0bd-4748-b50b-5cc37e0fdaa3" providerId="ADAL" clId="{58AAB240-BB3C-43BA-87E9-80C5D70C8BCC}" dt="2026-09-11T19:41:38.108" v="4383" actId="1036"/>
-          <ac:spMkLst>
-            <pc:docMk/>
-            <pc:sldMk cId="2146513051" sldId="256"/>
-            <ac:spMk id="99" creationId="{6D2CEEDC-95B7-6274-5D38-8F7647E5AD1E}"/>
-          </ac:spMkLst>
-        </pc:spChg>
-        <pc:spChg chg="mod">
-          <ac:chgData name="Jonah St. Hilaire" userId="9d0a7af2-d0bd-4748-b50b-5cc37e0fdaa3" providerId="ADAL" clId="{58AAB240-BB3C-43BA-87E9-80C5D70C8BCC}" dt="2026-09-11T19:40:53.194" v="4332" actId="255"/>
-          <ac:spMkLst>
-            <pc:docMk/>
-            <pc:sldMk cId="2146513051" sldId="256"/>
-            <ac:spMk id="107" creationId="{00862D5D-89D9-1C8F-51C5-27E340933F1E}"/>
-          </ac:spMkLst>
-        </pc:spChg>
-        <pc:spChg chg="mod">
-          <ac:chgData name="Jonah St. Hilaire" userId="9d0a7af2-d0bd-4748-b50b-5cc37e0fdaa3" providerId="ADAL" clId="{58AAB240-BB3C-43BA-87E9-80C5D70C8BCC}" dt="2026-09-11T19:41:38.108" v="4383" actId="1036"/>
-          <ac:spMkLst>
-            <pc:docMk/>
-            <pc:sldMk cId="2146513051" sldId="256"/>
-            <ac:spMk id="109" creationId="{65AC5ADB-737D-61AB-BF25-3C829FC73927}"/>
-          </ac:spMkLst>
-        </pc:spChg>
-        <pc:spChg chg="mod">
-          <ac:chgData name="Jonah St. Hilaire" userId="9d0a7af2-d0bd-4748-b50b-5cc37e0fdaa3" providerId="ADAL" clId="{58AAB240-BB3C-43BA-87E9-80C5D70C8BCC}" dt="2026-09-11T19:41:38.108" v="4383" actId="1036"/>
-          <ac:spMkLst>
-            <pc:docMk/>
-            <pc:sldMk cId="2146513051" sldId="256"/>
-            <ac:spMk id="110" creationId="{26D58B9F-42F1-9BCC-941A-095CED9C9845}"/>
-          </ac:spMkLst>
-        </pc:spChg>
-        <pc:spChg chg="mod">
-          <ac:chgData name="Jonah St. Hilaire" userId="9d0a7af2-d0bd-4748-b50b-5cc37e0fdaa3" providerId="ADAL" clId="{58AAB240-BB3C-43BA-87E9-80C5D70C8BCC}" dt="2026-09-11T19:41:05.336" v="4347" actId="1036"/>
-          <ac:spMkLst>
-            <pc:docMk/>
-            <pc:sldMk cId="2146513051" sldId="256"/>
-            <ac:spMk id="111" creationId="{FF65FBFA-5F4E-EA35-2195-0A9259F29D6B}"/>
-          </ac:spMkLst>
-        </pc:spChg>
-        <pc:spChg chg="mod">
-          <ac:chgData name="Jonah St. Hilaire" userId="9d0a7af2-d0bd-4748-b50b-5cc37e0fdaa3" providerId="ADAL" clId="{58AAB240-BB3C-43BA-87E9-80C5D70C8BCC}" dt="2026-09-11T19:41:05.336" v="4347" actId="1036"/>
-          <ac:spMkLst>
-            <pc:docMk/>
-            <pc:sldMk cId="2146513051" sldId="256"/>
-            <ac:spMk id="112" creationId="{9D9F370F-0942-DB9B-9C6B-19C196337AA7}"/>
-          </ac:spMkLst>
-        </pc:spChg>
-        <pc:spChg chg="mod">
-          <ac:chgData name="Jonah St. Hilaire" userId="9d0a7af2-d0bd-4748-b50b-5cc37e0fdaa3" providerId="ADAL" clId="{58AAB240-BB3C-43BA-87E9-80C5D70C8BCC}" dt="2026-09-11T19:41:05.336" v="4347" actId="1036"/>
-          <ac:spMkLst>
-            <pc:docMk/>
-            <pc:sldMk cId="2146513051" sldId="256"/>
-            <ac:spMk id="130" creationId="{B8BA0527-89F1-F54F-E384-DED6E70E3520}"/>
-          </ac:spMkLst>
-        </pc:spChg>
-        <pc:spChg chg="mod">
-          <ac:chgData name="Jonah St. Hilaire" userId="9d0a7af2-d0bd-4748-b50b-5cc37e0fdaa3" providerId="ADAL" clId="{58AAB240-BB3C-43BA-87E9-80C5D70C8BCC}" dt="2026-09-11T19:40:53.194" v="4332" actId="255"/>
-          <ac:spMkLst>
-            <pc:docMk/>
-            <pc:sldMk cId="2146513051" sldId="256"/>
-            <ac:spMk id="131" creationId="{183448E2-2BD4-2408-065C-797FAA4FB890}"/>
-          </ac:spMkLst>
-        </pc:spChg>
-        <pc:spChg chg="mod">
-          <ac:chgData name="Jonah St. Hilaire" userId="9d0a7af2-d0bd-4748-b50b-5cc37e0fdaa3" providerId="ADAL" clId="{58AAB240-BB3C-43BA-87E9-80C5D70C8BCC}" dt="2026-09-11T19:40:53.194" v="4332" actId="255"/>
-          <ac:spMkLst>
-            <pc:docMk/>
-            <pc:sldMk cId="2146513051" sldId="256"/>
-            <ac:spMk id="132" creationId="{40D9F3A1-B3C0-4780-53EE-BF3A49715499}"/>
-          </ac:spMkLst>
-        </pc:spChg>
-        <pc:spChg chg="mod">
-          <ac:chgData name="Jonah St. Hilaire" userId="9d0a7af2-d0bd-4748-b50b-5cc37e0fdaa3" providerId="ADAL" clId="{58AAB240-BB3C-43BA-87E9-80C5D70C8BCC}" dt="2026-09-11T19:40:45.958" v="4331" actId="1035"/>
-          <ac:spMkLst>
-            <pc:docMk/>
-            <pc:sldMk cId="2146513051" sldId="256"/>
-            <ac:spMk id="167" creationId="{7A91C365-E272-A7A8-72F8-0C6EAA6571A6}"/>
-          </ac:spMkLst>
-        </pc:spChg>
-        <pc:spChg chg="mod">
-          <ac:chgData name="Jonah St. Hilaire" userId="9d0a7af2-d0bd-4748-b50b-5cc37e0fdaa3" providerId="ADAL" clId="{58AAB240-BB3C-43BA-87E9-80C5D70C8BCC}" dt="2026-09-11T19:40:45.958" v="4331" actId="1035"/>
-          <ac:spMkLst>
-            <pc:docMk/>
-            <pc:sldMk cId="2146513051" sldId="256"/>
-            <ac:spMk id="168" creationId="{541F7C72-DA74-88C7-E851-CA76BF702FA0}"/>
-          </ac:spMkLst>
-        </pc:spChg>
-        <pc:spChg chg="mod">
-          <ac:chgData name="Jonah St. Hilaire" userId="9d0a7af2-d0bd-4748-b50b-5cc37e0fdaa3" providerId="ADAL" clId="{58AAB240-BB3C-43BA-87E9-80C5D70C8BCC}" dt="2026-09-11T19:40:45.958" v="4331" actId="1035"/>
-          <ac:spMkLst>
-            <pc:docMk/>
-            <pc:sldMk cId="2146513051" sldId="256"/>
-            <ac:spMk id="169" creationId="{D51DF3CF-A247-D9DE-D13D-8511D88FC1BE}"/>
-          </ac:spMkLst>
-        </pc:spChg>
-        <pc:spChg chg="mod">
-          <ac:chgData name="Jonah St. Hilaire" userId="9d0a7af2-d0bd-4748-b50b-5cc37e0fdaa3" providerId="ADAL" clId="{58AAB240-BB3C-43BA-87E9-80C5D70C8BCC}" dt="2026-09-11T16:19:46.133" v="1832"/>
-          <ac:spMkLst>
-            <pc:docMk/>
-            <pc:sldMk cId="2146513051" sldId="256"/>
-            <ac:spMk id="171" creationId="{86900D28-1155-6956-45F5-C1E9A1E20329}"/>
-          </ac:spMkLst>
-        </pc:spChg>
-        <pc:spChg chg="mod">
-          <ac:chgData name="Jonah St. Hilaire" userId="9d0a7af2-d0bd-4748-b50b-5cc37e0fdaa3" providerId="ADAL" clId="{58AAB240-BB3C-43BA-87E9-80C5D70C8BCC}" dt="2026-09-11T19:40:29.945" v="4319" actId="1035"/>
-          <ac:spMkLst>
-            <pc:docMk/>
-            <pc:sldMk cId="2146513051" sldId="256"/>
-            <ac:spMk id="181" creationId="{4FEC0430-BCB2-ED36-4F61-E48D7CC409B0}"/>
-          </ac:spMkLst>
-        </pc:spChg>
-        <pc:spChg chg="mod">
-          <ac:chgData name="Jonah St. Hilaire" userId="9d0a7af2-d0bd-4748-b50b-5cc37e0fdaa3" providerId="ADAL" clId="{58AAB240-BB3C-43BA-87E9-80C5D70C8BCC}" dt="2026-09-11T19:40:29.945" v="4319" actId="1035"/>
-          <ac:spMkLst>
-            <pc:docMk/>
-            <pc:sldMk cId="2146513051" sldId="256"/>
-            <ac:spMk id="182" creationId="{0BA7A267-02AE-ED5A-4357-FA9586BADF60}"/>
-          </ac:spMkLst>
-        </pc:spChg>
-        <pc:spChg chg="mod">
-          <ac:chgData name="Jonah St. Hilaire" userId="9d0a7af2-d0bd-4748-b50b-5cc37e0fdaa3" providerId="ADAL" clId="{58AAB240-BB3C-43BA-87E9-80C5D70C8BCC}" dt="2026-09-11T19:40:29.945" v="4319" actId="1035"/>
-          <ac:spMkLst>
-            <pc:docMk/>
-            <pc:sldMk cId="2146513051" sldId="256"/>
-            <ac:spMk id="183" creationId="{831252E2-6EC7-3469-378C-4D412F621E58}"/>
-          </ac:spMkLst>
-        </pc:spChg>
-        <pc:spChg chg="mod">
-          <ac:chgData name="Jonah St. Hilaire" userId="9d0a7af2-d0bd-4748-b50b-5cc37e0fdaa3" providerId="ADAL" clId="{58AAB240-BB3C-43BA-87E9-80C5D70C8BCC}" dt="2026-09-11T19:40:22.631" v="4300" actId="403"/>
-          <ac:spMkLst>
-            <pc:docMk/>
-            <pc:sldMk cId="2146513051" sldId="256"/>
-            <ac:spMk id="197" creationId="{C61CF715-E018-A8D6-DC80-2AC5A853FF67}"/>
-          </ac:spMkLst>
-        </pc:spChg>
-        <pc:spChg chg="mod">
-          <ac:chgData name="Jonah St. Hilaire" userId="9d0a7af2-d0bd-4748-b50b-5cc37e0fdaa3" providerId="ADAL" clId="{58AAB240-BB3C-43BA-87E9-80C5D70C8BCC}" dt="2026-09-11T19:40:22.631" v="4300" actId="403"/>
-          <ac:spMkLst>
-            <pc:docMk/>
-            <pc:sldMk cId="2146513051" sldId="256"/>
-            <ac:spMk id="198" creationId="{14CEDF8D-2161-912C-A781-D9C037891793}"/>
-          </ac:spMkLst>
-        </pc:spChg>
-        <pc:spChg chg="mod">
-          <ac:chgData name="Jonah St. Hilaire" userId="9d0a7af2-d0bd-4748-b50b-5cc37e0fdaa3" providerId="ADAL" clId="{58AAB240-BB3C-43BA-87E9-80C5D70C8BCC}" dt="2026-09-11T19:40:22.631" v="4300" actId="403"/>
-          <ac:spMkLst>
-            <pc:docMk/>
-            <pc:sldMk cId="2146513051" sldId="256"/>
-            <ac:spMk id="199" creationId="{EE9BB093-D518-4098-0E55-D962D8FA463E}"/>
-          </ac:spMkLst>
-        </pc:spChg>
-        <pc:spChg chg="mod">
-          <ac:chgData name="Jonah St. Hilaire" userId="9d0a7af2-d0bd-4748-b50b-5cc37e0fdaa3" providerId="ADAL" clId="{58AAB240-BB3C-43BA-87E9-80C5D70C8BCC}" dt="2026-09-11T19:39:49.107" v="4276" actId="1035"/>
-          <ac:spMkLst>
-            <pc:docMk/>
-            <pc:sldMk cId="2146513051" sldId="256"/>
-            <ac:spMk id="214" creationId="{BB2E6544-E730-3343-3B74-A0224ECD92BD}"/>
-          </ac:spMkLst>
-        </pc:spChg>
-        <pc:spChg chg="mod">
-          <ac:chgData name="Jonah St. Hilaire" userId="9d0a7af2-d0bd-4748-b50b-5cc37e0fdaa3" providerId="ADAL" clId="{58AAB240-BB3C-43BA-87E9-80C5D70C8BCC}" dt="2026-09-11T19:39:49.107" v="4276" actId="1035"/>
-          <ac:spMkLst>
-            <pc:docMk/>
-            <pc:sldMk cId="2146513051" sldId="256"/>
-            <ac:spMk id="215" creationId="{0206A952-A0B7-9CE1-534A-DCF70B45E673}"/>
-          </ac:spMkLst>
-        </pc:spChg>
-        <pc:spChg chg="mod">
-          <ac:chgData name="Jonah St. Hilaire" userId="9d0a7af2-d0bd-4748-b50b-5cc37e0fdaa3" providerId="ADAL" clId="{58AAB240-BB3C-43BA-87E9-80C5D70C8BCC}" dt="2026-09-11T19:39:49.107" v="4276" actId="1035"/>
-          <ac:spMkLst>
-            <pc:docMk/>
-            <pc:sldMk cId="2146513051" sldId="256"/>
-            <ac:spMk id="232" creationId="{4599AF82-6AFC-BA5B-9099-72F93A2D41A4}"/>
-          </ac:spMkLst>
-        </pc:spChg>
-        <pc:spChg chg="mod">
-          <ac:chgData name="Jonah St. Hilaire" userId="9d0a7af2-d0bd-4748-b50b-5cc37e0fdaa3" providerId="ADAL" clId="{58AAB240-BB3C-43BA-87E9-80C5D70C8BCC}" dt="2026-09-11T19:39:49.107" v="4276" actId="1035"/>
-          <ac:spMkLst>
-            <pc:docMk/>
-            <pc:sldMk cId="2146513051" sldId="256"/>
-            <ac:spMk id="233" creationId="{9796933C-EB48-8BDA-1F51-F533CF634B10}"/>
-          </ac:spMkLst>
-        </pc:spChg>
-        <pc:spChg chg="mod">
-          <ac:chgData name="Jonah St. Hilaire" userId="9d0a7af2-d0bd-4748-b50b-5cc37e0fdaa3" providerId="ADAL" clId="{58AAB240-BB3C-43BA-87E9-80C5D70C8BCC}" dt="2026-09-11T19:42:58.551" v="4425" actId="403"/>
-          <ac:spMkLst>
-            <pc:docMk/>
-            <pc:sldMk cId="2146513051" sldId="256"/>
-            <ac:spMk id="242" creationId="{C1C72D86-28AC-0AE7-7175-728507128CBE}"/>
-          </ac:spMkLst>
-        </pc:spChg>
-        <pc:spChg chg="mod">
-          <ac:chgData name="Jonah St. Hilaire" userId="9d0a7af2-d0bd-4748-b50b-5cc37e0fdaa3" providerId="ADAL" clId="{58AAB240-BB3C-43BA-87E9-80C5D70C8BCC}" dt="2026-09-11T19:42:58.551" v="4425" actId="403"/>
-          <ac:spMkLst>
-            <pc:docMk/>
-            <pc:sldMk cId="2146513051" sldId="256"/>
-            <ac:spMk id="243" creationId="{BCEDB6FD-6EFC-C660-5B37-D17C0D38F7A3}"/>
-          </ac:spMkLst>
-        </pc:spChg>
-        <pc:spChg chg="mod">
-          <ac:chgData name="Jonah St. Hilaire" userId="9d0a7af2-d0bd-4748-b50b-5cc37e0fdaa3" providerId="ADAL" clId="{58AAB240-BB3C-43BA-87E9-80C5D70C8BCC}" dt="2026-09-11T19:42:19.470" v="4403"/>
-          <ac:spMkLst>
-            <pc:docMk/>
-            <pc:sldMk cId="2146513051" sldId="256"/>
-            <ac:spMk id="256" creationId="{CF54F100-5F9C-26BE-496D-7CC603DCF543}"/>
-          </ac:spMkLst>
-        </pc:spChg>
-        <pc:spChg chg="mod">
-          <ac:chgData name="Jonah St. Hilaire" userId="9d0a7af2-d0bd-4748-b50b-5cc37e0fdaa3" providerId="ADAL" clId="{58AAB240-BB3C-43BA-87E9-80C5D70C8BCC}" dt="2026-09-11T19:42:29.283" v="4409" actId="1076"/>
-          <ac:spMkLst>
-            <pc:docMk/>
-            <pc:sldMk cId="2146513051" sldId="256"/>
-            <ac:spMk id="261" creationId="{70D67868-CD95-726A-B878-BD8A2E325BEA}"/>
-          </ac:spMkLst>
-        </pc:spChg>
-        <pc:spChg chg="mod">
-          <ac:chgData name="Jonah St. Hilaire" userId="9d0a7af2-d0bd-4748-b50b-5cc37e0fdaa3" providerId="ADAL" clId="{58AAB240-BB3C-43BA-87E9-80C5D70C8BCC}" dt="2026-09-11T19:42:33.452" v="4414" actId="1076"/>
-          <ac:spMkLst>
-            <pc:docMk/>
-            <pc:sldMk cId="2146513051" sldId="256"/>
-            <ac:spMk id="262" creationId="{8D797FBD-0F76-355A-4CB0-B7640A343944}"/>
-          </ac:spMkLst>
-        </pc:spChg>
-        <pc:spChg chg="mod">
-          <ac:chgData name="Jonah St. Hilaire" userId="9d0a7af2-d0bd-4748-b50b-5cc37e0fdaa3" providerId="ADAL" clId="{58AAB240-BB3C-43BA-87E9-80C5D70C8BCC}" dt="2026-09-11T19:41:59.555" v="4398" actId="1076"/>
-          <ac:spMkLst>
-            <pc:docMk/>
-            <pc:sldMk cId="2146513051" sldId="256"/>
-            <ac:spMk id="268" creationId="{5AEB7D84-ADC9-64F8-1E64-F17685165FCB}"/>
-          </ac:spMkLst>
-        </pc:spChg>
-        <pc:spChg chg="mod">
-          <ac:chgData name="Jonah St. Hilaire" userId="9d0a7af2-d0bd-4748-b50b-5cc37e0fdaa3" providerId="ADAL" clId="{58AAB240-BB3C-43BA-87E9-80C5D70C8BCC}" dt="2026-09-11T19:41:55.764" v="4397" actId="1076"/>
-          <ac:spMkLst>
-            <pc:docMk/>
-            <pc:sldMk cId="2146513051" sldId="256"/>
-            <ac:spMk id="270" creationId="{AE8C5729-64C5-C219-0671-C26A27F96322}"/>
-          </ac:spMkLst>
-        </pc:spChg>
-        <pc:picChg chg="mod">
-          <ac:chgData name="Jonah St. Hilaire" userId="9d0a7af2-d0bd-4748-b50b-5cc37e0fdaa3" providerId="ADAL" clId="{58AAB240-BB3C-43BA-87E9-80C5D70C8BCC}" dt="2026-09-11T19:45:00.193" v="4473" actId="1036"/>
-          <ac:picMkLst>
-            <pc:docMk/>
-            <pc:sldMk cId="2146513051" sldId="256"/>
-            <ac:picMk id="141" creationId="{E753FB3D-F792-BC07-25AD-5A4BF2388368}"/>
-          </ac:picMkLst>
-        </pc:picChg>
-        <pc:cxnChg chg="mod">
-          <ac:chgData name="Jonah St. Hilaire" userId="9d0a7af2-d0bd-4748-b50b-5cc37e0fdaa3" providerId="ADAL" clId="{58AAB240-BB3C-43BA-87E9-80C5D70C8BCC}" dt="2026-09-11T19:43:37.629" v="4437" actId="1036"/>
-          <ac:cxnSpMkLst>
-            <pc:docMk/>
-            <pc:sldMk cId="2146513051" sldId="256"/>
-            <ac:cxnSpMk id="59" creationId="{E08F68F7-5D7A-FCCC-78C5-301A641491AF}"/>
-          </ac:cxnSpMkLst>
-        </pc:cxnChg>
-        <pc:cxnChg chg="mod">
-          <ac:chgData name="Jonah St. Hilaire" userId="9d0a7af2-d0bd-4748-b50b-5cc37e0fdaa3" providerId="ADAL" clId="{58AAB240-BB3C-43BA-87E9-80C5D70C8BCC}" dt="2026-09-11T19:43:41.259" v="4438" actId="1035"/>
-          <ac:cxnSpMkLst>
-            <pc:docMk/>
-            <pc:sldMk cId="2146513051" sldId="256"/>
-            <ac:cxnSpMk id="61" creationId="{76BE2F4C-E009-A9C7-3BF3-B9C1AD40E63A}"/>
-          </ac:cxnSpMkLst>
-        </pc:cxnChg>
-        <pc:cxnChg chg="mod">
-          <ac:chgData name="Jonah St. Hilaire" userId="9d0a7af2-d0bd-4748-b50b-5cc37e0fdaa3" providerId="ADAL" clId="{58AAB240-BB3C-43BA-87E9-80C5D70C8BCC}" dt="2026-09-11T19:43:41.259" v="4438" actId="1035"/>
-          <ac:cxnSpMkLst>
-            <pc:docMk/>
-            <pc:sldMk cId="2146513051" sldId="256"/>
-            <ac:cxnSpMk id="71" creationId="{C2D0C3F5-0A51-78A2-FEC1-FBA91F5F50AC}"/>
-          </ac:cxnSpMkLst>
-        </pc:cxnChg>
-        <pc:cxnChg chg="mod">
-          <ac:chgData name="Jonah St. Hilaire" userId="9d0a7af2-d0bd-4748-b50b-5cc37e0fdaa3" providerId="ADAL" clId="{58AAB240-BB3C-43BA-87E9-80C5D70C8BCC}" dt="2026-09-11T19:43:37.629" v="4437" actId="1036"/>
-          <ac:cxnSpMkLst>
-            <pc:docMk/>
-            <pc:sldMk cId="2146513051" sldId="256"/>
-            <ac:cxnSpMk id="81" creationId="{3FCCD247-E641-CE21-4D09-50B717AA506F}"/>
-          </ac:cxnSpMkLst>
-        </pc:cxnChg>
-        <pc:cxnChg chg="mod">
-          <ac:chgData name="Jonah St. Hilaire" userId="9d0a7af2-d0bd-4748-b50b-5cc37e0fdaa3" providerId="ADAL" clId="{58AAB240-BB3C-43BA-87E9-80C5D70C8BCC}" dt="2026-09-11T15:19:08.332" v="3" actId="14100"/>
-          <ac:cxnSpMkLst>
-            <pc:docMk/>
-            <pc:sldMk cId="2146513051" sldId="256"/>
-            <ac:cxnSpMk id="264" creationId="{35FA104B-DDA1-50B9-C38F-4147C82B36E7}"/>
-          </ac:cxnSpMkLst>
-        </pc:cxnChg>
-      </pc:sldChg>
-      <pc:sldChg chg="modSp">
-        <pc:chgData name="Jonah St. Hilaire" userId="9d0a7af2-d0bd-4748-b50b-5cc37e0fdaa3" providerId="ADAL" clId="{58AAB240-BB3C-43BA-87E9-80C5D70C8BCC}" dt="2026-09-11T16:19:46.133" v="1832"/>
+      <pc:sldChg chg="del">
+        <pc:chgData name="Jonah St. Hilaire" userId="9d0a7af2-d0bd-4748-b50b-5cc37e0fdaa3" providerId="ADAL" clId="{58AAB240-BB3C-43BA-87E9-80C5D70C8BCC}" dt="2026-10-29T21:53:56.408" v="5528" actId="2696"/>
         <pc:sldMkLst>
           <pc:docMk/>
           <pc:sldMk cId="3221349641" sldId="258"/>
         </pc:sldMkLst>
-        <pc:spChg chg="mod">
-          <ac:chgData name="Jonah St. Hilaire" userId="9d0a7af2-d0bd-4748-b50b-5cc37e0fdaa3" providerId="ADAL" clId="{58AAB240-BB3C-43BA-87E9-80C5D70C8BCC}" dt="2026-09-11T16:19:46.133" v="1832"/>
-          <ac:spMkLst>
-            <pc:docMk/>
-            <pc:sldMk cId="3221349641" sldId="258"/>
-            <ac:spMk id="2" creationId="{97D97242-4756-E707-C3DB-403ABB52C682}"/>
-          </ac:spMkLst>
-        </pc:spChg>
-        <pc:spChg chg="mod">
-          <ac:chgData name="Jonah St. Hilaire" userId="9d0a7af2-d0bd-4748-b50b-5cc37e0fdaa3" providerId="ADAL" clId="{58AAB240-BB3C-43BA-87E9-80C5D70C8BCC}" dt="2026-09-11T16:19:46.133" v="1832"/>
-          <ac:spMkLst>
-            <pc:docMk/>
-            <pc:sldMk cId="3221349641" sldId="258"/>
-            <ac:spMk id="4" creationId="{703E44B7-E4E7-E4DA-2AD1-3CDB039D8C2C}"/>
-          </ac:spMkLst>
-        </pc:spChg>
       </pc:sldChg>
-      <pc:sldChg chg="addSp delSp modSp add mod">
-        <pc:chgData name="Jonah St. Hilaire" userId="9d0a7af2-d0bd-4748-b50b-5cc37e0fdaa3" providerId="ADAL" clId="{58AAB240-BB3C-43BA-87E9-80C5D70C8BCC}" dt="2026-09-11T17:02:04.379" v="2948" actId="692"/>
-        <pc:sldMkLst>
-          <pc:docMk/>
-          <pc:sldMk cId="4013437199" sldId="259"/>
-        </pc:sldMkLst>
-        <pc:spChg chg="add mod">
-          <ac:chgData name="Jonah St. Hilaire" userId="9d0a7af2-d0bd-4748-b50b-5cc37e0fdaa3" providerId="ADAL" clId="{58AAB240-BB3C-43BA-87E9-80C5D70C8BCC}" dt="2026-09-11T16:25:59.527" v="2119" actId="1076"/>
-          <ac:spMkLst>
-            <pc:docMk/>
-            <pc:sldMk cId="4013437199" sldId="259"/>
-            <ac:spMk id="39" creationId="{9B1BDC6B-A282-D72D-C10C-49DA039DD604}"/>
-          </ac:spMkLst>
-        </pc:spChg>
-        <pc:spChg chg="add mod">
-          <ac:chgData name="Jonah St. Hilaire" userId="9d0a7af2-d0bd-4748-b50b-5cc37e0fdaa3" providerId="ADAL" clId="{58AAB240-BB3C-43BA-87E9-80C5D70C8BCC}" dt="2026-09-11T15:43:18.517" v="502" actId="403"/>
-          <ac:spMkLst>
-            <pc:docMk/>
-            <pc:sldMk cId="4013437199" sldId="259"/>
-            <ac:spMk id="43" creationId="{AAF86192-1376-3122-D320-15E60E4ECE7C}"/>
-          </ac:spMkLst>
-        </pc:spChg>
-        <pc:spChg chg="add mod">
-          <ac:chgData name="Jonah St. Hilaire" userId="9d0a7af2-d0bd-4748-b50b-5cc37e0fdaa3" providerId="ADAL" clId="{58AAB240-BB3C-43BA-87E9-80C5D70C8BCC}" dt="2026-09-11T16:25:59.527" v="2119" actId="1076"/>
-          <ac:spMkLst>
-            <pc:docMk/>
-            <pc:sldMk cId="4013437199" sldId="259"/>
-            <ac:spMk id="46" creationId="{E454A58B-0963-FEBB-9B6E-1B0FE40E3E24}"/>
-          </ac:spMkLst>
-        </pc:spChg>
-        <pc:spChg chg="add mod">
-          <ac:chgData name="Jonah St. Hilaire" userId="9d0a7af2-d0bd-4748-b50b-5cc37e0fdaa3" providerId="ADAL" clId="{58AAB240-BB3C-43BA-87E9-80C5D70C8BCC}" dt="2026-09-11T16:54:47.818" v="2847" actId="1076"/>
-          <ac:spMkLst>
-            <pc:docMk/>
-            <pc:sldMk cId="4013437199" sldId="259"/>
-            <ac:spMk id="90" creationId="{7331FA3D-A351-8DBA-A41F-B7F5B1AD4C7E}"/>
-          </ac:spMkLst>
-        </pc:spChg>
-        <pc:spChg chg="mod">
-          <ac:chgData name="Jonah St. Hilaire" userId="9d0a7af2-d0bd-4748-b50b-5cc37e0fdaa3" providerId="ADAL" clId="{58AAB240-BB3C-43BA-87E9-80C5D70C8BCC}" dt="2026-09-11T16:04:39.899" v="1436" actId="1076"/>
-          <ac:spMkLst>
-            <pc:docMk/>
-            <pc:sldMk cId="4013437199" sldId="259"/>
-            <ac:spMk id="92" creationId="{EB80290C-C725-B724-A6EF-3D6839CEE60F}"/>
-          </ac:spMkLst>
-        </pc:spChg>
-        <pc:spChg chg="mod">
-          <ac:chgData name="Jonah St. Hilaire" userId="9d0a7af2-d0bd-4748-b50b-5cc37e0fdaa3" providerId="ADAL" clId="{58AAB240-BB3C-43BA-87E9-80C5D70C8BCC}" dt="2026-09-11T16:04:36.016" v="1435" actId="1036"/>
-          <ac:spMkLst>
-            <pc:docMk/>
-            <pc:sldMk cId="4013437199" sldId="259"/>
-            <ac:spMk id="93" creationId="{C25A4875-337C-9D55-E1E8-D8CA226D85BF}"/>
-          </ac:spMkLst>
-        </pc:spChg>
-        <pc:spChg chg="add mod">
-          <ac:chgData name="Jonah St. Hilaire" userId="9d0a7af2-d0bd-4748-b50b-5cc37e0fdaa3" providerId="ADAL" clId="{58AAB240-BB3C-43BA-87E9-80C5D70C8BCC}" dt="2026-09-11T16:03:21.803" v="1405" actId="1036"/>
-          <ac:spMkLst>
-            <pc:docMk/>
-            <pc:sldMk cId="4013437199" sldId="259"/>
-            <ac:spMk id="102" creationId="{C795FC97-7909-93E9-EBB6-94B352AEAFBF}"/>
-          </ac:spMkLst>
-        </pc:spChg>
-        <pc:spChg chg="add mod">
-          <ac:chgData name="Jonah St. Hilaire" userId="9d0a7af2-d0bd-4748-b50b-5cc37e0fdaa3" providerId="ADAL" clId="{58AAB240-BB3C-43BA-87E9-80C5D70C8BCC}" dt="2026-09-11T15:38:25.353" v="397" actId="1035"/>
-          <ac:spMkLst>
-            <pc:docMk/>
-            <pc:sldMk cId="4013437199" sldId="259"/>
-            <ac:spMk id="105" creationId="{C1427CF0-0AB7-D35B-9C07-5EAB6C0B1C3A}"/>
-          </ac:spMkLst>
-        </pc:spChg>
-        <pc:spChg chg="add mod">
-          <ac:chgData name="Jonah St. Hilaire" userId="9d0a7af2-d0bd-4748-b50b-5cc37e0fdaa3" providerId="ADAL" clId="{58AAB240-BB3C-43BA-87E9-80C5D70C8BCC}" dt="2026-09-11T15:42:21.768" v="476" actId="1035"/>
-          <ac:spMkLst>
-            <pc:docMk/>
-            <pc:sldMk cId="4013437199" sldId="259"/>
-            <ac:spMk id="115" creationId="{5A527540-9EAF-6070-14C8-FECD66D1D5C6}"/>
-          </ac:spMkLst>
-        </pc:spChg>
-        <pc:spChg chg="add mod">
-          <ac:chgData name="Jonah St. Hilaire" userId="9d0a7af2-d0bd-4748-b50b-5cc37e0fdaa3" providerId="ADAL" clId="{58AAB240-BB3C-43BA-87E9-80C5D70C8BCC}" dt="2026-09-11T16:54:47.818" v="2847" actId="1076"/>
-          <ac:spMkLst>
-            <pc:docMk/>
-            <pc:sldMk cId="4013437199" sldId="259"/>
-            <ac:spMk id="121" creationId="{534B9C2C-8D34-90E9-AA07-799A69B3A599}"/>
-          </ac:spMkLst>
-        </pc:spChg>
-        <pc:spChg chg="add mod">
-          <ac:chgData name="Jonah St. Hilaire" userId="9d0a7af2-d0bd-4748-b50b-5cc37e0fdaa3" providerId="ADAL" clId="{58AAB240-BB3C-43BA-87E9-80C5D70C8BCC}" dt="2026-09-11T16:03:08.678" v="1399" actId="1035"/>
-          <ac:spMkLst>
-            <pc:docMk/>
-            <pc:sldMk cId="4013437199" sldId="259"/>
-            <ac:spMk id="124" creationId="{92B84DD4-A345-CA00-F3C3-203BC843F5CF}"/>
-          </ac:spMkLst>
-        </pc:spChg>
-        <pc:spChg chg="add mod">
-          <ac:chgData name="Jonah St. Hilaire" userId="9d0a7af2-d0bd-4748-b50b-5cc37e0fdaa3" providerId="ADAL" clId="{58AAB240-BB3C-43BA-87E9-80C5D70C8BCC}" dt="2026-09-11T16:54:47.818" v="2847" actId="1076"/>
-          <ac:spMkLst>
-            <pc:docMk/>
-            <pc:sldMk cId="4013437199" sldId="259"/>
-            <ac:spMk id="143" creationId="{29696E3D-A16D-F582-FE71-7FFC35ABCFEA}"/>
-          </ac:spMkLst>
-        </pc:spChg>
-        <pc:spChg chg="add mod">
-          <ac:chgData name="Jonah St. Hilaire" userId="9d0a7af2-d0bd-4748-b50b-5cc37e0fdaa3" providerId="ADAL" clId="{58AAB240-BB3C-43BA-87E9-80C5D70C8BCC}" dt="2026-09-11T16:06:56.005" v="1508" actId="403"/>
-          <ac:spMkLst>
-            <pc:docMk/>
-            <pc:sldMk cId="4013437199" sldId="259"/>
-            <ac:spMk id="144" creationId="{DD4C4DFD-A4A5-ACF7-C02A-C0E7999CF282}"/>
-          </ac:spMkLst>
-        </pc:spChg>
-        <pc:spChg chg="mod">
-          <ac:chgData name="Jonah St. Hilaire" userId="9d0a7af2-d0bd-4748-b50b-5cc37e0fdaa3" providerId="ADAL" clId="{58AAB240-BB3C-43BA-87E9-80C5D70C8BCC}" dt="2026-09-11T16:08:24.206" v="1537" actId="1076"/>
-          <ac:spMkLst>
-            <pc:docMk/>
-            <pc:sldMk cId="4013437199" sldId="259"/>
-            <ac:spMk id="145" creationId="{25FBFBC4-9616-5105-2980-E255FCE7E281}"/>
-          </ac:spMkLst>
-        </pc:spChg>
-        <pc:spChg chg="add mod">
-          <ac:chgData name="Jonah St. Hilaire" userId="9d0a7af2-d0bd-4748-b50b-5cc37e0fdaa3" providerId="ADAL" clId="{58AAB240-BB3C-43BA-87E9-80C5D70C8BCC}" dt="2026-09-11T16:25:59.527" v="2119" actId="1076"/>
-          <ac:spMkLst>
-            <pc:docMk/>
-            <pc:sldMk cId="4013437199" sldId="259"/>
-            <ac:spMk id="147" creationId="{630C28C3-C19F-D3AD-2A69-05F854C2A1EA}"/>
-          </ac:spMkLst>
-        </pc:spChg>
-        <pc:spChg chg="mod">
-          <ac:chgData name="Jonah St. Hilaire" userId="9d0a7af2-d0bd-4748-b50b-5cc37e0fdaa3" providerId="ADAL" clId="{58AAB240-BB3C-43BA-87E9-80C5D70C8BCC}" dt="2026-09-11T16:54:47.818" v="2847" actId="1076"/>
-          <ac:spMkLst>
-            <pc:docMk/>
-            <pc:sldMk cId="4013437199" sldId="259"/>
-            <ac:spMk id="148" creationId="{0568A850-6A05-E206-3D62-A92F74A2A87D}"/>
-          </ac:spMkLst>
-        </pc:spChg>
-        <pc:spChg chg="add mod">
-          <ac:chgData name="Jonah St. Hilaire" userId="9d0a7af2-d0bd-4748-b50b-5cc37e0fdaa3" providerId="ADAL" clId="{58AAB240-BB3C-43BA-87E9-80C5D70C8BCC}" dt="2026-09-11T16:17:20.338" v="1804" actId="1038"/>
-          <ac:spMkLst>
-            <pc:docMk/>
-            <pc:sldMk cId="4013437199" sldId="259"/>
-            <ac:spMk id="154" creationId="{F9E6D1C1-C4FA-05B6-5D44-D571395E523A}"/>
-          </ac:spMkLst>
-        </pc:spChg>
-        <pc:spChg chg="add mod">
-          <ac:chgData name="Jonah St. Hilaire" userId="9d0a7af2-d0bd-4748-b50b-5cc37e0fdaa3" providerId="ADAL" clId="{58AAB240-BB3C-43BA-87E9-80C5D70C8BCC}" dt="2026-09-11T16:17:20.338" v="1804" actId="1038"/>
-          <ac:spMkLst>
-            <pc:docMk/>
-            <pc:sldMk cId="4013437199" sldId="259"/>
-            <ac:spMk id="155" creationId="{DABBEB12-B18F-6E85-BEF7-CA8860D211BB}"/>
-          </ac:spMkLst>
-        </pc:spChg>
-        <pc:spChg chg="add mod">
-          <ac:chgData name="Jonah St. Hilaire" userId="9d0a7af2-d0bd-4748-b50b-5cc37e0fdaa3" providerId="ADAL" clId="{58AAB240-BB3C-43BA-87E9-80C5D70C8BCC}" dt="2026-09-11T16:45:55.651" v="2616" actId="1076"/>
-          <ac:spMkLst>
-            <pc:docMk/>
-            <pc:sldMk cId="4013437199" sldId="259"/>
-            <ac:spMk id="156" creationId="{0F236ED9-5A0C-93FE-BA94-133BB997A63A}"/>
-          </ac:spMkLst>
-        </pc:spChg>
-        <pc:spChg chg="add mod">
-          <ac:chgData name="Jonah St. Hilaire" userId="9d0a7af2-d0bd-4748-b50b-5cc37e0fdaa3" providerId="ADAL" clId="{58AAB240-BB3C-43BA-87E9-80C5D70C8BCC}" dt="2026-09-11T16:17:13.081" v="1803" actId="1038"/>
-          <ac:spMkLst>
-            <pc:docMk/>
-            <pc:sldMk cId="4013437199" sldId="259"/>
-            <ac:spMk id="159" creationId="{05283833-3C56-1A32-246D-8FA4ECE825B2}"/>
-          </ac:spMkLst>
-        </pc:spChg>
-        <pc:spChg chg="add mod">
-          <ac:chgData name="Jonah St. Hilaire" userId="9d0a7af2-d0bd-4748-b50b-5cc37e0fdaa3" providerId="ADAL" clId="{58AAB240-BB3C-43BA-87E9-80C5D70C8BCC}" dt="2026-09-11T16:25:59.527" v="2119" actId="1076"/>
-          <ac:spMkLst>
-            <pc:docMk/>
-            <pc:sldMk cId="4013437199" sldId="259"/>
-            <ac:spMk id="160" creationId="{11F31673-E70A-63CE-EDAA-4278710AAACB}"/>
-          </ac:spMkLst>
-        </pc:spChg>
-        <pc:spChg chg="add mod">
-          <ac:chgData name="Jonah St. Hilaire" userId="9d0a7af2-d0bd-4748-b50b-5cc37e0fdaa3" providerId="ADAL" clId="{58AAB240-BB3C-43BA-87E9-80C5D70C8BCC}" dt="2026-09-11T16:54:47.818" v="2847" actId="1076"/>
-          <ac:spMkLst>
-            <pc:docMk/>
-            <pc:sldMk cId="4013437199" sldId="259"/>
-            <ac:spMk id="202" creationId="{939C8878-1768-A911-6BB9-E55B802A6C5B}"/>
-          </ac:spMkLst>
-        </pc:spChg>
-        <pc:spChg chg="add mod">
-          <ac:chgData name="Jonah St. Hilaire" userId="9d0a7af2-d0bd-4748-b50b-5cc37e0fdaa3" providerId="ADAL" clId="{58AAB240-BB3C-43BA-87E9-80C5D70C8BCC}" dt="2026-09-11T16:25:59.527" v="2119" actId="1076"/>
-          <ac:spMkLst>
-            <pc:docMk/>
-            <pc:sldMk cId="4013437199" sldId="259"/>
-            <ac:spMk id="204" creationId="{D3095F58-6864-3648-EB89-B33BF91E4483}"/>
-          </ac:spMkLst>
-        </pc:spChg>
-        <pc:spChg chg="add mod">
-          <ac:chgData name="Jonah St. Hilaire" userId="9d0a7af2-d0bd-4748-b50b-5cc37e0fdaa3" providerId="ADAL" clId="{58AAB240-BB3C-43BA-87E9-80C5D70C8BCC}" dt="2026-09-11T16:17:13.081" v="1803" actId="1038"/>
-          <ac:spMkLst>
-            <pc:docMk/>
-            <pc:sldMk cId="4013437199" sldId="259"/>
-            <ac:spMk id="237" creationId="{5D1B770A-2B95-2AAB-E10A-32FBE8A97BDE}"/>
-          </ac:spMkLst>
-        </pc:spChg>
-        <pc:spChg chg="add mod">
-          <ac:chgData name="Jonah St. Hilaire" userId="9d0a7af2-d0bd-4748-b50b-5cc37e0fdaa3" providerId="ADAL" clId="{58AAB240-BB3C-43BA-87E9-80C5D70C8BCC}" dt="2026-09-11T16:17:06.856" v="1802" actId="1037"/>
-          <ac:spMkLst>
-            <pc:docMk/>
-            <pc:sldMk cId="4013437199" sldId="259"/>
-            <ac:spMk id="238" creationId="{D3291440-CCFB-13C0-B5C3-10E8B38CB8D9}"/>
-          </ac:spMkLst>
-        </pc:spChg>
-        <pc:spChg chg="add mod">
-          <ac:chgData name="Jonah St. Hilaire" userId="9d0a7af2-d0bd-4748-b50b-5cc37e0fdaa3" providerId="ADAL" clId="{58AAB240-BB3C-43BA-87E9-80C5D70C8BCC}" dt="2026-09-11T16:17:06.856" v="1802" actId="1037"/>
-          <ac:spMkLst>
-            <pc:docMk/>
-            <pc:sldMk cId="4013437199" sldId="259"/>
-            <ac:spMk id="239" creationId="{FF2E4387-C1CE-3901-A57A-A4B60E4DDA5D}"/>
-          </ac:spMkLst>
-        </pc:spChg>
-        <pc:spChg chg="add mod">
-          <ac:chgData name="Jonah St. Hilaire" userId="9d0a7af2-d0bd-4748-b50b-5cc37e0fdaa3" providerId="ADAL" clId="{58AAB240-BB3C-43BA-87E9-80C5D70C8BCC}" dt="2026-09-11T16:25:59.527" v="2119" actId="1076"/>
-          <ac:spMkLst>
-            <pc:docMk/>
-            <pc:sldMk cId="4013437199" sldId="259"/>
-            <ac:spMk id="248" creationId="{B8264198-91CC-0A42-4B73-BB12DA912C43}"/>
-          </ac:spMkLst>
-        </pc:spChg>
-        <pc:spChg chg="mod">
-          <ac:chgData name="Jonah St. Hilaire" userId="9d0a7af2-d0bd-4748-b50b-5cc37e0fdaa3" providerId="ADAL" clId="{58AAB240-BB3C-43BA-87E9-80C5D70C8BCC}" dt="2026-09-11T16:15:53.060" v="1741" actId="1035"/>
-          <ac:spMkLst>
-            <pc:docMk/>
-            <pc:sldMk cId="4013437199" sldId="259"/>
-            <ac:spMk id="250" creationId="{430E42AA-770D-BD15-90F8-9480DFBC636C}"/>
-          </ac:spMkLst>
-        </pc:spChg>
-        <pc:spChg chg="mod">
-          <ac:chgData name="Jonah St. Hilaire" userId="9d0a7af2-d0bd-4748-b50b-5cc37e0fdaa3" providerId="ADAL" clId="{58AAB240-BB3C-43BA-87E9-80C5D70C8BCC}" dt="2026-09-11T16:46:54.210" v="2638" actId="6549"/>
-          <ac:spMkLst>
-            <pc:docMk/>
-            <pc:sldMk cId="4013437199" sldId="259"/>
-            <ac:spMk id="256" creationId="{0B6E3657-C2A5-8D41-F53A-8C8DE72CAA22}"/>
-          </ac:spMkLst>
-        </pc:spChg>
-        <pc:spChg chg="add mod">
-          <ac:chgData name="Jonah St. Hilaire" userId="9d0a7af2-d0bd-4748-b50b-5cc37e0fdaa3" providerId="ADAL" clId="{58AAB240-BB3C-43BA-87E9-80C5D70C8BCC}" dt="2026-09-11T16:54:47.818" v="2847" actId="1076"/>
-          <ac:spMkLst>
-            <pc:docMk/>
-            <pc:sldMk cId="4013437199" sldId="259"/>
-            <ac:spMk id="258" creationId="{20B38008-F9E9-2290-3B81-483C2545CC3E}"/>
-          </ac:spMkLst>
-        </pc:spChg>
-        <pc:spChg chg="mod">
-          <ac:chgData name="Jonah St. Hilaire" userId="9d0a7af2-d0bd-4748-b50b-5cc37e0fdaa3" providerId="ADAL" clId="{58AAB240-BB3C-43BA-87E9-80C5D70C8BCC}" dt="2026-09-11T16:05:32.372" v="1467" actId="1076"/>
-          <ac:spMkLst>
-            <pc:docMk/>
-            <pc:sldMk cId="4013437199" sldId="259"/>
-            <ac:spMk id="260" creationId="{7D78E38A-9579-A5EF-0306-9FD2ABEBBABA}"/>
-          </ac:spMkLst>
-        </pc:spChg>
-        <pc:spChg chg="mod">
-          <ac:chgData name="Jonah St. Hilaire" userId="9d0a7af2-d0bd-4748-b50b-5cc37e0fdaa3" providerId="ADAL" clId="{58AAB240-BB3C-43BA-87E9-80C5D70C8BCC}" dt="2026-09-11T16:06:33.118" v="1504" actId="1036"/>
-          <ac:spMkLst>
-            <pc:docMk/>
-            <pc:sldMk cId="4013437199" sldId="259"/>
-            <ac:spMk id="261" creationId="{911D1DF1-80D4-3C5D-E378-7B247D59ACC9}"/>
-          </ac:spMkLst>
-        </pc:spChg>
-        <pc:spChg chg="mod">
-          <ac:chgData name="Jonah St. Hilaire" userId="9d0a7af2-d0bd-4748-b50b-5cc37e0fdaa3" providerId="ADAL" clId="{58AAB240-BB3C-43BA-87E9-80C5D70C8BCC}" dt="2026-09-11T16:25:59.527" v="2119" actId="1076"/>
-          <ac:spMkLst>
-            <pc:docMk/>
-            <pc:sldMk cId="4013437199" sldId="259"/>
-            <ac:spMk id="262" creationId="{2B351C97-E750-776D-40C3-1A2D03A8B71B}"/>
-          </ac:spMkLst>
-        </pc:spChg>
-        <pc:spChg chg="mod">
-          <ac:chgData name="Jonah St. Hilaire" userId="9d0a7af2-d0bd-4748-b50b-5cc37e0fdaa3" providerId="ADAL" clId="{58AAB240-BB3C-43BA-87E9-80C5D70C8BCC}" dt="2026-09-11T16:06:22.257" v="1483" actId="1037"/>
-          <ac:spMkLst>
-            <pc:docMk/>
-            <pc:sldMk cId="4013437199" sldId="259"/>
-            <ac:spMk id="268" creationId="{0B1F3BCA-3FE1-BAD2-DE12-5E199D3456C0}"/>
-          </ac:spMkLst>
-        </pc:spChg>
-        <pc:spChg chg="mod">
-          <ac:chgData name="Jonah St. Hilaire" userId="9d0a7af2-d0bd-4748-b50b-5cc37e0fdaa3" providerId="ADAL" clId="{58AAB240-BB3C-43BA-87E9-80C5D70C8BCC}" dt="2026-09-11T15:43:04.167" v="496" actId="403"/>
-          <ac:spMkLst>
-            <pc:docMk/>
-            <pc:sldMk cId="4013437199" sldId="259"/>
-            <ac:spMk id="270" creationId="{620CC4E5-7903-4851-402D-C5DDDE967B68}"/>
-          </ac:spMkLst>
-        </pc:spChg>
-        <pc:spChg chg="add mod">
-          <ac:chgData name="Jonah St. Hilaire" userId="9d0a7af2-d0bd-4748-b50b-5cc37e0fdaa3" providerId="ADAL" clId="{58AAB240-BB3C-43BA-87E9-80C5D70C8BCC}" dt="2026-09-11T16:35:05.924" v="2258" actId="1038"/>
-          <ac:spMkLst>
-            <pc:docMk/>
-            <pc:sldMk cId="4013437199" sldId="259"/>
-            <ac:spMk id="276" creationId="{27F27654-1958-FAD9-B413-6B4BA6CC1964}"/>
-          </ac:spMkLst>
-        </pc:spChg>
-        <pc:spChg chg="add mod">
-          <ac:chgData name="Jonah St. Hilaire" userId="9d0a7af2-d0bd-4748-b50b-5cc37e0fdaa3" providerId="ADAL" clId="{58AAB240-BB3C-43BA-87E9-80C5D70C8BCC}" dt="2026-09-11T16:35:05.924" v="2258" actId="1038"/>
-          <ac:spMkLst>
-            <pc:docMk/>
-            <pc:sldMk cId="4013437199" sldId="259"/>
-            <ac:spMk id="277" creationId="{40853BC1-BFBB-F672-45AF-9E3EAB48C8A1}"/>
-          </ac:spMkLst>
-        </pc:spChg>
-        <pc:spChg chg="add mod">
-          <ac:chgData name="Jonah St. Hilaire" userId="9d0a7af2-d0bd-4748-b50b-5cc37e0fdaa3" providerId="ADAL" clId="{58AAB240-BB3C-43BA-87E9-80C5D70C8BCC}" dt="2026-09-11T16:35:05.924" v="2258" actId="1038"/>
-          <ac:spMkLst>
-            <pc:docMk/>
-            <pc:sldMk cId="4013437199" sldId="259"/>
-            <ac:spMk id="278" creationId="{958DF313-46EB-F353-33A9-673A1D0C7711}"/>
-          </ac:spMkLst>
-        </pc:spChg>
-        <pc:spChg chg="add mod">
-          <ac:chgData name="Jonah St. Hilaire" userId="9d0a7af2-d0bd-4748-b50b-5cc37e0fdaa3" providerId="ADAL" clId="{58AAB240-BB3C-43BA-87E9-80C5D70C8BCC}" dt="2026-09-11T16:35:05.924" v="2258" actId="1038"/>
-          <ac:spMkLst>
-            <pc:docMk/>
-            <pc:sldMk cId="4013437199" sldId="259"/>
-            <ac:spMk id="302" creationId="{D385BD47-8CC1-50F1-E0F0-A9842FA77A98}"/>
-          </ac:spMkLst>
-        </pc:spChg>
-        <pc:spChg chg="add mod">
-          <ac:chgData name="Jonah St. Hilaire" userId="9d0a7af2-d0bd-4748-b50b-5cc37e0fdaa3" providerId="ADAL" clId="{58AAB240-BB3C-43BA-87E9-80C5D70C8BCC}" dt="2026-09-11T16:36:43.419" v="2285"/>
-          <ac:spMkLst>
-            <pc:docMk/>
-            <pc:sldMk cId="4013437199" sldId="259"/>
-            <ac:spMk id="315" creationId="{F8529CAC-964F-A2CE-1341-C31C4E1ABB23}"/>
-          </ac:spMkLst>
-        </pc:spChg>
-        <pc:spChg chg="add mod">
-          <ac:chgData name="Jonah St. Hilaire" userId="9d0a7af2-d0bd-4748-b50b-5cc37e0fdaa3" providerId="ADAL" clId="{58AAB240-BB3C-43BA-87E9-80C5D70C8BCC}" dt="2026-09-11T16:54:47.818" v="2847" actId="1076"/>
-          <ac:spMkLst>
-            <pc:docMk/>
-            <pc:sldMk cId="4013437199" sldId="259"/>
-            <ac:spMk id="317" creationId="{FFEDBFB8-142D-7087-B5E8-86874E010253}"/>
-          </ac:spMkLst>
-        </pc:spChg>
-        <pc:spChg chg="add mod">
-          <ac:chgData name="Jonah St. Hilaire" userId="9d0a7af2-d0bd-4748-b50b-5cc37e0fdaa3" providerId="ADAL" clId="{58AAB240-BB3C-43BA-87E9-80C5D70C8BCC}" dt="2026-09-11T16:36:31.442" v="2277"/>
-          <ac:spMkLst>
-            <pc:docMk/>
-            <pc:sldMk cId="4013437199" sldId="259"/>
-            <ac:spMk id="319" creationId="{CD607615-31EA-5DFE-7B71-ED5B4D847E5A}"/>
-          </ac:spMkLst>
-        </pc:spChg>
-        <pc:spChg chg="add mod">
-          <ac:chgData name="Jonah St. Hilaire" userId="9d0a7af2-d0bd-4748-b50b-5cc37e0fdaa3" providerId="ADAL" clId="{58AAB240-BB3C-43BA-87E9-80C5D70C8BCC}" dt="2026-09-11T16:54:47.818" v="2847" actId="1076"/>
-          <ac:spMkLst>
-            <pc:docMk/>
-            <pc:sldMk cId="4013437199" sldId="259"/>
-            <ac:spMk id="328" creationId="{DC250596-BBB9-7116-8CE0-9F446265F068}"/>
-          </ac:spMkLst>
-        </pc:spChg>
-        <pc:spChg chg="add mod">
-          <ac:chgData name="Jonah St. Hilaire" userId="9d0a7af2-d0bd-4748-b50b-5cc37e0fdaa3" providerId="ADAL" clId="{58AAB240-BB3C-43BA-87E9-80C5D70C8BCC}" dt="2026-09-11T16:43:42.786" v="2574" actId="1036"/>
-          <ac:spMkLst>
-            <pc:docMk/>
-            <pc:sldMk cId="4013437199" sldId="259"/>
-            <ac:spMk id="342" creationId="{E64D39B3-2F88-85D5-6515-EC452775E25A}"/>
-          </ac:spMkLst>
-        </pc:spChg>
-        <pc:spChg chg="add mod">
-          <ac:chgData name="Jonah St. Hilaire" userId="9d0a7af2-d0bd-4748-b50b-5cc37e0fdaa3" providerId="ADAL" clId="{58AAB240-BB3C-43BA-87E9-80C5D70C8BCC}" dt="2026-09-11T16:54:47.818" v="2847" actId="1076"/>
-          <ac:spMkLst>
-            <pc:docMk/>
-            <pc:sldMk cId="4013437199" sldId="259"/>
-            <ac:spMk id="344" creationId="{3449ED4D-F34D-698A-C02E-03DA26F7429C}"/>
-          </ac:spMkLst>
-        </pc:spChg>
-        <pc:spChg chg="add mod">
-          <ac:chgData name="Jonah St. Hilaire" userId="9d0a7af2-d0bd-4748-b50b-5cc37e0fdaa3" providerId="ADAL" clId="{58AAB240-BB3C-43BA-87E9-80C5D70C8BCC}" dt="2026-09-11T16:43:42.786" v="2574" actId="1036"/>
-          <ac:spMkLst>
-            <pc:docMk/>
-            <pc:sldMk cId="4013437199" sldId="259"/>
-            <ac:spMk id="346" creationId="{01FDB514-40DF-64A5-E36B-9269D24F9187}"/>
-          </ac:spMkLst>
-        </pc:spChg>
-        <pc:spChg chg="add mod">
-          <ac:chgData name="Jonah St. Hilaire" userId="9d0a7af2-d0bd-4748-b50b-5cc37e0fdaa3" providerId="ADAL" clId="{58AAB240-BB3C-43BA-87E9-80C5D70C8BCC}" dt="2026-09-11T16:45:23.056" v="2595" actId="1076"/>
-          <ac:spMkLst>
-            <pc:docMk/>
-            <pc:sldMk cId="4013437199" sldId="259"/>
-            <ac:spMk id="350" creationId="{5ED50C55-9337-A464-7463-3D7F987821D0}"/>
-          </ac:spMkLst>
-        </pc:spChg>
-        <pc:spChg chg="add mod">
-          <ac:chgData name="Jonah St. Hilaire" userId="9d0a7af2-d0bd-4748-b50b-5cc37e0fdaa3" providerId="ADAL" clId="{58AAB240-BB3C-43BA-87E9-80C5D70C8BCC}" dt="2026-09-11T16:48:12.991" v="2656"/>
-          <ac:spMkLst>
-            <pc:docMk/>
-            <pc:sldMk cId="4013437199" sldId="259"/>
-            <ac:spMk id="359" creationId="{64F6887F-DAF2-338D-C9BC-1BE158636D64}"/>
-          </ac:spMkLst>
-        </pc:spChg>
-        <pc:spChg chg="add mod">
-          <ac:chgData name="Jonah St. Hilaire" userId="9d0a7af2-d0bd-4748-b50b-5cc37e0fdaa3" providerId="ADAL" clId="{58AAB240-BB3C-43BA-87E9-80C5D70C8BCC}" dt="2026-09-11T16:48:28.085" v="2678" actId="1036"/>
-          <ac:spMkLst>
-            <pc:docMk/>
-            <pc:sldMk cId="4013437199" sldId="259"/>
-            <ac:spMk id="361" creationId="{D3BAF20F-A397-B878-75A7-5B3E73670E21}"/>
-          </ac:spMkLst>
-        </pc:spChg>
-        <pc:spChg chg="add mod">
-          <ac:chgData name="Jonah St. Hilaire" userId="9d0a7af2-d0bd-4748-b50b-5cc37e0fdaa3" providerId="ADAL" clId="{58AAB240-BB3C-43BA-87E9-80C5D70C8BCC}" dt="2026-09-11T16:54:47.818" v="2847" actId="1076"/>
-          <ac:spMkLst>
-            <pc:docMk/>
-            <pc:sldMk cId="4013437199" sldId="259"/>
-            <ac:spMk id="365" creationId="{20962216-241D-59E4-149D-16DFCCE99554}"/>
-          </ac:spMkLst>
-        </pc:spChg>
-        <pc:spChg chg="add mod">
-          <ac:chgData name="Jonah St. Hilaire" userId="9d0a7af2-d0bd-4748-b50b-5cc37e0fdaa3" providerId="ADAL" clId="{58AAB240-BB3C-43BA-87E9-80C5D70C8BCC}" dt="2026-09-11T16:50:17.712" v="2819"/>
-          <ac:spMkLst>
-            <pc:docMk/>
-            <pc:sldMk cId="4013437199" sldId="259"/>
-            <ac:spMk id="367" creationId="{B42E11D8-BE5D-D029-0DA0-F687D8DC2D66}"/>
-          </ac:spMkLst>
-        </pc:spChg>
-        <pc:grpChg chg="add mod">
-          <ac:chgData name="Jonah St. Hilaire" userId="9d0a7af2-d0bd-4748-b50b-5cc37e0fdaa3" providerId="ADAL" clId="{58AAB240-BB3C-43BA-87E9-80C5D70C8BCC}" dt="2026-09-11T16:15:59.542" v="1745" actId="1038"/>
-          <ac:grpSpMkLst>
-            <pc:docMk/>
-            <pc:sldMk cId="4013437199" sldId="259"/>
-            <ac:grpSpMk id="249" creationId="{16F64BFA-9582-833F-6699-82A1AAC6C7A1}"/>
-          </ac:grpSpMkLst>
-        </pc:grpChg>
-        <pc:picChg chg="mod modCrop">
-          <ac:chgData name="Jonah St. Hilaire" userId="9d0a7af2-d0bd-4748-b50b-5cc37e0fdaa3" providerId="ADAL" clId="{58AAB240-BB3C-43BA-87E9-80C5D70C8BCC}" dt="2026-09-11T16:18:00.363" v="1813" actId="1035"/>
-          <ac:picMkLst>
-            <pc:docMk/>
-            <pc:sldMk cId="4013437199" sldId="259"/>
-            <ac:picMk id="251" creationId="{8C9DDA59-20E3-EE05-8998-E67CE884E26D}"/>
-          </ac:picMkLst>
-        </pc:picChg>
-        <pc:cxnChg chg="mod">
-          <ac:chgData name="Jonah St. Hilaire" userId="9d0a7af2-d0bd-4748-b50b-5cc37e0fdaa3" providerId="ADAL" clId="{58AAB240-BB3C-43BA-87E9-80C5D70C8BCC}" dt="2026-09-11T17:01:08.832" v="2938" actId="1035"/>
-          <ac:cxnSpMkLst>
-            <pc:docMk/>
-            <pc:sldMk cId="4013437199" sldId="259"/>
-            <ac:cxnSpMk id="40" creationId="{1FCFE076-644C-3CE0-298B-DB4CB36300A0}"/>
-          </ac:cxnSpMkLst>
-        </pc:cxnChg>
-        <pc:cxnChg chg="mod">
-          <ac:chgData name="Jonah St. Hilaire" userId="9d0a7af2-d0bd-4748-b50b-5cc37e0fdaa3" providerId="ADAL" clId="{58AAB240-BB3C-43BA-87E9-80C5D70C8BCC}" dt="2026-09-11T16:02:30.635" v="1389" actId="1035"/>
-          <ac:cxnSpMkLst>
-            <pc:docMk/>
-            <pc:sldMk cId="4013437199" sldId="259"/>
-            <ac:cxnSpMk id="41" creationId="{7428B943-8296-7A3A-247B-C36E35D8CAF7}"/>
-          </ac:cxnSpMkLst>
-        </pc:cxnChg>
-        <pc:cxnChg chg="mod">
-          <ac:chgData name="Jonah St. Hilaire" userId="9d0a7af2-d0bd-4748-b50b-5cc37e0fdaa3" providerId="ADAL" clId="{58AAB240-BB3C-43BA-87E9-80C5D70C8BCC}" dt="2026-09-11T15:38:25.353" v="397" actId="1035"/>
-          <ac:cxnSpMkLst>
-            <pc:docMk/>
-            <pc:sldMk cId="4013437199" sldId="259"/>
-            <ac:cxnSpMk id="91" creationId="{B5D4E07F-5611-D10F-CED3-11AA445EE829}"/>
-          </ac:cxnSpMkLst>
-        </pc:cxnChg>
-        <pc:cxnChg chg="mod">
-          <ac:chgData name="Jonah St. Hilaire" userId="9d0a7af2-d0bd-4748-b50b-5cc37e0fdaa3" providerId="ADAL" clId="{58AAB240-BB3C-43BA-87E9-80C5D70C8BCC}" dt="2026-09-11T16:04:26.420" v="1421" actId="14100"/>
-          <ac:cxnSpMkLst>
-            <pc:docMk/>
-            <pc:sldMk cId="4013437199" sldId="259"/>
-            <ac:cxnSpMk id="94" creationId="{4E391D04-4DEC-6D07-FBA3-B0107B65FF84}"/>
-          </ac:cxnSpMkLst>
-        </pc:cxnChg>
-        <pc:cxnChg chg="mod">
-          <ac:chgData name="Jonah St. Hilaire" userId="9d0a7af2-d0bd-4748-b50b-5cc37e0fdaa3" providerId="ADAL" clId="{58AAB240-BB3C-43BA-87E9-80C5D70C8BCC}" dt="2026-09-11T16:08:24.206" v="1537" actId="1076"/>
-          <ac:cxnSpMkLst>
-            <pc:docMk/>
-            <pc:sldMk cId="4013437199" sldId="259"/>
-            <ac:cxnSpMk id="146" creationId="{474D9FFA-C55A-6405-0287-B95D5326256C}"/>
-          </ac:cxnSpMkLst>
-        </pc:cxnChg>
-        <pc:cxnChg chg="add mod">
-          <ac:chgData name="Jonah St. Hilaire" userId="9d0a7af2-d0bd-4748-b50b-5cc37e0fdaa3" providerId="ADAL" clId="{58AAB240-BB3C-43BA-87E9-80C5D70C8BCC}" dt="2026-09-11T16:17:13.081" v="1803" actId="1038"/>
-          <ac:cxnSpMkLst>
-            <pc:docMk/>
-            <pc:sldMk cId="4013437199" sldId="259"/>
-            <ac:cxnSpMk id="207" creationId="{B34567E2-18C6-A0CB-5281-26E5729AD55C}"/>
-          </ac:cxnSpMkLst>
-        </pc:cxnChg>
-        <pc:cxnChg chg="add del mod">
-          <ac:chgData name="Jonah St. Hilaire" userId="9d0a7af2-d0bd-4748-b50b-5cc37e0fdaa3" providerId="ADAL" clId="{58AAB240-BB3C-43BA-87E9-80C5D70C8BCC}" dt="2026-09-11T16:18:30.833" v="1823" actId="478"/>
-          <ac:cxnSpMkLst>
-            <pc:docMk/>
-            <pc:sldMk cId="4013437199" sldId="259"/>
-            <ac:cxnSpMk id="208" creationId="{1358BCF0-4157-5FCB-586B-91A1E6D8A143}"/>
-          </ac:cxnSpMkLst>
-        </pc:cxnChg>
-        <pc:cxnChg chg="add del mod">
-          <ac:chgData name="Jonah St. Hilaire" userId="9d0a7af2-d0bd-4748-b50b-5cc37e0fdaa3" providerId="ADAL" clId="{58AAB240-BB3C-43BA-87E9-80C5D70C8BCC}" dt="2026-09-11T16:18:28.564" v="1821" actId="478"/>
-          <ac:cxnSpMkLst>
-            <pc:docMk/>
-            <pc:sldMk cId="4013437199" sldId="259"/>
-            <ac:cxnSpMk id="209" creationId="{9A3B2EDD-3BAF-7983-183D-94C199D10434}"/>
-          </ac:cxnSpMkLst>
-        </pc:cxnChg>
-        <pc:cxnChg chg="add mod">
-          <ac:chgData name="Jonah St. Hilaire" userId="9d0a7af2-d0bd-4748-b50b-5cc37e0fdaa3" providerId="ADAL" clId="{58AAB240-BB3C-43BA-87E9-80C5D70C8BCC}" dt="2026-09-11T16:17:20.338" v="1804" actId="1038"/>
-          <ac:cxnSpMkLst>
-            <pc:docMk/>
-            <pc:sldMk cId="4013437199" sldId="259"/>
-            <ac:cxnSpMk id="216" creationId="{1008AD42-712B-A45C-1958-857069239952}"/>
-          </ac:cxnSpMkLst>
-        </pc:cxnChg>
-        <pc:cxnChg chg="add del mod">
-          <ac:chgData name="Jonah St. Hilaire" userId="9d0a7af2-d0bd-4748-b50b-5cc37e0fdaa3" providerId="ADAL" clId="{58AAB240-BB3C-43BA-87E9-80C5D70C8BCC}" dt="2026-09-11T16:18:25.596" v="1819" actId="478"/>
-          <ac:cxnSpMkLst>
-            <pc:docMk/>
-            <pc:sldMk cId="4013437199" sldId="259"/>
-            <ac:cxnSpMk id="218" creationId="{4631EA1A-EBAE-3AC7-2E69-369B196C846F}"/>
-          </ac:cxnSpMkLst>
-        </pc:cxnChg>
-        <pc:cxnChg chg="add mod">
-          <ac:chgData name="Jonah St. Hilaire" userId="9d0a7af2-d0bd-4748-b50b-5cc37e0fdaa3" providerId="ADAL" clId="{58AAB240-BB3C-43BA-87E9-80C5D70C8BCC}" dt="2026-09-11T17:01:14.104" v="2939" actId="1036"/>
-          <ac:cxnSpMkLst>
-            <pc:docMk/>
-            <pc:sldMk cId="4013437199" sldId="259"/>
-            <ac:cxnSpMk id="219" creationId="{CAEE3E29-3CD9-2514-2E89-CF224AA64712}"/>
-          </ac:cxnSpMkLst>
-        </pc:cxnChg>
-        <pc:cxnChg chg="add del mod">
-          <ac:chgData name="Jonah St. Hilaire" userId="9d0a7af2-d0bd-4748-b50b-5cc37e0fdaa3" providerId="ADAL" clId="{58AAB240-BB3C-43BA-87E9-80C5D70C8BCC}" dt="2026-09-11T16:18:34.789" v="1825" actId="478"/>
-          <ac:cxnSpMkLst>
-            <pc:docMk/>
-            <pc:sldMk cId="4013437199" sldId="259"/>
-            <ac:cxnSpMk id="220" creationId="{ED7E4950-7AD1-E6B9-3FD5-DEC78EFD33A4}"/>
-          </ac:cxnSpMkLst>
-        </pc:cxnChg>
-        <pc:cxnChg chg="add mod">
-          <ac:chgData name="Jonah St. Hilaire" userId="9d0a7af2-d0bd-4748-b50b-5cc37e0fdaa3" providerId="ADAL" clId="{58AAB240-BB3C-43BA-87E9-80C5D70C8BCC}" dt="2026-09-11T16:17:06.856" v="1802" actId="1037"/>
-          <ac:cxnSpMkLst>
-            <pc:docMk/>
-            <pc:sldMk cId="4013437199" sldId="259"/>
-            <ac:cxnSpMk id="240" creationId="{24A436F0-ED8F-7E4B-12DF-3767C5DCAC85}"/>
-          </ac:cxnSpMkLst>
-        </pc:cxnChg>
-        <pc:cxnChg chg="add mod">
-          <ac:chgData name="Jonah St. Hilaire" userId="9d0a7af2-d0bd-4748-b50b-5cc37e0fdaa3" providerId="ADAL" clId="{58AAB240-BB3C-43BA-87E9-80C5D70C8BCC}" dt="2026-09-11T16:17:06.856" v="1802" actId="1037"/>
-          <ac:cxnSpMkLst>
-            <pc:docMk/>
-            <pc:sldMk cId="4013437199" sldId="259"/>
-            <ac:cxnSpMk id="241" creationId="{3AA5422E-B8F0-E458-A358-550775865BC5}"/>
-          </ac:cxnSpMkLst>
-        </pc:cxnChg>
-        <pc:cxnChg chg="add del mod">
-          <ac:chgData name="Jonah St. Hilaire" userId="9d0a7af2-d0bd-4748-b50b-5cc37e0fdaa3" providerId="ADAL" clId="{58AAB240-BB3C-43BA-87E9-80C5D70C8BCC}" dt="2026-09-11T16:18:19.625" v="1816" actId="478"/>
-          <ac:cxnSpMkLst>
-            <pc:docMk/>
-            <pc:sldMk cId="4013437199" sldId="259"/>
-            <ac:cxnSpMk id="244" creationId="{EF140DAF-309B-4188-38F6-AC4BF71E7100}"/>
-          </ac:cxnSpMkLst>
-        </pc:cxnChg>
-        <pc:cxnChg chg="add mod">
-          <ac:chgData name="Jonah St. Hilaire" userId="9d0a7af2-d0bd-4748-b50b-5cc37e0fdaa3" providerId="ADAL" clId="{58AAB240-BB3C-43BA-87E9-80C5D70C8BCC}" dt="2026-09-11T16:35:05.924" v="2258" actId="1038"/>
-          <ac:cxnSpMkLst>
-            <pc:docMk/>
-            <pc:sldMk cId="4013437199" sldId="259"/>
-            <ac:cxnSpMk id="263" creationId="{F10029D0-86C5-F9E2-429D-82D502848F1F}"/>
-          </ac:cxnSpMkLst>
-        </pc:cxnChg>
-        <pc:cxnChg chg="mod">
-          <ac:chgData name="Jonah St. Hilaire" userId="9d0a7af2-d0bd-4748-b50b-5cc37e0fdaa3" providerId="ADAL" clId="{58AAB240-BB3C-43BA-87E9-80C5D70C8BCC}" dt="2026-09-11T16:05:32.372" v="1467" actId="1076"/>
-          <ac:cxnSpMkLst>
-            <pc:docMk/>
-            <pc:sldMk cId="4013437199" sldId="259"/>
-            <ac:cxnSpMk id="264" creationId="{82323032-CC55-7B1F-EC84-1052A85723BC}"/>
-          </ac:cxnSpMkLst>
-        </pc:cxnChg>
-        <pc:cxnChg chg="add del mod">
-          <ac:chgData name="Jonah St. Hilaire" userId="9d0a7af2-d0bd-4748-b50b-5cc37e0fdaa3" providerId="ADAL" clId="{58AAB240-BB3C-43BA-87E9-80C5D70C8BCC}" dt="2026-09-11T16:35:38.433" v="2260" actId="14100"/>
-          <ac:cxnSpMkLst>
-            <pc:docMk/>
-            <pc:sldMk cId="4013437199" sldId="259"/>
-            <ac:cxnSpMk id="265" creationId="{DC3F66B7-D934-02CF-908A-0A5398A41A3D}"/>
-          </ac:cxnSpMkLst>
-        </pc:cxnChg>
-        <pc:cxnChg chg="mod">
-          <ac:chgData name="Jonah St. Hilaire" userId="9d0a7af2-d0bd-4748-b50b-5cc37e0fdaa3" providerId="ADAL" clId="{58AAB240-BB3C-43BA-87E9-80C5D70C8BCC}" dt="2026-09-11T16:05:55.800" v="1473" actId="1035"/>
-          <ac:cxnSpMkLst>
-            <pc:docMk/>
-            <pc:sldMk cId="4013437199" sldId="259"/>
-            <ac:cxnSpMk id="267" creationId="{700AB4B6-2E91-3501-15BA-EA507AA580A4}"/>
-          </ac:cxnSpMkLst>
-        </pc:cxnChg>
-        <pc:cxnChg chg="mod">
-          <ac:chgData name="Jonah St. Hilaire" userId="9d0a7af2-d0bd-4748-b50b-5cc37e0fdaa3" providerId="ADAL" clId="{58AAB240-BB3C-43BA-87E9-80C5D70C8BCC}" dt="2026-09-11T16:06:22.257" v="1483" actId="1037"/>
-          <ac:cxnSpMkLst>
-            <pc:docMk/>
-            <pc:sldMk cId="4013437199" sldId="259"/>
-            <ac:cxnSpMk id="269" creationId="{17B2510F-03ED-B4BA-1F74-AB23808C61A3}"/>
-          </ac:cxnSpMkLst>
-        </pc:cxnChg>
-        <pc:cxnChg chg="add del mod">
-          <ac:chgData name="Jonah St. Hilaire" userId="9d0a7af2-d0bd-4748-b50b-5cc37e0fdaa3" providerId="ADAL" clId="{58AAB240-BB3C-43BA-87E9-80C5D70C8BCC}" dt="2026-09-11T16:35:31.601" v="2259" actId="14100"/>
-          <ac:cxnSpMkLst>
-            <pc:docMk/>
-            <pc:sldMk cId="4013437199" sldId="259"/>
-            <ac:cxnSpMk id="273" creationId="{0F9F0883-A4F5-0D5E-6AFA-D48125417783}"/>
-          </ac:cxnSpMkLst>
-        </pc:cxnChg>
-        <pc:cxnChg chg="add mod">
-          <ac:chgData name="Jonah St. Hilaire" userId="9d0a7af2-d0bd-4748-b50b-5cc37e0fdaa3" providerId="ADAL" clId="{58AAB240-BB3C-43BA-87E9-80C5D70C8BCC}" dt="2026-09-11T16:35:05.924" v="2258" actId="1038"/>
-          <ac:cxnSpMkLst>
-            <pc:docMk/>
-            <pc:sldMk cId="4013437199" sldId="259"/>
-            <ac:cxnSpMk id="279" creationId="{7618F4E2-536C-6367-4854-095DBBF1E735}"/>
-          </ac:cxnSpMkLst>
-        </pc:cxnChg>
-        <pc:cxnChg chg="add mod">
-          <ac:chgData name="Jonah St. Hilaire" userId="9d0a7af2-d0bd-4748-b50b-5cc37e0fdaa3" providerId="ADAL" clId="{58AAB240-BB3C-43BA-87E9-80C5D70C8BCC}" dt="2026-09-11T17:02:01.632" v="2947" actId="692"/>
-          <ac:cxnSpMkLst>
-            <pc:docMk/>
-            <pc:sldMk cId="4013437199" sldId="259"/>
-            <ac:cxnSpMk id="281" creationId="{066A4642-03A5-2A51-98F9-8847A14361A6}"/>
-          </ac:cxnSpMkLst>
-        </pc:cxnChg>
-        <pc:cxnChg chg="add mod">
-          <ac:chgData name="Jonah St. Hilaire" userId="9d0a7af2-d0bd-4748-b50b-5cc37e0fdaa3" providerId="ADAL" clId="{58AAB240-BB3C-43BA-87E9-80C5D70C8BCC}" dt="2026-09-11T17:02:04.379" v="2948" actId="692"/>
-          <ac:cxnSpMkLst>
-            <pc:docMk/>
-            <pc:sldMk cId="4013437199" sldId="259"/>
-            <ac:cxnSpMk id="282" creationId="{D6C267BD-1B91-E90F-FC38-83C7B9A30959}"/>
-          </ac:cxnSpMkLst>
-        </pc:cxnChg>
-        <pc:cxnChg chg="add mod">
-          <ac:chgData name="Jonah St. Hilaire" userId="9d0a7af2-d0bd-4748-b50b-5cc37e0fdaa3" providerId="ADAL" clId="{58AAB240-BB3C-43BA-87E9-80C5D70C8BCC}" dt="2026-09-11T17:01:53.291" v="2945" actId="692"/>
-          <ac:cxnSpMkLst>
-            <pc:docMk/>
-            <pc:sldMk cId="4013437199" sldId="259"/>
-            <ac:cxnSpMk id="324" creationId="{8076F3DF-1B08-A123-1EB2-9C82504C8428}"/>
-          </ac:cxnSpMkLst>
-        </pc:cxnChg>
-        <pc:cxnChg chg="add mod">
-          <ac:chgData name="Jonah St. Hilaire" userId="9d0a7af2-d0bd-4748-b50b-5cc37e0fdaa3" providerId="ADAL" clId="{58AAB240-BB3C-43BA-87E9-80C5D70C8BCC}" dt="2026-09-11T17:01:50.506" v="2944" actId="692"/>
-          <ac:cxnSpMkLst>
-            <pc:docMk/>
-            <pc:sldMk cId="4013437199" sldId="259"/>
-            <ac:cxnSpMk id="333" creationId="{A9EE24EC-0290-83F9-F1A6-C891EA44B546}"/>
-          </ac:cxnSpMkLst>
-        </pc:cxnChg>
-        <pc:cxnChg chg="add mod">
-          <ac:chgData name="Jonah St. Hilaire" userId="9d0a7af2-d0bd-4748-b50b-5cc37e0fdaa3" providerId="ADAL" clId="{58AAB240-BB3C-43BA-87E9-80C5D70C8BCC}" dt="2026-09-11T17:01:55.451" v="2946" actId="692"/>
-          <ac:cxnSpMkLst>
-            <pc:docMk/>
-            <pc:sldMk cId="4013437199" sldId="259"/>
-            <ac:cxnSpMk id="334" creationId="{D9E7C3BC-B92E-AA9B-FCC6-FE1315A3A36E}"/>
-          </ac:cxnSpMkLst>
-        </pc:cxnChg>
-        <pc:cxnChg chg="add mod">
-          <ac:chgData name="Jonah St. Hilaire" userId="9d0a7af2-d0bd-4748-b50b-5cc37e0fdaa3" providerId="ADAL" clId="{58AAB240-BB3C-43BA-87E9-80C5D70C8BCC}" dt="2026-09-11T17:01:43.693" v="2942" actId="692"/>
-          <ac:cxnSpMkLst>
-            <pc:docMk/>
-            <pc:sldMk cId="4013437199" sldId="259"/>
-            <ac:cxnSpMk id="356" creationId="{C137458F-D7F6-2A49-10D6-EA5805EC9ACA}"/>
-          </ac:cxnSpMkLst>
-        </pc:cxnChg>
-        <pc:cxnChg chg="add mod">
-          <ac:chgData name="Jonah St. Hilaire" userId="9d0a7af2-d0bd-4748-b50b-5cc37e0fdaa3" providerId="ADAL" clId="{58AAB240-BB3C-43BA-87E9-80C5D70C8BCC}" dt="2026-09-11T17:01:46.124" v="2943" actId="692"/>
-          <ac:cxnSpMkLst>
-            <pc:docMk/>
-            <pc:sldMk cId="4013437199" sldId="259"/>
-            <ac:cxnSpMk id="357" creationId="{76F9DE1E-207C-ACB5-0605-03C064A8D003}"/>
-          </ac:cxnSpMkLst>
-        </pc:cxnChg>
-        <pc:cxnChg chg="add mod">
-          <ac:chgData name="Jonah St. Hilaire" userId="9d0a7af2-d0bd-4748-b50b-5cc37e0fdaa3" providerId="ADAL" clId="{58AAB240-BB3C-43BA-87E9-80C5D70C8BCC}" dt="2026-09-11T17:01:36.971" v="2941" actId="692"/>
-          <ac:cxnSpMkLst>
-            <pc:docMk/>
-            <pc:sldMk cId="4013437199" sldId="259"/>
-            <ac:cxnSpMk id="362" creationId="{7A18F6CE-E48B-DCBF-894E-5BE4D5B192A8}"/>
-          </ac:cxnSpMkLst>
-        </pc:cxnChg>
-        <pc:cxnChg chg="add mod">
-          <ac:chgData name="Jonah St. Hilaire" userId="9d0a7af2-d0bd-4748-b50b-5cc37e0fdaa3" providerId="ADAL" clId="{58AAB240-BB3C-43BA-87E9-80C5D70C8BCC}" dt="2026-09-11T17:01:33.187" v="2940" actId="692"/>
-          <ac:cxnSpMkLst>
-            <pc:docMk/>
-            <pc:sldMk cId="4013437199" sldId="259"/>
-            <ac:cxnSpMk id="363" creationId="{C6F45FA7-0DA6-6109-DDF8-B86FD9658613}"/>
-          </ac:cxnSpMkLst>
-        </pc:cxnChg>
-      </pc:sldChg>
-      <pc:sldChg chg="addSp delSp modSp new mod ord">
-        <pc:chgData name="Jonah St. Hilaire" userId="9d0a7af2-d0bd-4748-b50b-5cc37e0fdaa3" providerId="ADAL" clId="{58AAB240-BB3C-43BA-87E9-80C5D70C8BCC}" dt="2026-09-14T20:46:04.549" v="4527" actId="1076"/>
+      <pc:sldChg chg="delSp modSp mod">
+        <pc:chgData name="Jonah St. Hilaire" userId="9d0a7af2-d0bd-4748-b50b-5cc37e0fdaa3" providerId="ADAL" clId="{58AAB240-BB3C-43BA-87E9-80C5D70C8BCC}" dt="2026-10-29T14:42:10.105" v="5419" actId="1076"/>
         <pc:sldMkLst>
           <pc:docMk/>
           <pc:sldMk cId="3939624714" sldId="260"/>
         </pc:sldMkLst>
-        <pc:spChg chg="add mod">
-          <ac:chgData name="Jonah St. Hilaire" userId="9d0a7af2-d0bd-4748-b50b-5cc37e0fdaa3" providerId="ADAL" clId="{58AAB240-BB3C-43BA-87E9-80C5D70C8BCC}" dt="2026-09-14T20:45:23.476" v="4511" actId="1076"/>
-          <ac:spMkLst>
-            <pc:docMk/>
-            <pc:sldMk cId="3939624714" sldId="260"/>
-            <ac:spMk id="3" creationId="{C3BBE6A5-3C97-F5B0-6863-9B56ADA7844D}"/>
-          </ac:spMkLst>
-        </pc:spChg>
-        <pc:spChg chg="add mod">
-          <ac:chgData name="Jonah St. Hilaire" userId="9d0a7af2-d0bd-4748-b50b-5cc37e0fdaa3" providerId="ADAL" clId="{58AAB240-BB3C-43BA-87E9-80C5D70C8BCC}" dt="2026-09-14T20:45:27.605" v="4512" actId="1076"/>
-          <ac:spMkLst>
-            <pc:docMk/>
-            <pc:sldMk cId="3939624714" sldId="260"/>
-            <ac:spMk id="5" creationId="{D47D480B-E811-86A6-5D2C-A562B8EB082B}"/>
-          </ac:spMkLst>
-        </pc:spChg>
-        <pc:spChg chg="add mod">
-          <ac:chgData name="Jonah St. Hilaire" userId="9d0a7af2-d0bd-4748-b50b-5cc37e0fdaa3" providerId="ADAL" clId="{58AAB240-BB3C-43BA-87E9-80C5D70C8BCC}" dt="2026-09-14T20:46:04.549" v="4527" actId="1076"/>
-          <ac:spMkLst>
-            <pc:docMk/>
-            <pc:sldMk cId="3939624714" sldId="260"/>
-            <ac:spMk id="7" creationId="{50782D2E-93E4-C2B2-9252-B8B897A66EA3}"/>
-          </ac:spMkLst>
-        </pc:spChg>
-        <pc:spChg chg="mod">
-          <ac:chgData name="Jonah St. Hilaire" userId="9d0a7af2-d0bd-4748-b50b-5cc37e0fdaa3" providerId="ADAL" clId="{58AAB240-BB3C-43BA-87E9-80C5D70C8BCC}" dt="2026-09-11T19:19:34.284" v="3885" actId="1036"/>
-          <ac:spMkLst>
-            <pc:docMk/>
-            <pc:sldMk cId="3939624714" sldId="260"/>
-            <ac:spMk id="37" creationId="{FBDFE451-9839-FFFD-F25D-F5BBD801412D}"/>
-          </ac:spMkLst>
-        </pc:spChg>
-        <pc:spChg chg="mod">
-          <ac:chgData name="Jonah St. Hilaire" userId="9d0a7af2-d0bd-4748-b50b-5cc37e0fdaa3" providerId="ADAL" clId="{58AAB240-BB3C-43BA-87E9-80C5D70C8BCC}" dt="2026-09-11T19:01:08.546" v="3378" actId="1035"/>
-          <ac:spMkLst>
-            <pc:docMk/>
-            <pc:sldMk cId="3939624714" sldId="260"/>
-            <ac:spMk id="38" creationId="{9B3E3F47-0FD2-6065-0067-D6DD1154581B}"/>
-          </ac:spMkLst>
-        </pc:spChg>
-        <pc:spChg chg="mod">
-          <ac:chgData name="Jonah St. Hilaire" userId="9d0a7af2-d0bd-4748-b50b-5cc37e0fdaa3" providerId="ADAL" clId="{58AAB240-BB3C-43BA-87E9-80C5D70C8BCC}" dt="2026-09-11T19:01:01.660" v="3361" actId="1036"/>
-          <ac:spMkLst>
-            <pc:docMk/>
-            <pc:sldMk cId="3939624714" sldId="260"/>
-            <ac:spMk id="48" creationId="{5CAED1DB-7B4E-FA70-92F3-BD78C6D871E0}"/>
-          </ac:spMkLst>
-        </pc:spChg>
-        <pc:spChg chg="mod">
-          <ac:chgData name="Jonah St. Hilaire" userId="9d0a7af2-d0bd-4748-b50b-5cc37e0fdaa3" providerId="ADAL" clId="{58AAB240-BB3C-43BA-87E9-80C5D70C8BCC}" dt="2026-09-11T19:19:28.566" v="3881" actId="1036"/>
-          <ac:spMkLst>
-            <pc:docMk/>
-            <pc:sldMk cId="3939624714" sldId="260"/>
-            <ac:spMk id="49" creationId="{B93323AD-BDAC-30E0-3792-C1ACD85790DC}"/>
-          </ac:spMkLst>
-        </pc:spChg>
-        <pc:spChg chg="mod">
-          <ac:chgData name="Jonah St. Hilaire" userId="9d0a7af2-d0bd-4748-b50b-5cc37e0fdaa3" providerId="ADAL" clId="{58AAB240-BB3C-43BA-87E9-80C5D70C8BCC}" dt="2026-09-11T19:01:31.102" v="3429" actId="1035"/>
-          <ac:spMkLst>
-            <pc:docMk/>
-            <pc:sldMk cId="3939624714" sldId="260"/>
-            <ac:spMk id="50" creationId="{C829D976-CFD4-B889-F33F-996F3602185E}"/>
-          </ac:spMkLst>
-        </pc:spChg>
-        <pc:spChg chg="mod">
-          <ac:chgData name="Jonah St. Hilaire" userId="9d0a7af2-d0bd-4748-b50b-5cc37e0fdaa3" providerId="ADAL" clId="{58AAB240-BB3C-43BA-87E9-80C5D70C8BCC}" dt="2026-09-11T19:01:24.260" v="3412" actId="1036"/>
-          <ac:spMkLst>
-            <pc:docMk/>
-            <pc:sldMk cId="3939624714" sldId="260"/>
-            <ac:spMk id="54" creationId="{1F527208-CE83-9CC8-0F15-13A809D22C71}"/>
-          </ac:spMkLst>
-        </pc:spChg>
-        <pc:spChg chg="mod">
-          <ac:chgData name="Jonah St. Hilaire" userId="9d0a7af2-d0bd-4748-b50b-5cc37e0fdaa3" providerId="ADAL" clId="{58AAB240-BB3C-43BA-87E9-80C5D70C8BCC}" dt="2026-09-11T18:56:13.362" v="3026" actId="403"/>
-          <ac:spMkLst>
-            <pc:docMk/>
-            <pc:sldMk cId="3939624714" sldId="260"/>
-            <ac:spMk id="58" creationId="{8C220D67-50CF-9A97-B5D8-0EDF5C7C5878}"/>
-          </ac:spMkLst>
-        </pc:spChg>
-        <pc:spChg chg="add mod">
-          <ac:chgData name="Jonah St. Hilaire" userId="9d0a7af2-d0bd-4748-b50b-5cc37e0fdaa3" providerId="ADAL" clId="{58AAB240-BB3C-43BA-87E9-80C5D70C8BCC}" dt="2026-09-11T19:08:51.004" v="3564" actId="6549"/>
-          <ac:spMkLst>
-            <pc:docMk/>
-            <pc:sldMk cId="3939624714" sldId="260"/>
-            <ac:spMk id="62" creationId="{CF6368D6-3F24-A703-3AFB-F5F085D84E79}"/>
-          </ac:spMkLst>
-        </pc:spChg>
-        <pc:spChg chg="mod">
-          <ac:chgData name="Jonah St. Hilaire" userId="9d0a7af2-d0bd-4748-b50b-5cc37e0fdaa3" providerId="ADAL" clId="{58AAB240-BB3C-43BA-87E9-80C5D70C8BCC}" dt="2026-09-11T19:09:45.596" v="3587" actId="1076"/>
-          <ac:spMkLst>
-            <pc:docMk/>
-            <pc:sldMk cId="3939624714" sldId="260"/>
-            <ac:spMk id="63" creationId="{9AE10280-1EC7-1238-A8B9-006F1215771C}"/>
-          </ac:spMkLst>
-        </pc:spChg>
-        <pc:spChg chg="mod">
-          <ac:chgData name="Jonah St. Hilaire" userId="9d0a7af2-d0bd-4748-b50b-5cc37e0fdaa3" providerId="ADAL" clId="{58AAB240-BB3C-43BA-87E9-80C5D70C8BCC}" dt="2026-09-11T19:09:32.234" v="3585" actId="1076"/>
-          <ac:spMkLst>
-            <pc:docMk/>
-            <pc:sldMk cId="3939624714" sldId="260"/>
-            <ac:spMk id="64" creationId="{9FC05BC8-2172-47A6-5D2D-7377AE1E6A9A}"/>
-          </ac:spMkLst>
-        </pc:spChg>
-        <pc:spChg chg="mod">
-          <ac:chgData name="Jonah St. Hilaire" userId="9d0a7af2-d0bd-4748-b50b-5cc37e0fdaa3" providerId="ADAL" clId="{58AAB240-BB3C-43BA-87E9-80C5D70C8BCC}" dt="2026-09-11T19:19:54.871" v="3893" actId="1036"/>
-          <ac:spMkLst>
-            <pc:docMk/>
-            <pc:sldMk cId="3939624714" sldId="260"/>
-            <ac:spMk id="69" creationId="{9EFDBFE4-E150-DD87-9D13-C9B88334697D}"/>
-          </ac:spMkLst>
-        </pc:spChg>
-        <pc:spChg chg="mod">
-          <ac:chgData name="Jonah St. Hilaire" userId="9d0a7af2-d0bd-4748-b50b-5cc37e0fdaa3" providerId="ADAL" clId="{58AAB240-BB3C-43BA-87E9-80C5D70C8BCC}" dt="2026-09-11T19:01:50.276" v="3461" actId="1036"/>
-          <ac:spMkLst>
-            <pc:docMk/>
-            <pc:sldMk cId="3939624714" sldId="260"/>
-            <ac:spMk id="70" creationId="{8AF26AEA-2423-ECDC-05F3-9301A73BBC77}"/>
-          </ac:spMkLst>
-        </pc:spChg>
-        <pc:spChg chg="mod">
-          <ac:chgData name="Jonah St. Hilaire" userId="9d0a7af2-d0bd-4748-b50b-5cc37e0fdaa3" providerId="ADAL" clId="{58AAB240-BB3C-43BA-87E9-80C5D70C8BCC}" dt="2026-09-11T19:01:50.276" v="3461" actId="1036"/>
-          <ac:spMkLst>
-            <pc:docMk/>
-            <pc:sldMk cId="3939624714" sldId="260"/>
-            <ac:spMk id="71" creationId="{14E5489B-AFC9-D6C9-A525-293DEADAEE79}"/>
-          </ac:spMkLst>
-        </pc:spChg>
-        <pc:spChg chg="mod">
-          <ac:chgData name="Jonah St. Hilaire" userId="9d0a7af2-d0bd-4748-b50b-5cc37e0fdaa3" providerId="ADAL" clId="{58AAB240-BB3C-43BA-87E9-80C5D70C8BCC}" dt="2026-09-11T19:03:27.058" v="3493" actId="1037"/>
-          <ac:spMkLst>
-            <pc:docMk/>
-            <pc:sldMk cId="3939624714" sldId="260"/>
-            <ac:spMk id="76" creationId="{4FA48348-CA0D-A5D6-5065-92F44A379399}"/>
-          </ac:spMkLst>
-        </pc:spChg>
-        <pc:spChg chg="mod">
-          <ac:chgData name="Jonah St. Hilaire" userId="9d0a7af2-d0bd-4748-b50b-5cc37e0fdaa3" providerId="ADAL" clId="{58AAB240-BB3C-43BA-87E9-80C5D70C8BCC}" dt="2026-09-11T19:03:27.058" v="3493" actId="1037"/>
-          <ac:spMkLst>
-            <pc:docMk/>
-            <pc:sldMk cId="3939624714" sldId="260"/>
-            <ac:spMk id="77" creationId="{29C995B9-80E2-829A-BE5D-BBEEDEFB8146}"/>
-          </ac:spMkLst>
-        </pc:spChg>
-        <pc:spChg chg="mod">
-          <ac:chgData name="Jonah St. Hilaire" userId="9d0a7af2-d0bd-4748-b50b-5cc37e0fdaa3" providerId="ADAL" clId="{58AAB240-BB3C-43BA-87E9-80C5D70C8BCC}" dt="2026-09-11T19:03:27.058" v="3493" actId="1037"/>
-          <ac:spMkLst>
-            <pc:docMk/>
-            <pc:sldMk cId="3939624714" sldId="260"/>
-            <ac:spMk id="78" creationId="{BDB6BE53-AF40-DC13-B811-C800FE999F05}"/>
-          </ac:spMkLst>
-        </pc:spChg>
-        <pc:spChg chg="mod">
-          <ac:chgData name="Jonah St. Hilaire" userId="9d0a7af2-d0bd-4748-b50b-5cc37e0fdaa3" providerId="ADAL" clId="{58AAB240-BB3C-43BA-87E9-80C5D70C8BCC}" dt="2026-09-11T19:30:37.203" v="4206" actId="1035"/>
-          <ac:spMkLst>
-            <pc:docMk/>
-            <pc:sldMk cId="3939624714" sldId="260"/>
-            <ac:spMk id="86" creationId="{44F634DB-A780-4B04-CB0F-D71DF45B8C19}"/>
-          </ac:spMkLst>
-        </pc:spChg>
-        <pc:spChg chg="mod">
-          <ac:chgData name="Jonah St. Hilaire" userId="9d0a7af2-d0bd-4748-b50b-5cc37e0fdaa3" providerId="ADAL" clId="{58AAB240-BB3C-43BA-87E9-80C5D70C8BCC}" dt="2026-09-11T19:30:44.061" v="4214" actId="1036"/>
-          <ac:spMkLst>
-            <pc:docMk/>
-            <pc:sldMk cId="3939624714" sldId="260"/>
-            <ac:spMk id="87" creationId="{4C4B0550-9F66-3AE6-96A7-FC81C44C7784}"/>
-          </ac:spMkLst>
-        </pc:spChg>
-        <pc:spChg chg="add mod ord">
-          <ac:chgData name="Jonah St. Hilaire" userId="9d0a7af2-d0bd-4748-b50b-5cc37e0fdaa3" providerId="ADAL" clId="{58AAB240-BB3C-43BA-87E9-80C5D70C8BCC}" dt="2026-09-11T19:00:20.567" v="3300" actId="1076"/>
-          <ac:spMkLst>
-            <pc:docMk/>
-            <pc:sldMk cId="3939624714" sldId="260"/>
-            <ac:spMk id="96" creationId="{249278D5-3A21-D694-1293-4B0578EA938E}"/>
-          </ac:spMkLst>
-        </pc:spChg>
-        <pc:spChg chg="add mod">
-          <ac:chgData name="Jonah St. Hilaire" userId="9d0a7af2-d0bd-4748-b50b-5cc37e0fdaa3" providerId="ADAL" clId="{58AAB240-BB3C-43BA-87E9-80C5D70C8BCC}" dt="2026-09-11T18:58:43.306" v="3114" actId="1038"/>
-          <ac:spMkLst>
-            <pc:docMk/>
-            <pc:sldMk cId="3939624714" sldId="260"/>
-            <ac:spMk id="98" creationId="{B4677F72-73BF-6C82-69F1-359AFD66CBF2}"/>
-          </ac:spMkLst>
-        </pc:spChg>
-        <pc:spChg chg="add mod">
-          <ac:chgData name="Jonah St. Hilaire" userId="9d0a7af2-d0bd-4748-b50b-5cc37e0fdaa3" providerId="ADAL" clId="{58AAB240-BB3C-43BA-87E9-80C5D70C8BCC}" dt="2026-09-11T19:19:22.584" v="3877" actId="1076"/>
-          <ac:spMkLst>
-            <pc:docMk/>
-            <pc:sldMk cId="3939624714" sldId="260"/>
-            <ac:spMk id="100" creationId="{E9A23ADF-0B78-C5AC-925A-E664992EC5FE}"/>
-          </ac:spMkLst>
-        </pc:spChg>
-        <pc:spChg chg="mod">
-          <ac:chgData name="Jonah St. Hilaire" userId="9d0a7af2-d0bd-4748-b50b-5cc37e0fdaa3" providerId="ADAL" clId="{58AAB240-BB3C-43BA-87E9-80C5D70C8BCC}" dt="2026-09-11T17:05:53.771" v="2998" actId="20577"/>
+        <pc:spChg chg="mod topLvl">
+          <ac:chgData name="Jonah St. Hilaire" userId="9d0a7af2-d0bd-4748-b50b-5cc37e0fdaa3" providerId="ADAL" clId="{58AAB240-BB3C-43BA-87E9-80C5D70C8BCC}" dt="2026-10-29T14:40:40.050" v="5414" actId="165"/>
           <ac:spMkLst>
             <pc:docMk/>
             <pc:sldMk cId="3939624714" sldId="260"/>
             <ac:spMk id="102" creationId="{9B1082D1-6CDD-9B18-C7DD-8265702DAFCC}"/>
           </ac:spMkLst>
         </pc:spChg>
-        <pc:spChg chg="add mod">
-          <ac:chgData name="Jonah St. Hilaire" userId="9d0a7af2-d0bd-4748-b50b-5cc37e0fdaa3" providerId="ADAL" clId="{58AAB240-BB3C-43BA-87E9-80C5D70C8BCC}" dt="2026-09-11T19:00:45.380" v="3322" actId="1036"/>
-          <ac:spMkLst>
-            <pc:docMk/>
-            <pc:sldMk cId="3939624714" sldId="260"/>
-            <ac:spMk id="104" creationId="{66AD3431-F0EF-38E0-E861-D875E9DB74FF}"/>
-          </ac:spMkLst>
-        </pc:spChg>
-        <pc:spChg chg="add mod">
-          <ac:chgData name="Jonah St. Hilaire" userId="9d0a7af2-d0bd-4748-b50b-5cc37e0fdaa3" providerId="ADAL" clId="{58AAB240-BB3C-43BA-87E9-80C5D70C8BCC}" dt="2026-09-11T19:20:11.231" v="3896" actId="1036"/>
-          <ac:spMkLst>
-            <pc:docMk/>
-            <pc:sldMk cId="3939624714" sldId="260"/>
-            <ac:spMk id="105" creationId="{CCC12389-8864-F569-77A6-612A551E7258}"/>
-          </ac:spMkLst>
-        </pc:spChg>
-        <pc:spChg chg="add mod">
-          <ac:chgData name="Jonah St. Hilaire" userId="9d0a7af2-d0bd-4748-b50b-5cc37e0fdaa3" providerId="ADAL" clId="{58AAB240-BB3C-43BA-87E9-80C5D70C8BCC}" dt="2026-09-11T19:22:55.957" v="4058" actId="1038"/>
-          <ac:spMkLst>
-            <pc:docMk/>
-            <pc:sldMk cId="3939624714" sldId="260"/>
-            <ac:spMk id="112" creationId="{528229A5-90A8-8C9D-BA8F-4A3FFAFF15DB}"/>
-          </ac:spMkLst>
-        </pc:spChg>
-        <pc:spChg chg="add mod">
-          <ac:chgData name="Jonah St. Hilaire" userId="9d0a7af2-d0bd-4748-b50b-5cc37e0fdaa3" providerId="ADAL" clId="{58AAB240-BB3C-43BA-87E9-80C5D70C8BCC}" dt="2026-09-11T19:22:55.957" v="4058" actId="1038"/>
-          <ac:spMkLst>
-            <pc:docMk/>
-            <pc:sldMk cId="3939624714" sldId="260"/>
-            <ac:spMk id="113" creationId="{DE73AA42-3F59-F387-58DD-97566C67D03F}"/>
-          </ac:spMkLst>
-        </pc:spChg>
-        <pc:spChg chg="add mod">
-          <ac:chgData name="Jonah St. Hilaire" userId="9d0a7af2-d0bd-4748-b50b-5cc37e0fdaa3" providerId="ADAL" clId="{58AAB240-BB3C-43BA-87E9-80C5D70C8BCC}" dt="2026-09-11T19:12:50.012" v="3757" actId="1076"/>
-          <ac:spMkLst>
-            <pc:docMk/>
-            <pc:sldMk cId="3939624714" sldId="260"/>
-            <ac:spMk id="130" creationId="{0A140CFC-A511-65AC-7E44-CDCE0938D580}"/>
-          </ac:spMkLst>
-        </pc:spChg>
-        <pc:spChg chg="add mod">
-          <ac:chgData name="Jonah St. Hilaire" userId="9d0a7af2-d0bd-4748-b50b-5cc37e0fdaa3" providerId="ADAL" clId="{58AAB240-BB3C-43BA-87E9-80C5D70C8BCC}" dt="2026-09-11T19:12:45.446" v="3756" actId="1076"/>
-          <ac:spMkLst>
-            <pc:docMk/>
-            <pc:sldMk cId="3939624714" sldId="260"/>
-            <ac:spMk id="132" creationId="{B5F3CDE1-66F7-7535-ECAC-803B9C7BAC7C}"/>
-          </ac:spMkLst>
-        </pc:spChg>
-        <pc:spChg chg="add mod">
-          <ac:chgData name="Jonah St. Hilaire" userId="9d0a7af2-d0bd-4748-b50b-5cc37e0fdaa3" providerId="ADAL" clId="{58AAB240-BB3C-43BA-87E9-80C5D70C8BCC}" dt="2026-09-11T19:12:18.038" v="3745"/>
-          <ac:spMkLst>
-            <pc:docMk/>
-            <pc:sldMk cId="3939624714" sldId="260"/>
-            <ac:spMk id="133" creationId="{DE9192D8-A5F1-34BB-4891-DCA8CAFF9432}"/>
-          </ac:spMkLst>
-        </pc:spChg>
-        <pc:spChg chg="add mod">
-          <ac:chgData name="Jonah St. Hilaire" userId="9d0a7af2-d0bd-4748-b50b-5cc37e0fdaa3" providerId="ADAL" clId="{58AAB240-BB3C-43BA-87E9-80C5D70C8BCC}" dt="2026-09-11T19:27:20.822" v="4155" actId="1036"/>
-          <ac:spMkLst>
-            <pc:docMk/>
-            <pc:sldMk cId="3939624714" sldId="260"/>
-            <ac:spMk id="134" creationId="{51DBB2B5-D36A-652C-70A5-852F0397F15C}"/>
-          </ac:spMkLst>
-        </pc:spChg>
-        <pc:spChg chg="add mod">
-          <ac:chgData name="Jonah St. Hilaire" userId="9d0a7af2-d0bd-4748-b50b-5cc37e0fdaa3" providerId="ADAL" clId="{58AAB240-BB3C-43BA-87E9-80C5D70C8BCC}" dt="2026-09-11T19:31:22.995" v="4220" actId="403"/>
-          <ac:spMkLst>
-            <pc:docMk/>
-            <pc:sldMk cId="3939624714" sldId="260"/>
-            <ac:spMk id="141" creationId="{742D2B03-1F23-9669-2D1E-CE9D366348C3}"/>
-          </ac:spMkLst>
-        </pc:spChg>
-        <pc:spChg chg="add mod">
-          <ac:chgData name="Jonah St. Hilaire" userId="9d0a7af2-d0bd-4748-b50b-5cc37e0fdaa3" providerId="ADAL" clId="{58AAB240-BB3C-43BA-87E9-80C5D70C8BCC}" dt="2026-09-11T19:31:17.727" v="4218" actId="404"/>
-          <ac:spMkLst>
-            <pc:docMk/>
-            <pc:sldMk cId="3939624714" sldId="260"/>
-            <ac:spMk id="145" creationId="{DA1019A9-2D4F-511A-761B-48D022936F52}"/>
-          </ac:spMkLst>
-        </pc:spChg>
-        <pc:spChg chg="add mod">
-          <ac:chgData name="Jonah St. Hilaire" userId="9d0a7af2-d0bd-4748-b50b-5cc37e0fdaa3" providerId="ADAL" clId="{58AAB240-BB3C-43BA-87E9-80C5D70C8BCC}" dt="2026-09-11T19:16:54.406" v="3807" actId="1076"/>
-          <ac:spMkLst>
-            <pc:docMk/>
-            <pc:sldMk cId="3939624714" sldId="260"/>
-            <ac:spMk id="150" creationId="{17961D1E-37EF-54E7-4FB2-232A69AA401C}"/>
-          </ac:spMkLst>
-        </pc:spChg>
-        <pc:spChg chg="add mod ord">
-          <ac:chgData name="Jonah St. Hilaire" userId="9d0a7af2-d0bd-4748-b50b-5cc37e0fdaa3" providerId="ADAL" clId="{58AAB240-BB3C-43BA-87E9-80C5D70C8BCC}" dt="2026-09-11T19:30:01.483" v="4181" actId="166"/>
-          <ac:spMkLst>
-            <pc:docMk/>
-            <pc:sldMk cId="3939624714" sldId="260"/>
-            <ac:spMk id="161" creationId="{E80EA663-04E1-A6F5-830B-C5D4E757B494}"/>
-          </ac:spMkLst>
-        </pc:spChg>
-        <pc:spChg chg="add mod">
-          <ac:chgData name="Jonah St. Hilaire" userId="9d0a7af2-d0bd-4748-b50b-5cc37e0fdaa3" providerId="ADAL" clId="{58AAB240-BB3C-43BA-87E9-80C5D70C8BCC}" dt="2026-09-11T19:31:40.879" v="4224" actId="692"/>
-          <ac:spMkLst>
-            <pc:docMk/>
-            <pc:sldMk cId="3939624714" sldId="260"/>
-            <ac:spMk id="164" creationId="{F47238B4-2A10-4554-DE0A-2E422D35DF69}"/>
-          </ac:spMkLst>
-        </pc:spChg>
-        <pc:spChg chg="add mod">
-          <ac:chgData name="Jonah St. Hilaire" userId="9d0a7af2-d0bd-4748-b50b-5cc37e0fdaa3" providerId="ADAL" clId="{58AAB240-BB3C-43BA-87E9-80C5D70C8BCC}" dt="2026-09-11T19:28:14.640" v="4161" actId="1035"/>
-          <ac:spMkLst>
-            <pc:docMk/>
-            <pc:sldMk cId="3939624714" sldId="260"/>
-            <ac:spMk id="166" creationId="{10DAA87F-9EE7-A9A1-E820-C947D9E52EAC}"/>
-          </ac:spMkLst>
-        </pc:spChg>
-        <pc:spChg chg="add mod">
-          <ac:chgData name="Jonah St. Hilaire" userId="9d0a7af2-d0bd-4748-b50b-5cc37e0fdaa3" providerId="ADAL" clId="{58AAB240-BB3C-43BA-87E9-80C5D70C8BCC}" dt="2026-09-11T19:28:20.503" v="4162" actId="1076"/>
-          <ac:spMkLst>
-            <pc:docMk/>
-            <pc:sldMk cId="3939624714" sldId="260"/>
-            <ac:spMk id="168" creationId="{9F7236E9-0115-DE49-32E6-D9925423328A}"/>
-          </ac:spMkLst>
-        </pc:spChg>
-        <pc:spChg chg="add mod">
-          <ac:chgData name="Jonah St. Hilaire" userId="9d0a7af2-d0bd-4748-b50b-5cc37e0fdaa3" providerId="ADAL" clId="{58AAB240-BB3C-43BA-87E9-80C5D70C8BCC}" dt="2026-09-11T19:31:35.905" v="4222" actId="692"/>
-          <ac:spMkLst>
-            <pc:docMk/>
-            <pc:sldMk cId="3939624714" sldId="260"/>
-            <ac:spMk id="172" creationId="{C997BBB3-9383-64EF-9FA9-27AC2ABBDF8E}"/>
-          </ac:spMkLst>
-        </pc:spChg>
-        <pc:spChg chg="add mod">
-          <ac:chgData name="Jonah St. Hilaire" userId="9d0a7af2-d0bd-4748-b50b-5cc37e0fdaa3" providerId="ADAL" clId="{58AAB240-BB3C-43BA-87E9-80C5D70C8BCC}" dt="2026-09-11T19:26:18.319" v="4142" actId="1076"/>
-          <ac:spMkLst>
-            <pc:docMk/>
-            <pc:sldMk cId="3939624714" sldId="260"/>
-            <ac:spMk id="174" creationId="{53E67075-02A2-7A76-33B9-ADA2A7D0738E}"/>
-          </ac:spMkLst>
-        </pc:spChg>
-        <pc:spChg chg="add mod">
-          <ac:chgData name="Jonah St. Hilaire" userId="9d0a7af2-d0bd-4748-b50b-5cc37e0fdaa3" providerId="ADAL" clId="{58AAB240-BB3C-43BA-87E9-80C5D70C8BCC}" dt="2026-09-11T19:27:33.041" v="4156" actId="1076"/>
-          <ac:spMkLst>
-            <pc:docMk/>
-            <pc:sldMk cId="3939624714" sldId="260"/>
-            <ac:spMk id="176" creationId="{8D3B1A68-0757-97AB-86FE-295CA388AF45}"/>
-          </ac:spMkLst>
-        </pc:spChg>
-        <pc:spChg chg="add mod">
-          <ac:chgData name="Jonah St. Hilaire" userId="9d0a7af2-d0bd-4748-b50b-5cc37e0fdaa3" providerId="ADAL" clId="{58AAB240-BB3C-43BA-87E9-80C5D70C8BCC}" dt="2026-09-11T19:34:09.560" v="4243"/>
-          <ac:spMkLst>
-            <pc:docMk/>
-            <pc:sldMk cId="3939624714" sldId="260"/>
-            <ac:spMk id="205" creationId="{FBBE4EF6-3D1C-E4A6-E929-6044A5C248D0}"/>
-          </ac:spMkLst>
-        </pc:spChg>
-        <pc:spChg chg="add mod">
-          <ac:chgData name="Jonah St. Hilaire" userId="9d0a7af2-d0bd-4748-b50b-5cc37e0fdaa3" providerId="ADAL" clId="{58AAB240-BB3C-43BA-87E9-80C5D70C8BCC}" dt="2026-09-11T19:34:29.126" v="4252" actId="1076"/>
-          <ac:spMkLst>
-            <pc:docMk/>
-            <pc:sldMk cId="3939624714" sldId="260"/>
-            <ac:spMk id="207" creationId="{898B7E5A-375A-5176-C9F1-F05B521D91F3}"/>
-          </ac:spMkLst>
-        </pc:spChg>
-        <pc:grpChg chg="add mod">
-          <ac:chgData name="Jonah St. Hilaire" userId="9d0a7af2-d0bd-4748-b50b-5cc37e0fdaa3" providerId="ADAL" clId="{58AAB240-BB3C-43BA-87E9-80C5D70C8BCC}" dt="2026-09-11T18:55:40.122" v="3020" actId="1076"/>
+        <pc:grpChg chg="del">
+          <ac:chgData name="Jonah St. Hilaire" userId="9d0a7af2-d0bd-4748-b50b-5cc37e0fdaa3" providerId="ADAL" clId="{58AAB240-BB3C-43BA-87E9-80C5D70C8BCC}" dt="2026-10-29T14:40:40.050" v="5414" actId="165"/>
           <ac:grpSpMkLst>
             <pc:docMk/>
             <pc:sldMk cId="3939624714" sldId="260"/>
             <ac:grpSpMk id="101" creationId="{289B4344-44B1-7B7B-6582-107B59ACA215}"/>
           </ac:grpSpMkLst>
         </pc:grpChg>
-        <pc:picChg chg="mod">
-          <ac:chgData name="Jonah St. Hilaire" userId="9d0a7af2-d0bd-4748-b50b-5cc37e0fdaa3" providerId="ADAL" clId="{58AAB240-BB3C-43BA-87E9-80C5D70C8BCC}" dt="2026-09-11T17:05:26.131" v="2990"/>
+        <pc:picChg chg="mod topLvl">
+          <ac:chgData name="Jonah St. Hilaire" userId="9d0a7af2-d0bd-4748-b50b-5cc37e0fdaa3" providerId="ADAL" clId="{58AAB240-BB3C-43BA-87E9-80C5D70C8BCC}" dt="2026-10-29T14:42:10.105" v="5419" actId="1076"/>
           <ac:picMkLst>
             <pc:docMk/>
             <pc:sldMk cId="3939624714" sldId="260"/>
             <ac:picMk id="103" creationId="{B554567E-38EA-F25D-5AD3-FD5BD2ADF56C}"/>
           </ac:picMkLst>
         </pc:picChg>
-        <pc:cxnChg chg="mod">
-          <ac:chgData name="Jonah St. Hilaire" userId="9d0a7af2-d0bd-4748-b50b-5cc37e0fdaa3" providerId="ADAL" clId="{58AAB240-BB3C-43BA-87E9-80C5D70C8BCC}" dt="2026-09-11T18:58:16.086" v="3072" actId="1035"/>
-          <ac:cxnSpMkLst>
-            <pc:docMk/>
-            <pc:sldMk cId="3939624714" sldId="260"/>
-            <ac:cxnSpMk id="41" creationId="{6E9F90DC-8987-E569-754E-7AC7ECBB7066}"/>
-          </ac:cxnSpMkLst>
-        </pc:cxnChg>
-        <pc:cxnChg chg="mod">
-          <ac:chgData name="Jonah St. Hilaire" userId="9d0a7af2-d0bd-4748-b50b-5cc37e0fdaa3" providerId="ADAL" clId="{58AAB240-BB3C-43BA-87E9-80C5D70C8BCC}" dt="2026-09-11T19:19:34.284" v="3885" actId="1036"/>
-          <ac:cxnSpMkLst>
-            <pc:docMk/>
-            <pc:sldMk cId="3939624714" sldId="260"/>
-            <ac:cxnSpMk id="42" creationId="{D18FD87D-E621-3D5E-B974-0F53449B4ED3}"/>
-          </ac:cxnSpMkLst>
-        </pc:cxnChg>
-        <pc:cxnChg chg="mod">
-          <ac:chgData name="Jonah St. Hilaire" userId="9d0a7af2-d0bd-4748-b50b-5cc37e0fdaa3" providerId="ADAL" clId="{58AAB240-BB3C-43BA-87E9-80C5D70C8BCC}" dt="2026-09-11T18:58:16.086" v="3072" actId="1035"/>
-          <ac:cxnSpMkLst>
-            <pc:docMk/>
-            <pc:sldMk cId="3939624714" sldId="260"/>
-            <ac:cxnSpMk id="43" creationId="{B6EFC526-1190-3AB7-243B-3DE425F580E0}"/>
-          </ac:cxnSpMkLst>
-        </pc:cxnChg>
-        <pc:cxnChg chg="mod">
-          <ac:chgData name="Jonah St. Hilaire" userId="9d0a7af2-d0bd-4748-b50b-5cc37e0fdaa3" providerId="ADAL" clId="{58AAB240-BB3C-43BA-87E9-80C5D70C8BCC}" dt="2026-09-11T18:57:50.781" v="3070" actId="1037"/>
-          <ac:cxnSpMkLst>
-            <pc:docMk/>
-            <pc:sldMk cId="3939624714" sldId="260"/>
-            <ac:cxnSpMk id="51" creationId="{4973E29C-5678-F8AB-3DE2-DA12834F5F48}"/>
-          </ac:cxnSpMkLst>
-        </pc:cxnChg>
-        <pc:cxnChg chg="mod">
-          <ac:chgData name="Jonah St. Hilaire" userId="9d0a7af2-d0bd-4748-b50b-5cc37e0fdaa3" providerId="ADAL" clId="{58AAB240-BB3C-43BA-87E9-80C5D70C8BCC}" dt="2026-09-11T19:19:28.566" v="3881" actId="1036"/>
-          <ac:cxnSpMkLst>
-            <pc:docMk/>
-            <pc:sldMk cId="3939624714" sldId="260"/>
-            <ac:cxnSpMk id="52" creationId="{83EC3F8C-8DA3-1793-14AC-56FB6AC421EB}"/>
-          </ac:cxnSpMkLst>
-        </pc:cxnChg>
-        <pc:cxnChg chg="mod">
-          <ac:chgData name="Jonah St. Hilaire" userId="9d0a7af2-d0bd-4748-b50b-5cc37e0fdaa3" providerId="ADAL" clId="{58AAB240-BB3C-43BA-87E9-80C5D70C8BCC}" dt="2026-09-11T18:57:50.781" v="3070" actId="1037"/>
-          <ac:cxnSpMkLst>
-            <pc:docMk/>
-            <pc:sldMk cId="3939624714" sldId="260"/>
-            <ac:cxnSpMk id="53" creationId="{1A0D0277-301B-C16B-0249-1359C5F21C1F}"/>
-          </ac:cxnSpMkLst>
-        </pc:cxnChg>
-        <pc:cxnChg chg="mod">
-          <ac:chgData name="Jonah St. Hilaire" userId="9d0a7af2-d0bd-4748-b50b-5cc37e0fdaa3" providerId="ADAL" clId="{58AAB240-BB3C-43BA-87E9-80C5D70C8BCC}" dt="2026-09-11T17:06:05.538" v="3001" actId="478"/>
-          <ac:cxnSpMkLst>
-            <pc:docMk/>
-            <pc:sldMk cId="3939624714" sldId="260"/>
-            <ac:cxnSpMk id="59" creationId="{3778F81B-D88E-C816-B1ED-0FC7FA51F03D}"/>
-          </ac:cxnSpMkLst>
-        </pc:cxnChg>
-        <pc:cxnChg chg="mod">
-          <ac:chgData name="Jonah St. Hilaire" userId="9d0a7af2-d0bd-4748-b50b-5cc37e0fdaa3" providerId="ADAL" clId="{58AAB240-BB3C-43BA-87E9-80C5D70C8BCC}" dt="2026-09-11T19:19:55.379" v="3894" actId="1036"/>
-          <ac:cxnSpMkLst>
-            <pc:docMk/>
-            <pc:sldMk cId="3939624714" sldId="260"/>
-            <ac:cxnSpMk id="61" creationId="{7015D3E5-6C3F-06C8-CCBA-56702FEF2F58}"/>
-          </ac:cxnSpMkLst>
-        </pc:cxnChg>
-        <pc:cxnChg chg="mod">
-          <ac:chgData name="Jonah St. Hilaire" userId="9d0a7af2-d0bd-4748-b50b-5cc37e0fdaa3" providerId="ADAL" clId="{58AAB240-BB3C-43BA-87E9-80C5D70C8BCC}" dt="2026-09-11T19:09:45.596" v="3587" actId="1076"/>
-          <ac:cxnSpMkLst>
-            <pc:docMk/>
-            <pc:sldMk cId="3939624714" sldId="260"/>
-            <ac:cxnSpMk id="65" creationId="{F1C84F3D-D834-73FB-BC01-FBDE05687AFA}"/>
-          </ac:cxnSpMkLst>
-        </pc:cxnChg>
-        <pc:cxnChg chg="mod">
-          <ac:chgData name="Jonah St. Hilaire" userId="9d0a7af2-d0bd-4748-b50b-5cc37e0fdaa3" providerId="ADAL" clId="{58AAB240-BB3C-43BA-87E9-80C5D70C8BCC}" dt="2026-09-11T19:04:38.591" v="3505" actId="692"/>
-          <ac:cxnSpMkLst>
-            <pc:docMk/>
-            <pc:sldMk cId="3939624714" sldId="260"/>
-            <ac:cxnSpMk id="72" creationId="{B61A0E80-7B83-290C-D930-EBE748FC11A1}"/>
-          </ac:cxnSpMkLst>
-        </pc:cxnChg>
-        <pc:cxnChg chg="mod">
-          <ac:chgData name="Jonah St. Hilaire" userId="9d0a7af2-d0bd-4748-b50b-5cc37e0fdaa3" providerId="ADAL" clId="{58AAB240-BB3C-43BA-87E9-80C5D70C8BCC}" dt="2026-09-11T19:04:34.306" v="3504" actId="692"/>
-          <ac:cxnSpMkLst>
-            <pc:docMk/>
-            <pc:sldMk cId="3939624714" sldId="260"/>
-            <ac:cxnSpMk id="74" creationId="{BA13FE3F-71B2-66AB-086C-0E739BCDAB7F}"/>
-          </ac:cxnSpMkLst>
-        </pc:cxnChg>
-        <pc:cxnChg chg="mod">
-          <ac:chgData name="Jonah St. Hilaire" userId="9d0a7af2-d0bd-4748-b50b-5cc37e0fdaa3" providerId="ADAL" clId="{58AAB240-BB3C-43BA-87E9-80C5D70C8BCC}" dt="2026-09-11T19:04:41.500" v="3506" actId="692"/>
-          <ac:cxnSpMkLst>
-            <pc:docMk/>
-            <pc:sldMk cId="3939624714" sldId="260"/>
-            <ac:cxnSpMk id="75" creationId="{9BF9A0F2-F199-7A80-7DB8-D596C81B21A4}"/>
-          </ac:cxnSpMkLst>
-        </pc:cxnChg>
-        <pc:cxnChg chg="add mod">
-          <ac:chgData name="Jonah St. Hilaire" userId="9d0a7af2-d0bd-4748-b50b-5cc37e0fdaa3" providerId="ADAL" clId="{58AAB240-BB3C-43BA-87E9-80C5D70C8BCC}" dt="2026-09-11T18:59:21.810" v="3208" actId="1037"/>
-          <ac:cxnSpMkLst>
-            <pc:docMk/>
-            <pc:sldMk cId="3939624714" sldId="260"/>
-            <ac:cxnSpMk id="106" creationId="{65B0FBD1-1A7D-EE83-1661-07565DE1615F}"/>
-          </ac:cxnSpMkLst>
-        </pc:cxnChg>
-        <pc:cxnChg chg="add mod">
-          <ac:chgData name="Jonah St. Hilaire" userId="9d0a7af2-d0bd-4748-b50b-5cc37e0fdaa3" providerId="ADAL" clId="{58AAB240-BB3C-43BA-87E9-80C5D70C8BCC}" dt="2026-09-11T19:20:11.231" v="3896" actId="1036"/>
-          <ac:cxnSpMkLst>
-            <pc:docMk/>
-            <pc:sldMk cId="3939624714" sldId="260"/>
-            <ac:cxnSpMk id="107" creationId="{301AAC26-BA08-6E21-C04E-AB274846DD36}"/>
-          </ac:cxnSpMkLst>
-        </pc:cxnChg>
-        <pc:cxnChg chg="add mod">
-          <ac:chgData name="Jonah St. Hilaire" userId="9d0a7af2-d0bd-4748-b50b-5cc37e0fdaa3" providerId="ADAL" clId="{58AAB240-BB3C-43BA-87E9-80C5D70C8BCC}" dt="2026-09-11T19:22:22.873" v="4046" actId="1035"/>
-          <ac:cxnSpMkLst>
-            <pc:docMk/>
-            <pc:sldMk cId="3939624714" sldId="260"/>
-            <ac:cxnSpMk id="110" creationId="{B91F3F81-9B49-BFAE-3D76-DFB84D06DEE1}"/>
-          </ac:cxnSpMkLst>
-        </pc:cxnChg>
-        <pc:cxnChg chg="add mod">
-          <ac:chgData name="Jonah St. Hilaire" userId="9d0a7af2-d0bd-4748-b50b-5cc37e0fdaa3" providerId="ADAL" clId="{58AAB240-BB3C-43BA-87E9-80C5D70C8BCC}" dt="2026-09-11T19:22:13.449" v="4041" actId="1035"/>
-          <ac:cxnSpMkLst>
-            <pc:docMk/>
-            <pc:sldMk cId="3939624714" sldId="260"/>
-            <ac:cxnSpMk id="111" creationId="{A3374864-25AC-40E1-D491-4654C3698172}"/>
-          </ac:cxnSpMkLst>
-        </pc:cxnChg>
-        <pc:cxnChg chg="add mod">
-          <ac:chgData name="Jonah St. Hilaire" userId="9d0a7af2-d0bd-4748-b50b-5cc37e0fdaa3" providerId="ADAL" clId="{58AAB240-BB3C-43BA-87E9-80C5D70C8BCC}" dt="2026-09-11T19:09:45.596" v="3587" actId="1076"/>
-          <ac:cxnSpMkLst>
-            <pc:docMk/>
-            <pc:sldMk cId="3939624714" sldId="260"/>
-            <ac:cxnSpMk id="123" creationId="{2391AB53-EC21-7CE6-1B56-E7741565953F}"/>
-          </ac:cxnSpMkLst>
-        </pc:cxnChg>
-        <pc:cxnChg chg="add mod">
-          <ac:chgData name="Jonah St. Hilaire" userId="9d0a7af2-d0bd-4748-b50b-5cc37e0fdaa3" providerId="ADAL" clId="{58AAB240-BB3C-43BA-87E9-80C5D70C8BCC}" dt="2026-09-11T19:11:58.315" v="3738" actId="1037"/>
-          <ac:cxnSpMkLst>
-            <pc:docMk/>
-            <pc:sldMk cId="3939624714" sldId="260"/>
-            <ac:cxnSpMk id="135" creationId="{A7677BFD-5778-2AD9-4E54-B8EA3560AADD}"/>
-          </ac:cxnSpMkLst>
-        </pc:cxnChg>
-        <pc:cxnChg chg="add mod">
-          <ac:chgData name="Jonah St. Hilaire" userId="9d0a7af2-d0bd-4748-b50b-5cc37e0fdaa3" providerId="ADAL" clId="{58AAB240-BB3C-43BA-87E9-80C5D70C8BCC}" dt="2026-09-11T19:27:20.822" v="4155" actId="1036"/>
-          <ac:cxnSpMkLst>
-            <pc:docMk/>
-            <pc:sldMk cId="3939624714" sldId="260"/>
-            <ac:cxnSpMk id="136" creationId="{6EA55729-B720-0CB7-A503-3FFEF2D56B3F}"/>
-          </ac:cxnSpMkLst>
-        </pc:cxnChg>
-        <pc:cxnChg chg="add mod">
-          <ac:chgData name="Jonah St. Hilaire" userId="9d0a7af2-d0bd-4748-b50b-5cc37e0fdaa3" providerId="ADAL" clId="{58AAB240-BB3C-43BA-87E9-80C5D70C8BCC}" dt="2026-09-11T19:15:01.199" v="3784" actId="1076"/>
-          <ac:cxnSpMkLst>
-            <pc:docMk/>
-            <pc:sldMk cId="3939624714" sldId="260"/>
-            <ac:cxnSpMk id="143" creationId="{3ED93ABE-34DB-60BD-0881-E5CE40AB83AB}"/>
-          </ac:cxnSpMkLst>
-        </pc:cxnChg>
-        <pc:cxnChg chg="add mod">
-          <ac:chgData name="Jonah St. Hilaire" userId="9d0a7af2-d0bd-4748-b50b-5cc37e0fdaa3" providerId="ADAL" clId="{58AAB240-BB3C-43BA-87E9-80C5D70C8BCC}" dt="2026-09-11T19:22:45.582" v="4048" actId="1036"/>
-          <ac:cxnSpMkLst>
-            <pc:docMk/>
-            <pc:sldMk cId="3939624714" sldId="260"/>
-            <ac:cxnSpMk id="146" creationId="{5ECB1BDD-9D41-C99D-1BDC-E7491586497D}"/>
-          </ac:cxnSpMkLst>
-        </pc:cxnChg>
-        <pc:cxnChg chg="add mod">
-          <ac:chgData name="Jonah St. Hilaire" userId="9d0a7af2-d0bd-4748-b50b-5cc37e0fdaa3" providerId="ADAL" clId="{58AAB240-BB3C-43BA-87E9-80C5D70C8BCC}" dt="2026-09-11T19:27:52.003" v="4157" actId="692"/>
-          <ac:cxnSpMkLst>
-            <pc:docMk/>
-            <pc:sldMk cId="3939624714" sldId="260"/>
-            <ac:cxnSpMk id="178" creationId="{0992CBC5-F175-D5DF-B6D2-2818E334296E}"/>
-          </ac:cxnSpMkLst>
-        </pc:cxnChg>
-        <pc:cxnChg chg="add mod">
-          <ac:chgData name="Jonah St. Hilaire" userId="9d0a7af2-d0bd-4748-b50b-5cc37e0fdaa3" providerId="ADAL" clId="{58AAB240-BB3C-43BA-87E9-80C5D70C8BCC}" dt="2026-09-11T19:28:14.640" v="4161" actId="1035"/>
-          <ac:cxnSpMkLst>
-            <pc:docMk/>
-            <pc:sldMk cId="3939624714" sldId="260"/>
-            <ac:cxnSpMk id="181" creationId="{55B85A1B-CE18-A933-EE99-B698A5B6E008}"/>
-          </ac:cxnSpMkLst>
-        </pc:cxnChg>
-        <pc:cxnChg chg="add mod">
-          <ac:chgData name="Jonah St. Hilaire" userId="9d0a7af2-d0bd-4748-b50b-5cc37e0fdaa3" providerId="ADAL" clId="{58AAB240-BB3C-43BA-87E9-80C5D70C8BCC}" dt="2026-09-11T19:29:36.094" v="4175" actId="14100"/>
-          <ac:cxnSpMkLst>
-            <pc:docMk/>
-            <pc:sldMk cId="3939624714" sldId="260"/>
-            <ac:cxnSpMk id="189" creationId="{2BDF6C84-786F-17DB-DA5A-02132EFADD5E}"/>
-          </ac:cxnSpMkLst>
-        </pc:cxnChg>
-        <pc:cxnChg chg="add mod">
-          <ac:chgData name="Jonah St. Hilaire" userId="9d0a7af2-d0bd-4748-b50b-5cc37e0fdaa3" providerId="ADAL" clId="{58AAB240-BB3C-43BA-87E9-80C5D70C8BCC}" dt="2026-09-11T19:29:59.461" v="4180" actId="14100"/>
-          <ac:cxnSpMkLst>
-            <pc:docMk/>
-            <pc:sldMk cId="3939624714" sldId="260"/>
-            <ac:cxnSpMk id="192" creationId="{A3199E7F-4F31-8532-B538-0F8437D1525C}"/>
-          </ac:cxnSpMkLst>
-        </pc:cxnChg>
-        <pc:cxnChg chg="add mod">
-          <ac:chgData name="Jonah St. Hilaire" userId="9d0a7af2-d0bd-4748-b50b-5cc37e0fdaa3" providerId="ADAL" clId="{58AAB240-BB3C-43BA-87E9-80C5D70C8BCC}" dt="2026-09-11T19:32:13.521" v="4226" actId="14100"/>
-          <ac:cxnSpMkLst>
-            <pc:docMk/>
-            <pc:sldMk cId="3939624714" sldId="260"/>
-            <ac:cxnSpMk id="195" creationId="{A2E2BC6F-DA8A-9C13-E9EF-D2718D240808}"/>
-          </ac:cxnSpMkLst>
-        </pc:cxnChg>
-        <pc:cxnChg chg="add del mod">
-          <ac:chgData name="Jonah St. Hilaire" userId="9d0a7af2-d0bd-4748-b50b-5cc37e0fdaa3" providerId="ADAL" clId="{58AAB240-BB3C-43BA-87E9-80C5D70C8BCC}" dt="2026-09-11T19:33:42.370" v="4233" actId="478"/>
-          <ac:cxnSpMkLst>
-            <pc:docMk/>
-            <pc:sldMk cId="3939624714" sldId="260"/>
-            <ac:cxnSpMk id="202" creationId="{E5CC4987-2591-D835-7310-272D7507F411}"/>
-          </ac:cxnSpMkLst>
-        </pc:cxnChg>
       </pc:sldChg>
       <pc:sldChg chg="addSp delSp modSp add mod">
-        <pc:chgData name="Jonah St. Hilaire" userId="9d0a7af2-d0bd-4748-b50b-5cc37e0fdaa3" providerId="ADAL" clId="{58AAB240-BB3C-43BA-87E9-80C5D70C8BCC}" dt="2026-10-08T18:14:22.046" v="5194" actId="692"/>
+        <pc:chgData name="Jonah St. Hilaire" userId="9d0a7af2-d0bd-4748-b50b-5cc37e0fdaa3" providerId="ADAL" clId="{58AAB240-BB3C-43BA-87E9-80C5D70C8BCC}" dt="2026-10-29T21:53:44.103" v="5527" actId="20577"/>
         <pc:sldMkLst>
           <pc:docMk/>
           <pc:sldMk cId="2711191929" sldId="261"/>
         </pc:sldMkLst>
         <pc:spChg chg="add mod">
-          <ac:chgData name="Jonah St. Hilaire" userId="9d0a7af2-d0bd-4748-b50b-5cc37e0fdaa3" providerId="ADAL" clId="{58AAB240-BB3C-43BA-87E9-80C5D70C8BCC}" dt="2026-09-28T16:17:00.206" v="5054" actId="1036"/>
+          <ac:chgData name="Jonah St. Hilaire" userId="9d0a7af2-d0bd-4748-b50b-5cc37e0fdaa3" providerId="ADAL" clId="{58AAB240-BB3C-43BA-87E9-80C5D70C8BCC}" dt="2026-10-29T21:53:37.631" v="5525"/>
+          <ac:spMkLst>
+            <pc:docMk/>
+            <pc:sldMk cId="2711191929" sldId="261"/>
+            <ac:spMk id="2" creationId="{98CEFAFE-3B82-D97E-78C1-1BDB01D7DFEE}"/>
+          </ac:spMkLst>
+        </pc:spChg>
+        <pc:spChg chg="add mod">
+          <ac:chgData name="Jonah St. Hilaire" userId="9d0a7af2-d0bd-4748-b50b-5cc37e0fdaa3" providerId="ADAL" clId="{58AAB240-BB3C-43BA-87E9-80C5D70C8BCC}" dt="2026-10-29T14:31:01.532" v="5329" actId="1038"/>
           <ac:spMkLst>
             <pc:docMk/>
             <pc:sldMk cId="2711191929" sldId="261"/>
             <ac:spMk id="4" creationId="{011C7877-FD0D-DC1B-FB6A-84B1834469F8}"/>
           </ac:spMkLst>
         </pc:spChg>
-        <pc:spChg chg="mod">
-          <ac:chgData name="Jonah St. Hilaire" userId="9d0a7af2-d0bd-4748-b50b-5cc37e0fdaa3" providerId="ADAL" clId="{58AAB240-BB3C-43BA-87E9-80C5D70C8BCC}" dt="2026-09-24T21:50:53.745" v="4665" actId="1038"/>
+        <pc:spChg chg="add mod">
+          <ac:chgData name="Jonah St. Hilaire" userId="9d0a7af2-d0bd-4748-b50b-5cc37e0fdaa3" providerId="ADAL" clId="{58AAB240-BB3C-43BA-87E9-80C5D70C8BCC}" dt="2026-10-29T21:53:44.103" v="5527" actId="20577"/>
           <ac:spMkLst>
             <pc:docMk/>
             <pc:sldMk cId="2711191929" sldId="261"/>
-            <ac:spMk id="5" creationId="{7883BDD5-F10F-1FD8-17BA-89E602246AF9}"/>
+            <ac:spMk id="6" creationId="{182779DB-9EA1-9B68-79CC-9C77E6451159}"/>
           </ac:spMkLst>
         </pc:spChg>
-        <pc:spChg chg="mod">
-          <ac:chgData name="Jonah St. Hilaire" userId="9d0a7af2-d0bd-4748-b50b-5cc37e0fdaa3" providerId="ADAL" clId="{58AAB240-BB3C-43BA-87E9-80C5D70C8BCC}" dt="2026-09-28T17:01:56.531" v="5153" actId="1076"/>
+        <pc:spChg chg="add mod">
+          <ac:chgData name="Jonah St. Hilaire" userId="9d0a7af2-d0bd-4748-b50b-5cc37e0fdaa3" providerId="ADAL" clId="{58AAB240-BB3C-43BA-87E9-80C5D70C8BCC}" dt="2026-10-29T14:39:07.442" v="5412" actId="1076"/>
           <ac:spMkLst>
             <pc:docMk/>
             <pc:sldMk cId="2711191929" sldId="261"/>
-            <ac:spMk id="7" creationId="{CCBCE907-3D3B-AFC4-D341-6303C2308864}"/>
+            <ac:spMk id="12" creationId="{4D655FCA-0336-CE24-B8B2-373178ECBFC3}"/>
           </ac:spMkLst>
         </pc:spChg>
         <pc:spChg chg="add mod">
-          <ac:chgData name="Jonah St. Hilaire" userId="9d0a7af2-d0bd-4748-b50b-5cc37e0fdaa3" providerId="ADAL" clId="{58AAB240-BB3C-43BA-87E9-80C5D70C8BCC}" dt="2026-09-28T16:13:35.009" v="4988" actId="1038"/>
-          <ac:spMkLst>
-            <pc:docMk/>
-            <pc:sldMk cId="2711191929" sldId="261"/>
-            <ac:spMk id="11" creationId="{C96C720A-B7D9-6BE2-0690-5EB315D0E098}"/>
-          </ac:spMkLst>
-        </pc:spChg>
-        <pc:spChg chg="add mod">
-          <ac:chgData name="Jonah St. Hilaire" userId="9d0a7af2-d0bd-4748-b50b-5cc37e0fdaa3" providerId="ADAL" clId="{58AAB240-BB3C-43BA-87E9-80C5D70C8BCC}" dt="2026-09-28T16:18:28.537" v="5110" actId="20577"/>
-          <ac:spMkLst>
-            <pc:docMk/>
-            <pc:sldMk cId="2711191929" sldId="261"/>
-            <ac:spMk id="13" creationId="{329F44B4-E1E1-4543-8F0B-E3D612AB4D37}"/>
-          </ac:spMkLst>
-        </pc:spChg>
-        <pc:spChg chg="add mod">
-          <ac:chgData name="Jonah St. Hilaire" userId="9d0a7af2-d0bd-4748-b50b-5cc37e0fdaa3" providerId="ADAL" clId="{58AAB240-BB3C-43BA-87E9-80C5D70C8BCC}" dt="2026-09-28T16:19:21.095" v="5152" actId="1035"/>
+          <ac:chgData name="Jonah St. Hilaire" userId="9d0a7af2-d0bd-4748-b50b-5cc37e0fdaa3" providerId="ADAL" clId="{58AAB240-BB3C-43BA-87E9-80C5D70C8BCC}" dt="2026-10-29T14:31:01.532" v="5329" actId="1038"/>
           <ac:spMkLst>
             <pc:docMk/>
             <pc:sldMk cId="2711191929" sldId="261"/>
@@ -2012,7 +221,7 @@
           </ac:spMkLst>
         </pc:spChg>
         <pc:spChg chg="add mod">
-          <ac:chgData name="Jonah St. Hilaire" userId="9d0a7af2-d0bd-4748-b50b-5cc37e0fdaa3" providerId="ADAL" clId="{58AAB240-BB3C-43BA-87E9-80C5D70C8BCC}" dt="2026-09-24T21:51:57.824" v="4718" actId="1076"/>
+          <ac:chgData name="Jonah St. Hilaire" userId="9d0a7af2-d0bd-4748-b50b-5cc37e0fdaa3" providerId="ADAL" clId="{58AAB240-BB3C-43BA-87E9-80C5D70C8BCC}" dt="2026-10-29T14:31:01.532" v="5329" actId="1038"/>
           <ac:spMkLst>
             <pc:docMk/>
             <pc:sldMk cId="2711191929" sldId="261"/>
@@ -2020,7 +229,7 @@
           </ac:spMkLst>
         </pc:spChg>
         <pc:spChg chg="add mod">
-          <ac:chgData name="Jonah St. Hilaire" userId="9d0a7af2-d0bd-4748-b50b-5cc37e0fdaa3" providerId="ADAL" clId="{58AAB240-BB3C-43BA-87E9-80C5D70C8BCC}" dt="2026-09-24T21:51:57.824" v="4718" actId="1076"/>
+          <ac:chgData name="Jonah St. Hilaire" userId="9d0a7af2-d0bd-4748-b50b-5cc37e0fdaa3" providerId="ADAL" clId="{58AAB240-BB3C-43BA-87E9-80C5D70C8BCC}" dt="2026-10-29T14:31:01.532" v="5329" actId="1038"/>
           <ac:spMkLst>
             <pc:docMk/>
             <pc:sldMk cId="2711191929" sldId="261"/>
@@ -2028,15 +237,7 @@
           </ac:spMkLst>
         </pc:spChg>
         <pc:spChg chg="add mod">
-          <ac:chgData name="Jonah St. Hilaire" userId="9d0a7af2-d0bd-4748-b50b-5cc37e0fdaa3" providerId="ADAL" clId="{58AAB240-BB3C-43BA-87E9-80C5D70C8BCC}" dt="2026-09-24T21:54:25.665" v="4765" actId="1076"/>
-          <ac:spMkLst>
-            <pc:docMk/>
-            <pc:sldMk cId="2711191929" sldId="261"/>
-            <ac:spMk id="25" creationId="{E371127E-0331-F5F7-1D24-AAFCEF03AFC3}"/>
-          </ac:spMkLst>
-        </pc:spChg>
-        <pc:spChg chg="add mod">
-          <ac:chgData name="Jonah St. Hilaire" userId="9d0a7af2-d0bd-4748-b50b-5cc37e0fdaa3" providerId="ADAL" clId="{58AAB240-BB3C-43BA-87E9-80C5D70C8BCC}" dt="2026-09-24T21:53:56.095" v="4763" actId="1037"/>
+          <ac:chgData name="Jonah St. Hilaire" userId="9d0a7af2-d0bd-4748-b50b-5cc37e0fdaa3" providerId="ADAL" clId="{58AAB240-BB3C-43BA-87E9-80C5D70C8BCC}" dt="2026-10-29T14:31:01.532" v="5329" actId="1038"/>
           <ac:spMkLst>
             <pc:docMk/>
             <pc:sldMk cId="2711191929" sldId="261"/>
@@ -2044,75 +245,19 @@
           </ac:spMkLst>
         </pc:spChg>
         <pc:spChg chg="mod">
-          <ac:chgData name="Jonah St. Hilaire" userId="9d0a7af2-d0bd-4748-b50b-5cc37e0fdaa3" providerId="ADAL" clId="{58AAB240-BB3C-43BA-87E9-80C5D70C8BCC}" dt="2026-09-28T17:01:56.531" v="5153" actId="1076"/>
-          <ac:spMkLst>
-            <pc:docMk/>
-            <pc:sldMk cId="2711191929" sldId="261"/>
-            <ac:spMk id="38" creationId="{E147A842-F2EB-F73E-86B7-CA186B19F6C4}"/>
-          </ac:spMkLst>
-        </pc:spChg>
-        <pc:spChg chg="mod">
-          <ac:chgData name="Jonah St. Hilaire" userId="9d0a7af2-d0bd-4748-b50b-5cc37e0fdaa3" providerId="ADAL" clId="{58AAB240-BB3C-43BA-87E9-80C5D70C8BCC}" dt="2026-09-28T17:01:56.531" v="5153" actId="1076"/>
-          <ac:spMkLst>
-            <pc:docMk/>
-            <pc:sldMk cId="2711191929" sldId="261"/>
-            <ac:spMk id="48" creationId="{0AB112CA-CC5F-51E4-DB56-4AF28A40E725}"/>
-          </ac:spMkLst>
-        </pc:spChg>
-        <pc:spChg chg="mod">
-          <ac:chgData name="Jonah St. Hilaire" userId="9d0a7af2-d0bd-4748-b50b-5cc37e0fdaa3" providerId="ADAL" clId="{58AAB240-BB3C-43BA-87E9-80C5D70C8BCC}" dt="2026-09-24T21:50:53.745" v="4665" actId="1038"/>
-          <ac:spMkLst>
-            <pc:docMk/>
-            <pc:sldMk cId="2711191929" sldId="261"/>
-            <ac:spMk id="50" creationId="{5E05576F-2605-C1C6-FFB5-A1F9908987BA}"/>
-          </ac:spMkLst>
-        </pc:spChg>
-        <pc:spChg chg="mod">
-          <ac:chgData name="Jonah St. Hilaire" userId="9d0a7af2-d0bd-4748-b50b-5cc37e0fdaa3" providerId="ADAL" clId="{58AAB240-BB3C-43BA-87E9-80C5D70C8BCC}" dt="2026-09-28T17:01:56.531" v="5153" actId="1076"/>
-          <ac:spMkLst>
-            <pc:docMk/>
-            <pc:sldMk cId="2711191929" sldId="261"/>
-            <ac:spMk id="64" creationId="{37C54D2F-EEFF-FA08-41E3-5B7FFCF29AD4}"/>
-          </ac:spMkLst>
-        </pc:spChg>
-        <pc:spChg chg="mod">
-          <ac:chgData name="Jonah St. Hilaire" userId="9d0a7af2-d0bd-4748-b50b-5cc37e0fdaa3" providerId="ADAL" clId="{58AAB240-BB3C-43BA-87E9-80C5D70C8BCC}" dt="2026-09-24T21:50:53.745" v="4665" actId="1038"/>
-          <ac:spMkLst>
-            <pc:docMk/>
-            <pc:sldMk cId="2711191929" sldId="261"/>
-            <ac:spMk id="76" creationId="{151C5F4C-AD0E-1870-D0E6-02489A933D83}"/>
-          </ac:spMkLst>
-        </pc:spChg>
-        <pc:spChg chg="mod">
-          <ac:chgData name="Jonah St. Hilaire" userId="9d0a7af2-d0bd-4748-b50b-5cc37e0fdaa3" providerId="ADAL" clId="{58AAB240-BB3C-43BA-87E9-80C5D70C8BCC}" dt="2026-09-28T17:01:56.531" v="5153" actId="1076"/>
-          <ac:spMkLst>
-            <pc:docMk/>
-            <pc:sldMk cId="2711191929" sldId="261"/>
-            <ac:spMk id="77" creationId="{7FAD317B-4040-8404-B401-6004A30807D4}"/>
-          </ac:spMkLst>
-        </pc:spChg>
-        <pc:spChg chg="mod">
-          <ac:chgData name="Jonah St. Hilaire" userId="9d0a7af2-d0bd-4748-b50b-5cc37e0fdaa3" providerId="ADAL" clId="{58AAB240-BB3C-43BA-87E9-80C5D70C8BCC}" dt="2026-09-24T21:50:53.745" v="4665" actId="1038"/>
-          <ac:spMkLst>
-            <pc:docMk/>
-            <pc:sldMk cId="2711191929" sldId="261"/>
-            <ac:spMk id="86" creationId="{9BC99C41-618F-54D7-DF4B-3C1066DB5E16}"/>
-          </ac:spMkLst>
-        </pc:spChg>
-        <pc:spChg chg="mod">
-          <ac:chgData name="Jonah St. Hilaire" userId="9d0a7af2-d0bd-4748-b50b-5cc37e0fdaa3" providerId="ADAL" clId="{58AAB240-BB3C-43BA-87E9-80C5D70C8BCC}" dt="2026-09-24T21:50:53.745" v="4665" actId="1038"/>
+          <ac:chgData name="Jonah St. Hilaire" userId="9d0a7af2-d0bd-4748-b50b-5cc37e0fdaa3" providerId="ADAL" clId="{58AAB240-BB3C-43BA-87E9-80C5D70C8BCC}" dt="2026-10-29T14:54:02.337" v="5451" actId="20577"/>
           <ac:spMkLst>
             <pc:docMk/>
             <pc:sldMk cId="2711191929" sldId="261"/>
             <ac:spMk id="100" creationId="{68FE51B0-DE23-9DDC-46A1-0AD43174BFD6}"/>
           </ac:spMkLst>
         </pc:spChg>
-        <pc:spChg chg="mod">
-          <ac:chgData name="Jonah St. Hilaire" userId="9d0a7af2-d0bd-4748-b50b-5cc37e0fdaa3" providerId="ADAL" clId="{58AAB240-BB3C-43BA-87E9-80C5D70C8BCC}" dt="2026-09-24T21:50:53.745" v="4665" actId="1038"/>
+        <pc:spChg chg="mod topLvl">
+          <ac:chgData name="Jonah St. Hilaire" userId="9d0a7af2-d0bd-4748-b50b-5cc37e0fdaa3" providerId="ADAL" clId="{58AAB240-BB3C-43BA-87E9-80C5D70C8BCC}" dt="2026-10-29T21:45:42.563" v="5481" actId="1076"/>
           <ac:spMkLst>
             <pc:docMk/>
             <pc:sldMk cId="2711191929" sldId="261"/>
-            <ac:spMk id="113" creationId="{3F332451-58AF-EDC2-C255-B2D34882CA77}"/>
+            <ac:spMk id="102" creationId="{9592EF24-4962-D75F-8E55-F1FDF163CFAA}"/>
           </ac:spMkLst>
         </pc:spChg>
         <pc:spChg chg="mod">
@@ -2124,15 +269,7 @@
           </ac:spMkLst>
         </pc:spChg>
         <pc:spChg chg="mod">
-          <ac:chgData name="Jonah St. Hilaire" userId="9d0a7af2-d0bd-4748-b50b-5cc37e0fdaa3" providerId="ADAL" clId="{58AAB240-BB3C-43BA-87E9-80C5D70C8BCC}" dt="2026-09-24T21:55:28.752" v="4845" actId="1038"/>
-          <ac:spMkLst>
-            <pc:docMk/>
-            <pc:sldMk cId="2711191929" sldId="261"/>
-            <ac:spMk id="132" creationId="{26E1D680-016A-243E-3386-136555BA0F8F}"/>
-          </ac:spMkLst>
-        </pc:spChg>
-        <pc:spChg chg="mod">
-          <ac:chgData name="Jonah St. Hilaire" userId="9d0a7af2-d0bd-4748-b50b-5cc37e0fdaa3" providerId="ADAL" clId="{58AAB240-BB3C-43BA-87E9-80C5D70C8BCC}" dt="2026-09-28T17:01:56.531" v="5153" actId="1076"/>
+          <ac:chgData name="Jonah St. Hilaire" userId="9d0a7af2-d0bd-4748-b50b-5cc37e0fdaa3" providerId="ADAL" clId="{58AAB240-BB3C-43BA-87E9-80C5D70C8BCC}" dt="2026-10-29T14:31:01.532" v="5329" actId="1038"/>
           <ac:spMkLst>
             <pc:docMk/>
             <pc:sldMk cId="2711191929" sldId="261"/>
@@ -2140,47 +277,15 @@
           </ac:spMkLst>
         </pc:spChg>
         <pc:spChg chg="mod">
-          <ac:chgData name="Jonah St. Hilaire" userId="9d0a7af2-d0bd-4748-b50b-5cc37e0fdaa3" providerId="ADAL" clId="{58AAB240-BB3C-43BA-87E9-80C5D70C8BCC}" dt="2026-09-28T17:01:56.531" v="5153" actId="1076"/>
+          <ac:chgData name="Jonah St. Hilaire" userId="9d0a7af2-d0bd-4748-b50b-5cc37e0fdaa3" providerId="ADAL" clId="{58AAB240-BB3C-43BA-87E9-80C5D70C8BCC}" dt="2026-10-29T14:31:01.532" v="5329" actId="1038"/>
           <ac:spMkLst>
             <pc:docMk/>
             <pc:sldMk cId="2711191929" sldId="261"/>
-            <ac:spMk id="150" creationId="{1E99AAFA-1915-2EFA-A985-9BE09C11EE9B}"/>
+            <ac:spMk id="134" creationId="{C1203054-8853-4B5E-5D11-A8E5A28B9B3B}"/>
           </ac:spMkLst>
         </pc:spChg>
         <pc:spChg chg="mod">
-          <ac:chgData name="Jonah St. Hilaire" userId="9d0a7af2-d0bd-4748-b50b-5cc37e0fdaa3" providerId="ADAL" clId="{58AAB240-BB3C-43BA-87E9-80C5D70C8BCC}" dt="2026-09-28T17:01:56.531" v="5153" actId="1076"/>
-          <ac:spMkLst>
-            <pc:docMk/>
-            <pc:sldMk cId="2711191929" sldId="261"/>
-            <ac:spMk id="164" creationId="{530CB936-B083-5858-DFF1-E95C3182DDA3}"/>
-          </ac:spMkLst>
-        </pc:spChg>
-        <pc:spChg chg="mod">
-          <ac:chgData name="Jonah St. Hilaire" userId="9d0a7af2-d0bd-4748-b50b-5cc37e0fdaa3" providerId="ADAL" clId="{58AAB240-BB3C-43BA-87E9-80C5D70C8BCC}" dt="2026-09-24T21:55:28.752" v="4845" actId="1038"/>
-          <ac:spMkLst>
-            <pc:docMk/>
-            <pc:sldMk cId="2711191929" sldId="261"/>
-            <ac:spMk id="166" creationId="{3C8FCF78-1280-5A20-FD97-70DE029FA688}"/>
-          </ac:spMkLst>
-        </pc:spChg>
-        <pc:spChg chg="mod">
-          <ac:chgData name="Jonah St. Hilaire" userId="9d0a7af2-d0bd-4748-b50b-5cc37e0fdaa3" providerId="ADAL" clId="{58AAB240-BB3C-43BA-87E9-80C5D70C8BCC}" dt="2026-09-24T21:55:28.752" v="4845" actId="1038"/>
-          <ac:spMkLst>
-            <pc:docMk/>
-            <pc:sldMk cId="2711191929" sldId="261"/>
-            <ac:spMk id="168" creationId="{526C9AED-8267-6141-DFDA-E0C6BBC5CA5E}"/>
-          </ac:spMkLst>
-        </pc:spChg>
-        <pc:spChg chg="mod">
-          <ac:chgData name="Jonah St. Hilaire" userId="9d0a7af2-d0bd-4748-b50b-5cc37e0fdaa3" providerId="ADAL" clId="{58AAB240-BB3C-43BA-87E9-80C5D70C8BCC}" dt="2026-09-24T21:55:28.752" v="4845" actId="1038"/>
-          <ac:spMkLst>
-            <pc:docMk/>
-            <pc:sldMk cId="2711191929" sldId="261"/>
-            <ac:spMk id="172" creationId="{EF9772A2-FF89-CF5F-BA4E-D5FD4669080A}"/>
-          </ac:spMkLst>
-        </pc:spChg>
-        <pc:spChg chg="mod">
-          <ac:chgData name="Jonah St. Hilaire" userId="9d0a7af2-d0bd-4748-b50b-5cc37e0fdaa3" providerId="ADAL" clId="{58AAB240-BB3C-43BA-87E9-80C5D70C8BCC}" dt="2026-09-24T21:55:28.752" v="4845" actId="1038"/>
+          <ac:chgData name="Jonah St. Hilaire" userId="9d0a7af2-d0bd-4748-b50b-5cc37e0fdaa3" providerId="ADAL" clId="{58AAB240-BB3C-43BA-87E9-80C5D70C8BCC}" dt="2026-10-29T14:31:01.532" v="5329" actId="1038"/>
           <ac:spMkLst>
             <pc:docMk/>
             <pc:sldMk cId="2711191929" sldId="261"/>
@@ -2188,15 +293,7 @@
           </ac:spMkLst>
         </pc:spChg>
         <pc:spChg chg="mod">
-          <ac:chgData name="Jonah St. Hilaire" userId="9d0a7af2-d0bd-4748-b50b-5cc37e0fdaa3" providerId="ADAL" clId="{58AAB240-BB3C-43BA-87E9-80C5D70C8BCC}" dt="2026-09-28T17:01:56.531" v="5153" actId="1076"/>
-          <ac:spMkLst>
-            <pc:docMk/>
-            <pc:sldMk cId="2711191929" sldId="261"/>
-            <ac:spMk id="176" creationId="{D9556443-4557-85B5-5C43-309D540AEEAF}"/>
-          </ac:spMkLst>
-        </pc:spChg>
-        <pc:spChg chg="mod">
-          <ac:chgData name="Jonah St. Hilaire" userId="9d0a7af2-d0bd-4748-b50b-5cc37e0fdaa3" providerId="ADAL" clId="{58AAB240-BB3C-43BA-87E9-80C5D70C8BCC}" dt="2026-09-24T21:55:28.752" v="4845" actId="1038"/>
+          <ac:chgData name="Jonah St. Hilaire" userId="9d0a7af2-d0bd-4748-b50b-5cc37e0fdaa3" providerId="ADAL" clId="{58AAB240-BB3C-43BA-87E9-80C5D70C8BCC}" dt="2026-10-29T14:31:01.532" v="5329" actId="1038"/>
           <ac:spMkLst>
             <pc:docMk/>
             <pc:sldMk cId="2711191929" sldId="261"/>
@@ -2204,43 +301,107 @@
           </ac:spMkLst>
         </pc:spChg>
         <pc:spChg chg="mod">
-          <ac:chgData name="Jonah St. Hilaire" userId="9d0a7af2-d0bd-4748-b50b-5cc37e0fdaa3" providerId="ADAL" clId="{58AAB240-BB3C-43BA-87E9-80C5D70C8BCC}" dt="2026-09-28T17:01:56.531" v="5153" actId="1076"/>
+          <ac:chgData name="Jonah St. Hilaire" userId="9d0a7af2-d0bd-4748-b50b-5cc37e0fdaa3" providerId="ADAL" clId="{58AAB240-BB3C-43BA-87E9-80C5D70C8BCC}" dt="2026-10-29T14:31:01.532" v="5329" actId="1038"/>
           <ac:spMkLst>
             <pc:docMk/>
             <pc:sldMk cId="2711191929" sldId="261"/>
             <ac:spMk id="207" creationId="{1AF226F3-0B10-7E99-7F7F-BA0048598D8B}"/>
           </ac:spMkLst>
         </pc:spChg>
+        <pc:grpChg chg="del">
+          <ac:chgData name="Jonah St. Hilaire" userId="9d0a7af2-d0bd-4748-b50b-5cc37e0fdaa3" providerId="ADAL" clId="{58AAB240-BB3C-43BA-87E9-80C5D70C8BCC}" dt="2026-10-29T21:43:01.095" v="5459" actId="478"/>
+          <ac:grpSpMkLst>
+            <pc:docMk/>
+            <pc:sldMk cId="2711191929" sldId="261"/>
+            <ac:grpSpMk id="101" creationId="{BE9A6059-EE12-FB37-0089-285A11E84759}"/>
+          </ac:grpSpMkLst>
+        </pc:grpChg>
+        <pc:picChg chg="add mod">
+          <ac:chgData name="Jonah St. Hilaire" userId="9d0a7af2-d0bd-4748-b50b-5cc37e0fdaa3" providerId="ADAL" clId="{58AAB240-BB3C-43BA-87E9-80C5D70C8BCC}" dt="2026-10-29T14:39:42.824" v="5413" actId="1076"/>
+          <ac:picMkLst>
+            <pc:docMk/>
+            <pc:sldMk cId="2711191929" sldId="261"/>
+            <ac:picMk id="16" creationId="{9419EBBC-2800-E5DB-90F0-B6ACC34F1D2E}"/>
+          </ac:picMkLst>
+        </pc:picChg>
+        <pc:picChg chg="add del mod">
+          <ac:chgData name="Jonah St. Hilaire" userId="9d0a7af2-d0bd-4748-b50b-5cc37e0fdaa3" providerId="ADAL" clId="{58AAB240-BB3C-43BA-87E9-80C5D70C8BCC}" dt="2026-10-29T21:42:08.479" v="5457" actId="478"/>
+          <ac:picMkLst>
+            <pc:docMk/>
+            <pc:sldMk cId="2711191929" sldId="261"/>
+            <ac:picMk id="18" creationId="{9383B7AE-3393-395C-D13F-402367EFF06D}"/>
+          </ac:picMkLst>
+        </pc:picChg>
+        <pc:picChg chg="add del mod">
+          <ac:chgData name="Jonah St. Hilaire" userId="9d0a7af2-d0bd-4748-b50b-5cc37e0fdaa3" providerId="ADAL" clId="{58AAB240-BB3C-43BA-87E9-80C5D70C8BCC}" dt="2026-10-29T14:50:00.594" v="5437" actId="931"/>
+          <ac:picMkLst>
+            <pc:docMk/>
+            <pc:sldMk cId="2711191929" sldId="261"/>
+            <ac:picMk id="20" creationId="{0853370D-ACBC-DFA0-5F73-6C2FADB59DAB}"/>
+          </ac:picMkLst>
+        </pc:picChg>
+        <pc:picChg chg="add del mod">
+          <ac:chgData name="Jonah St. Hilaire" userId="9d0a7af2-d0bd-4748-b50b-5cc37e0fdaa3" providerId="ADAL" clId="{58AAB240-BB3C-43BA-87E9-80C5D70C8BCC}" dt="2026-10-29T21:45:10.021" v="5469" actId="478"/>
+          <ac:picMkLst>
+            <pc:docMk/>
+            <pc:sldMk cId="2711191929" sldId="261"/>
+            <ac:picMk id="22" creationId="{F7442FF1-0539-6113-3FFD-FA3793879CAD}"/>
+          </ac:picMkLst>
+        </pc:picChg>
+        <pc:picChg chg="add mod">
+          <ac:chgData name="Jonah St. Hilaire" userId="9d0a7af2-d0bd-4748-b50b-5cc37e0fdaa3" providerId="ADAL" clId="{58AAB240-BB3C-43BA-87E9-80C5D70C8BCC}" dt="2026-10-29T21:45:49.918" v="5489" actId="1035"/>
+          <ac:picMkLst>
+            <pc:docMk/>
+            <pc:sldMk cId="2711191929" sldId="261"/>
+            <ac:picMk id="27" creationId="{FB5F763B-DE25-DBD5-69DC-963823604429}"/>
+          </ac:picMkLst>
+        </pc:picChg>
+        <pc:picChg chg="add mod">
+          <ac:chgData name="Jonah St. Hilaire" userId="9d0a7af2-d0bd-4748-b50b-5cc37e0fdaa3" providerId="ADAL" clId="{58AAB240-BB3C-43BA-87E9-80C5D70C8BCC}" dt="2026-10-29T14:54:07.940" v="5452" actId="1076"/>
+          <ac:picMkLst>
+            <pc:docMk/>
+            <pc:sldMk cId="2711191929" sldId="261"/>
+            <ac:picMk id="35" creationId="{F3F74100-3D35-8EED-35FF-543C90B32F60}"/>
+          </ac:picMkLst>
+        </pc:picChg>
+        <pc:picChg chg="del mod topLvl">
+          <ac:chgData name="Jonah St. Hilaire" userId="9d0a7af2-d0bd-4748-b50b-5cc37e0fdaa3" providerId="ADAL" clId="{58AAB240-BB3C-43BA-87E9-80C5D70C8BCC}" dt="2026-10-29T21:43:01.095" v="5459" actId="478"/>
+          <ac:picMkLst>
+            <pc:docMk/>
+            <pc:sldMk cId="2711191929" sldId="261"/>
+            <ac:picMk id="103" creationId="{3C8EA0AB-9FC3-D7A8-D0EF-C5A875E63BB7}"/>
+          </ac:picMkLst>
+        </pc:picChg>
         <pc:cxnChg chg="add mod">
-          <ac:chgData name="Jonah St. Hilaire" userId="9d0a7af2-d0bd-4748-b50b-5cc37e0fdaa3" providerId="ADAL" clId="{58AAB240-BB3C-43BA-87E9-80C5D70C8BCC}" dt="2026-09-28T16:17:00.206" v="5054" actId="1036"/>
+          <ac:chgData name="Jonah St. Hilaire" userId="9d0a7af2-d0bd-4748-b50b-5cc37e0fdaa3" providerId="ADAL" clId="{58AAB240-BB3C-43BA-87E9-80C5D70C8BCC}" dt="2026-10-29T14:30:15.813" v="5316" actId="1038"/>
           <ac:cxnSpMkLst>
             <pc:docMk/>
             <pc:sldMk cId="2711191929" sldId="261"/>
-            <ac:cxnSpMk id="8" creationId="{B242F009-EC7A-415C-B407-E45ED6E2E27D}"/>
+            <ac:cxnSpMk id="9" creationId="{CD4093AA-D09B-88FA-F187-87CF36C8E740}"/>
           </ac:cxnSpMkLst>
         </pc:cxnChg>
         <pc:cxnChg chg="add mod">
-          <ac:chgData name="Jonah St. Hilaire" userId="9d0a7af2-d0bd-4748-b50b-5cc37e0fdaa3" providerId="ADAL" clId="{58AAB240-BB3C-43BA-87E9-80C5D70C8BCC}" dt="2026-09-28T16:17:09.685" v="5055" actId="692"/>
+          <ac:chgData name="Jonah St. Hilaire" userId="9d0a7af2-d0bd-4748-b50b-5cc37e0fdaa3" providerId="ADAL" clId="{58AAB240-BB3C-43BA-87E9-80C5D70C8BCC}" dt="2026-10-29T14:30:15.813" v="5316" actId="1038"/>
           <ac:cxnSpMkLst>
             <pc:docMk/>
             <pc:sldMk cId="2711191929" sldId="261"/>
-            <ac:cxnSpMk id="15" creationId="{30E710BB-FB78-C6FE-1CE4-BD83B690F8DD}"/>
+            <ac:cxnSpMk id="10" creationId="{8C01ACE9-3AE1-EC54-AD62-932D7652A471}"/>
           </ac:cxnSpMkLst>
         </pc:cxnChg>
-        <pc:cxnChg chg="add mod">
-          <ac:chgData name="Jonah St. Hilaire" userId="9d0a7af2-d0bd-4748-b50b-5cc37e0fdaa3" providerId="ADAL" clId="{58AAB240-BB3C-43BA-87E9-80C5D70C8BCC}" dt="2026-09-24T21:52:17.933" v="4748" actId="1038"/>
+        <pc:cxnChg chg="add del">
+          <ac:chgData name="Jonah St. Hilaire" userId="9d0a7af2-d0bd-4748-b50b-5cc37e0fdaa3" providerId="ADAL" clId="{58AAB240-BB3C-43BA-87E9-80C5D70C8BCC}" dt="2026-10-29T14:50:34.126" v="5442" actId="478"/>
           <ac:cxnSpMkLst>
             <pc:docMk/>
             <pc:sldMk cId="2711191929" sldId="261"/>
-            <ac:cxnSpMk id="24" creationId="{7DBDDEB8-75FC-7099-3925-4ED4CDE33C18}"/>
+            <ac:cxnSpMk id="27" creationId="{3D2DEDF5-9689-BA6A-5BF2-79904756D9F0}"/>
           </ac:cxnSpMkLst>
         </pc:cxnChg>
-        <pc:cxnChg chg="add mod">
-          <ac:chgData name="Jonah St. Hilaire" userId="9d0a7af2-d0bd-4748-b50b-5cc37e0fdaa3" providerId="ADAL" clId="{58AAB240-BB3C-43BA-87E9-80C5D70C8BCC}" dt="2026-09-24T21:54:41.989" v="4806" actId="1038"/>
+        <pc:cxnChg chg="add del">
+          <ac:chgData name="Jonah St. Hilaire" userId="9d0a7af2-d0bd-4748-b50b-5cc37e0fdaa3" providerId="ADAL" clId="{58AAB240-BB3C-43BA-87E9-80C5D70C8BCC}" dt="2026-10-29T14:50:53.735" v="5446" actId="478"/>
           <ac:cxnSpMkLst>
             <pc:docMk/>
             <pc:sldMk cId="2711191929" sldId="261"/>
-            <ac:cxnSpMk id="28" creationId="{0F135ECA-3931-5432-A0AD-04555DB8869C}"/>
+            <ac:cxnSpMk id="31" creationId="{448F30A0-14BD-B603-2814-BC367FB0A74C}"/>
           </ac:cxnSpMkLst>
         </pc:cxnChg>
         <pc:cxnChg chg="mod">
@@ -2252,7 +413,7 @@
           </ac:cxnSpMkLst>
         </pc:cxnChg>
         <pc:cxnChg chg="mod">
-          <ac:chgData name="Jonah St. Hilaire" userId="9d0a7af2-d0bd-4748-b50b-5cc37e0fdaa3" providerId="ADAL" clId="{58AAB240-BB3C-43BA-87E9-80C5D70C8BCC}" dt="2026-09-24T21:55:48.160" v="4846" actId="14100"/>
+          <ac:chgData name="Jonah St. Hilaire" userId="9d0a7af2-d0bd-4748-b50b-5cc37e0fdaa3" providerId="ADAL" clId="{58AAB240-BB3C-43BA-87E9-80C5D70C8BCC}" dt="2026-10-29T14:50:30.311" v="5441" actId="14100"/>
           <ac:cxnSpMkLst>
             <pc:docMk/>
             <pc:sldMk cId="2711191929" sldId="261"/>
@@ -2260,19 +421,11 @@
           </ac:cxnSpMkLst>
         </pc:cxnChg>
         <pc:cxnChg chg="mod">
-          <ac:chgData name="Jonah St. Hilaire" userId="9d0a7af2-d0bd-4748-b50b-5cc37e0fdaa3" providerId="ADAL" clId="{58AAB240-BB3C-43BA-87E9-80C5D70C8BCC}" dt="2026-09-24T21:55:53.216" v="4847" actId="14100"/>
+          <ac:chgData name="Jonah St. Hilaire" userId="9d0a7af2-d0bd-4748-b50b-5cc37e0fdaa3" providerId="ADAL" clId="{58AAB240-BB3C-43BA-87E9-80C5D70C8BCC}" dt="2026-10-29T21:43:06.838" v="5462" actId="1076"/>
           <ac:cxnSpMkLst>
             <pc:docMk/>
             <pc:sldMk cId="2711191929" sldId="261"/>
             <ac:cxnSpMk id="192" creationId="{92E31983-E28F-A960-816D-B52640928B1D}"/>
-          </ac:cxnSpMkLst>
-        </pc:cxnChg>
-        <pc:cxnChg chg="mod">
-          <ac:chgData name="Jonah St. Hilaire" userId="9d0a7af2-d0bd-4748-b50b-5cc37e0fdaa3" providerId="ADAL" clId="{58AAB240-BB3C-43BA-87E9-80C5D70C8BCC}" dt="2026-09-24T21:51:33.498" v="4714" actId="1076"/>
-          <ac:cxnSpMkLst>
-            <pc:docMk/>
-            <pc:sldMk cId="2711191929" sldId="261"/>
-            <ac:cxnSpMk id="202" creationId="{6B53A215-F02F-7F0D-8731-0643808CA9B7}"/>
           </ac:cxnSpMkLst>
         </pc:cxnChg>
       </pc:sldChg>
@@ -2298,14 +451,6 @@
             <ac:spMk id="4" creationId="{68333461-EBDE-E24A-EE76-0069E5470A01}"/>
           </ac:spMkLst>
         </pc:spChg>
-        <pc:spChg chg="del">
-          <ac:chgData name="Jonah St. Hilaire" userId="9d0a7af2-d0bd-4748-b50b-5cc37e0fdaa3" providerId="ADAL" clId="{58AAB240-BB3C-43BA-87E9-80C5D70C8BCC}" dt="2026-10-08T14:56:55.082" v="5155" actId="478"/>
-          <ac:spMkLst>
-            <pc:docMk/>
-            <pc:sldMk cId="2295387406" sldId="262"/>
-            <ac:spMk id="5" creationId="{1B0796C2-5FC5-465E-DB22-A0F0EF622D14}"/>
-          </ac:spMkLst>
-        </pc:spChg>
         <pc:spChg chg="add mod">
           <ac:chgData name="Jonah St. Hilaire" userId="9d0a7af2-d0bd-4748-b50b-5cc37e0fdaa3" providerId="ADAL" clId="{58AAB240-BB3C-43BA-87E9-80C5D70C8BCC}" dt="2026-10-08T18:18:34.843" v="5263" actId="1076"/>
           <ac:spMkLst>
@@ -2320,14 +465,6 @@
             <pc:docMk/>
             <pc:sldMk cId="2295387406" sldId="262"/>
             <ac:spMk id="10" creationId="{6072E3D3-ED0C-0736-B5AC-A6F8820B15FC}"/>
-          </ac:spMkLst>
-        </pc:spChg>
-        <pc:spChg chg="add del mod">
-          <ac:chgData name="Jonah St. Hilaire" userId="9d0a7af2-d0bd-4748-b50b-5cc37e0fdaa3" providerId="ADAL" clId="{58AAB240-BB3C-43BA-87E9-80C5D70C8BCC}" dt="2026-10-08T18:13:46.371" v="5192" actId="478"/>
-          <ac:spMkLst>
-            <pc:docMk/>
-            <pc:sldMk cId="2295387406" sldId="262"/>
-            <ac:spMk id="14" creationId="{ADC610AA-17ED-F482-7187-A3F4A7CD6823}"/>
           </ac:spMkLst>
         </pc:spChg>
         <pc:spChg chg="add mod">
@@ -2354,92 +491,12 @@
             <ac:spMk id="30" creationId="{1E139E5D-03BA-9E23-91A3-CA93730B89C5}"/>
           </ac:spMkLst>
         </pc:spChg>
-        <pc:spChg chg="del">
-          <ac:chgData name="Jonah St. Hilaire" userId="9d0a7af2-d0bd-4748-b50b-5cc37e0fdaa3" providerId="ADAL" clId="{58AAB240-BB3C-43BA-87E9-80C5D70C8BCC}" dt="2026-10-08T14:56:55.082" v="5155" actId="478"/>
-          <ac:spMkLst>
-            <pc:docMk/>
-            <pc:sldMk cId="2295387406" sldId="262"/>
-            <ac:spMk id="37" creationId="{714D9825-D705-F9D6-7AD1-2B969BBF67E1}"/>
-          </ac:spMkLst>
-        </pc:spChg>
-        <pc:spChg chg="del">
-          <ac:chgData name="Jonah St. Hilaire" userId="9d0a7af2-d0bd-4748-b50b-5cc37e0fdaa3" providerId="ADAL" clId="{58AAB240-BB3C-43BA-87E9-80C5D70C8BCC}" dt="2026-10-08T14:56:55.082" v="5155" actId="478"/>
-          <ac:spMkLst>
-            <pc:docMk/>
-            <pc:sldMk cId="2295387406" sldId="262"/>
-            <ac:spMk id="48" creationId="{AA303278-8CC6-A313-9A0E-558BD2F481DC}"/>
-          </ac:spMkLst>
-        </pc:spChg>
-        <pc:spChg chg="del">
-          <ac:chgData name="Jonah St. Hilaire" userId="9d0a7af2-d0bd-4748-b50b-5cc37e0fdaa3" providerId="ADAL" clId="{58AAB240-BB3C-43BA-87E9-80C5D70C8BCC}" dt="2026-10-08T14:56:55.082" v="5155" actId="478"/>
-          <ac:spMkLst>
-            <pc:docMk/>
-            <pc:sldMk cId="2295387406" sldId="262"/>
-            <ac:spMk id="86" creationId="{1A912037-1330-CFDB-3788-541D143649C4}"/>
-          </ac:spMkLst>
-        </pc:spChg>
-        <pc:spChg chg="del">
-          <ac:chgData name="Jonah St. Hilaire" userId="9d0a7af2-d0bd-4748-b50b-5cc37e0fdaa3" providerId="ADAL" clId="{58AAB240-BB3C-43BA-87E9-80C5D70C8BCC}" dt="2026-10-08T14:56:55.082" v="5155" actId="478"/>
-          <ac:spMkLst>
-            <pc:docMk/>
-            <pc:sldMk cId="2295387406" sldId="262"/>
-            <ac:spMk id="87" creationId="{EB557991-B6BC-574B-E063-E2F734A67C57}"/>
-          </ac:spMkLst>
-        </pc:spChg>
-        <pc:spChg chg="del">
-          <ac:chgData name="Jonah St. Hilaire" userId="9d0a7af2-d0bd-4748-b50b-5cc37e0fdaa3" providerId="ADAL" clId="{58AAB240-BB3C-43BA-87E9-80C5D70C8BCC}" dt="2026-10-08T14:56:55.082" v="5155" actId="478"/>
-          <ac:spMkLst>
-            <pc:docMk/>
-            <pc:sldMk cId="2295387406" sldId="262"/>
-            <ac:spMk id="98" creationId="{BAF4663E-253B-AB3E-B403-1FDF8650F7B6}"/>
-          </ac:spMkLst>
-        </pc:spChg>
-        <pc:spChg chg="del">
-          <ac:chgData name="Jonah St. Hilaire" userId="9d0a7af2-d0bd-4748-b50b-5cc37e0fdaa3" providerId="ADAL" clId="{58AAB240-BB3C-43BA-87E9-80C5D70C8BCC}" dt="2026-10-08T14:56:55.082" v="5155" actId="478"/>
-          <ac:spMkLst>
-            <pc:docMk/>
-            <pc:sldMk cId="2295387406" sldId="262"/>
-            <ac:spMk id="104" creationId="{2DEFE44D-10BF-EBCB-5D1C-225A51A927D1}"/>
-          </ac:spMkLst>
-        </pc:spChg>
-        <pc:spChg chg="del">
-          <ac:chgData name="Jonah St. Hilaire" userId="9d0a7af2-d0bd-4748-b50b-5cc37e0fdaa3" providerId="ADAL" clId="{58AAB240-BB3C-43BA-87E9-80C5D70C8BCC}" dt="2026-10-08T14:56:55.082" v="5155" actId="478"/>
-          <ac:spMkLst>
-            <pc:docMk/>
-            <pc:sldMk cId="2295387406" sldId="262"/>
-            <ac:spMk id="133" creationId="{EEEEB79A-1B55-83F9-2BA5-C02DECB6EBDC}"/>
-          </ac:spMkLst>
-        </pc:spChg>
-        <pc:spChg chg="del">
-          <ac:chgData name="Jonah St. Hilaire" userId="9d0a7af2-d0bd-4748-b50b-5cc37e0fdaa3" providerId="ADAL" clId="{58AAB240-BB3C-43BA-87E9-80C5D70C8BCC}" dt="2026-10-08T14:56:55.082" v="5155" actId="478"/>
-          <ac:spMkLst>
-            <pc:docMk/>
-            <pc:sldMk cId="2295387406" sldId="262"/>
-            <ac:spMk id="141" creationId="{52810955-202B-1D61-4EA5-3583AAB94C9B}"/>
-          </ac:spMkLst>
-        </pc:spChg>
-        <pc:spChg chg="del">
-          <ac:chgData name="Jonah St. Hilaire" userId="9d0a7af2-d0bd-4748-b50b-5cc37e0fdaa3" providerId="ADAL" clId="{58AAB240-BB3C-43BA-87E9-80C5D70C8BCC}" dt="2026-10-08T14:56:55.082" v="5155" actId="478"/>
-          <ac:spMkLst>
-            <pc:docMk/>
-            <pc:sldMk cId="2295387406" sldId="262"/>
-            <ac:spMk id="172" creationId="{FC2713F2-1D5E-DE87-BEC5-8408B53A1C74}"/>
-          </ac:spMkLst>
-        </pc:spChg>
         <pc:cxnChg chg="add mod">
           <ac:chgData name="Jonah St. Hilaire" userId="9d0a7af2-d0bd-4748-b50b-5cc37e0fdaa3" providerId="ADAL" clId="{58AAB240-BB3C-43BA-87E9-80C5D70C8BCC}" dt="2026-10-08T18:18:34.843" v="5263" actId="1076"/>
           <ac:cxnSpMkLst>
             <pc:docMk/>
             <pc:sldMk cId="2295387406" sldId="262"/>
             <ac:cxnSpMk id="18" creationId="{558B3977-A2EC-22EA-8F42-38FB48B958C6}"/>
-          </ac:cxnSpMkLst>
-        </pc:cxnChg>
-        <pc:cxnChg chg="add del mod">
-          <ac:chgData name="Jonah St. Hilaire" userId="9d0a7af2-d0bd-4748-b50b-5cc37e0fdaa3" providerId="ADAL" clId="{58AAB240-BB3C-43BA-87E9-80C5D70C8BCC}" dt="2026-10-08T18:15:17.592" v="5200" actId="11529"/>
-          <ac:cxnSpMkLst>
-            <pc:docMk/>
-            <pc:sldMk cId="2295387406" sldId="262"/>
-            <ac:cxnSpMk id="32" creationId="{33F9AC7D-B267-1D53-BECA-F0B7A5B14E45}"/>
           </ac:cxnSpMkLst>
         </pc:cxnChg>
         <pc:cxnChg chg="add mod">
@@ -2472,14 +529,6 @@
             <pc:docMk/>
             <pc:sldMk cId="2295387406" sldId="262"/>
             <ac:cxnSpMk id="47" creationId="{97270A09-F56C-C80A-9E87-8BED291E256F}"/>
-          </ac:cxnSpMkLst>
-        </pc:cxnChg>
-        <pc:cxnChg chg="add del mod">
-          <ac:chgData name="Jonah St. Hilaire" userId="9d0a7af2-d0bd-4748-b50b-5cc37e0fdaa3" providerId="ADAL" clId="{58AAB240-BB3C-43BA-87E9-80C5D70C8BCC}" dt="2026-10-08T18:18:23.674" v="5261" actId="478"/>
-          <ac:cxnSpMkLst>
-            <pc:docMk/>
-            <pc:sldMk cId="2295387406" sldId="262"/>
-            <ac:cxnSpMk id="66" creationId="{18E2CD87-EBB9-5AD9-9902-E957028A1845}"/>
           </ac:cxnSpMkLst>
         </pc:cxnChg>
       </pc:sldChg>
@@ -2570,7 +619,7 @@
           <a:p>
             <a:fld id="{681B76C8-650E-46E7-9239-6D2B71F9A944}" type="datetimeFigureOut">
               <a:rPr lang="en-CA" smtClean="0"/>
-              <a:t>2026-10-08</a:t>
+              <a:t>2026-10-29</a:t>
             </a:fld>
             <a:endParaRPr lang="en-CA"/>
           </a:p>
@@ -3053,7 +1102,7 @@
           <a:p>
             <a:fld id="{14C7401E-E5C6-4ADA-88C9-F7478DD83A36}" type="datetimeFigureOut">
               <a:rPr lang="en-CA" smtClean="0"/>
-              <a:t>2026-10-08</a:t>
+              <a:t>2026-10-29</a:t>
             </a:fld>
             <a:endParaRPr lang="en-CA"/>
           </a:p>
@@ -3223,7 +1272,7 @@
           <a:p>
             <a:fld id="{14C7401E-E5C6-4ADA-88C9-F7478DD83A36}" type="datetimeFigureOut">
               <a:rPr lang="en-CA" smtClean="0"/>
-              <a:t>2026-10-08</a:t>
+              <a:t>2026-10-29</a:t>
             </a:fld>
             <a:endParaRPr lang="en-CA"/>
           </a:p>
@@ -3403,7 +1452,7 @@
           <a:p>
             <a:fld id="{14C7401E-E5C6-4ADA-88C9-F7478DD83A36}" type="datetimeFigureOut">
               <a:rPr lang="en-CA" smtClean="0"/>
-              <a:t>2026-10-08</a:t>
+              <a:t>2026-10-29</a:t>
             </a:fld>
             <a:endParaRPr lang="en-CA"/>
           </a:p>
@@ -3573,7 +1622,7 @@
           <a:p>
             <a:fld id="{14C7401E-E5C6-4ADA-88C9-F7478DD83A36}" type="datetimeFigureOut">
               <a:rPr lang="en-CA" smtClean="0"/>
-              <a:t>2026-10-08</a:t>
+              <a:t>2026-10-29</a:t>
             </a:fld>
             <a:endParaRPr lang="en-CA"/>
           </a:p>
@@ -3819,7 +1868,7 @@
           <a:p>
             <a:fld id="{14C7401E-E5C6-4ADA-88C9-F7478DD83A36}" type="datetimeFigureOut">
               <a:rPr lang="en-CA" smtClean="0"/>
-              <a:t>2026-10-08</a:t>
+              <a:t>2026-10-29</a:t>
             </a:fld>
             <a:endParaRPr lang="en-CA"/>
           </a:p>
@@ -4051,7 +2100,7 @@
           <a:p>
             <a:fld id="{14C7401E-E5C6-4ADA-88C9-F7478DD83A36}" type="datetimeFigureOut">
               <a:rPr lang="en-CA" smtClean="0"/>
-              <a:t>2026-10-08</a:t>
+              <a:t>2026-10-29</a:t>
             </a:fld>
             <a:endParaRPr lang="en-CA"/>
           </a:p>
@@ -4418,7 +2467,7 @@
           <a:p>
             <a:fld id="{14C7401E-E5C6-4ADA-88C9-F7478DD83A36}" type="datetimeFigureOut">
               <a:rPr lang="en-CA" smtClean="0"/>
-              <a:t>2026-10-08</a:t>
+              <a:t>2026-10-29</a:t>
             </a:fld>
             <a:endParaRPr lang="en-CA"/>
           </a:p>
@@ -4536,7 +2585,7 @@
           <a:p>
             <a:fld id="{14C7401E-E5C6-4ADA-88C9-F7478DD83A36}" type="datetimeFigureOut">
               <a:rPr lang="en-CA" smtClean="0"/>
-              <a:t>2026-10-08</a:t>
+              <a:t>2026-10-29</a:t>
             </a:fld>
             <a:endParaRPr lang="en-CA"/>
           </a:p>
@@ -4631,7 +2680,7 @@
           <a:p>
             <a:fld id="{14C7401E-E5C6-4ADA-88C9-F7478DD83A36}" type="datetimeFigureOut">
               <a:rPr lang="en-CA" smtClean="0"/>
-              <a:t>2026-10-08</a:t>
+              <a:t>2026-10-29</a:t>
             </a:fld>
             <a:endParaRPr lang="en-CA"/>
           </a:p>
@@ -4908,7 +2957,7 @@
           <a:p>
             <a:fld id="{14C7401E-E5C6-4ADA-88C9-F7478DD83A36}" type="datetimeFigureOut">
               <a:rPr lang="en-CA" smtClean="0"/>
-              <a:t>2026-10-08</a:t>
+              <a:t>2026-10-29</a:t>
             </a:fld>
             <a:endParaRPr lang="en-CA"/>
           </a:p>
@@ -5165,7 +3214,7 @@
           <a:p>
             <a:fld id="{14C7401E-E5C6-4ADA-88C9-F7478DD83A36}" type="datetimeFigureOut">
               <a:rPr lang="en-CA" smtClean="0"/>
-              <a:t>2026-10-08</a:t>
+              <a:t>2026-10-29</a:t>
             </a:fld>
             <a:endParaRPr lang="en-CA"/>
           </a:p>
@@ -5378,7 +3427,7 @@
           <a:p>
             <a:fld id="{14C7401E-E5C6-4ADA-88C9-F7478DD83A36}" type="datetimeFigureOut">
               <a:rPr lang="en-CA" smtClean="0"/>
-              <a:t>2026-10-08</a:t>
+              <a:t>2026-10-29</a:t>
             </a:fld>
             <a:endParaRPr lang="en-CA"/>
           </a:p>
@@ -33869,199 +31918,182 @@
           </a:p>
         </p:txBody>
       </p:sp>
-      <p:grpSp>
-        <p:nvGrpSpPr>
-          <p:cNvPr id="101" name="Group 100">
+      <p:sp>
+        <p:nvSpPr>
+          <p:cNvPr id="102" name="Rectangle: Rounded Corners 101">
             <a:extLst>
               <a:ext uri="{FF2B5EF4-FFF2-40B4-BE49-F238E27FC236}">
-                <a16:creationId xmlns:a16="http://schemas.microsoft.com/office/drawing/2014/main" id="{289B4344-44B1-7B7B-6582-107B59ACA215}"/>
+                <a16:creationId xmlns:a16="http://schemas.microsoft.com/office/drawing/2014/main" id="{9B1082D1-6CDD-9B18-C7DD-8265702DAFCC}"/>
               </a:ext>
             </a:extLst>
           </p:cNvPr>
-          <p:cNvGrpSpPr/>
+          <p:cNvSpPr/>
           <p:nvPr/>
-        </p:nvGrpSpPr>
-        <p:grpSpPr>
+        </p:nvSpPr>
+        <p:spPr>
           <a:xfrm>
             <a:off x="13513339" y="1174989"/>
             <a:ext cx="1231200" cy="1231200"/>
-            <a:chOff x="30365779" y="3139413"/>
-            <a:chExt cx="2146840" cy="2592670"/>
           </a:xfrm>
+          <a:prstGeom prst="roundRect">
+            <a:avLst>
+              <a:gd name="adj" fmla="val 6196"/>
+            </a:avLst>
+          </a:prstGeom>
           <a:solidFill>
             <a:schemeClr val="accent2">
               <a:lumMod val="20000"/>
               <a:lumOff val="80000"/>
             </a:schemeClr>
           </a:solidFill>
-        </p:grpSpPr>
-        <p:sp>
-          <p:nvSpPr>
-            <p:cNvPr id="102" name="Rectangle: Rounded Corners 101">
-              <a:extLst>
-                <a:ext uri="{FF2B5EF4-FFF2-40B4-BE49-F238E27FC236}">
-                  <a16:creationId xmlns:a16="http://schemas.microsoft.com/office/drawing/2014/main" id="{9B1082D1-6CDD-9B18-C7DD-8265702DAFCC}"/>
-                </a:ext>
-              </a:extLst>
-            </p:cNvPr>
-            <p:cNvSpPr/>
-            <p:nvPr/>
-          </p:nvSpPr>
-          <p:spPr>
-            <a:xfrm>
-              <a:off x="30365779" y="3139413"/>
-              <a:ext cx="2146840" cy="2592670"/>
-            </a:xfrm>
-            <a:prstGeom prst="roundRect">
-              <a:avLst>
-                <a:gd name="adj" fmla="val 6196"/>
-              </a:avLst>
-            </a:prstGeom>
-            <a:grpFill/>
-            <a:ln w="19050">
+          <a:ln w="19050">
+            <a:solidFill>
+              <a:schemeClr val="accent2">
+                <a:lumMod val="75000"/>
+              </a:schemeClr>
+            </a:solidFill>
+          </a:ln>
+        </p:spPr>
+        <p:style>
+          <a:lnRef idx="2">
+            <a:schemeClr val="accent1">
+              <a:shade val="15000"/>
+            </a:schemeClr>
+          </a:lnRef>
+          <a:fillRef idx="1">
+            <a:schemeClr val="accent1"/>
+          </a:fillRef>
+          <a:effectRef idx="0">
+            <a:schemeClr val="accent1"/>
+          </a:effectRef>
+          <a:fontRef idx="minor">
+            <a:schemeClr val="lt1"/>
+          </a:fontRef>
+        </p:style>
+        <p:txBody>
+          <a:bodyPr rtlCol="0" anchor="t" anchorCtr="0"/>
+          <a:lstStyle/>
+          <a:p>
+            <a:pPr algn="ctr"/>
+            <a:endParaRPr lang="en-US" sz="467" b="1" dirty="0">
               <a:solidFill>
-                <a:schemeClr val="accent2">
-                  <a:lumMod val="75000"/>
-                </a:schemeClr>
+                <a:schemeClr val="tx1"/>
               </a:solidFill>
-            </a:ln>
-          </p:spPr>
-          <p:style>
-            <a:lnRef idx="2">
-              <a:schemeClr val="accent1">
-                <a:shade val="15000"/>
-              </a:schemeClr>
-            </a:lnRef>
-            <a:fillRef idx="1">
-              <a:schemeClr val="accent1"/>
-            </a:fillRef>
-            <a:effectRef idx="0">
-              <a:schemeClr val="accent1"/>
-            </a:effectRef>
-            <a:fontRef idx="minor">
-              <a:schemeClr val="lt1"/>
-            </a:fontRef>
-          </p:style>
-          <p:txBody>
-            <a:bodyPr rtlCol="0" anchor="t" anchorCtr="0"/>
-            <a:lstStyle/>
-            <a:p>
-              <a:pPr algn="ctr"/>
-              <a:endParaRPr lang="en-US" sz="467" b="1" dirty="0">
+              <a:latin typeface="Times New Roman" panose="02020603050405020304" pitchFamily="18" charset="0"/>
+              <a:cs typeface="Times New Roman" panose="02020603050405020304" pitchFamily="18" charset="0"/>
+            </a:endParaRPr>
+          </a:p>
+          <a:p>
+            <a:pPr algn="ctr"/>
+            <a:endParaRPr lang="en-US" sz="467" b="1" dirty="0">
+              <a:solidFill>
+                <a:schemeClr val="tx1"/>
+              </a:solidFill>
+              <a:latin typeface="Times New Roman" panose="02020603050405020304" pitchFamily="18" charset="0"/>
+              <a:cs typeface="Times New Roman" panose="02020603050405020304" pitchFamily="18" charset="0"/>
+            </a:endParaRPr>
+          </a:p>
+          <a:p>
+            <a:pPr algn="ctr"/>
+            <a:r>
+              <a:rPr lang="en-US" sz="1400" b="1" dirty="0">
                 <a:solidFill>
                   <a:schemeClr val="tx1"/>
                 </a:solidFill>
                 <a:latin typeface="Times New Roman" panose="02020603050405020304" pitchFamily="18" charset="0"/>
                 <a:cs typeface="Times New Roman" panose="02020603050405020304" pitchFamily="18" charset="0"/>
-              </a:endParaRPr>
-            </a:p>
-            <a:p>
-              <a:pPr algn="ctr"/>
-              <a:endParaRPr lang="en-US" sz="467" b="1" dirty="0">
-                <a:solidFill>
-                  <a:schemeClr val="tx1"/>
-                </a:solidFill>
-                <a:latin typeface="Times New Roman" panose="02020603050405020304" pitchFamily="18" charset="0"/>
-                <a:cs typeface="Times New Roman" panose="02020603050405020304" pitchFamily="18" charset="0"/>
-              </a:endParaRPr>
-            </a:p>
-            <a:p>
-              <a:pPr algn="ctr"/>
-              <a:r>
-                <a:rPr lang="en-US" sz="1400" b="1" dirty="0">
-                  <a:solidFill>
-                    <a:schemeClr val="tx1"/>
-                  </a:solidFill>
-                  <a:latin typeface="Times New Roman" panose="02020603050405020304" pitchFamily="18" charset="0"/>
-                  <a:cs typeface="Times New Roman" panose="02020603050405020304" pitchFamily="18" charset="0"/>
-                </a:rPr>
-                <a:t>Inverter</a:t>
-              </a:r>
-            </a:p>
-            <a:p>
-              <a:pPr algn="ctr"/>
-              <a:endParaRPr lang="en-US" sz="467" b="1" dirty="0">
-                <a:solidFill>
-                  <a:schemeClr val="tx1"/>
-                </a:solidFill>
-                <a:latin typeface="Times New Roman" panose="02020603050405020304" pitchFamily="18" charset="0"/>
-                <a:cs typeface="Times New Roman" panose="02020603050405020304" pitchFamily="18" charset="0"/>
-              </a:endParaRPr>
-            </a:p>
-            <a:p>
-              <a:pPr algn="ctr"/>
-              <a:endParaRPr lang="en-US" sz="467" b="1" dirty="0">
-                <a:solidFill>
-                  <a:schemeClr val="tx1"/>
-                </a:solidFill>
-                <a:latin typeface="Times New Roman" panose="02020603050405020304" pitchFamily="18" charset="0"/>
-                <a:cs typeface="Times New Roman" panose="02020603050405020304" pitchFamily="18" charset="0"/>
-              </a:endParaRPr>
-            </a:p>
-            <a:p>
-              <a:pPr algn="ctr"/>
-              <a:endParaRPr lang="en-US" sz="467" b="1" dirty="0">
-                <a:solidFill>
-                  <a:schemeClr val="tx1"/>
-                </a:solidFill>
-                <a:latin typeface="Times New Roman" panose="02020603050405020304" pitchFamily="18" charset="0"/>
-                <a:cs typeface="Times New Roman" panose="02020603050405020304" pitchFamily="18" charset="0"/>
-              </a:endParaRPr>
-            </a:p>
-            <a:p>
-              <a:pPr algn="ctr"/>
-              <a:endParaRPr lang="en-CA" sz="467" b="1" dirty="0">
-                <a:solidFill>
-                  <a:schemeClr val="tx1"/>
-                </a:solidFill>
-                <a:latin typeface="Times New Roman" panose="02020603050405020304" pitchFamily="18" charset="0"/>
-                <a:cs typeface="Times New Roman" panose="02020603050405020304" pitchFamily="18" charset="0"/>
-              </a:endParaRPr>
-            </a:p>
-          </p:txBody>
-        </p:sp>
-        <p:pic>
-          <p:nvPicPr>
-            <p:cNvPr id="103" name="Picture 102">
-              <a:extLst>
-                <a:ext uri="{FF2B5EF4-FFF2-40B4-BE49-F238E27FC236}">
-                  <a16:creationId xmlns:a16="http://schemas.microsoft.com/office/drawing/2014/main" id="{B554567E-38EA-F25D-5AD3-FD5BD2ADF56C}"/>
-                </a:ext>
-              </a:extLst>
-            </p:cNvPr>
-            <p:cNvPicPr>
-              <a:picLocks noChangeAspect="1"/>
-            </p:cNvPicPr>
-            <p:nvPr/>
-          </p:nvPicPr>
-          <p:blipFill>
-            <a:blip r:embed="rId18">
-              <a:extLst>
-                <a:ext uri="{28A0092B-C50C-407E-A947-70E740481C1C}">
-                  <a14:useLocalDpi xmlns:a14="http://schemas.microsoft.com/office/drawing/2010/main" val="0"/>
-                </a:ext>
-              </a:extLst>
-            </a:blip>
-            <a:srcRect l="4198" r="4330"/>
-            <a:stretch>
-              <a:fillRect/>
-            </a:stretch>
-          </p:blipFill>
-          <p:spPr>
-            <a:xfrm>
-              <a:off x="30407609" y="4081707"/>
-              <a:ext cx="2063191" cy="1503694"/>
-            </a:xfrm>
-            <a:prstGeom prst="rect">
-              <a:avLst/>
-            </a:prstGeom>
-            <a:grpFill/>
-            <a:ln>
-              <a:noFill/>
-            </a:ln>
-          </p:spPr>
-        </p:pic>
-      </p:grpSp>
+              </a:rPr>
+              <a:t>Inverter</a:t>
+            </a:r>
+          </a:p>
+          <a:p>
+            <a:pPr algn="ctr"/>
+            <a:endParaRPr lang="en-US" sz="467" b="1" dirty="0">
+              <a:solidFill>
+                <a:schemeClr val="tx1"/>
+              </a:solidFill>
+              <a:latin typeface="Times New Roman" panose="02020603050405020304" pitchFamily="18" charset="0"/>
+              <a:cs typeface="Times New Roman" panose="02020603050405020304" pitchFamily="18" charset="0"/>
+            </a:endParaRPr>
+          </a:p>
+          <a:p>
+            <a:pPr algn="ctr"/>
+            <a:endParaRPr lang="en-US" sz="467" b="1" dirty="0">
+              <a:solidFill>
+                <a:schemeClr val="tx1"/>
+              </a:solidFill>
+              <a:latin typeface="Times New Roman" panose="02020603050405020304" pitchFamily="18" charset="0"/>
+              <a:cs typeface="Times New Roman" panose="02020603050405020304" pitchFamily="18" charset="0"/>
+            </a:endParaRPr>
+          </a:p>
+          <a:p>
+            <a:pPr algn="ctr"/>
+            <a:endParaRPr lang="en-US" sz="467" b="1" dirty="0">
+              <a:solidFill>
+                <a:schemeClr val="tx1"/>
+              </a:solidFill>
+              <a:latin typeface="Times New Roman" panose="02020603050405020304" pitchFamily="18" charset="0"/>
+              <a:cs typeface="Times New Roman" panose="02020603050405020304" pitchFamily="18" charset="0"/>
+            </a:endParaRPr>
+          </a:p>
+          <a:p>
+            <a:pPr algn="ctr"/>
+            <a:endParaRPr lang="en-CA" sz="467" b="1" dirty="0">
+              <a:solidFill>
+                <a:schemeClr val="tx1"/>
+              </a:solidFill>
+              <a:latin typeface="Times New Roman" panose="02020603050405020304" pitchFamily="18" charset="0"/>
+              <a:cs typeface="Times New Roman" panose="02020603050405020304" pitchFamily="18" charset="0"/>
+            </a:endParaRPr>
+          </a:p>
+        </p:txBody>
+      </p:sp>
+      <p:pic>
+        <p:nvPicPr>
+          <p:cNvPr id="103" name="Picture 102">
+            <a:extLst>
+              <a:ext uri="{FF2B5EF4-FFF2-40B4-BE49-F238E27FC236}">
+                <a16:creationId xmlns:a16="http://schemas.microsoft.com/office/drawing/2014/main" id="{B554567E-38EA-F25D-5AD3-FD5BD2ADF56C}"/>
+              </a:ext>
+            </a:extLst>
+          </p:cNvPr>
+          <p:cNvPicPr>
+            <a:picLocks noChangeAspect="1"/>
+          </p:cNvPicPr>
+          <p:nvPr/>
+        </p:nvPicPr>
+        <p:blipFill>
+          <a:blip r:embed="rId18">
+            <a:extLst>
+              <a:ext uri="{28A0092B-C50C-407E-A947-70E740481C1C}">
+                <a14:useLocalDpi xmlns:a14="http://schemas.microsoft.com/office/drawing/2010/main" val="0"/>
+              </a:ext>
+            </a:extLst>
+          </a:blip>
+          <a:srcRect l="4198" r="4330"/>
+          <a:stretch>
+            <a:fillRect/>
+          </a:stretch>
+        </p:blipFill>
+        <p:spPr>
+          <a:xfrm>
+            <a:off x="13537328" y="1622463"/>
+            <a:ext cx="1183228" cy="714070"/>
+          </a:xfrm>
+          <a:prstGeom prst="rect">
+            <a:avLst/>
+          </a:prstGeom>
+          <a:solidFill>
+            <a:schemeClr val="accent2">
+              <a:lumMod val="20000"/>
+              <a:lumOff val="80000"/>
+            </a:schemeClr>
+          </a:solidFill>
+          <a:ln>
+            <a:noFill/>
+          </a:ln>
+        </p:spPr>
+      </p:pic>
       <mc:AlternateContent xmlns:mc="http://schemas.openxmlformats.org/markup-compatibility/2006" xmlns:a14="http://schemas.microsoft.com/office/drawing/2010/main">
         <mc:Choice Requires="a14">
           <p:sp>
@@ -40079,8 +38111,18 @@
           </a:fontRef>
         </p:style>
         <p:txBody>
-          <a:bodyPr rtlCol="0" anchor="ctr" anchorCtr="0"/>
+          <a:bodyPr rtlCol="0" anchor="t" anchorCtr="0"/>
           <a:lstStyle/>
+          <a:p>
+            <a:pPr algn="ctr"/>
+            <a:endParaRPr lang="en-US" sz="1400" b="1" dirty="0">
+              <a:solidFill>
+                <a:schemeClr val="tx1"/>
+              </a:solidFill>
+              <a:latin typeface="Times New Roman" panose="02020603050405020304" pitchFamily="18" charset="0"/>
+              <a:cs typeface="Times New Roman" panose="02020603050405020304" pitchFamily="18" charset="0"/>
+            </a:endParaRPr>
+          </a:p>
           <a:p>
             <a:pPr algn="ctr"/>
             <a:r>
@@ -40096,199 +38138,136 @@
           </a:p>
         </p:txBody>
       </p:sp>
-      <p:grpSp>
-        <p:nvGrpSpPr>
-          <p:cNvPr id="101" name="Group 100">
+      <p:sp>
+        <p:nvSpPr>
+          <p:cNvPr id="102" name="Rectangle: Rounded Corners 101">
             <a:extLst>
               <a:ext uri="{FF2B5EF4-FFF2-40B4-BE49-F238E27FC236}">
-                <a16:creationId xmlns:a16="http://schemas.microsoft.com/office/drawing/2014/main" id="{BE9A6059-EE12-FB37-0089-285A11E84759}"/>
+                <a16:creationId xmlns:a16="http://schemas.microsoft.com/office/drawing/2014/main" id="{9592EF24-4962-D75F-8E55-F1FDF163CFAA}"/>
               </a:ext>
             </a:extLst>
           </p:cNvPr>
-          <p:cNvGrpSpPr/>
+          <p:cNvSpPr/>
           <p:nvPr/>
-        </p:nvGrpSpPr>
-        <p:grpSpPr>
+        </p:nvSpPr>
+        <p:spPr>
           <a:xfrm>
             <a:off x="14237239" y="1568689"/>
             <a:ext cx="1231200" cy="1231200"/>
-            <a:chOff x="30365779" y="3139413"/>
-            <a:chExt cx="2146840" cy="2592670"/>
           </a:xfrm>
+          <a:prstGeom prst="roundRect">
+            <a:avLst>
+              <a:gd name="adj" fmla="val 6196"/>
+            </a:avLst>
+          </a:prstGeom>
           <a:solidFill>
             <a:schemeClr val="accent2">
               <a:lumMod val="20000"/>
               <a:lumOff val="80000"/>
             </a:schemeClr>
           </a:solidFill>
-        </p:grpSpPr>
-        <p:sp>
-          <p:nvSpPr>
-            <p:cNvPr id="102" name="Rectangle: Rounded Corners 101">
-              <a:extLst>
-                <a:ext uri="{FF2B5EF4-FFF2-40B4-BE49-F238E27FC236}">
-                  <a16:creationId xmlns:a16="http://schemas.microsoft.com/office/drawing/2014/main" id="{9592EF24-4962-D75F-8E55-F1FDF163CFAA}"/>
-                </a:ext>
-              </a:extLst>
-            </p:cNvPr>
-            <p:cNvSpPr/>
-            <p:nvPr/>
-          </p:nvSpPr>
-          <p:spPr>
-            <a:xfrm>
-              <a:off x="30365779" y="3139413"/>
-              <a:ext cx="2146840" cy="2592670"/>
-            </a:xfrm>
-            <a:prstGeom prst="roundRect">
-              <a:avLst>
-                <a:gd name="adj" fmla="val 6196"/>
-              </a:avLst>
-            </a:prstGeom>
-            <a:grpFill/>
-            <a:ln w="19050">
+          <a:ln w="19050">
+            <a:solidFill>
+              <a:schemeClr val="accent2">
+                <a:lumMod val="75000"/>
+              </a:schemeClr>
+            </a:solidFill>
+          </a:ln>
+        </p:spPr>
+        <p:style>
+          <a:lnRef idx="2">
+            <a:schemeClr val="accent1">
+              <a:shade val="15000"/>
+            </a:schemeClr>
+          </a:lnRef>
+          <a:fillRef idx="1">
+            <a:schemeClr val="accent1"/>
+          </a:fillRef>
+          <a:effectRef idx="0">
+            <a:schemeClr val="accent1"/>
+          </a:effectRef>
+          <a:fontRef idx="minor">
+            <a:schemeClr val="lt1"/>
+          </a:fontRef>
+        </p:style>
+        <p:txBody>
+          <a:bodyPr rtlCol="0" anchor="t" anchorCtr="0"/>
+          <a:lstStyle/>
+          <a:p>
+            <a:pPr algn="ctr"/>
+            <a:endParaRPr lang="en-US" sz="467" b="1" dirty="0">
               <a:solidFill>
-                <a:schemeClr val="accent2">
-                  <a:lumMod val="75000"/>
-                </a:schemeClr>
+                <a:schemeClr val="tx1"/>
               </a:solidFill>
-            </a:ln>
-          </p:spPr>
-          <p:style>
-            <a:lnRef idx="2">
-              <a:schemeClr val="accent1">
-                <a:shade val="15000"/>
-              </a:schemeClr>
-            </a:lnRef>
-            <a:fillRef idx="1">
-              <a:schemeClr val="accent1"/>
-            </a:fillRef>
-            <a:effectRef idx="0">
-              <a:schemeClr val="accent1"/>
-            </a:effectRef>
-            <a:fontRef idx="minor">
-              <a:schemeClr val="lt1"/>
-            </a:fontRef>
-          </p:style>
-          <p:txBody>
-            <a:bodyPr rtlCol="0" anchor="t" anchorCtr="0"/>
-            <a:lstStyle/>
-            <a:p>
-              <a:pPr algn="ctr"/>
-              <a:endParaRPr lang="en-US" sz="467" b="1" dirty="0">
+              <a:latin typeface="Times New Roman" panose="02020603050405020304" pitchFamily="18" charset="0"/>
+              <a:cs typeface="Times New Roman" panose="02020603050405020304" pitchFamily="18" charset="0"/>
+            </a:endParaRPr>
+          </a:p>
+          <a:p>
+            <a:pPr algn="ctr"/>
+            <a:endParaRPr lang="en-US" sz="467" b="1" dirty="0">
+              <a:solidFill>
+                <a:schemeClr val="tx1"/>
+              </a:solidFill>
+              <a:latin typeface="Times New Roman" panose="02020603050405020304" pitchFamily="18" charset="0"/>
+              <a:cs typeface="Times New Roman" panose="02020603050405020304" pitchFamily="18" charset="0"/>
+            </a:endParaRPr>
+          </a:p>
+          <a:p>
+            <a:pPr algn="ctr"/>
+            <a:r>
+              <a:rPr lang="en-US" sz="1400" b="1" dirty="0">
                 <a:solidFill>
                   <a:schemeClr val="tx1"/>
                 </a:solidFill>
                 <a:latin typeface="Times New Roman" panose="02020603050405020304" pitchFamily="18" charset="0"/>
                 <a:cs typeface="Times New Roman" panose="02020603050405020304" pitchFamily="18" charset="0"/>
-              </a:endParaRPr>
-            </a:p>
-            <a:p>
-              <a:pPr algn="ctr"/>
-              <a:endParaRPr lang="en-US" sz="467" b="1" dirty="0">
-                <a:solidFill>
-                  <a:schemeClr val="tx1"/>
-                </a:solidFill>
-                <a:latin typeface="Times New Roman" panose="02020603050405020304" pitchFamily="18" charset="0"/>
-                <a:cs typeface="Times New Roman" panose="02020603050405020304" pitchFamily="18" charset="0"/>
-              </a:endParaRPr>
-            </a:p>
-            <a:p>
-              <a:pPr algn="ctr"/>
-              <a:r>
-                <a:rPr lang="en-US" sz="1400" b="1" dirty="0">
-                  <a:solidFill>
-                    <a:schemeClr val="tx1"/>
-                  </a:solidFill>
-                  <a:latin typeface="Times New Roman" panose="02020603050405020304" pitchFamily="18" charset="0"/>
-                  <a:cs typeface="Times New Roman" panose="02020603050405020304" pitchFamily="18" charset="0"/>
-                </a:rPr>
-                <a:t>Inverter</a:t>
-              </a:r>
-            </a:p>
-            <a:p>
-              <a:pPr algn="ctr"/>
-              <a:endParaRPr lang="en-US" sz="467" b="1" dirty="0">
-                <a:solidFill>
-                  <a:schemeClr val="tx1"/>
-                </a:solidFill>
-                <a:latin typeface="Times New Roman" panose="02020603050405020304" pitchFamily="18" charset="0"/>
-                <a:cs typeface="Times New Roman" panose="02020603050405020304" pitchFamily="18" charset="0"/>
-              </a:endParaRPr>
-            </a:p>
-            <a:p>
-              <a:pPr algn="ctr"/>
-              <a:endParaRPr lang="en-US" sz="467" b="1" dirty="0">
-                <a:solidFill>
-                  <a:schemeClr val="tx1"/>
-                </a:solidFill>
-                <a:latin typeface="Times New Roman" panose="02020603050405020304" pitchFamily="18" charset="0"/>
-                <a:cs typeface="Times New Roman" panose="02020603050405020304" pitchFamily="18" charset="0"/>
-              </a:endParaRPr>
-            </a:p>
-            <a:p>
-              <a:pPr algn="ctr"/>
-              <a:endParaRPr lang="en-US" sz="467" b="1" dirty="0">
-                <a:solidFill>
-                  <a:schemeClr val="tx1"/>
-                </a:solidFill>
-                <a:latin typeface="Times New Roman" panose="02020603050405020304" pitchFamily="18" charset="0"/>
-                <a:cs typeface="Times New Roman" panose="02020603050405020304" pitchFamily="18" charset="0"/>
-              </a:endParaRPr>
-            </a:p>
-            <a:p>
-              <a:pPr algn="ctr"/>
-              <a:endParaRPr lang="en-CA" sz="467" b="1" dirty="0">
-                <a:solidFill>
-                  <a:schemeClr val="tx1"/>
-                </a:solidFill>
-                <a:latin typeface="Times New Roman" panose="02020603050405020304" pitchFamily="18" charset="0"/>
-                <a:cs typeface="Times New Roman" panose="02020603050405020304" pitchFamily="18" charset="0"/>
-              </a:endParaRPr>
-            </a:p>
-          </p:txBody>
-        </p:sp>
-        <p:pic>
-          <p:nvPicPr>
-            <p:cNvPr id="103" name="Picture 102">
-              <a:extLst>
-                <a:ext uri="{FF2B5EF4-FFF2-40B4-BE49-F238E27FC236}">
-                  <a16:creationId xmlns:a16="http://schemas.microsoft.com/office/drawing/2014/main" id="{3C8EA0AB-9FC3-D7A8-D0EF-C5A875E63BB7}"/>
-                </a:ext>
-              </a:extLst>
-            </p:cNvPr>
-            <p:cNvPicPr>
-              <a:picLocks noChangeAspect="1"/>
-            </p:cNvPicPr>
-            <p:nvPr/>
-          </p:nvPicPr>
-          <p:blipFill>
-            <a:blip r:embed="rId18">
-              <a:extLst>
-                <a:ext uri="{28A0092B-C50C-407E-A947-70E740481C1C}">
-                  <a14:useLocalDpi xmlns:a14="http://schemas.microsoft.com/office/drawing/2010/main" val="0"/>
-                </a:ext>
-              </a:extLst>
-            </a:blip>
-            <a:srcRect l="4198" r="4330"/>
-            <a:stretch>
-              <a:fillRect/>
-            </a:stretch>
-          </p:blipFill>
-          <p:spPr>
-            <a:xfrm>
-              <a:off x="30407609" y="4081707"/>
-              <a:ext cx="2063191" cy="1503694"/>
-            </a:xfrm>
-            <a:prstGeom prst="rect">
-              <a:avLst/>
-            </a:prstGeom>
-            <a:grpFill/>
-            <a:ln>
-              <a:noFill/>
-            </a:ln>
-          </p:spPr>
-        </p:pic>
-      </p:grpSp>
+              </a:rPr>
+              <a:t>Inverter</a:t>
+            </a:r>
+          </a:p>
+          <a:p>
+            <a:pPr algn="ctr"/>
+            <a:endParaRPr lang="en-US" sz="467" b="1" dirty="0">
+              <a:solidFill>
+                <a:schemeClr val="tx1"/>
+              </a:solidFill>
+              <a:latin typeface="Times New Roman" panose="02020603050405020304" pitchFamily="18" charset="0"/>
+              <a:cs typeface="Times New Roman" panose="02020603050405020304" pitchFamily="18" charset="0"/>
+            </a:endParaRPr>
+          </a:p>
+          <a:p>
+            <a:pPr algn="ctr"/>
+            <a:endParaRPr lang="en-US" sz="467" b="1" dirty="0">
+              <a:solidFill>
+                <a:schemeClr val="tx1"/>
+              </a:solidFill>
+              <a:latin typeface="Times New Roman" panose="02020603050405020304" pitchFamily="18" charset="0"/>
+              <a:cs typeface="Times New Roman" panose="02020603050405020304" pitchFamily="18" charset="0"/>
+            </a:endParaRPr>
+          </a:p>
+          <a:p>
+            <a:pPr algn="ctr"/>
+            <a:endParaRPr lang="en-US" sz="467" b="1" dirty="0">
+              <a:solidFill>
+                <a:schemeClr val="tx1"/>
+              </a:solidFill>
+              <a:latin typeface="Times New Roman" panose="02020603050405020304" pitchFamily="18" charset="0"/>
+              <a:cs typeface="Times New Roman" panose="02020603050405020304" pitchFamily="18" charset="0"/>
+            </a:endParaRPr>
+          </a:p>
+          <a:p>
+            <a:pPr algn="ctr"/>
+            <a:endParaRPr lang="en-CA" sz="467" b="1" dirty="0">
+              <a:solidFill>
+                <a:schemeClr val="tx1"/>
+              </a:solidFill>
+              <a:latin typeface="Times New Roman" panose="02020603050405020304" pitchFamily="18" charset="0"/>
+              <a:cs typeface="Times New Roman" panose="02020603050405020304" pitchFamily="18" charset="0"/>
+            </a:endParaRPr>
+          </a:p>
+        </p:txBody>
+      </p:sp>
       <mc:AlternateContent xmlns:mc="http://schemas.openxmlformats.org/markup-compatibility/2006" xmlns:a14="http://schemas.microsoft.com/office/drawing/2010/main">
         <mc:Choice Requires="a14">
           <p:sp>
@@ -41141,7 +39120,7 @@
         </p:nvSpPr>
         <p:spPr>
           <a:xfrm>
-            <a:off x="5593580" y="1593860"/>
+            <a:off x="3710805" y="1593860"/>
             <a:ext cx="1409421" cy="424801"/>
           </a:xfrm>
           <a:prstGeom prst="roundRect">
@@ -41217,7 +39196,7 @@
         </p:nvSpPr>
         <p:spPr>
           <a:xfrm>
-            <a:off x="5593580" y="2324482"/>
+            <a:off x="3710805" y="2324482"/>
             <a:ext cx="1409421" cy="424801"/>
           </a:xfrm>
           <a:prstGeom prst="roundRect">
@@ -41295,7 +39274,7 @@
             </p:nvSpPr>
             <p:spPr>
               <a:xfrm>
-                <a:off x="8016232" y="1504484"/>
+                <a:off x="6133457" y="1504484"/>
                 <a:ext cx="304800" cy="307777"/>
               </a:xfrm>
               <a:prstGeom prst="rect">
@@ -41374,7 +39353,7 @@
             </p:nvSpPr>
             <p:spPr>
               <a:xfrm>
-                <a:off x="8016232" y="1504484"/>
+                <a:off x="6133457" y="1504484"/>
                 <a:ext cx="304800" cy="307777"/>
               </a:xfrm>
               <a:prstGeom prst="rect">
@@ -41383,7 +39362,7 @@
               <a:blipFill>
                 <a:blip r:embed="rId23"/>
                 <a:stretch>
-                  <a:fillRect r="-2000"/>
+                  <a:fillRect r="-4000"/>
                 </a:stretch>
               </a:blipFill>
             </p:spPr>
@@ -41418,7 +39397,7 @@
             </p:nvSpPr>
             <p:spPr>
               <a:xfrm>
-                <a:off x="8016232" y="2217349"/>
+                <a:off x="6133457" y="2217349"/>
                 <a:ext cx="304800" cy="324384"/>
               </a:xfrm>
               <a:prstGeom prst="rect">
@@ -41497,7 +39476,7 @@
             </p:nvSpPr>
             <p:spPr>
               <a:xfrm>
-                <a:off x="8016232" y="2217349"/>
+                <a:off x="6133457" y="2217349"/>
                 <a:ext cx="304800" cy="324384"/>
               </a:xfrm>
               <a:prstGeom prst="rect">
@@ -41541,7 +39520,7 @@
         </p:nvCxnSpPr>
         <p:spPr>
           <a:xfrm>
-            <a:off x="7931876" y="1806193"/>
+            <a:off x="6049101" y="1806193"/>
             <a:ext cx="648000" cy="0"/>
           </a:xfrm>
           <a:prstGeom prst="straightConnector1">
@@ -41585,7 +39564,7 @@
         </p:nvCxnSpPr>
         <p:spPr>
           <a:xfrm>
-            <a:off x="7931876" y="2537523"/>
+            <a:off x="6049101" y="2537523"/>
             <a:ext cx="648000" cy="0"/>
           </a:xfrm>
           <a:prstGeom prst="straightConnector1">
@@ -42219,7 +40198,7 @@
         </p:nvSpPr>
         <p:spPr>
           <a:xfrm>
-            <a:off x="4817922" y="1679911"/>
+            <a:off x="2935147" y="1679911"/>
             <a:ext cx="252450" cy="252000"/>
           </a:xfrm>
           <a:prstGeom prst="ellipse">
@@ -42273,7 +40252,7 @@
         </p:nvSpPr>
         <p:spPr>
           <a:xfrm>
-            <a:off x="4622530" y="1479842"/>
+            <a:off x="2739755" y="1479842"/>
             <a:ext cx="177024" cy="307777"/>
           </a:xfrm>
           <a:prstGeom prst="rect">
@@ -42309,7 +40288,7 @@
         </p:nvSpPr>
         <p:spPr>
           <a:xfrm>
-            <a:off x="4996644" y="1745190"/>
+            <a:off x="3113869" y="1745190"/>
             <a:ext cx="202299" cy="338554"/>
           </a:xfrm>
           <a:prstGeom prst="rect">
@@ -42347,7 +40326,7 @@
         </p:nvSpPr>
         <p:spPr>
           <a:xfrm>
-            <a:off x="3953904" y="2410882"/>
+            <a:off x="2071129" y="2410882"/>
             <a:ext cx="252450" cy="252000"/>
           </a:xfrm>
           <a:prstGeom prst="ellipse">
@@ -42401,7 +40380,7 @@
         </p:nvSpPr>
         <p:spPr>
           <a:xfrm>
-            <a:off x="3740843" y="2240821"/>
+            <a:off x="1858068" y="2240821"/>
             <a:ext cx="177024" cy="307777"/>
           </a:xfrm>
           <a:prstGeom prst="rect">
@@ -42437,7 +40416,7 @@
         </p:nvSpPr>
         <p:spPr>
           <a:xfrm>
-            <a:off x="4126255" y="2461335"/>
+            <a:off x="2243480" y="2461335"/>
             <a:ext cx="202299" cy="338554"/>
           </a:xfrm>
           <a:prstGeom prst="rect">
@@ -42476,7 +40455,7 @@
         </p:nvCxnSpPr>
         <p:spPr>
           <a:xfrm>
-            <a:off x="4206354" y="2536882"/>
+            <a:off x="2323579" y="2536882"/>
             <a:ext cx="1387226" cy="1"/>
           </a:xfrm>
           <a:prstGeom prst="straightConnector1">
@@ -42521,7 +40500,7 @@
         </p:nvCxnSpPr>
         <p:spPr>
           <a:xfrm>
-            <a:off x="5070372" y="1805911"/>
+            <a:off x="3187597" y="1805911"/>
             <a:ext cx="523208" cy="350"/>
           </a:xfrm>
           <a:prstGeom prst="straightConnector1">
@@ -42567,8 +40546,8 @@
         </p:nvCxnSpPr>
         <p:spPr>
           <a:xfrm rot="10800000">
-            <a:off x="4944148" y="1931912"/>
-            <a:ext cx="5677987" cy="2284529"/>
+            <a:off x="3061372" y="1931912"/>
+            <a:ext cx="7559486" cy="2284529"/>
           </a:xfrm>
           <a:prstGeom prst="bentConnector2">
             <a:avLst/>
@@ -42612,8 +40591,8 @@
         </p:nvCxnSpPr>
         <p:spPr>
           <a:xfrm rot="10800000">
-            <a:off x="4080130" y="2662883"/>
-            <a:ext cx="6540899" cy="2284531"/>
+            <a:off x="2197354" y="2662882"/>
+            <a:ext cx="8423504" cy="2284530"/>
           </a:xfrm>
           <a:prstGeom prst="bentConnector2">
             <a:avLst/>
@@ -42802,7 +40781,7 @@
         </p:nvCxnSpPr>
         <p:spPr>
           <a:xfrm>
-            <a:off x="3285268" y="2536882"/>
+            <a:off x="1402493" y="2536882"/>
             <a:ext cx="668636" cy="0"/>
           </a:xfrm>
           <a:prstGeom prst="straightConnector1">
@@ -42847,7 +40826,7 @@
         </p:nvCxnSpPr>
         <p:spPr>
           <a:xfrm>
-            <a:off x="3275033" y="1803303"/>
+            <a:off x="1392258" y="1803303"/>
             <a:ext cx="1542889" cy="2608"/>
           </a:xfrm>
           <a:prstGeom prst="straightConnector1">
@@ -42891,7 +40870,7 @@
             </p:nvSpPr>
             <p:spPr>
               <a:xfrm>
-                <a:off x="2943585" y="1649414"/>
+                <a:off x="1060810" y="1649414"/>
                 <a:ext cx="304800" cy="307777"/>
               </a:xfrm>
               <a:prstGeom prst="rect">
@@ -42970,7 +40949,7 @@
             </p:nvSpPr>
             <p:spPr>
               <a:xfrm>
-                <a:off x="2943585" y="1649414"/>
+                <a:off x="1060810" y="1649414"/>
                 <a:ext cx="304800" cy="307777"/>
               </a:xfrm>
               <a:prstGeom prst="rect">
@@ -43014,7 +40993,7 @@
             </p:nvSpPr>
             <p:spPr>
               <a:xfrm>
-                <a:off x="2983564" y="2373198"/>
+                <a:off x="1100789" y="2373198"/>
                 <a:ext cx="304800" cy="324384"/>
               </a:xfrm>
               <a:prstGeom prst="rect">
@@ -43093,7 +41072,7 @@
             </p:nvSpPr>
             <p:spPr>
               <a:xfrm>
-                <a:off x="2983564" y="2373198"/>
+                <a:off x="1100789" y="2373198"/>
                 <a:ext cx="304800" cy="324384"/>
               </a:xfrm>
               <a:prstGeom prst="rect">
@@ -43363,7 +41342,7 @@
         </p:nvSpPr>
         <p:spPr>
           <a:xfrm>
-            <a:off x="7673032" y="1679911"/>
+            <a:off x="5790257" y="1679911"/>
             <a:ext cx="252450" cy="252000"/>
           </a:xfrm>
           <a:prstGeom prst="ellipse">
@@ -43417,7 +41396,7 @@
         </p:nvSpPr>
         <p:spPr>
           <a:xfrm>
-            <a:off x="7477640" y="1479842"/>
+            <a:off x="5594865" y="1479842"/>
             <a:ext cx="177024" cy="307777"/>
           </a:xfrm>
           <a:prstGeom prst="rect">
@@ -43455,7 +41434,7 @@
         </p:nvCxnSpPr>
         <p:spPr>
           <a:xfrm>
-            <a:off x="7014280" y="1805911"/>
+            <a:off x="5131505" y="1805911"/>
             <a:ext cx="648000" cy="0"/>
           </a:xfrm>
           <a:prstGeom prst="straightConnector1">
@@ -43499,7 +41478,7 @@
         </p:nvSpPr>
         <p:spPr>
           <a:xfrm>
-            <a:off x="7668221" y="2409390"/>
+            <a:off x="5785446" y="2409390"/>
             <a:ext cx="252450" cy="252000"/>
           </a:xfrm>
           <a:prstGeom prst="ellipse">
@@ -43553,7 +41532,7 @@
         </p:nvSpPr>
         <p:spPr>
           <a:xfrm>
-            <a:off x="7475835" y="2213968"/>
+            <a:off x="5593060" y="2213968"/>
             <a:ext cx="177024" cy="307777"/>
           </a:xfrm>
           <a:prstGeom prst="rect">
@@ -43591,7 +41570,7 @@
         </p:nvCxnSpPr>
         <p:spPr>
           <a:xfrm>
-            <a:off x="7012475" y="2540037"/>
+            <a:off x="5129700" y="2540037"/>
             <a:ext cx="648000" cy="0"/>
           </a:xfrm>
           <a:prstGeom prst="straightConnector1">
@@ -43635,7 +41614,7 @@
             </p:nvSpPr>
             <p:spPr>
               <a:xfrm>
-                <a:off x="7183575" y="746907"/>
+                <a:off x="5300800" y="746907"/>
                 <a:ext cx="1231364" cy="424802"/>
               </a:xfrm>
               <a:prstGeom prst="roundRect">
@@ -43848,7 +41827,7 @@
             </p:nvSpPr>
             <p:spPr>
               <a:xfrm>
-                <a:off x="7183575" y="746907"/>
+                <a:off x="5300800" y="746907"/>
                 <a:ext cx="1231364" cy="424802"/>
               </a:xfrm>
               <a:prstGeom prst="roundRect">
@@ -43902,7 +41881,7 @@
         </p:nvCxnSpPr>
         <p:spPr>
           <a:xfrm>
-            <a:off x="7799257" y="1171709"/>
+            <a:off x="5916482" y="1171709"/>
             <a:ext cx="0" cy="504000"/>
           </a:xfrm>
           <a:prstGeom prst="straightConnector1">
@@ -43944,7 +41923,7 @@
         </p:nvSpPr>
         <p:spPr>
           <a:xfrm>
-            <a:off x="7839597" y="1479838"/>
+            <a:off x="5956822" y="1479838"/>
             <a:ext cx="177024" cy="307777"/>
           </a:xfrm>
           <a:prstGeom prst="rect">
@@ -43982,7 +41961,7 @@
             </p:nvSpPr>
             <p:spPr>
               <a:xfrm>
-                <a:off x="7180765" y="3165967"/>
+                <a:off x="5297990" y="3165967"/>
                 <a:ext cx="1231364" cy="424802"/>
               </a:xfrm>
               <a:prstGeom prst="roundRect">
@@ -44271,7 +42250,7 @@
             </p:nvSpPr>
             <p:spPr>
               <a:xfrm>
-                <a:off x="7180765" y="3165967"/>
+                <a:off x="5297990" y="3165967"/>
                 <a:ext cx="1231364" cy="424802"/>
               </a:xfrm>
               <a:prstGeom prst="roundRect">
@@ -44324,7 +42303,7 @@
         </p:nvCxnSpPr>
         <p:spPr>
           <a:xfrm flipH="1" flipV="1">
-            <a:off x="7794446" y="2661390"/>
+            <a:off x="5911671" y="2661390"/>
             <a:ext cx="2001" cy="504577"/>
           </a:xfrm>
           <a:prstGeom prst="straightConnector1">
@@ -44366,7 +42345,7 @@
         </p:nvSpPr>
         <p:spPr>
           <a:xfrm>
-            <a:off x="7858608" y="2543141"/>
+            <a:off x="5975833" y="2543141"/>
             <a:ext cx="177024" cy="307777"/>
           </a:xfrm>
           <a:prstGeom prst="rect">
@@ -44388,6 +42367,553 @@
           </a:p>
         </p:txBody>
       </p:sp>
+      <mc:AlternateContent xmlns:mc="http://schemas.openxmlformats.org/markup-compatibility/2006">
+        <mc:Choice xmlns:a14="http://schemas.microsoft.com/office/drawing/2010/main" Requires="a14">
+          <p:sp>
+            <p:nvSpPr>
+              <p:cNvPr id="2" name="TextBox 1">
+                <a:extLst>
+                  <a:ext uri="{FF2B5EF4-FFF2-40B4-BE49-F238E27FC236}">
+                    <a16:creationId xmlns:a16="http://schemas.microsoft.com/office/drawing/2014/main" id="{98CEFAFE-3B82-D97E-78C1-1BDB01D7DFEE}"/>
+                  </a:ext>
+                </a:extLst>
+              </p:cNvPr>
+              <p:cNvSpPr txBox="1"/>
+              <p:nvPr/>
+            </p:nvSpPr>
+            <p:spPr>
+              <a:xfrm>
+                <a:off x="7954400" y="1504484"/>
+                <a:ext cx="304800" cy="322845"/>
+              </a:xfrm>
+              <a:prstGeom prst="rect">
+                <a:avLst/>
+              </a:prstGeom>
+              <a:noFill/>
+            </p:spPr>
+            <p:txBody>
+              <a:bodyPr wrap="square" rtlCol="0">
+                <a:spAutoFit/>
+              </a:bodyPr>
+              <a:lstStyle/>
+              <a:p>
+                <a:pPr/>
+                <a14:m>
+                  <m:oMathPara xmlns:m="http://schemas.openxmlformats.org/officeDocument/2006/math">
+                    <m:oMath>
+                      <m:sSubSup>
+                        <m:sSubSupPr>
+                          <m:ctrlPr>
+                            <a:rPr lang="en-US" sz="1400" i="1" smtClean="0">
+                              <a:latin typeface="Cambria Math" panose="02040503050406030204" pitchFamily="18" charset="0"/>
+                            </a:rPr>
+                          </m:ctrlPr>
+                        </m:sSubSupPr>
+                        <m:e>
+                          <m:r>
+                            <a:rPr lang="en-US" sz="1400" i="1" smtClean="0">
+                              <a:latin typeface="Cambria Math" panose="02040503050406030204" pitchFamily="18" charset="0"/>
+                            </a:rPr>
+                            <m:t>𝑣</m:t>
+                          </m:r>
+                        </m:e>
+                        <m:sub>
+                          <m:r>
+                            <a:rPr lang="en-US" sz="1400" i="1" smtClean="0">
+                              <a:latin typeface="Cambria Math" panose="02040503050406030204" pitchFamily="18" charset="0"/>
+                            </a:rPr>
+                            <m:t>𝑑</m:t>
+                          </m:r>
+                          <m:r>
+                            <a:rPr lang="en-US" sz="1400" i="1" smtClean="0">
+                              <a:latin typeface="Cambria Math" panose="02040503050406030204" pitchFamily="18" charset="0"/>
+                            </a:rPr>
+                            <m:t>,</m:t>
+                          </m:r>
+                          <m:r>
+                            <a:rPr lang="en-US" sz="1400" i="1" smtClean="0">
+                              <a:latin typeface="Cambria Math" panose="02040503050406030204" pitchFamily="18" charset="0"/>
+                            </a:rPr>
+                            <m:t>𝑠𝑎𝑡</m:t>
+                          </m:r>
+                        </m:sub>
+                        <m:sup>
+                          <m:r>
+                            <a:rPr lang="en-US" sz="1400" i="1" smtClean="0">
+                              <a:latin typeface="Cambria Math" panose="02040503050406030204" pitchFamily="18" charset="0"/>
+                            </a:rPr>
+                            <m:t>∗</m:t>
+                          </m:r>
+                        </m:sup>
+                      </m:sSubSup>
+                    </m:oMath>
+                  </m:oMathPara>
+                </a14:m>
+                <a:endParaRPr lang="en-US" sz="1400" dirty="0">
+                  <a:latin typeface="Times New Roman" panose="02020603050405020304" pitchFamily="18" charset="0"/>
+                  <a:cs typeface="Times New Roman" panose="02020603050405020304" pitchFamily="18" charset="0"/>
+                </a:endParaRPr>
+              </a:p>
+            </p:txBody>
+          </p:sp>
+        </mc:Choice>
+        <mc:Fallback>
+          <p:sp>
+            <p:nvSpPr>
+              <p:cNvPr id="2" name="TextBox 1">
+                <a:extLst>
+                  <a:ext uri="{FF2B5EF4-FFF2-40B4-BE49-F238E27FC236}">
+                    <a16:creationId xmlns:a16="http://schemas.microsoft.com/office/drawing/2014/main" id="{98CEFAFE-3B82-D97E-78C1-1BDB01D7DFEE}"/>
+                  </a:ext>
+                </a:extLst>
+              </p:cNvPr>
+              <p:cNvSpPr txBox="1">
+                <a:spLocks noRot="1" noChangeAspect="1" noMove="1" noResize="1" noEditPoints="1" noAdjustHandles="1" noChangeArrowheads="1" noChangeShapeType="1" noTextEdit="1"/>
+              </p:cNvSpPr>
+              <p:nvPr/>
+            </p:nvSpPr>
+            <p:spPr>
+              <a:xfrm>
+                <a:off x="7954400" y="1504484"/>
+                <a:ext cx="304800" cy="322845"/>
+              </a:xfrm>
+              <a:prstGeom prst="rect">
+                <a:avLst/>
+              </a:prstGeom>
+              <a:blipFill>
+                <a:blip r:embed="rId30"/>
+                <a:stretch>
+                  <a:fillRect r="-76000"/>
+                </a:stretch>
+              </a:blipFill>
+            </p:spPr>
+            <p:txBody>
+              <a:bodyPr/>
+              <a:lstStyle/>
+              <a:p>
+                <a:r>
+                  <a:rPr lang="en-CA">
+                    <a:noFill/>
+                  </a:rPr>
+                  <a:t> </a:t>
+                </a:r>
+              </a:p>
+            </p:txBody>
+          </p:sp>
+        </mc:Fallback>
+      </mc:AlternateContent>
+      <mc:AlternateContent xmlns:mc="http://schemas.openxmlformats.org/markup-compatibility/2006">
+        <mc:Choice xmlns:a14="http://schemas.microsoft.com/office/drawing/2010/main" Requires="a14">
+          <p:sp>
+            <p:nvSpPr>
+              <p:cNvPr id="6" name="TextBox 5">
+                <a:extLst>
+                  <a:ext uri="{FF2B5EF4-FFF2-40B4-BE49-F238E27FC236}">
+                    <a16:creationId xmlns:a16="http://schemas.microsoft.com/office/drawing/2014/main" id="{182779DB-9EA1-9B68-79CC-9C77E6451159}"/>
+                  </a:ext>
+                </a:extLst>
+              </p:cNvPr>
+              <p:cNvSpPr txBox="1"/>
+              <p:nvPr/>
+            </p:nvSpPr>
+            <p:spPr>
+              <a:xfrm>
+                <a:off x="7941700" y="2237191"/>
+                <a:ext cx="304800" cy="329064"/>
+              </a:xfrm>
+              <a:prstGeom prst="rect">
+                <a:avLst/>
+              </a:prstGeom>
+              <a:noFill/>
+            </p:spPr>
+            <p:txBody>
+              <a:bodyPr wrap="square" rtlCol="0">
+                <a:spAutoFit/>
+              </a:bodyPr>
+              <a:lstStyle/>
+              <a:p>
+                <a:pPr/>
+                <a14:m>
+                  <m:oMathPara xmlns:m="http://schemas.openxmlformats.org/officeDocument/2006/math">
+                    <m:oMath>
+                      <m:sSubSup>
+                        <m:sSubSupPr>
+                          <m:ctrlPr>
+                            <a:rPr lang="en-US" sz="1400" i="1">
+                              <a:latin typeface="Cambria Math" panose="02040503050406030204" pitchFamily="18" charset="0"/>
+                            </a:rPr>
+                          </m:ctrlPr>
+                        </m:sSubSupPr>
+                        <m:e>
+                          <m:r>
+                            <a:rPr lang="en-US" sz="1400" i="1">
+                              <a:latin typeface="Cambria Math" panose="02040503050406030204" pitchFamily="18" charset="0"/>
+                            </a:rPr>
+                            <m:t>𝑣</m:t>
+                          </m:r>
+                        </m:e>
+                        <m:sub>
+                          <m:r>
+                            <m:rPr>
+                              <m:sty m:val="p"/>
+                            </m:rPr>
+                            <a:rPr lang="en-US" sz="1400" b="0" i="1" smtClean="0">
+                              <a:latin typeface="Cambria Math" panose="02040503050406030204" pitchFamily="18" charset="0"/>
+                            </a:rPr>
+                            <m:t>q</m:t>
+                          </m:r>
+                          <m:r>
+                            <a:rPr lang="en-US" sz="1400" b="0" i="1" smtClean="0">
+                              <a:latin typeface="Cambria Math" panose="02040503050406030204" pitchFamily="18" charset="0"/>
+                              <a:ea typeface="Cambria Math" panose="02040503050406030204" pitchFamily="18" charset="0"/>
+                            </a:rPr>
+                            <m:t>,</m:t>
+                          </m:r>
+                          <m:r>
+                            <m:rPr>
+                              <m:sty m:val="p"/>
+                            </m:rPr>
+                            <a:rPr lang="en-US" sz="1400" b="0" i="1" smtClean="0">
+                              <a:latin typeface="Cambria Math" panose="02040503050406030204" pitchFamily="18" charset="0"/>
+                              <a:ea typeface="Cambria Math" panose="02040503050406030204" pitchFamily="18" charset="0"/>
+                            </a:rPr>
+                            <m:t>sat</m:t>
+                          </m:r>
+                        </m:sub>
+                        <m:sup>
+                          <m:r>
+                            <a:rPr lang="en-US" sz="1400" i="1">
+                              <a:latin typeface="Cambria Math" panose="02040503050406030204" pitchFamily="18" charset="0"/>
+                            </a:rPr>
+                            <m:t>∗</m:t>
+                          </m:r>
+                        </m:sup>
+                      </m:sSubSup>
+                    </m:oMath>
+                  </m:oMathPara>
+                </a14:m>
+                <a:endParaRPr lang="en-US" sz="1400" dirty="0">
+                  <a:latin typeface="Times New Roman" panose="02020603050405020304" pitchFamily="18" charset="0"/>
+                  <a:cs typeface="Times New Roman" panose="02020603050405020304" pitchFamily="18" charset="0"/>
+                </a:endParaRPr>
+              </a:p>
+            </p:txBody>
+          </p:sp>
+        </mc:Choice>
+        <mc:Fallback>
+          <p:sp>
+            <p:nvSpPr>
+              <p:cNvPr id="6" name="TextBox 5">
+                <a:extLst>
+                  <a:ext uri="{FF2B5EF4-FFF2-40B4-BE49-F238E27FC236}">
+                    <a16:creationId xmlns:a16="http://schemas.microsoft.com/office/drawing/2014/main" id="{182779DB-9EA1-9B68-79CC-9C77E6451159}"/>
+                  </a:ext>
+                </a:extLst>
+              </p:cNvPr>
+              <p:cNvSpPr txBox="1">
+                <a:spLocks noRot="1" noChangeAspect="1" noMove="1" noResize="1" noEditPoints="1" noAdjustHandles="1" noChangeArrowheads="1" noChangeShapeType="1" noTextEdit="1"/>
+              </p:cNvSpPr>
+              <p:nvPr/>
+            </p:nvSpPr>
+            <p:spPr>
+              <a:xfrm>
+                <a:off x="7941700" y="2237191"/>
+                <a:ext cx="304800" cy="329064"/>
+              </a:xfrm>
+              <a:prstGeom prst="rect">
+                <a:avLst/>
+              </a:prstGeom>
+              <a:blipFill>
+                <a:blip r:embed="rId31"/>
+                <a:stretch>
+                  <a:fillRect r="-70000"/>
+                </a:stretch>
+              </a:blipFill>
+            </p:spPr>
+            <p:txBody>
+              <a:bodyPr/>
+              <a:lstStyle/>
+              <a:p>
+                <a:r>
+                  <a:rPr lang="en-CA">
+                    <a:noFill/>
+                  </a:rPr>
+                  <a:t> </a:t>
+                </a:r>
+              </a:p>
+            </p:txBody>
+          </p:sp>
+        </mc:Fallback>
+      </mc:AlternateContent>
+      <p:cxnSp>
+        <p:nvCxnSpPr>
+          <p:cNvPr id="9" name="Straight Arrow Connector 8">
+            <a:extLst>
+              <a:ext uri="{FF2B5EF4-FFF2-40B4-BE49-F238E27FC236}">
+                <a16:creationId xmlns:a16="http://schemas.microsoft.com/office/drawing/2014/main" id="{CD4093AA-D09B-88FA-F187-87CF36C8E740}"/>
+              </a:ext>
+            </a:extLst>
+          </p:cNvPr>
+          <p:cNvCxnSpPr>
+            <a:cxnSpLocks/>
+          </p:cNvCxnSpPr>
+          <p:nvPr/>
+        </p:nvCxnSpPr>
+        <p:spPr>
+          <a:xfrm>
+            <a:off x="7933544" y="1806193"/>
+            <a:ext cx="648000" cy="0"/>
+          </a:xfrm>
+          <a:prstGeom prst="straightConnector1">
+            <a:avLst/>
+          </a:prstGeom>
+          <a:ln>
+            <a:solidFill>
+              <a:schemeClr val="tx1"/>
+            </a:solidFill>
+            <a:tailEnd type="triangle" w="med" len="lg"/>
+          </a:ln>
+        </p:spPr>
+        <p:style>
+          <a:lnRef idx="2">
+            <a:schemeClr val="accent1"/>
+          </a:lnRef>
+          <a:fillRef idx="0">
+            <a:schemeClr val="accent1"/>
+          </a:fillRef>
+          <a:effectRef idx="1">
+            <a:schemeClr val="accent1"/>
+          </a:effectRef>
+          <a:fontRef idx="minor">
+            <a:schemeClr val="tx1"/>
+          </a:fontRef>
+        </p:style>
+      </p:cxnSp>
+      <p:cxnSp>
+        <p:nvCxnSpPr>
+          <p:cNvPr id="10" name="Straight Arrow Connector 9">
+            <a:extLst>
+              <a:ext uri="{FF2B5EF4-FFF2-40B4-BE49-F238E27FC236}">
+                <a16:creationId xmlns:a16="http://schemas.microsoft.com/office/drawing/2014/main" id="{8C01ACE9-3AE1-EC54-AD62-932D7652A471}"/>
+              </a:ext>
+            </a:extLst>
+          </p:cNvPr>
+          <p:cNvCxnSpPr>
+            <a:cxnSpLocks/>
+          </p:cNvCxnSpPr>
+          <p:nvPr/>
+        </p:nvCxnSpPr>
+        <p:spPr>
+          <a:xfrm>
+            <a:off x="7933544" y="2566890"/>
+            <a:ext cx="648000" cy="0"/>
+          </a:xfrm>
+          <a:prstGeom prst="straightConnector1">
+            <a:avLst/>
+          </a:prstGeom>
+          <a:ln>
+            <a:solidFill>
+              <a:schemeClr val="tx1"/>
+            </a:solidFill>
+            <a:tailEnd type="triangle" w="med" len="lg"/>
+          </a:ln>
+        </p:spPr>
+        <p:style>
+          <a:lnRef idx="2">
+            <a:schemeClr val="accent1"/>
+          </a:lnRef>
+          <a:fillRef idx="0">
+            <a:schemeClr val="accent1"/>
+          </a:fillRef>
+          <a:effectRef idx="1">
+            <a:schemeClr val="accent1"/>
+          </a:effectRef>
+          <a:fontRef idx="minor">
+            <a:schemeClr val="tx1"/>
+          </a:fontRef>
+        </p:style>
+      </p:cxnSp>
+      <p:sp>
+        <p:nvSpPr>
+          <p:cNvPr id="12" name="Rectangle: Rounded Corners 11">
+            <a:extLst>
+              <a:ext uri="{FF2B5EF4-FFF2-40B4-BE49-F238E27FC236}">
+                <a16:creationId xmlns:a16="http://schemas.microsoft.com/office/drawing/2014/main" id="{4D655FCA-0336-CE24-B8B2-373178ECBFC3}"/>
+              </a:ext>
+            </a:extLst>
+          </p:cNvPr>
+          <p:cNvSpPr>
+            <a:spLocks noChangeAspect="1"/>
+          </p:cNvSpPr>
+          <p:nvPr/>
+        </p:nvSpPr>
+        <p:spPr>
+          <a:xfrm>
+            <a:off x="6697230" y="1568689"/>
+            <a:ext cx="1231364" cy="1231364"/>
+          </a:xfrm>
+          <a:prstGeom prst="roundRect">
+            <a:avLst>
+              <a:gd name="adj" fmla="val 6196"/>
+            </a:avLst>
+          </a:prstGeom>
+          <a:solidFill>
+            <a:schemeClr val="tx2">
+              <a:lumMod val="25000"/>
+              <a:lumOff val="75000"/>
+            </a:schemeClr>
+          </a:solidFill>
+          <a:ln w="19050">
+            <a:solidFill>
+              <a:schemeClr val="tx2">
+                <a:lumMod val="75000"/>
+                <a:lumOff val="25000"/>
+              </a:schemeClr>
+            </a:solidFill>
+          </a:ln>
+        </p:spPr>
+        <p:style>
+          <a:lnRef idx="2">
+            <a:schemeClr val="accent1">
+              <a:shade val="15000"/>
+            </a:schemeClr>
+          </a:lnRef>
+          <a:fillRef idx="1">
+            <a:schemeClr val="accent1"/>
+          </a:fillRef>
+          <a:effectRef idx="0">
+            <a:schemeClr val="accent1"/>
+          </a:effectRef>
+          <a:fontRef idx="minor">
+            <a:schemeClr val="lt1"/>
+          </a:fontRef>
+        </p:style>
+        <p:txBody>
+          <a:bodyPr rtlCol="0" anchor="t" anchorCtr="0"/>
+          <a:lstStyle/>
+          <a:p>
+            <a:pPr algn="ctr"/>
+            <a:r>
+              <a:rPr lang="en-US" sz="1400" b="1" dirty="0">
+                <a:solidFill>
+                  <a:schemeClr val="tx1"/>
+                </a:solidFill>
+                <a:latin typeface="Times New Roman" panose="02020603050405020304" pitchFamily="18" charset="0"/>
+                <a:cs typeface="Times New Roman" panose="02020603050405020304" pitchFamily="18" charset="0"/>
+              </a:rPr>
+              <a:t>Limiting &amp; Anti-Windup</a:t>
+            </a:r>
+          </a:p>
+        </p:txBody>
+      </p:sp>
+      <p:pic>
+        <p:nvPicPr>
+          <p:cNvPr id="16" name="Graphic 15">
+            <a:extLst>
+              <a:ext uri="{FF2B5EF4-FFF2-40B4-BE49-F238E27FC236}">
+                <a16:creationId xmlns:a16="http://schemas.microsoft.com/office/drawing/2014/main" id="{9419EBBC-2800-E5DB-90F0-B6ACC34F1D2E}"/>
+              </a:ext>
+            </a:extLst>
+          </p:cNvPr>
+          <p:cNvPicPr>
+            <a:picLocks noChangeAspect="1"/>
+          </p:cNvPicPr>
+          <p:nvPr/>
+        </p:nvPicPr>
+        <p:blipFill>
+          <a:blip>
+            <a:extLst>
+              <a:ext uri="{96DAC541-7B7A-43D3-8B79-37D633B846F1}">
+                <asvg:svgBlip xmlns:asvg="http://schemas.microsoft.com/office/drawing/2016/SVG/main" r:embed="rId32"/>
+              </a:ext>
+            </a:extLst>
+          </a:blip>
+          <a:stretch>
+            <a:fillRect/>
+          </a:stretch>
+        </p:blipFill>
+        <p:spPr>
+          <a:xfrm>
+            <a:off x="6987291" y="2292389"/>
+            <a:ext cx="648001" cy="486001"/>
+          </a:xfrm>
+          <a:prstGeom prst="rect">
+            <a:avLst/>
+          </a:prstGeom>
+        </p:spPr>
+      </p:pic>
+      <p:pic>
+        <p:nvPicPr>
+          <p:cNvPr id="35" name="Graphic 34">
+            <a:extLst>
+              <a:ext uri="{FF2B5EF4-FFF2-40B4-BE49-F238E27FC236}">
+                <a16:creationId xmlns:a16="http://schemas.microsoft.com/office/drawing/2014/main" id="{F3F74100-3D35-8EED-35FF-543C90B32F60}"/>
+              </a:ext>
+            </a:extLst>
+          </p:cNvPr>
+          <p:cNvPicPr>
+            <a:picLocks noChangeAspect="1"/>
+          </p:cNvPicPr>
+          <p:nvPr/>
+        </p:nvPicPr>
+        <p:blipFill>
+          <a:blip>
+            <a:extLst>
+              <a:ext uri="{96DAC541-7B7A-43D3-8B79-37D633B846F1}">
+                <asvg:svgBlip xmlns:asvg="http://schemas.microsoft.com/office/drawing/2016/SVG/main" r:embed="rId33"/>
+              </a:ext>
+            </a:extLst>
+          </a:blip>
+          <a:stretch>
+            <a:fillRect/>
+          </a:stretch>
+        </p:blipFill>
+        <p:spPr>
+          <a:xfrm>
+            <a:off x="12573985" y="2064571"/>
+            <a:ext cx="804444" cy="724000"/>
+          </a:xfrm>
+          <a:prstGeom prst="rect">
+            <a:avLst/>
+          </a:prstGeom>
+        </p:spPr>
+      </p:pic>
+      <p:pic>
+        <p:nvPicPr>
+          <p:cNvPr id="27" name="Graphic 26">
+            <a:extLst>
+              <a:ext uri="{FF2B5EF4-FFF2-40B4-BE49-F238E27FC236}">
+                <a16:creationId xmlns:a16="http://schemas.microsoft.com/office/drawing/2014/main" id="{FB5F763B-DE25-DBD5-69DC-963823604429}"/>
+              </a:ext>
+            </a:extLst>
+          </p:cNvPr>
+          <p:cNvPicPr>
+            <a:picLocks noChangeAspect="1"/>
+          </p:cNvPicPr>
+          <p:nvPr/>
+        </p:nvPicPr>
+        <p:blipFill>
+          <a:blip>
+            <a:extLst>
+              <a:ext uri="{96DAC541-7B7A-43D3-8B79-37D633B846F1}">
+                <asvg:svgBlip xmlns:asvg="http://schemas.microsoft.com/office/drawing/2016/SVG/main" r:embed="rId34"/>
+              </a:ext>
+            </a:extLst>
+          </a:blip>
+          <a:stretch>
+            <a:fillRect/>
+          </a:stretch>
+        </p:blipFill>
+        <p:spPr>
+          <a:xfrm>
+            <a:off x="14262459" y="2034828"/>
+            <a:ext cx="1181192" cy="713104"/>
+          </a:xfrm>
+          <a:prstGeom prst="rect">
+            <a:avLst/>
+          </a:prstGeom>
+        </p:spPr>
+      </p:pic>
     </p:spTree>
     <p:extLst>
       <p:ext uri="{BB962C8B-B14F-4D97-AF65-F5344CB8AC3E}">
@@ -44943,8 +43469,8 @@
           </a:fontRef>
         </p:style>
       </p:cxnSp>
-      <mc:AlternateContent xmlns:mc="http://schemas.openxmlformats.org/markup-compatibility/2006">
-        <mc:Choice xmlns:a14="http://schemas.microsoft.com/office/drawing/2010/main" Requires="a14">
+      <mc:AlternateContent xmlns:mc="http://schemas.openxmlformats.org/markup-compatibility/2006" xmlns:a14="http://schemas.microsoft.com/office/drawing/2010/main">
+        <mc:Choice Requires="a14">
           <p:sp>
             <p:nvSpPr>
               <p:cNvPr id="2" name="TextBox 1">
@@ -44973,6 +43499,7 @@
               </a:bodyPr>
               <a:lstStyle/>
               <a:p>
+                <a:pPr/>
                 <a14:m>
                   <m:oMathPara xmlns:m="http://schemas.openxmlformats.org/officeDocument/2006/math">
                     <m:oMath>
@@ -45014,7 +43541,7 @@
             </p:txBody>
           </p:sp>
         </mc:Choice>
-        <mc:Fallback>
+        <mc:Fallback xmlns="">
           <p:sp>
             <p:nvSpPr>
               <p:cNvPr id="2" name="TextBox 1">
@@ -45059,8 +43586,8 @@
           </p:sp>
         </mc:Fallback>
       </mc:AlternateContent>
-      <mc:AlternateContent xmlns:mc="http://schemas.openxmlformats.org/markup-compatibility/2006">
-        <mc:Choice xmlns:a14="http://schemas.microsoft.com/office/drawing/2010/main" Requires="a14">
+      <mc:AlternateContent xmlns:mc="http://schemas.openxmlformats.org/markup-compatibility/2006" xmlns:a14="http://schemas.microsoft.com/office/drawing/2010/main">
+        <mc:Choice Requires="a14">
           <p:sp>
             <p:nvSpPr>
               <p:cNvPr id="4" name="TextBox 3">
@@ -45131,7 +43658,7 @@
             </p:txBody>
           </p:sp>
         </mc:Choice>
-        <mc:Fallback>
+        <mc:Fallback xmlns="">
           <p:sp>
             <p:nvSpPr>
               <p:cNvPr id="4" name="TextBox 3">
@@ -45180,754 +43707,6 @@
     <p:extLst>
       <p:ext uri="{BB962C8B-B14F-4D97-AF65-F5344CB8AC3E}">
         <p14:creationId xmlns:p14="http://schemas.microsoft.com/office/powerpoint/2010/main" val="2295387406"/>
-      </p:ext>
-    </p:extLst>
-  </p:cSld>
-  <p:clrMapOvr>
-    <a:masterClrMapping/>
-  </p:clrMapOvr>
-</p:sld>
-</file>
-
-<file path=ppt/slides/slide6.xml><?xml version="1.0" encoding="utf-8"?>
-<p:sld xmlns:a="http://schemas.openxmlformats.org/drawingml/2006/main" xmlns:r="http://schemas.openxmlformats.org/officeDocument/2006/relationships" xmlns:p="http://schemas.openxmlformats.org/presentationml/2006/main">
-  <p:cSld>
-    <p:bg>
-      <p:bgPr>
-        <a:solidFill>
-          <a:schemeClr val="bg1"/>
-        </a:solidFill>
-        <a:effectLst/>
-      </p:bgPr>
-    </p:bg>
-    <p:spTree>
-      <p:nvGrpSpPr>
-        <p:cNvPr id="1" name=""/>
-        <p:cNvGrpSpPr/>
-        <p:nvPr/>
-      </p:nvGrpSpPr>
-      <p:grpSpPr>
-        <a:xfrm>
-          <a:off x="0" y="0"/>
-          <a:ext cx="0" cy="0"/>
-          <a:chOff x="0" y="0"/>
-          <a:chExt cx="0" cy="0"/>
-        </a:xfrm>
-      </p:grpSpPr>
-      <p:sp>
-        <p:nvSpPr>
-          <p:cNvPr id="2" name="Title 1">
-            <a:extLst>
-              <a:ext uri="{FF2B5EF4-FFF2-40B4-BE49-F238E27FC236}">
-                <a16:creationId xmlns:a16="http://schemas.microsoft.com/office/drawing/2014/main" id="{97D97242-4756-E707-C3DB-403ABB52C682}"/>
-              </a:ext>
-            </a:extLst>
-          </p:cNvPr>
-          <p:cNvSpPr>
-            <a:spLocks noGrp="1"/>
-          </p:cNvSpPr>
-          <p:nvPr>
-            <p:ph type="title"/>
-          </p:nvPr>
-        </p:nvSpPr>
-        <p:spPr/>
-        <p:txBody>
-          <a:bodyPr/>
-          <a:lstStyle/>
-          <a:p>
-            <a:r>
-              <a:rPr lang="en-CA" dirty="0">
-                <a:latin typeface="Times New Roman" panose="02020603050405020304" pitchFamily="18" charset="0"/>
-                <a:cs typeface="Times New Roman" panose="02020603050405020304" pitchFamily="18" charset="0"/>
-              </a:rPr>
-              <a:t>DQ Model of Permanent Magnet Synchronous Motors (PMSMs)</a:t>
-            </a:r>
-          </a:p>
-        </p:txBody>
-      </p:sp>
-      <mc:AlternateContent xmlns:mc="http://schemas.openxmlformats.org/markup-compatibility/2006" xmlns:a14="http://schemas.microsoft.com/office/drawing/2010/main">
-        <mc:Choice Requires="a14">
-          <p:sp>
-            <p:nvSpPr>
-              <p:cNvPr id="4" name="Content Placeholder 3">
-                <a:extLst>
-                  <a:ext uri="{FF2B5EF4-FFF2-40B4-BE49-F238E27FC236}">
-                    <a16:creationId xmlns:a16="http://schemas.microsoft.com/office/drawing/2014/main" id="{703E44B7-E4E7-E4DA-2AD1-3CDB039D8C2C}"/>
-                  </a:ext>
-                </a:extLst>
-              </p:cNvPr>
-              <p:cNvSpPr txBox="1">
-                <a:spLocks noGrp="1"/>
-              </p:cNvSpPr>
-              <p:nvPr>
-                <p:ph idx="1"/>
-              </p:nvPr>
-            </p:nvSpPr>
-            <p:spPr>
-              <a:xfrm>
-                <a:off x="4589730" y="2179112"/>
-                <a:ext cx="12420071" cy="5248809"/>
-              </a:xfrm>
-              <a:prstGeom prst="rect">
-                <a:avLst/>
-              </a:prstGeom>
-              <a:noFill/>
-            </p:spPr>
-            <p:txBody>
-              <a:bodyPr wrap="square" rtlCol="0">
-                <a:spAutoFit/>
-              </a:bodyPr>
-              <a:lstStyle/>
-              <a:p>
-                <a:endParaRPr lang="en-US" i="1" dirty="0">
-                  <a:latin typeface="Cambria Math" panose="02040503050406030204" pitchFamily="18" charset="0"/>
-                </a:endParaRPr>
-              </a:p>
-              <a:p>
-                <a:pPr marL="0" indent="0">
-                  <a:buNone/>
-                </a:pPr>
-                <a:endParaRPr lang="en-US" i="1" dirty="0">
-                  <a:latin typeface="Cambria Math" panose="02040503050406030204" pitchFamily="18" charset="0"/>
-                </a:endParaRPr>
-              </a:p>
-              <a:p>
-                <a:endParaRPr lang="en-US" i="1" dirty="0">
-                  <a:latin typeface="Cambria Math" panose="02040503050406030204" pitchFamily="18" charset="0"/>
-                </a:endParaRPr>
-              </a:p>
-              <a:p>
-                <a:pPr marL="0" indent="0">
-                  <a:buNone/>
-                </a:pPr>
-                <a14:m>
-                  <m:oMathPara xmlns:m="http://schemas.openxmlformats.org/officeDocument/2006/math">
-                    <m:oMath>
-                      <m:sSub>
-                        <m:sSubPr>
-                          <m:ctrlPr>
-                            <a:rPr lang="en-US" i="1">
-                              <a:latin typeface="Cambria Math" panose="02040503050406030204" pitchFamily="18" charset="0"/>
-                            </a:rPr>
-                          </m:ctrlPr>
-                        </m:sSubPr>
-                        <m:e>
-                          <m:r>
-                            <a:rPr lang="en-US" i="1">
-                              <a:latin typeface="Cambria Math" panose="02040503050406030204" pitchFamily="18" charset="0"/>
-                            </a:rPr>
-                            <m:t>𝑣</m:t>
-                          </m:r>
-                        </m:e>
-                        <m:sub>
-                          <m:r>
-                            <a:rPr lang="en-US" i="1">
-                              <a:latin typeface="Cambria Math" panose="02040503050406030204" pitchFamily="18" charset="0"/>
-                            </a:rPr>
-                            <m:t>𝑑</m:t>
-                          </m:r>
-                        </m:sub>
-                      </m:sSub>
-                      <m:r>
-                        <a:rPr lang="en-US" i="1">
-                          <a:latin typeface="Cambria Math" panose="02040503050406030204" pitchFamily="18" charset="0"/>
-                        </a:rPr>
-                        <m:t>=</m:t>
-                      </m:r>
-                      <m:sSub>
-                        <m:sSubPr>
-                          <m:ctrlPr>
-                            <a:rPr lang="en-US" i="1">
-                              <a:latin typeface="Cambria Math" panose="02040503050406030204" pitchFamily="18" charset="0"/>
-                            </a:rPr>
-                          </m:ctrlPr>
-                        </m:sSubPr>
-                        <m:e>
-                          <m:r>
-                            <a:rPr lang="en-US" i="1">
-                              <a:latin typeface="Cambria Math" panose="02040503050406030204" pitchFamily="18" charset="0"/>
-                            </a:rPr>
-                            <m:t>𝑅</m:t>
-                          </m:r>
-                        </m:e>
-                        <m:sub>
-                          <m:r>
-                            <a:rPr lang="en-US" i="1">
-                              <a:latin typeface="Cambria Math" panose="02040503050406030204" pitchFamily="18" charset="0"/>
-                            </a:rPr>
-                            <m:t>𝑠</m:t>
-                          </m:r>
-                        </m:sub>
-                      </m:sSub>
-                      <m:sSub>
-                        <m:sSubPr>
-                          <m:ctrlPr>
-                            <a:rPr lang="en-US" i="1">
-                              <a:latin typeface="Cambria Math" panose="02040503050406030204" pitchFamily="18" charset="0"/>
-                            </a:rPr>
-                          </m:ctrlPr>
-                        </m:sSubPr>
-                        <m:e>
-                          <m:r>
-                            <a:rPr lang="en-US" i="1">
-                              <a:latin typeface="Cambria Math" panose="02040503050406030204" pitchFamily="18" charset="0"/>
-                            </a:rPr>
-                            <m:t>𝑖</m:t>
-                          </m:r>
-                        </m:e>
-                        <m:sub>
-                          <m:r>
-                            <a:rPr lang="en-US" i="1">
-                              <a:latin typeface="Cambria Math" panose="02040503050406030204" pitchFamily="18" charset="0"/>
-                            </a:rPr>
-                            <m:t>𝑑</m:t>
-                          </m:r>
-                        </m:sub>
-                      </m:sSub>
-                      <m:r>
-                        <a:rPr lang="en-US" i="1">
-                          <a:latin typeface="Cambria Math" panose="02040503050406030204" pitchFamily="18" charset="0"/>
-                        </a:rPr>
-                        <m:t>+</m:t>
-                      </m:r>
-                      <m:sSub>
-                        <m:sSubPr>
-                          <m:ctrlPr>
-                            <a:rPr lang="en-US" i="1">
-                              <a:latin typeface="Cambria Math" panose="02040503050406030204" pitchFamily="18" charset="0"/>
-                            </a:rPr>
-                          </m:ctrlPr>
-                        </m:sSubPr>
-                        <m:e>
-                          <m:r>
-                            <a:rPr lang="en-US" i="1">
-                              <a:latin typeface="Cambria Math" panose="02040503050406030204" pitchFamily="18" charset="0"/>
-                            </a:rPr>
-                            <m:t>𝐿</m:t>
-                          </m:r>
-                        </m:e>
-                        <m:sub>
-                          <m:r>
-                            <a:rPr lang="en-US" i="1">
-                              <a:latin typeface="Cambria Math" panose="02040503050406030204" pitchFamily="18" charset="0"/>
-                            </a:rPr>
-                            <m:t>𝑑</m:t>
-                          </m:r>
-                        </m:sub>
-                      </m:sSub>
-                      <m:f>
-                        <m:fPr>
-                          <m:ctrlPr>
-                            <a:rPr lang="en-US" i="1">
-                              <a:latin typeface="Cambria Math" panose="02040503050406030204" pitchFamily="18" charset="0"/>
-                            </a:rPr>
-                          </m:ctrlPr>
-                        </m:fPr>
-                        <m:num>
-                          <m:r>
-                            <a:rPr lang="en-US" i="1">
-                              <a:latin typeface="Cambria Math" panose="02040503050406030204" pitchFamily="18" charset="0"/>
-                            </a:rPr>
-                            <m:t>𝑑</m:t>
-                          </m:r>
-                          <m:sSub>
-                            <m:sSubPr>
-                              <m:ctrlPr>
-                                <a:rPr lang="en-US" i="1">
-                                  <a:latin typeface="Cambria Math" panose="02040503050406030204" pitchFamily="18" charset="0"/>
-                                </a:rPr>
-                              </m:ctrlPr>
-                            </m:sSubPr>
-                            <m:e>
-                              <m:r>
-                                <a:rPr lang="en-US" i="1">
-                                  <a:latin typeface="Cambria Math" panose="02040503050406030204" pitchFamily="18" charset="0"/>
-                                </a:rPr>
-                                <m:t>𝑖</m:t>
-                              </m:r>
-                            </m:e>
-                            <m:sub>
-                              <m:r>
-                                <a:rPr lang="en-US" i="1">
-                                  <a:latin typeface="Cambria Math" panose="02040503050406030204" pitchFamily="18" charset="0"/>
-                                </a:rPr>
-                                <m:t>𝑑</m:t>
-                              </m:r>
-                            </m:sub>
-                          </m:sSub>
-                        </m:num>
-                        <m:den>
-                          <m:r>
-                            <a:rPr lang="en-US" i="1">
-                              <a:latin typeface="Cambria Math" panose="02040503050406030204" pitchFamily="18" charset="0"/>
-                            </a:rPr>
-                            <m:t>𝑑𝑡</m:t>
-                          </m:r>
-                        </m:den>
-                      </m:f>
-                      <m:r>
-                        <a:rPr lang="en-US" i="1">
-                          <a:latin typeface="Cambria Math" panose="02040503050406030204" pitchFamily="18" charset="0"/>
-                        </a:rPr>
-                        <m:t>−</m:t>
-                      </m:r>
-                      <m:sSub>
-                        <m:sSubPr>
-                          <m:ctrlPr>
-                            <a:rPr lang="en-US" i="1">
-                              <a:latin typeface="Cambria Math" panose="02040503050406030204" pitchFamily="18" charset="0"/>
-                            </a:rPr>
-                          </m:ctrlPr>
-                        </m:sSubPr>
-                        <m:e>
-                          <m:r>
-                            <a:rPr lang="en-US" i="1">
-                              <a:latin typeface="Cambria Math" panose="02040503050406030204" pitchFamily="18" charset="0"/>
-                            </a:rPr>
-                            <m:t>𝜔</m:t>
-                          </m:r>
-                        </m:e>
-                        <m:sub>
-                          <m:r>
-                            <a:rPr lang="en-US" i="1">
-                              <a:latin typeface="Cambria Math" panose="02040503050406030204" pitchFamily="18" charset="0"/>
-                            </a:rPr>
-                            <m:t>𝑒</m:t>
-                          </m:r>
-                        </m:sub>
-                      </m:sSub>
-                      <m:sSub>
-                        <m:sSubPr>
-                          <m:ctrlPr>
-                            <a:rPr lang="en-US" i="1">
-                              <a:latin typeface="Cambria Math" panose="02040503050406030204" pitchFamily="18" charset="0"/>
-                            </a:rPr>
-                          </m:ctrlPr>
-                        </m:sSubPr>
-                        <m:e>
-                          <m:r>
-                            <a:rPr lang="en-US" i="1">
-                              <a:latin typeface="Cambria Math" panose="02040503050406030204" pitchFamily="18" charset="0"/>
-                            </a:rPr>
-                            <m:t>𝐿</m:t>
-                          </m:r>
-                        </m:e>
-                        <m:sub>
-                          <m:r>
-                            <a:rPr lang="en-US" i="1">
-                              <a:latin typeface="Cambria Math" panose="02040503050406030204" pitchFamily="18" charset="0"/>
-                            </a:rPr>
-                            <m:t>𝑞</m:t>
-                          </m:r>
-                        </m:sub>
-                      </m:sSub>
-                      <m:sSub>
-                        <m:sSubPr>
-                          <m:ctrlPr>
-                            <a:rPr lang="en-US" i="1">
-                              <a:latin typeface="Cambria Math" panose="02040503050406030204" pitchFamily="18" charset="0"/>
-                            </a:rPr>
-                          </m:ctrlPr>
-                        </m:sSubPr>
-                        <m:e>
-                          <m:r>
-                            <a:rPr lang="en-US" i="1">
-                              <a:latin typeface="Cambria Math" panose="02040503050406030204" pitchFamily="18" charset="0"/>
-                            </a:rPr>
-                            <m:t>𝑖</m:t>
-                          </m:r>
-                        </m:e>
-                        <m:sub>
-                          <m:r>
-                            <a:rPr lang="en-US" i="1">
-                              <a:latin typeface="Cambria Math" panose="02040503050406030204" pitchFamily="18" charset="0"/>
-                            </a:rPr>
-                            <m:t>𝑞</m:t>
-                          </m:r>
-                        </m:sub>
-                      </m:sSub>
-                    </m:oMath>
-                  </m:oMathPara>
-                </a14:m>
-                <a:endParaRPr lang="en-US" dirty="0"/>
-              </a:p>
-              <a:p>
-                <a:pPr marL="0" indent="0">
-                  <a:buNone/>
-                </a:pPr>
-                <a14:m>
-                  <m:oMathPara xmlns:m="http://schemas.openxmlformats.org/officeDocument/2006/math">
-                    <m:oMath>
-                      <m:sSub>
-                        <m:sSubPr>
-                          <m:ctrlPr>
-                            <a:rPr lang="en-US" i="1">
-                              <a:latin typeface="Cambria Math" panose="02040503050406030204" pitchFamily="18" charset="0"/>
-                            </a:rPr>
-                          </m:ctrlPr>
-                        </m:sSubPr>
-                        <m:e>
-                          <m:r>
-                            <a:rPr lang="en-US" i="1">
-                              <a:latin typeface="Cambria Math" panose="02040503050406030204" pitchFamily="18" charset="0"/>
-                            </a:rPr>
-                            <m:t>𝑣</m:t>
-                          </m:r>
-                        </m:e>
-                        <m:sub>
-                          <m:r>
-                            <a:rPr lang="en-US" i="1">
-                              <a:latin typeface="Cambria Math" panose="02040503050406030204" pitchFamily="18" charset="0"/>
-                            </a:rPr>
-                            <m:t>𝑞</m:t>
-                          </m:r>
-                        </m:sub>
-                      </m:sSub>
-                      <m:r>
-                        <a:rPr lang="en-US" i="1">
-                          <a:latin typeface="Cambria Math" panose="02040503050406030204" pitchFamily="18" charset="0"/>
-                        </a:rPr>
-                        <m:t>=</m:t>
-                      </m:r>
-                      <m:sSub>
-                        <m:sSubPr>
-                          <m:ctrlPr>
-                            <a:rPr lang="en-US" i="1">
-                              <a:latin typeface="Cambria Math" panose="02040503050406030204" pitchFamily="18" charset="0"/>
-                            </a:rPr>
-                          </m:ctrlPr>
-                        </m:sSubPr>
-                        <m:e>
-                          <m:r>
-                            <a:rPr lang="en-US" i="1">
-                              <a:latin typeface="Cambria Math" panose="02040503050406030204" pitchFamily="18" charset="0"/>
-                            </a:rPr>
-                            <m:t>𝑅</m:t>
-                          </m:r>
-                        </m:e>
-                        <m:sub>
-                          <m:r>
-                            <a:rPr lang="en-US" i="1">
-                              <a:latin typeface="Cambria Math" panose="02040503050406030204" pitchFamily="18" charset="0"/>
-                            </a:rPr>
-                            <m:t>𝑠</m:t>
-                          </m:r>
-                        </m:sub>
-                      </m:sSub>
-                      <m:sSub>
-                        <m:sSubPr>
-                          <m:ctrlPr>
-                            <a:rPr lang="en-US" i="1">
-                              <a:latin typeface="Cambria Math" panose="02040503050406030204" pitchFamily="18" charset="0"/>
-                            </a:rPr>
-                          </m:ctrlPr>
-                        </m:sSubPr>
-                        <m:e>
-                          <m:r>
-                            <a:rPr lang="en-US" i="1">
-                              <a:latin typeface="Cambria Math" panose="02040503050406030204" pitchFamily="18" charset="0"/>
-                            </a:rPr>
-                            <m:t>𝑖</m:t>
-                          </m:r>
-                        </m:e>
-                        <m:sub>
-                          <m:r>
-                            <a:rPr lang="en-US" i="1">
-                              <a:latin typeface="Cambria Math" panose="02040503050406030204" pitchFamily="18" charset="0"/>
-                            </a:rPr>
-                            <m:t>𝑞</m:t>
-                          </m:r>
-                        </m:sub>
-                      </m:sSub>
-                      <m:r>
-                        <a:rPr lang="en-US" i="1">
-                          <a:latin typeface="Cambria Math" panose="02040503050406030204" pitchFamily="18" charset="0"/>
-                        </a:rPr>
-                        <m:t>+</m:t>
-                      </m:r>
-                      <m:sSub>
-                        <m:sSubPr>
-                          <m:ctrlPr>
-                            <a:rPr lang="en-US" i="1">
-                              <a:latin typeface="Cambria Math" panose="02040503050406030204" pitchFamily="18" charset="0"/>
-                            </a:rPr>
-                          </m:ctrlPr>
-                        </m:sSubPr>
-                        <m:e>
-                          <m:r>
-                            <a:rPr lang="en-US" i="1">
-                              <a:latin typeface="Cambria Math" panose="02040503050406030204" pitchFamily="18" charset="0"/>
-                            </a:rPr>
-                            <m:t>𝐿</m:t>
-                          </m:r>
-                        </m:e>
-                        <m:sub>
-                          <m:r>
-                            <a:rPr lang="en-US" i="1">
-                              <a:latin typeface="Cambria Math" panose="02040503050406030204" pitchFamily="18" charset="0"/>
-                            </a:rPr>
-                            <m:t>𝑞</m:t>
-                          </m:r>
-                        </m:sub>
-                      </m:sSub>
-                      <m:f>
-                        <m:fPr>
-                          <m:ctrlPr>
-                            <a:rPr lang="en-US" i="1">
-                              <a:latin typeface="Cambria Math" panose="02040503050406030204" pitchFamily="18" charset="0"/>
-                            </a:rPr>
-                          </m:ctrlPr>
-                        </m:fPr>
-                        <m:num>
-                          <m:r>
-                            <a:rPr lang="en-US" i="1">
-                              <a:latin typeface="Cambria Math" panose="02040503050406030204" pitchFamily="18" charset="0"/>
-                            </a:rPr>
-                            <m:t>𝑑</m:t>
-                          </m:r>
-                          <m:sSub>
-                            <m:sSubPr>
-                              <m:ctrlPr>
-                                <a:rPr lang="en-US" i="1">
-                                  <a:latin typeface="Cambria Math" panose="02040503050406030204" pitchFamily="18" charset="0"/>
-                                </a:rPr>
-                              </m:ctrlPr>
-                            </m:sSubPr>
-                            <m:e>
-                              <m:r>
-                                <a:rPr lang="en-US" i="1">
-                                  <a:latin typeface="Cambria Math" panose="02040503050406030204" pitchFamily="18" charset="0"/>
-                                </a:rPr>
-                                <m:t>𝑖</m:t>
-                              </m:r>
-                            </m:e>
-                            <m:sub>
-                              <m:r>
-                                <a:rPr lang="en-US" i="1">
-                                  <a:latin typeface="Cambria Math" panose="02040503050406030204" pitchFamily="18" charset="0"/>
-                                </a:rPr>
-                                <m:t>𝑞</m:t>
-                              </m:r>
-                            </m:sub>
-                          </m:sSub>
-                        </m:num>
-                        <m:den>
-                          <m:r>
-                            <a:rPr lang="en-US" i="1">
-                              <a:latin typeface="Cambria Math" panose="02040503050406030204" pitchFamily="18" charset="0"/>
-                            </a:rPr>
-                            <m:t>𝑑𝑡</m:t>
-                          </m:r>
-                        </m:den>
-                      </m:f>
-                      <m:r>
-                        <a:rPr lang="en-US" i="1">
-                          <a:latin typeface="Cambria Math" panose="02040503050406030204" pitchFamily="18" charset="0"/>
-                        </a:rPr>
-                        <m:t>+</m:t>
-                      </m:r>
-                      <m:sSub>
-                        <m:sSubPr>
-                          <m:ctrlPr>
-                            <a:rPr lang="en-US" i="1">
-                              <a:latin typeface="Cambria Math" panose="02040503050406030204" pitchFamily="18" charset="0"/>
-                            </a:rPr>
-                          </m:ctrlPr>
-                        </m:sSubPr>
-                        <m:e>
-                          <m:r>
-                            <a:rPr lang="en-US" i="1">
-                              <a:latin typeface="Cambria Math" panose="02040503050406030204" pitchFamily="18" charset="0"/>
-                            </a:rPr>
-                            <m:t>𝜔</m:t>
-                          </m:r>
-                        </m:e>
-                        <m:sub>
-                          <m:r>
-                            <a:rPr lang="en-US" i="1">
-                              <a:latin typeface="Cambria Math" panose="02040503050406030204" pitchFamily="18" charset="0"/>
-                            </a:rPr>
-                            <m:t>𝑒</m:t>
-                          </m:r>
-                        </m:sub>
-                      </m:sSub>
-                      <m:sSub>
-                        <m:sSubPr>
-                          <m:ctrlPr>
-                            <a:rPr lang="en-US" i="1">
-                              <a:latin typeface="Cambria Math" panose="02040503050406030204" pitchFamily="18" charset="0"/>
-                            </a:rPr>
-                          </m:ctrlPr>
-                        </m:sSubPr>
-                        <m:e>
-                          <m:r>
-                            <a:rPr lang="en-US" i="1">
-                              <a:latin typeface="Cambria Math" panose="02040503050406030204" pitchFamily="18" charset="0"/>
-                            </a:rPr>
-                            <m:t>𝐿</m:t>
-                          </m:r>
-                        </m:e>
-                        <m:sub>
-                          <m:r>
-                            <a:rPr lang="en-US" i="1">
-                              <a:latin typeface="Cambria Math" panose="02040503050406030204" pitchFamily="18" charset="0"/>
-                            </a:rPr>
-                            <m:t>𝑑</m:t>
-                          </m:r>
-                        </m:sub>
-                      </m:sSub>
-                      <m:sSub>
-                        <m:sSubPr>
-                          <m:ctrlPr>
-                            <a:rPr lang="en-US" i="1">
-                              <a:latin typeface="Cambria Math" panose="02040503050406030204" pitchFamily="18" charset="0"/>
-                            </a:rPr>
-                          </m:ctrlPr>
-                        </m:sSubPr>
-                        <m:e>
-                          <m:r>
-                            <a:rPr lang="en-US" i="1">
-                              <a:latin typeface="Cambria Math" panose="02040503050406030204" pitchFamily="18" charset="0"/>
-                            </a:rPr>
-                            <m:t>𝑖</m:t>
-                          </m:r>
-                        </m:e>
-                        <m:sub>
-                          <m:r>
-                            <a:rPr lang="en-US" i="1">
-                              <a:latin typeface="Cambria Math" panose="02040503050406030204" pitchFamily="18" charset="0"/>
-                            </a:rPr>
-                            <m:t>𝑑</m:t>
-                          </m:r>
-                        </m:sub>
-                      </m:sSub>
-                      <m:r>
-                        <a:rPr lang="en-US" i="1">
-                          <a:latin typeface="Cambria Math" panose="02040503050406030204" pitchFamily="18" charset="0"/>
-                        </a:rPr>
-                        <m:t>+</m:t>
-                      </m:r>
-                      <m:sSub>
-                        <m:sSubPr>
-                          <m:ctrlPr>
-                            <a:rPr lang="en-US" i="1">
-                              <a:latin typeface="Cambria Math" panose="02040503050406030204" pitchFamily="18" charset="0"/>
-                            </a:rPr>
-                          </m:ctrlPr>
-                        </m:sSubPr>
-                        <m:e>
-                          <m:r>
-                            <a:rPr lang="en-US" i="1">
-                              <a:latin typeface="Cambria Math" panose="02040503050406030204" pitchFamily="18" charset="0"/>
-                            </a:rPr>
-                            <m:t>𝜔</m:t>
-                          </m:r>
-                        </m:e>
-                        <m:sub>
-                          <m:r>
-                            <a:rPr lang="en-US" i="1">
-                              <a:latin typeface="Cambria Math" panose="02040503050406030204" pitchFamily="18" charset="0"/>
-                            </a:rPr>
-                            <m:t>𝑒</m:t>
-                          </m:r>
-                        </m:sub>
-                      </m:sSub>
-                      <m:sSub>
-                        <m:sSubPr>
-                          <m:ctrlPr>
-                            <a:rPr lang="en-US" i="1">
-                              <a:latin typeface="Cambria Math" panose="02040503050406030204" pitchFamily="18" charset="0"/>
-                            </a:rPr>
-                          </m:ctrlPr>
-                        </m:sSubPr>
-                        <m:e>
-                          <m:r>
-                            <a:rPr lang="en-US" i="1">
-                              <a:latin typeface="Cambria Math" panose="02040503050406030204" pitchFamily="18" charset="0"/>
-                            </a:rPr>
-                            <m:t>𝜆</m:t>
-                          </m:r>
-                        </m:e>
-                        <m:sub>
-                          <m:r>
-                            <a:rPr lang="en-US" i="1">
-                              <a:latin typeface="Cambria Math" panose="02040503050406030204" pitchFamily="18" charset="0"/>
-                            </a:rPr>
-                            <m:t>𝑚</m:t>
-                          </m:r>
-                        </m:sub>
-                      </m:sSub>
-                    </m:oMath>
-                  </m:oMathPara>
-                </a14:m>
-                <a:endParaRPr lang="en-US" dirty="0"/>
-              </a:p>
-              <a:p>
-                <a:endParaRPr lang="en-US" dirty="0"/>
-              </a:p>
-              <a:p>
-                <a:endParaRPr lang="en-US" dirty="0"/>
-              </a:p>
-              <a:p>
-                <a:endParaRPr lang="en-US" dirty="0"/>
-              </a:p>
-              <a:p>
-                <a:endParaRPr lang="en-CA" dirty="0"/>
-              </a:p>
-            </p:txBody>
-          </p:sp>
-        </mc:Choice>
-        <mc:Fallback xmlns="">
-          <p:sp>
-            <p:nvSpPr>
-              <p:cNvPr id="4" name="Content Placeholder 3">
-                <a:extLst>
-                  <a:ext uri="{FF2B5EF4-FFF2-40B4-BE49-F238E27FC236}">
-                    <a16:creationId xmlns:a16="http://schemas.microsoft.com/office/drawing/2014/main" id="{703E44B7-E4E7-E4DA-2AD1-3CDB039D8C2C}"/>
-                  </a:ext>
-                </a:extLst>
-              </p:cNvPr>
-              <p:cNvSpPr txBox="1">
-                <a:spLocks noGrp="1" noRot="1" noChangeAspect="1" noMove="1" noResize="1" noEditPoints="1" noAdjustHandles="1" noChangeArrowheads="1" noChangeShapeType="1" noTextEdit="1"/>
-              </p:cNvSpPr>
-              <p:nvPr>
-                <p:ph idx="1"/>
-              </p:nvPr>
-            </p:nvSpPr>
-            <p:spPr>
-              <a:xfrm>
-                <a:off x="4589730" y="2179112"/>
-                <a:ext cx="12420071" cy="5248809"/>
-              </a:xfrm>
-              <a:prstGeom prst="rect">
-                <a:avLst/>
-              </a:prstGeom>
-              <a:blipFill>
-                <a:blip r:embed="rId2"/>
-                <a:stretch>
-                  <a:fillRect/>
-                </a:stretch>
-              </a:blipFill>
-            </p:spPr>
-            <p:txBody>
-              <a:bodyPr/>
-              <a:lstStyle/>
-              <a:p>
-                <a:r>
-                  <a:rPr lang="en-CA">
-                    <a:noFill/>
-                  </a:rPr>
-                  <a:t> </a:t>
-                </a:r>
-              </a:p>
-            </p:txBody>
-          </p:sp>
-        </mc:Fallback>
-      </mc:AlternateContent>
-    </p:spTree>
-    <p:extLst>
-      <p:ext uri="{BB962C8B-B14F-4D97-AF65-F5344CB8AC3E}">
-        <p14:creationId xmlns:p14="http://schemas.microsoft.com/office/powerpoint/2010/main" val="3221349641"/>
       </p:ext>
     </p:extLst>
   </p:cSld>
